--- a/presentation/couverture-code-conference-dynamite.pptx
+++ b/presentation/couverture-code-conference-dynamite.pptx
@@ -5,37 +5,37 @@
     <p:sldMasterId id="2147483648" r:id="rId1"/>
   </p:sldMasterIdLst>
   <p:sldIdLst>
-    <p:sldId id="256" r:id="rId7"/>
-    <p:sldId id="257" r:id="rId8"/>
-    <p:sldId id="258" r:id="rId9"/>
-    <p:sldId id="259" r:id="rId10"/>
-    <p:sldId id="260" r:id="rId11"/>
-    <p:sldId id="261" r:id="rId12"/>
-    <p:sldId id="262" r:id="rId13"/>
-    <p:sldId id="263" r:id="rId14"/>
-    <p:sldId id="264" r:id="rId15"/>
-    <p:sldId id="265" r:id="rId16"/>
-    <p:sldId id="266" r:id="rId17"/>
-    <p:sldId id="267" r:id="rId18"/>
-    <p:sldId id="268" r:id="rId19"/>
-    <p:sldId id="269" r:id="rId20"/>
-    <p:sldId id="270" r:id="rId21"/>
-    <p:sldId id="271" r:id="rId22"/>
-    <p:sldId id="272" r:id="rId23"/>
-    <p:sldId id="273" r:id="rId24"/>
-    <p:sldId id="274" r:id="rId25"/>
-    <p:sldId id="275" r:id="rId26"/>
-    <p:sldId id="276" r:id="rId27"/>
-    <p:sldId id="277" r:id="rId28"/>
-    <p:sldId id="278" r:id="rId29"/>
-    <p:sldId id="279" r:id="rId30"/>
-    <p:sldId id="280" r:id="rId31"/>
-    <p:sldId id="281" r:id="rId32"/>
-    <p:sldId id="282" r:id="rId33"/>
-    <p:sldId id="283" r:id="rId34"/>
-    <p:sldId id="284" r:id="rId35"/>
+    <p:sldId id="256" r:id="rId2"/>
+    <p:sldId id="257" r:id="rId3"/>
+    <p:sldId id="258" r:id="rId4"/>
+    <p:sldId id="259" r:id="rId5"/>
+    <p:sldId id="260" r:id="rId6"/>
+    <p:sldId id="261" r:id="rId7"/>
+    <p:sldId id="262" r:id="rId8"/>
+    <p:sldId id="263" r:id="rId9"/>
+    <p:sldId id="264" r:id="rId10"/>
+    <p:sldId id="265" r:id="rId11"/>
+    <p:sldId id="266" r:id="rId12"/>
+    <p:sldId id="267" r:id="rId13"/>
+    <p:sldId id="268" r:id="rId14"/>
+    <p:sldId id="269" r:id="rId15"/>
+    <p:sldId id="270" r:id="rId16"/>
+    <p:sldId id="271" r:id="rId17"/>
+    <p:sldId id="272" r:id="rId18"/>
+    <p:sldId id="273" r:id="rId19"/>
+    <p:sldId id="274" r:id="rId20"/>
+    <p:sldId id="275" r:id="rId21"/>
+    <p:sldId id="276" r:id="rId22"/>
+    <p:sldId id="277" r:id="rId23"/>
+    <p:sldId id="278" r:id="rId24"/>
+    <p:sldId id="279" r:id="rId25"/>
+    <p:sldId id="280" r:id="rId26"/>
+    <p:sldId id="281" r:id="rId27"/>
+    <p:sldId id="282" r:id="rId28"/>
+    <p:sldId id="283" r:id="rId29"/>
+    <p:sldId id="284" r:id="rId30"/>
   </p:sldIdLst>
-  <p:sldSz cx="12191695" cy="6858000" type="screen4x3"/>
+  <p:sldSz cx="12192000" cy="6858000"/>
   <p:notesSz cx="6858000" cy="9144000"/>
   <p:defaultTextStyle>
     <a:defPPr>
@@ -132,6 +132,22 @@
       </a:defRPr>
     </a:lvl9pPr>
   </p:defaultTextStyle>
+  <p:extLst>
+    <p:ext uri="{EFAFB233-063F-42B5-8137-9DF3F51BA10A}">
+      <p15:sldGuideLst xmlns:p15="http://schemas.microsoft.com/office/powerpoint/2012/main">
+        <p15:guide id="1" orient="horz" pos="2160">
+          <p15:clr>
+            <a:srgbClr val="A4A3A4"/>
+          </p15:clr>
+        </p15:guide>
+        <p15:guide id="2" pos="2880">
+          <p15:clr>
+            <a:srgbClr val="A4A3A4"/>
+          </p15:clr>
+        </p15:guide>
+      </p15:sldGuideLst>
+    </p:ext>
+  </p:extLst>
 </p:presentation>
 </file>
 
@@ -173,10 +189,9 @@
           <a:lstStyle/>
           <a:p>
             <a:r>
-              <a:rPr lang="en-US" smtClean="0"/>
+              <a:rPr lang="en-US"/>
               <a:t>Click to edit Master title style</a:t>
             </a:r>
-            <a:endParaRPr lang="en-US"/>
           </a:p>
         </p:txBody>
       </p:sp>
@@ -292,10 +307,9 @@
           </a:lstStyle>
           <a:p>
             <a:r>
-              <a:rPr lang="en-US" smtClean="0"/>
+              <a:rPr lang="en-US"/>
               <a:t>Click to edit Master subtitle style</a:t>
             </a:r>
-            <a:endParaRPr lang="en-US"/>
           </a:p>
         </p:txBody>
       </p:sp>
@@ -316,7 +330,7 @@
           <a:p>
             <a:fld id="{5BCAD085-E8A6-8845-BD4E-CB4CCA059FC4}" type="datetimeFigureOut">
               <a:rPr lang="en-US" smtClean="0"/>
-              <a:t>1/27/13</a:t>
+              <a:t>9/15/26</a:t>
             </a:fld>
             <a:endParaRPr lang="en-US"/>
           </a:p>
@@ -358,7 +372,7 @@
           <a:p>
             <a:fld id="{C1FF6DA9-008F-8B48-92A6-B652298478BF}" type="slidenum">
               <a:rPr lang="en-US" smtClean="0"/>
-              <a:t>‹#›</a:t>
+              <a:t>‹N°›</a:t>
             </a:fld>
             <a:endParaRPr lang="en-US"/>
           </a:p>
@@ -410,10 +424,9 @@
           <a:lstStyle/>
           <a:p>
             <a:r>
-              <a:rPr lang="en-US" smtClean="0"/>
+              <a:rPr lang="en-US"/>
               <a:t>Click to edit Master title style</a:t>
             </a:r>
-            <a:endParaRPr lang="en-US"/>
           </a:p>
         </p:txBody>
       </p:sp>
@@ -434,38 +447,37 @@
           <a:p>
             <a:pPr lvl="0"/>
             <a:r>
-              <a:rPr lang="en-US" smtClean="0"/>
+              <a:rPr lang="en-US"/>
               <a:t>Click to edit Master text styles</a:t>
             </a:r>
           </a:p>
           <a:p>
             <a:pPr lvl="1"/>
             <a:r>
-              <a:rPr lang="en-US" smtClean="0"/>
+              <a:rPr lang="en-US"/>
               <a:t>Second level</a:t>
             </a:r>
           </a:p>
           <a:p>
             <a:pPr lvl="2"/>
             <a:r>
-              <a:rPr lang="en-US" smtClean="0"/>
+              <a:rPr lang="en-US"/>
               <a:t>Third level</a:t>
             </a:r>
           </a:p>
           <a:p>
             <a:pPr lvl="3"/>
             <a:r>
-              <a:rPr lang="en-US" smtClean="0"/>
+              <a:rPr lang="en-US"/>
               <a:t>Fourth level</a:t>
             </a:r>
           </a:p>
           <a:p>
             <a:pPr lvl="4"/>
             <a:r>
-              <a:rPr lang="en-US" smtClean="0"/>
+              <a:rPr lang="en-US"/>
               <a:t>Fifth level</a:t>
             </a:r>
-            <a:endParaRPr lang="en-US"/>
           </a:p>
         </p:txBody>
       </p:sp>
@@ -486,7 +498,7 @@
           <a:p>
             <a:fld id="{5BCAD085-E8A6-8845-BD4E-CB4CCA059FC4}" type="datetimeFigureOut">
               <a:rPr lang="en-US" smtClean="0"/>
-              <a:t>1/27/13</a:t>
+              <a:t>9/15/26</a:t>
             </a:fld>
             <a:endParaRPr lang="en-US"/>
           </a:p>
@@ -528,7 +540,7 @@
           <a:p>
             <a:fld id="{C1FF6DA9-008F-8B48-92A6-B652298478BF}" type="slidenum">
               <a:rPr lang="en-US" smtClean="0"/>
-              <a:t>‹#›</a:t>
+              <a:t>‹N°›</a:t>
             </a:fld>
             <a:endParaRPr lang="en-US"/>
           </a:p>
@@ -585,10 +597,9 @@
           <a:lstStyle/>
           <a:p>
             <a:r>
-              <a:rPr lang="en-US" smtClean="0"/>
+              <a:rPr lang="en-US"/>
               <a:t>Click to edit Master title style</a:t>
             </a:r>
-            <a:endParaRPr lang="en-US"/>
           </a:p>
         </p:txBody>
       </p:sp>
@@ -614,38 +625,37 @@
           <a:p>
             <a:pPr lvl="0"/>
             <a:r>
-              <a:rPr lang="en-US" smtClean="0"/>
+              <a:rPr lang="en-US"/>
               <a:t>Click to edit Master text styles</a:t>
             </a:r>
           </a:p>
           <a:p>
             <a:pPr lvl="1"/>
             <a:r>
-              <a:rPr lang="en-US" smtClean="0"/>
+              <a:rPr lang="en-US"/>
               <a:t>Second level</a:t>
             </a:r>
           </a:p>
           <a:p>
             <a:pPr lvl="2"/>
             <a:r>
-              <a:rPr lang="en-US" smtClean="0"/>
+              <a:rPr lang="en-US"/>
               <a:t>Third level</a:t>
             </a:r>
           </a:p>
           <a:p>
             <a:pPr lvl="3"/>
             <a:r>
-              <a:rPr lang="en-US" smtClean="0"/>
+              <a:rPr lang="en-US"/>
               <a:t>Fourth level</a:t>
             </a:r>
           </a:p>
           <a:p>
             <a:pPr lvl="4"/>
             <a:r>
-              <a:rPr lang="en-US" smtClean="0"/>
+              <a:rPr lang="en-US"/>
               <a:t>Fifth level</a:t>
             </a:r>
-            <a:endParaRPr lang="en-US"/>
           </a:p>
         </p:txBody>
       </p:sp>
@@ -666,7 +676,7 @@
           <a:p>
             <a:fld id="{5BCAD085-E8A6-8845-BD4E-CB4CCA059FC4}" type="datetimeFigureOut">
               <a:rPr lang="en-US" smtClean="0"/>
-              <a:t>1/27/13</a:t>
+              <a:t>9/15/26</a:t>
             </a:fld>
             <a:endParaRPr lang="en-US"/>
           </a:p>
@@ -708,7 +718,7 @@
           <a:p>
             <a:fld id="{C1FF6DA9-008F-8B48-92A6-B652298478BF}" type="slidenum">
               <a:rPr lang="en-US" smtClean="0"/>
-              <a:t>‹#›</a:t>
+              <a:t>‹N°›</a:t>
             </a:fld>
             <a:endParaRPr lang="en-US"/>
           </a:p>
@@ -760,10 +770,9 @@
           <a:lstStyle/>
           <a:p>
             <a:r>
-              <a:rPr lang="en-US" smtClean="0"/>
+              <a:rPr lang="en-US"/>
               <a:t>Click to edit Master title style</a:t>
             </a:r>
-            <a:endParaRPr lang="en-US"/>
           </a:p>
         </p:txBody>
       </p:sp>
@@ -784,38 +793,37 @@
           <a:p>
             <a:pPr lvl="0"/>
             <a:r>
-              <a:rPr lang="en-US" smtClean="0"/>
+              <a:rPr lang="en-US"/>
               <a:t>Click to edit Master text styles</a:t>
             </a:r>
           </a:p>
           <a:p>
             <a:pPr lvl="1"/>
             <a:r>
-              <a:rPr lang="en-US" smtClean="0"/>
+              <a:rPr lang="en-US"/>
               <a:t>Second level</a:t>
             </a:r>
           </a:p>
           <a:p>
             <a:pPr lvl="2"/>
             <a:r>
-              <a:rPr lang="en-US" smtClean="0"/>
+              <a:rPr lang="en-US"/>
               <a:t>Third level</a:t>
             </a:r>
           </a:p>
           <a:p>
             <a:pPr lvl="3"/>
             <a:r>
-              <a:rPr lang="en-US" smtClean="0"/>
+              <a:rPr lang="en-US"/>
               <a:t>Fourth level</a:t>
             </a:r>
           </a:p>
           <a:p>
             <a:pPr lvl="4"/>
             <a:r>
-              <a:rPr lang="en-US" smtClean="0"/>
+              <a:rPr lang="en-US"/>
               <a:t>Fifth level</a:t>
             </a:r>
-            <a:endParaRPr lang="en-US"/>
           </a:p>
         </p:txBody>
       </p:sp>
@@ -836,7 +844,7 @@
           <a:p>
             <a:fld id="{5BCAD085-E8A6-8845-BD4E-CB4CCA059FC4}" type="datetimeFigureOut">
               <a:rPr lang="en-US" smtClean="0"/>
-              <a:t>1/27/13</a:t>
+              <a:t>9/15/26</a:t>
             </a:fld>
             <a:endParaRPr lang="en-US"/>
           </a:p>
@@ -878,7 +886,7 @@
           <a:p>
             <a:fld id="{C1FF6DA9-008F-8B48-92A6-B652298478BF}" type="slidenum">
               <a:rPr lang="en-US" smtClean="0"/>
-              <a:t>‹#›</a:t>
+              <a:t>‹N°›</a:t>
             </a:fld>
             <a:endParaRPr lang="en-US"/>
           </a:p>
@@ -939,10 +947,9 @@
           </a:lstStyle>
           <a:p>
             <a:r>
-              <a:rPr lang="en-US" smtClean="0"/>
+              <a:rPr lang="en-US"/>
               <a:t>Click to edit Master title style</a:t>
             </a:r>
-            <a:endParaRPr lang="en-US"/>
           </a:p>
         </p:txBody>
       </p:sp>
@@ -1059,7 +1066,7 @@
           <a:p>
             <a:pPr lvl="0"/>
             <a:r>
-              <a:rPr lang="en-US" smtClean="0"/>
+              <a:rPr lang="en-US"/>
               <a:t>Click to edit Master text styles</a:t>
             </a:r>
           </a:p>
@@ -1082,7 +1089,7 @@
           <a:p>
             <a:fld id="{5BCAD085-E8A6-8845-BD4E-CB4CCA059FC4}" type="datetimeFigureOut">
               <a:rPr lang="en-US" smtClean="0"/>
-              <a:t>1/27/13</a:t>
+              <a:t>9/15/26</a:t>
             </a:fld>
             <a:endParaRPr lang="en-US"/>
           </a:p>
@@ -1124,7 +1131,7 @@
           <a:p>
             <a:fld id="{C1FF6DA9-008F-8B48-92A6-B652298478BF}" type="slidenum">
               <a:rPr lang="en-US" smtClean="0"/>
-              <a:t>‹#›</a:t>
+              <a:t>‹N°›</a:t>
             </a:fld>
             <a:endParaRPr lang="en-US"/>
           </a:p>
@@ -1176,10 +1183,9 @@
           <a:lstStyle/>
           <a:p>
             <a:r>
-              <a:rPr lang="en-US" smtClean="0"/>
+              <a:rPr lang="en-US"/>
               <a:t>Click to edit Master title style</a:t>
             </a:r>
-            <a:endParaRPr lang="en-US"/>
           </a:p>
         </p:txBody>
       </p:sp>
@@ -1233,38 +1239,37 @@
           <a:p>
             <a:pPr lvl="0"/>
             <a:r>
-              <a:rPr lang="en-US" smtClean="0"/>
+              <a:rPr lang="en-US"/>
               <a:t>Click to edit Master text styles</a:t>
             </a:r>
           </a:p>
           <a:p>
             <a:pPr lvl="1"/>
             <a:r>
-              <a:rPr lang="en-US" smtClean="0"/>
+              <a:rPr lang="en-US"/>
               <a:t>Second level</a:t>
             </a:r>
           </a:p>
           <a:p>
             <a:pPr lvl="2"/>
             <a:r>
-              <a:rPr lang="en-US" smtClean="0"/>
+              <a:rPr lang="en-US"/>
               <a:t>Third level</a:t>
             </a:r>
           </a:p>
           <a:p>
             <a:pPr lvl="3"/>
             <a:r>
-              <a:rPr lang="en-US" smtClean="0"/>
+              <a:rPr lang="en-US"/>
               <a:t>Fourth level</a:t>
             </a:r>
           </a:p>
           <a:p>
             <a:pPr lvl="4"/>
             <a:r>
-              <a:rPr lang="en-US" smtClean="0"/>
+              <a:rPr lang="en-US"/>
               <a:t>Fifth level</a:t>
             </a:r>
-            <a:endParaRPr lang="en-US"/>
           </a:p>
         </p:txBody>
       </p:sp>
@@ -1318,38 +1323,37 @@
           <a:p>
             <a:pPr lvl="0"/>
             <a:r>
-              <a:rPr lang="en-US" smtClean="0"/>
+              <a:rPr lang="en-US"/>
               <a:t>Click to edit Master text styles</a:t>
             </a:r>
           </a:p>
           <a:p>
             <a:pPr lvl="1"/>
             <a:r>
-              <a:rPr lang="en-US" smtClean="0"/>
+              <a:rPr lang="en-US"/>
               <a:t>Second level</a:t>
             </a:r>
           </a:p>
           <a:p>
             <a:pPr lvl="2"/>
             <a:r>
-              <a:rPr lang="en-US" smtClean="0"/>
+              <a:rPr lang="en-US"/>
               <a:t>Third level</a:t>
             </a:r>
           </a:p>
           <a:p>
             <a:pPr lvl="3"/>
             <a:r>
-              <a:rPr lang="en-US" smtClean="0"/>
+              <a:rPr lang="en-US"/>
               <a:t>Fourth level</a:t>
             </a:r>
           </a:p>
           <a:p>
             <a:pPr lvl="4"/>
             <a:r>
-              <a:rPr lang="en-US" smtClean="0"/>
+              <a:rPr lang="en-US"/>
               <a:t>Fifth level</a:t>
             </a:r>
-            <a:endParaRPr lang="en-US"/>
           </a:p>
         </p:txBody>
       </p:sp>
@@ -1370,7 +1374,7 @@
           <a:p>
             <a:fld id="{5BCAD085-E8A6-8845-BD4E-CB4CCA059FC4}" type="datetimeFigureOut">
               <a:rPr lang="en-US" smtClean="0"/>
-              <a:t>1/27/13</a:t>
+              <a:t>9/15/26</a:t>
             </a:fld>
             <a:endParaRPr lang="en-US"/>
           </a:p>
@@ -1412,7 +1416,7 @@
           <a:p>
             <a:fld id="{C1FF6DA9-008F-8B48-92A6-B652298478BF}" type="slidenum">
               <a:rPr lang="en-US" smtClean="0"/>
-              <a:t>‹#›</a:t>
+              <a:t>‹N°›</a:t>
             </a:fld>
             <a:endParaRPr lang="en-US"/>
           </a:p>
@@ -1468,10 +1472,9 @@
           </a:lstStyle>
           <a:p>
             <a:r>
-              <a:rPr lang="en-US" smtClean="0"/>
+              <a:rPr lang="en-US"/>
               <a:t>Click to edit Master title style</a:t>
             </a:r>
-            <a:endParaRPr lang="en-US"/>
           </a:p>
         </p:txBody>
       </p:sp>
@@ -1534,7 +1537,7 @@
           <a:p>
             <a:pPr lvl="0"/>
             <a:r>
-              <a:rPr lang="en-US" smtClean="0"/>
+              <a:rPr lang="en-US"/>
               <a:t>Click to edit Master text styles</a:t>
             </a:r>
           </a:p>
@@ -1590,38 +1593,37 @@
           <a:p>
             <a:pPr lvl="0"/>
             <a:r>
-              <a:rPr lang="en-US" smtClean="0"/>
+              <a:rPr lang="en-US"/>
               <a:t>Click to edit Master text styles</a:t>
             </a:r>
           </a:p>
           <a:p>
             <a:pPr lvl="1"/>
             <a:r>
-              <a:rPr lang="en-US" smtClean="0"/>
+              <a:rPr lang="en-US"/>
               <a:t>Second level</a:t>
             </a:r>
           </a:p>
           <a:p>
             <a:pPr lvl="2"/>
             <a:r>
-              <a:rPr lang="en-US" smtClean="0"/>
+              <a:rPr lang="en-US"/>
               <a:t>Third level</a:t>
             </a:r>
           </a:p>
           <a:p>
             <a:pPr lvl="3"/>
             <a:r>
-              <a:rPr lang="en-US" smtClean="0"/>
+              <a:rPr lang="en-US"/>
               <a:t>Fourth level</a:t>
             </a:r>
           </a:p>
           <a:p>
             <a:pPr lvl="4"/>
             <a:r>
-              <a:rPr lang="en-US" smtClean="0"/>
+              <a:rPr lang="en-US"/>
               <a:t>Fifth level</a:t>
             </a:r>
-            <a:endParaRPr lang="en-US"/>
           </a:p>
         </p:txBody>
       </p:sp>
@@ -1684,7 +1686,7 @@
           <a:p>
             <a:pPr lvl="0"/>
             <a:r>
-              <a:rPr lang="en-US" smtClean="0"/>
+              <a:rPr lang="en-US"/>
               <a:t>Click to edit Master text styles</a:t>
             </a:r>
           </a:p>
@@ -1740,38 +1742,37 @@
           <a:p>
             <a:pPr lvl="0"/>
             <a:r>
-              <a:rPr lang="en-US" smtClean="0"/>
+              <a:rPr lang="en-US"/>
               <a:t>Click to edit Master text styles</a:t>
             </a:r>
           </a:p>
           <a:p>
             <a:pPr lvl="1"/>
             <a:r>
-              <a:rPr lang="en-US" smtClean="0"/>
+              <a:rPr lang="en-US"/>
               <a:t>Second level</a:t>
             </a:r>
           </a:p>
           <a:p>
             <a:pPr lvl="2"/>
             <a:r>
-              <a:rPr lang="en-US" smtClean="0"/>
+              <a:rPr lang="en-US"/>
               <a:t>Third level</a:t>
             </a:r>
           </a:p>
           <a:p>
             <a:pPr lvl="3"/>
             <a:r>
-              <a:rPr lang="en-US" smtClean="0"/>
+              <a:rPr lang="en-US"/>
               <a:t>Fourth level</a:t>
             </a:r>
           </a:p>
           <a:p>
             <a:pPr lvl="4"/>
             <a:r>
-              <a:rPr lang="en-US" smtClean="0"/>
+              <a:rPr lang="en-US"/>
               <a:t>Fifth level</a:t>
             </a:r>
-            <a:endParaRPr lang="en-US"/>
           </a:p>
         </p:txBody>
       </p:sp>
@@ -1792,7 +1793,7 @@
           <a:p>
             <a:fld id="{5BCAD085-E8A6-8845-BD4E-CB4CCA059FC4}" type="datetimeFigureOut">
               <a:rPr lang="en-US" smtClean="0"/>
-              <a:t>1/27/13</a:t>
+              <a:t>9/15/26</a:t>
             </a:fld>
             <a:endParaRPr lang="en-US"/>
           </a:p>
@@ -1834,7 +1835,7 @@
           <a:p>
             <a:fld id="{C1FF6DA9-008F-8B48-92A6-B652298478BF}" type="slidenum">
               <a:rPr lang="en-US" smtClean="0"/>
-              <a:t>‹#›</a:t>
+              <a:t>‹N°›</a:t>
             </a:fld>
             <a:endParaRPr lang="en-US"/>
           </a:p>
@@ -1886,10 +1887,9 @@
           <a:lstStyle/>
           <a:p>
             <a:r>
-              <a:rPr lang="en-US" smtClean="0"/>
+              <a:rPr lang="en-US"/>
               <a:t>Click to edit Master title style</a:t>
             </a:r>
-            <a:endParaRPr lang="en-US"/>
           </a:p>
         </p:txBody>
       </p:sp>
@@ -1910,7 +1910,7 @@
           <a:p>
             <a:fld id="{5BCAD085-E8A6-8845-BD4E-CB4CCA059FC4}" type="datetimeFigureOut">
               <a:rPr lang="en-US" smtClean="0"/>
-              <a:t>1/27/13</a:t>
+              <a:t>9/15/26</a:t>
             </a:fld>
             <a:endParaRPr lang="en-US"/>
           </a:p>
@@ -1952,7 +1952,7 @@
           <a:p>
             <a:fld id="{C1FF6DA9-008F-8B48-92A6-B652298478BF}" type="slidenum">
               <a:rPr lang="en-US" smtClean="0"/>
-              <a:t>‹#›</a:t>
+              <a:t>‹N°›</a:t>
             </a:fld>
             <a:endParaRPr lang="en-US"/>
           </a:p>
@@ -2005,7 +2005,7 @@
           <a:p>
             <a:fld id="{5BCAD085-E8A6-8845-BD4E-CB4CCA059FC4}" type="datetimeFigureOut">
               <a:rPr lang="en-US" smtClean="0"/>
-              <a:t>1/27/13</a:t>
+              <a:t>9/15/26</a:t>
             </a:fld>
             <a:endParaRPr lang="en-US"/>
           </a:p>
@@ -2047,7 +2047,7 @@
           <a:p>
             <a:fld id="{C1FF6DA9-008F-8B48-92A6-B652298478BF}" type="slidenum">
               <a:rPr lang="en-US" smtClean="0"/>
-              <a:t>‹#›</a:t>
+              <a:t>‹N°›</a:t>
             </a:fld>
             <a:endParaRPr lang="en-US"/>
           </a:p>
@@ -2108,10 +2108,9 @@
           </a:lstStyle>
           <a:p>
             <a:r>
-              <a:rPr lang="en-US" smtClean="0"/>
+              <a:rPr lang="en-US"/>
               <a:t>Click to edit Master title style</a:t>
             </a:r>
-            <a:endParaRPr lang="en-US"/>
           </a:p>
         </p:txBody>
       </p:sp>
@@ -2165,38 +2164,37 @@
           <a:p>
             <a:pPr lvl="0"/>
             <a:r>
-              <a:rPr lang="en-US" smtClean="0"/>
+              <a:rPr lang="en-US"/>
               <a:t>Click to edit Master text styles</a:t>
             </a:r>
           </a:p>
           <a:p>
             <a:pPr lvl="1"/>
             <a:r>
-              <a:rPr lang="en-US" smtClean="0"/>
+              <a:rPr lang="en-US"/>
               <a:t>Second level</a:t>
             </a:r>
           </a:p>
           <a:p>
             <a:pPr lvl="2"/>
             <a:r>
-              <a:rPr lang="en-US" smtClean="0"/>
+              <a:rPr lang="en-US"/>
               <a:t>Third level</a:t>
             </a:r>
           </a:p>
           <a:p>
             <a:pPr lvl="3"/>
             <a:r>
-              <a:rPr lang="en-US" smtClean="0"/>
+              <a:rPr lang="en-US"/>
               <a:t>Fourth level</a:t>
             </a:r>
           </a:p>
           <a:p>
             <a:pPr lvl="4"/>
             <a:r>
-              <a:rPr lang="en-US" smtClean="0"/>
+              <a:rPr lang="en-US"/>
               <a:t>Fifth level</a:t>
             </a:r>
-            <a:endParaRPr lang="en-US"/>
           </a:p>
         </p:txBody>
       </p:sp>
@@ -2259,7 +2257,7 @@
           <a:p>
             <a:pPr lvl="0"/>
             <a:r>
-              <a:rPr lang="en-US" smtClean="0"/>
+              <a:rPr lang="en-US"/>
               <a:t>Click to edit Master text styles</a:t>
             </a:r>
           </a:p>
@@ -2282,7 +2280,7 @@
           <a:p>
             <a:fld id="{5BCAD085-E8A6-8845-BD4E-CB4CCA059FC4}" type="datetimeFigureOut">
               <a:rPr lang="en-US" smtClean="0"/>
-              <a:t>1/27/13</a:t>
+              <a:t>9/15/26</a:t>
             </a:fld>
             <a:endParaRPr lang="en-US"/>
           </a:p>
@@ -2324,7 +2322,7 @@
           <a:p>
             <a:fld id="{C1FF6DA9-008F-8B48-92A6-B652298478BF}" type="slidenum">
               <a:rPr lang="en-US" smtClean="0"/>
-              <a:t>‹#›</a:t>
+              <a:t>‹N°›</a:t>
             </a:fld>
             <a:endParaRPr lang="en-US"/>
           </a:p>
@@ -2385,10 +2383,9 @@
           </a:lstStyle>
           <a:p>
             <a:r>
-              <a:rPr lang="en-US" smtClean="0"/>
+              <a:rPr lang="en-US"/>
               <a:t>Click to edit Master title style</a:t>
             </a:r>
-            <a:endParaRPr lang="en-US"/>
           </a:p>
         </p:txBody>
       </p:sp>
@@ -2512,7 +2509,7 @@
           <a:p>
             <a:pPr lvl="0"/>
             <a:r>
-              <a:rPr lang="en-US" smtClean="0"/>
+              <a:rPr lang="en-US"/>
               <a:t>Click to edit Master text styles</a:t>
             </a:r>
           </a:p>
@@ -2535,7 +2532,7 @@
           <a:p>
             <a:fld id="{5BCAD085-E8A6-8845-BD4E-CB4CCA059FC4}" type="datetimeFigureOut">
               <a:rPr lang="en-US" smtClean="0"/>
-              <a:t>1/27/13</a:t>
+              <a:t>9/15/26</a:t>
             </a:fld>
             <a:endParaRPr lang="en-US"/>
           </a:p>
@@ -2577,7 +2574,7 @@
           <a:p>
             <a:fld id="{C1FF6DA9-008F-8B48-92A6-B652298478BF}" type="slidenum">
               <a:rPr lang="en-US" smtClean="0"/>
-              <a:t>‹#›</a:t>
+              <a:t>‹N°›</a:t>
             </a:fld>
             <a:endParaRPr lang="en-US"/>
           </a:p>
@@ -2644,10 +2641,9 @@
           <a:lstStyle/>
           <a:p>
             <a:r>
-              <a:rPr lang="en-US" smtClean="0"/>
+              <a:rPr lang="en-US"/>
               <a:t>Click to edit Master title style</a:t>
             </a:r>
-            <a:endParaRPr lang="en-US"/>
           </a:p>
         </p:txBody>
       </p:sp>
@@ -2678,38 +2674,37 @@
           <a:p>
             <a:pPr lvl="0"/>
             <a:r>
-              <a:rPr lang="en-US" smtClean="0"/>
+              <a:rPr lang="en-US"/>
               <a:t>Click to edit Master text styles</a:t>
             </a:r>
           </a:p>
           <a:p>
             <a:pPr lvl="1"/>
             <a:r>
-              <a:rPr lang="en-US" smtClean="0"/>
+              <a:rPr lang="en-US"/>
               <a:t>Second level</a:t>
             </a:r>
           </a:p>
           <a:p>
             <a:pPr lvl="2"/>
             <a:r>
-              <a:rPr lang="en-US" smtClean="0"/>
+              <a:rPr lang="en-US"/>
               <a:t>Third level</a:t>
             </a:r>
           </a:p>
           <a:p>
             <a:pPr lvl="3"/>
             <a:r>
-              <a:rPr lang="en-US" smtClean="0"/>
+              <a:rPr lang="en-US"/>
               <a:t>Fourth level</a:t>
             </a:r>
           </a:p>
           <a:p>
             <a:pPr lvl="4"/>
             <a:r>
-              <a:rPr lang="en-US" smtClean="0"/>
+              <a:rPr lang="en-US"/>
               <a:t>Fifth level</a:t>
             </a:r>
-            <a:endParaRPr lang="en-US"/>
           </a:p>
         </p:txBody>
       </p:sp>
@@ -2748,7 +2743,7 @@
           <a:p>
             <a:fld id="{5BCAD085-E8A6-8845-BD4E-CB4CCA059FC4}" type="datetimeFigureOut">
               <a:rPr lang="en-US" smtClean="0"/>
-              <a:t>1/27/13</a:t>
+              <a:t>9/15/26</a:t>
             </a:fld>
             <a:endParaRPr lang="en-US"/>
           </a:p>
@@ -2826,7 +2821,7 @@
           <a:p>
             <a:fld id="{C1FF6DA9-008F-8B48-92A6-B652298478BF}" type="slidenum">
               <a:rPr lang="en-US" smtClean="0"/>
-              <a:t>‹#›</a:t>
+              <a:t>‹N°›</a:t>
             </a:fld>
             <a:endParaRPr lang="en-US"/>
           </a:p>
@@ -3107,7 +3102,7 @@
 </file>
 
 <file path=ppt/slides/slide1.xml><?xml version="1.0" encoding="utf-8"?>
-<p:sld xmlns:a="http://schemas.openxmlformats.org/drawingml/2006/main" xmlns:p="http://schemas.openxmlformats.org/presentationml/2006/main" xmlns:r="http://schemas.openxmlformats.org/officeDocument/2006/relationships">
+<p:sld xmlns:a="http://schemas.openxmlformats.org/drawingml/2006/main" xmlns:r="http://schemas.openxmlformats.org/officeDocument/2006/relationships" xmlns:p="http://schemas.openxmlformats.org/presentationml/2006/main">
   <p:cSld>
     <p:bg>
       <p:bgPr>
@@ -3123,7 +3118,14 @@
         <p:cNvGrpSpPr/>
         <p:nvPr/>
       </p:nvGrpSpPr>
-      <p:grpSpPr/>
+      <p:grpSpPr>
+        <a:xfrm>
+          <a:off x="0" y="0"/>
+          <a:ext cx="0" cy="0"/>
+          <a:chOff x="0" y="0"/>
+          <a:chExt cx="0" cy="0"/>
+        </a:xfrm>
+      </p:grpSpPr>
       <p:sp>
         <p:nvSpPr>
           <p:cNvPr id="2" name="Parallelogram 1"/>
@@ -3165,6 +3167,7 @@
           <a:lstStyle/>
           <a:p>
             <a:pPr algn="ctr"/>
+            <a:endParaRPr/>
           </a:p>
         </p:txBody>
       </p:sp>
@@ -3209,6 +3212,7 @@
           <a:lstStyle/>
           <a:p>
             <a:pPr algn="ctr"/>
+            <a:endParaRPr/>
           </a:p>
         </p:txBody>
       </p:sp>
@@ -3253,6 +3257,7 @@
           <a:lstStyle/>
           <a:p>
             <a:pPr algn="ctr"/>
+            <a:endParaRPr/>
           </a:p>
         </p:txBody>
       </p:sp>
@@ -3297,6 +3302,7 @@
           <a:lstStyle/>
           <a:p>
             <a:pPr algn="ctr"/>
+            <a:endParaRPr/>
           </a:p>
         </p:txBody>
       </p:sp>
@@ -3341,6 +3347,7 @@
           <a:lstStyle/>
           <a:p>
             <a:pPr algn="ctr"/>
+            <a:endParaRPr/>
           </a:p>
         </p:txBody>
       </p:sp>
@@ -3385,6 +3392,7 @@
           <a:lstStyle/>
           <a:p>
             <a:pPr algn="ctr"/>
+            <a:endParaRPr/>
           </a:p>
         </p:txBody>
       </p:sp>
@@ -3429,6 +3437,7 @@
           <a:lstStyle/>
           <a:p>
             <a:pPr algn="ctr"/>
+            <a:endParaRPr/>
           </a:p>
         </p:txBody>
       </p:sp>
@@ -3473,6 +3482,7 @@
           <a:lstStyle/>
           <a:p>
             <a:pPr algn="ctr"/>
+            <a:endParaRPr/>
           </a:p>
         </p:txBody>
       </p:sp>
@@ -3517,6 +3527,7 @@
           <a:lstStyle/>
           <a:p>
             <a:pPr algn="ctr"/>
+            <a:endParaRPr/>
           </a:p>
         </p:txBody>
       </p:sp>
@@ -3561,6 +3572,7 @@
           <a:lstStyle/>
           <a:p>
             <a:pPr algn="ctr"/>
+            <a:endParaRPr/>
           </a:p>
         </p:txBody>
       </p:sp>
@@ -3605,6 +3617,7 @@
           <a:lstStyle/>
           <a:p>
             <a:pPr algn="ctr"/>
+            <a:endParaRPr/>
           </a:p>
         </p:txBody>
       </p:sp>
@@ -3649,6 +3662,7 @@
           <a:lstStyle/>
           <a:p>
             <a:pPr algn="ctr"/>
+            <a:endParaRPr/>
           </a:p>
         </p:txBody>
       </p:sp>
@@ -3693,6 +3707,7 @@
           <a:lstStyle/>
           <a:p>
             <a:pPr algn="ctr"/>
+            <a:endParaRPr/>
           </a:p>
         </p:txBody>
       </p:sp>
@@ -3737,6 +3752,7 @@
           <a:lstStyle/>
           <a:p>
             <a:pPr algn="ctr"/>
+            <a:endParaRPr/>
           </a:p>
         </p:txBody>
       </p:sp>
@@ -3781,6 +3797,7 @@
           <a:lstStyle/>
           <a:p>
             <a:pPr algn="ctr"/>
+            <a:endParaRPr/>
           </a:p>
         </p:txBody>
       </p:sp>
@@ -3825,6 +3842,7 @@
           <a:lstStyle/>
           <a:p>
             <a:pPr algn="ctr"/>
+            <a:endParaRPr/>
           </a:p>
         </p:txBody>
       </p:sp>
@@ -3869,6 +3887,7 @@
           <a:lstStyle/>
           <a:p>
             <a:pPr algn="ctr"/>
+            <a:endParaRPr/>
           </a:p>
         </p:txBody>
       </p:sp>
@@ -3913,6 +3932,7 @@
           <a:lstStyle/>
           <a:p>
             <a:pPr algn="ctr"/>
+            <a:endParaRPr/>
           </a:p>
         </p:txBody>
       </p:sp>
@@ -3957,6 +3977,7 @@
           <a:lstStyle/>
           <a:p>
             <a:pPr algn="ctr"/>
+            <a:endParaRPr/>
           </a:p>
         </p:txBody>
       </p:sp>
@@ -4001,6 +4022,7 @@
           <a:lstStyle/>
           <a:p>
             <a:pPr algn="ctr"/>
+            <a:endParaRPr/>
           </a:p>
         </p:txBody>
       </p:sp>
@@ -4045,6 +4067,7 @@
           <a:lstStyle/>
           <a:p>
             <a:pPr algn="ctr"/>
+            <a:endParaRPr/>
           </a:p>
         </p:txBody>
       </p:sp>
@@ -4089,6 +4112,7 @@
           <a:lstStyle/>
           <a:p>
             <a:pPr algn="ctr"/>
+            <a:endParaRPr/>
           </a:p>
         </p:txBody>
       </p:sp>
@@ -4133,6 +4157,7 @@
           <a:lstStyle/>
           <a:p>
             <a:pPr algn="ctr"/>
+            <a:endParaRPr/>
           </a:p>
         </p:txBody>
       </p:sp>
@@ -4177,6 +4202,7 @@
           <a:lstStyle/>
           <a:p>
             <a:pPr algn="ctr"/>
+            <a:endParaRPr/>
           </a:p>
         </p:txBody>
       </p:sp>
@@ -4221,6 +4247,7 @@
           <a:lstStyle/>
           <a:p>
             <a:pPr algn="ctr"/>
+            <a:endParaRPr/>
           </a:p>
         </p:txBody>
       </p:sp>
@@ -4265,6 +4292,7 @@
           <a:lstStyle/>
           <a:p>
             <a:pPr algn="ctr"/>
+            <a:endParaRPr/>
           </a:p>
         </p:txBody>
       </p:sp>
@@ -4309,6 +4337,7 @@
           <a:lstStyle/>
           <a:p>
             <a:pPr algn="ctr"/>
+            <a:endParaRPr/>
           </a:p>
         </p:txBody>
       </p:sp>
@@ -4353,6 +4382,7 @@
           <a:lstStyle/>
           <a:p>
             <a:pPr algn="ctr"/>
+            <a:endParaRPr/>
           </a:p>
         </p:txBody>
       </p:sp>
@@ -4397,6 +4427,7 @@
           <a:lstStyle/>
           <a:p>
             <a:pPr algn="ctr"/>
+            <a:endParaRPr/>
           </a:p>
         </p:txBody>
       </p:sp>
@@ -4441,6 +4472,7 @@
           <a:lstStyle/>
           <a:p>
             <a:pPr algn="ctr"/>
+            <a:endParaRPr/>
           </a:p>
         </p:txBody>
       </p:sp>
@@ -4485,6 +4517,7 @@
           <a:lstStyle/>
           <a:p>
             <a:pPr algn="ctr"/>
+            <a:endParaRPr/>
           </a:p>
         </p:txBody>
       </p:sp>
@@ -4529,6 +4562,7 @@
           <a:lstStyle/>
           <a:p>
             <a:pPr algn="ctr"/>
+            <a:endParaRPr/>
           </a:p>
         </p:txBody>
       </p:sp>
@@ -4549,7 +4583,7 @@
           <a:noFill/>
         </p:spPr>
         <p:txBody>
-          <a:bodyPr wrap="square" anchor="t" lIns="0" rIns="0" tIns="0" bIns="0">
+          <a:bodyPr wrap="square" lIns="0" tIns="0" rIns="0" bIns="0" anchor="t">
             <a:spAutoFit/>
           </a:bodyPr>
           <a:lstStyle/>
@@ -4583,7 +4617,7 @@
         <p:spPr>
           <a:xfrm>
             <a:off x="1097280" y="2148840"/>
-            <a:ext cx="9601200" cy="1737360"/>
+            <a:ext cx="9601200" cy="1429559"/>
           </a:xfrm>
           <a:prstGeom prst="rect">
             <a:avLst/>
@@ -4591,7 +4625,7 @@
           <a:noFill/>
         </p:spPr>
         <p:txBody>
-          <a:bodyPr wrap="square" anchor="t" lIns="0" rIns="0" tIns="0" bIns="0">
+          <a:bodyPr wrap="square" lIns="0" tIns="0" rIns="0" bIns="0" anchor="t">
             <a:spAutoFit/>
           </a:bodyPr>
           <a:lstStyle/>
@@ -4602,7 +4636,7 @@
               </a:lnSpc>
             </a:pPr>
             <a:r>
-              <a:rPr sz="4600" b="1">
+              <a:rPr sz="4600" b="1" dirty="0">
                 <a:solidFill>
                   <a:srgbClr val="F3EEE0"/>
                 </a:solidFill>
@@ -4612,14 +4646,20 @@
 </a:t>
             </a:r>
             <a:r>
-              <a:rPr sz="4600" b="1">
+              <a:rPr lang="fr-FR" sz="4600" b="1" dirty="0">
                 <a:solidFill>
                   <a:srgbClr val="FFD23F"/>
                 </a:solidFill>
                 <a:latin typeface="Helvetica Neue"/>
               </a:rPr>
-              <a:t>sans blabla</a:t>
-            </a:r>
+              <a:t>n’est jamais à 100%</a:t>
+            </a:r>
+            <a:endParaRPr sz="4600" b="1" dirty="0">
+              <a:solidFill>
+                <a:srgbClr val="FFD23F"/>
+              </a:solidFill>
+              <a:latin typeface="Helvetica Neue"/>
+            </a:endParaRPr>
           </a:p>
         </p:txBody>
       </p:sp>
@@ -4640,7 +4680,7 @@
           <a:noFill/>
         </p:spPr>
         <p:txBody>
-          <a:bodyPr wrap="square" anchor="t" lIns="0" rIns="0" tIns="0" bIns="0">
+          <a:bodyPr wrap="square" lIns="0" tIns="0" rIns="0" bIns="0" anchor="t">
             <a:spAutoFit/>
           </a:bodyPr>
           <a:lstStyle/>
@@ -4682,7 +4722,7 @@
           <a:noFill/>
         </p:spPr>
         <p:txBody>
-          <a:bodyPr wrap="square" anchor="t" lIns="0" rIns="0" tIns="0" bIns="0">
+          <a:bodyPr wrap="square" lIns="0" tIns="0" rIns="0" bIns="0" anchor="t">
             <a:spAutoFit/>
           </a:bodyPr>
           <a:lstStyle/>
@@ -4724,7 +4764,7 @@
           <a:noFill/>
         </p:spPr>
         <p:txBody>
-          <a:bodyPr wrap="square" anchor="t" lIns="0" rIns="0" tIns="0" bIns="0">
+          <a:bodyPr wrap="square" lIns="0" tIns="0" rIns="0" bIns="0" anchor="t">
             <a:spAutoFit/>
           </a:bodyPr>
           <a:lstStyle/>
@@ -4790,6 +4830,7 @@
           <a:lstStyle/>
           <a:p>
             <a:pPr algn="ctr"/>
+            <a:endParaRPr/>
           </a:p>
         </p:txBody>
       </p:sp>
@@ -4830,7 +4871,7 @@
           </a:fontRef>
         </p:style>
         <p:txBody>
-          <a:bodyPr rtlCol="0" anchor="ctr" wrap="square" lIns="54864" rIns="54864"/>
+          <a:bodyPr wrap="square" lIns="54864" rIns="54864" rtlCol="0" anchor="ctr"/>
           <a:lstStyle/>
           <a:p>
             <a:pPr algn="ctr"/>
@@ -4849,17 +4890,17 @@
       </p:sp>
     </p:spTree>
   </p:cSld>
-  <p:transition spd="fast">
-    <p:fade/>
-  </p:transition>
   <p:clrMapOvr>
     <a:masterClrMapping/>
   </p:clrMapOvr>
+  <p:transition>
+    <p:fade/>
+  </p:transition>
 </p:sld>
 </file>
 
 <file path=ppt/slides/slide10.xml><?xml version="1.0" encoding="utf-8"?>
-<p:sld xmlns:a="http://schemas.openxmlformats.org/drawingml/2006/main" xmlns:p="http://schemas.openxmlformats.org/presentationml/2006/main" xmlns:r="http://schemas.openxmlformats.org/officeDocument/2006/relationships">
+<p:sld xmlns:a="http://schemas.openxmlformats.org/drawingml/2006/main" xmlns:r="http://schemas.openxmlformats.org/officeDocument/2006/relationships" xmlns:p="http://schemas.openxmlformats.org/presentationml/2006/main">
   <p:cSld>
     <p:bg>
       <p:bgPr>
@@ -4875,7 +4916,14 @@
         <p:cNvGrpSpPr/>
         <p:nvPr/>
       </p:nvGrpSpPr>
-      <p:grpSpPr/>
+      <p:grpSpPr>
+        <a:xfrm>
+          <a:off x="0" y="0"/>
+          <a:ext cx="0" cy="0"/>
+          <a:chOff x="0" y="0"/>
+          <a:chExt cx="0" cy="0"/>
+        </a:xfrm>
+      </p:grpSpPr>
       <p:sp>
         <p:nvSpPr>
           <p:cNvPr id="2" name="Rectangle 1"/>
@@ -4917,6 +4965,7 @@
           <a:lstStyle/>
           <a:p>
             <a:pPr algn="ctr"/>
+            <a:endParaRPr/>
           </a:p>
         </p:txBody>
       </p:sp>
@@ -4957,7 +5006,7 @@
           </a:fontRef>
         </p:style>
         <p:txBody>
-          <a:bodyPr rtlCol="0" anchor="ctr" lIns="256032" rIns="45720" tIns="18288" bIns="18288"/>
+          <a:bodyPr lIns="256032" tIns="18288" rIns="45720" bIns="18288" rtlCol="0" anchor="ctr"/>
           <a:lstStyle/>
           <a:p>
             <a:pPr algn="l"/>
@@ -4990,7 +5039,7 @@
           <a:noFill/>
         </p:spPr>
         <p:txBody>
-          <a:bodyPr wrap="square" anchor="t" lIns="0" rIns="0" tIns="0" bIns="0">
+          <a:bodyPr wrap="square" lIns="0" tIns="0" rIns="0" bIns="0" anchor="t">
             <a:spAutoFit/>
           </a:bodyPr>
           <a:lstStyle/>
@@ -5071,6 +5120,7 @@
           <a:lstStyle/>
           <a:p>
             <a:pPr algn="ctr"/>
+            <a:endParaRPr/>
           </a:p>
         </p:txBody>
       </p:sp>
@@ -5115,6 +5165,7 @@
           <a:lstStyle/>
           <a:p>
             <a:pPr algn="ctr"/>
+            <a:endParaRPr/>
           </a:p>
         </p:txBody>
       </p:sp>
@@ -5159,6 +5210,7 @@
           <a:lstStyle/>
           <a:p>
             <a:pPr algn="ctr"/>
+            <a:endParaRPr/>
           </a:p>
         </p:txBody>
       </p:sp>
@@ -5179,7 +5231,7 @@
           <a:noFill/>
         </p:spPr>
         <p:txBody>
-          <a:bodyPr wrap="square" anchor="t" lIns="0" rIns="0" tIns="0" bIns="0">
+          <a:bodyPr wrap="square" lIns="0" tIns="0" rIns="0" bIns="0" anchor="t">
             <a:spAutoFit/>
           </a:bodyPr>
           <a:lstStyle/>
@@ -5221,7 +5273,7 @@
           <a:noFill/>
         </p:spPr>
         <p:txBody>
-          <a:bodyPr wrap="square" anchor="t" lIns="0" rIns="0" tIns="0" bIns="0">
+          <a:bodyPr wrap="square" lIns="0" tIns="0" rIns="0" bIns="0" anchor="t">
             <a:spAutoFit/>
           </a:bodyPr>
           <a:lstStyle/>
@@ -5263,7 +5315,7 @@
           <a:noFill/>
         </p:spPr>
         <p:txBody>
-          <a:bodyPr wrap="square" anchor="t" lIns="0" rIns="0" tIns="0" bIns="0">
+          <a:bodyPr wrap="square" lIns="0" tIns="0" rIns="0" bIns="0" anchor="t">
             <a:spAutoFit/>
           </a:bodyPr>
           <a:lstStyle/>
@@ -5348,6 +5400,7 @@
           <a:lstStyle/>
           <a:p>
             <a:pPr algn="ctr"/>
+            <a:endParaRPr/>
           </a:p>
         </p:txBody>
       </p:sp>
@@ -5392,6 +5445,7 @@
           <a:lstStyle/>
           <a:p>
             <a:pPr algn="ctr"/>
+            <a:endParaRPr/>
           </a:p>
         </p:txBody>
       </p:sp>
@@ -5436,6 +5490,7 @@
           <a:lstStyle/>
           <a:p>
             <a:pPr algn="ctr"/>
+            <a:endParaRPr/>
           </a:p>
         </p:txBody>
       </p:sp>
@@ -5456,7 +5511,7 @@
           <a:noFill/>
         </p:spPr>
         <p:txBody>
-          <a:bodyPr wrap="square" anchor="t" lIns="0" rIns="0" tIns="0" bIns="0">
+          <a:bodyPr wrap="square" lIns="0" tIns="0" rIns="0" bIns="0" anchor="t">
             <a:spAutoFit/>
           </a:bodyPr>
           <a:lstStyle/>
@@ -5498,7 +5553,7 @@
           <a:noFill/>
         </p:spPr>
         <p:txBody>
-          <a:bodyPr wrap="square" anchor="t" lIns="0" rIns="0" tIns="0" bIns="0">
+          <a:bodyPr wrap="square" lIns="0" tIns="0" rIns="0" bIns="0" anchor="t">
             <a:spAutoFit/>
           </a:bodyPr>
           <a:lstStyle/>
@@ -5540,7 +5595,7 @@
           <a:noFill/>
         </p:spPr>
         <p:txBody>
-          <a:bodyPr wrap="square" anchor="t" lIns="0" rIns="0" tIns="0" bIns="0">
+          <a:bodyPr wrap="square" lIns="0" tIns="0" rIns="0" bIns="0" anchor="t">
             <a:spAutoFit/>
           </a:bodyPr>
           <a:lstStyle/>
@@ -5625,6 +5680,7 @@
           <a:lstStyle/>
           <a:p>
             <a:pPr algn="ctr"/>
+            <a:endParaRPr/>
           </a:p>
         </p:txBody>
       </p:sp>
@@ -5669,6 +5725,7 @@
           <a:lstStyle/>
           <a:p>
             <a:pPr algn="ctr"/>
+            <a:endParaRPr/>
           </a:p>
         </p:txBody>
       </p:sp>
@@ -5713,6 +5770,7 @@
           <a:lstStyle/>
           <a:p>
             <a:pPr algn="ctr"/>
+            <a:endParaRPr/>
           </a:p>
         </p:txBody>
       </p:sp>
@@ -5733,7 +5791,7 @@
           <a:noFill/>
         </p:spPr>
         <p:txBody>
-          <a:bodyPr wrap="square" anchor="t" lIns="0" rIns="0" tIns="0" bIns="0">
+          <a:bodyPr wrap="square" lIns="0" tIns="0" rIns="0" bIns="0" anchor="t">
             <a:spAutoFit/>
           </a:bodyPr>
           <a:lstStyle/>
@@ -5775,7 +5833,7 @@
           <a:noFill/>
         </p:spPr>
         <p:txBody>
-          <a:bodyPr wrap="square" anchor="t" lIns="0" rIns="0" tIns="0" bIns="0">
+          <a:bodyPr wrap="square" lIns="0" tIns="0" rIns="0" bIns="0" anchor="t">
             <a:spAutoFit/>
           </a:bodyPr>
           <a:lstStyle/>
@@ -5817,7 +5875,7 @@
           <a:noFill/>
         </p:spPr>
         <p:txBody>
-          <a:bodyPr wrap="square" anchor="t" lIns="0" rIns="0" tIns="0" bIns="0">
+          <a:bodyPr wrap="square" lIns="0" tIns="0" rIns="0" bIns="0" anchor="t">
             <a:spAutoFit/>
           </a:bodyPr>
           <a:lstStyle/>
@@ -5902,6 +5960,7 @@
           <a:lstStyle/>
           <a:p>
             <a:pPr algn="ctr"/>
+            <a:endParaRPr/>
           </a:p>
         </p:txBody>
       </p:sp>
@@ -5946,6 +6005,7 @@
           <a:lstStyle/>
           <a:p>
             <a:pPr algn="ctr"/>
+            <a:endParaRPr/>
           </a:p>
         </p:txBody>
       </p:sp>
@@ -5990,6 +6050,7 @@
           <a:lstStyle/>
           <a:p>
             <a:pPr algn="ctr"/>
+            <a:endParaRPr/>
           </a:p>
         </p:txBody>
       </p:sp>
@@ -6010,7 +6071,7 @@
           <a:noFill/>
         </p:spPr>
         <p:txBody>
-          <a:bodyPr wrap="square" anchor="t" lIns="0" rIns="0" tIns="0" bIns="0">
+          <a:bodyPr wrap="square" lIns="0" tIns="0" rIns="0" bIns="0" anchor="t">
             <a:spAutoFit/>
           </a:bodyPr>
           <a:lstStyle/>
@@ -6052,7 +6113,7 @@
           <a:noFill/>
         </p:spPr>
         <p:txBody>
-          <a:bodyPr wrap="square" anchor="t" lIns="0" rIns="0" tIns="0" bIns="0">
+          <a:bodyPr wrap="square" lIns="0" tIns="0" rIns="0" bIns="0" anchor="t">
             <a:spAutoFit/>
           </a:bodyPr>
           <a:lstStyle/>
@@ -6094,7 +6155,7 @@
           <a:noFill/>
         </p:spPr>
         <p:txBody>
-          <a:bodyPr wrap="square" anchor="t" lIns="0" rIns="0" tIns="0" bIns="0">
+          <a:bodyPr wrap="square" lIns="0" tIns="0" rIns="0" bIns="0" anchor="t">
             <a:spAutoFit/>
           </a:bodyPr>
           <a:lstStyle/>
@@ -6179,6 +6240,7 @@
           <a:lstStyle/>
           <a:p>
             <a:pPr algn="ctr"/>
+            <a:endParaRPr/>
           </a:p>
         </p:txBody>
       </p:sp>
@@ -6223,6 +6285,7 @@
           <a:lstStyle/>
           <a:p>
             <a:pPr algn="ctr"/>
+            <a:endParaRPr/>
           </a:p>
         </p:txBody>
       </p:sp>
@@ -6267,6 +6330,7 @@
           <a:lstStyle/>
           <a:p>
             <a:pPr algn="ctr"/>
+            <a:endParaRPr/>
           </a:p>
         </p:txBody>
       </p:sp>
@@ -6287,7 +6351,7 @@
           <a:noFill/>
         </p:spPr>
         <p:txBody>
-          <a:bodyPr wrap="square" anchor="t" lIns="0" rIns="0" tIns="0" bIns="0">
+          <a:bodyPr wrap="square" lIns="0" tIns="0" rIns="0" bIns="0" anchor="t">
             <a:spAutoFit/>
           </a:bodyPr>
           <a:lstStyle/>
@@ -6329,7 +6393,7 @@
           <a:noFill/>
         </p:spPr>
         <p:txBody>
-          <a:bodyPr wrap="square" anchor="t" lIns="0" rIns="0" tIns="0" bIns="0">
+          <a:bodyPr wrap="square" lIns="0" tIns="0" rIns="0" bIns="0" anchor="t">
             <a:spAutoFit/>
           </a:bodyPr>
           <a:lstStyle/>
@@ -6371,7 +6435,7 @@
           <a:noFill/>
         </p:spPr>
         <p:txBody>
-          <a:bodyPr wrap="square" anchor="t" lIns="0" rIns="0" tIns="0" bIns="0">
+          <a:bodyPr wrap="square" lIns="0" tIns="0" rIns="0" bIns="0" anchor="t">
             <a:spAutoFit/>
           </a:bodyPr>
           <a:lstStyle/>
@@ -6452,7 +6516,7 @@
           </a:fontRef>
         </p:style>
         <p:txBody>
-          <a:bodyPr rtlCol="0" anchor="ctr" wrap="square" lIns="256032" rIns="256032" tIns="128016" bIns="128016"/>
+          <a:bodyPr wrap="square" lIns="256032" tIns="128016" rIns="256032" bIns="128016" rtlCol="0" anchor="ctr"/>
           <a:lstStyle/>
           <a:p>
             <a:pPr algn="ctr">
@@ -6513,6 +6577,7 @@
           <a:lstStyle/>
           <a:p>
             <a:pPr algn="ctr"/>
+            <a:endParaRPr/>
           </a:p>
         </p:txBody>
       </p:sp>
@@ -6533,7 +6598,7 @@
           <a:noFill/>
         </p:spPr>
         <p:txBody>
-          <a:bodyPr wrap="square" anchor="t" lIns="0" rIns="0" tIns="0" bIns="0">
+          <a:bodyPr wrap="square" lIns="0" tIns="0" rIns="0" bIns="0" anchor="t">
             <a:spAutoFit/>
           </a:bodyPr>
           <a:lstStyle/>
@@ -6628,7 +6693,7 @@
           <a:noFill/>
         </p:spPr>
         <p:txBody>
-          <a:bodyPr wrap="square" anchor="t" lIns="0" rIns="0" tIns="0" bIns="0">
+          <a:bodyPr wrap="square" lIns="0" tIns="0" rIns="0" bIns="0" anchor="t">
             <a:spAutoFit/>
           </a:bodyPr>
           <a:lstStyle/>
@@ -6655,17 +6720,17 @@
       </p:sp>
     </p:spTree>
   </p:cSld>
-  <p:transition spd="fast">
-    <p:fade/>
-  </p:transition>
   <p:clrMapOvr>
     <a:masterClrMapping/>
   </p:clrMapOvr>
+  <p:transition>
+    <p:fade/>
+  </p:transition>
 </p:sld>
 </file>
 
 <file path=ppt/slides/slide11.xml><?xml version="1.0" encoding="utf-8"?>
-<p:sld xmlns:a="http://schemas.openxmlformats.org/drawingml/2006/main" xmlns:p="http://schemas.openxmlformats.org/presentationml/2006/main" xmlns:r="http://schemas.openxmlformats.org/officeDocument/2006/relationships">
+<p:sld xmlns:a="http://schemas.openxmlformats.org/drawingml/2006/main" xmlns:r="http://schemas.openxmlformats.org/officeDocument/2006/relationships" xmlns:p="http://schemas.openxmlformats.org/presentationml/2006/main">
   <p:cSld>
     <p:bg>
       <p:bgPr>
@@ -6681,7 +6746,14 @@
         <p:cNvGrpSpPr/>
         <p:nvPr/>
       </p:nvGrpSpPr>
-      <p:grpSpPr/>
+      <p:grpSpPr>
+        <a:xfrm>
+          <a:off x="0" y="0"/>
+          <a:ext cx="0" cy="0"/>
+          <a:chOff x="0" y="0"/>
+          <a:chExt cx="0" cy="0"/>
+        </a:xfrm>
+      </p:grpSpPr>
       <p:sp>
         <p:nvSpPr>
           <p:cNvPr id="2" name="Rectangle 1"/>
@@ -6723,6 +6795,7 @@
           <a:lstStyle/>
           <a:p>
             <a:pPr algn="ctr"/>
+            <a:endParaRPr/>
           </a:p>
         </p:txBody>
       </p:sp>
@@ -6763,7 +6836,7 @@
           </a:fontRef>
         </p:style>
         <p:txBody>
-          <a:bodyPr rtlCol="0" anchor="ctr" lIns="256032" rIns="45720" tIns="18288" bIns="18288"/>
+          <a:bodyPr lIns="256032" tIns="18288" rIns="45720" bIns="18288" rtlCol="0" anchor="ctr"/>
           <a:lstStyle/>
           <a:p>
             <a:pPr algn="l"/>
@@ -6796,7 +6869,7 @@
           <a:noFill/>
         </p:spPr>
         <p:txBody>
-          <a:bodyPr wrap="square" anchor="t" lIns="0" rIns="0" tIns="0" bIns="0">
+          <a:bodyPr wrap="square" lIns="0" tIns="0" rIns="0" bIns="0" anchor="t">
             <a:spAutoFit/>
           </a:bodyPr>
           <a:lstStyle/>
@@ -6838,7 +6911,7 @@
           <a:noFill/>
         </p:spPr>
         <p:txBody>
-          <a:bodyPr wrap="square" anchor="t" lIns="0" rIns="0" tIns="0" bIns="0">
+          <a:bodyPr wrap="square" lIns="0" tIns="0" rIns="0" bIns="0" anchor="t">
             <a:spAutoFit/>
           </a:bodyPr>
           <a:lstStyle/>
@@ -6923,6 +6996,7 @@
           <a:lstStyle/>
           <a:p>
             <a:pPr algn="ctr"/>
+            <a:endParaRPr/>
           </a:p>
         </p:txBody>
       </p:sp>
@@ -6967,6 +7041,7 @@
           <a:lstStyle/>
           <a:p>
             <a:pPr algn="ctr"/>
+            <a:endParaRPr/>
           </a:p>
         </p:txBody>
       </p:sp>
@@ -7011,6 +7086,7 @@
           <a:lstStyle/>
           <a:p>
             <a:pPr algn="ctr"/>
+            <a:endParaRPr/>
           </a:p>
         </p:txBody>
       </p:sp>
@@ -7031,7 +7107,7 @@
           <a:noFill/>
         </p:spPr>
         <p:txBody>
-          <a:bodyPr wrap="square" anchor="t" lIns="0" rIns="0" tIns="0" bIns="0">
+          <a:bodyPr wrap="square" lIns="0" tIns="0" rIns="0" bIns="0" anchor="t">
             <a:spAutoFit/>
           </a:bodyPr>
           <a:lstStyle/>
@@ -7073,7 +7149,7 @@
           <a:noFill/>
         </p:spPr>
         <p:txBody>
-          <a:bodyPr wrap="square" anchor="t" lIns="0" rIns="0" tIns="0" bIns="0">
+          <a:bodyPr wrap="square" lIns="0" tIns="0" rIns="0" bIns="0" anchor="t">
             <a:spAutoFit/>
           </a:bodyPr>
           <a:lstStyle/>
@@ -7139,6 +7215,7 @@
           <a:lstStyle/>
           <a:p>
             <a:pPr algn="ctr"/>
+            <a:endParaRPr/>
           </a:p>
         </p:txBody>
       </p:sp>
@@ -7183,6 +7260,7 @@
           <a:lstStyle/>
           <a:p>
             <a:pPr algn="ctr"/>
+            <a:endParaRPr/>
           </a:p>
         </p:txBody>
       </p:sp>
@@ -7227,6 +7305,7 @@
           <a:lstStyle/>
           <a:p>
             <a:pPr algn="ctr"/>
+            <a:endParaRPr/>
           </a:p>
         </p:txBody>
       </p:sp>
@@ -7247,7 +7326,7 @@
           <a:noFill/>
         </p:spPr>
         <p:txBody>
-          <a:bodyPr wrap="square" anchor="t" lIns="0" rIns="0" tIns="0" bIns="0">
+          <a:bodyPr wrap="square" lIns="0" tIns="0" rIns="0" bIns="0" anchor="t">
             <a:spAutoFit/>
           </a:bodyPr>
           <a:lstStyle/>
@@ -7289,7 +7368,7 @@
           <a:noFill/>
         </p:spPr>
         <p:txBody>
-          <a:bodyPr wrap="square" anchor="t" lIns="0" rIns="0" tIns="0" bIns="0">
+          <a:bodyPr wrap="square" lIns="0" tIns="0" rIns="0" bIns="0" anchor="t">
             <a:spAutoFit/>
           </a:bodyPr>
           <a:lstStyle/>
@@ -7355,6 +7434,7 @@
           <a:lstStyle/>
           <a:p>
             <a:pPr algn="ctr"/>
+            <a:endParaRPr/>
           </a:p>
         </p:txBody>
       </p:sp>
@@ -7399,6 +7479,7 @@
           <a:lstStyle/>
           <a:p>
             <a:pPr algn="ctr"/>
+            <a:endParaRPr/>
           </a:p>
         </p:txBody>
       </p:sp>
@@ -7443,6 +7524,7 @@
           <a:lstStyle/>
           <a:p>
             <a:pPr algn="ctr"/>
+            <a:endParaRPr/>
           </a:p>
         </p:txBody>
       </p:sp>
@@ -7463,7 +7545,7 @@
           <a:noFill/>
         </p:spPr>
         <p:txBody>
-          <a:bodyPr wrap="square" anchor="t" lIns="0" rIns="0" tIns="0" bIns="0">
+          <a:bodyPr wrap="square" lIns="0" tIns="0" rIns="0" bIns="0" anchor="t">
             <a:spAutoFit/>
           </a:bodyPr>
           <a:lstStyle/>
@@ -7505,7 +7587,7 @@
           <a:noFill/>
         </p:spPr>
         <p:txBody>
-          <a:bodyPr wrap="square" anchor="t" lIns="0" rIns="0" tIns="0" bIns="0">
+          <a:bodyPr wrap="square" lIns="0" tIns="0" rIns="0" bIns="0" anchor="t">
             <a:spAutoFit/>
           </a:bodyPr>
           <a:lstStyle/>
@@ -7547,7 +7629,7 @@
           <a:noFill/>
         </p:spPr>
         <p:txBody>
-          <a:bodyPr wrap="square" anchor="t" lIns="0" rIns="0" tIns="0" bIns="0">
+          <a:bodyPr wrap="square" lIns="0" tIns="0" rIns="0" bIns="0" anchor="t">
             <a:spAutoFit/>
           </a:bodyPr>
           <a:lstStyle/>
@@ -7661,7 +7743,7 @@
           <a:noFill/>
         </p:spPr>
         <p:txBody>
-          <a:bodyPr wrap="square" anchor="t" lIns="0" rIns="0" tIns="0" bIns="0">
+          <a:bodyPr wrap="square" lIns="0" tIns="0" rIns="0" bIns="0" anchor="t">
             <a:spAutoFit/>
           </a:bodyPr>
           <a:lstStyle/>
@@ -7688,17 +7770,17 @@
       </p:sp>
     </p:spTree>
   </p:cSld>
-  <p:transition spd="fast">
-    <p:fade/>
-  </p:transition>
   <p:clrMapOvr>
     <a:masterClrMapping/>
   </p:clrMapOvr>
+  <p:transition>
+    <p:fade/>
+  </p:transition>
 </p:sld>
 </file>
 
 <file path=ppt/slides/slide12.xml><?xml version="1.0" encoding="utf-8"?>
-<p:sld xmlns:a="http://schemas.openxmlformats.org/drawingml/2006/main" xmlns:p="http://schemas.openxmlformats.org/presentationml/2006/main" xmlns:r="http://schemas.openxmlformats.org/officeDocument/2006/relationships">
+<p:sld xmlns:a="http://schemas.openxmlformats.org/drawingml/2006/main" xmlns:r="http://schemas.openxmlformats.org/officeDocument/2006/relationships" xmlns:p="http://schemas.openxmlformats.org/presentationml/2006/main">
   <p:cSld>
     <p:bg>
       <p:bgPr>
@@ -7714,7 +7796,14 @@
         <p:cNvGrpSpPr/>
         <p:nvPr/>
       </p:nvGrpSpPr>
-      <p:grpSpPr/>
+      <p:grpSpPr>
+        <a:xfrm>
+          <a:off x="0" y="0"/>
+          <a:ext cx="0" cy="0"/>
+          <a:chOff x="0" y="0"/>
+          <a:chExt cx="0" cy="0"/>
+        </a:xfrm>
+      </p:grpSpPr>
       <p:sp>
         <p:nvSpPr>
           <p:cNvPr id="2" name="Rectangle 1"/>
@@ -7756,6 +7845,7 @@
           <a:lstStyle/>
           <a:p>
             <a:pPr algn="ctr"/>
+            <a:endParaRPr/>
           </a:p>
         </p:txBody>
       </p:sp>
@@ -7796,7 +7886,7 @@
           </a:fontRef>
         </p:style>
         <p:txBody>
-          <a:bodyPr rtlCol="0" anchor="ctr" lIns="256032" rIns="45720" tIns="18288" bIns="18288"/>
+          <a:bodyPr lIns="256032" tIns="18288" rIns="45720" bIns="18288" rtlCol="0" anchor="ctr"/>
           <a:lstStyle/>
           <a:p>
             <a:pPr algn="l"/>
@@ -7829,7 +7919,7 @@
           <a:noFill/>
         </p:spPr>
         <p:txBody>
-          <a:bodyPr wrap="square" anchor="t" lIns="0" rIns="0" tIns="0" bIns="0">
+          <a:bodyPr wrap="square" lIns="0" tIns="0" rIns="0" bIns="0" anchor="t">
             <a:spAutoFit/>
           </a:bodyPr>
           <a:lstStyle/>
@@ -7895,6 +7985,7 @@
           <a:lstStyle/>
           <a:p>
             <a:pPr algn="ctr"/>
+            <a:endParaRPr/>
           </a:p>
         </p:txBody>
       </p:sp>
@@ -7939,6 +8030,7 @@
           <a:lstStyle/>
           <a:p>
             <a:pPr algn="ctr"/>
+            <a:endParaRPr/>
           </a:p>
         </p:txBody>
       </p:sp>
@@ -7983,6 +8075,7 @@
           <a:lstStyle/>
           <a:p>
             <a:pPr algn="ctr"/>
+            <a:endParaRPr/>
           </a:p>
         </p:txBody>
       </p:sp>
@@ -8027,6 +8120,7 @@
           <a:lstStyle/>
           <a:p>
             <a:pPr algn="ctr"/>
+            <a:endParaRPr/>
           </a:p>
         </p:txBody>
       </p:sp>
@@ -8047,7 +8141,7 @@
           <a:noFill/>
         </p:spPr>
         <p:txBody>
-          <a:bodyPr wrap="square" anchor="t" lIns="0" rIns="0" tIns="0" bIns="0">
+          <a:bodyPr wrap="square" lIns="0" tIns="0" rIns="0" bIns="0" anchor="t">
             <a:spAutoFit/>
           </a:bodyPr>
           <a:lstStyle/>
@@ -8098,15 +8192,12 @@
                 <a:spcPts val="0"/>
               </a:spcAft>
             </a:pPr>
-            <a:r>
-              <a:rPr sz="1400" b="0" i="0">
-                <a:solidFill>
-                  <a:srgbClr val="E7ECF5"/>
-                </a:solidFill>
-                <a:latin typeface="Menlo"/>
-              </a:rPr>
-              <a:t/>
-            </a:r>
+            <a:endParaRPr sz="1400" b="0" i="0">
+              <a:solidFill>
+                <a:srgbClr val="E7ECF5"/>
+              </a:solidFill>
+              <a:latin typeface="Menlo"/>
+            </a:endParaRPr>
           </a:p>
           <a:p>
             <a:pPr algn="l">
@@ -8241,7 +8332,7 @@
           <a:noFill/>
         </p:spPr>
         <p:txBody>
-          <a:bodyPr wrap="square" anchor="t" lIns="0" rIns="0" tIns="0" bIns="0">
+          <a:bodyPr wrap="square" lIns="0" tIns="0" rIns="0" bIns="0" anchor="t">
             <a:spAutoFit/>
           </a:bodyPr>
           <a:lstStyle/>
@@ -8355,7 +8446,7 @@
           <a:noFill/>
         </p:spPr>
         <p:txBody>
-          <a:bodyPr wrap="square" anchor="t" lIns="0" rIns="0" tIns="0" bIns="0">
+          <a:bodyPr wrap="square" lIns="0" tIns="0" rIns="0" bIns="0" anchor="t">
             <a:spAutoFit/>
           </a:bodyPr>
           <a:lstStyle/>
@@ -8382,17 +8473,17 @@
       </p:sp>
     </p:spTree>
   </p:cSld>
-  <p:transition spd="fast">
-    <p:fade/>
-  </p:transition>
   <p:clrMapOvr>
     <a:masterClrMapping/>
   </p:clrMapOvr>
+  <p:transition>
+    <p:fade/>
+  </p:transition>
 </p:sld>
 </file>
 
 <file path=ppt/slides/slide13.xml><?xml version="1.0" encoding="utf-8"?>
-<p:sld xmlns:a="http://schemas.openxmlformats.org/drawingml/2006/main" xmlns:p="http://schemas.openxmlformats.org/presentationml/2006/main" xmlns:r="http://schemas.openxmlformats.org/officeDocument/2006/relationships">
+<p:sld xmlns:a="http://schemas.openxmlformats.org/drawingml/2006/main" xmlns:r="http://schemas.openxmlformats.org/officeDocument/2006/relationships" xmlns:p="http://schemas.openxmlformats.org/presentationml/2006/main">
   <p:cSld>
     <p:bg>
       <p:bgPr>
@@ -8408,7 +8499,14 @@
         <p:cNvGrpSpPr/>
         <p:nvPr/>
       </p:nvGrpSpPr>
-      <p:grpSpPr/>
+      <p:grpSpPr>
+        <a:xfrm>
+          <a:off x="0" y="0"/>
+          <a:ext cx="0" cy="0"/>
+          <a:chOff x="0" y="0"/>
+          <a:chExt cx="0" cy="0"/>
+        </a:xfrm>
+      </p:grpSpPr>
       <p:sp>
         <p:nvSpPr>
           <p:cNvPr id="2" name="Rectangle 1"/>
@@ -8450,6 +8548,7 @@
           <a:lstStyle/>
           <a:p>
             <a:pPr algn="ctr"/>
+            <a:endParaRPr/>
           </a:p>
         </p:txBody>
       </p:sp>
@@ -8490,7 +8589,7 @@
           </a:fontRef>
         </p:style>
         <p:txBody>
-          <a:bodyPr rtlCol="0" anchor="ctr" lIns="256032" rIns="45720" tIns="18288" bIns="18288"/>
+          <a:bodyPr lIns="256032" tIns="18288" rIns="45720" bIns="18288" rtlCol="0" anchor="ctr"/>
           <a:lstStyle/>
           <a:p>
             <a:pPr algn="l"/>
@@ -8523,7 +8622,7 @@
           <a:noFill/>
         </p:spPr>
         <p:txBody>
-          <a:bodyPr wrap="square" anchor="t" lIns="0" rIns="0" tIns="0" bIns="0">
+          <a:bodyPr wrap="square" lIns="0" tIns="0" rIns="0" bIns="0" anchor="t">
             <a:spAutoFit/>
           </a:bodyPr>
           <a:lstStyle/>
@@ -8589,6 +8688,7 @@
           <a:lstStyle/>
           <a:p>
             <a:pPr algn="ctr"/>
+            <a:endParaRPr/>
           </a:p>
         </p:txBody>
       </p:sp>
@@ -8633,6 +8733,7 @@
           <a:lstStyle/>
           <a:p>
             <a:pPr algn="ctr"/>
+            <a:endParaRPr/>
           </a:p>
         </p:txBody>
       </p:sp>
@@ -8677,6 +8778,7 @@
           <a:lstStyle/>
           <a:p>
             <a:pPr algn="ctr"/>
+            <a:endParaRPr/>
           </a:p>
         </p:txBody>
       </p:sp>
@@ -8697,7 +8799,7 @@
           <a:noFill/>
         </p:spPr>
         <p:txBody>
-          <a:bodyPr wrap="square" anchor="t" lIns="0" rIns="0" tIns="0" bIns="0">
+          <a:bodyPr wrap="square" lIns="0" tIns="0" rIns="0" bIns="0" anchor="t">
             <a:spAutoFit/>
           </a:bodyPr>
           <a:lstStyle/>
@@ -8739,7 +8841,7 @@
           <a:noFill/>
         </p:spPr>
         <p:txBody>
-          <a:bodyPr wrap="square" anchor="t" lIns="0" rIns="0" tIns="0" bIns="0">
+          <a:bodyPr wrap="square" lIns="0" tIns="0" rIns="0" bIns="0" anchor="t">
             <a:spAutoFit/>
           </a:bodyPr>
           <a:lstStyle/>
@@ -8781,7 +8883,7 @@
           <a:noFill/>
         </p:spPr>
         <p:txBody>
-          <a:bodyPr wrap="square" anchor="t" lIns="0" rIns="0" tIns="0" bIns="0">
+          <a:bodyPr wrap="square" lIns="0" tIns="0" rIns="0" bIns="0" anchor="t">
             <a:spAutoFit/>
           </a:bodyPr>
           <a:lstStyle/>
@@ -8823,7 +8925,7 @@
           <a:noFill/>
         </p:spPr>
         <p:txBody>
-          <a:bodyPr wrap="square" anchor="t" lIns="0" rIns="0" tIns="0" bIns="0">
+          <a:bodyPr wrap="square" lIns="0" tIns="0" rIns="0" bIns="0" anchor="t">
             <a:spAutoFit/>
           </a:bodyPr>
           <a:lstStyle/>
@@ -8865,7 +8967,7 @@
           <a:noFill/>
         </p:spPr>
         <p:txBody>
-          <a:bodyPr wrap="square" anchor="t" lIns="0" rIns="0" tIns="0" bIns="0">
+          <a:bodyPr wrap="square" lIns="0" tIns="0" rIns="0" bIns="0" anchor="t">
             <a:spAutoFit/>
           </a:bodyPr>
           <a:lstStyle/>
@@ -8931,6 +9033,7 @@
           <a:lstStyle/>
           <a:p>
             <a:pPr algn="ctr"/>
+            <a:endParaRPr/>
           </a:p>
         </p:txBody>
       </p:sp>
@@ -8975,6 +9078,7 @@
           <a:lstStyle/>
           <a:p>
             <a:pPr algn="ctr"/>
+            <a:endParaRPr/>
           </a:p>
         </p:txBody>
       </p:sp>
@@ -9019,6 +9123,7 @@
           <a:lstStyle/>
           <a:p>
             <a:pPr algn="ctr"/>
+            <a:endParaRPr/>
           </a:p>
         </p:txBody>
       </p:sp>
@@ -9039,7 +9144,7 @@
           <a:noFill/>
         </p:spPr>
         <p:txBody>
-          <a:bodyPr wrap="square" anchor="t" lIns="0" rIns="0" tIns="0" bIns="0">
+          <a:bodyPr wrap="square" lIns="0" tIns="0" rIns="0" bIns="0" anchor="t">
             <a:spAutoFit/>
           </a:bodyPr>
           <a:lstStyle/>
@@ -9081,7 +9186,7 @@
           <a:noFill/>
         </p:spPr>
         <p:txBody>
-          <a:bodyPr wrap="square" anchor="t" lIns="0" rIns="0" tIns="0" bIns="0">
+          <a:bodyPr wrap="square" lIns="0" tIns="0" rIns="0" bIns="0" anchor="t">
             <a:spAutoFit/>
           </a:bodyPr>
           <a:lstStyle/>
@@ -9123,7 +9228,7 @@
           <a:noFill/>
         </p:spPr>
         <p:txBody>
-          <a:bodyPr wrap="square" anchor="t" lIns="0" rIns="0" tIns="0" bIns="0">
+          <a:bodyPr wrap="square" lIns="0" tIns="0" rIns="0" bIns="0" anchor="t">
             <a:spAutoFit/>
           </a:bodyPr>
           <a:lstStyle/>
@@ -9165,7 +9270,7 @@
           <a:noFill/>
         </p:spPr>
         <p:txBody>
-          <a:bodyPr wrap="square" anchor="t" lIns="0" rIns="0" tIns="0" bIns="0">
+          <a:bodyPr wrap="square" lIns="0" tIns="0" rIns="0" bIns="0" anchor="t">
             <a:spAutoFit/>
           </a:bodyPr>
           <a:lstStyle/>
@@ -9207,7 +9312,7 @@
           <a:noFill/>
         </p:spPr>
         <p:txBody>
-          <a:bodyPr wrap="square" anchor="t" lIns="0" rIns="0" tIns="0" bIns="0">
+          <a:bodyPr wrap="square" lIns="0" tIns="0" rIns="0" bIns="0" anchor="t">
             <a:spAutoFit/>
           </a:bodyPr>
           <a:lstStyle/>
@@ -9273,6 +9378,7 @@
           <a:lstStyle/>
           <a:p>
             <a:pPr algn="ctr"/>
+            <a:endParaRPr/>
           </a:p>
         </p:txBody>
       </p:sp>
@@ -9313,7 +9419,7 @@
           </a:fontRef>
         </p:style>
         <p:txBody>
-          <a:bodyPr rtlCol="0" anchor="ctr" wrap="square" lIns="54864" rIns="54864"/>
+          <a:bodyPr wrap="square" lIns="54864" rIns="54864" rtlCol="0" anchor="ctr"/>
           <a:lstStyle/>
           <a:p>
             <a:pPr algn="ctr"/>
@@ -9367,7 +9473,7 @@
           </a:fontRef>
         </p:style>
         <p:txBody>
-          <a:bodyPr rtlCol="0" anchor="ctr" wrap="square" lIns="256032" rIns="256032" tIns="128016" bIns="128016"/>
+          <a:bodyPr wrap="square" lIns="256032" tIns="128016" rIns="256032" bIns="128016" rtlCol="0" anchor="ctr"/>
           <a:lstStyle/>
           <a:p>
             <a:pPr algn="ctr">
@@ -9428,6 +9534,7 @@
           <a:lstStyle/>
           <a:p>
             <a:pPr algn="ctr"/>
+            <a:endParaRPr/>
           </a:p>
         </p:txBody>
       </p:sp>
@@ -9501,7 +9608,7 @@
           <a:noFill/>
         </p:spPr>
         <p:txBody>
-          <a:bodyPr wrap="square" anchor="t" lIns="0" rIns="0" tIns="0" bIns="0">
+          <a:bodyPr wrap="square" lIns="0" tIns="0" rIns="0" bIns="0" anchor="t">
             <a:spAutoFit/>
           </a:bodyPr>
           <a:lstStyle/>
@@ -9528,17 +9635,17 @@
       </p:sp>
     </p:spTree>
   </p:cSld>
-  <p:transition spd="fast">
-    <p:fade/>
-  </p:transition>
   <p:clrMapOvr>
     <a:masterClrMapping/>
   </p:clrMapOvr>
+  <p:transition>
+    <p:fade/>
+  </p:transition>
 </p:sld>
 </file>
 
 <file path=ppt/slides/slide14.xml><?xml version="1.0" encoding="utf-8"?>
-<p:sld xmlns:a="http://schemas.openxmlformats.org/drawingml/2006/main" xmlns:p="http://schemas.openxmlformats.org/presentationml/2006/main" xmlns:r="http://schemas.openxmlformats.org/officeDocument/2006/relationships">
+<p:sld xmlns:a="http://schemas.openxmlformats.org/drawingml/2006/main" xmlns:r="http://schemas.openxmlformats.org/officeDocument/2006/relationships" xmlns:p="http://schemas.openxmlformats.org/presentationml/2006/main">
   <p:cSld>
     <p:bg>
       <p:bgPr>
@@ -9554,7 +9661,14 @@
         <p:cNvGrpSpPr/>
         <p:nvPr/>
       </p:nvGrpSpPr>
-      <p:grpSpPr/>
+      <p:grpSpPr>
+        <a:xfrm>
+          <a:off x="0" y="0"/>
+          <a:ext cx="0" cy="0"/>
+          <a:chOff x="0" y="0"/>
+          <a:chExt cx="0" cy="0"/>
+        </a:xfrm>
+      </p:grpSpPr>
       <p:sp>
         <p:nvSpPr>
           <p:cNvPr id="2" name="Oval 1"/>
@@ -9596,6 +9710,7 @@
           <a:lstStyle/>
           <a:p>
             <a:pPr algn="ctr"/>
+            <a:endParaRPr/>
           </a:p>
         </p:txBody>
       </p:sp>
@@ -9640,6 +9755,7 @@
           <a:lstStyle/>
           <a:p>
             <a:pPr algn="ctr"/>
+            <a:endParaRPr/>
           </a:p>
         </p:txBody>
       </p:sp>
@@ -9684,6 +9800,7 @@
           <a:lstStyle/>
           <a:p>
             <a:pPr algn="ctr"/>
+            <a:endParaRPr/>
           </a:p>
         </p:txBody>
       </p:sp>
@@ -9728,6 +9845,7 @@
           <a:lstStyle/>
           <a:p>
             <a:pPr algn="ctr"/>
+            <a:endParaRPr/>
           </a:p>
         </p:txBody>
       </p:sp>
@@ -9772,6 +9890,7 @@
           <a:lstStyle/>
           <a:p>
             <a:pPr algn="ctr"/>
+            <a:endParaRPr/>
           </a:p>
         </p:txBody>
       </p:sp>
@@ -9816,6 +9935,7 @@
           <a:lstStyle/>
           <a:p>
             <a:pPr algn="ctr"/>
+            <a:endParaRPr/>
           </a:p>
         </p:txBody>
       </p:sp>
@@ -9860,6 +9980,7 @@
           <a:lstStyle/>
           <a:p>
             <a:pPr algn="ctr"/>
+            <a:endParaRPr/>
           </a:p>
         </p:txBody>
       </p:sp>
@@ -9904,6 +10025,7 @@
           <a:lstStyle/>
           <a:p>
             <a:pPr algn="ctr"/>
+            <a:endParaRPr/>
           </a:p>
         </p:txBody>
       </p:sp>
@@ -9948,6 +10070,7 @@
           <a:lstStyle/>
           <a:p>
             <a:pPr algn="ctr"/>
+            <a:endParaRPr/>
           </a:p>
         </p:txBody>
       </p:sp>
@@ -9992,6 +10115,7 @@
           <a:lstStyle/>
           <a:p>
             <a:pPr algn="ctr"/>
+            <a:endParaRPr/>
           </a:p>
         </p:txBody>
       </p:sp>
@@ -10036,6 +10160,7 @@
           <a:lstStyle/>
           <a:p>
             <a:pPr algn="ctr"/>
+            <a:endParaRPr/>
           </a:p>
         </p:txBody>
       </p:sp>
@@ -10080,6 +10205,7 @@
           <a:lstStyle/>
           <a:p>
             <a:pPr algn="ctr"/>
+            <a:endParaRPr/>
           </a:p>
         </p:txBody>
       </p:sp>
@@ -10124,6 +10250,7 @@
           <a:lstStyle/>
           <a:p>
             <a:pPr algn="ctr"/>
+            <a:endParaRPr/>
           </a:p>
         </p:txBody>
       </p:sp>
@@ -10168,6 +10295,7 @@
           <a:lstStyle/>
           <a:p>
             <a:pPr algn="ctr"/>
+            <a:endParaRPr/>
           </a:p>
         </p:txBody>
       </p:sp>
@@ -10212,6 +10340,7 @@
           <a:lstStyle/>
           <a:p>
             <a:pPr algn="ctr"/>
+            <a:endParaRPr/>
           </a:p>
         </p:txBody>
       </p:sp>
@@ -10256,6 +10385,7 @@
           <a:lstStyle/>
           <a:p>
             <a:pPr algn="ctr"/>
+            <a:endParaRPr/>
           </a:p>
         </p:txBody>
       </p:sp>
@@ -10300,6 +10430,7 @@
           <a:lstStyle/>
           <a:p>
             <a:pPr algn="ctr"/>
+            <a:endParaRPr/>
           </a:p>
         </p:txBody>
       </p:sp>
@@ -10344,6 +10475,7 @@
           <a:lstStyle/>
           <a:p>
             <a:pPr algn="ctr"/>
+            <a:endParaRPr/>
           </a:p>
         </p:txBody>
       </p:sp>
@@ -10388,6 +10520,7 @@
           <a:lstStyle/>
           <a:p>
             <a:pPr algn="ctr"/>
+            <a:endParaRPr/>
           </a:p>
         </p:txBody>
       </p:sp>
@@ -10432,6 +10565,7 @@
           <a:lstStyle/>
           <a:p>
             <a:pPr algn="ctr"/>
+            <a:endParaRPr/>
           </a:p>
         </p:txBody>
       </p:sp>
@@ -10476,6 +10610,7 @@
           <a:lstStyle/>
           <a:p>
             <a:pPr algn="ctr"/>
+            <a:endParaRPr/>
           </a:p>
         </p:txBody>
       </p:sp>
@@ -10520,6 +10655,7 @@
           <a:lstStyle/>
           <a:p>
             <a:pPr algn="ctr"/>
+            <a:endParaRPr/>
           </a:p>
         </p:txBody>
       </p:sp>
@@ -10564,6 +10700,7 @@
           <a:lstStyle/>
           <a:p>
             <a:pPr algn="ctr"/>
+            <a:endParaRPr/>
           </a:p>
         </p:txBody>
       </p:sp>
@@ -10608,6 +10745,7 @@
           <a:lstStyle/>
           <a:p>
             <a:pPr algn="ctr"/>
+            <a:endParaRPr/>
           </a:p>
         </p:txBody>
       </p:sp>
@@ -10652,6 +10790,7 @@
           <a:lstStyle/>
           <a:p>
             <a:pPr algn="ctr"/>
+            <a:endParaRPr/>
           </a:p>
         </p:txBody>
       </p:sp>
@@ -10696,6 +10835,7 @@
           <a:lstStyle/>
           <a:p>
             <a:pPr algn="ctr"/>
+            <a:endParaRPr/>
           </a:p>
         </p:txBody>
       </p:sp>
@@ -10740,6 +10880,7 @@
           <a:lstStyle/>
           <a:p>
             <a:pPr algn="ctr"/>
+            <a:endParaRPr/>
           </a:p>
         </p:txBody>
       </p:sp>
@@ -10784,6 +10925,7 @@
           <a:lstStyle/>
           <a:p>
             <a:pPr algn="ctr"/>
+            <a:endParaRPr/>
           </a:p>
         </p:txBody>
       </p:sp>
@@ -10828,6 +10970,7 @@
           <a:lstStyle/>
           <a:p>
             <a:pPr algn="ctr"/>
+            <a:endParaRPr/>
           </a:p>
         </p:txBody>
       </p:sp>
@@ -10872,6 +11015,7 @@
           <a:lstStyle/>
           <a:p>
             <a:pPr algn="ctr"/>
+            <a:endParaRPr/>
           </a:p>
         </p:txBody>
       </p:sp>
@@ -10916,6 +11060,7 @@
           <a:lstStyle/>
           <a:p>
             <a:pPr algn="ctr"/>
+            <a:endParaRPr/>
           </a:p>
         </p:txBody>
       </p:sp>
@@ -10936,7 +11081,7 @@
           <a:noFill/>
         </p:spPr>
         <p:txBody>
-          <a:bodyPr wrap="square" anchor="t" lIns="0" rIns="0" tIns="0" bIns="0">
+          <a:bodyPr wrap="square" lIns="0" tIns="0" rIns="0" bIns="0" anchor="t">
             <a:spAutoFit/>
           </a:bodyPr>
           <a:lstStyle/>
@@ -10998,7 +11143,7 @@
           </a:fontRef>
         </p:style>
         <p:txBody>
-          <a:bodyPr rtlCol="0" anchor="ctr" wrap="square" lIns="256032" rIns="256032" tIns="128016" bIns="128016"/>
+          <a:bodyPr wrap="square" lIns="256032" tIns="128016" rIns="256032" bIns="128016" rtlCol="0" anchor="ctr"/>
           <a:lstStyle/>
           <a:p>
             <a:pPr algn="ctr">
@@ -11059,6 +11204,7 @@
           <a:lstStyle/>
           <a:p>
             <a:pPr algn="ctr"/>
+            <a:endParaRPr/>
           </a:p>
         </p:txBody>
       </p:sp>
@@ -11132,7 +11278,7 @@
           <a:noFill/>
         </p:spPr>
         <p:txBody>
-          <a:bodyPr wrap="square" anchor="t" lIns="0" rIns="0" tIns="0" bIns="0">
+          <a:bodyPr wrap="square" lIns="0" tIns="0" rIns="0" bIns="0" anchor="t">
             <a:spAutoFit/>
           </a:bodyPr>
           <a:lstStyle/>
@@ -11159,17 +11305,17 @@
       </p:sp>
     </p:spTree>
   </p:cSld>
-  <p:transition spd="fast">
-    <p:cut/>
-  </p:transition>
   <p:clrMapOvr>
     <a:masterClrMapping/>
   </p:clrMapOvr>
+  <p:transition>
+    <p:cut/>
+  </p:transition>
 </p:sld>
 </file>
 
 <file path=ppt/slides/slide15.xml><?xml version="1.0" encoding="utf-8"?>
-<p:sld xmlns:a="http://schemas.openxmlformats.org/drawingml/2006/main" xmlns:p="http://schemas.openxmlformats.org/presentationml/2006/main" xmlns:r="http://schemas.openxmlformats.org/officeDocument/2006/relationships">
+<p:sld xmlns:a="http://schemas.openxmlformats.org/drawingml/2006/main" xmlns:r="http://schemas.openxmlformats.org/officeDocument/2006/relationships" xmlns:p="http://schemas.openxmlformats.org/presentationml/2006/main">
   <p:cSld>
     <p:bg>
       <p:bgPr>
@@ -11185,7 +11331,14 @@
         <p:cNvGrpSpPr/>
         <p:nvPr/>
       </p:nvGrpSpPr>
-      <p:grpSpPr/>
+      <p:grpSpPr>
+        <a:xfrm>
+          <a:off x="0" y="0"/>
+          <a:ext cx="0" cy="0"/>
+          <a:chOff x="0" y="0"/>
+          <a:chExt cx="0" cy="0"/>
+        </a:xfrm>
+      </p:grpSpPr>
       <p:sp>
         <p:nvSpPr>
           <p:cNvPr id="2" name="Rectangle 1"/>
@@ -11227,6 +11380,7 @@
           <a:lstStyle/>
           <a:p>
             <a:pPr algn="ctr"/>
+            <a:endParaRPr/>
           </a:p>
         </p:txBody>
       </p:sp>
@@ -11267,7 +11421,7 @@
           </a:fontRef>
         </p:style>
         <p:txBody>
-          <a:bodyPr rtlCol="0" anchor="ctr" lIns="256032" rIns="45720" tIns="18288" bIns="18288"/>
+          <a:bodyPr lIns="256032" tIns="18288" rIns="45720" bIns="18288" rtlCol="0" anchor="ctr"/>
           <a:lstStyle/>
           <a:p>
             <a:pPr algn="l"/>
@@ -11300,7 +11454,7 @@
           <a:noFill/>
         </p:spPr>
         <p:txBody>
-          <a:bodyPr wrap="square" anchor="t" lIns="0" rIns="0" tIns="0" bIns="0">
+          <a:bodyPr wrap="square" lIns="0" tIns="0" rIns="0" bIns="0" anchor="t">
             <a:spAutoFit/>
           </a:bodyPr>
           <a:lstStyle/>
@@ -11366,6 +11520,7 @@
           <a:lstStyle/>
           <a:p>
             <a:pPr algn="ctr"/>
+            <a:endParaRPr/>
           </a:p>
         </p:txBody>
       </p:sp>
@@ -11406,7 +11561,7 @@
           </a:fontRef>
         </p:style>
         <p:txBody>
-          <a:bodyPr rtlCol="0" anchor="ctr" wrap="square" lIns="54864" rIns="54864"/>
+          <a:bodyPr wrap="square" lIns="54864" rIns="54864" rtlCol="0" anchor="ctr"/>
           <a:lstStyle/>
           <a:p>
             <a:pPr algn="ctr"/>
@@ -11439,7 +11594,7 @@
           <a:noFill/>
         </p:spPr>
         <p:txBody>
-          <a:bodyPr wrap="square" anchor="t" lIns="0" rIns="0" tIns="0" bIns="0">
+          <a:bodyPr wrap="square" lIns="0" tIns="0" rIns="0" bIns="0" anchor="t">
             <a:spAutoFit/>
           </a:bodyPr>
           <a:lstStyle/>
@@ -11481,7 +11636,7 @@
           <a:noFill/>
         </p:spPr>
         <p:txBody>
-          <a:bodyPr wrap="square" anchor="t" lIns="0" rIns="0" tIns="0" bIns="0">
+          <a:bodyPr wrap="square" lIns="0" tIns="0" rIns="0" bIns="0" anchor="t">
             <a:spAutoFit/>
           </a:bodyPr>
           <a:lstStyle/>
@@ -11547,6 +11702,7 @@
           <a:lstStyle/>
           <a:p>
             <a:pPr algn="ctr"/>
+            <a:endParaRPr/>
           </a:p>
         </p:txBody>
       </p:sp>
@@ -11587,7 +11743,7 @@
           </a:fontRef>
         </p:style>
         <p:txBody>
-          <a:bodyPr rtlCol="0" anchor="ctr" wrap="square" lIns="54864" rIns="54864"/>
+          <a:bodyPr wrap="square" lIns="54864" rIns="54864" rtlCol="0" anchor="ctr"/>
           <a:lstStyle/>
           <a:p>
             <a:pPr algn="ctr"/>
@@ -11620,7 +11776,7 @@
           <a:noFill/>
         </p:spPr>
         <p:txBody>
-          <a:bodyPr wrap="square" anchor="t" lIns="0" rIns="0" tIns="0" bIns="0">
+          <a:bodyPr wrap="square" lIns="0" tIns="0" rIns="0" bIns="0" anchor="t">
             <a:spAutoFit/>
           </a:bodyPr>
           <a:lstStyle/>
@@ -11662,7 +11818,7 @@
           <a:noFill/>
         </p:spPr>
         <p:txBody>
-          <a:bodyPr wrap="square" anchor="t" lIns="0" rIns="0" tIns="0" bIns="0">
+          <a:bodyPr wrap="square" lIns="0" tIns="0" rIns="0" bIns="0" anchor="t">
             <a:spAutoFit/>
           </a:bodyPr>
           <a:lstStyle/>
@@ -11728,6 +11884,7 @@
           <a:lstStyle/>
           <a:p>
             <a:pPr algn="ctr"/>
+            <a:endParaRPr/>
           </a:p>
         </p:txBody>
       </p:sp>
@@ -11768,7 +11925,7 @@
           </a:fontRef>
         </p:style>
         <p:txBody>
-          <a:bodyPr rtlCol="0" anchor="ctr" wrap="square" lIns="54864" rIns="54864"/>
+          <a:bodyPr wrap="square" lIns="54864" rIns="54864" rtlCol="0" anchor="ctr"/>
           <a:lstStyle/>
           <a:p>
             <a:pPr algn="ctr"/>
@@ -11801,7 +11958,7 @@
           <a:noFill/>
         </p:spPr>
         <p:txBody>
-          <a:bodyPr wrap="square" anchor="t" lIns="0" rIns="0" tIns="0" bIns="0">
+          <a:bodyPr wrap="square" lIns="0" tIns="0" rIns="0" bIns="0" anchor="t">
             <a:spAutoFit/>
           </a:bodyPr>
           <a:lstStyle/>
@@ -11843,7 +12000,7 @@
           <a:noFill/>
         </p:spPr>
         <p:txBody>
-          <a:bodyPr wrap="square" anchor="t" lIns="0" rIns="0" tIns="0" bIns="0">
+          <a:bodyPr wrap="square" lIns="0" tIns="0" rIns="0" bIns="0" anchor="t">
             <a:spAutoFit/>
           </a:bodyPr>
           <a:lstStyle/>
@@ -11905,7 +12062,7 @@
           </a:fontRef>
         </p:style>
         <p:txBody>
-          <a:bodyPr rtlCol="0" anchor="ctr" wrap="square" lIns="256032" rIns="256032" tIns="128016" bIns="128016"/>
+          <a:bodyPr wrap="square" lIns="256032" tIns="128016" rIns="256032" bIns="128016" rtlCol="0" anchor="ctr"/>
           <a:lstStyle/>
           <a:p>
             <a:pPr algn="ctr">
@@ -11966,6 +12123,7 @@
           <a:lstStyle/>
           <a:p>
             <a:pPr algn="ctr"/>
+            <a:endParaRPr/>
           </a:p>
         </p:txBody>
       </p:sp>
@@ -12039,7 +12197,7 @@
           <a:noFill/>
         </p:spPr>
         <p:txBody>
-          <a:bodyPr wrap="square" anchor="t" lIns="0" rIns="0" tIns="0" bIns="0">
+          <a:bodyPr wrap="square" lIns="0" tIns="0" rIns="0" bIns="0" anchor="t">
             <a:spAutoFit/>
           </a:bodyPr>
           <a:lstStyle/>
@@ -12066,17 +12224,17 @@
       </p:sp>
     </p:spTree>
   </p:cSld>
-  <p:transition spd="fast">
-    <p:fade/>
-  </p:transition>
   <p:clrMapOvr>
     <a:masterClrMapping/>
   </p:clrMapOvr>
+  <p:transition>
+    <p:fade/>
+  </p:transition>
 </p:sld>
 </file>
 
 <file path=ppt/slides/slide16.xml><?xml version="1.0" encoding="utf-8"?>
-<p:sld xmlns:a="http://schemas.openxmlformats.org/drawingml/2006/main" xmlns:p="http://schemas.openxmlformats.org/presentationml/2006/main" xmlns:r="http://schemas.openxmlformats.org/officeDocument/2006/relationships">
+<p:sld xmlns:a="http://schemas.openxmlformats.org/drawingml/2006/main" xmlns:r="http://schemas.openxmlformats.org/officeDocument/2006/relationships" xmlns:p="http://schemas.openxmlformats.org/presentationml/2006/main">
   <p:cSld>
     <p:bg>
       <p:bgPr>
@@ -12092,7 +12250,14 @@
         <p:cNvGrpSpPr/>
         <p:nvPr/>
       </p:nvGrpSpPr>
-      <p:grpSpPr/>
+      <p:grpSpPr>
+        <a:xfrm>
+          <a:off x="0" y="0"/>
+          <a:ext cx="0" cy="0"/>
+          <a:chOff x="0" y="0"/>
+          <a:chExt cx="0" cy="0"/>
+        </a:xfrm>
+      </p:grpSpPr>
       <p:sp>
         <p:nvSpPr>
           <p:cNvPr id="2" name="Rectangle 1"/>
@@ -12134,6 +12299,7 @@
           <a:lstStyle/>
           <a:p>
             <a:pPr algn="ctr"/>
+            <a:endParaRPr/>
           </a:p>
         </p:txBody>
       </p:sp>
@@ -12174,7 +12340,7 @@
           </a:fontRef>
         </p:style>
         <p:txBody>
-          <a:bodyPr rtlCol="0" anchor="ctr" lIns="256032" rIns="45720" tIns="18288" bIns="18288"/>
+          <a:bodyPr lIns="256032" tIns="18288" rIns="45720" bIns="18288" rtlCol="0" anchor="ctr"/>
           <a:lstStyle/>
           <a:p>
             <a:pPr algn="l"/>
@@ -12199,7 +12365,7 @@
         <p:spPr>
           <a:xfrm>
             <a:off x="822960" y="1051560"/>
-            <a:ext cx="10058400" cy="640080"/>
+            <a:ext cx="10058400" cy="400110"/>
           </a:xfrm>
           <a:prstGeom prst="rect">
             <a:avLst/>
@@ -12207,7 +12373,7 @@
           <a:noFill/>
         </p:spPr>
         <p:txBody>
-          <a:bodyPr wrap="square" anchor="t" lIns="0" rIns="0" tIns="0" bIns="0">
+          <a:bodyPr wrap="square" lIns="0" tIns="0" rIns="0" bIns="0" anchor="t">
             <a:spAutoFit/>
           </a:bodyPr>
           <a:lstStyle/>
@@ -12221,13 +12387,67 @@
               </a:spcAft>
             </a:pPr>
             <a:r>
-              <a:rPr sz="2600" b="1" i="0">
+              <a:rPr sz="2600" b="1" i="0" dirty="0">
                 <a:solidFill>
                   <a:srgbClr val="181D2B"/>
                 </a:solidFill>
                 <a:latin typeface="Helvetica Neue"/>
               </a:rPr>
-              <a:t>Pas une maquette Figma. Le vrai rapport.</a:t>
+              <a:t>Pas </a:t>
+            </a:r>
+            <a:r>
+              <a:rPr sz="2600" b="1" i="0" dirty="0" err="1">
+                <a:solidFill>
+                  <a:srgbClr val="181D2B"/>
+                </a:solidFill>
+                <a:latin typeface="Helvetica Neue"/>
+              </a:rPr>
+              <a:t>une</a:t>
+            </a:r>
+            <a:r>
+              <a:rPr sz="2600" b="1" i="0" dirty="0">
+                <a:solidFill>
+                  <a:srgbClr val="181D2B"/>
+                </a:solidFill>
+                <a:latin typeface="Helvetica Neue"/>
+              </a:rPr>
+              <a:t> maquette </a:t>
+            </a:r>
+            <a:r>
+              <a:rPr lang="fr-FR" sz="2600" b="1" dirty="0" err="1">
+                <a:solidFill>
+                  <a:srgbClr val="181D2B"/>
+                </a:solidFill>
+                <a:latin typeface="Helvetica Neue"/>
+              </a:rPr>
+              <a:t>Canva</a:t>
+            </a:r>
+            <a:r>
+              <a:rPr sz="2600" b="1" i="0" dirty="0">
+                <a:solidFill>
+                  <a:srgbClr val="181D2B"/>
+                </a:solidFill>
+                <a:latin typeface="Helvetica Neue"/>
+              </a:rPr>
+              <a:t>. Le </a:t>
+            </a:r>
+            <a:r>
+              <a:rPr sz="2600" b="1" i="0" dirty="0" err="1">
+                <a:solidFill>
+                  <a:srgbClr val="181D2B"/>
+                </a:solidFill>
+                <a:latin typeface="Helvetica Neue"/>
+              </a:rPr>
+              <a:t>vrai</a:t>
+            </a:r>
+            <a:r>
+              <a:rPr sz="2600" b="1" i="0" dirty="0">
+                <a:solidFill>
+                  <a:srgbClr val="181D2B"/>
+                </a:solidFill>
+                <a:latin typeface="Helvetica Neue"/>
+              </a:rPr>
+              <a:t> rapport.</a:t>
             </a:r>
           </a:p>
         </p:txBody>
@@ -12273,6 +12493,7 @@
           <a:lstStyle/>
           <a:p>
             <a:pPr algn="ctr"/>
+            <a:endParaRPr/>
           </a:p>
         </p:txBody>
       </p:sp>
@@ -12317,6 +12538,7 @@
           <a:lstStyle/>
           <a:p>
             <a:pPr algn="ctr"/>
+            <a:endParaRPr/>
           </a:p>
         </p:txBody>
       </p:sp>
@@ -12361,6 +12583,7 @@
           <a:lstStyle/>
           <a:p>
             <a:pPr algn="ctr"/>
+            <a:endParaRPr/>
           </a:p>
         </p:txBody>
       </p:sp>
@@ -12405,6 +12628,7 @@
           <a:lstStyle/>
           <a:p>
             <a:pPr algn="ctr"/>
+            <a:endParaRPr/>
           </a:p>
         </p:txBody>
       </p:sp>
@@ -12449,6 +12673,7 @@
           <a:lstStyle/>
           <a:p>
             <a:pPr algn="ctr"/>
+            <a:endParaRPr/>
           </a:p>
         </p:txBody>
       </p:sp>
@@ -12517,6 +12742,7 @@
           <a:lstStyle/>
           <a:p>
             <a:pPr algn="ctr"/>
+            <a:endParaRPr/>
           </a:p>
         </p:txBody>
       </p:sp>
@@ -12537,7 +12763,7 @@
           <a:noFill/>
         </p:spPr>
         <p:txBody>
-          <a:bodyPr wrap="square" anchor="t" lIns="0" rIns="0" tIns="0" bIns="0">
+          <a:bodyPr wrap="square" lIns="0" tIns="0" rIns="0" bIns="0" anchor="t">
             <a:spAutoFit/>
           </a:bodyPr>
           <a:lstStyle/>
@@ -12632,7 +12858,7 @@
           <a:noFill/>
         </p:spPr>
         <p:txBody>
-          <a:bodyPr wrap="square" anchor="t" lIns="0" rIns="0" tIns="0" bIns="0">
+          <a:bodyPr wrap="square" lIns="0" tIns="0" rIns="0" bIns="0" anchor="t">
             <a:spAutoFit/>
           </a:bodyPr>
           <a:lstStyle/>
@@ -12659,17 +12885,17 @@
       </p:sp>
     </p:spTree>
   </p:cSld>
-  <p:transition spd="fast">
-    <p:fade/>
-  </p:transition>
   <p:clrMapOvr>
     <a:masterClrMapping/>
   </p:clrMapOvr>
+  <p:transition>
+    <p:fade/>
+  </p:transition>
 </p:sld>
 </file>
 
 <file path=ppt/slides/slide17.xml><?xml version="1.0" encoding="utf-8"?>
-<p:sld xmlns:a="http://schemas.openxmlformats.org/drawingml/2006/main" xmlns:p="http://schemas.openxmlformats.org/presentationml/2006/main" xmlns:r="http://schemas.openxmlformats.org/officeDocument/2006/relationships">
+<p:sld xmlns:a="http://schemas.openxmlformats.org/drawingml/2006/main" xmlns:r="http://schemas.openxmlformats.org/officeDocument/2006/relationships" xmlns:p="http://schemas.openxmlformats.org/presentationml/2006/main">
   <p:cSld>
     <p:bg>
       <p:bgPr>
@@ -12685,7 +12911,14 @@
         <p:cNvGrpSpPr/>
         <p:nvPr/>
       </p:nvGrpSpPr>
-      <p:grpSpPr/>
+      <p:grpSpPr>
+        <a:xfrm>
+          <a:off x="0" y="0"/>
+          <a:ext cx="0" cy="0"/>
+          <a:chOff x="0" y="0"/>
+          <a:chExt cx="0" cy="0"/>
+        </a:xfrm>
+      </p:grpSpPr>
       <p:sp>
         <p:nvSpPr>
           <p:cNvPr id="2" name="Rectangle 1"/>
@@ -12727,6 +12960,7 @@
           <a:lstStyle/>
           <a:p>
             <a:pPr algn="ctr"/>
+            <a:endParaRPr/>
           </a:p>
         </p:txBody>
       </p:sp>
@@ -12767,7 +13001,7 @@
           </a:fontRef>
         </p:style>
         <p:txBody>
-          <a:bodyPr rtlCol="0" anchor="ctr" lIns="256032" rIns="45720" tIns="18288" bIns="18288"/>
+          <a:bodyPr lIns="256032" tIns="18288" rIns="45720" bIns="18288" rtlCol="0" anchor="ctr"/>
           <a:lstStyle/>
           <a:p>
             <a:pPr algn="l"/>
@@ -12800,7 +13034,7 @@
           <a:noFill/>
         </p:spPr>
         <p:txBody>
-          <a:bodyPr wrap="square" anchor="t" lIns="0" rIns="0" tIns="0" bIns="0">
+          <a:bodyPr wrap="square" lIns="0" tIns="0" rIns="0" bIns="0" anchor="t">
             <a:spAutoFit/>
           </a:bodyPr>
           <a:lstStyle/>
@@ -12866,6 +13100,7 @@
           <a:lstStyle/>
           <a:p>
             <a:pPr algn="ctr"/>
+            <a:endParaRPr/>
           </a:p>
         </p:txBody>
       </p:sp>
@@ -12906,7 +13141,7 @@
           </a:fontRef>
         </p:style>
         <p:txBody>
-          <a:bodyPr rtlCol="0" anchor="ctr" wrap="square" lIns="54864" rIns="54864"/>
+          <a:bodyPr wrap="square" lIns="54864" rIns="54864" rtlCol="0" anchor="ctr"/>
           <a:lstStyle/>
           <a:p>
             <a:pPr algn="ctr"/>
@@ -12963,6 +13198,7 @@
           <a:lstStyle/>
           <a:p>
             <a:pPr algn="ctr"/>
+            <a:endParaRPr/>
           </a:p>
         </p:txBody>
       </p:sp>
@@ -13007,6 +13243,7 @@
           <a:lstStyle/>
           <a:p>
             <a:pPr algn="ctr"/>
+            <a:endParaRPr/>
           </a:p>
         </p:txBody>
       </p:sp>
@@ -13051,6 +13288,7 @@
           <a:lstStyle/>
           <a:p>
             <a:pPr algn="ctr"/>
+            <a:endParaRPr/>
           </a:p>
         </p:txBody>
       </p:sp>
@@ -13095,6 +13333,7 @@
           <a:lstStyle/>
           <a:p>
             <a:pPr algn="ctr"/>
+            <a:endParaRPr/>
           </a:p>
         </p:txBody>
       </p:sp>
@@ -13139,6 +13378,7 @@
           <a:lstStyle/>
           <a:p>
             <a:pPr algn="ctr"/>
+            <a:endParaRPr/>
           </a:p>
         </p:txBody>
       </p:sp>
@@ -13207,6 +13447,7 @@
           <a:lstStyle/>
           <a:p>
             <a:pPr algn="ctr"/>
+            <a:endParaRPr/>
           </a:p>
         </p:txBody>
       </p:sp>
@@ -13280,7 +13521,7 @@
           <a:noFill/>
         </p:spPr>
         <p:txBody>
-          <a:bodyPr wrap="square" anchor="t" lIns="0" rIns="0" tIns="0" bIns="0">
+          <a:bodyPr wrap="square" lIns="0" tIns="0" rIns="0" bIns="0" anchor="t">
             <a:spAutoFit/>
           </a:bodyPr>
           <a:lstStyle/>
@@ -13307,17 +13548,17 @@
       </p:sp>
     </p:spTree>
   </p:cSld>
-  <p:transition spd="fast">
-    <p:fade/>
-  </p:transition>
   <p:clrMapOvr>
     <a:masterClrMapping/>
   </p:clrMapOvr>
+  <p:transition>
+    <p:fade/>
+  </p:transition>
 </p:sld>
 </file>
 
 <file path=ppt/slides/slide18.xml><?xml version="1.0" encoding="utf-8"?>
-<p:sld xmlns:a="http://schemas.openxmlformats.org/drawingml/2006/main" xmlns:p="http://schemas.openxmlformats.org/presentationml/2006/main" xmlns:r="http://schemas.openxmlformats.org/officeDocument/2006/relationships">
+<p:sld xmlns:a="http://schemas.openxmlformats.org/drawingml/2006/main" xmlns:r="http://schemas.openxmlformats.org/officeDocument/2006/relationships" xmlns:p="http://schemas.openxmlformats.org/presentationml/2006/main">
   <p:cSld>
     <p:bg>
       <p:bgPr>
@@ -13333,7 +13574,14 @@
         <p:cNvGrpSpPr/>
         <p:nvPr/>
       </p:nvGrpSpPr>
-      <p:grpSpPr/>
+      <p:grpSpPr>
+        <a:xfrm>
+          <a:off x="0" y="0"/>
+          <a:ext cx="0" cy="0"/>
+          <a:chOff x="0" y="0"/>
+          <a:chExt cx="0" cy="0"/>
+        </a:xfrm>
+      </p:grpSpPr>
       <p:sp>
         <p:nvSpPr>
           <p:cNvPr id="2" name="Rectangle 1"/>
@@ -13375,6 +13623,7 @@
           <a:lstStyle/>
           <a:p>
             <a:pPr algn="ctr"/>
+            <a:endParaRPr/>
           </a:p>
         </p:txBody>
       </p:sp>
@@ -13415,7 +13664,7 @@
           </a:fontRef>
         </p:style>
         <p:txBody>
-          <a:bodyPr rtlCol="0" anchor="ctr" lIns="256032" rIns="45720" tIns="18288" bIns="18288"/>
+          <a:bodyPr lIns="256032" tIns="18288" rIns="45720" bIns="18288" rtlCol="0" anchor="ctr"/>
           <a:lstStyle/>
           <a:p>
             <a:pPr algn="l"/>
@@ -13448,7 +13697,7 @@
           <a:noFill/>
         </p:spPr>
         <p:txBody>
-          <a:bodyPr wrap="square" anchor="t" lIns="0" rIns="0" tIns="0" bIns="0">
+          <a:bodyPr wrap="square" lIns="0" tIns="0" rIns="0" bIns="0" anchor="t">
             <a:spAutoFit/>
           </a:bodyPr>
           <a:lstStyle/>
@@ -13481,7 +13730,7 @@
         </p:nvSpPr>
         <p:spPr>
           <a:xfrm>
-            <a:off x="822960" y="1627632"/>
+            <a:off x="822960" y="1527273"/>
             <a:ext cx="10058400" cy="365760"/>
           </a:xfrm>
           <a:prstGeom prst="rect">
@@ -13490,7 +13739,7 @@
           <a:noFill/>
         </p:spPr>
         <p:txBody>
-          <a:bodyPr wrap="square" anchor="t" lIns="0" rIns="0" tIns="0" bIns="0">
+          <a:bodyPr wrap="square" lIns="0" tIns="0" rIns="0" bIns="0" anchor="t">
             <a:spAutoFit/>
           </a:bodyPr>
           <a:lstStyle/>
@@ -13523,7 +13772,7 @@
         </p:nvSpPr>
         <p:spPr>
           <a:xfrm>
-            <a:off x="822960" y="2011680"/>
+            <a:off x="822960" y="1911321"/>
             <a:ext cx="2465222" cy="310896"/>
           </a:xfrm>
           <a:prstGeom prst="roundRect">
@@ -13552,7 +13801,7 @@
           </a:fontRef>
         </p:style>
         <p:txBody>
-          <a:bodyPr rtlCol="0" anchor="ctr" wrap="none" lIns="45720" rIns="45720"/>
+          <a:bodyPr wrap="none" lIns="45720" rIns="45720" rtlCol="0" anchor="ctr"/>
           <a:lstStyle/>
           <a:p>
             <a:pPr algn="ctr"/>
@@ -13576,7 +13825,7 @@
         </p:nvSpPr>
         <p:spPr>
           <a:xfrm>
-            <a:off x="2697480" y="2011680"/>
+            <a:off x="2697480" y="1911321"/>
             <a:ext cx="3279952" cy="310896"/>
           </a:xfrm>
           <a:prstGeom prst="roundRect">
@@ -13605,7 +13854,7 @@
           </a:fontRef>
         </p:style>
         <p:txBody>
-          <a:bodyPr rtlCol="0" anchor="ctr" wrap="none" lIns="45720" rIns="45720"/>
+          <a:bodyPr wrap="none" lIns="45720" rIns="45720" rtlCol="0" anchor="ctr"/>
           <a:lstStyle/>
           <a:p>
             <a:pPr algn="ctr"/>
@@ -13629,7 +13878,7 @@
         </p:nvSpPr>
         <p:spPr>
           <a:xfrm>
-            <a:off x="822960" y="2532888"/>
+            <a:off x="822960" y="2432529"/>
             <a:ext cx="2423160" cy="365760"/>
           </a:xfrm>
           <a:prstGeom prst="rect">
@@ -13638,7 +13887,7 @@
           <a:noFill/>
         </p:spPr>
         <p:txBody>
-          <a:bodyPr wrap="square" anchor="t" lIns="0" rIns="0" tIns="0" bIns="0">
+          <a:bodyPr wrap="square" lIns="0" tIns="0" rIns="0" bIns="0" anchor="t">
             <a:spAutoFit/>
           </a:bodyPr>
           <a:lstStyle/>
@@ -13671,7 +13920,7 @@
         </p:nvSpPr>
         <p:spPr>
           <a:xfrm>
-            <a:off x="3383280" y="2450592"/>
+            <a:off x="3383280" y="2350233"/>
             <a:ext cx="7315200" cy="173736"/>
           </a:xfrm>
           <a:prstGeom prst="roundRect">
@@ -13704,6 +13953,7 @@
           <a:lstStyle/>
           <a:p>
             <a:pPr algn="ctr"/>
+            <a:endParaRPr/>
           </a:p>
         </p:txBody>
       </p:sp>
@@ -13715,7 +13965,7 @@
         </p:nvSpPr>
         <p:spPr>
           <a:xfrm>
-            <a:off x="3383280" y="2450592"/>
+            <a:off x="3383280" y="2350233"/>
             <a:ext cx="219456" cy="173736"/>
           </a:xfrm>
           <a:prstGeom prst="roundRect">
@@ -13748,6 +13998,7 @@
           <a:lstStyle/>
           <a:p>
             <a:pPr algn="ctr"/>
+            <a:endParaRPr/>
           </a:p>
         </p:txBody>
       </p:sp>
@@ -13759,7 +14010,7 @@
         </p:nvSpPr>
         <p:spPr>
           <a:xfrm>
-            <a:off x="10789920" y="2432304"/>
+            <a:off x="10789920" y="2331945"/>
             <a:ext cx="640080" cy="274320"/>
           </a:xfrm>
           <a:prstGeom prst="rect">
@@ -13768,7 +14019,7 @@
           <a:noFill/>
         </p:spPr>
         <p:txBody>
-          <a:bodyPr wrap="square" anchor="t" lIns="0" rIns="0" tIns="0" bIns="0">
+          <a:bodyPr wrap="square" lIns="0" tIns="0" rIns="0" bIns="0" anchor="t">
             <a:spAutoFit/>
           </a:bodyPr>
           <a:lstStyle/>
@@ -13801,7 +14052,7 @@
         </p:nvSpPr>
         <p:spPr>
           <a:xfrm>
-            <a:off x="3383280" y="2665476"/>
+            <a:off x="3383280" y="2565117"/>
             <a:ext cx="7315200" cy="173736"/>
           </a:xfrm>
           <a:prstGeom prst="roundRect">
@@ -13834,6 +14085,7 @@
           <a:lstStyle/>
           <a:p>
             <a:pPr algn="ctr"/>
+            <a:endParaRPr/>
           </a:p>
         </p:txBody>
       </p:sp>
@@ -13845,7 +14097,7 @@
         </p:nvSpPr>
         <p:spPr>
           <a:xfrm>
-            <a:off x="3383280" y="2665476"/>
+            <a:off x="3383280" y="2565117"/>
             <a:ext cx="4242816" cy="173736"/>
           </a:xfrm>
           <a:prstGeom prst="roundRect">
@@ -13878,6 +14130,7 @@
           <a:lstStyle/>
           <a:p>
             <a:pPr algn="ctr"/>
+            <a:endParaRPr/>
           </a:p>
         </p:txBody>
       </p:sp>
@@ -13889,7 +14142,7 @@
         </p:nvSpPr>
         <p:spPr>
           <a:xfrm>
-            <a:off x="10789920" y="2647188"/>
+            <a:off x="10789920" y="2546829"/>
             <a:ext cx="640080" cy="274320"/>
           </a:xfrm>
           <a:prstGeom prst="rect">
@@ -13898,7 +14151,7 @@
           <a:noFill/>
         </p:spPr>
         <p:txBody>
-          <a:bodyPr wrap="square" anchor="t" lIns="0" rIns="0" tIns="0" bIns="0">
+          <a:bodyPr wrap="square" lIns="0" tIns="0" rIns="0" bIns="0" anchor="t">
             <a:spAutoFit/>
           </a:bodyPr>
           <a:lstStyle/>
@@ -13931,7 +14184,7 @@
         </p:nvSpPr>
         <p:spPr>
           <a:xfrm>
-            <a:off x="822960" y="3063240"/>
+            <a:off x="822960" y="2962881"/>
             <a:ext cx="2423160" cy="365760"/>
           </a:xfrm>
           <a:prstGeom prst="rect">
@@ -13940,7 +14193,7 @@
           <a:noFill/>
         </p:spPr>
         <p:txBody>
-          <a:bodyPr wrap="square" anchor="t" lIns="0" rIns="0" tIns="0" bIns="0">
+          <a:bodyPr wrap="square" lIns="0" tIns="0" rIns="0" bIns="0" anchor="t">
             <a:spAutoFit/>
           </a:bodyPr>
           <a:lstStyle/>
@@ -13973,7 +14226,7 @@
         </p:nvSpPr>
         <p:spPr>
           <a:xfrm>
-            <a:off x="3383280" y="2980944"/>
+            <a:off x="3383280" y="2880585"/>
             <a:ext cx="7315200" cy="173736"/>
           </a:xfrm>
           <a:prstGeom prst="roundRect">
@@ -14006,6 +14259,7 @@
           <a:lstStyle/>
           <a:p>
             <a:pPr algn="ctr"/>
+            <a:endParaRPr/>
           </a:p>
         </p:txBody>
       </p:sp>
@@ -14017,7 +14271,7 @@
         </p:nvSpPr>
         <p:spPr>
           <a:xfrm>
-            <a:off x="3383280" y="2980944"/>
+            <a:off x="3383280" y="2880585"/>
             <a:ext cx="219456" cy="173736"/>
           </a:xfrm>
           <a:prstGeom prst="roundRect">
@@ -14050,6 +14304,7 @@
           <a:lstStyle/>
           <a:p>
             <a:pPr algn="ctr"/>
+            <a:endParaRPr/>
           </a:p>
         </p:txBody>
       </p:sp>
@@ -14061,7 +14316,7 @@
         </p:nvSpPr>
         <p:spPr>
           <a:xfrm>
-            <a:off x="10789920" y="2962656"/>
+            <a:off x="10789920" y="2862297"/>
             <a:ext cx="640080" cy="274320"/>
           </a:xfrm>
           <a:prstGeom prst="rect">
@@ -14070,7 +14325,7 @@
           <a:noFill/>
         </p:spPr>
         <p:txBody>
-          <a:bodyPr wrap="square" anchor="t" lIns="0" rIns="0" tIns="0" bIns="0">
+          <a:bodyPr wrap="square" lIns="0" tIns="0" rIns="0" bIns="0" anchor="t">
             <a:spAutoFit/>
           </a:bodyPr>
           <a:lstStyle/>
@@ -14103,7 +14358,7 @@
         </p:nvSpPr>
         <p:spPr>
           <a:xfrm>
-            <a:off x="3383280" y="3195828"/>
+            <a:off x="3383280" y="3095469"/>
             <a:ext cx="7315200" cy="173736"/>
           </a:xfrm>
           <a:prstGeom prst="roundRect">
@@ -14136,6 +14391,7 @@
           <a:lstStyle/>
           <a:p>
             <a:pPr algn="ctr"/>
+            <a:endParaRPr/>
           </a:p>
         </p:txBody>
       </p:sp>
@@ -14147,7 +14403,7 @@
         </p:nvSpPr>
         <p:spPr>
           <a:xfrm>
-            <a:off x="3383280" y="3195828"/>
+            <a:off x="3383280" y="3095469"/>
             <a:ext cx="6803136" cy="173736"/>
           </a:xfrm>
           <a:prstGeom prst="roundRect">
@@ -14180,6 +14436,7 @@
           <a:lstStyle/>
           <a:p>
             <a:pPr algn="ctr"/>
+            <a:endParaRPr/>
           </a:p>
         </p:txBody>
       </p:sp>
@@ -14191,7 +14448,7 @@
         </p:nvSpPr>
         <p:spPr>
           <a:xfrm>
-            <a:off x="10789920" y="3177540"/>
+            <a:off x="10789920" y="3077181"/>
             <a:ext cx="640080" cy="274320"/>
           </a:xfrm>
           <a:prstGeom prst="rect">
@@ -14200,7 +14457,7 @@
           <a:noFill/>
         </p:spPr>
         <p:txBody>
-          <a:bodyPr wrap="square" anchor="t" lIns="0" rIns="0" tIns="0" bIns="0">
+          <a:bodyPr wrap="square" lIns="0" tIns="0" rIns="0" bIns="0" anchor="t">
             <a:spAutoFit/>
           </a:bodyPr>
           <a:lstStyle/>
@@ -14233,7 +14490,7 @@
         </p:nvSpPr>
         <p:spPr>
           <a:xfrm>
-            <a:off x="822960" y="3593592"/>
+            <a:off x="822960" y="3493233"/>
             <a:ext cx="2423160" cy="365760"/>
           </a:xfrm>
           <a:prstGeom prst="rect">
@@ -14242,7 +14499,7 @@
           <a:noFill/>
         </p:spPr>
         <p:txBody>
-          <a:bodyPr wrap="square" anchor="t" lIns="0" rIns="0" tIns="0" bIns="0">
+          <a:bodyPr wrap="square" lIns="0" tIns="0" rIns="0" bIns="0" anchor="t">
             <a:spAutoFit/>
           </a:bodyPr>
           <a:lstStyle/>
@@ -14275,7 +14532,7 @@
         </p:nvSpPr>
         <p:spPr>
           <a:xfrm>
-            <a:off x="3383280" y="3511296"/>
+            <a:off x="3383280" y="3410937"/>
             <a:ext cx="7315200" cy="173736"/>
           </a:xfrm>
           <a:prstGeom prst="roundRect">
@@ -14308,6 +14565,7 @@
           <a:lstStyle/>
           <a:p>
             <a:pPr algn="ctr"/>
+            <a:endParaRPr/>
           </a:p>
         </p:txBody>
       </p:sp>
@@ -14319,7 +14577,7 @@
         </p:nvSpPr>
         <p:spPr>
           <a:xfrm>
-            <a:off x="3383280" y="3511296"/>
+            <a:off x="3383280" y="3410937"/>
             <a:ext cx="5705856" cy="173736"/>
           </a:xfrm>
           <a:prstGeom prst="roundRect">
@@ -14352,6 +14610,7 @@
           <a:lstStyle/>
           <a:p>
             <a:pPr algn="ctr"/>
+            <a:endParaRPr/>
           </a:p>
         </p:txBody>
       </p:sp>
@@ -14363,7 +14622,7 @@
         </p:nvSpPr>
         <p:spPr>
           <a:xfrm>
-            <a:off x="10789920" y="3493008"/>
+            <a:off x="10789920" y="3392649"/>
             <a:ext cx="640080" cy="274320"/>
           </a:xfrm>
           <a:prstGeom prst="rect">
@@ -14372,7 +14631,7 @@
           <a:noFill/>
         </p:spPr>
         <p:txBody>
-          <a:bodyPr wrap="square" anchor="t" lIns="0" rIns="0" tIns="0" bIns="0">
+          <a:bodyPr wrap="square" lIns="0" tIns="0" rIns="0" bIns="0" anchor="t">
             <a:spAutoFit/>
           </a:bodyPr>
           <a:lstStyle/>
@@ -14405,7 +14664,7 @@
         </p:nvSpPr>
         <p:spPr>
           <a:xfrm>
-            <a:off x="3383280" y="3726180"/>
+            <a:off x="3383280" y="3625821"/>
             <a:ext cx="7315200" cy="173736"/>
           </a:xfrm>
           <a:prstGeom prst="roundRect">
@@ -14438,6 +14697,7 @@
           <a:lstStyle/>
           <a:p>
             <a:pPr algn="ctr"/>
+            <a:endParaRPr/>
           </a:p>
         </p:txBody>
       </p:sp>
@@ -14449,7 +14709,7 @@
         </p:nvSpPr>
         <p:spPr>
           <a:xfrm>
-            <a:off x="3383280" y="3726180"/>
+            <a:off x="3383280" y="3625821"/>
             <a:ext cx="292608" cy="173736"/>
           </a:xfrm>
           <a:prstGeom prst="roundRect">
@@ -14482,6 +14742,7 @@
           <a:lstStyle/>
           <a:p>
             <a:pPr algn="ctr"/>
+            <a:endParaRPr/>
           </a:p>
         </p:txBody>
       </p:sp>
@@ -14493,7 +14754,7 @@
         </p:nvSpPr>
         <p:spPr>
           <a:xfrm>
-            <a:off x="10789920" y="3707892"/>
+            <a:off x="10789920" y="3607533"/>
             <a:ext cx="640080" cy="274320"/>
           </a:xfrm>
           <a:prstGeom prst="rect">
@@ -14502,7 +14763,7 @@
           <a:noFill/>
         </p:spPr>
         <p:txBody>
-          <a:bodyPr wrap="square" anchor="t" lIns="0" rIns="0" tIns="0" bIns="0">
+          <a:bodyPr wrap="square" lIns="0" tIns="0" rIns="0" bIns="0" anchor="t">
             <a:spAutoFit/>
           </a:bodyPr>
           <a:lstStyle/>
@@ -14535,7 +14796,7 @@
         </p:nvSpPr>
         <p:spPr>
           <a:xfrm>
-            <a:off x="822960" y="4123944"/>
+            <a:off x="822960" y="4023585"/>
             <a:ext cx="2423160" cy="365760"/>
           </a:xfrm>
           <a:prstGeom prst="rect">
@@ -14544,7 +14805,7 @@
           <a:noFill/>
         </p:spPr>
         <p:txBody>
-          <a:bodyPr wrap="square" anchor="t" lIns="0" rIns="0" tIns="0" bIns="0">
+          <a:bodyPr wrap="square" lIns="0" tIns="0" rIns="0" bIns="0" anchor="t">
             <a:spAutoFit/>
           </a:bodyPr>
           <a:lstStyle/>
@@ -14577,7 +14838,7 @@
         </p:nvSpPr>
         <p:spPr>
           <a:xfrm>
-            <a:off x="3383280" y="4041648"/>
+            <a:off x="3383280" y="3941289"/>
             <a:ext cx="7315200" cy="173736"/>
           </a:xfrm>
           <a:prstGeom prst="roundRect">
@@ -14610,6 +14871,7 @@
           <a:lstStyle/>
           <a:p>
             <a:pPr algn="ctr"/>
+            <a:endParaRPr/>
           </a:p>
         </p:txBody>
       </p:sp>
@@ -14621,7 +14883,7 @@
         </p:nvSpPr>
         <p:spPr>
           <a:xfrm>
-            <a:off x="3383280" y="4041648"/>
+            <a:off x="3383280" y="3941289"/>
             <a:ext cx="7315200" cy="173736"/>
           </a:xfrm>
           <a:prstGeom prst="roundRect">
@@ -14654,6 +14916,7 @@
           <a:lstStyle/>
           <a:p>
             <a:pPr algn="ctr"/>
+            <a:endParaRPr/>
           </a:p>
         </p:txBody>
       </p:sp>
@@ -14665,7 +14928,7 @@
         </p:nvSpPr>
         <p:spPr>
           <a:xfrm>
-            <a:off x="10789920" y="4023360"/>
+            <a:off x="10789920" y="3923001"/>
             <a:ext cx="640080" cy="274320"/>
           </a:xfrm>
           <a:prstGeom prst="rect">
@@ -14674,7 +14937,7 @@
           <a:noFill/>
         </p:spPr>
         <p:txBody>
-          <a:bodyPr wrap="square" anchor="t" lIns="0" rIns="0" tIns="0" bIns="0">
+          <a:bodyPr wrap="square" lIns="0" tIns="0" rIns="0" bIns="0" anchor="t">
             <a:spAutoFit/>
           </a:bodyPr>
           <a:lstStyle/>
@@ -14707,7 +14970,7 @@
         </p:nvSpPr>
         <p:spPr>
           <a:xfrm>
-            <a:off x="3383280" y="4256532"/>
+            <a:off x="3383280" y="4156173"/>
             <a:ext cx="7315200" cy="173736"/>
           </a:xfrm>
           <a:prstGeom prst="roundRect">
@@ -14740,6 +15003,7 @@
           <a:lstStyle/>
           <a:p>
             <a:pPr algn="ctr"/>
+            <a:endParaRPr/>
           </a:p>
         </p:txBody>
       </p:sp>
@@ -14751,7 +15015,7 @@
         </p:nvSpPr>
         <p:spPr>
           <a:xfrm>
-            <a:off x="3383280" y="4256532"/>
+            <a:off x="3383280" y="4156173"/>
             <a:ext cx="5486400" cy="173736"/>
           </a:xfrm>
           <a:prstGeom prst="roundRect">
@@ -14784,6 +15048,7 @@
           <a:lstStyle/>
           <a:p>
             <a:pPr algn="ctr"/>
+            <a:endParaRPr/>
           </a:p>
         </p:txBody>
       </p:sp>
@@ -14795,7 +15060,7 @@
         </p:nvSpPr>
         <p:spPr>
           <a:xfrm>
-            <a:off x="10789920" y="4238244"/>
+            <a:off x="10789920" y="4137885"/>
             <a:ext cx="640080" cy="274320"/>
           </a:xfrm>
           <a:prstGeom prst="rect">
@@ -14804,7 +15069,7 @@
           <a:noFill/>
         </p:spPr>
         <p:txBody>
-          <a:bodyPr wrap="square" anchor="t" lIns="0" rIns="0" tIns="0" bIns="0">
+          <a:bodyPr wrap="square" lIns="0" tIns="0" rIns="0" bIns="0" anchor="t">
             <a:spAutoFit/>
           </a:bodyPr>
           <a:lstStyle/>
@@ -14837,7 +15102,7 @@
         </p:nvSpPr>
         <p:spPr>
           <a:xfrm>
-            <a:off x="822960" y="4654296"/>
+            <a:off x="822960" y="4553937"/>
             <a:ext cx="2423160" cy="365760"/>
           </a:xfrm>
           <a:prstGeom prst="rect">
@@ -14846,7 +15111,7 @@
           <a:noFill/>
         </p:spPr>
         <p:txBody>
-          <a:bodyPr wrap="square" anchor="t" lIns="0" rIns="0" tIns="0" bIns="0">
+          <a:bodyPr wrap="square" lIns="0" tIns="0" rIns="0" bIns="0" anchor="t">
             <a:spAutoFit/>
           </a:bodyPr>
           <a:lstStyle/>
@@ -14879,7 +15144,7 @@
         </p:nvSpPr>
         <p:spPr>
           <a:xfrm>
-            <a:off x="3383280" y="4572000"/>
+            <a:off x="3383280" y="4471641"/>
             <a:ext cx="7315200" cy="173736"/>
           </a:xfrm>
           <a:prstGeom prst="roundRect">
@@ -14912,6 +15177,7 @@
           <a:lstStyle/>
           <a:p>
             <a:pPr algn="ctr"/>
+            <a:endParaRPr/>
           </a:p>
         </p:txBody>
       </p:sp>
@@ -14923,7 +15189,7 @@
         </p:nvSpPr>
         <p:spPr>
           <a:xfrm>
-            <a:off x="3383280" y="4572000"/>
+            <a:off x="3383280" y="4471641"/>
             <a:ext cx="6437376" cy="173736"/>
           </a:xfrm>
           <a:prstGeom prst="roundRect">
@@ -14956,6 +15222,7 @@
           <a:lstStyle/>
           <a:p>
             <a:pPr algn="ctr"/>
+            <a:endParaRPr/>
           </a:p>
         </p:txBody>
       </p:sp>
@@ -14967,7 +15234,7 @@
         </p:nvSpPr>
         <p:spPr>
           <a:xfrm>
-            <a:off x="10789920" y="4553712"/>
+            <a:off x="10789920" y="4453353"/>
             <a:ext cx="640080" cy="274320"/>
           </a:xfrm>
           <a:prstGeom prst="rect">
@@ -14976,7 +15243,7 @@
           <a:noFill/>
         </p:spPr>
         <p:txBody>
-          <a:bodyPr wrap="square" anchor="t" lIns="0" rIns="0" tIns="0" bIns="0">
+          <a:bodyPr wrap="square" lIns="0" tIns="0" rIns="0" bIns="0" anchor="t">
             <a:spAutoFit/>
           </a:bodyPr>
           <a:lstStyle/>
@@ -15009,7 +15276,7 @@
         </p:nvSpPr>
         <p:spPr>
           <a:xfrm>
-            <a:off x="3383280" y="4786884"/>
+            <a:off x="3383280" y="4686525"/>
             <a:ext cx="7315200" cy="173736"/>
           </a:xfrm>
           <a:prstGeom prst="roundRect">
@@ -15042,6 +15309,7 @@
           <a:lstStyle/>
           <a:p>
             <a:pPr algn="ctr"/>
+            <a:endParaRPr/>
           </a:p>
         </p:txBody>
       </p:sp>
@@ -15053,7 +15321,7 @@
         </p:nvSpPr>
         <p:spPr>
           <a:xfrm>
-            <a:off x="3383280" y="4786884"/>
+            <a:off x="3383280" y="4686525"/>
             <a:ext cx="6437376" cy="173736"/>
           </a:xfrm>
           <a:prstGeom prst="roundRect">
@@ -15086,6 +15354,7 @@
           <a:lstStyle/>
           <a:p>
             <a:pPr algn="ctr"/>
+            <a:endParaRPr/>
           </a:p>
         </p:txBody>
       </p:sp>
@@ -15097,7 +15366,7 @@
         </p:nvSpPr>
         <p:spPr>
           <a:xfrm>
-            <a:off x="10789920" y="4768596"/>
+            <a:off x="10789920" y="4668237"/>
             <a:ext cx="640080" cy="274320"/>
           </a:xfrm>
           <a:prstGeom prst="rect">
@@ -15106,7 +15375,7 @@
           <a:noFill/>
         </p:spPr>
         <p:txBody>
-          <a:bodyPr wrap="square" anchor="t" lIns="0" rIns="0" tIns="0" bIns="0">
+          <a:bodyPr wrap="square" lIns="0" tIns="0" rIns="0" bIns="0" anchor="t">
             <a:spAutoFit/>
           </a:bodyPr>
           <a:lstStyle/>
@@ -15139,7 +15408,7 @@
         </p:nvSpPr>
         <p:spPr>
           <a:xfrm>
-            <a:off x="822960" y="5184648"/>
+            <a:off x="822960" y="5084289"/>
             <a:ext cx="2423160" cy="365760"/>
           </a:xfrm>
           <a:prstGeom prst="rect">
@@ -15148,7 +15417,7 @@
           <a:noFill/>
         </p:spPr>
         <p:txBody>
-          <a:bodyPr wrap="square" anchor="t" lIns="0" rIns="0" tIns="0" bIns="0">
+          <a:bodyPr wrap="square" lIns="0" tIns="0" rIns="0" bIns="0" anchor="t">
             <a:spAutoFit/>
           </a:bodyPr>
           <a:lstStyle/>
@@ -15181,7 +15450,7 @@
         </p:nvSpPr>
         <p:spPr>
           <a:xfrm>
-            <a:off x="3383280" y="5102352"/>
+            <a:off x="3383280" y="5001993"/>
             <a:ext cx="7315200" cy="173736"/>
           </a:xfrm>
           <a:prstGeom prst="roundRect">
@@ -15214,6 +15483,7 @@
           <a:lstStyle/>
           <a:p>
             <a:pPr algn="ctr"/>
+            <a:endParaRPr/>
           </a:p>
         </p:txBody>
       </p:sp>
@@ -15225,7 +15495,7 @@
         </p:nvSpPr>
         <p:spPr>
           <a:xfrm>
-            <a:off x="3383280" y="5102352"/>
+            <a:off x="3383280" y="5001993"/>
             <a:ext cx="219456" cy="173736"/>
           </a:xfrm>
           <a:prstGeom prst="roundRect">
@@ -15258,6 +15528,7 @@
           <a:lstStyle/>
           <a:p>
             <a:pPr algn="ctr"/>
+            <a:endParaRPr/>
           </a:p>
         </p:txBody>
       </p:sp>
@@ -15269,7 +15540,7 @@
         </p:nvSpPr>
         <p:spPr>
           <a:xfrm>
-            <a:off x="10789920" y="5084064"/>
+            <a:off x="10789920" y="4983705"/>
             <a:ext cx="640080" cy="274320"/>
           </a:xfrm>
           <a:prstGeom prst="rect">
@@ -15278,7 +15549,7 @@
           <a:noFill/>
         </p:spPr>
         <p:txBody>
-          <a:bodyPr wrap="square" anchor="t" lIns="0" rIns="0" tIns="0" bIns="0">
+          <a:bodyPr wrap="square" lIns="0" tIns="0" rIns="0" bIns="0" anchor="t">
             <a:spAutoFit/>
           </a:bodyPr>
           <a:lstStyle/>
@@ -15311,7 +15582,7 @@
         </p:nvSpPr>
         <p:spPr>
           <a:xfrm>
-            <a:off x="3383280" y="5317236"/>
+            <a:off x="3383280" y="5216877"/>
             <a:ext cx="7315200" cy="173736"/>
           </a:xfrm>
           <a:prstGeom prst="roundRect">
@@ -15344,6 +15615,7 @@
           <a:lstStyle/>
           <a:p>
             <a:pPr algn="ctr"/>
+            <a:endParaRPr/>
           </a:p>
         </p:txBody>
       </p:sp>
@@ -15355,7 +15627,7 @@
         </p:nvSpPr>
         <p:spPr>
           <a:xfrm>
-            <a:off x="3383280" y="5317236"/>
+            <a:off x="3383280" y="5216877"/>
             <a:ext cx="219456" cy="173736"/>
           </a:xfrm>
           <a:prstGeom prst="roundRect">
@@ -15388,6 +15660,7 @@
           <a:lstStyle/>
           <a:p>
             <a:pPr algn="ctr"/>
+            <a:endParaRPr/>
           </a:p>
         </p:txBody>
       </p:sp>
@@ -15399,7 +15672,7 @@
         </p:nvSpPr>
         <p:spPr>
           <a:xfrm>
-            <a:off x="10789920" y="5298948"/>
+            <a:off x="10789920" y="5198589"/>
             <a:ext cx="640080" cy="274320"/>
           </a:xfrm>
           <a:prstGeom prst="rect">
@@ -15408,7 +15681,7 @@
           <a:noFill/>
         </p:spPr>
         <p:txBody>
-          <a:bodyPr wrap="square" anchor="t" lIns="0" rIns="0" tIns="0" bIns="0">
+          <a:bodyPr wrap="square" lIns="0" tIns="0" rIns="0" bIns="0" anchor="t">
             <a:spAutoFit/>
           </a:bodyPr>
           <a:lstStyle/>
@@ -15441,8 +15714,8 @@
         </p:nvSpPr>
         <p:spPr>
           <a:xfrm>
-            <a:off x="822960" y="5623560"/>
-            <a:ext cx="10058400" cy="292608"/>
+            <a:off x="822960" y="5500899"/>
+            <a:ext cx="10058400" cy="176972"/>
           </a:xfrm>
           <a:prstGeom prst="rect">
             <a:avLst/>
@@ -15450,7 +15723,7 @@
           <a:noFill/>
         </p:spPr>
         <p:txBody>
-          <a:bodyPr wrap="square" anchor="t" lIns="0" rIns="0" tIns="0" bIns="0">
+          <a:bodyPr wrap="square" lIns="0" tIns="0" rIns="0" bIns="0" anchor="t">
             <a:spAutoFit/>
           </a:bodyPr>
           <a:lstStyle/>
@@ -15464,13 +15737,130 @@
               </a:spcAft>
             </a:pPr>
             <a:r>
-              <a:rPr sz="1150" b="0" i="1">
+              <a:rPr sz="1150" b="0" i="1" dirty="0">
                 <a:solidFill>
                   <a:srgbClr val="5C6272"/>
                 </a:solidFill>
                 <a:latin typeface="Helvetica Neue"/>
               </a:rPr>
-              <a:t>JUnit couvre la logique métier ; Cucumber couvre la couche REST — presque aucun recouvrement.</a:t>
+              <a:t>JUnit </a:t>
+            </a:r>
+            <a:r>
+              <a:rPr sz="1150" b="0" i="1" dirty="0" err="1">
+                <a:solidFill>
+                  <a:srgbClr val="5C6272"/>
+                </a:solidFill>
+                <a:latin typeface="Helvetica Neue"/>
+              </a:rPr>
+              <a:t>couvre</a:t>
+            </a:r>
+            <a:r>
+              <a:rPr sz="1150" b="0" i="1" dirty="0">
+                <a:solidFill>
+                  <a:srgbClr val="5C6272"/>
+                </a:solidFill>
+                <a:latin typeface="Helvetica Neue"/>
+              </a:rPr>
+              <a:t> la </a:t>
+            </a:r>
+            <a:r>
+              <a:rPr sz="1150" b="0" i="1" dirty="0" err="1">
+                <a:solidFill>
+                  <a:srgbClr val="5C6272"/>
+                </a:solidFill>
+                <a:latin typeface="Helvetica Neue"/>
+              </a:rPr>
+              <a:t>logique</a:t>
+            </a:r>
+            <a:r>
+              <a:rPr sz="1150" b="0" i="1" dirty="0">
+                <a:solidFill>
+                  <a:srgbClr val="5C6272"/>
+                </a:solidFill>
+                <a:latin typeface="Helvetica Neue"/>
+              </a:rPr>
+              <a:t> métier ; Cucumber </a:t>
+            </a:r>
+            <a:r>
+              <a:rPr sz="1150" b="0" i="1" dirty="0" err="1">
+                <a:solidFill>
+                  <a:srgbClr val="5C6272"/>
+                </a:solidFill>
+                <a:latin typeface="Helvetica Neue"/>
+              </a:rPr>
+              <a:t>couvre</a:t>
+            </a:r>
+            <a:r>
+              <a:rPr sz="1150" b="0" i="1" dirty="0">
+                <a:solidFill>
+                  <a:srgbClr val="5C6272"/>
+                </a:solidFill>
+                <a:latin typeface="Helvetica Neue"/>
+              </a:rPr>
+              <a:t> la couche REST — pr</a:t>
+            </a:r>
+            <a:r>
+              <a:rPr lang="fr-FR" sz="1150" b="0" i="1" dirty="0" err="1">
+                <a:solidFill>
+                  <a:srgbClr val="5C6272"/>
+                </a:solidFill>
+                <a:latin typeface="Helvetica Neue"/>
+              </a:rPr>
+              <a:t>é</a:t>
+            </a:r>
+            <a:r>
+              <a:rPr sz="1150" b="0" i="1" dirty="0" err="1">
+                <a:solidFill>
+                  <a:srgbClr val="5C6272"/>
+                </a:solidFill>
+                <a:latin typeface="Helvetica Neue"/>
+              </a:rPr>
+              <a:t>sque</a:t>
+            </a:r>
+            <a:r>
+              <a:rPr sz="1150" b="0" i="1" dirty="0">
+                <a:solidFill>
+                  <a:srgbClr val="5C6272"/>
+                </a:solidFill>
+                <a:latin typeface="Helvetica Neue"/>
+              </a:rPr>
+              <a:t> </a:t>
+            </a:r>
+            <a:r>
+              <a:rPr sz="1150" b="0" i="1" dirty="0" err="1">
+                <a:solidFill>
+                  <a:srgbClr val="5C6272"/>
+                </a:solidFill>
+                <a:latin typeface="Helvetica Neue"/>
+              </a:rPr>
+              <a:t>aucun</a:t>
+            </a:r>
+            <a:r>
+              <a:rPr sz="1150" b="0" i="1" dirty="0">
+                <a:solidFill>
+                  <a:srgbClr val="5C6272"/>
+                </a:solidFill>
+                <a:latin typeface="Helvetica Neue"/>
+              </a:rPr>
+              <a:t> </a:t>
+            </a:r>
+            <a:r>
+              <a:rPr sz="1150" b="0" i="1" dirty="0" err="1">
+                <a:solidFill>
+                  <a:srgbClr val="5C6272"/>
+                </a:solidFill>
+                <a:latin typeface="Helvetica Neue"/>
+              </a:rPr>
+              <a:t>recouvrement</a:t>
+            </a:r>
+            <a:r>
+              <a:rPr sz="1150" b="0" i="1" dirty="0">
+                <a:solidFill>
+                  <a:srgbClr val="5C6272"/>
+                </a:solidFill>
+                <a:latin typeface="Helvetica Neue"/>
+              </a:rPr>
+              <a:t>.</a:t>
             </a:r>
           </a:p>
         </p:txBody>
@@ -15483,7 +15873,7 @@
         </p:nvSpPr>
         <p:spPr>
           <a:xfrm>
-            <a:off x="822960" y="5943600"/>
+            <a:off x="867561" y="5832090"/>
             <a:ext cx="10424160" cy="548640"/>
           </a:xfrm>
           <a:prstGeom prst="roundRect">
@@ -15512,7 +15902,7 @@
           </a:fontRef>
         </p:style>
         <p:txBody>
-          <a:bodyPr rtlCol="0" anchor="ctr" wrap="square" lIns="256032" rIns="256032" tIns="128016" bIns="128016"/>
+          <a:bodyPr wrap="square" lIns="256032" tIns="128016" rIns="256032" bIns="128016" rtlCol="0" anchor="ctr"/>
           <a:lstStyle/>
           <a:p>
             <a:pPr algn="ctr">
@@ -15521,13 +15911,85 @@
               </a:lnSpc>
             </a:pPr>
             <a:r>
-              <a:rPr sz="1200" b="1" i="0">
+              <a:rPr sz="1200" b="1" i="0" dirty="0">
                 <a:solidFill>
                   <a:srgbClr val="0C111F"/>
                 </a:solidFill>
                 <a:latin typeface="Helvetica Neue"/>
               </a:rPr>
-              <a:t>Mention spéciale à RecurrenceRequest : 0 % partout. Personne n'y a jamais touché. Personne.</a:t>
+              <a:t>Mention </a:t>
+            </a:r>
+            <a:r>
+              <a:rPr sz="1200" b="1" i="0" dirty="0" err="1">
+                <a:solidFill>
+                  <a:srgbClr val="0C111F"/>
+                </a:solidFill>
+                <a:latin typeface="Helvetica Neue"/>
+              </a:rPr>
+              <a:t>spéciale</a:t>
+            </a:r>
+            <a:r>
+              <a:rPr sz="1200" b="1" i="0" dirty="0">
+                <a:solidFill>
+                  <a:srgbClr val="0C111F"/>
+                </a:solidFill>
+                <a:latin typeface="Helvetica Neue"/>
+              </a:rPr>
+              <a:t> à </a:t>
+            </a:r>
+            <a:r>
+              <a:rPr sz="1200" b="1" i="0" dirty="0" err="1">
+                <a:solidFill>
+                  <a:srgbClr val="0C111F"/>
+                </a:solidFill>
+                <a:latin typeface="Helvetica Neue"/>
+              </a:rPr>
+              <a:t>RecurrenceRequest</a:t>
+            </a:r>
+            <a:r>
+              <a:rPr sz="1200" b="1" i="0" dirty="0">
+                <a:solidFill>
+                  <a:srgbClr val="0C111F"/>
+                </a:solidFill>
+                <a:latin typeface="Helvetica Neue"/>
+              </a:rPr>
+              <a:t> : 0 % </a:t>
+            </a:r>
+            <a:r>
+              <a:rPr sz="1200" b="1" i="0" dirty="0" err="1">
+                <a:solidFill>
+                  <a:srgbClr val="0C111F"/>
+                </a:solidFill>
+                <a:latin typeface="Helvetica Neue"/>
+              </a:rPr>
+              <a:t>partout</a:t>
+            </a:r>
+            <a:r>
+              <a:rPr sz="1200" b="1" i="0" dirty="0">
+                <a:solidFill>
+                  <a:srgbClr val="0C111F"/>
+                </a:solidFill>
+                <a:latin typeface="Helvetica Neue"/>
+              </a:rPr>
+              <a:t>. Personne </a:t>
+            </a:r>
+            <a:r>
+              <a:rPr sz="1200" b="1" i="0" dirty="0" err="1">
+                <a:solidFill>
+                  <a:srgbClr val="0C111F"/>
+                </a:solidFill>
+                <a:latin typeface="Helvetica Neue"/>
+              </a:rPr>
+              <a:t>n'y</a:t>
+            </a:r>
+            <a:r>
+              <a:rPr sz="1200" b="1" i="0" dirty="0">
+                <a:solidFill>
+                  <a:srgbClr val="0C111F"/>
+                </a:solidFill>
+                <a:latin typeface="Helvetica Neue"/>
+              </a:rPr>
+              <a:t> a jamais touché. Personne.</a:t>
             </a:r>
           </a:p>
         </p:txBody>
@@ -15540,8 +16002,8 @@
         </p:nvSpPr>
         <p:spPr>
           <a:xfrm>
-            <a:off x="1143000" y="5705856"/>
-            <a:ext cx="256032" cy="256032"/>
+            <a:off x="1187601" y="5673406"/>
+            <a:ext cx="182880" cy="176972"/>
           </a:xfrm>
           <a:prstGeom prst="triangle">
             <a:avLst/>
@@ -15573,6 +16035,7 @@
           <a:lstStyle/>
           <a:p>
             <a:pPr algn="ctr"/>
+            <a:endParaRPr/>
           </a:p>
         </p:txBody>
       </p:sp>
@@ -15646,7 +16109,7 @@
           <a:noFill/>
         </p:spPr>
         <p:txBody>
-          <a:bodyPr wrap="square" anchor="t" lIns="0" rIns="0" tIns="0" bIns="0">
+          <a:bodyPr wrap="square" lIns="0" tIns="0" rIns="0" bIns="0" anchor="t">
             <a:spAutoFit/>
           </a:bodyPr>
           <a:lstStyle/>
@@ -15673,17 +16136,17 @@
       </p:sp>
     </p:spTree>
   </p:cSld>
-  <p:transition spd="fast">
-    <p:fade/>
-  </p:transition>
   <p:clrMapOvr>
     <a:masterClrMapping/>
   </p:clrMapOvr>
+  <p:transition>
+    <p:fade/>
+  </p:transition>
 </p:sld>
 </file>
 
 <file path=ppt/slides/slide19.xml><?xml version="1.0" encoding="utf-8"?>
-<p:sld xmlns:a="http://schemas.openxmlformats.org/drawingml/2006/main" xmlns:p="http://schemas.openxmlformats.org/presentationml/2006/main" xmlns:r="http://schemas.openxmlformats.org/officeDocument/2006/relationships">
+<p:sld xmlns:a="http://schemas.openxmlformats.org/drawingml/2006/main" xmlns:r="http://schemas.openxmlformats.org/officeDocument/2006/relationships" xmlns:p="http://schemas.openxmlformats.org/presentationml/2006/main">
   <p:cSld>
     <p:bg>
       <p:bgPr>
@@ -15699,7 +16162,14 @@
         <p:cNvGrpSpPr/>
         <p:nvPr/>
       </p:nvGrpSpPr>
-      <p:grpSpPr/>
+      <p:grpSpPr>
+        <a:xfrm>
+          <a:off x="0" y="0"/>
+          <a:ext cx="0" cy="0"/>
+          <a:chOff x="0" y="0"/>
+          <a:chExt cx="0" cy="0"/>
+        </a:xfrm>
+      </p:grpSpPr>
       <p:sp>
         <p:nvSpPr>
           <p:cNvPr id="2" name="Parallelogram 1"/>
@@ -15737,7 +16207,7 @@
           </a:fontRef>
         </p:style>
         <p:txBody>
-          <a:bodyPr rtlCol="0" anchor="ctr" lIns="256032" rIns="45720" tIns="18288" bIns="18288"/>
+          <a:bodyPr lIns="256032" tIns="18288" rIns="45720" bIns="18288" rtlCol="0" anchor="ctr"/>
           <a:lstStyle/>
           <a:p>
             <a:pPr algn="l"/>
@@ -15770,7 +16240,7 @@
           <a:noFill/>
         </p:spPr>
         <p:txBody>
-          <a:bodyPr wrap="square" anchor="t" lIns="0" rIns="0" tIns="0" bIns="0">
+          <a:bodyPr wrap="square" lIns="0" tIns="0" rIns="0" bIns="0" anchor="t">
             <a:spAutoFit/>
           </a:bodyPr>
           <a:lstStyle/>
@@ -15836,6 +16306,7 @@
           <a:lstStyle/>
           <a:p>
             <a:pPr algn="ctr"/>
+            <a:endParaRPr/>
           </a:p>
         </p:txBody>
       </p:sp>
@@ -15880,7 +16351,7 @@
           <a:noFill/>
         </p:spPr>
         <p:txBody>
-          <a:bodyPr wrap="square" anchor="t" lIns="0" rIns="0" tIns="0" bIns="0">
+          <a:bodyPr wrap="square" lIns="0" tIns="0" rIns="0" bIns="0" anchor="t">
             <a:spAutoFit/>
           </a:bodyPr>
           <a:lstStyle/>
@@ -15975,7 +16446,7 @@
           <a:noFill/>
         </p:spPr>
         <p:txBody>
-          <a:bodyPr wrap="square" anchor="t" lIns="0" rIns="0" tIns="0" bIns="0">
+          <a:bodyPr wrap="square" lIns="0" tIns="0" rIns="0" bIns="0" anchor="t">
             <a:spAutoFit/>
           </a:bodyPr>
           <a:lstStyle/>
@@ -16002,17 +16473,17 @@
       </p:sp>
     </p:spTree>
   </p:cSld>
-  <p:transition spd="fast">
-    <p:fade/>
-  </p:transition>
   <p:clrMapOvr>
     <a:masterClrMapping/>
   </p:clrMapOvr>
+  <p:transition>
+    <p:fade/>
+  </p:transition>
 </p:sld>
 </file>
 
 <file path=ppt/slides/slide2.xml><?xml version="1.0" encoding="utf-8"?>
-<p:sld xmlns:a="http://schemas.openxmlformats.org/drawingml/2006/main" xmlns:p="http://schemas.openxmlformats.org/presentationml/2006/main" xmlns:r="http://schemas.openxmlformats.org/officeDocument/2006/relationships">
+<p:sld xmlns:a="http://schemas.openxmlformats.org/drawingml/2006/main" xmlns:r="http://schemas.openxmlformats.org/officeDocument/2006/relationships" xmlns:p="http://schemas.openxmlformats.org/presentationml/2006/main">
   <p:cSld>
     <p:bg>
       <p:bgPr>
@@ -16028,7 +16499,14 @@
         <p:cNvGrpSpPr/>
         <p:nvPr/>
       </p:nvGrpSpPr>
-      <p:grpSpPr/>
+      <p:grpSpPr>
+        <a:xfrm>
+          <a:off x="0" y="0"/>
+          <a:ext cx="0" cy="0"/>
+          <a:chOff x="0" y="0"/>
+          <a:chExt cx="0" cy="0"/>
+        </a:xfrm>
+      </p:grpSpPr>
       <p:sp>
         <p:nvSpPr>
           <p:cNvPr id="2" name="Rectangle 1"/>
@@ -16070,6 +16548,7 @@
           <a:lstStyle/>
           <a:p>
             <a:pPr algn="ctr"/>
+            <a:endParaRPr/>
           </a:p>
         </p:txBody>
       </p:sp>
@@ -16110,7 +16589,7 @@
           </a:fontRef>
         </p:style>
         <p:txBody>
-          <a:bodyPr rtlCol="0" anchor="ctr" lIns="256032" rIns="45720" tIns="18288" bIns="18288"/>
+          <a:bodyPr lIns="256032" tIns="18288" rIns="45720" bIns="18288" rtlCol="0" anchor="ctr"/>
           <a:lstStyle/>
           <a:p>
             <a:pPr algn="l"/>
@@ -16143,7 +16622,7 @@
           <a:noFill/>
         </p:spPr>
         <p:txBody>
-          <a:bodyPr wrap="square" anchor="t" lIns="0" rIns="0" tIns="0" bIns="0">
+          <a:bodyPr wrap="square" lIns="0" tIns="0" rIns="0" bIns="0" anchor="t">
             <a:spAutoFit/>
           </a:bodyPr>
           <a:lstStyle/>
@@ -16185,7 +16664,7 @@
           <a:noFill/>
         </p:spPr>
         <p:txBody>
-          <a:bodyPr wrap="square" anchor="t" lIns="0" rIns="0" tIns="0" bIns="0">
+          <a:bodyPr wrap="square" lIns="0" tIns="0" rIns="0" bIns="0" anchor="t">
             <a:spAutoFit/>
           </a:bodyPr>
           <a:lstStyle/>
@@ -16251,6 +16730,7 @@
           <a:lstStyle/>
           <a:p>
             <a:pPr algn="ctr"/>
+            <a:endParaRPr/>
           </a:p>
         </p:txBody>
       </p:sp>
@@ -16295,6 +16775,7 @@
           <a:lstStyle/>
           <a:p>
             <a:pPr algn="ctr"/>
+            <a:endParaRPr/>
           </a:p>
         </p:txBody>
       </p:sp>
@@ -16339,6 +16820,7 @@
           <a:lstStyle/>
           <a:p>
             <a:pPr algn="ctr"/>
+            <a:endParaRPr/>
           </a:p>
         </p:txBody>
       </p:sp>
@@ -16359,7 +16841,7 @@
           <a:noFill/>
         </p:spPr>
         <p:txBody>
-          <a:bodyPr wrap="square" anchor="t" lIns="0" rIns="0" tIns="0" bIns="0">
+          <a:bodyPr wrap="square" lIns="0" tIns="0" rIns="0" bIns="0" anchor="t">
             <a:spAutoFit/>
           </a:bodyPr>
           <a:lstStyle/>
@@ -16401,7 +16883,7 @@
           <a:noFill/>
         </p:spPr>
         <p:txBody>
-          <a:bodyPr wrap="square" anchor="t" lIns="0" rIns="0" tIns="0" bIns="0">
+          <a:bodyPr wrap="square" lIns="0" tIns="0" rIns="0" bIns="0" anchor="t">
             <a:spAutoFit/>
           </a:bodyPr>
           <a:lstStyle/>
@@ -16467,6 +16949,7 @@
           <a:lstStyle/>
           <a:p>
             <a:pPr algn="ctr"/>
+            <a:endParaRPr/>
           </a:p>
         </p:txBody>
       </p:sp>
@@ -16511,6 +16994,7 @@
           <a:lstStyle/>
           <a:p>
             <a:pPr algn="ctr"/>
+            <a:endParaRPr/>
           </a:p>
         </p:txBody>
       </p:sp>
@@ -16555,6 +17039,7 @@
           <a:lstStyle/>
           <a:p>
             <a:pPr algn="ctr"/>
+            <a:endParaRPr/>
           </a:p>
         </p:txBody>
       </p:sp>
@@ -16575,7 +17060,7 @@
           <a:noFill/>
         </p:spPr>
         <p:txBody>
-          <a:bodyPr wrap="square" anchor="t" lIns="0" rIns="0" tIns="0" bIns="0">
+          <a:bodyPr wrap="square" lIns="0" tIns="0" rIns="0" bIns="0" anchor="t">
             <a:spAutoFit/>
           </a:bodyPr>
           <a:lstStyle/>
@@ -16617,7 +17102,7 @@
           <a:noFill/>
         </p:spPr>
         <p:txBody>
-          <a:bodyPr wrap="square" anchor="t" lIns="0" rIns="0" tIns="0" bIns="0">
+          <a:bodyPr wrap="square" lIns="0" tIns="0" rIns="0" bIns="0" anchor="t">
             <a:spAutoFit/>
           </a:bodyPr>
           <a:lstStyle/>
@@ -16683,6 +17168,7 @@
           <a:lstStyle/>
           <a:p>
             <a:pPr algn="ctr"/>
+            <a:endParaRPr/>
           </a:p>
         </p:txBody>
       </p:sp>
@@ -16727,6 +17213,7 @@
           <a:lstStyle/>
           <a:p>
             <a:pPr algn="ctr"/>
+            <a:endParaRPr/>
           </a:p>
         </p:txBody>
       </p:sp>
@@ -16771,6 +17258,7 @@
           <a:lstStyle/>
           <a:p>
             <a:pPr algn="ctr"/>
+            <a:endParaRPr/>
           </a:p>
         </p:txBody>
       </p:sp>
@@ -16791,7 +17279,7 @@
           <a:noFill/>
         </p:spPr>
         <p:txBody>
-          <a:bodyPr wrap="square" anchor="t" lIns="0" rIns="0" tIns="0" bIns="0">
+          <a:bodyPr wrap="square" lIns="0" tIns="0" rIns="0" bIns="0" anchor="t">
             <a:spAutoFit/>
           </a:bodyPr>
           <a:lstStyle/>
@@ -16833,7 +17321,7 @@
           <a:noFill/>
         </p:spPr>
         <p:txBody>
-          <a:bodyPr wrap="square" anchor="t" lIns="0" rIns="0" tIns="0" bIns="0">
+          <a:bodyPr wrap="square" lIns="0" tIns="0" rIns="0" bIns="0" anchor="t">
             <a:spAutoFit/>
           </a:bodyPr>
           <a:lstStyle/>
@@ -16895,7 +17383,7 @@
           </a:fontRef>
         </p:style>
         <p:txBody>
-          <a:bodyPr rtlCol="0" anchor="ctr" wrap="square" lIns="256032" rIns="256032" tIns="128016" bIns="128016"/>
+          <a:bodyPr wrap="square" lIns="256032" tIns="128016" rIns="256032" bIns="128016" rtlCol="0" anchor="ctr"/>
           <a:lstStyle/>
           <a:p>
             <a:pPr algn="ctr">
@@ -16956,6 +17444,7 @@
           <a:lstStyle/>
           <a:p>
             <a:pPr algn="ctr"/>
+            <a:endParaRPr/>
           </a:p>
         </p:txBody>
       </p:sp>
@@ -17029,7 +17518,7 @@
           <a:noFill/>
         </p:spPr>
         <p:txBody>
-          <a:bodyPr wrap="square" anchor="t" lIns="0" rIns="0" tIns="0" bIns="0">
+          <a:bodyPr wrap="square" lIns="0" tIns="0" rIns="0" bIns="0" anchor="t">
             <a:spAutoFit/>
           </a:bodyPr>
           <a:lstStyle/>
@@ -17056,17 +17545,17 @@
       </p:sp>
     </p:spTree>
   </p:cSld>
-  <p:transition spd="fast">
-    <p:fade/>
-  </p:transition>
   <p:clrMapOvr>
     <a:masterClrMapping/>
   </p:clrMapOvr>
+  <p:transition>
+    <p:fade/>
+  </p:transition>
 </p:sld>
 </file>
 
 <file path=ppt/slides/slide20.xml><?xml version="1.0" encoding="utf-8"?>
-<p:sld xmlns:a="http://schemas.openxmlformats.org/drawingml/2006/main" xmlns:p="http://schemas.openxmlformats.org/presentationml/2006/main" xmlns:r="http://schemas.openxmlformats.org/officeDocument/2006/relationships">
+<p:sld xmlns:a="http://schemas.openxmlformats.org/drawingml/2006/main" xmlns:r="http://schemas.openxmlformats.org/officeDocument/2006/relationships" xmlns:p="http://schemas.openxmlformats.org/presentationml/2006/main">
   <p:cSld>
     <p:bg>
       <p:bgPr>
@@ -17082,7 +17571,14 @@
         <p:cNvGrpSpPr/>
         <p:nvPr/>
       </p:nvGrpSpPr>
-      <p:grpSpPr/>
+      <p:grpSpPr>
+        <a:xfrm>
+          <a:off x="0" y="0"/>
+          <a:ext cx="0" cy="0"/>
+          <a:chOff x="0" y="0"/>
+          <a:chExt cx="0" cy="0"/>
+        </a:xfrm>
+      </p:grpSpPr>
       <p:sp>
         <p:nvSpPr>
           <p:cNvPr id="2" name="Rectangle 1"/>
@@ -17124,6 +17620,7 @@
           <a:lstStyle/>
           <a:p>
             <a:pPr algn="ctr"/>
+            <a:endParaRPr/>
           </a:p>
         </p:txBody>
       </p:sp>
@@ -17164,7 +17661,7 @@
           </a:fontRef>
         </p:style>
         <p:txBody>
-          <a:bodyPr rtlCol="0" anchor="ctr" lIns="256032" rIns="45720" tIns="18288" bIns="18288"/>
+          <a:bodyPr lIns="256032" tIns="18288" rIns="45720" bIns="18288" rtlCol="0" anchor="ctr"/>
           <a:lstStyle/>
           <a:p>
             <a:pPr algn="l"/>
@@ -17197,7 +17694,7 @@
           <a:noFill/>
         </p:spPr>
         <p:txBody>
-          <a:bodyPr wrap="square" anchor="t" lIns="0" rIns="0" tIns="0" bIns="0">
+          <a:bodyPr wrap="square" lIns="0" tIns="0" rIns="0" bIns="0" anchor="t">
             <a:spAutoFit/>
           </a:bodyPr>
           <a:lstStyle/>
@@ -17263,6 +17760,7 @@
           <a:lstStyle/>
           <a:p>
             <a:pPr algn="ctr"/>
+            <a:endParaRPr/>
           </a:p>
         </p:txBody>
       </p:sp>
@@ -17303,7 +17801,7 @@
           </a:fontRef>
         </p:style>
         <p:txBody>
-          <a:bodyPr rtlCol="0" anchor="ctr" wrap="square" lIns="54864" rIns="54864"/>
+          <a:bodyPr wrap="square" lIns="54864" rIns="54864" rtlCol="0" anchor="ctr"/>
           <a:lstStyle/>
           <a:p>
             <a:pPr algn="ctr"/>
@@ -17336,7 +17834,7 @@
           <a:noFill/>
         </p:spPr>
         <p:txBody>
-          <a:bodyPr wrap="square" anchor="t" lIns="0" rIns="0" tIns="0" bIns="0">
+          <a:bodyPr wrap="square" lIns="0" tIns="0" rIns="0" bIns="0" anchor="t">
             <a:spAutoFit/>
           </a:bodyPr>
           <a:lstStyle/>
@@ -17378,7 +17876,7 @@
           <a:noFill/>
         </p:spPr>
         <p:txBody>
-          <a:bodyPr wrap="square" anchor="t" lIns="0" rIns="0" tIns="0" bIns="0">
+          <a:bodyPr wrap="square" lIns="0" tIns="0" rIns="0" bIns="0" anchor="t">
             <a:spAutoFit/>
           </a:bodyPr>
           <a:lstStyle/>
@@ -17444,6 +17942,7 @@
           <a:lstStyle/>
           <a:p>
             <a:pPr algn="ctr"/>
+            <a:endParaRPr/>
           </a:p>
         </p:txBody>
       </p:sp>
@@ -17484,7 +17983,7 @@
           </a:fontRef>
         </p:style>
         <p:txBody>
-          <a:bodyPr rtlCol="0" anchor="ctr" wrap="square" lIns="54864" rIns="54864"/>
+          <a:bodyPr wrap="square" lIns="54864" rIns="54864" rtlCol="0" anchor="ctr"/>
           <a:lstStyle/>
           <a:p>
             <a:pPr algn="ctr"/>
@@ -17517,7 +18016,7 @@
           <a:noFill/>
         </p:spPr>
         <p:txBody>
-          <a:bodyPr wrap="square" anchor="t" lIns="0" rIns="0" tIns="0" bIns="0">
+          <a:bodyPr wrap="square" lIns="0" tIns="0" rIns="0" bIns="0" anchor="t">
             <a:spAutoFit/>
           </a:bodyPr>
           <a:lstStyle/>
@@ -17559,7 +18058,7 @@
           <a:noFill/>
         </p:spPr>
         <p:txBody>
-          <a:bodyPr wrap="square" anchor="t" lIns="0" rIns="0" tIns="0" bIns="0">
+          <a:bodyPr wrap="square" lIns="0" tIns="0" rIns="0" bIns="0" anchor="t">
             <a:spAutoFit/>
           </a:bodyPr>
           <a:lstStyle/>
@@ -17625,6 +18124,7 @@
           <a:lstStyle/>
           <a:p>
             <a:pPr algn="ctr"/>
+            <a:endParaRPr/>
           </a:p>
         </p:txBody>
       </p:sp>
@@ -17665,7 +18165,7 @@
           </a:fontRef>
         </p:style>
         <p:txBody>
-          <a:bodyPr rtlCol="0" anchor="ctr" wrap="square" lIns="54864" rIns="54864"/>
+          <a:bodyPr wrap="square" lIns="54864" rIns="54864" rtlCol="0" anchor="ctr"/>
           <a:lstStyle/>
           <a:p>
             <a:pPr algn="ctr"/>
@@ -17698,7 +18198,7 @@
           <a:noFill/>
         </p:spPr>
         <p:txBody>
-          <a:bodyPr wrap="square" anchor="t" lIns="0" rIns="0" tIns="0" bIns="0">
+          <a:bodyPr wrap="square" lIns="0" tIns="0" rIns="0" bIns="0" anchor="t">
             <a:spAutoFit/>
           </a:bodyPr>
           <a:lstStyle/>
@@ -17740,7 +18240,7 @@
           <a:noFill/>
         </p:spPr>
         <p:txBody>
-          <a:bodyPr wrap="square" anchor="t" lIns="0" rIns="0" tIns="0" bIns="0">
+          <a:bodyPr wrap="square" lIns="0" tIns="0" rIns="0" bIns="0" anchor="t">
             <a:spAutoFit/>
           </a:bodyPr>
           <a:lstStyle/>
@@ -17782,7 +18282,7 @@
           <a:noFill/>
         </p:spPr>
         <p:txBody>
-          <a:bodyPr wrap="square" anchor="t" lIns="0" rIns="0" tIns="0" bIns="0">
+          <a:bodyPr wrap="square" lIns="0" tIns="0" rIns="0" bIns="0" anchor="t">
             <a:spAutoFit/>
           </a:bodyPr>
           <a:lstStyle/>
@@ -17877,7 +18377,7 @@
           <a:noFill/>
         </p:spPr>
         <p:txBody>
-          <a:bodyPr wrap="square" anchor="t" lIns="0" rIns="0" tIns="0" bIns="0">
+          <a:bodyPr wrap="square" lIns="0" tIns="0" rIns="0" bIns="0" anchor="t">
             <a:spAutoFit/>
           </a:bodyPr>
           <a:lstStyle/>
@@ -17904,17 +18404,17 @@
       </p:sp>
     </p:spTree>
   </p:cSld>
-  <p:transition spd="fast">
-    <p:fade/>
-  </p:transition>
   <p:clrMapOvr>
     <a:masterClrMapping/>
   </p:clrMapOvr>
+  <p:transition>
+    <p:fade/>
+  </p:transition>
 </p:sld>
 </file>
 
 <file path=ppt/slides/slide21.xml><?xml version="1.0" encoding="utf-8"?>
-<p:sld xmlns:a="http://schemas.openxmlformats.org/drawingml/2006/main" xmlns:p="http://schemas.openxmlformats.org/presentationml/2006/main" xmlns:r="http://schemas.openxmlformats.org/officeDocument/2006/relationships">
+<p:sld xmlns:a="http://schemas.openxmlformats.org/drawingml/2006/main" xmlns:r="http://schemas.openxmlformats.org/officeDocument/2006/relationships" xmlns:p="http://schemas.openxmlformats.org/presentationml/2006/main">
   <p:cSld>
     <p:bg>
       <p:bgPr>
@@ -17930,7 +18430,14 @@
         <p:cNvGrpSpPr/>
         <p:nvPr/>
       </p:nvGrpSpPr>
-      <p:grpSpPr/>
+      <p:grpSpPr>
+        <a:xfrm>
+          <a:off x="0" y="0"/>
+          <a:ext cx="0" cy="0"/>
+          <a:chOff x="0" y="0"/>
+          <a:chExt cx="0" cy="0"/>
+        </a:xfrm>
+      </p:grpSpPr>
       <p:sp>
         <p:nvSpPr>
           <p:cNvPr id="2" name="Parallelogram 1"/>
@@ -17968,18 +18475,18 @@
           </a:fontRef>
         </p:style>
         <p:txBody>
-          <a:bodyPr rtlCol="0" anchor="ctr" lIns="256032" rIns="45720" tIns="18288" bIns="18288"/>
+          <a:bodyPr lIns="256032" tIns="18288" rIns="45720" bIns="18288" rtlCol="0" anchor="ctr"/>
           <a:lstStyle/>
           <a:p>
             <a:pPr algn="l"/>
             <a:r>
-              <a:rPr sz="1150" b="1">
+              <a:rPr sz="1150" b="1" dirty="0">
                 <a:solidFill>
                   <a:srgbClr val="0C111F"/>
                 </a:solidFill>
                 <a:latin typeface="Helvetica Neue"/>
               </a:rPr>
-              <a:t>BONUS (PROMIS, PAS SOAR)</a:t>
+              <a:t>BONUS</a:t>
             </a:r>
           </a:p>
         </p:txBody>
@@ -18001,7 +18508,7 @@
           <a:noFill/>
         </p:spPr>
         <p:txBody>
-          <a:bodyPr wrap="square" anchor="t" lIns="0" rIns="0" tIns="0" bIns="0">
+          <a:bodyPr wrap="square" lIns="0" tIns="0" rIns="0" bIns="0" anchor="t">
             <a:spAutoFit/>
           </a:bodyPr>
           <a:lstStyle/>
@@ -18043,7 +18550,7 @@
           <a:noFill/>
         </p:spPr>
         <p:txBody>
-          <a:bodyPr wrap="square" anchor="t" lIns="0" rIns="0" tIns="0" bIns="0">
+          <a:bodyPr wrap="square" lIns="0" tIns="0" rIns="0" bIns="0" anchor="t">
             <a:spAutoFit/>
           </a:bodyPr>
           <a:lstStyle/>
@@ -18109,6 +18616,7 @@
           <a:lstStyle/>
           <a:p>
             <a:pPr algn="ctr"/>
+            <a:endParaRPr/>
           </a:p>
         </p:txBody>
       </p:sp>
@@ -18153,6 +18661,7 @@
           <a:lstStyle/>
           <a:p>
             <a:pPr algn="ctr"/>
+            <a:endParaRPr/>
           </a:p>
         </p:txBody>
       </p:sp>
@@ -18197,6 +18706,7 @@
           <a:lstStyle/>
           <a:p>
             <a:pPr algn="ctr"/>
+            <a:endParaRPr/>
           </a:p>
         </p:txBody>
       </p:sp>
@@ -18217,7 +18727,7 @@
           <a:noFill/>
         </p:spPr>
         <p:txBody>
-          <a:bodyPr wrap="square" anchor="t" lIns="0" rIns="0" tIns="0" bIns="0">
+          <a:bodyPr wrap="square" lIns="0" tIns="0" rIns="0" bIns="0" anchor="t">
             <a:spAutoFit/>
           </a:bodyPr>
           <a:lstStyle/>
@@ -18259,7 +18769,7 @@
           <a:noFill/>
         </p:spPr>
         <p:txBody>
-          <a:bodyPr wrap="square" anchor="t" lIns="0" rIns="0" tIns="0" bIns="0">
+          <a:bodyPr wrap="square" lIns="0" tIns="0" rIns="0" bIns="0" anchor="t">
             <a:spAutoFit/>
           </a:bodyPr>
           <a:lstStyle/>
@@ -18325,6 +18835,7 @@
           <a:lstStyle/>
           <a:p>
             <a:pPr algn="ctr"/>
+            <a:endParaRPr/>
           </a:p>
         </p:txBody>
       </p:sp>
@@ -18369,6 +18880,7 @@
           <a:lstStyle/>
           <a:p>
             <a:pPr algn="ctr"/>
+            <a:endParaRPr/>
           </a:p>
         </p:txBody>
       </p:sp>
@@ -18413,6 +18925,7 @@
           <a:lstStyle/>
           <a:p>
             <a:pPr algn="ctr"/>
+            <a:endParaRPr/>
           </a:p>
         </p:txBody>
       </p:sp>
@@ -18433,7 +18946,7 @@
           <a:noFill/>
         </p:spPr>
         <p:txBody>
-          <a:bodyPr wrap="square" anchor="t" lIns="0" rIns="0" tIns="0" bIns="0">
+          <a:bodyPr wrap="square" lIns="0" tIns="0" rIns="0" bIns="0" anchor="t">
             <a:spAutoFit/>
           </a:bodyPr>
           <a:lstStyle/>
@@ -18475,7 +18988,7 @@
           <a:noFill/>
         </p:spPr>
         <p:txBody>
-          <a:bodyPr wrap="square" anchor="t" lIns="0" rIns="0" tIns="0" bIns="0">
+          <a:bodyPr wrap="square" lIns="0" tIns="0" rIns="0" bIns="0" anchor="t">
             <a:spAutoFit/>
           </a:bodyPr>
           <a:lstStyle/>
@@ -18541,6 +19054,7 @@
           <a:lstStyle/>
           <a:p>
             <a:pPr algn="ctr"/>
+            <a:endParaRPr/>
           </a:p>
         </p:txBody>
       </p:sp>
@@ -18585,6 +19099,7 @@
           <a:lstStyle/>
           <a:p>
             <a:pPr algn="ctr"/>
+            <a:endParaRPr/>
           </a:p>
         </p:txBody>
       </p:sp>
@@ -18629,6 +19144,7 @@
           <a:lstStyle/>
           <a:p>
             <a:pPr algn="ctr"/>
+            <a:endParaRPr/>
           </a:p>
         </p:txBody>
       </p:sp>
@@ -18649,7 +19165,7 @@
           <a:noFill/>
         </p:spPr>
         <p:txBody>
-          <a:bodyPr wrap="square" anchor="t" lIns="0" rIns="0" tIns="0" bIns="0">
+          <a:bodyPr wrap="square" lIns="0" tIns="0" rIns="0" bIns="0" anchor="t">
             <a:spAutoFit/>
           </a:bodyPr>
           <a:lstStyle/>
@@ -18691,7 +19207,7 @@
           <a:noFill/>
         </p:spPr>
         <p:txBody>
-          <a:bodyPr wrap="square" anchor="t" lIns="0" rIns="0" tIns="0" bIns="0">
+          <a:bodyPr wrap="square" lIns="0" tIns="0" rIns="0" bIns="0" anchor="t">
             <a:spAutoFit/>
           </a:bodyPr>
           <a:lstStyle/>
@@ -18733,7 +19249,7 @@
           <a:noFill/>
         </p:spPr>
         <p:txBody>
-          <a:bodyPr wrap="square" anchor="t" lIns="0" rIns="0" tIns="0" bIns="0">
+          <a:bodyPr wrap="square" lIns="0" tIns="0" rIns="0" bIns="0" anchor="t">
             <a:spAutoFit/>
           </a:bodyPr>
           <a:lstStyle/>
@@ -18799,6 +19315,7 @@
           <a:lstStyle/>
           <a:p>
             <a:pPr algn="ctr"/>
+            <a:endParaRPr/>
           </a:p>
         </p:txBody>
       </p:sp>
@@ -18843,6 +19360,7 @@
           <a:lstStyle/>
           <a:p>
             <a:pPr algn="ctr"/>
+            <a:endParaRPr/>
           </a:p>
         </p:txBody>
       </p:sp>
@@ -18887,6 +19405,7 @@
           <a:lstStyle/>
           <a:p>
             <a:pPr algn="ctr"/>
+            <a:endParaRPr/>
           </a:p>
         </p:txBody>
       </p:sp>
@@ -18931,6 +19450,7 @@
           <a:lstStyle/>
           <a:p>
             <a:pPr algn="ctr"/>
+            <a:endParaRPr/>
           </a:p>
         </p:txBody>
       </p:sp>
@@ -18951,7 +19471,7 @@
           <a:noFill/>
         </p:spPr>
         <p:txBody>
-          <a:bodyPr wrap="square" anchor="t" lIns="0" rIns="0" tIns="0" bIns="0">
+          <a:bodyPr wrap="square" lIns="0" tIns="0" rIns="0" bIns="0" anchor="t">
             <a:spAutoFit/>
           </a:bodyPr>
           <a:lstStyle/>
@@ -19012,7 +19532,7 @@
           <a:noFill/>
         </p:spPr>
         <p:txBody>
-          <a:bodyPr wrap="square" anchor="t" lIns="0" rIns="0" tIns="0" bIns="0">
+          <a:bodyPr wrap="square" lIns="0" tIns="0" rIns="0" bIns="0" anchor="t">
             <a:spAutoFit/>
           </a:bodyPr>
           <a:lstStyle/>
@@ -19107,7 +19627,7 @@
           <a:noFill/>
         </p:spPr>
         <p:txBody>
-          <a:bodyPr wrap="square" anchor="t" lIns="0" rIns="0" tIns="0" bIns="0">
+          <a:bodyPr wrap="square" lIns="0" tIns="0" rIns="0" bIns="0" anchor="t">
             <a:spAutoFit/>
           </a:bodyPr>
           <a:lstStyle/>
@@ -19134,17 +19654,17 @@
       </p:sp>
     </p:spTree>
   </p:cSld>
-  <p:transition spd="fast">
-    <p:fade/>
-  </p:transition>
   <p:clrMapOvr>
     <a:masterClrMapping/>
   </p:clrMapOvr>
+  <p:transition>
+    <p:fade/>
+  </p:transition>
 </p:sld>
 </file>
 
 <file path=ppt/slides/slide22.xml><?xml version="1.0" encoding="utf-8"?>
-<p:sld xmlns:a="http://schemas.openxmlformats.org/drawingml/2006/main" xmlns:p="http://schemas.openxmlformats.org/presentationml/2006/main" xmlns:r="http://schemas.openxmlformats.org/officeDocument/2006/relationships">
+<p:sld xmlns:a="http://schemas.openxmlformats.org/drawingml/2006/main" xmlns:r="http://schemas.openxmlformats.org/officeDocument/2006/relationships" xmlns:p="http://schemas.openxmlformats.org/presentationml/2006/main">
   <p:cSld>
     <p:bg>
       <p:bgPr>
@@ -19160,7 +19680,14 @@
         <p:cNvGrpSpPr/>
         <p:nvPr/>
       </p:nvGrpSpPr>
-      <p:grpSpPr/>
+      <p:grpSpPr>
+        <a:xfrm>
+          <a:off x="0" y="0"/>
+          <a:ext cx="0" cy="0"/>
+          <a:chOff x="0" y="0"/>
+          <a:chExt cx="0" cy="0"/>
+        </a:xfrm>
+      </p:grpSpPr>
       <p:sp>
         <p:nvSpPr>
           <p:cNvPr id="2" name="Rectangle 1"/>
@@ -19202,6 +19729,7 @@
           <a:lstStyle/>
           <a:p>
             <a:pPr algn="ctr"/>
+            <a:endParaRPr/>
           </a:p>
         </p:txBody>
       </p:sp>
@@ -19242,7 +19770,7 @@
           </a:fontRef>
         </p:style>
         <p:txBody>
-          <a:bodyPr rtlCol="0" anchor="ctr" lIns="256032" rIns="45720" tIns="18288" bIns="18288"/>
+          <a:bodyPr lIns="256032" tIns="18288" rIns="45720" bIns="18288" rtlCol="0" anchor="ctr"/>
           <a:lstStyle/>
           <a:p>
             <a:pPr algn="l"/>
@@ -19275,7 +19803,7 @@
           <a:noFill/>
         </p:spPr>
         <p:txBody>
-          <a:bodyPr wrap="square" anchor="t" lIns="0" rIns="0" tIns="0" bIns="0">
+          <a:bodyPr wrap="square" lIns="0" tIns="0" rIns="0" bIns="0" anchor="t">
             <a:spAutoFit/>
           </a:bodyPr>
           <a:lstStyle/>
@@ -19341,6 +19869,7 @@
           <a:lstStyle/>
           <a:p>
             <a:pPr algn="ctr"/>
+            <a:endParaRPr/>
           </a:p>
         </p:txBody>
       </p:sp>
@@ -19385,6 +19914,7 @@
           <a:lstStyle/>
           <a:p>
             <a:pPr algn="ctr"/>
+            <a:endParaRPr/>
           </a:p>
         </p:txBody>
       </p:sp>
@@ -19429,6 +19959,7 @@
           <a:lstStyle/>
           <a:p>
             <a:pPr algn="ctr"/>
+            <a:endParaRPr/>
           </a:p>
         </p:txBody>
       </p:sp>
@@ -19473,6 +20004,7 @@
           <a:lstStyle/>
           <a:p>
             <a:pPr algn="ctr"/>
+            <a:endParaRPr/>
           </a:p>
         </p:txBody>
       </p:sp>
@@ -19517,6 +20049,7 @@
           <a:lstStyle/>
           <a:p>
             <a:pPr algn="ctr"/>
+            <a:endParaRPr/>
           </a:p>
         </p:txBody>
       </p:sp>
@@ -19585,6 +20118,7 @@
           <a:lstStyle/>
           <a:p>
             <a:pPr algn="ctr"/>
+            <a:endParaRPr/>
           </a:p>
         </p:txBody>
       </p:sp>
@@ -19605,7 +20139,7 @@
           <a:noFill/>
         </p:spPr>
         <p:txBody>
-          <a:bodyPr wrap="square" anchor="t" lIns="0" rIns="0" tIns="0" bIns="0">
+          <a:bodyPr wrap="square" lIns="0" tIns="0" rIns="0" bIns="0" anchor="t">
             <a:spAutoFit/>
           </a:bodyPr>
           <a:lstStyle/>
@@ -19700,7 +20234,7 @@
           <a:noFill/>
         </p:spPr>
         <p:txBody>
-          <a:bodyPr wrap="square" anchor="t" lIns="0" rIns="0" tIns="0" bIns="0">
+          <a:bodyPr wrap="square" lIns="0" tIns="0" rIns="0" bIns="0" anchor="t">
             <a:spAutoFit/>
           </a:bodyPr>
           <a:lstStyle/>
@@ -19727,17 +20261,17 @@
       </p:sp>
     </p:spTree>
   </p:cSld>
-  <p:transition spd="fast">
-    <p:fade/>
-  </p:transition>
   <p:clrMapOvr>
     <a:masterClrMapping/>
   </p:clrMapOvr>
+  <p:transition>
+    <p:fade/>
+  </p:transition>
 </p:sld>
 </file>
 
 <file path=ppt/slides/slide23.xml><?xml version="1.0" encoding="utf-8"?>
-<p:sld xmlns:a="http://schemas.openxmlformats.org/drawingml/2006/main" xmlns:p="http://schemas.openxmlformats.org/presentationml/2006/main" xmlns:r="http://schemas.openxmlformats.org/officeDocument/2006/relationships">
+<p:sld xmlns:a="http://schemas.openxmlformats.org/drawingml/2006/main" xmlns:r="http://schemas.openxmlformats.org/officeDocument/2006/relationships" xmlns:p="http://schemas.openxmlformats.org/presentationml/2006/main">
   <p:cSld>
     <p:bg>
       <p:bgPr>
@@ -19753,7 +20287,14 @@
         <p:cNvGrpSpPr/>
         <p:nvPr/>
       </p:nvGrpSpPr>
-      <p:grpSpPr/>
+      <p:grpSpPr>
+        <a:xfrm>
+          <a:off x="0" y="0"/>
+          <a:ext cx="0" cy="0"/>
+          <a:chOff x="0" y="0"/>
+          <a:chExt cx="0" cy="0"/>
+        </a:xfrm>
+      </p:grpSpPr>
       <p:sp>
         <p:nvSpPr>
           <p:cNvPr id="2" name="Rectangle 1"/>
@@ -19795,6 +20336,7 @@
           <a:lstStyle/>
           <a:p>
             <a:pPr algn="ctr"/>
+            <a:endParaRPr/>
           </a:p>
         </p:txBody>
       </p:sp>
@@ -19835,7 +20377,7 @@
           </a:fontRef>
         </p:style>
         <p:txBody>
-          <a:bodyPr rtlCol="0" anchor="ctr" lIns="256032" rIns="45720" tIns="18288" bIns="18288"/>
+          <a:bodyPr lIns="256032" tIns="18288" rIns="45720" bIns="18288" rtlCol="0" anchor="ctr"/>
           <a:lstStyle/>
           <a:p>
             <a:pPr algn="l"/>
@@ -19868,7 +20410,7 @@
           <a:noFill/>
         </p:spPr>
         <p:txBody>
-          <a:bodyPr wrap="square" anchor="t" lIns="0" rIns="0" tIns="0" bIns="0">
+          <a:bodyPr wrap="square" lIns="0" tIns="0" rIns="0" bIns="0" anchor="t">
             <a:spAutoFit/>
           </a:bodyPr>
           <a:lstStyle/>
@@ -19934,6 +20476,7 @@
           <a:lstStyle/>
           <a:p>
             <a:pPr algn="ctr"/>
+            <a:endParaRPr/>
           </a:p>
         </p:txBody>
       </p:sp>
@@ -19978,6 +20521,7 @@
           <a:lstStyle/>
           <a:p>
             <a:pPr algn="ctr"/>
+            <a:endParaRPr/>
           </a:p>
         </p:txBody>
       </p:sp>
@@ -20022,6 +20566,7 @@
           <a:lstStyle/>
           <a:p>
             <a:pPr algn="ctr"/>
+            <a:endParaRPr/>
           </a:p>
         </p:txBody>
       </p:sp>
@@ -20066,6 +20611,7 @@
           <a:lstStyle/>
           <a:p>
             <a:pPr algn="ctr"/>
+            <a:endParaRPr/>
           </a:p>
         </p:txBody>
       </p:sp>
@@ -20110,6 +20656,7 @@
           <a:lstStyle/>
           <a:p>
             <a:pPr algn="ctr"/>
+            <a:endParaRPr/>
           </a:p>
         </p:txBody>
       </p:sp>
@@ -20178,6 +20725,7 @@
           <a:lstStyle/>
           <a:p>
             <a:pPr algn="ctr"/>
+            <a:endParaRPr/>
           </a:p>
         </p:txBody>
       </p:sp>
@@ -20198,7 +20746,7 @@
           <a:noFill/>
         </p:spPr>
         <p:txBody>
-          <a:bodyPr wrap="square" anchor="t" lIns="0" rIns="0" tIns="0" bIns="0">
+          <a:bodyPr wrap="square" lIns="0" tIns="0" rIns="0" bIns="0" anchor="t">
             <a:spAutoFit/>
           </a:bodyPr>
           <a:lstStyle/>
@@ -20293,7 +20841,7 @@
           <a:noFill/>
         </p:spPr>
         <p:txBody>
-          <a:bodyPr wrap="square" anchor="t" lIns="0" rIns="0" tIns="0" bIns="0">
+          <a:bodyPr wrap="square" lIns="0" tIns="0" rIns="0" bIns="0" anchor="t">
             <a:spAutoFit/>
           </a:bodyPr>
           <a:lstStyle/>
@@ -20320,17 +20868,17 @@
       </p:sp>
     </p:spTree>
   </p:cSld>
-  <p:transition spd="fast">
-    <p:fade/>
-  </p:transition>
   <p:clrMapOvr>
     <a:masterClrMapping/>
   </p:clrMapOvr>
+  <p:transition>
+    <p:fade/>
+  </p:transition>
 </p:sld>
 </file>
 
 <file path=ppt/slides/slide24.xml><?xml version="1.0" encoding="utf-8"?>
-<p:sld xmlns:a="http://schemas.openxmlformats.org/drawingml/2006/main" xmlns:p="http://schemas.openxmlformats.org/presentationml/2006/main" xmlns:r="http://schemas.openxmlformats.org/officeDocument/2006/relationships">
+<p:sld xmlns:a="http://schemas.openxmlformats.org/drawingml/2006/main" xmlns:r="http://schemas.openxmlformats.org/officeDocument/2006/relationships" xmlns:p="http://schemas.openxmlformats.org/presentationml/2006/main">
   <p:cSld>
     <p:bg>
       <p:bgPr>
@@ -20346,7 +20894,14 @@
         <p:cNvGrpSpPr/>
         <p:nvPr/>
       </p:nvGrpSpPr>
-      <p:grpSpPr/>
+      <p:grpSpPr>
+        <a:xfrm>
+          <a:off x="0" y="0"/>
+          <a:ext cx="0" cy="0"/>
+          <a:chOff x="0" y="0"/>
+          <a:chExt cx="0" cy="0"/>
+        </a:xfrm>
+      </p:grpSpPr>
       <p:sp>
         <p:nvSpPr>
           <p:cNvPr id="2" name="Rectangle 1"/>
@@ -20388,6 +20943,7 @@
           <a:lstStyle/>
           <a:p>
             <a:pPr algn="ctr"/>
+            <a:endParaRPr/>
           </a:p>
         </p:txBody>
       </p:sp>
@@ -20428,7 +20984,7 @@
           </a:fontRef>
         </p:style>
         <p:txBody>
-          <a:bodyPr rtlCol="0" anchor="ctr" lIns="256032" rIns="45720" tIns="18288" bIns="18288"/>
+          <a:bodyPr lIns="256032" tIns="18288" rIns="45720" bIns="18288" rtlCol="0" anchor="ctr"/>
           <a:lstStyle/>
           <a:p>
             <a:pPr algn="l"/>
@@ -20461,7 +21017,7 @@
           <a:noFill/>
         </p:spPr>
         <p:txBody>
-          <a:bodyPr wrap="square" anchor="t" lIns="0" rIns="0" tIns="0" bIns="0">
+          <a:bodyPr wrap="square" lIns="0" tIns="0" rIns="0" bIns="0" anchor="t">
             <a:spAutoFit/>
           </a:bodyPr>
           <a:lstStyle/>
@@ -20527,6 +21083,7 @@
           <a:lstStyle/>
           <a:p>
             <a:pPr algn="ctr"/>
+            <a:endParaRPr/>
           </a:p>
         </p:txBody>
       </p:sp>
@@ -20571,6 +21128,7 @@
           <a:lstStyle/>
           <a:p>
             <a:pPr algn="ctr"/>
+            <a:endParaRPr/>
           </a:p>
         </p:txBody>
       </p:sp>
@@ -20615,6 +21173,7 @@
           <a:lstStyle/>
           <a:p>
             <a:pPr algn="ctr"/>
+            <a:endParaRPr/>
           </a:p>
         </p:txBody>
       </p:sp>
@@ -20659,6 +21218,7 @@
           <a:lstStyle/>
           <a:p>
             <a:pPr algn="ctr"/>
+            <a:endParaRPr/>
           </a:p>
         </p:txBody>
       </p:sp>
@@ -20703,6 +21263,7 @@
           <a:lstStyle/>
           <a:p>
             <a:pPr algn="ctr"/>
+            <a:endParaRPr/>
           </a:p>
         </p:txBody>
       </p:sp>
@@ -20771,6 +21332,7 @@
           <a:lstStyle/>
           <a:p>
             <a:pPr algn="ctr"/>
+            <a:endParaRPr/>
           </a:p>
         </p:txBody>
       </p:sp>
@@ -20791,7 +21353,7 @@
           <a:noFill/>
         </p:spPr>
         <p:txBody>
-          <a:bodyPr wrap="square" anchor="t" lIns="0" rIns="0" tIns="0" bIns="0">
+          <a:bodyPr wrap="square" lIns="0" tIns="0" rIns="0" bIns="0" anchor="t">
             <a:spAutoFit/>
           </a:bodyPr>
           <a:lstStyle/>
@@ -20886,7 +21448,7 @@
           <a:noFill/>
         </p:spPr>
         <p:txBody>
-          <a:bodyPr wrap="square" anchor="t" lIns="0" rIns="0" tIns="0" bIns="0">
+          <a:bodyPr wrap="square" lIns="0" tIns="0" rIns="0" bIns="0" anchor="t">
             <a:spAutoFit/>
           </a:bodyPr>
           <a:lstStyle/>
@@ -20913,17 +21475,17 @@
       </p:sp>
     </p:spTree>
   </p:cSld>
-  <p:transition spd="fast">
-    <p:fade/>
-  </p:transition>
   <p:clrMapOvr>
     <a:masterClrMapping/>
   </p:clrMapOvr>
+  <p:transition>
+    <p:fade/>
+  </p:transition>
 </p:sld>
 </file>
 
 <file path=ppt/slides/slide25.xml><?xml version="1.0" encoding="utf-8"?>
-<p:sld xmlns:a="http://schemas.openxmlformats.org/drawingml/2006/main" xmlns:p="http://schemas.openxmlformats.org/presentationml/2006/main" xmlns:r="http://schemas.openxmlformats.org/officeDocument/2006/relationships">
+<p:sld xmlns:a="http://schemas.openxmlformats.org/drawingml/2006/main" xmlns:r="http://schemas.openxmlformats.org/officeDocument/2006/relationships" xmlns:p="http://schemas.openxmlformats.org/presentationml/2006/main">
   <p:cSld>
     <p:bg>
       <p:bgPr>
@@ -20939,7 +21501,14 @@
         <p:cNvGrpSpPr/>
         <p:nvPr/>
       </p:nvGrpSpPr>
-      <p:grpSpPr/>
+      <p:grpSpPr>
+        <a:xfrm>
+          <a:off x="0" y="0"/>
+          <a:ext cx="0" cy="0"/>
+          <a:chOff x="0" y="0"/>
+          <a:chExt cx="0" cy="0"/>
+        </a:xfrm>
+      </p:grpSpPr>
       <p:sp>
         <p:nvSpPr>
           <p:cNvPr id="2" name="Rectangle 1"/>
@@ -20981,6 +21550,7 @@
           <a:lstStyle/>
           <a:p>
             <a:pPr algn="ctr"/>
+            <a:endParaRPr/>
           </a:p>
         </p:txBody>
       </p:sp>
@@ -21021,7 +21591,7 @@
           </a:fontRef>
         </p:style>
         <p:txBody>
-          <a:bodyPr rtlCol="0" anchor="ctr" lIns="256032" rIns="45720" tIns="18288" bIns="18288"/>
+          <a:bodyPr lIns="256032" tIns="18288" rIns="45720" bIns="18288" rtlCol="0" anchor="ctr"/>
           <a:lstStyle/>
           <a:p>
             <a:pPr algn="l"/>
@@ -21054,7 +21624,7 @@
           <a:noFill/>
         </p:spPr>
         <p:txBody>
-          <a:bodyPr wrap="square" anchor="t" lIns="0" rIns="0" tIns="0" bIns="0">
+          <a:bodyPr wrap="square" lIns="0" tIns="0" rIns="0" bIns="0" anchor="t">
             <a:spAutoFit/>
           </a:bodyPr>
           <a:lstStyle/>
@@ -21116,7 +21686,7 @@
           </a:fontRef>
         </p:style>
         <p:txBody>
-          <a:bodyPr rtlCol="0" anchor="ctr" wrap="none" lIns="45720" rIns="45720"/>
+          <a:bodyPr wrap="none" lIns="45720" rIns="45720" rtlCol="0" anchor="ctr"/>
           <a:lstStyle/>
           <a:p>
             <a:pPr algn="ctr"/>
@@ -21149,7 +21719,7 @@
           <a:noFill/>
         </p:spPr>
         <p:txBody>
-          <a:bodyPr wrap="square" anchor="t" lIns="0" rIns="0" tIns="0" bIns="0">
+          <a:bodyPr wrap="square" lIns="0" tIns="0" rIns="0" bIns="0" anchor="t">
             <a:spAutoFit/>
           </a:bodyPr>
           <a:lstStyle/>
@@ -21191,7 +21761,7 @@
           <a:noFill/>
         </p:spPr>
         <p:txBody>
-          <a:bodyPr wrap="square" anchor="t" lIns="0" rIns="0" tIns="0" bIns="0">
+          <a:bodyPr wrap="square" lIns="0" tIns="0" rIns="0" bIns="0" anchor="t">
             <a:spAutoFit/>
           </a:bodyPr>
           <a:lstStyle/>
@@ -21253,7 +21823,7 @@
           </a:fontRef>
         </p:style>
         <p:txBody>
-          <a:bodyPr rtlCol="0" anchor="ctr" wrap="none" lIns="45720" rIns="45720"/>
+          <a:bodyPr wrap="none" lIns="45720" rIns="45720" rtlCol="0" anchor="ctr"/>
           <a:lstStyle/>
           <a:p>
             <a:pPr algn="ctr"/>
@@ -21286,7 +21856,7 @@
           <a:noFill/>
         </p:spPr>
         <p:txBody>
-          <a:bodyPr wrap="square" anchor="t" lIns="0" rIns="0" tIns="0" bIns="0">
+          <a:bodyPr wrap="square" lIns="0" tIns="0" rIns="0" bIns="0" anchor="t">
             <a:spAutoFit/>
           </a:bodyPr>
           <a:lstStyle/>
@@ -21328,7 +21898,7 @@
           <a:noFill/>
         </p:spPr>
         <p:txBody>
-          <a:bodyPr wrap="square" anchor="t" lIns="0" rIns="0" tIns="0" bIns="0">
+          <a:bodyPr wrap="square" lIns="0" tIns="0" rIns="0" bIns="0" anchor="t">
             <a:spAutoFit/>
           </a:bodyPr>
           <a:lstStyle/>
@@ -21390,7 +21960,7 @@
           </a:fontRef>
         </p:style>
         <p:txBody>
-          <a:bodyPr rtlCol="0" anchor="ctr" wrap="none" lIns="45720" rIns="45720"/>
+          <a:bodyPr wrap="none" lIns="45720" rIns="45720" rtlCol="0" anchor="ctr"/>
           <a:lstStyle/>
           <a:p>
             <a:pPr algn="ctr"/>
@@ -21423,7 +21993,7 @@
           <a:noFill/>
         </p:spPr>
         <p:txBody>
-          <a:bodyPr wrap="square" anchor="t" lIns="0" rIns="0" tIns="0" bIns="0">
+          <a:bodyPr wrap="square" lIns="0" tIns="0" rIns="0" bIns="0" anchor="t">
             <a:spAutoFit/>
           </a:bodyPr>
           <a:lstStyle/>
@@ -21465,7 +22035,7 @@
           <a:noFill/>
         </p:spPr>
         <p:txBody>
-          <a:bodyPr wrap="square" anchor="t" lIns="0" rIns="0" tIns="0" bIns="0">
+          <a:bodyPr wrap="square" lIns="0" tIns="0" rIns="0" bIns="0" anchor="t">
             <a:spAutoFit/>
           </a:bodyPr>
           <a:lstStyle/>
@@ -21527,7 +22097,7 @@
           </a:fontRef>
         </p:style>
         <p:txBody>
-          <a:bodyPr rtlCol="0" anchor="ctr" wrap="none" lIns="45720" rIns="45720"/>
+          <a:bodyPr wrap="none" lIns="45720" rIns="45720" rtlCol="0" anchor="ctr"/>
           <a:lstStyle/>
           <a:p>
             <a:pPr algn="ctr"/>
@@ -21552,7 +22122,7 @@
         <p:spPr>
           <a:xfrm>
             <a:off x="1691640" y="4123944"/>
-            <a:ext cx="9601200" cy="365760"/>
+            <a:ext cx="9601200" cy="223138"/>
           </a:xfrm>
           <a:prstGeom prst="rect">
             <a:avLst/>
@@ -21560,7 +22130,7 @@
           <a:noFill/>
         </p:spPr>
         <p:txBody>
-          <a:bodyPr wrap="square" anchor="t" lIns="0" rIns="0" tIns="0" bIns="0">
+          <a:bodyPr wrap="square" lIns="0" tIns="0" rIns="0" bIns="0" anchor="t">
             <a:spAutoFit/>
           </a:bodyPr>
           <a:lstStyle/>
@@ -21574,13 +22144,31 @@
               </a:spcAft>
             </a:pPr>
             <a:r>
-              <a:rPr sz="1450" b="1" i="0">
+              <a:rPr sz="1450" b="1" i="0" dirty="0">
                 <a:solidFill>
                   <a:srgbClr val="181D2B"/>
                 </a:solidFill>
                 <a:latin typeface="Helvetica Neue"/>
               </a:rPr>
-              <a:t>« Le stagiaire a dit que ça passait. »</a:t>
+              <a:t>« </a:t>
+            </a:r>
+            <a:r>
+              <a:rPr lang="fr-FR" sz="1450" b="1" i="0" dirty="0">
+                <a:solidFill>
+                  <a:srgbClr val="181D2B"/>
+                </a:solidFill>
+                <a:latin typeface="Helvetica Neue"/>
+              </a:rPr>
+              <a:t>C’est bon les tests passent toujours</a:t>
+            </a:r>
+            <a:r>
+              <a:rPr sz="1450" b="1" i="0" dirty="0">
+                <a:solidFill>
+                  <a:srgbClr val="181D2B"/>
+                </a:solidFill>
+                <a:latin typeface="Helvetica Neue"/>
+              </a:rPr>
+              <a:t> »</a:t>
             </a:r>
           </a:p>
         </p:txBody>
@@ -21602,7 +22190,7 @@
           <a:noFill/>
         </p:spPr>
         <p:txBody>
-          <a:bodyPr wrap="square" anchor="t" lIns="0" rIns="0" tIns="0" bIns="0">
+          <a:bodyPr wrap="square" lIns="0" tIns="0" rIns="0" bIns="0" anchor="t">
             <a:spAutoFit/>
           </a:bodyPr>
           <a:lstStyle/>
@@ -21664,7 +22252,7 @@
           </a:fontRef>
         </p:style>
         <p:txBody>
-          <a:bodyPr rtlCol="0" anchor="ctr" wrap="none" lIns="45720" rIns="45720"/>
+          <a:bodyPr wrap="none" lIns="45720" rIns="45720" rtlCol="0" anchor="ctr"/>
           <a:lstStyle/>
           <a:p>
             <a:pPr algn="ctr"/>
@@ -21697,7 +22285,7 @@
           <a:noFill/>
         </p:spPr>
         <p:txBody>
-          <a:bodyPr wrap="square" anchor="t" lIns="0" rIns="0" tIns="0" bIns="0">
+          <a:bodyPr wrap="square" lIns="0" tIns="0" rIns="0" bIns="0" anchor="t">
             <a:spAutoFit/>
           </a:bodyPr>
           <a:lstStyle/>
@@ -21739,7 +22327,7 @@
           <a:noFill/>
         </p:spPr>
         <p:txBody>
-          <a:bodyPr wrap="square" anchor="t" lIns="0" rIns="0" tIns="0" bIns="0">
+          <a:bodyPr wrap="square" lIns="0" tIns="0" rIns="0" bIns="0" anchor="t">
             <a:spAutoFit/>
           </a:bodyPr>
           <a:lstStyle/>
@@ -21801,7 +22389,7 @@
           </a:fontRef>
         </p:style>
         <p:txBody>
-          <a:bodyPr rtlCol="0" anchor="ctr" wrap="square" lIns="256032" rIns="256032" tIns="128016" bIns="128016"/>
+          <a:bodyPr wrap="square" lIns="256032" tIns="128016" rIns="256032" bIns="128016" rtlCol="0" anchor="ctr"/>
           <a:lstStyle/>
           <a:p>
             <a:pPr algn="ctr">
@@ -21862,6 +22450,7 @@
           <a:lstStyle/>
           <a:p>
             <a:pPr algn="ctr"/>
+            <a:endParaRPr/>
           </a:p>
         </p:txBody>
       </p:sp>
@@ -21935,7 +22524,7 @@
           <a:noFill/>
         </p:spPr>
         <p:txBody>
-          <a:bodyPr wrap="square" anchor="t" lIns="0" rIns="0" tIns="0" bIns="0">
+          <a:bodyPr wrap="square" lIns="0" tIns="0" rIns="0" bIns="0" anchor="t">
             <a:spAutoFit/>
           </a:bodyPr>
           <a:lstStyle/>
@@ -21962,17 +22551,17 @@
       </p:sp>
     </p:spTree>
   </p:cSld>
-  <p:transition spd="fast">
-    <p:fade/>
-  </p:transition>
   <p:clrMapOvr>
     <a:masterClrMapping/>
   </p:clrMapOvr>
+  <p:transition>
+    <p:fade/>
+  </p:transition>
 </p:sld>
 </file>
 
 <file path=ppt/slides/slide26.xml><?xml version="1.0" encoding="utf-8"?>
-<p:sld xmlns:a="http://schemas.openxmlformats.org/drawingml/2006/main" xmlns:p="http://schemas.openxmlformats.org/presentationml/2006/main" xmlns:r="http://schemas.openxmlformats.org/officeDocument/2006/relationships">
+<p:sld xmlns:a="http://schemas.openxmlformats.org/drawingml/2006/main" xmlns:r="http://schemas.openxmlformats.org/officeDocument/2006/relationships" xmlns:p="http://schemas.openxmlformats.org/presentationml/2006/main">
   <p:cSld>
     <p:bg>
       <p:bgPr>
@@ -21988,7 +22577,14 @@
         <p:cNvGrpSpPr/>
         <p:nvPr/>
       </p:nvGrpSpPr>
-      <p:grpSpPr/>
+      <p:grpSpPr>
+        <a:xfrm>
+          <a:off x="0" y="0"/>
+          <a:ext cx="0" cy="0"/>
+          <a:chOff x="0" y="0"/>
+          <a:chExt cx="0" cy="0"/>
+        </a:xfrm>
+      </p:grpSpPr>
       <p:sp>
         <p:nvSpPr>
           <p:cNvPr id="2" name="Parallelogram 1"/>
@@ -22026,7 +22622,7 @@
           </a:fontRef>
         </p:style>
         <p:txBody>
-          <a:bodyPr rtlCol="0" anchor="ctr" lIns="256032" rIns="45720" tIns="18288" bIns="18288"/>
+          <a:bodyPr lIns="256032" tIns="18288" rIns="45720" bIns="18288" rtlCol="0" anchor="ctr"/>
           <a:lstStyle/>
           <a:p>
             <a:pPr algn="l"/>
@@ -22059,7 +22655,7 @@
           <a:noFill/>
         </p:spPr>
         <p:txBody>
-          <a:bodyPr wrap="square" anchor="t" lIns="0" rIns="0" tIns="0" bIns="0">
+          <a:bodyPr wrap="square" lIns="0" tIns="0" rIns="0" bIns="0" anchor="t">
             <a:spAutoFit/>
           </a:bodyPr>
           <a:lstStyle/>
@@ -22125,6 +22721,7 @@
           <a:lstStyle/>
           <a:p>
             <a:pPr algn="ctr"/>
+            <a:endParaRPr/>
           </a:p>
         </p:txBody>
       </p:sp>
@@ -22169,6 +22766,7 @@
           <a:lstStyle/>
           <a:p>
             <a:pPr algn="ctr"/>
+            <a:endParaRPr/>
           </a:p>
         </p:txBody>
       </p:sp>
@@ -22213,6 +22811,7 @@
           <a:lstStyle/>
           <a:p>
             <a:pPr algn="ctr"/>
+            <a:endParaRPr/>
           </a:p>
         </p:txBody>
       </p:sp>
@@ -22233,7 +22832,7 @@
           <a:noFill/>
         </p:spPr>
         <p:txBody>
-          <a:bodyPr wrap="square" anchor="t" lIns="0" rIns="0" tIns="0" bIns="0">
+          <a:bodyPr wrap="square" lIns="0" tIns="0" rIns="0" bIns="0" anchor="t">
             <a:spAutoFit/>
           </a:bodyPr>
           <a:lstStyle/>
@@ -22275,7 +22874,7 @@
           <a:noFill/>
         </p:spPr>
         <p:txBody>
-          <a:bodyPr wrap="square" anchor="t" lIns="0" rIns="0" tIns="0" bIns="0">
+          <a:bodyPr wrap="square" lIns="0" tIns="0" rIns="0" bIns="0" anchor="t">
             <a:spAutoFit/>
           </a:bodyPr>
           <a:lstStyle/>
@@ -22341,6 +22940,7 @@
           <a:lstStyle/>
           <a:p>
             <a:pPr algn="ctr"/>
+            <a:endParaRPr/>
           </a:p>
         </p:txBody>
       </p:sp>
@@ -22385,6 +22985,7 @@
           <a:lstStyle/>
           <a:p>
             <a:pPr algn="ctr"/>
+            <a:endParaRPr/>
           </a:p>
         </p:txBody>
       </p:sp>
@@ -22429,6 +23030,7 @@
           <a:lstStyle/>
           <a:p>
             <a:pPr algn="ctr"/>
+            <a:endParaRPr/>
           </a:p>
         </p:txBody>
       </p:sp>
@@ -22449,7 +23051,7 @@
           <a:noFill/>
         </p:spPr>
         <p:txBody>
-          <a:bodyPr wrap="square" anchor="t" lIns="0" rIns="0" tIns="0" bIns="0">
+          <a:bodyPr wrap="square" lIns="0" tIns="0" rIns="0" bIns="0" anchor="t">
             <a:spAutoFit/>
           </a:bodyPr>
           <a:lstStyle/>
@@ -22491,7 +23093,7 @@
           <a:noFill/>
         </p:spPr>
         <p:txBody>
-          <a:bodyPr wrap="square" anchor="t" lIns="0" rIns="0" tIns="0" bIns="0">
+          <a:bodyPr wrap="square" lIns="0" tIns="0" rIns="0" bIns="0" anchor="t">
             <a:spAutoFit/>
           </a:bodyPr>
           <a:lstStyle/>
@@ -22533,7 +23135,7 @@
           <a:noFill/>
         </p:spPr>
         <p:txBody>
-          <a:bodyPr wrap="square" anchor="t" lIns="0" rIns="0" tIns="0" bIns="0">
+          <a:bodyPr wrap="square" lIns="0" tIns="0" rIns="0" bIns="0" anchor="t">
             <a:spAutoFit/>
           </a:bodyPr>
           <a:lstStyle/>
@@ -22628,7 +23230,7 @@
           <a:noFill/>
         </p:spPr>
         <p:txBody>
-          <a:bodyPr wrap="square" anchor="t" lIns="0" rIns="0" tIns="0" bIns="0">
+          <a:bodyPr wrap="square" lIns="0" tIns="0" rIns="0" bIns="0" anchor="t">
             <a:spAutoFit/>
           </a:bodyPr>
           <a:lstStyle/>
@@ -22655,17 +23257,17 @@
       </p:sp>
     </p:spTree>
   </p:cSld>
-  <p:transition spd="fast">
-    <p:fade/>
-  </p:transition>
   <p:clrMapOvr>
     <a:masterClrMapping/>
   </p:clrMapOvr>
+  <p:transition>
+    <p:fade/>
+  </p:transition>
 </p:sld>
 </file>
 
 <file path=ppt/slides/slide27.xml><?xml version="1.0" encoding="utf-8"?>
-<p:sld xmlns:a="http://schemas.openxmlformats.org/drawingml/2006/main" xmlns:p="http://schemas.openxmlformats.org/presentationml/2006/main" xmlns:r="http://schemas.openxmlformats.org/officeDocument/2006/relationships">
+<p:sld xmlns:a="http://schemas.openxmlformats.org/drawingml/2006/main" xmlns:r="http://schemas.openxmlformats.org/officeDocument/2006/relationships" xmlns:p="http://schemas.openxmlformats.org/presentationml/2006/main">
   <p:cSld>
     <p:bg>
       <p:bgPr>
@@ -22681,7 +23283,14 @@
         <p:cNvGrpSpPr/>
         <p:nvPr/>
       </p:nvGrpSpPr>
-      <p:grpSpPr/>
+      <p:grpSpPr>
+        <a:xfrm>
+          <a:off x="0" y="0"/>
+          <a:ext cx="0" cy="0"/>
+          <a:chOff x="0" y="0"/>
+          <a:chExt cx="0" cy="0"/>
+        </a:xfrm>
+      </p:grpSpPr>
       <p:sp>
         <p:nvSpPr>
           <p:cNvPr id="2" name="Parallelogram 1"/>
@@ -22719,7 +23328,7 @@
           </a:fontRef>
         </p:style>
         <p:txBody>
-          <a:bodyPr rtlCol="0" anchor="ctr" lIns="256032" rIns="45720" tIns="18288" bIns="18288"/>
+          <a:bodyPr lIns="256032" tIns="18288" rIns="45720" bIns="18288" rtlCol="0" anchor="ctr"/>
           <a:lstStyle/>
           <a:p>
             <a:pPr algn="l"/>
@@ -22752,7 +23361,7 @@
           <a:noFill/>
         </p:spPr>
         <p:txBody>
-          <a:bodyPr wrap="square" anchor="t" lIns="0" rIns="0" tIns="0" bIns="0">
+          <a:bodyPr wrap="square" lIns="0" tIns="0" rIns="0" bIns="0" anchor="t">
             <a:spAutoFit/>
           </a:bodyPr>
           <a:lstStyle/>
@@ -22818,6 +23427,7 @@
           <a:lstStyle/>
           <a:p>
             <a:pPr algn="ctr"/>
+            <a:endParaRPr/>
           </a:p>
         </p:txBody>
       </p:sp>
@@ -22858,7 +23468,7 @@
           </a:fontRef>
         </p:style>
         <p:txBody>
-          <a:bodyPr rtlCol="0" anchor="ctr" wrap="square" lIns="54864" rIns="54864"/>
+          <a:bodyPr wrap="square" lIns="54864" rIns="54864" rtlCol="0" anchor="ctr"/>
           <a:lstStyle/>
           <a:p>
             <a:pPr algn="ctr"/>
@@ -22915,6 +23525,7 @@
           <a:lstStyle/>
           <a:p>
             <a:pPr algn="ctr"/>
+            <a:endParaRPr/>
           </a:p>
         </p:txBody>
       </p:sp>
@@ -22955,7 +23566,7 @@
           </a:fontRef>
         </p:style>
         <p:txBody>
-          <a:bodyPr rtlCol="0" anchor="ctr" wrap="square" lIns="54864" rIns="54864"/>
+          <a:bodyPr wrap="square" lIns="54864" rIns="54864" rtlCol="0" anchor="ctr"/>
           <a:lstStyle/>
           <a:p>
             <a:pPr algn="ctr"/>
@@ -22988,7 +23599,7 @@
           <a:noFill/>
         </p:spPr>
         <p:txBody>
-          <a:bodyPr wrap="square" anchor="t" lIns="0" rIns="0" tIns="0" bIns="0">
+          <a:bodyPr wrap="square" lIns="0" tIns="0" rIns="0" bIns="0" anchor="t">
             <a:spAutoFit/>
           </a:bodyPr>
           <a:lstStyle/>
@@ -23030,7 +23641,7 @@
           <a:noFill/>
         </p:spPr>
         <p:txBody>
-          <a:bodyPr wrap="square" anchor="t" lIns="0" rIns="0" tIns="0" bIns="0">
+          <a:bodyPr wrap="square" lIns="0" tIns="0" rIns="0" bIns="0" anchor="t">
             <a:spAutoFit/>
           </a:bodyPr>
           <a:lstStyle/>
@@ -23096,6 +23707,7 @@
           <a:lstStyle/>
           <a:p>
             <a:pPr algn="ctr"/>
+            <a:endParaRPr/>
           </a:p>
         </p:txBody>
       </p:sp>
@@ -23136,7 +23748,7 @@
           </a:fontRef>
         </p:style>
         <p:txBody>
-          <a:bodyPr rtlCol="0" anchor="ctr" wrap="square" lIns="54864" rIns="54864"/>
+          <a:bodyPr wrap="square" lIns="54864" rIns="54864" rtlCol="0" anchor="ctr"/>
           <a:lstStyle/>
           <a:p>
             <a:pPr algn="ctr"/>
@@ -23169,7 +23781,7 @@
           <a:noFill/>
         </p:spPr>
         <p:txBody>
-          <a:bodyPr wrap="square" anchor="t" lIns="0" rIns="0" tIns="0" bIns="0">
+          <a:bodyPr wrap="square" lIns="0" tIns="0" rIns="0" bIns="0" anchor="t">
             <a:spAutoFit/>
           </a:bodyPr>
           <a:lstStyle/>
@@ -23211,7 +23823,7 @@
           <a:noFill/>
         </p:spPr>
         <p:txBody>
-          <a:bodyPr wrap="square" anchor="t" lIns="0" rIns="0" tIns="0" bIns="0">
+          <a:bodyPr wrap="square" lIns="0" tIns="0" rIns="0" bIns="0" anchor="t">
             <a:spAutoFit/>
           </a:bodyPr>
           <a:lstStyle/>
@@ -23277,6 +23889,7 @@
           <a:lstStyle/>
           <a:p>
             <a:pPr algn="ctr"/>
+            <a:endParaRPr/>
           </a:p>
         </p:txBody>
       </p:sp>
@@ -23317,7 +23930,7 @@
           </a:fontRef>
         </p:style>
         <p:txBody>
-          <a:bodyPr rtlCol="0" anchor="ctr" wrap="square" lIns="54864" rIns="54864"/>
+          <a:bodyPr wrap="square" lIns="54864" rIns="54864" rtlCol="0" anchor="ctr"/>
           <a:lstStyle/>
           <a:p>
             <a:pPr algn="ctr"/>
@@ -23350,7 +23963,7 @@
           <a:noFill/>
         </p:spPr>
         <p:txBody>
-          <a:bodyPr wrap="square" anchor="t" lIns="0" rIns="0" tIns="0" bIns="0">
+          <a:bodyPr wrap="square" lIns="0" tIns="0" rIns="0" bIns="0" anchor="t">
             <a:spAutoFit/>
           </a:bodyPr>
           <a:lstStyle/>
@@ -23392,7 +24005,7 @@
           <a:noFill/>
         </p:spPr>
         <p:txBody>
-          <a:bodyPr wrap="square" anchor="t" lIns="0" rIns="0" tIns="0" bIns="0">
+          <a:bodyPr wrap="square" lIns="0" tIns="0" rIns="0" bIns="0" anchor="t">
             <a:spAutoFit/>
           </a:bodyPr>
           <a:lstStyle/>
@@ -23458,6 +24071,7 @@
           <a:lstStyle/>
           <a:p>
             <a:pPr algn="ctr"/>
+            <a:endParaRPr/>
           </a:p>
         </p:txBody>
       </p:sp>
@@ -23498,7 +24112,7 @@
           </a:fontRef>
         </p:style>
         <p:txBody>
-          <a:bodyPr rtlCol="0" anchor="ctr" wrap="square" lIns="54864" rIns="54864"/>
+          <a:bodyPr wrap="square" lIns="54864" rIns="54864" rtlCol="0" anchor="ctr"/>
           <a:lstStyle/>
           <a:p>
             <a:pPr algn="ctr"/>
@@ -23531,7 +24145,7 @@
           <a:noFill/>
         </p:spPr>
         <p:txBody>
-          <a:bodyPr wrap="square" anchor="t" lIns="0" rIns="0" tIns="0" bIns="0">
+          <a:bodyPr wrap="square" lIns="0" tIns="0" rIns="0" bIns="0" anchor="t">
             <a:spAutoFit/>
           </a:bodyPr>
           <a:lstStyle/>
@@ -23573,7 +24187,7 @@
           <a:noFill/>
         </p:spPr>
         <p:txBody>
-          <a:bodyPr wrap="square" anchor="t" lIns="0" rIns="0" tIns="0" bIns="0">
+          <a:bodyPr wrap="square" lIns="0" tIns="0" rIns="0" bIns="0" anchor="t">
             <a:spAutoFit/>
           </a:bodyPr>
           <a:lstStyle/>
@@ -23668,7 +24282,7 @@
           <a:noFill/>
         </p:spPr>
         <p:txBody>
-          <a:bodyPr wrap="square" anchor="t" lIns="0" rIns="0" tIns="0" bIns="0">
+          <a:bodyPr wrap="square" lIns="0" tIns="0" rIns="0" bIns="0" anchor="t">
             <a:spAutoFit/>
           </a:bodyPr>
           <a:lstStyle/>
@@ -23695,17 +24309,17 @@
       </p:sp>
     </p:spTree>
   </p:cSld>
-  <p:transition spd="fast">
-    <p:fade/>
-  </p:transition>
   <p:clrMapOvr>
     <a:masterClrMapping/>
   </p:clrMapOvr>
+  <p:transition>
+    <p:fade/>
+  </p:transition>
 </p:sld>
 </file>
 
 <file path=ppt/slides/slide28.xml><?xml version="1.0" encoding="utf-8"?>
-<p:sld xmlns:a="http://schemas.openxmlformats.org/drawingml/2006/main" xmlns:p="http://schemas.openxmlformats.org/presentationml/2006/main" xmlns:r="http://schemas.openxmlformats.org/officeDocument/2006/relationships">
+<p:sld xmlns:a="http://schemas.openxmlformats.org/drawingml/2006/main" xmlns:r="http://schemas.openxmlformats.org/officeDocument/2006/relationships" xmlns:p="http://schemas.openxmlformats.org/presentationml/2006/main">
   <p:cSld>
     <p:bg>
       <p:bgPr>
@@ -23721,7 +24335,14 @@
         <p:cNvGrpSpPr/>
         <p:nvPr/>
       </p:nvGrpSpPr>
-      <p:grpSpPr/>
+      <p:grpSpPr>
+        <a:xfrm>
+          <a:off x="0" y="0"/>
+          <a:ext cx="0" cy="0"/>
+          <a:chOff x="0" y="0"/>
+          <a:chExt cx="0" cy="0"/>
+        </a:xfrm>
+      </p:grpSpPr>
       <p:sp>
         <p:nvSpPr>
           <p:cNvPr id="2" name="Rectangle 1"/>
@@ -23763,6 +24384,7 @@
           <a:lstStyle/>
           <a:p>
             <a:pPr algn="ctr"/>
+            <a:endParaRPr/>
           </a:p>
         </p:txBody>
       </p:sp>
@@ -23803,7 +24425,7 @@
           </a:fontRef>
         </p:style>
         <p:txBody>
-          <a:bodyPr rtlCol="0" anchor="ctr" lIns="256032" rIns="45720" tIns="18288" bIns="18288"/>
+          <a:bodyPr lIns="256032" tIns="18288" rIns="45720" bIns="18288" rtlCol="0" anchor="ctr"/>
           <a:lstStyle/>
           <a:p>
             <a:pPr algn="l"/>
@@ -23836,7 +24458,7 @@
           <a:noFill/>
         </p:spPr>
         <p:txBody>
-          <a:bodyPr wrap="square" anchor="t" lIns="0" rIns="0" tIns="0" bIns="0">
+          <a:bodyPr wrap="square" lIns="0" tIns="0" rIns="0" bIns="0" anchor="t">
             <a:spAutoFit/>
           </a:bodyPr>
           <a:lstStyle/>
@@ -23878,7 +24500,7 @@
           <a:noFill/>
         </p:spPr>
         <p:txBody>
-          <a:bodyPr wrap="square" anchor="t" lIns="0" rIns="0" tIns="0" bIns="0">
+          <a:bodyPr wrap="square" lIns="0" tIns="0" rIns="0" bIns="0" anchor="t">
             <a:spAutoFit/>
           </a:bodyPr>
           <a:lstStyle/>
@@ -23944,6 +24566,7 @@
           <a:lstStyle/>
           <a:p>
             <a:pPr algn="ctr"/>
+            <a:endParaRPr/>
           </a:p>
         </p:txBody>
       </p:sp>
@@ -23964,7 +24587,7 @@
           <a:noFill/>
         </p:spPr>
         <p:txBody>
-          <a:bodyPr wrap="square" anchor="t" lIns="0" rIns="0" tIns="0" bIns="0">
+          <a:bodyPr wrap="square" lIns="0" tIns="0" rIns="0" bIns="0" anchor="t">
             <a:spAutoFit/>
           </a:bodyPr>
           <a:lstStyle/>
@@ -24006,7 +24629,7 @@
           <a:noFill/>
         </p:spPr>
         <p:txBody>
-          <a:bodyPr wrap="square" anchor="t" lIns="0" rIns="0" tIns="0" bIns="0">
+          <a:bodyPr wrap="square" lIns="0" tIns="0" rIns="0" bIns="0" anchor="t">
             <a:spAutoFit/>
           </a:bodyPr>
           <a:lstStyle/>
@@ -24072,6 +24695,7 @@
           <a:lstStyle/>
           <a:p>
             <a:pPr algn="ctr"/>
+            <a:endParaRPr/>
           </a:p>
         </p:txBody>
       </p:sp>
@@ -24092,7 +24716,7 @@
           <a:noFill/>
         </p:spPr>
         <p:txBody>
-          <a:bodyPr wrap="square" anchor="t" lIns="0" rIns="0" tIns="0" bIns="0">
+          <a:bodyPr wrap="square" lIns="0" tIns="0" rIns="0" bIns="0" anchor="t">
             <a:spAutoFit/>
           </a:bodyPr>
           <a:lstStyle/>
@@ -24134,7 +24758,7 @@
           <a:noFill/>
         </p:spPr>
         <p:txBody>
-          <a:bodyPr wrap="square" anchor="t" lIns="0" rIns="0" tIns="0" bIns="0">
+          <a:bodyPr wrap="square" lIns="0" tIns="0" rIns="0" bIns="0" anchor="t">
             <a:spAutoFit/>
           </a:bodyPr>
           <a:lstStyle/>
@@ -24200,6 +24824,7 @@
           <a:lstStyle/>
           <a:p>
             <a:pPr algn="ctr"/>
+            <a:endParaRPr/>
           </a:p>
         </p:txBody>
       </p:sp>
@@ -24220,7 +24845,7 @@
           <a:noFill/>
         </p:spPr>
         <p:txBody>
-          <a:bodyPr wrap="square" anchor="t" lIns="0" rIns="0" tIns="0" bIns="0">
+          <a:bodyPr wrap="square" lIns="0" tIns="0" rIns="0" bIns="0" anchor="t">
             <a:spAutoFit/>
           </a:bodyPr>
           <a:lstStyle/>
@@ -24262,7 +24887,7 @@
           <a:noFill/>
         </p:spPr>
         <p:txBody>
-          <a:bodyPr wrap="square" anchor="t" lIns="0" rIns="0" tIns="0" bIns="0">
+          <a:bodyPr wrap="square" lIns="0" tIns="0" rIns="0" bIns="0" anchor="t">
             <a:spAutoFit/>
           </a:bodyPr>
           <a:lstStyle/>
@@ -24328,6 +24953,7 @@
           <a:lstStyle/>
           <a:p>
             <a:pPr algn="ctr"/>
+            <a:endParaRPr/>
           </a:p>
         </p:txBody>
       </p:sp>
@@ -24348,7 +24974,7 @@
           <a:noFill/>
         </p:spPr>
         <p:txBody>
-          <a:bodyPr wrap="square" anchor="t" lIns="0" rIns="0" tIns="0" bIns="0">
+          <a:bodyPr wrap="square" lIns="0" tIns="0" rIns="0" bIns="0" anchor="t">
             <a:spAutoFit/>
           </a:bodyPr>
           <a:lstStyle/>
@@ -24390,7 +25016,7 @@
           <a:noFill/>
         </p:spPr>
         <p:txBody>
-          <a:bodyPr wrap="square" anchor="t" lIns="0" rIns="0" tIns="0" bIns="0">
+          <a:bodyPr wrap="square" lIns="0" tIns="0" rIns="0" bIns="0" anchor="t">
             <a:spAutoFit/>
           </a:bodyPr>
           <a:lstStyle/>
@@ -24485,7 +25111,7 @@
           <a:noFill/>
         </p:spPr>
         <p:txBody>
-          <a:bodyPr wrap="square" anchor="t" lIns="0" rIns="0" tIns="0" bIns="0">
+          <a:bodyPr wrap="square" lIns="0" tIns="0" rIns="0" bIns="0" anchor="t">
             <a:spAutoFit/>
           </a:bodyPr>
           <a:lstStyle/>
@@ -24512,17 +25138,17 @@
       </p:sp>
     </p:spTree>
   </p:cSld>
-  <p:transition spd="fast">
-    <p:fade/>
-  </p:transition>
   <p:clrMapOvr>
     <a:masterClrMapping/>
   </p:clrMapOvr>
+  <p:transition>
+    <p:fade/>
+  </p:transition>
 </p:sld>
 </file>
 
 <file path=ppt/slides/slide29.xml><?xml version="1.0" encoding="utf-8"?>
-<p:sld xmlns:a="http://schemas.openxmlformats.org/drawingml/2006/main" xmlns:p="http://schemas.openxmlformats.org/presentationml/2006/main" xmlns:r="http://schemas.openxmlformats.org/officeDocument/2006/relationships">
+<p:sld xmlns:a="http://schemas.openxmlformats.org/drawingml/2006/main" xmlns:r="http://schemas.openxmlformats.org/officeDocument/2006/relationships" xmlns:p="http://schemas.openxmlformats.org/presentationml/2006/main">
   <p:cSld>
     <p:bg>
       <p:bgPr>
@@ -24538,7 +25164,14 @@
         <p:cNvGrpSpPr/>
         <p:nvPr/>
       </p:nvGrpSpPr>
-      <p:grpSpPr/>
+      <p:grpSpPr>
+        <a:xfrm>
+          <a:off x="0" y="0"/>
+          <a:ext cx="0" cy="0"/>
+          <a:chOff x="0" y="0"/>
+          <a:chExt cx="0" cy="0"/>
+        </a:xfrm>
+      </p:grpSpPr>
       <p:sp>
         <p:nvSpPr>
           <p:cNvPr id="2" name="Oval 1"/>
@@ -24580,6 +25213,7 @@
           <a:lstStyle/>
           <a:p>
             <a:pPr algn="ctr"/>
+            <a:endParaRPr/>
           </a:p>
         </p:txBody>
       </p:sp>
@@ -24624,6 +25258,7 @@
           <a:lstStyle/>
           <a:p>
             <a:pPr algn="ctr"/>
+            <a:endParaRPr/>
           </a:p>
         </p:txBody>
       </p:sp>
@@ -24668,6 +25303,7 @@
           <a:lstStyle/>
           <a:p>
             <a:pPr algn="ctr"/>
+            <a:endParaRPr/>
           </a:p>
         </p:txBody>
       </p:sp>
@@ -24712,6 +25348,7 @@
           <a:lstStyle/>
           <a:p>
             <a:pPr algn="ctr"/>
+            <a:endParaRPr/>
           </a:p>
         </p:txBody>
       </p:sp>
@@ -24756,6 +25393,7 @@
           <a:lstStyle/>
           <a:p>
             <a:pPr algn="ctr"/>
+            <a:endParaRPr/>
           </a:p>
         </p:txBody>
       </p:sp>
@@ -24800,6 +25438,7 @@
           <a:lstStyle/>
           <a:p>
             <a:pPr algn="ctr"/>
+            <a:endParaRPr/>
           </a:p>
         </p:txBody>
       </p:sp>
@@ -24844,6 +25483,7 @@
           <a:lstStyle/>
           <a:p>
             <a:pPr algn="ctr"/>
+            <a:endParaRPr/>
           </a:p>
         </p:txBody>
       </p:sp>
@@ -24888,6 +25528,7 @@
           <a:lstStyle/>
           <a:p>
             <a:pPr algn="ctr"/>
+            <a:endParaRPr/>
           </a:p>
         </p:txBody>
       </p:sp>
@@ -24932,6 +25573,7 @@
           <a:lstStyle/>
           <a:p>
             <a:pPr algn="ctr"/>
+            <a:endParaRPr/>
           </a:p>
         </p:txBody>
       </p:sp>
@@ -24976,6 +25618,7 @@
           <a:lstStyle/>
           <a:p>
             <a:pPr algn="ctr"/>
+            <a:endParaRPr/>
           </a:p>
         </p:txBody>
       </p:sp>
@@ -25020,6 +25663,7 @@
           <a:lstStyle/>
           <a:p>
             <a:pPr algn="ctr"/>
+            <a:endParaRPr/>
           </a:p>
         </p:txBody>
       </p:sp>
@@ -25064,6 +25708,7 @@
           <a:lstStyle/>
           <a:p>
             <a:pPr algn="ctr"/>
+            <a:endParaRPr/>
           </a:p>
         </p:txBody>
       </p:sp>
@@ -25108,6 +25753,7 @@
           <a:lstStyle/>
           <a:p>
             <a:pPr algn="ctr"/>
+            <a:endParaRPr/>
           </a:p>
         </p:txBody>
       </p:sp>
@@ -25152,6 +25798,7 @@
           <a:lstStyle/>
           <a:p>
             <a:pPr algn="ctr"/>
+            <a:endParaRPr/>
           </a:p>
         </p:txBody>
       </p:sp>
@@ -25196,6 +25843,7 @@
           <a:lstStyle/>
           <a:p>
             <a:pPr algn="ctr"/>
+            <a:endParaRPr/>
           </a:p>
         </p:txBody>
       </p:sp>
@@ -25240,6 +25888,7 @@
           <a:lstStyle/>
           <a:p>
             <a:pPr algn="ctr"/>
+            <a:endParaRPr/>
           </a:p>
         </p:txBody>
       </p:sp>
@@ -25284,6 +25933,7 @@
           <a:lstStyle/>
           <a:p>
             <a:pPr algn="ctr"/>
+            <a:endParaRPr/>
           </a:p>
         </p:txBody>
       </p:sp>
@@ -25328,6 +25978,7 @@
           <a:lstStyle/>
           <a:p>
             <a:pPr algn="ctr"/>
+            <a:endParaRPr/>
           </a:p>
         </p:txBody>
       </p:sp>
@@ -25348,7 +25999,7 @@
           <a:noFill/>
         </p:spPr>
         <p:txBody>
-          <a:bodyPr wrap="square" anchor="t" lIns="0" rIns="0" tIns="0" bIns="0">
+          <a:bodyPr wrap="square" lIns="0" tIns="0" rIns="0" bIns="0" anchor="t">
             <a:spAutoFit/>
           </a:bodyPr>
           <a:lstStyle/>
@@ -25387,7 +26038,7 @@
           <a:noFill/>
         </p:spPr>
         <p:txBody>
-          <a:bodyPr wrap="square" anchor="t" lIns="0" rIns="0" tIns="0" bIns="0">
+          <a:bodyPr wrap="square" lIns="0" tIns="0" rIns="0" bIns="0" anchor="t">
             <a:spAutoFit/>
           </a:bodyPr>
           <a:lstStyle/>
@@ -25449,7 +26100,7 @@
           </a:fontRef>
         </p:style>
         <p:txBody>
-          <a:bodyPr rtlCol="0" anchor="ctr" wrap="square" lIns="256032" rIns="256032" tIns="128016" bIns="128016"/>
+          <a:bodyPr wrap="square" lIns="256032" tIns="128016" rIns="256032" bIns="128016" rtlCol="0" anchor="ctr"/>
           <a:lstStyle/>
           <a:p>
             <a:pPr algn="ctr">
@@ -25510,6 +26161,7 @@
           <a:lstStyle/>
           <a:p>
             <a:pPr algn="ctr"/>
+            <a:endParaRPr/>
           </a:p>
         </p:txBody>
       </p:sp>
@@ -25530,7 +26182,7 @@
           <a:noFill/>
         </p:spPr>
         <p:txBody>
-          <a:bodyPr wrap="square" anchor="t" lIns="0" rIns="0" tIns="0" bIns="0">
+          <a:bodyPr wrap="square" lIns="0" tIns="0" rIns="0" bIns="0" anchor="t">
             <a:spAutoFit/>
           </a:bodyPr>
           <a:lstStyle/>
@@ -25572,7 +26224,7 @@
           <a:noFill/>
         </p:spPr>
         <p:txBody>
-          <a:bodyPr wrap="square" anchor="t" lIns="0" rIns="0" tIns="0" bIns="0">
+          <a:bodyPr wrap="square" lIns="0" tIns="0" rIns="0" bIns="0" anchor="t">
             <a:spAutoFit/>
           </a:bodyPr>
           <a:lstStyle/>
@@ -25638,6 +26290,7 @@
           <a:lstStyle/>
           <a:p>
             <a:pPr algn="ctr"/>
+            <a:endParaRPr/>
           </a:p>
         </p:txBody>
       </p:sp>
@@ -25667,17 +26320,17 @@
       </p:pic>
     </p:spTree>
   </p:cSld>
-  <p:transition spd="fast">
-    <p:fade/>
-  </p:transition>
   <p:clrMapOvr>
     <a:masterClrMapping/>
   </p:clrMapOvr>
+  <p:transition>
+    <p:fade/>
+  </p:transition>
 </p:sld>
 </file>
 
 <file path=ppt/slides/slide3.xml><?xml version="1.0" encoding="utf-8"?>
-<p:sld xmlns:a="http://schemas.openxmlformats.org/drawingml/2006/main" xmlns:p="http://schemas.openxmlformats.org/presentationml/2006/main" xmlns:r="http://schemas.openxmlformats.org/officeDocument/2006/relationships">
+<p:sld xmlns:a="http://schemas.openxmlformats.org/drawingml/2006/main" xmlns:r="http://schemas.openxmlformats.org/officeDocument/2006/relationships" xmlns:p="http://schemas.openxmlformats.org/presentationml/2006/main">
   <p:cSld>
     <p:bg>
       <p:bgPr>
@@ -25693,7 +26346,14 @@
         <p:cNvGrpSpPr/>
         <p:nvPr/>
       </p:nvGrpSpPr>
-      <p:grpSpPr/>
+      <p:grpSpPr>
+        <a:xfrm>
+          <a:off x="0" y="0"/>
+          <a:ext cx="0" cy="0"/>
+          <a:chOff x="0" y="0"/>
+          <a:chExt cx="0" cy="0"/>
+        </a:xfrm>
+      </p:grpSpPr>
       <p:sp>
         <p:nvSpPr>
           <p:cNvPr id="2" name="TextBox 1"/>
@@ -25711,7 +26371,7 @@
           <a:noFill/>
         </p:spPr>
         <p:txBody>
-          <a:bodyPr wrap="square" anchor="t" lIns="0" rIns="0" tIns="0" bIns="0">
+          <a:bodyPr wrap="square" lIns="0" tIns="0" rIns="0" bIns="0" anchor="t">
             <a:spAutoFit/>
           </a:bodyPr>
           <a:lstStyle/>
@@ -25773,7 +26433,7 @@
           </a:fontRef>
         </p:style>
         <p:txBody>
-          <a:bodyPr rtlCol="0" anchor="ctr" lIns="256032" rIns="45720" tIns="18288" bIns="18288"/>
+          <a:bodyPr lIns="256032" tIns="18288" rIns="45720" bIns="18288" rtlCol="0" anchor="ctr"/>
           <a:lstStyle/>
           <a:p>
             <a:pPr algn="l"/>
@@ -25806,7 +26466,7 @@
           <a:noFill/>
         </p:spPr>
         <p:txBody>
-          <a:bodyPr wrap="square" anchor="t" lIns="0" rIns="0" tIns="0" bIns="0">
+          <a:bodyPr wrap="square" lIns="0" tIns="0" rIns="0" bIns="0" anchor="t">
             <a:spAutoFit/>
           </a:bodyPr>
           <a:lstStyle/>
@@ -25872,6 +26532,7 @@
           <a:lstStyle/>
           <a:p>
             <a:pPr algn="ctr"/>
+            <a:endParaRPr/>
           </a:p>
         </p:txBody>
       </p:sp>
@@ -25912,7 +26573,7 @@
           </a:fontRef>
         </p:style>
         <p:txBody>
-          <a:bodyPr rtlCol="0" anchor="ctr" wrap="square" lIns="54864" rIns="54864"/>
+          <a:bodyPr wrap="square" lIns="54864" rIns="54864" rtlCol="0" anchor="ctr"/>
           <a:lstStyle/>
           <a:p>
             <a:pPr algn="ctr"/>
@@ -25945,7 +26606,7 @@
           <a:noFill/>
         </p:spPr>
         <p:txBody>
-          <a:bodyPr wrap="square" anchor="t" lIns="0" rIns="0" tIns="0" bIns="0">
+          <a:bodyPr wrap="square" lIns="0" tIns="0" rIns="0" bIns="0" anchor="t">
             <a:spAutoFit/>
           </a:bodyPr>
           <a:lstStyle/>
@@ -26011,6 +26672,7 @@
           <a:lstStyle/>
           <a:p>
             <a:pPr algn="ctr"/>
+            <a:endParaRPr/>
           </a:p>
         </p:txBody>
       </p:sp>
@@ -26051,7 +26713,7 @@
           </a:fontRef>
         </p:style>
         <p:txBody>
-          <a:bodyPr rtlCol="0" anchor="ctr" wrap="square" lIns="54864" rIns="54864"/>
+          <a:bodyPr wrap="square" lIns="54864" rIns="54864" rtlCol="0" anchor="ctr"/>
           <a:lstStyle/>
           <a:p>
             <a:pPr algn="ctr"/>
@@ -26084,7 +26746,7 @@
           <a:noFill/>
         </p:spPr>
         <p:txBody>
-          <a:bodyPr wrap="square" anchor="t" lIns="0" rIns="0" tIns="0" bIns="0">
+          <a:bodyPr wrap="square" lIns="0" tIns="0" rIns="0" bIns="0" anchor="t">
             <a:spAutoFit/>
           </a:bodyPr>
           <a:lstStyle/>
@@ -26150,6 +26812,7 @@
           <a:lstStyle/>
           <a:p>
             <a:pPr algn="ctr"/>
+            <a:endParaRPr/>
           </a:p>
         </p:txBody>
       </p:sp>
@@ -26190,7 +26853,7 @@
           </a:fontRef>
         </p:style>
         <p:txBody>
-          <a:bodyPr rtlCol="0" anchor="ctr" wrap="square" lIns="54864" rIns="54864"/>
+          <a:bodyPr wrap="square" lIns="54864" rIns="54864" rtlCol="0" anchor="ctr"/>
           <a:lstStyle/>
           <a:p>
             <a:pPr algn="ctr"/>
@@ -26223,7 +26886,7 @@
           <a:noFill/>
         </p:spPr>
         <p:txBody>
-          <a:bodyPr wrap="square" anchor="t" lIns="0" rIns="0" tIns="0" bIns="0">
+          <a:bodyPr wrap="square" lIns="0" tIns="0" rIns="0" bIns="0" anchor="t">
             <a:spAutoFit/>
           </a:bodyPr>
           <a:lstStyle/>
@@ -26285,7 +26948,7 @@
           </a:fontRef>
         </p:style>
         <p:txBody>
-          <a:bodyPr rtlCol="0" anchor="ctr" wrap="square" lIns="256032" rIns="256032" tIns="128016" bIns="128016"/>
+          <a:bodyPr wrap="square" lIns="256032" tIns="128016" rIns="256032" bIns="128016" rtlCol="0" anchor="ctr"/>
           <a:lstStyle/>
           <a:p>
             <a:pPr algn="ctr">
@@ -26346,6 +27009,7 @@
           <a:lstStyle/>
           <a:p>
             <a:pPr algn="ctr"/>
+            <a:endParaRPr/>
           </a:p>
         </p:txBody>
       </p:sp>
@@ -26419,7 +27083,7 @@
           <a:noFill/>
         </p:spPr>
         <p:txBody>
-          <a:bodyPr wrap="square" anchor="t" lIns="0" rIns="0" tIns="0" bIns="0">
+          <a:bodyPr wrap="square" lIns="0" tIns="0" rIns="0" bIns="0" anchor="t">
             <a:spAutoFit/>
           </a:bodyPr>
           <a:lstStyle/>
@@ -26446,17 +27110,17 @@
       </p:sp>
     </p:spTree>
   </p:cSld>
-  <p:transition spd="fast">
-    <p:fade/>
-  </p:transition>
   <p:clrMapOvr>
     <a:masterClrMapping/>
   </p:clrMapOvr>
+  <p:transition>
+    <p:fade/>
+  </p:transition>
 </p:sld>
 </file>
 
 <file path=ppt/slides/slide4.xml><?xml version="1.0" encoding="utf-8"?>
-<p:sld xmlns:a="http://schemas.openxmlformats.org/drawingml/2006/main" xmlns:p="http://schemas.openxmlformats.org/presentationml/2006/main" xmlns:r="http://schemas.openxmlformats.org/officeDocument/2006/relationships">
+<p:sld xmlns:a="http://schemas.openxmlformats.org/drawingml/2006/main" xmlns:r="http://schemas.openxmlformats.org/officeDocument/2006/relationships" xmlns:p="http://schemas.openxmlformats.org/presentationml/2006/main">
   <p:cSld>
     <p:bg>
       <p:bgPr>
@@ -26472,7 +27136,14 @@
         <p:cNvGrpSpPr/>
         <p:nvPr/>
       </p:nvGrpSpPr>
-      <p:grpSpPr/>
+      <p:grpSpPr>
+        <a:xfrm>
+          <a:off x="0" y="0"/>
+          <a:ext cx="0" cy="0"/>
+          <a:chOff x="0" y="0"/>
+          <a:chExt cx="0" cy="0"/>
+        </a:xfrm>
+      </p:grpSpPr>
       <p:sp>
         <p:nvSpPr>
           <p:cNvPr id="2" name="Rectangle 1"/>
@@ -26514,6 +27185,7 @@
           <a:lstStyle/>
           <a:p>
             <a:pPr algn="ctr"/>
+            <a:endParaRPr/>
           </a:p>
         </p:txBody>
       </p:sp>
@@ -26554,7 +27226,7 @@
           </a:fontRef>
         </p:style>
         <p:txBody>
-          <a:bodyPr rtlCol="0" anchor="ctr" lIns="256032" rIns="45720" tIns="18288" bIns="18288"/>
+          <a:bodyPr lIns="256032" tIns="18288" rIns="45720" bIns="18288" rtlCol="0" anchor="ctr"/>
           <a:lstStyle/>
           <a:p>
             <a:pPr algn="l"/>
@@ -26587,7 +27259,7 @@
           <a:noFill/>
         </p:spPr>
         <p:txBody>
-          <a:bodyPr wrap="square" anchor="t" lIns="0" rIns="0" tIns="0" bIns="0">
+          <a:bodyPr wrap="square" lIns="0" tIns="0" rIns="0" bIns="0" anchor="t">
             <a:spAutoFit/>
           </a:bodyPr>
           <a:lstStyle/>
@@ -26653,6 +27325,7 @@
           <a:lstStyle/>
           <a:p>
             <a:pPr algn="ctr"/>
+            <a:endParaRPr/>
           </a:p>
         </p:txBody>
       </p:sp>
@@ -26673,7 +27346,7 @@
           <a:noFill/>
         </p:spPr>
         <p:txBody>
-          <a:bodyPr wrap="square" anchor="t" lIns="0" rIns="0" tIns="0" bIns="0">
+          <a:bodyPr wrap="square" lIns="0" tIns="0" rIns="0" bIns="0" anchor="t">
             <a:spAutoFit/>
           </a:bodyPr>
           <a:lstStyle/>
@@ -26715,7 +27388,7 @@
           <a:noFill/>
         </p:spPr>
         <p:txBody>
-          <a:bodyPr wrap="square" anchor="t" lIns="0" rIns="0" tIns="0" bIns="0">
+          <a:bodyPr wrap="square" lIns="0" tIns="0" rIns="0" bIns="0" anchor="t">
             <a:spAutoFit/>
           </a:bodyPr>
           <a:lstStyle/>
@@ -26757,7 +27430,7 @@
           <a:noFill/>
         </p:spPr>
         <p:txBody>
-          <a:bodyPr wrap="square" anchor="t" lIns="0" rIns="0" tIns="0" bIns="0">
+          <a:bodyPr wrap="square" lIns="0" tIns="0" rIns="0" bIns="0" anchor="t">
             <a:spAutoFit/>
           </a:bodyPr>
           <a:lstStyle/>
@@ -26784,59 +27457,6 @@
       </p:sp>
       <p:sp>
         <p:nvSpPr>
-          <p:cNvPr id="9" name="Rounded Rectangle 8"/>
-          <p:cNvSpPr/>
-          <p:nvPr/>
-        </p:nvSpPr>
-        <p:spPr>
-          <a:xfrm>
-            <a:off x="10058400" y="2258568"/>
-            <a:ext cx="940689" cy="310896"/>
-          </a:xfrm>
-          <a:prstGeom prst="roundRect">
-            <a:avLst/>
-          </a:prstGeom>
-          <a:solidFill>
-            <a:srgbClr val="F1E9D5"/>
-          </a:solidFill>
-          <a:ln>
-            <a:noFill/>
-          </a:ln>
-          <a:effectLst/>
-        </p:spPr>
-        <p:style>
-          <a:lnRef idx="1">
-            <a:schemeClr val="accent1"/>
-          </a:lnRef>
-          <a:fillRef idx="3">
-            <a:schemeClr val="accent1"/>
-          </a:fillRef>
-          <a:effectRef idx="2">
-            <a:schemeClr val="accent1"/>
-          </a:effectRef>
-          <a:fontRef idx="minor">
-            <a:schemeClr val="lt1"/>
-          </a:fontRef>
-        </p:style>
-        <p:txBody>
-          <a:bodyPr rtlCol="0" anchor="ctr" wrap="none" lIns="45720" rIns="45720"/>
-          <a:lstStyle/>
-          <a:p>
-            <a:pPr algn="ctr"/>
-            <a:r>
-              <a:rPr sz="1050" b="1">
-                <a:solidFill>
-                  <a:srgbClr val="5C6272"/>
-                </a:solidFill>
-                <a:latin typeface="Helvetica Neue"/>
-              </a:rPr>
-              <a:t>5 min</a:t>
-            </a:r>
-          </a:p>
-        </p:txBody>
-      </p:sp>
-      <p:sp>
-        <p:nvSpPr>
           <p:cNvPr id="10" name="Rectangle 9"/>
           <p:cNvSpPr/>
           <p:nvPr/>
@@ -26876,6 +27496,7 @@
           <a:lstStyle/>
           <a:p>
             <a:pPr algn="ctr"/>
+            <a:endParaRPr/>
           </a:p>
         </p:txBody>
       </p:sp>
@@ -26896,7 +27517,7 @@
           <a:noFill/>
         </p:spPr>
         <p:txBody>
-          <a:bodyPr wrap="square" anchor="t" lIns="0" rIns="0" tIns="0" bIns="0">
+          <a:bodyPr wrap="square" lIns="0" tIns="0" rIns="0" bIns="0" anchor="t">
             <a:spAutoFit/>
           </a:bodyPr>
           <a:lstStyle/>
@@ -26938,7 +27559,7 @@
           <a:noFill/>
         </p:spPr>
         <p:txBody>
-          <a:bodyPr wrap="square" anchor="t" lIns="0" rIns="0" tIns="0" bIns="0">
+          <a:bodyPr wrap="square" lIns="0" tIns="0" rIns="0" bIns="0" anchor="t">
             <a:spAutoFit/>
           </a:bodyPr>
           <a:lstStyle/>
@@ -26980,7 +27601,7 @@
           <a:noFill/>
         </p:spPr>
         <p:txBody>
-          <a:bodyPr wrap="square" anchor="t" lIns="0" rIns="0" tIns="0" bIns="0">
+          <a:bodyPr wrap="square" lIns="0" tIns="0" rIns="0" bIns="0" anchor="t">
             <a:spAutoFit/>
           </a:bodyPr>
           <a:lstStyle/>
@@ -27007,59 +27628,6 @@
       </p:sp>
       <p:sp>
         <p:nvSpPr>
-          <p:cNvPr id="14" name="Rounded Rectangle 13"/>
-          <p:cNvSpPr/>
-          <p:nvPr/>
-        </p:nvSpPr>
-        <p:spPr>
-          <a:xfrm>
-            <a:off x="10058400" y="2880360"/>
-            <a:ext cx="1070305" cy="310896"/>
-          </a:xfrm>
-          <a:prstGeom prst="roundRect">
-            <a:avLst/>
-          </a:prstGeom>
-          <a:solidFill>
-            <a:srgbClr val="F1E9D5"/>
-          </a:solidFill>
-          <a:ln>
-            <a:noFill/>
-          </a:ln>
-          <a:effectLst/>
-        </p:spPr>
-        <p:style>
-          <a:lnRef idx="1">
-            <a:schemeClr val="accent1"/>
-          </a:lnRef>
-          <a:fillRef idx="3">
-            <a:schemeClr val="accent1"/>
-          </a:fillRef>
-          <a:effectRef idx="2">
-            <a:schemeClr val="accent1"/>
-          </a:effectRef>
-          <a:fontRef idx="minor">
-            <a:schemeClr val="lt1"/>
-          </a:fontRef>
-        </p:style>
-        <p:txBody>
-          <a:bodyPr rtlCol="0" anchor="ctr" wrap="none" lIns="45720" rIns="45720"/>
-          <a:lstStyle/>
-          <a:p>
-            <a:pPr algn="ctr"/>
-            <a:r>
-              <a:rPr sz="1050" b="1">
-                <a:solidFill>
-                  <a:srgbClr val="5C6272"/>
-                </a:solidFill>
-                <a:latin typeface="Helvetica Neue"/>
-              </a:rPr>
-              <a:t>10 min</a:t>
-            </a:r>
-          </a:p>
-        </p:txBody>
-      </p:sp>
-      <p:sp>
-        <p:nvSpPr>
           <p:cNvPr id="15" name="Rectangle 14"/>
           <p:cNvSpPr/>
           <p:nvPr/>
@@ -27099,6 +27667,7 @@
           <a:lstStyle/>
           <a:p>
             <a:pPr algn="ctr"/>
+            <a:endParaRPr/>
           </a:p>
         </p:txBody>
       </p:sp>
@@ -27119,7 +27688,7 @@
           <a:noFill/>
         </p:spPr>
         <p:txBody>
-          <a:bodyPr wrap="square" anchor="t" lIns="0" rIns="0" tIns="0" bIns="0">
+          <a:bodyPr wrap="square" lIns="0" tIns="0" rIns="0" bIns="0" anchor="t">
             <a:spAutoFit/>
           </a:bodyPr>
           <a:lstStyle/>
@@ -27153,7 +27722,7 @@
         <p:spPr>
           <a:xfrm>
             <a:off x="1600200" y="3438144"/>
-            <a:ext cx="6949440" cy="365760"/>
+            <a:ext cx="6949440" cy="238527"/>
           </a:xfrm>
           <a:prstGeom prst="rect">
             <a:avLst/>
@@ -27161,7 +27730,7 @@
           <a:noFill/>
         </p:spPr>
         <p:txBody>
-          <a:bodyPr wrap="square" anchor="t" lIns="0" rIns="0" tIns="0" bIns="0">
+          <a:bodyPr wrap="square" lIns="0" tIns="0" rIns="0" bIns="0" anchor="t">
             <a:spAutoFit/>
           </a:bodyPr>
           <a:lstStyle/>
@@ -27175,14 +27744,38 @@
               </a:spcAft>
             </a:pPr>
             <a:r>
-              <a:rPr sz="1550" b="1" i="0">
+              <a:rPr sz="1550" b="1" i="0" dirty="0" err="1">
                 <a:solidFill>
                   <a:srgbClr val="181D2B"/>
                 </a:solidFill>
                 <a:latin typeface="Helvetica Neue"/>
               </a:rPr>
-              <a:t>Démo : le projet</a:t>
-            </a:r>
+              <a:t>Démo</a:t>
+            </a:r>
+            <a:r>
+              <a:rPr sz="1550" b="1" i="0" dirty="0">
+                <a:solidFill>
+                  <a:srgbClr val="181D2B"/>
+                </a:solidFill>
+                <a:latin typeface="Helvetica Neue"/>
+              </a:rPr>
+              <a:t> : le pro</a:t>
+            </a:r>
+            <a:r>
+              <a:rPr lang="fr-FR" sz="1550" b="1" dirty="0">
+                <a:solidFill>
+                  <a:srgbClr val="181D2B"/>
+                </a:solidFill>
+                <a:latin typeface="Helvetica Neue"/>
+              </a:rPr>
+              <a:t>jet</a:t>
+            </a:r>
+            <a:endParaRPr sz="1550" b="1" i="0" dirty="0">
+              <a:solidFill>
+                <a:srgbClr val="181D2B"/>
+              </a:solidFill>
+              <a:latin typeface="Helvetica Neue"/>
+            </a:endParaRPr>
           </a:p>
         </p:txBody>
       </p:sp>
@@ -27203,7 +27796,7 @@
           <a:noFill/>
         </p:spPr>
         <p:txBody>
-          <a:bodyPr wrap="square" anchor="t" lIns="0" rIns="0" tIns="0" bIns="0">
+          <a:bodyPr wrap="square" lIns="0" tIns="0" rIns="0" bIns="0" anchor="t">
             <a:spAutoFit/>
           </a:bodyPr>
           <a:lstStyle/>
@@ -27230,59 +27823,6 @@
       </p:sp>
       <p:sp>
         <p:nvSpPr>
-          <p:cNvPr id="19" name="Rounded Rectangle 18"/>
-          <p:cNvSpPr/>
-          <p:nvPr/>
-        </p:nvSpPr>
-        <p:spPr>
-          <a:xfrm>
-            <a:off x="10058400" y="3502152"/>
-            <a:ext cx="1070305" cy="310896"/>
-          </a:xfrm>
-          <a:prstGeom prst="roundRect">
-            <a:avLst/>
-          </a:prstGeom>
-          <a:solidFill>
-            <a:srgbClr val="F1E9D5"/>
-          </a:solidFill>
-          <a:ln>
-            <a:noFill/>
-          </a:ln>
-          <a:effectLst/>
-        </p:spPr>
-        <p:style>
-          <a:lnRef idx="1">
-            <a:schemeClr val="accent1"/>
-          </a:lnRef>
-          <a:fillRef idx="3">
-            <a:schemeClr val="accent1"/>
-          </a:fillRef>
-          <a:effectRef idx="2">
-            <a:schemeClr val="accent1"/>
-          </a:effectRef>
-          <a:fontRef idx="minor">
-            <a:schemeClr val="lt1"/>
-          </a:fontRef>
-        </p:style>
-        <p:txBody>
-          <a:bodyPr rtlCol="0" anchor="ctr" wrap="none" lIns="45720" rIns="45720"/>
-          <a:lstStyle/>
-          <a:p>
-            <a:pPr algn="ctr"/>
-            <a:r>
-              <a:rPr sz="1050" b="1">
-                <a:solidFill>
-                  <a:srgbClr val="5C6272"/>
-                </a:solidFill>
-                <a:latin typeface="Helvetica Neue"/>
-              </a:rPr>
-              <a:t>10 min</a:t>
-            </a:r>
-          </a:p>
-        </p:txBody>
-      </p:sp>
-      <p:sp>
-        <p:nvSpPr>
           <p:cNvPr id="20" name="Rectangle 19"/>
           <p:cNvSpPr/>
           <p:nvPr/>
@@ -27322,6 +27862,7 @@
           <a:lstStyle/>
           <a:p>
             <a:pPr algn="ctr"/>
+            <a:endParaRPr/>
           </a:p>
         </p:txBody>
       </p:sp>
@@ -27342,7 +27883,7 @@
           <a:noFill/>
         </p:spPr>
         <p:txBody>
-          <a:bodyPr wrap="square" anchor="t" lIns="0" rIns="0" tIns="0" bIns="0">
+          <a:bodyPr wrap="square" lIns="0" tIns="0" rIns="0" bIns="0" anchor="t">
             <a:spAutoFit/>
           </a:bodyPr>
           <a:lstStyle/>
@@ -27384,7 +27925,7 @@
           <a:noFill/>
         </p:spPr>
         <p:txBody>
-          <a:bodyPr wrap="square" anchor="t" lIns="0" rIns="0" tIns="0" bIns="0">
+          <a:bodyPr wrap="square" lIns="0" tIns="0" rIns="0" bIns="0" anchor="t">
             <a:spAutoFit/>
           </a:bodyPr>
           <a:lstStyle/>
@@ -27426,7 +27967,7 @@
           <a:noFill/>
         </p:spPr>
         <p:txBody>
-          <a:bodyPr wrap="square" anchor="t" lIns="0" rIns="0" tIns="0" bIns="0">
+          <a:bodyPr wrap="square" lIns="0" tIns="0" rIns="0" bIns="0" anchor="t">
             <a:spAutoFit/>
           </a:bodyPr>
           <a:lstStyle/>
@@ -27453,59 +27994,6 @@
       </p:sp>
       <p:sp>
         <p:nvSpPr>
-          <p:cNvPr id="24" name="Rounded Rectangle 23"/>
-          <p:cNvSpPr/>
-          <p:nvPr/>
-        </p:nvSpPr>
-        <p:spPr>
-          <a:xfrm>
-            <a:off x="10058400" y="4123944"/>
-            <a:ext cx="1070305" cy="310896"/>
-          </a:xfrm>
-          <a:prstGeom prst="roundRect">
-            <a:avLst/>
-          </a:prstGeom>
-          <a:solidFill>
-            <a:srgbClr val="F1E9D5"/>
-          </a:solidFill>
-          <a:ln>
-            <a:noFill/>
-          </a:ln>
-          <a:effectLst/>
-        </p:spPr>
-        <p:style>
-          <a:lnRef idx="1">
-            <a:schemeClr val="accent1"/>
-          </a:lnRef>
-          <a:fillRef idx="3">
-            <a:schemeClr val="accent1"/>
-          </a:fillRef>
-          <a:effectRef idx="2">
-            <a:schemeClr val="accent1"/>
-          </a:effectRef>
-          <a:fontRef idx="minor">
-            <a:schemeClr val="lt1"/>
-          </a:fontRef>
-        </p:style>
-        <p:txBody>
-          <a:bodyPr rtlCol="0" anchor="ctr" wrap="none" lIns="45720" rIns="45720"/>
-          <a:lstStyle/>
-          <a:p>
-            <a:pPr algn="ctr"/>
-            <a:r>
-              <a:rPr sz="1050" b="1">
-                <a:solidFill>
-                  <a:srgbClr val="5C6272"/>
-                </a:solidFill>
-                <a:latin typeface="Helvetica Neue"/>
-              </a:rPr>
-              <a:t>15 min</a:t>
-            </a:r>
-          </a:p>
-        </p:txBody>
-      </p:sp>
-      <p:sp>
-        <p:nvSpPr>
           <p:cNvPr id="25" name="Rectangle 24"/>
           <p:cNvSpPr/>
           <p:nvPr/>
@@ -27545,6 +28033,7 @@
           <a:lstStyle/>
           <a:p>
             <a:pPr algn="ctr"/>
+            <a:endParaRPr/>
           </a:p>
         </p:txBody>
       </p:sp>
@@ -27565,7 +28054,7 @@
           <a:noFill/>
         </p:spPr>
         <p:txBody>
-          <a:bodyPr wrap="square" anchor="t" lIns="0" rIns="0" tIns="0" bIns="0">
+          <a:bodyPr wrap="square" lIns="0" tIns="0" rIns="0" bIns="0" anchor="t">
             <a:spAutoFit/>
           </a:bodyPr>
           <a:lstStyle/>
@@ -27607,7 +28096,7 @@
           <a:noFill/>
         </p:spPr>
         <p:txBody>
-          <a:bodyPr wrap="square" anchor="t" lIns="0" rIns="0" tIns="0" bIns="0">
+          <a:bodyPr wrap="square" lIns="0" tIns="0" rIns="0" bIns="0" anchor="t">
             <a:spAutoFit/>
           </a:bodyPr>
           <a:lstStyle/>
@@ -27641,7 +28130,7 @@
         <p:spPr>
           <a:xfrm>
             <a:off x="1600200" y="4974336"/>
-            <a:ext cx="7863840" cy="320040"/>
+            <a:ext cx="7863840" cy="169277"/>
           </a:xfrm>
           <a:prstGeom prst="rect">
             <a:avLst/>
@@ -27649,7 +28138,122 @@
           <a:noFill/>
         </p:spPr>
         <p:txBody>
-          <a:bodyPr wrap="square" anchor="t" lIns="0" rIns="0" tIns="0" bIns="0">
+          <a:bodyPr wrap="square" lIns="0" tIns="0" rIns="0" bIns="0" anchor="t">
+            <a:spAutoFit/>
+          </a:bodyPr>
+          <a:lstStyle/>
+          <a:p>
+            <a:r>
+              <a:rPr sz="1100" b="0" i="0" dirty="0">
+                <a:solidFill>
+                  <a:srgbClr val="181D2B"/>
+                </a:solidFill>
+                <a:latin typeface="Helvetica Neue"/>
+              </a:rPr>
+              <a:t>Le </a:t>
+            </a:r>
+            <a:r>
+              <a:rPr sz="1100" b="0" i="0" dirty="0" err="1">
+                <a:solidFill>
+                  <a:srgbClr val="181D2B"/>
+                </a:solidFill>
+                <a:latin typeface="Helvetica Neue"/>
+              </a:rPr>
+              <a:t>même</a:t>
+            </a:r>
+            <a:r>
+              <a:rPr sz="1100" b="0" i="0" dirty="0">
+                <a:solidFill>
+                  <a:srgbClr val="181D2B"/>
+                </a:solidFill>
+                <a:latin typeface="Helvetica Neue"/>
+              </a:rPr>
+              <a:t> rapport, dans un </a:t>
+            </a:r>
+            <a:r>
+              <a:rPr sz="1100" b="0" i="0" dirty="0" err="1">
+                <a:solidFill>
+                  <a:srgbClr val="181D2B"/>
+                </a:solidFill>
+                <a:latin typeface="Helvetica Neue"/>
+              </a:rPr>
+              <a:t>vrai</a:t>
+            </a:r>
+            <a:r>
+              <a:rPr sz="1100" b="0" i="0" dirty="0">
+                <a:solidFill>
+                  <a:srgbClr val="181D2B"/>
+                </a:solidFill>
+                <a:latin typeface="Helvetica Neue"/>
+              </a:rPr>
+              <a:t> dashboard</a:t>
+            </a:r>
+          </a:p>
+        </p:txBody>
+      </p:sp>
+      <p:sp>
+        <p:nvSpPr>
+          <p:cNvPr id="30" name="Rectangle 29"/>
+          <p:cNvSpPr/>
+          <p:nvPr/>
+        </p:nvSpPr>
+        <p:spPr>
+          <a:xfrm>
+            <a:off x="822960" y="5340096"/>
+            <a:ext cx="54864" cy="457200"/>
+          </a:xfrm>
+          <a:prstGeom prst="rect">
+            <a:avLst/>
+          </a:prstGeom>
+          <a:solidFill>
+            <a:srgbClr val="F05A46"/>
+          </a:solidFill>
+          <a:ln>
+            <a:noFill/>
+          </a:ln>
+          <a:effectLst/>
+        </p:spPr>
+        <p:style>
+          <a:lnRef idx="1">
+            <a:schemeClr val="accent1"/>
+          </a:lnRef>
+          <a:fillRef idx="3">
+            <a:schemeClr val="accent1"/>
+          </a:fillRef>
+          <a:effectRef idx="2">
+            <a:schemeClr val="accent1"/>
+          </a:effectRef>
+          <a:fontRef idx="minor">
+            <a:schemeClr val="lt1"/>
+          </a:fontRef>
+        </p:style>
+        <p:txBody>
+          <a:bodyPr rtlCol="0" anchor="ctr"/>
+          <a:lstStyle/>
+          <a:p>
+            <a:pPr algn="ctr"/>
+            <a:endParaRPr/>
+          </a:p>
+        </p:txBody>
+      </p:sp>
+      <p:sp>
+        <p:nvSpPr>
+          <p:cNvPr id="31" name="TextBox 30"/>
+          <p:cNvSpPr txBox="1"/>
+          <p:nvPr/>
+        </p:nvSpPr>
+        <p:spPr>
+          <a:xfrm>
+            <a:off x="1051560" y="5321808"/>
+            <a:ext cx="502920" cy="548640"/>
+          </a:xfrm>
+          <a:prstGeom prst="rect">
+            <a:avLst/>
+          </a:prstGeom>
+          <a:noFill/>
+        </p:spPr>
+        <p:txBody>
+          <a:bodyPr wrap="square" lIns="0" tIns="0" rIns="0" bIns="0" anchor="t">
             <a:spAutoFit/>
           </a:bodyPr>
           <a:lstStyle/>
@@ -27663,132 +28267,35 @@
               </a:spcAft>
             </a:pPr>
             <a:r>
-              <a:rPr sz="1100" b="0" i="0">
-                <a:solidFill>
-                  <a:srgbClr val="181D2B"/>
-                </a:solidFill>
-                <a:latin typeface="Helvetica Neue"/>
-              </a:rPr>
-              <a:t>Le même rapport, dans un vrai dashboard (spoiler : pas SOAR)</a:t>
-            </a:r>
-          </a:p>
-        </p:txBody>
-      </p:sp>
-      <p:sp>
-        <p:nvSpPr>
-          <p:cNvPr id="29" name="Rounded Rectangle 28"/>
-          <p:cNvSpPr/>
-          <p:nvPr/>
-        </p:nvSpPr>
-        <p:spPr>
-          <a:xfrm>
-            <a:off x="10058400" y="4745736"/>
-            <a:ext cx="1070305" cy="310896"/>
-          </a:xfrm>
-          <a:prstGeom prst="roundRect">
-            <a:avLst/>
-          </a:prstGeom>
-          <a:solidFill>
-            <a:srgbClr val="F1E9D5"/>
-          </a:solidFill>
-          <a:ln>
-            <a:noFill/>
-          </a:ln>
-          <a:effectLst/>
-        </p:spPr>
-        <p:style>
-          <a:lnRef idx="1">
-            <a:schemeClr val="accent1"/>
-          </a:lnRef>
-          <a:fillRef idx="3">
-            <a:schemeClr val="accent1"/>
-          </a:fillRef>
-          <a:effectRef idx="2">
-            <a:schemeClr val="accent1"/>
-          </a:effectRef>
-          <a:fontRef idx="minor">
-            <a:schemeClr val="lt1"/>
-          </a:fontRef>
-        </p:style>
-        <p:txBody>
-          <a:bodyPr rtlCol="0" anchor="ctr" wrap="none" lIns="45720" rIns="45720"/>
-          <a:lstStyle/>
-          <a:p>
-            <a:pPr algn="ctr"/>
-            <a:r>
-              <a:rPr sz="1050" b="1">
-                <a:solidFill>
-                  <a:srgbClr val="5C6272"/>
-                </a:solidFill>
-                <a:latin typeface="Helvetica Neue"/>
-              </a:rPr>
-              <a:t>10 min</a:t>
-            </a:r>
-          </a:p>
-        </p:txBody>
-      </p:sp>
-      <p:sp>
-        <p:nvSpPr>
-          <p:cNvPr id="30" name="Rectangle 29"/>
-          <p:cNvSpPr/>
-          <p:nvPr/>
-        </p:nvSpPr>
-        <p:spPr>
-          <a:xfrm>
-            <a:off x="822960" y="5340096"/>
-            <a:ext cx="54864" cy="457200"/>
+              <a:rPr sz="1900" b="1" i="0">
+                <a:solidFill>
+                  <a:srgbClr val="A83322"/>
+                </a:solidFill>
+                <a:latin typeface="Helvetica Neue"/>
+              </a:rPr>
+              <a:t>6</a:t>
+            </a:r>
+          </a:p>
+        </p:txBody>
+      </p:sp>
+      <p:sp>
+        <p:nvSpPr>
+          <p:cNvPr id="32" name="TextBox 31"/>
+          <p:cNvSpPr txBox="1"/>
+          <p:nvPr/>
+        </p:nvSpPr>
+        <p:spPr>
+          <a:xfrm>
+            <a:off x="1600200" y="5303520"/>
+            <a:ext cx="6949440" cy="365760"/>
           </a:xfrm>
           <a:prstGeom prst="rect">
             <a:avLst/>
           </a:prstGeom>
-          <a:solidFill>
-            <a:srgbClr val="F05A46"/>
-          </a:solidFill>
-          <a:ln>
-            <a:noFill/>
-          </a:ln>
-          <a:effectLst/>
-        </p:spPr>
-        <p:style>
-          <a:lnRef idx="1">
-            <a:schemeClr val="accent1"/>
-          </a:lnRef>
-          <a:fillRef idx="3">
-            <a:schemeClr val="accent1"/>
-          </a:fillRef>
-          <a:effectRef idx="2">
-            <a:schemeClr val="accent1"/>
-          </a:effectRef>
-          <a:fontRef idx="minor">
-            <a:schemeClr val="lt1"/>
-          </a:fontRef>
-        </p:style>
-        <p:txBody>
-          <a:bodyPr rtlCol="0" anchor="ctr"/>
-          <a:lstStyle/>
-          <a:p>
-            <a:pPr algn="ctr"/>
-          </a:p>
-        </p:txBody>
-      </p:sp>
-      <p:sp>
-        <p:nvSpPr>
-          <p:cNvPr id="31" name="TextBox 30"/>
-          <p:cNvSpPr txBox="1"/>
-          <p:nvPr/>
-        </p:nvSpPr>
-        <p:spPr>
-          <a:xfrm>
-            <a:off x="1051560" y="5321808"/>
-            <a:ext cx="502920" cy="548640"/>
-          </a:xfrm>
-          <a:prstGeom prst="rect">
-            <a:avLst/>
-          </a:prstGeom>
           <a:noFill/>
         </p:spPr>
         <p:txBody>
-          <a:bodyPr wrap="square" anchor="t" lIns="0" rIns="0" tIns="0" bIns="0">
+          <a:bodyPr wrap="square" lIns="0" tIns="0" rIns="0" bIns="0" anchor="t">
             <a:spAutoFit/>
           </a:bodyPr>
           <a:lstStyle/>
@@ -27802,27 +28309,27 @@
               </a:spcAft>
             </a:pPr>
             <a:r>
-              <a:rPr sz="1900" b="1" i="0">
-                <a:solidFill>
-                  <a:srgbClr val="A83322"/>
-                </a:solidFill>
-                <a:latin typeface="Helvetica Neue"/>
-              </a:rPr>
-              <a:t>6</a:t>
-            </a:r>
-          </a:p>
-        </p:txBody>
-      </p:sp>
-      <p:sp>
-        <p:nvSpPr>
-          <p:cNvPr id="32" name="TextBox 31"/>
+              <a:rPr sz="1550" b="1" i="0">
+                <a:solidFill>
+                  <a:srgbClr val="181D2B"/>
+                </a:solidFill>
+                <a:latin typeface="Helvetica Neue"/>
+              </a:rPr>
+              <a:t>Ce qu'on retient</a:t>
+            </a:r>
+          </a:p>
+        </p:txBody>
+      </p:sp>
+      <p:sp>
+        <p:nvSpPr>
+          <p:cNvPr id="33" name="TextBox 32"/>
           <p:cNvSpPr txBox="1"/>
           <p:nvPr/>
         </p:nvSpPr>
         <p:spPr>
           <a:xfrm>
-            <a:off x="1600200" y="5303520"/>
-            <a:ext cx="6949440" cy="365760"/>
+            <a:off x="1600200" y="5596128"/>
+            <a:ext cx="7863840" cy="320040"/>
           </a:xfrm>
           <a:prstGeom prst="rect">
             <a:avLst/>
@@ -27830,7 +28337,7 @@
           <a:noFill/>
         </p:spPr>
         <p:txBody>
-          <a:bodyPr wrap="square" anchor="t" lIns="0" rIns="0" tIns="0" bIns="0">
+          <a:bodyPr wrap="square" lIns="0" tIns="0" rIns="0" bIns="0" anchor="t">
             <a:spAutoFit/>
           </a:bodyPr>
           <a:lstStyle/>
@@ -27844,27 +28351,80 @@
               </a:spcAft>
             </a:pPr>
             <a:r>
-              <a:rPr sz="1550" b="1" i="0">
+              <a:rPr sz="1100" b="0" i="0">
                 <a:solidFill>
                   <a:srgbClr val="181D2B"/>
                 </a:solidFill>
                 <a:latin typeface="Helvetica Neue"/>
               </a:rPr>
-              <a:t>Ce qu'on retient</a:t>
-            </a:r>
-          </a:p>
-        </p:txBody>
-      </p:sp>
-      <p:sp>
-        <p:nvSpPr>
-          <p:cNvPr id="33" name="TextBox 32"/>
+              <a:t>Et deux pièges qu'on a vraiment pris en pleine figure</a:t>
+            </a:r>
+          </a:p>
+        </p:txBody>
+      </p:sp>
+      <p:sp>
+        <p:nvSpPr>
+          <p:cNvPr id="35" name="Rounded Rectangle 34"/>
+          <p:cNvSpPr/>
+          <p:nvPr/>
+        </p:nvSpPr>
+        <p:spPr>
+          <a:xfrm>
+            <a:off x="11201400" y="6419088"/>
+            <a:ext cx="713232" cy="329184"/>
+          </a:xfrm>
+          <a:prstGeom prst="roundRect">
+            <a:avLst/>
+          </a:prstGeom>
+          <a:solidFill>
+            <a:srgbClr val="F1E9D5"/>
+          </a:solidFill>
+          <a:ln>
+            <a:noFill/>
+          </a:ln>
+          <a:effectLst/>
+        </p:spPr>
+        <p:style>
+          <a:lnRef idx="1">
+            <a:schemeClr val="accent1"/>
+          </a:lnRef>
+          <a:fillRef idx="3">
+            <a:schemeClr val="accent1"/>
+          </a:fillRef>
+          <a:effectRef idx="2">
+            <a:schemeClr val="accent1"/>
+          </a:effectRef>
+          <a:fontRef idx="minor">
+            <a:schemeClr val="lt1"/>
+          </a:fontRef>
+        </p:style>
+        <p:txBody>
+          <a:bodyPr rtlCol="0" anchor="ctr"/>
+          <a:lstStyle/>
+          <a:p>
+            <a:pPr algn="ctr"/>
+            <a:r>
+              <a:rPr sz="1000" b="1">
+                <a:solidFill>
+                  <a:srgbClr val="5C6272"/>
+                </a:solidFill>
+                <a:latin typeface="Helvetica Neue"/>
+              </a:rPr>
+              <a:t>04/29</a:t>
+            </a:r>
+          </a:p>
+        </p:txBody>
+      </p:sp>
+      <p:sp>
+        <p:nvSpPr>
+          <p:cNvPr id="36" name="TextBox 35"/>
           <p:cNvSpPr txBox="1"/>
           <p:nvPr/>
         </p:nvSpPr>
         <p:spPr>
           <a:xfrm>
-            <a:off x="1600200" y="5596128"/>
-            <a:ext cx="7863840" cy="320040"/>
+            <a:off x="502920" y="6492240"/>
+            <a:ext cx="5943600" cy="274320"/>
           </a:xfrm>
           <a:prstGeom prst="rect">
             <a:avLst/>
@@ -27872,7 +28432,7 @@
           <a:noFill/>
         </p:spPr>
         <p:txBody>
-          <a:bodyPr wrap="square" anchor="t" lIns="0" rIns="0" tIns="0" bIns="0">
+          <a:bodyPr wrap="square" lIns="0" tIns="0" rIns="0" bIns="0" anchor="t">
             <a:spAutoFit/>
           </a:bodyPr>
           <a:lstStyle/>
@@ -27886,154 +28446,6 @@
               </a:spcAft>
             </a:pPr>
             <a:r>
-              <a:rPr sz="1100" b="0" i="0">
-                <a:solidFill>
-                  <a:srgbClr val="181D2B"/>
-                </a:solidFill>
-                <a:latin typeface="Helvetica Neue"/>
-              </a:rPr>
-              <a:t>Et deux pièges qu'on a vraiment pris en pleine figure</a:t>
-            </a:r>
-          </a:p>
-        </p:txBody>
-      </p:sp>
-      <p:sp>
-        <p:nvSpPr>
-          <p:cNvPr id="34" name="Rounded Rectangle 33"/>
-          <p:cNvSpPr/>
-          <p:nvPr/>
-        </p:nvSpPr>
-        <p:spPr>
-          <a:xfrm>
-            <a:off x="10058400" y="5367528"/>
-            <a:ext cx="940689" cy="310896"/>
-          </a:xfrm>
-          <a:prstGeom prst="roundRect">
-            <a:avLst/>
-          </a:prstGeom>
-          <a:solidFill>
-            <a:srgbClr val="F1E9D5"/>
-          </a:solidFill>
-          <a:ln>
-            <a:noFill/>
-          </a:ln>
-          <a:effectLst/>
-        </p:spPr>
-        <p:style>
-          <a:lnRef idx="1">
-            <a:schemeClr val="accent1"/>
-          </a:lnRef>
-          <a:fillRef idx="3">
-            <a:schemeClr val="accent1"/>
-          </a:fillRef>
-          <a:effectRef idx="2">
-            <a:schemeClr val="accent1"/>
-          </a:effectRef>
-          <a:fontRef idx="minor">
-            <a:schemeClr val="lt1"/>
-          </a:fontRef>
-        </p:style>
-        <p:txBody>
-          <a:bodyPr rtlCol="0" anchor="ctr" wrap="none" lIns="45720" rIns="45720"/>
-          <a:lstStyle/>
-          <a:p>
-            <a:pPr algn="ctr"/>
-            <a:r>
-              <a:rPr sz="1050" b="1">
-                <a:solidFill>
-                  <a:srgbClr val="5C6272"/>
-                </a:solidFill>
-                <a:latin typeface="Helvetica Neue"/>
-              </a:rPr>
-              <a:t>5 min</a:t>
-            </a:r>
-          </a:p>
-        </p:txBody>
-      </p:sp>
-      <p:sp>
-        <p:nvSpPr>
-          <p:cNvPr id="35" name="Rounded Rectangle 34"/>
-          <p:cNvSpPr/>
-          <p:nvPr/>
-        </p:nvSpPr>
-        <p:spPr>
-          <a:xfrm>
-            <a:off x="11201400" y="6419088"/>
-            <a:ext cx="713232" cy="329184"/>
-          </a:xfrm>
-          <a:prstGeom prst="roundRect">
-            <a:avLst/>
-          </a:prstGeom>
-          <a:solidFill>
-            <a:srgbClr val="F1E9D5"/>
-          </a:solidFill>
-          <a:ln>
-            <a:noFill/>
-          </a:ln>
-          <a:effectLst/>
-        </p:spPr>
-        <p:style>
-          <a:lnRef idx="1">
-            <a:schemeClr val="accent1"/>
-          </a:lnRef>
-          <a:fillRef idx="3">
-            <a:schemeClr val="accent1"/>
-          </a:fillRef>
-          <a:effectRef idx="2">
-            <a:schemeClr val="accent1"/>
-          </a:effectRef>
-          <a:fontRef idx="minor">
-            <a:schemeClr val="lt1"/>
-          </a:fontRef>
-        </p:style>
-        <p:txBody>
-          <a:bodyPr rtlCol="0" anchor="ctr"/>
-          <a:lstStyle/>
-          <a:p>
-            <a:pPr algn="ctr"/>
-            <a:r>
-              <a:rPr sz="1000" b="1">
-                <a:solidFill>
-                  <a:srgbClr val="5C6272"/>
-                </a:solidFill>
-                <a:latin typeface="Helvetica Neue"/>
-              </a:rPr>
-              <a:t>04/29</a:t>
-            </a:r>
-          </a:p>
-        </p:txBody>
-      </p:sp>
-      <p:sp>
-        <p:nvSpPr>
-          <p:cNvPr id="36" name="TextBox 35"/>
-          <p:cNvSpPr txBox="1"/>
-          <p:nvPr/>
-        </p:nvSpPr>
-        <p:spPr>
-          <a:xfrm>
-            <a:off x="502920" y="6492240"/>
-            <a:ext cx="5943600" cy="274320"/>
-          </a:xfrm>
-          <a:prstGeom prst="rect">
-            <a:avLst/>
-          </a:prstGeom>
-          <a:noFill/>
-        </p:spPr>
-        <p:txBody>
-          <a:bodyPr wrap="square" anchor="t" lIns="0" rIns="0" tIns="0" bIns="0">
-            <a:spAutoFit/>
-          </a:bodyPr>
-          <a:lstStyle/>
-          <a:p>
-            <a:pPr algn="l">
-              <a:lnSpc>
-                <a:spcPct val="100000"/>
-              </a:lnSpc>
-              <a:spcAft>
-                <a:spcPts val="0"/>
-              </a:spcAft>
-            </a:pPr>
-            <a:r>
               <a:rPr sz="800" b="0" i="0">
                 <a:solidFill>
                   <a:srgbClr val="5C6272"/>
@@ -28047,17 +28459,17 @@
       </p:sp>
     </p:spTree>
   </p:cSld>
-  <p:transition spd="fast">
-    <p:fade/>
-  </p:transition>
   <p:clrMapOvr>
     <a:masterClrMapping/>
   </p:clrMapOvr>
+  <p:transition>
+    <p:fade/>
+  </p:transition>
 </p:sld>
 </file>
 
 <file path=ppt/slides/slide5.xml><?xml version="1.0" encoding="utf-8"?>
-<p:sld xmlns:a="http://schemas.openxmlformats.org/drawingml/2006/main" xmlns:p="http://schemas.openxmlformats.org/presentationml/2006/main" xmlns:r="http://schemas.openxmlformats.org/officeDocument/2006/relationships">
+<p:sld xmlns:a="http://schemas.openxmlformats.org/drawingml/2006/main" xmlns:r="http://schemas.openxmlformats.org/officeDocument/2006/relationships" xmlns:p="http://schemas.openxmlformats.org/presentationml/2006/main">
   <p:cSld>
     <p:bg>
       <p:bgPr>
@@ -28073,7 +28485,14 @@
         <p:cNvGrpSpPr/>
         <p:nvPr/>
       </p:nvGrpSpPr>
-      <p:grpSpPr/>
+      <p:grpSpPr>
+        <a:xfrm>
+          <a:off x="0" y="0"/>
+          <a:ext cx="0" cy="0"/>
+          <a:chOff x="0" y="0"/>
+          <a:chExt cx="0" cy="0"/>
+        </a:xfrm>
+      </p:grpSpPr>
       <p:sp>
         <p:nvSpPr>
           <p:cNvPr id="2" name="Rectangle 1"/>
@@ -28115,6 +28534,7 @@
           <a:lstStyle/>
           <a:p>
             <a:pPr algn="ctr"/>
+            <a:endParaRPr/>
           </a:p>
         </p:txBody>
       </p:sp>
@@ -28155,7 +28575,7 @@
           </a:fontRef>
         </p:style>
         <p:txBody>
-          <a:bodyPr rtlCol="0" anchor="ctr" lIns="256032" rIns="45720" tIns="18288" bIns="18288"/>
+          <a:bodyPr lIns="256032" tIns="18288" rIns="45720" bIns="18288" rtlCol="0" anchor="ctr"/>
           <a:lstStyle/>
           <a:p>
             <a:pPr algn="l"/>
@@ -28188,7 +28608,7 @@
           <a:noFill/>
         </p:spPr>
         <p:txBody>
-          <a:bodyPr wrap="square" anchor="t" lIns="0" rIns="0" tIns="0" bIns="0">
+          <a:bodyPr wrap="square" lIns="0" tIns="0" rIns="0" bIns="0" anchor="t">
             <a:spAutoFit/>
           </a:bodyPr>
           <a:lstStyle/>
@@ -28254,6 +28674,7 @@
           <a:lstStyle/>
           <a:p>
             <a:pPr algn="ctr"/>
+            <a:endParaRPr/>
           </a:p>
         </p:txBody>
       </p:sp>
@@ -28298,6 +28719,7 @@
           <a:lstStyle/>
           <a:p>
             <a:pPr algn="ctr"/>
+            <a:endParaRPr/>
           </a:p>
         </p:txBody>
       </p:sp>
@@ -28342,6 +28764,7 @@
           <a:lstStyle/>
           <a:p>
             <a:pPr algn="ctr"/>
+            <a:endParaRPr/>
           </a:p>
         </p:txBody>
       </p:sp>
@@ -28362,7 +28785,7 @@
           <a:noFill/>
         </p:spPr>
         <p:txBody>
-          <a:bodyPr wrap="square" anchor="t" lIns="0" rIns="0" tIns="0" bIns="0">
+          <a:bodyPr wrap="square" lIns="0" tIns="0" rIns="0" bIns="0" anchor="t">
             <a:spAutoFit/>
           </a:bodyPr>
           <a:lstStyle/>
@@ -28404,7 +28827,7 @@
           <a:noFill/>
         </p:spPr>
         <p:txBody>
-          <a:bodyPr wrap="square" anchor="t" lIns="0" rIns="0" tIns="0" bIns="0">
+          <a:bodyPr wrap="square" lIns="0" tIns="0" rIns="0" bIns="0" anchor="t">
             <a:spAutoFit/>
           </a:bodyPr>
           <a:lstStyle/>
@@ -28446,7 +28869,7 @@
           <a:noFill/>
         </p:spPr>
         <p:txBody>
-          <a:bodyPr wrap="square" anchor="t" lIns="0" rIns="0" tIns="0" bIns="0">
+          <a:bodyPr wrap="square" lIns="0" tIns="0" rIns="0" bIns="0" anchor="t">
             <a:spAutoFit/>
           </a:bodyPr>
           <a:lstStyle/>
@@ -28512,6 +28935,7 @@
           <a:lstStyle/>
           <a:p>
             <a:pPr algn="ctr"/>
+            <a:endParaRPr/>
           </a:p>
         </p:txBody>
       </p:sp>
@@ -28556,6 +28980,7 @@
           <a:lstStyle/>
           <a:p>
             <a:pPr algn="ctr"/>
+            <a:endParaRPr/>
           </a:p>
         </p:txBody>
       </p:sp>
@@ -28600,6 +29025,7 @@
           <a:lstStyle/>
           <a:p>
             <a:pPr algn="ctr"/>
+            <a:endParaRPr/>
           </a:p>
         </p:txBody>
       </p:sp>
@@ -28620,7 +29046,7 @@
           <a:noFill/>
         </p:spPr>
         <p:txBody>
-          <a:bodyPr wrap="square" anchor="t" lIns="0" rIns="0" tIns="0" bIns="0">
+          <a:bodyPr wrap="square" lIns="0" tIns="0" rIns="0" bIns="0" anchor="t">
             <a:spAutoFit/>
           </a:bodyPr>
           <a:lstStyle/>
@@ -28662,7 +29088,7 @@
           <a:noFill/>
         </p:spPr>
         <p:txBody>
-          <a:bodyPr wrap="square" anchor="t" lIns="0" rIns="0" tIns="0" bIns="0">
+          <a:bodyPr wrap="square" lIns="0" tIns="0" rIns="0" bIns="0" anchor="t">
             <a:spAutoFit/>
           </a:bodyPr>
           <a:lstStyle/>
@@ -28704,7 +29130,7 @@
           <a:noFill/>
         </p:spPr>
         <p:txBody>
-          <a:bodyPr wrap="square" anchor="t" lIns="0" rIns="0" tIns="0" bIns="0">
+          <a:bodyPr wrap="square" lIns="0" tIns="0" rIns="0" bIns="0" anchor="t">
             <a:spAutoFit/>
           </a:bodyPr>
           <a:lstStyle/>
@@ -28770,6 +29196,7 @@
           <a:lstStyle/>
           <a:p>
             <a:pPr algn="ctr"/>
+            <a:endParaRPr/>
           </a:p>
         </p:txBody>
       </p:sp>
@@ -28814,6 +29241,7 @@
           <a:lstStyle/>
           <a:p>
             <a:pPr algn="ctr"/>
+            <a:endParaRPr/>
           </a:p>
         </p:txBody>
       </p:sp>
@@ -28858,6 +29286,7 @@
           <a:lstStyle/>
           <a:p>
             <a:pPr algn="ctr"/>
+            <a:endParaRPr/>
           </a:p>
         </p:txBody>
       </p:sp>
@@ -28878,7 +29307,7 @@
           <a:noFill/>
         </p:spPr>
         <p:txBody>
-          <a:bodyPr wrap="square" anchor="t" lIns="0" rIns="0" tIns="0" bIns="0">
+          <a:bodyPr wrap="square" lIns="0" tIns="0" rIns="0" bIns="0" anchor="t">
             <a:spAutoFit/>
           </a:bodyPr>
           <a:lstStyle/>
@@ -28920,7 +29349,7 @@
           <a:noFill/>
         </p:spPr>
         <p:txBody>
-          <a:bodyPr wrap="square" anchor="t" lIns="0" rIns="0" tIns="0" bIns="0">
+          <a:bodyPr wrap="square" lIns="0" tIns="0" rIns="0" bIns="0" anchor="t">
             <a:spAutoFit/>
           </a:bodyPr>
           <a:lstStyle/>
@@ -28962,7 +29391,7 @@
           <a:noFill/>
         </p:spPr>
         <p:txBody>
-          <a:bodyPr wrap="square" anchor="t" lIns="0" rIns="0" tIns="0" bIns="0">
+          <a:bodyPr wrap="square" lIns="0" tIns="0" rIns="0" bIns="0" anchor="t">
             <a:spAutoFit/>
           </a:bodyPr>
           <a:lstStyle/>
@@ -29057,7 +29486,7 @@
           <a:noFill/>
         </p:spPr>
         <p:txBody>
-          <a:bodyPr wrap="square" anchor="t" lIns="0" rIns="0" tIns="0" bIns="0">
+          <a:bodyPr wrap="square" lIns="0" tIns="0" rIns="0" bIns="0" anchor="t">
             <a:spAutoFit/>
           </a:bodyPr>
           <a:lstStyle/>
@@ -29084,17 +29513,17 @@
       </p:sp>
     </p:spTree>
   </p:cSld>
-  <p:transition spd="fast">
-    <p:fade/>
-  </p:transition>
   <p:clrMapOvr>
     <a:masterClrMapping/>
   </p:clrMapOvr>
+  <p:transition>
+    <p:fade/>
+  </p:transition>
 </p:sld>
 </file>
 
 <file path=ppt/slides/slide6.xml><?xml version="1.0" encoding="utf-8"?>
-<p:sld xmlns:a="http://schemas.openxmlformats.org/drawingml/2006/main" xmlns:p="http://schemas.openxmlformats.org/presentationml/2006/main" xmlns:r="http://schemas.openxmlformats.org/officeDocument/2006/relationships">
+<p:sld xmlns:a="http://schemas.openxmlformats.org/drawingml/2006/main" xmlns:r="http://schemas.openxmlformats.org/officeDocument/2006/relationships" xmlns:p="http://schemas.openxmlformats.org/presentationml/2006/main">
   <p:cSld>
     <p:bg>
       <p:bgPr>
@@ -29110,7 +29539,14 @@
         <p:cNvGrpSpPr/>
         <p:nvPr/>
       </p:nvGrpSpPr>
-      <p:grpSpPr/>
+      <p:grpSpPr>
+        <a:xfrm>
+          <a:off x="0" y="0"/>
+          <a:ext cx="0" cy="0"/>
+          <a:chOff x="0" y="0"/>
+          <a:chExt cx="0" cy="0"/>
+        </a:xfrm>
+      </p:grpSpPr>
       <p:sp>
         <p:nvSpPr>
           <p:cNvPr id="2" name="Rectangle 1"/>
@@ -29152,6 +29588,7 @@
           <a:lstStyle/>
           <a:p>
             <a:pPr algn="ctr"/>
+            <a:endParaRPr/>
           </a:p>
         </p:txBody>
       </p:sp>
@@ -29192,7 +29629,7 @@
           </a:fontRef>
         </p:style>
         <p:txBody>
-          <a:bodyPr rtlCol="0" anchor="ctr" lIns="256032" rIns="45720" tIns="18288" bIns="18288"/>
+          <a:bodyPr lIns="256032" tIns="18288" rIns="45720" bIns="18288" rtlCol="0" anchor="ctr"/>
           <a:lstStyle/>
           <a:p>
             <a:pPr algn="l"/>
@@ -29225,7 +29662,7 @@
           <a:noFill/>
         </p:spPr>
         <p:txBody>
-          <a:bodyPr wrap="square" anchor="t" lIns="0" rIns="0" tIns="0" bIns="0">
+          <a:bodyPr wrap="square" lIns="0" tIns="0" rIns="0" bIns="0" anchor="t">
             <a:spAutoFit/>
           </a:bodyPr>
           <a:lstStyle/>
@@ -29258,7 +29695,7 @@
         </p:nvSpPr>
         <p:spPr>
           <a:xfrm>
-            <a:off x="905256" y="2048256"/>
+            <a:off x="6281928" y="1755203"/>
             <a:ext cx="5102352" cy="2084831"/>
           </a:xfrm>
           <a:prstGeom prst="roundRect">
@@ -29291,6 +29728,7 @@
           <a:lstStyle/>
           <a:p>
             <a:pPr algn="ctr"/>
+            <a:endParaRPr/>
           </a:p>
         </p:txBody>
       </p:sp>
@@ -29302,7 +29740,7 @@
         </p:nvSpPr>
         <p:spPr>
           <a:xfrm>
-            <a:off x="822960" y="1965960"/>
+            <a:off x="6199632" y="1672907"/>
             <a:ext cx="5102352" cy="2084831"/>
           </a:xfrm>
           <a:prstGeom prst="roundRect">
@@ -29335,6 +29773,7 @@
           <a:lstStyle/>
           <a:p>
             <a:pPr algn="ctr"/>
+            <a:endParaRPr/>
           </a:p>
         </p:txBody>
       </p:sp>
@@ -29346,7 +29785,7 @@
         </p:nvSpPr>
         <p:spPr>
           <a:xfrm>
-            <a:off x="822960" y="1965960"/>
+            <a:off x="6199632" y="1672907"/>
             <a:ext cx="91440" cy="2084831"/>
           </a:xfrm>
           <a:prstGeom prst="rect">
@@ -29379,6 +29818,7 @@
           <a:lstStyle/>
           <a:p>
             <a:pPr algn="ctr"/>
+            <a:endParaRPr/>
           </a:p>
         </p:txBody>
       </p:sp>
@@ -29390,7 +29830,7 @@
         </p:nvSpPr>
         <p:spPr>
           <a:xfrm>
-            <a:off x="1115568" y="2148840"/>
+            <a:off x="6492240" y="1855787"/>
             <a:ext cx="1415948" cy="310896"/>
           </a:xfrm>
           <a:prstGeom prst="roundRect">
@@ -29419,7 +29859,7 @@
           </a:fontRef>
         </p:style>
         <p:txBody>
-          <a:bodyPr rtlCol="0" anchor="ctr" wrap="none" lIns="45720" rIns="45720"/>
+          <a:bodyPr wrap="none" lIns="45720" rIns="45720" rtlCol="0" anchor="ctr"/>
           <a:lstStyle/>
           <a:p>
             <a:pPr algn="ctr"/>
@@ -29443,7 +29883,7 @@
         </p:nvSpPr>
         <p:spPr>
           <a:xfrm>
-            <a:off x="1143000" y="2715768"/>
+            <a:off x="6519672" y="2422715"/>
             <a:ext cx="4507992" cy="1234440"/>
           </a:xfrm>
           <a:prstGeom prst="rect">
@@ -29452,7 +29892,7 @@
           <a:noFill/>
         </p:spPr>
         <p:txBody>
-          <a:bodyPr wrap="square" anchor="t" lIns="0" rIns="0" tIns="0" bIns="0">
+          <a:bodyPr wrap="square" lIns="0" tIns="0" rIns="0" bIns="0" anchor="t">
             <a:spAutoFit/>
           </a:bodyPr>
           <a:lstStyle/>
@@ -29504,7 +29944,7 @@
         </p:nvSpPr>
         <p:spPr>
           <a:xfrm>
-            <a:off x="6281928" y="2048256"/>
+            <a:off x="868680" y="4116366"/>
             <a:ext cx="5102352" cy="2084831"/>
           </a:xfrm>
           <a:prstGeom prst="roundRect">
@@ -29537,6 +29977,7 @@
           <a:lstStyle/>
           <a:p>
             <a:pPr algn="ctr"/>
+            <a:endParaRPr/>
           </a:p>
         </p:txBody>
       </p:sp>
@@ -29548,7 +29989,7 @@
         </p:nvSpPr>
         <p:spPr>
           <a:xfrm>
-            <a:off x="6199632" y="1965960"/>
+            <a:off x="786384" y="4050349"/>
             <a:ext cx="5102352" cy="2084831"/>
           </a:xfrm>
           <a:prstGeom prst="roundRect">
@@ -29581,6 +30022,7 @@
           <a:lstStyle/>
           <a:p>
             <a:pPr algn="ctr"/>
+            <a:endParaRPr/>
           </a:p>
         </p:txBody>
       </p:sp>
@@ -29592,7 +30034,7 @@
         </p:nvSpPr>
         <p:spPr>
           <a:xfrm>
-            <a:off x="6199632" y="1965960"/>
+            <a:off x="786384" y="4050349"/>
             <a:ext cx="91440" cy="2084831"/>
           </a:xfrm>
           <a:prstGeom prst="rect">
@@ -29625,6 +30067,7 @@
           <a:lstStyle/>
           <a:p>
             <a:pPr algn="ctr"/>
+            <a:endParaRPr/>
           </a:p>
         </p:txBody>
       </p:sp>
@@ -29636,7 +30079,7 @@
         </p:nvSpPr>
         <p:spPr>
           <a:xfrm>
-            <a:off x="6492240" y="2148840"/>
+            <a:off x="1078992" y="4233229"/>
             <a:ext cx="1576425" cy="310896"/>
           </a:xfrm>
           <a:prstGeom prst="roundRect">
@@ -29665,7 +30108,7 @@
           </a:fontRef>
         </p:style>
         <p:txBody>
-          <a:bodyPr rtlCol="0" anchor="ctr" wrap="none" lIns="45720" rIns="45720"/>
+          <a:bodyPr wrap="none" lIns="45720" rIns="45720" rtlCol="0" anchor="ctr"/>
           <a:lstStyle/>
           <a:p>
             <a:pPr algn="ctr"/>
@@ -29689,7 +30132,7 @@
         </p:nvSpPr>
         <p:spPr>
           <a:xfrm>
-            <a:off x="6519672" y="2715768"/>
+            <a:off x="1106424" y="4800157"/>
             <a:ext cx="4507992" cy="1234440"/>
           </a:xfrm>
           <a:prstGeom prst="rect">
@@ -29698,7 +30141,7 @@
           <a:noFill/>
         </p:spPr>
         <p:txBody>
-          <a:bodyPr wrap="square" anchor="t" lIns="0" rIns="0" tIns="0" bIns="0">
+          <a:bodyPr wrap="square" lIns="0" tIns="0" rIns="0" bIns="0" anchor="t">
             <a:spAutoFit/>
           </a:bodyPr>
           <a:lstStyle/>
@@ -29750,7 +30193,7 @@
         </p:nvSpPr>
         <p:spPr>
           <a:xfrm>
-            <a:off x="905256" y="4352543"/>
+            <a:off x="868680" y="1736244"/>
             <a:ext cx="5102352" cy="2084831"/>
           </a:xfrm>
           <a:prstGeom prst="roundRect">
@@ -29783,6 +30226,7 @@
           <a:lstStyle/>
           <a:p>
             <a:pPr algn="ctr"/>
+            <a:endParaRPr/>
           </a:p>
         </p:txBody>
       </p:sp>
@@ -29794,7 +30238,7 @@
         </p:nvSpPr>
         <p:spPr>
           <a:xfrm>
-            <a:off x="822960" y="4270247"/>
+            <a:off x="786384" y="1653948"/>
             <a:ext cx="5102352" cy="2084831"/>
           </a:xfrm>
           <a:prstGeom prst="roundRect">
@@ -29827,6 +30271,7 @@
           <a:lstStyle/>
           <a:p>
             <a:pPr algn="ctr"/>
+            <a:endParaRPr/>
           </a:p>
         </p:txBody>
       </p:sp>
@@ -29838,7 +30283,7 @@
         </p:nvSpPr>
         <p:spPr>
           <a:xfrm>
-            <a:off x="822960" y="4270247"/>
+            <a:off x="786384" y="1653948"/>
             <a:ext cx="91440" cy="2084831"/>
           </a:xfrm>
           <a:prstGeom prst="rect">
@@ -29871,6 +30316,7 @@
           <a:lstStyle/>
           <a:p>
             <a:pPr algn="ctr"/>
+            <a:endParaRPr/>
           </a:p>
         </p:txBody>
       </p:sp>
@@ -29882,7 +30328,7 @@
         </p:nvSpPr>
         <p:spPr>
           <a:xfrm>
-            <a:off x="1115568" y="4453127"/>
+            <a:off x="1078992" y="1836828"/>
             <a:ext cx="1415948" cy="310896"/>
           </a:xfrm>
           <a:prstGeom prst="roundRect">
@@ -29911,7 +30357,7 @@
           </a:fontRef>
         </p:style>
         <p:txBody>
-          <a:bodyPr rtlCol="0" anchor="ctr" wrap="none" lIns="45720" rIns="45720"/>
+          <a:bodyPr wrap="none" lIns="45720" rIns="45720" rtlCol="0" anchor="ctr"/>
           <a:lstStyle/>
           <a:p>
             <a:pPr algn="ctr"/>
@@ -29935,7 +30381,7 @@
         </p:nvSpPr>
         <p:spPr>
           <a:xfrm>
-            <a:off x="1143000" y="5020055"/>
+            <a:off x="1106424" y="2403756"/>
             <a:ext cx="4507992" cy="1234440"/>
           </a:xfrm>
           <a:prstGeom prst="rect">
@@ -29944,7 +30390,7 @@
           <a:noFill/>
         </p:spPr>
         <p:txBody>
-          <a:bodyPr wrap="square" anchor="t" lIns="0" rIns="0" tIns="0" bIns="0">
+          <a:bodyPr wrap="square" lIns="0" tIns="0" rIns="0" bIns="0" anchor="t">
             <a:spAutoFit/>
           </a:bodyPr>
           <a:lstStyle/>
@@ -29996,7 +30442,7 @@
         </p:nvSpPr>
         <p:spPr>
           <a:xfrm>
-            <a:off x="6281928" y="4352543"/>
+            <a:off x="6281928" y="4096066"/>
             <a:ext cx="5102352" cy="2084831"/>
           </a:xfrm>
           <a:prstGeom prst="roundRect">
@@ -30029,6 +30475,7 @@
           <a:lstStyle/>
           <a:p>
             <a:pPr algn="ctr"/>
+            <a:endParaRPr/>
           </a:p>
         </p:txBody>
       </p:sp>
@@ -30040,7 +30487,7 @@
         </p:nvSpPr>
         <p:spPr>
           <a:xfrm>
-            <a:off x="6199632" y="4270247"/>
+            <a:off x="6199632" y="4013770"/>
             <a:ext cx="5102352" cy="2084831"/>
           </a:xfrm>
           <a:prstGeom prst="roundRect">
@@ -30073,6 +30520,7 @@
           <a:lstStyle/>
           <a:p>
             <a:pPr algn="ctr"/>
+            <a:endParaRPr/>
           </a:p>
         </p:txBody>
       </p:sp>
@@ -30084,7 +30532,7 @@
         </p:nvSpPr>
         <p:spPr>
           <a:xfrm>
-            <a:off x="6199632" y="4270247"/>
+            <a:off x="6199632" y="4013770"/>
             <a:ext cx="91440" cy="2084831"/>
           </a:xfrm>
           <a:prstGeom prst="rect">
@@ -30117,6 +30565,7 @@
           <a:lstStyle/>
           <a:p>
             <a:pPr algn="ctr"/>
+            <a:endParaRPr/>
           </a:p>
         </p:txBody>
       </p:sp>
@@ -30128,7 +30577,7 @@
         </p:nvSpPr>
         <p:spPr>
           <a:xfrm>
-            <a:off x="6492240" y="4453127"/>
+            <a:off x="6492240" y="4196650"/>
             <a:ext cx="1255471" cy="310896"/>
           </a:xfrm>
           <a:prstGeom prst="roundRect">
@@ -30157,7 +30606,7 @@
           </a:fontRef>
         </p:style>
         <p:txBody>
-          <a:bodyPr rtlCol="0" anchor="ctr" wrap="none" lIns="45720" rIns="45720"/>
+          <a:bodyPr wrap="none" lIns="45720" rIns="45720" rtlCol="0" anchor="ctr"/>
           <a:lstStyle/>
           <a:p>
             <a:pPr algn="ctr"/>
@@ -30181,7 +30630,7 @@
         </p:nvSpPr>
         <p:spPr>
           <a:xfrm>
-            <a:off x="6519672" y="5020055"/>
+            <a:off x="6519672" y="4763578"/>
             <a:ext cx="4507992" cy="1234440"/>
           </a:xfrm>
           <a:prstGeom prst="rect">
@@ -30190,7 +30639,7 @@
           <a:noFill/>
         </p:spPr>
         <p:txBody>
-          <a:bodyPr wrap="square" anchor="t" lIns="0" rIns="0" tIns="0" bIns="0">
+          <a:bodyPr wrap="square" lIns="0" tIns="0" rIns="0" bIns="0" anchor="t">
             <a:spAutoFit/>
           </a:bodyPr>
           <a:lstStyle/>
@@ -30304,7 +30753,7 @@
           <a:noFill/>
         </p:spPr>
         <p:txBody>
-          <a:bodyPr wrap="square" anchor="t" lIns="0" rIns="0" tIns="0" bIns="0">
+          <a:bodyPr wrap="square" lIns="0" tIns="0" rIns="0" bIns="0" anchor="t">
             <a:spAutoFit/>
           </a:bodyPr>
           <a:lstStyle/>
@@ -30331,17 +30780,17 @@
       </p:sp>
     </p:spTree>
   </p:cSld>
-  <p:transition spd="fast">
-    <p:fade/>
-  </p:transition>
   <p:clrMapOvr>
     <a:masterClrMapping/>
   </p:clrMapOvr>
+  <p:transition>
+    <p:fade/>
+  </p:transition>
 </p:sld>
 </file>
 
 <file path=ppt/slides/slide7.xml><?xml version="1.0" encoding="utf-8"?>
-<p:sld xmlns:a="http://schemas.openxmlformats.org/drawingml/2006/main" xmlns:p="http://schemas.openxmlformats.org/presentationml/2006/main" xmlns:r="http://schemas.openxmlformats.org/officeDocument/2006/relationships">
+<p:sld xmlns:a="http://schemas.openxmlformats.org/drawingml/2006/main" xmlns:r="http://schemas.openxmlformats.org/officeDocument/2006/relationships" xmlns:p="http://schemas.openxmlformats.org/presentationml/2006/main">
   <p:cSld>
     <p:bg>
       <p:bgPr>
@@ -30357,7 +30806,14 @@
         <p:cNvGrpSpPr/>
         <p:nvPr/>
       </p:nvGrpSpPr>
-      <p:grpSpPr/>
+      <p:grpSpPr>
+        <a:xfrm>
+          <a:off x="0" y="0"/>
+          <a:ext cx="0" cy="0"/>
+          <a:chOff x="0" y="0"/>
+          <a:chExt cx="0" cy="0"/>
+        </a:xfrm>
+      </p:grpSpPr>
       <p:sp>
         <p:nvSpPr>
           <p:cNvPr id="2" name="Parallelogram 1"/>
@@ -30395,7 +30851,7 @@
           </a:fontRef>
         </p:style>
         <p:txBody>
-          <a:bodyPr rtlCol="0" anchor="ctr" lIns="256032" rIns="45720" tIns="18288" bIns="18288"/>
+          <a:bodyPr lIns="256032" tIns="18288" rIns="45720" bIns="18288" rtlCol="0" anchor="ctr"/>
           <a:lstStyle/>
           <a:p>
             <a:pPr algn="l"/>
@@ -30428,7 +30884,7 @@
           <a:noFill/>
         </p:spPr>
         <p:txBody>
-          <a:bodyPr wrap="square" anchor="t" lIns="0" rIns="0" tIns="0" bIns="0">
+          <a:bodyPr wrap="square" lIns="0" tIns="0" rIns="0" bIns="0" anchor="t">
             <a:spAutoFit/>
           </a:bodyPr>
           <a:lstStyle/>
@@ -30470,7 +30926,7 @@
           <a:noFill/>
         </p:spPr>
         <p:txBody>
-          <a:bodyPr wrap="square" anchor="t" lIns="0" rIns="0" tIns="0" bIns="0">
+          <a:bodyPr wrap="square" lIns="0" tIns="0" rIns="0" bIns="0" anchor="t">
             <a:spAutoFit/>
           </a:bodyPr>
           <a:lstStyle/>
@@ -30555,6 +31011,7 @@
           <a:lstStyle/>
           <a:p>
             <a:pPr algn="ctr"/>
+            <a:endParaRPr/>
           </a:p>
         </p:txBody>
       </p:sp>
@@ -30599,6 +31056,7 @@
           <a:lstStyle/>
           <a:p>
             <a:pPr algn="ctr"/>
+            <a:endParaRPr/>
           </a:p>
         </p:txBody>
       </p:sp>
@@ -30643,6 +31101,7 @@
           <a:lstStyle/>
           <a:p>
             <a:pPr algn="ctr"/>
+            <a:endParaRPr/>
           </a:p>
         </p:txBody>
       </p:sp>
@@ -30663,7 +31122,7 @@
           <a:noFill/>
         </p:spPr>
         <p:txBody>
-          <a:bodyPr wrap="square" anchor="t" lIns="0" rIns="0" tIns="0" bIns="0">
+          <a:bodyPr wrap="square" lIns="0" tIns="0" rIns="0" bIns="0" anchor="t">
             <a:spAutoFit/>
           </a:bodyPr>
           <a:lstStyle/>
@@ -30705,7 +31164,7 @@
           <a:noFill/>
         </p:spPr>
         <p:txBody>
-          <a:bodyPr wrap="square" anchor="t" lIns="0" rIns="0" tIns="0" bIns="0">
+          <a:bodyPr wrap="square" lIns="0" tIns="0" rIns="0" bIns="0" anchor="t">
             <a:spAutoFit/>
           </a:bodyPr>
           <a:lstStyle/>
@@ -30771,6 +31230,7 @@
           <a:lstStyle/>
           <a:p>
             <a:pPr algn="ctr"/>
+            <a:endParaRPr/>
           </a:p>
         </p:txBody>
       </p:sp>
@@ -30815,6 +31275,7 @@
           <a:lstStyle/>
           <a:p>
             <a:pPr algn="ctr"/>
+            <a:endParaRPr/>
           </a:p>
         </p:txBody>
       </p:sp>
@@ -30859,6 +31320,7 @@
           <a:lstStyle/>
           <a:p>
             <a:pPr algn="ctr"/>
+            <a:endParaRPr/>
           </a:p>
         </p:txBody>
       </p:sp>
@@ -30903,6 +31365,7 @@
           <a:lstStyle/>
           <a:p>
             <a:pPr algn="ctr"/>
+            <a:endParaRPr/>
           </a:p>
         </p:txBody>
       </p:sp>
@@ -30923,7 +31386,7 @@
           <a:noFill/>
         </p:spPr>
         <p:txBody>
-          <a:bodyPr wrap="square" anchor="t" lIns="0" rIns="0" tIns="0" bIns="0">
+          <a:bodyPr wrap="square" lIns="0" tIns="0" rIns="0" bIns="0" anchor="t">
             <a:spAutoFit/>
           </a:bodyPr>
           <a:lstStyle/>
@@ -30965,7 +31428,7 @@
           <a:noFill/>
         </p:spPr>
         <p:txBody>
-          <a:bodyPr wrap="square" anchor="t" lIns="0" rIns="0" tIns="0" bIns="0">
+          <a:bodyPr wrap="square" lIns="0" tIns="0" rIns="0" bIns="0" anchor="t">
             <a:spAutoFit/>
           </a:bodyPr>
           <a:lstStyle/>
@@ -31031,6 +31494,7 @@
           <a:lstStyle/>
           <a:p>
             <a:pPr algn="ctr"/>
+            <a:endParaRPr/>
           </a:p>
         </p:txBody>
       </p:sp>
@@ -31075,6 +31539,7 @@
           <a:lstStyle/>
           <a:p>
             <a:pPr algn="ctr"/>
+            <a:endParaRPr/>
           </a:p>
         </p:txBody>
       </p:sp>
@@ -31119,6 +31584,7 @@
           <a:lstStyle/>
           <a:p>
             <a:pPr algn="ctr"/>
+            <a:endParaRPr/>
           </a:p>
         </p:txBody>
       </p:sp>
@@ -31139,7 +31605,7 @@
           <a:noFill/>
         </p:spPr>
         <p:txBody>
-          <a:bodyPr wrap="square" anchor="t" lIns="0" rIns="0" tIns="0" bIns="0">
+          <a:bodyPr wrap="square" lIns="0" tIns="0" rIns="0" bIns="0" anchor="t">
             <a:spAutoFit/>
           </a:bodyPr>
           <a:lstStyle/>
@@ -31181,7 +31647,7 @@
           <a:noFill/>
         </p:spPr>
         <p:txBody>
-          <a:bodyPr wrap="square" anchor="t" lIns="0" rIns="0" tIns="0" bIns="0">
+          <a:bodyPr wrap="square" lIns="0" tIns="0" rIns="0" bIns="0" anchor="t">
             <a:spAutoFit/>
           </a:bodyPr>
           <a:lstStyle/>
@@ -31247,6 +31713,7 @@
           <a:lstStyle/>
           <a:p>
             <a:pPr algn="ctr"/>
+            <a:endParaRPr/>
           </a:p>
         </p:txBody>
       </p:sp>
@@ -31291,6 +31758,7 @@
           <a:lstStyle/>
           <a:p>
             <a:pPr algn="ctr"/>
+            <a:endParaRPr/>
           </a:p>
         </p:txBody>
       </p:sp>
@@ -31335,6 +31803,7 @@
           <a:lstStyle/>
           <a:p>
             <a:pPr algn="ctr"/>
+            <a:endParaRPr/>
           </a:p>
         </p:txBody>
       </p:sp>
@@ -31355,7 +31824,7 @@
           <a:noFill/>
         </p:spPr>
         <p:txBody>
-          <a:bodyPr wrap="square" anchor="t" lIns="0" rIns="0" tIns="0" bIns="0">
+          <a:bodyPr wrap="square" lIns="0" tIns="0" rIns="0" bIns="0" anchor="t">
             <a:spAutoFit/>
           </a:bodyPr>
           <a:lstStyle/>
@@ -31397,7 +31866,7 @@
           <a:noFill/>
         </p:spPr>
         <p:txBody>
-          <a:bodyPr wrap="square" anchor="t" lIns="0" rIns="0" tIns="0" bIns="0">
+          <a:bodyPr wrap="square" lIns="0" tIns="0" rIns="0" bIns="0" anchor="t">
             <a:spAutoFit/>
           </a:bodyPr>
           <a:lstStyle/>
@@ -31463,6 +31932,7 @@
           <a:lstStyle/>
           <a:p>
             <a:pPr algn="ctr"/>
+            <a:endParaRPr/>
           </a:p>
         </p:txBody>
       </p:sp>
@@ -31507,6 +31977,7 @@
           <a:lstStyle/>
           <a:p>
             <a:pPr algn="ctr"/>
+            <a:endParaRPr/>
           </a:p>
         </p:txBody>
       </p:sp>
@@ -31551,6 +32022,7 @@
           <a:lstStyle/>
           <a:p>
             <a:pPr algn="ctr"/>
+            <a:endParaRPr/>
           </a:p>
         </p:txBody>
       </p:sp>
@@ -31571,7 +32043,7 @@
           <a:noFill/>
         </p:spPr>
         <p:txBody>
-          <a:bodyPr wrap="square" anchor="t" lIns="0" rIns="0" tIns="0" bIns="0">
+          <a:bodyPr wrap="square" lIns="0" tIns="0" rIns="0" bIns="0" anchor="t">
             <a:spAutoFit/>
           </a:bodyPr>
           <a:lstStyle/>
@@ -31613,7 +32085,7 @@
           <a:noFill/>
         </p:spPr>
         <p:txBody>
-          <a:bodyPr wrap="square" anchor="t" lIns="0" rIns="0" tIns="0" bIns="0">
+          <a:bodyPr wrap="square" lIns="0" tIns="0" rIns="0" bIns="0" anchor="t">
             <a:spAutoFit/>
           </a:bodyPr>
           <a:lstStyle/>
@@ -31679,6 +32151,7 @@
           <a:lstStyle/>
           <a:p>
             <a:pPr algn="ctr"/>
+            <a:endParaRPr/>
           </a:p>
         </p:txBody>
       </p:sp>
@@ -31723,6 +32196,7 @@
           <a:lstStyle/>
           <a:p>
             <a:pPr algn="ctr"/>
+            <a:endParaRPr/>
           </a:p>
         </p:txBody>
       </p:sp>
@@ -31767,6 +32241,7 @@
           <a:lstStyle/>
           <a:p>
             <a:pPr algn="ctr"/>
+            <a:endParaRPr/>
           </a:p>
         </p:txBody>
       </p:sp>
@@ -31811,6 +32286,7 @@
           <a:lstStyle/>
           <a:p>
             <a:pPr algn="ctr"/>
+            <a:endParaRPr/>
           </a:p>
         </p:txBody>
       </p:sp>
@@ -31831,7 +32307,7 @@
           <a:noFill/>
         </p:spPr>
         <p:txBody>
-          <a:bodyPr wrap="square" anchor="t" lIns="0" rIns="0" tIns="0" bIns="0">
+          <a:bodyPr wrap="square" lIns="0" tIns="0" rIns="0" bIns="0" anchor="t">
             <a:spAutoFit/>
           </a:bodyPr>
           <a:lstStyle/>
@@ -31873,7 +32349,7 @@
           <a:noFill/>
         </p:spPr>
         <p:txBody>
-          <a:bodyPr wrap="square" anchor="t" lIns="0" rIns="0" tIns="0" bIns="0">
+          <a:bodyPr wrap="square" lIns="0" tIns="0" rIns="0" bIns="0" anchor="t">
             <a:spAutoFit/>
           </a:bodyPr>
           <a:lstStyle/>
@@ -31935,7 +32411,7 @@
           </a:fontRef>
         </p:style>
         <p:txBody>
-          <a:bodyPr rtlCol="0" anchor="ctr" wrap="square" lIns="256032" rIns="256032" tIns="128016" bIns="128016"/>
+          <a:bodyPr wrap="square" lIns="256032" tIns="128016" rIns="256032" bIns="128016" rtlCol="0" anchor="ctr"/>
           <a:lstStyle/>
           <a:p>
             <a:pPr algn="ctr">
@@ -31997,6 +32473,7 @@
           <a:lstStyle/>
           <a:p>
             <a:pPr algn="ctr"/>
+            <a:endParaRPr/>
           </a:p>
         </p:txBody>
       </p:sp>
@@ -32070,7 +32547,7 @@
           <a:noFill/>
         </p:spPr>
         <p:txBody>
-          <a:bodyPr wrap="square" anchor="t" lIns="0" rIns="0" tIns="0" bIns="0">
+          <a:bodyPr wrap="square" lIns="0" tIns="0" rIns="0" bIns="0" anchor="t">
             <a:spAutoFit/>
           </a:bodyPr>
           <a:lstStyle/>
@@ -32097,17 +32574,17 @@
       </p:sp>
     </p:spTree>
   </p:cSld>
-  <p:transition spd="fast">
-    <p:fade/>
-  </p:transition>
   <p:clrMapOvr>
     <a:masterClrMapping/>
   </p:clrMapOvr>
+  <p:transition>
+    <p:fade/>
+  </p:transition>
 </p:sld>
 </file>
 
 <file path=ppt/slides/slide8.xml><?xml version="1.0" encoding="utf-8"?>
-<p:sld xmlns:a="http://schemas.openxmlformats.org/drawingml/2006/main" xmlns:p="http://schemas.openxmlformats.org/presentationml/2006/main" xmlns:r="http://schemas.openxmlformats.org/officeDocument/2006/relationships">
+<p:sld xmlns:a="http://schemas.openxmlformats.org/drawingml/2006/main" xmlns:r="http://schemas.openxmlformats.org/officeDocument/2006/relationships" xmlns:p="http://schemas.openxmlformats.org/presentationml/2006/main">
   <p:cSld>
     <p:bg>
       <p:bgPr>
@@ -32123,7 +32600,14 @@
         <p:cNvGrpSpPr/>
         <p:nvPr/>
       </p:nvGrpSpPr>
-      <p:grpSpPr/>
+      <p:grpSpPr>
+        <a:xfrm>
+          <a:off x="0" y="0"/>
+          <a:ext cx="0" cy="0"/>
+          <a:chOff x="0" y="0"/>
+          <a:chExt cx="0" cy="0"/>
+        </a:xfrm>
+      </p:grpSpPr>
       <p:sp>
         <p:nvSpPr>
           <p:cNvPr id="2" name="Rectangle 1"/>
@@ -32165,6 +32649,7 @@
           <a:lstStyle/>
           <a:p>
             <a:pPr algn="ctr"/>
+            <a:endParaRPr/>
           </a:p>
         </p:txBody>
       </p:sp>
@@ -32205,7 +32690,7 @@
           </a:fontRef>
         </p:style>
         <p:txBody>
-          <a:bodyPr rtlCol="0" anchor="ctr" lIns="256032" rIns="45720" tIns="18288" bIns="18288"/>
+          <a:bodyPr lIns="256032" tIns="18288" rIns="45720" bIns="18288" rtlCol="0" anchor="ctr"/>
           <a:lstStyle/>
           <a:p>
             <a:pPr algn="l"/>
@@ -32238,7 +32723,7 @@
           <a:noFill/>
         </p:spPr>
         <p:txBody>
-          <a:bodyPr wrap="square" anchor="t" lIns="0" rIns="0" tIns="0" bIns="0">
+          <a:bodyPr wrap="square" lIns="0" tIns="0" rIns="0" bIns="0" anchor="t">
             <a:spAutoFit/>
           </a:bodyPr>
           <a:lstStyle/>
@@ -32280,7 +32765,7 @@
           <a:noFill/>
         </p:spPr>
         <p:txBody>
-          <a:bodyPr wrap="square" anchor="t" lIns="0" rIns="0" tIns="0" bIns="0">
+          <a:bodyPr wrap="square" lIns="0" tIns="0" rIns="0" bIns="0" anchor="t">
             <a:spAutoFit/>
           </a:bodyPr>
           <a:lstStyle/>
@@ -32365,6 +32850,7 @@
           <a:lstStyle/>
           <a:p>
             <a:pPr algn="ctr"/>
+            <a:endParaRPr/>
           </a:p>
         </p:txBody>
       </p:sp>
@@ -32409,6 +32895,7 @@
           <a:lstStyle/>
           <a:p>
             <a:pPr algn="ctr"/>
+            <a:endParaRPr/>
           </a:p>
         </p:txBody>
       </p:sp>
@@ -32453,6 +32940,7 @@
           <a:lstStyle/>
           <a:p>
             <a:pPr algn="ctr"/>
+            <a:endParaRPr/>
           </a:p>
         </p:txBody>
       </p:sp>
@@ -32473,7 +32961,7 @@
           <a:noFill/>
         </p:spPr>
         <p:txBody>
-          <a:bodyPr wrap="square" anchor="t" lIns="0" rIns="0" tIns="0" bIns="0">
+          <a:bodyPr wrap="square" lIns="0" tIns="0" rIns="0" bIns="0" anchor="t">
             <a:spAutoFit/>
           </a:bodyPr>
           <a:lstStyle/>
@@ -32515,7 +33003,7 @@
           <a:noFill/>
         </p:spPr>
         <p:txBody>
-          <a:bodyPr wrap="square" anchor="t" lIns="0" rIns="0" tIns="0" bIns="0">
+          <a:bodyPr wrap="square" lIns="0" tIns="0" rIns="0" bIns="0" anchor="t">
             <a:spAutoFit/>
           </a:bodyPr>
           <a:lstStyle/>
@@ -32581,6 +33069,7 @@
           <a:lstStyle/>
           <a:p>
             <a:pPr algn="ctr"/>
+            <a:endParaRPr/>
           </a:p>
         </p:txBody>
       </p:sp>
@@ -32625,6 +33114,7 @@
           <a:lstStyle/>
           <a:p>
             <a:pPr algn="ctr"/>
+            <a:endParaRPr/>
           </a:p>
         </p:txBody>
       </p:sp>
@@ -32669,6 +33159,7 @@
           <a:lstStyle/>
           <a:p>
             <a:pPr algn="ctr"/>
+            <a:endParaRPr/>
           </a:p>
         </p:txBody>
       </p:sp>
@@ -32689,7 +33180,7 @@
           <a:noFill/>
         </p:spPr>
         <p:txBody>
-          <a:bodyPr wrap="square" anchor="t" lIns="0" rIns="0" tIns="0" bIns="0">
+          <a:bodyPr wrap="square" lIns="0" tIns="0" rIns="0" bIns="0" anchor="t">
             <a:spAutoFit/>
           </a:bodyPr>
           <a:lstStyle/>
@@ -32731,7 +33222,7 @@
           <a:noFill/>
         </p:spPr>
         <p:txBody>
-          <a:bodyPr wrap="square" anchor="t" lIns="0" rIns="0" tIns="0" bIns="0">
+          <a:bodyPr wrap="square" lIns="0" tIns="0" rIns="0" bIns="0" anchor="t">
             <a:spAutoFit/>
           </a:bodyPr>
           <a:lstStyle/>
@@ -32797,6 +33288,7 @@
           <a:lstStyle/>
           <a:p>
             <a:pPr algn="ctr"/>
+            <a:endParaRPr/>
           </a:p>
         </p:txBody>
       </p:sp>
@@ -32841,6 +33333,7 @@
           <a:lstStyle/>
           <a:p>
             <a:pPr algn="ctr"/>
+            <a:endParaRPr/>
           </a:p>
         </p:txBody>
       </p:sp>
@@ -32885,6 +33378,7 @@
           <a:lstStyle/>
           <a:p>
             <a:pPr algn="ctr"/>
+            <a:endParaRPr/>
           </a:p>
         </p:txBody>
       </p:sp>
@@ -32905,7 +33399,7 @@
           <a:noFill/>
         </p:spPr>
         <p:txBody>
-          <a:bodyPr wrap="square" anchor="t" lIns="0" rIns="0" tIns="0" bIns="0">
+          <a:bodyPr wrap="square" lIns="0" tIns="0" rIns="0" bIns="0" anchor="t">
             <a:spAutoFit/>
           </a:bodyPr>
           <a:lstStyle/>
@@ -32947,7 +33441,7 @@
           <a:noFill/>
         </p:spPr>
         <p:txBody>
-          <a:bodyPr wrap="square" anchor="t" lIns="0" rIns="0" tIns="0" bIns="0">
+          <a:bodyPr wrap="square" lIns="0" tIns="0" rIns="0" bIns="0" anchor="t">
             <a:spAutoFit/>
           </a:bodyPr>
           <a:lstStyle/>
@@ -32989,7 +33483,7 @@
           <a:noFill/>
         </p:spPr>
         <p:txBody>
-          <a:bodyPr wrap="square" anchor="t" lIns="0" rIns="0" tIns="0" bIns="0">
+          <a:bodyPr wrap="square" lIns="0" tIns="0" rIns="0" bIns="0" anchor="t">
             <a:spAutoFit/>
           </a:bodyPr>
           <a:lstStyle/>
@@ -33003,14 +33497,101 @@
               </a:spcAft>
             </a:pPr>
             <a:r>
-              <a:rPr sz="1400" b="0" i="1">
+              <a:rPr sz="1400" b="0" i="1" dirty="0">
                 <a:solidFill>
                   <a:srgbClr val="181D2B"/>
                 </a:solidFill>
                 <a:latin typeface="Helvetica Neue"/>
               </a:rPr>
-              <a:t>Dans notre agenda malin : ConflictDetector, RecurrenceService — de la logique</a:t>
-            </a:r>
+              <a:t>Dans </a:t>
+            </a:r>
+            <a:r>
+              <a:rPr sz="1400" b="0" i="1" dirty="0" err="1">
+                <a:solidFill>
+                  <a:srgbClr val="181D2B"/>
+                </a:solidFill>
+                <a:latin typeface="Helvetica Neue"/>
+              </a:rPr>
+              <a:t>notre</a:t>
+            </a:r>
+            <a:r>
+              <a:rPr sz="1400" b="0" i="1" dirty="0">
+                <a:solidFill>
+                  <a:srgbClr val="181D2B"/>
+                </a:solidFill>
+                <a:latin typeface="Helvetica Neue"/>
+              </a:rPr>
+              <a:t> agenda </a:t>
+            </a:r>
+            <a:r>
+              <a:rPr sz="1400" b="0" i="1" dirty="0" err="1">
+                <a:solidFill>
+                  <a:srgbClr val="181D2B"/>
+                </a:solidFill>
+                <a:latin typeface="Helvetica Neue"/>
+              </a:rPr>
+              <a:t>malin</a:t>
+            </a:r>
+            <a:r>
+              <a:rPr sz="1400" b="0" i="1" dirty="0">
+                <a:solidFill>
+                  <a:srgbClr val="181D2B"/>
+                </a:solidFill>
+                <a:latin typeface="Helvetica Neue"/>
+              </a:rPr>
+              <a:t> : </a:t>
+            </a:r>
+            <a:r>
+              <a:rPr sz="1400" b="0" i="1" dirty="0" err="1">
+                <a:solidFill>
+                  <a:srgbClr val="181D2B"/>
+                </a:solidFill>
+                <a:latin typeface="Helvetica Neue"/>
+              </a:rPr>
+              <a:t>ConflictDetector</a:t>
+            </a:r>
+            <a:r>
+              <a:rPr sz="1400" b="0" i="1" dirty="0">
+                <a:solidFill>
+                  <a:srgbClr val="181D2B"/>
+                </a:solidFill>
+                <a:latin typeface="Helvetica Neue"/>
+              </a:rPr>
+              <a:t>, </a:t>
+            </a:r>
+            <a:r>
+              <a:rPr sz="1400" b="0" i="1" dirty="0" err="1">
+                <a:solidFill>
+                  <a:srgbClr val="181D2B"/>
+                </a:solidFill>
+                <a:latin typeface="Helvetica Neue"/>
+              </a:rPr>
+              <a:t>RecurrenceService</a:t>
+            </a:r>
+            <a:r>
+              <a:rPr sz="1400" b="0" i="1" dirty="0">
+                <a:solidFill>
+                  <a:srgbClr val="181D2B"/>
+                </a:solidFill>
+                <a:latin typeface="Helvetica Neue"/>
+              </a:rPr>
+              <a:t> — de la </a:t>
+            </a:r>
+            <a:r>
+              <a:rPr sz="1400" b="0" i="1" dirty="0" err="1">
+                <a:solidFill>
+                  <a:srgbClr val="181D2B"/>
+                </a:solidFill>
+                <a:latin typeface="Helvetica Neue"/>
+              </a:rPr>
+              <a:t>logique</a:t>
+            </a:r>
+            <a:endParaRPr sz="1400" b="0" i="1" dirty="0">
+              <a:solidFill>
+                <a:srgbClr val="181D2B"/>
+              </a:solidFill>
+              <a:latin typeface="Helvetica Neue"/>
+            </a:endParaRPr>
           </a:p>
           <a:p>
             <a:pPr algn="l">
@@ -33022,13 +33603,67 @@
               </a:spcAft>
             </a:pPr>
             <a:r>
-              <a:rPr sz="1400" b="0" i="1">
+              <a:rPr sz="1400" b="0" i="1" dirty="0">
                 <a:solidFill>
                   <a:srgbClr val="181D2B"/>
                 </a:solidFill>
                 <a:latin typeface="Helvetica Neue"/>
               </a:rPr>
-              <a:t>pure, testée sans jamais démarrer Quarkus.</a:t>
+              <a:t>pure, </a:t>
+            </a:r>
+            <a:r>
+              <a:rPr sz="1400" b="0" i="1" dirty="0" err="1">
+                <a:solidFill>
+                  <a:srgbClr val="181D2B"/>
+                </a:solidFill>
+                <a:latin typeface="Helvetica Neue"/>
+              </a:rPr>
+              <a:t>testée</a:t>
+            </a:r>
+            <a:r>
+              <a:rPr sz="1400" b="0" i="1" dirty="0">
+                <a:solidFill>
+                  <a:srgbClr val="181D2B"/>
+                </a:solidFill>
+                <a:latin typeface="Helvetica Neue"/>
+              </a:rPr>
+              <a:t> sans jamais </a:t>
+            </a:r>
+            <a:r>
+              <a:rPr sz="1400" b="0" i="1" dirty="0" err="1">
+                <a:solidFill>
+                  <a:srgbClr val="181D2B"/>
+                </a:solidFill>
+                <a:latin typeface="Helvetica Neue"/>
+              </a:rPr>
+              <a:t>démarrer</a:t>
+            </a:r>
+            <a:r>
+              <a:rPr sz="1400" b="0" i="1" dirty="0">
+                <a:solidFill>
+                  <a:srgbClr val="181D2B"/>
+                </a:solidFill>
+                <a:latin typeface="Helvetica Neue"/>
+              </a:rPr>
+              <a:t> </a:t>
+            </a:r>
+            <a:r>
+              <a:rPr sz="1400" b="0" i="1" dirty="0" err="1">
+                <a:solidFill>
+                  <a:srgbClr val="181D2B"/>
+                </a:solidFill>
+                <a:latin typeface="Helvetica Neue"/>
+              </a:rPr>
+              <a:t>Quarkus</a:t>
+            </a:r>
+            <a:r>
+              <a:rPr sz="1400" b="0" i="1" dirty="0">
+                <a:solidFill>
+                  <a:srgbClr val="181D2B"/>
+                </a:solidFill>
+                <a:latin typeface="Helvetica Neue"/>
+              </a:rPr>
+              <a:t>.</a:t>
             </a:r>
           </a:p>
         </p:txBody>
@@ -33103,7 +33738,7 @@
           <a:noFill/>
         </p:spPr>
         <p:txBody>
-          <a:bodyPr wrap="square" anchor="t" lIns="0" rIns="0" tIns="0" bIns="0">
+          <a:bodyPr wrap="square" lIns="0" tIns="0" rIns="0" bIns="0" anchor="t">
             <a:spAutoFit/>
           </a:bodyPr>
           <a:lstStyle/>
@@ -33130,17 +33765,17 @@
       </p:sp>
     </p:spTree>
   </p:cSld>
-  <p:transition spd="fast">
-    <p:fade/>
-  </p:transition>
   <p:clrMapOvr>
     <a:masterClrMapping/>
   </p:clrMapOvr>
+  <p:transition>
+    <p:fade/>
+  </p:transition>
 </p:sld>
 </file>
 
 <file path=ppt/slides/slide9.xml><?xml version="1.0" encoding="utf-8"?>
-<p:sld xmlns:a="http://schemas.openxmlformats.org/drawingml/2006/main" xmlns:p="http://schemas.openxmlformats.org/presentationml/2006/main" xmlns:r="http://schemas.openxmlformats.org/officeDocument/2006/relationships">
+<p:sld xmlns:a="http://schemas.openxmlformats.org/drawingml/2006/main" xmlns:r="http://schemas.openxmlformats.org/officeDocument/2006/relationships" xmlns:p="http://schemas.openxmlformats.org/presentationml/2006/main">
   <p:cSld>
     <p:bg>
       <p:bgPr>
@@ -33156,7 +33791,14 @@
         <p:cNvGrpSpPr/>
         <p:nvPr/>
       </p:nvGrpSpPr>
-      <p:grpSpPr/>
+      <p:grpSpPr>
+        <a:xfrm>
+          <a:off x="0" y="0"/>
+          <a:ext cx="0" cy="0"/>
+          <a:chOff x="0" y="0"/>
+          <a:chExt cx="0" cy="0"/>
+        </a:xfrm>
+      </p:grpSpPr>
       <p:sp>
         <p:nvSpPr>
           <p:cNvPr id="2" name="Rectangle 1"/>
@@ -33198,6 +33840,7 @@
           <a:lstStyle/>
           <a:p>
             <a:pPr algn="ctr"/>
+            <a:endParaRPr/>
           </a:p>
         </p:txBody>
       </p:sp>
@@ -33238,7 +33881,7 @@
           </a:fontRef>
         </p:style>
         <p:txBody>
-          <a:bodyPr rtlCol="0" anchor="ctr" lIns="256032" rIns="45720" tIns="18288" bIns="18288"/>
+          <a:bodyPr lIns="256032" tIns="18288" rIns="45720" bIns="18288" rtlCol="0" anchor="ctr"/>
           <a:lstStyle/>
           <a:p>
             <a:pPr algn="l"/>
@@ -33271,7 +33914,7 @@
           <a:noFill/>
         </p:spPr>
         <p:txBody>
-          <a:bodyPr wrap="square" anchor="t" lIns="0" rIns="0" tIns="0" bIns="0">
+          <a:bodyPr wrap="square" lIns="0" tIns="0" rIns="0" bIns="0" anchor="t">
             <a:spAutoFit/>
           </a:bodyPr>
           <a:lstStyle/>
@@ -33337,6 +33980,7 @@
           <a:lstStyle/>
           <a:p>
             <a:pPr algn="ctr"/>
+            <a:endParaRPr/>
           </a:p>
         </p:txBody>
       </p:sp>
@@ -33381,6 +34025,7 @@
           <a:lstStyle/>
           <a:p>
             <a:pPr algn="ctr"/>
+            <a:endParaRPr/>
           </a:p>
         </p:txBody>
       </p:sp>
@@ -33425,6 +34070,7 @@
           <a:lstStyle/>
           <a:p>
             <a:pPr algn="ctr"/>
+            <a:endParaRPr/>
           </a:p>
         </p:txBody>
       </p:sp>
@@ -33469,6 +34115,7 @@
           <a:lstStyle/>
           <a:p>
             <a:pPr algn="ctr"/>
+            <a:endParaRPr/>
           </a:p>
         </p:txBody>
       </p:sp>
@@ -33489,7 +34136,7 @@
           <a:noFill/>
         </p:spPr>
         <p:txBody>
-          <a:bodyPr wrap="square" anchor="t" lIns="0" rIns="0" tIns="0" bIns="0">
+          <a:bodyPr wrap="square" lIns="0" tIns="0" rIns="0" bIns="0" anchor="t">
             <a:spAutoFit/>
           </a:bodyPr>
           <a:lstStyle/>
@@ -33578,15 +34225,12 @@
                 <a:spcPts val="0"/>
               </a:spcAft>
             </a:pPr>
-            <a:r>
-              <a:rPr sz="1500" b="0" i="0">
-                <a:solidFill>
-                  <a:srgbClr val="E7ECF5"/>
-                </a:solidFill>
-                <a:latin typeface="Menlo"/>
-              </a:rPr>
-              <a:t/>
-            </a:r>
+            <a:endParaRPr sz="1500" b="0" i="0">
+              <a:solidFill>
+                <a:srgbClr val="E7ECF5"/>
+              </a:solidFill>
+              <a:latin typeface="Menlo"/>
+            </a:endParaRPr>
           </a:p>
           <a:p>
             <a:pPr algn="l">
@@ -33645,7 +34289,7 @@
           <a:noFill/>
         </p:spPr>
         <p:txBody>
-          <a:bodyPr wrap="square" anchor="t" lIns="0" rIns="0" tIns="0" bIns="0">
+          <a:bodyPr wrap="square" lIns="0" tIns="0" rIns="0" bIns="0" anchor="t">
             <a:spAutoFit/>
           </a:bodyPr>
           <a:lstStyle/>
@@ -33778,7 +34422,7 @@
           <a:noFill/>
         </p:spPr>
         <p:txBody>
-          <a:bodyPr wrap="square" anchor="t" lIns="0" rIns="0" tIns="0" bIns="0">
+          <a:bodyPr wrap="square" lIns="0" tIns="0" rIns="0" bIns="0" anchor="t">
             <a:spAutoFit/>
           </a:bodyPr>
           <a:lstStyle/>
@@ -33805,12 +34449,12 @@
       </p:sp>
     </p:spTree>
   </p:cSld>
-  <p:transition spd="fast">
-    <p:fade/>
-  </p:transition>
   <p:clrMapOvr>
     <a:masterClrMapping/>
   </p:clrMapOvr>
+  <p:transition>
+    <p:fade/>
+  </p:transition>
 </p:sld>
 </file>
 

--- a/presentation/couverture-code-conference-dynamite.pptx
+++ b/presentation/couverture-code-conference-dynamite.pptx
@@ -12,9 +12,9 @@
     <p:sldId id="260" r:id="rId6"/>
     <p:sldId id="261" r:id="rId7"/>
     <p:sldId id="262" r:id="rId8"/>
-    <p:sldId id="263" r:id="rId9"/>
-    <p:sldId id="264" r:id="rId10"/>
-    <p:sldId id="265" r:id="rId11"/>
+    <p:sldId id="265" r:id="rId9"/>
+    <p:sldId id="263" r:id="rId10"/>
+    <p:sldId id="264" r:id="rId11"/>
     <p:sldId id="266" r:id="rId12"/>
     <p:sldId id="267" r:id="rId13"/>
     <p:sldId id="268" r:id="rId14"/>
@@ -330,7 +330,7 @@
           <a:p>
             <a:fld id="{5BCAD085-E8A6-8845-BD4E-CB4CCA059FC4}" type="datetimeFigureOut">
               <a:rPr lang="en-US" smtClean="0"/>
-              <a:t>9/15/26</a:t>
+              <a:t>10/8/26</a:t>
             </a:fld>
             <a:endParaRPr lang="en-US"/>
           </a:p>
@@ -498,7 +498,7 @@
           <a:p>
             <a:fld id="{5BCAD085-E8A6-8845-BD4E-CB4CCA059FC4}" type="datetimeFigureOut">
               <a:rPr lang="en-US" smtClean="0"/>
-              <a:t>9/15/26</a:t>
+              <a:t>10/8/26</a:t>
             </a:fld>
             <a:endParaRPr lang="en-US"/>
           </a:p>
@@ -676,7 +676,7 @@
           <a:p>
             <a:fld id="{5BCAD085-E8A6-8845-BD4E-CB4CCA059FC4}" type="datetimeFigureOut">
               <a:rPr lang="en-US" smtClean="0"/>
-              <a:t>9/15/26</a:t>
+              <a:t>10/8/26</a:t>
             </a:fld>
             <a:endParaRPr lang="en-US"/>
           </a:p>
@@ -844,7 +844,7 @@
           <a:p>
             <a:fld id="{5BCAD085-E8A6-8845-BD4E-CB4CCA059FC4}" type="datetimeFigureOut">
               <a:rPr lang="en-US" smtClean="0"/>
-              <a:t>9/15/26</a:t>
+              <a:t>10/8/26</a:t>
             </a:fld>
             <a:endParaRPr lang="en-US"/>
           </a:p>
@@ -1089,7 +1089,7 @@
           <a:p>
             <a:fld id="{5BCAD085-E8A6-8845-BD4E-CB4CCA059FC4}" type="datetimeFigureOut">
               <a:rPr lang="en-US" smtClean="0"/>
-              <a:t>9/15/26</a:t>
+              <a:t>10/8/26</a:t>
             </a:fld>
             <a:endParaRPr lang="en-US"/>
           </a:p>
@@ -1374,7 +1374,7 @@
           <a:p>
             <a:fld id="{5BCAD085-E8A6-8845-BD4E-CB4CCA059FC4}" type="datetimeFigureOut">
               <a:rPr lang="en-US" smtClean="0"/>
-              <a:t>9/15/26</a:t>
+              <a:t>10/8/26</a:t>
             </a:fld>
             <a:endParaRPr lang="en-US"/>
           </a:p>
@@ -1793,7 +1793,7 @@
           <a:p>
             <a:fld id="{5BCAD085-E8A6-8845-BD4E-CB4CCA059FC4}" type="datetimeFigureOut">
               <a:rPr lang="en-US" smtClean="0"/>
-              <a:t>9/15/26</a:t>
+              <a:t>10/8/26</a:t>
             </a:fld>
             <a:endParaRPr lang="en-US"/>
           </a:p>
@@ -1910,7 +1910,7 @@
           <a:p>
             <a:fld id="{5BCAD085-E8A6-8845-BD4E-CB4CCA059FC4}" type="datetimeFigureOut">
               <a:rPr lang="en-US" smtClean="0"/>
-              <a:t>9/15/26</a:t>
+              <a:t>10/8/26</a:t>
             </a:fld>
             <a:endParaRPr lang="en-US"/>
           </a:p>
@@ -2005,7 +2005,7 @@
           <a:p>
             <a:fld id="{5BCAD085-E8A6-8845-BD4E-CB4CCA059FC4}" type="datetimeFigureOut">
               <a:rPr lang="en-US" smtClean="0"/>
-              <a:t>9/15/26</a:t>
+              <a:t>10/8/26</a:t>
             </a:fld>
             <a:endParaRPr lang="en-US"/>
           </a:p>
@@ -2280,7 +2280,7 @@
           <a:p>
             <a:fld id="{5BCAD085-E8A6-8845-BD4E-CB4CCA059FC4}" type="datetimeFigureOut">
               <a:rPr lang="en-US" smtClean="0"/>
-              <a:t>9/15/26</a:t>
+              <a:t>10/8/26</a:t>
             </a:fld>
             <a:endParaRPr lang="en-US"/>
           </a:p>
@@ -2532,7 +2532,7 @@
           <a:p>
             <a:fld id="{5BCAD085-E8A6-8845-BD4E-CB4CCA059FC4}" type="datetimeFigureOut">
               <a:rPr lang="en-US" smtClean="0"/>
-              <a:t>9/15/26</a:t>
+              <a:t>10/8/26</a:t>
             </a:fld>
             <a:endParaRPr lang="en-US"/>
           </a:p>
@@ -2743,7 +2743,7 @@
           <a:p>
             <a:fld id="{5BCAD085-E8A6-8845-BD4E-CB4CCA059FC4}" type="datetimeFigureOut">
               <a:rPr lang="en-US" smtClean="0"/>
-              <a:t>9/15/26</a:t>
+              <a:t>10/8/26</a:t>
             </a:fld>
             <a:endParaRPr lang="en-US"/>
           </a:p>
@@ -4617,7 +4617,7 @@
         <p:spPr>
           <a:xfrm>
             <a:off x="1097280" y="2148840"/>
-            <a:ext cx="9601200" cy="1429559"/>
+            <a:ext cx="9601200" cy="1737360"/>
           </a:xfrm>
           <a:prstGeom prst="rect">
             <a:avLst/>
@@ -4636,7 +4636,7 @@
               </a:lnSpc>
             </a:pPr>
             <a:r>
-              <a:rPr sz="4600" b="1" dirty="0">
+              <a:rPr sz="4600" b="1">
                 <a:solidFill>
                   <a:srgbClr val="F3EEE0"/>
                 </a:solidFill>
@@ -4646,20 +4646,14 @@
 </a:t>
             </a:r>
             <a:r>
-              <a:rPr lang="fr-FR" sz="4600" b="1" dirty="0">
+              <a:rPr sz="4600" b="1">
                 <a:solidFill>
                   <a:srgbClr val="FFD23F"/>
                 </a:solidFill>
                 <a:latin typeface="Helvetica Neue"/>
               </a:rPr>
-              <a:t>n’est jamais à 100%</a:t>
-            </a:r>
-            <a:endParaRPr sz="4600" b="1" dirty="0">
-              <a:solidFill>
-                <a:srgbClr val="FFD23F"/>
-              </a:solidFill>
-              <a:latin typeface="Helvetica Neue"/>
-            </a:endParaRPr>
+              <a:t>sans blabla</a:t>
+            </a:r>
           </a:p>
         </p:txBody>
       </p:sp>
@@ -5017,7 +5011,7 @@
                 </a:solidFill>
                 <a:latin typeface="Helvetica Neue"/>
               </a:rPr>
-              <a:t>BONUS THÉORIE (VITE FAIT)</a:t>
+              <a:t>JUNIT — EN ACTION</a:t>
             </a:r>
           </a:p>
         </p:txBody>
@@ -5030,200 +5024,8 @@
         </p:nvSpPr>
         <p:spPr>
           <a:xfrm>
-            <a:off x="822960" y="1024128"/>
-            <a:ext cx="10515600" cy="1188720"/>
-          </a:xfrm>
-          <a:prstGeom prst="rect">
-            <a:avLst/>
-          </a:prstGeom>
-          <a:noFill/>
-        </p:spPr>
-        <p:txBody>
-          <a:bodyPr wrap="square" lIns="0" tIns="0" rIns="0" bIns="0" anchor="t">
-            <a:spAutoFit/>
-          </a:bodyPr>
-          <a:lstStyle/>
-          <a:p>
-            <a:pPr algn="l">
-              <a:lnSpc>
-                <a:spcPct val="110000"/>
-              </a:lnSpc>
-            </a:pPr>
-            <a:r>
-              <a:rPr sz="2600" b="1">
-                <a:solidFill>
-                  <a:srgbClr val="181D2B"/>
-                </a:solidFill>
-                <a:latin typeface="Helvetica Neue"/>
-              </a:rPr>
-              <a:t>SOLID est au clean code ce que </a:t>
-            </a:r>
-            <a:r>
-              <a:rPr sz="2600" b="1">
-                <a:solidFill>
-                  <a:srgbClr val="F0A72E"/>
-                </a:solidFill>
-                <a:latin typeface="Helvetica Neue"/>
-              </a:rPr>
-              <a:t>FIRST</a:t>
-            </a:r>
-            <a:r>
-              <a:rPr sz="2600" b="1">
-                <a:solidFill>
-                  <a:srgbClr val="181D2B"/>
-                </a:solidFill>
-                <a:latin typeface="Helvetica Neue"/>
-              </a:rPr>
-              <a:t> est au test unitaire.</a:t>
-            </a:r>
-          </a:p>
-        </p:txBody>
-      </p:sp>
-      <p:sp>
-        <p:nvSpPr>
-          <p:cNvPr id="5" name="Rounded Rectangle 4"/>
-          <p:cNvSpPr/>
-          <p:nvPr/>
-        </p:nvSpPr>
-        <p:spPr>
-          <a:xfrm>
-            <a:off x="905256" y="2596896"/>
-            <a:ext cx="1938528" cy="2514600"/>
-          </a:xfrm>
-          <a:prstGeom prst="roundRect">
-            <a:avLst/>
-          </a:prstGeom>
-          <a:solidFill>
-            <a:srgbClr val="E7DCC1"/>
-          </a:solidFill>
-          <a:ln>
-            <a:noFill/>
-          </a:ln>
-          <a:effectLst/>
-        </p:spPr>
-        <p:style>
-          <a:lnRef idx="1">
-            <a:schemeClr val="accent1"/>
-          </a:lnRef>
-          <a:fillRef idx="3">
-            <a:schemeClr val="accent1"/>
-          </a:fillRef>
-          <a:effectRef idx="2">
-            <a:schemeClr val="accent1"/>
-          </a:effectRef>
-          <a:fontRef idx="minor">
-            <a:schemeClr val="lt1"/>
-          </a:fontRef>
-        </p:style>
-        <p:txBody>
-          <a:bodyPr rtlCol="0" anchor="ctr"/>
-          <a:lstStyle/>
-          <a:p>
-            <a:pPr algn="ctr"/>
-            <a:endParaRPr/>
-          </a:p>
-        </p:txBody>
-      </p:sp>
-      <p:sp>
-        <p:nvSpPr>
-          <p:cNvPr id="6" name="Rounded Rectangle 5"/>
-          <p:cNvSpPr/>
-          <p:nvPr/>
-        </p:nvSpPr>
-        <p:spPr>
-          <a:xfrm>
-            <a:off x="822960" y="2514600"/>
-            <a:ext cx="1938528" cy="2514600"/>
-          </a:xfrm>
-          <a:prstGeom prst="roundRect">
-            <a:avLst/>
-          </a:prstGeom>
-          <a:solidFill>
-            <a:srgbClr val="F1E9D5"/>
-          </a:solidFill>
-          <a:ln>
-            <a:noFill/>
-          </a:ln>
-          <a:effectLst/>
-        </p:spPr>
-        <p:style>
-          <a:lnRef idx="1">
-            <a:schemeClr val="accent1"/>
-          </a:lnRef>
-          <a:fillRef idx="3">
-            <a:schemeClr val="accent1"/>
-          </a:fillRef>
-          <a:effectRef idx="2">
-            <a:schemeClr val="accent1"/>
-          </a:effectRef>
-          <a:fontRef idx="minor">
-            <a:schemeClr val="lt1"/>
-          </a:fontRef>
-        </p:style>
-        <p:txBody>
-          <a:bodyPr rtlCol="0" anchor="ctr"/>
-          <a:lstStyle/>
-          <a:p>
-            <a:pPr algn="ctr"/>
-            <a:endParaRPr/>
-          </a:p>
-        </p:txBody>
-      </p:sp>
-      <p:sp>
-        <p:nvSpPr>
-          <p:cNvPr id="7" name="Rectangle 6"/>
-          <p:cNvSpPr/>
-          <p:nvPr/>
-        </p:nvSpPr>
-        <p:spPr>
-          <a:xfrm>
-            <a:off x="822960" y="2514600"/>
-            <a:ext cx="1938528" cy="82296"/>
-          </a:xfrm>
-          <a:prstGeom prst="rect">
-            <a:avLst/>
-          </a:prstGeom>
-          <a:solidFill>
-            <a:srgbClr val="F0A72E"/>
-          </a:solidFill>
-          <a:ln>
-            <a:noFill/>
-          </a:ln>
-          <a:effectLst/>
-        </p:spPr>
-        <p:style>
-          <a:lnRef idx="1">
-            <a:schemeClr val="accent1"/>
-          </a:lnRef>
-          <a:fillRef idx="3">
-            <a:schemeClr val="accent1"/>
-          </a:fillRef>
-          <a:effectRef idx="2">
-            <a:schemeClr val="accent1"/>
-          </a:effectRef>
-          <a:fontRef idx="minor">
-            <a:schemeClr val="lt1"/>
-          </a:fontRef>
-        </p:style>
-        <p:txBody>
-          <a:bodyPr rtlCol="0" anchor="ctr"/>
-          <a:lstStyle/>
-          <a:p>
-            <a:pPr algn="ctr"/>
-            <a:endParaRPr/>
-          </a:p>
-        </p:txBody>
-      </p:sp>
-      <p:sp>
-        <p:nvSpPr>
-          <p:cNvPr id="8" name="TextBox 7"/>
-          <p:cNvSpPr txBox="1"/>
-          <p:nvPr/>
-        </p:nvSpPr>
-        <p:spPr>
-          <a:xfrm>
-            <a:off x="987552" y="2715768"/>
-            <a:ext cx="1609344" cy="548640"/>
+            <a:off x="822960" y="1051560"/>
+            <a:ext cx="10058400" cy="822960"/>
           </a:xfrm>
           <a:prstGeom prst="rect">
             <a:avLst/>
@@ -5245,14 +5047,194 @@
               </a:spcAft>
             </a:pPr>
             <a:r>
-              <a:rPr sz="3400" b="1" i="0">
-                <a:solidFill>
-                  <a:srgbClr val="8A5A10"/>
-                </a:solidFill>
-                <a:latin typeface="Helvetica Neue"/>
-              </a:rPr>
-              <a:t>F</a:t>
-            </a:r>
+              <a:rPr sz="3000" b="1" i="0">
+                <a:solidFill>
+                  <a:srgbClr val="181D2B"/>
+                </a:solidFill>
+                <a:latin typeface="Helvetica Neue"/>
+              </a:rPr>
+              <a:t>Viser juste, vite</a:t>
+            </a:r>
+          </a:p>
+        </p:txBody>
+      </p:sp>
+      <p:sp>
+        <p:nvSpPr>
+          <p:cNvPr id="5" name="Rounded Rectangle 4"/>
+          <p:cNvSpPr/>
+          <p:nvPr/>
+        </p:nvSpPr>
+        <p:spPr>
+          <a:xfrm>
+            <a:off x="822960" y="1965960"/>
+            <a:ext cx="10515600" cy="2743200"/>
+          </a:xfrm>
+          <a:prstGeom prst="roundRect">
+            <a:avLst/>
+          </a:prstGeom>
+          <a:solidFill>
+            <a:srgbClr val="0C111F"/>
+          </a:solidFill>
+          <a:ln>
+            <a:noFill/>
+          </a:ln>
+          <a:effectLst/>
+        </p:spPr>
+        <p:style>
+          <a:lnRef idx="1">
+            <a:schemeClr val="accent1"/>
+          </a:lnRef>
+          <a:fillRef idx="3">
+            <a:schemeClr val="accent1"/>
+          </a:fillRef>
+          <a:effectRef idx="2">
+            <a:schemeClr val="accent1"/>
+          </a:effectRef>
+          <a:fontRef idx="minor">
+            <a:schemeClr val="lt1"/>
+          </a:fontRef>
+        </p:style>
+        <p:txBody>
+          <a:bodyPr rtlCol="0" anchor="ctr"/>
+          <a:lstStyle/>
+          <a:p>
+            <a:pPr algn="ctr"/>
+            <a:endParaRPr/>
+          </a:p>
+        </p:txBody>
+      </p:sp>
+      <p:sp>
+        <p:nvSpPr>
+          <p:cNvPr id="6" name="Oval 5"/>
+          <p:cNvSpPr/>
+          <p:nvPr/>
+        </p:nvSpPr>
+        <p:spPr>
+          <a:xfrm>
+            <a:off x="1024128" y="2093976"/>
+            <a:ext cx="109728" cy="109728"/>
+          </a:xfrm>
+          <a:prstGeom prst="ellipse">
+            <a:avLst/>
+          </a:prstGeom>
+          <a:solidFill>
+            <a:srgbClr val="F05A46"/>
+          </a:solidFill>
+          <a:ln>
+            <a:noFill/>
+          </a:ln>
+          <a:effectLst/>
+        </p:spPr>
+        <p:style>
+          <a:lnRef idx="1">
+            <a:schemeClr val="accent1"/>
+          </a:lnRef>
+          <a:fillRef idx="3">
+            <a:schemeClr val="accent1"/>
+          </a:fillRef>
+          <a:effectRef idx="2">
+            <a:schemeClr val="accent1"/>
+          </a:effectRef>
+          <a:fontRef idx="minor">
+            <a:schemeClr val="lt1"/>
+          </a:fontRef>
+        </p:style>
+        <p:txBody>
+          <a:bodyPr rtlCol="0" anchor="ctr"/>
+          <a:lstStyle/>
+          <a:p>
+            <a:pPr algn="ctr"/>
+            <a:endParaRPr/>
+          </a:p>
+        </p:txBody>
+      </p:sp>
+      <p:sp>
+        <p:nvSpPr>
+          <p:cNvPr id="7" name="Oval 6"/>
+          <p:cNvSpPr/>
+          <p:nvPr/>
+        </p:nvSpPr>
+        <p:spPr>
+          <a:xfrm>
+            <a:off x="1243584" y="2093976"/>
+            <a:ext cx="109728" cy="109728"/>
+          </a:xfrm>
+          <a:prstGeom prst="ellipse">
+            <a:avLst/>
+          </a:prstGeom>
+          <a:solidFill>
+            <a:srgbClr val="F0A72E"/>
+          </a:solidFill>
+          <a:ln>
+            <a:noFill/>
+          </a:ln>
+          <a:effectLst/>
+        </p:spPr>
+        <p:style>
+          <a:lnRef idx="1">
+            <a:schemeClr val="accent1"/>
+          </a:lnRef>
+          <a:fillRef idx="3">
+            <a:schemeClr val="accent1"/>
+          </a:fillRef>
+          <a:effectRef idx="2">
+            <a:schemeClr val="accent1"/>
+          </a:effectRef>
+          <a:fontRef idx="minor">
+            <a:schemeClr val="lt1"/>
+          </a:fontRef>
+        </p:style>
+        <p:txBody>
+          <a:bodyPr rtlCol="0" anchor="ctr"/>
+          <a:lstStyle/>
+          <a:p>
+            <a:pPr algn="ctr"/>
+            <a:endParaRPr/>
+          </a:p>
+        </p:txBody>
+      </p:sp>
+      <p:sp>
+        <p:nvSpPr>
+          <p:cNvPr id="8" name="Oval 7"/>
+          <p:cNvSpPr/>
+          <p:nvPr/>
+        </p:nvSpPr>
+        <p:spPr>
+          <a:xfrm>
+            <a:off x="1463040" y="2093976"/>
+            <a:ext cx="109728" cy="109728"/>
+          </a:xfrm>
+          <a:prstGeom prst="ellipse">
+            <a:avLst/>
+          </a:prstGeom>
+          <a:solidFill>
+            <a:srgbClr val="5BC26B"/>
+          </a:solidFill>
+          <a:ln>
+            <a:noFill/>
+          </a:ln>
+          <a:effectLst/>
+        </p:spPr>
+        <p:style>
+          <a:lnRef idx="1">
+            <a:schemeClr val="accent1"/>
+          </a:lnRef>
+          <a:fillRef idx="3">
+            <a:schemeClr val="accent1"/>
+          </a:fillRef>
+          <a:effectRef idx="2">
+            <a:schemeClr val="accent1"/>
+          </a:effectRef>
+          <a:fontRef idx="minor">
+            <a:schemeClr val="lt1"/>
+          </a:fontRef>
+        </p:style>
+        <p:txBody>
+          <a:bodyPr rtlCol="0" anchor="ctr"/>
+          <a:lstStyle/>
+          <a:p>
+            <a:pPr algn="ctr"/>
+            <a:endParaRPr/>
           </a:p>
         </p:txBody>
       </p:sp>
@@ -5264,8 +5246,8 @@
         </p:nvSpPr>
         <p:spPr>
           <a:xfrm>
-            <a:off x="987552" y="3383280"/>
-            <a:ext cx="1609344" cy="502920"/>
+            <a:off x="1143000" y="2441448"/>
+            <a:ext cx="9875520" cy="2194560"/>
           </a:xfrm>
           <a:prstGeom prst="rect">
             <a:avLst/>
@@ -5280,510 +5262,145 @@
           <a:p>
             <a:pPr algn="l">
               <a:lnSpc>
-                <a:spcPct val="100000"/>
+                <a:spcPct val="125000"/>
               </a:lnSpc>
               <a:spcAft>
                 <a:spcPts val="0"/>
               </a:spcAft>
             </a:pPr>
             <a:r>
-              <a:rPr sz="1350" b="1" i="0">
-                <a:solidFill>
-                  <a:srgbClr val="181D2B"/>
-                </a:solidFill>
-                <a:latin typeface="Helvetica Neue"/>
-              </a:rPr>
-              <a:t>Fast</a:t>
-            </a:r>
-          </a:p>
-        </p:txBody>
-      </p:sp>
-      <p:sp>
-        <p:nvSpPr>
-          <p:cNvPr id="10" name="TextBox 9"/>
-          <p:cNvSpPr txBox="1"/>
-          <p:nvPr/>
-        </p:nvSpPr>
-        <p:spPr>
-          <a:xfrm>
-            <a:off x="987552" y="3886200"/>
-            <a:ext cx="1609344" cy="1005840"/>
-          </a:xfrm>
-          <a:prstGeom prst="rect">
-            <a:avLst/>
-          </a:prstGeom>
-          <a:noFill/>
-        </p:spPr>
-        <p:txBody>
-          <a:bodyPr wrap="square" lIns="0" tIns="0" rIns="0" bIns="0" anchor="t">
-            <a:spAutoFit/>
-          </a:bodyPr>
-          <a:lstStyle/>
+              <a:rPr sz="1500" b="0" i="0">
+                <a:solidFill>
+                  <a:srgbClr val="E7ECF5"/>
+                </a:solidFill>
+                <a:latin typeface="Menlo"/>
+              </a:rPr>
+              <a:t>@Test</a:t>
+            </a:r>
+          </a:p>
           <a:p>
             <a:pPr algn="l">
               <a:lnSpc>
-                <a:spcPct val="120000"/>
+                <a:spcPct val="125000"/>
               </a:lnSpc>
               <a:spcAft>
                 <a:spcPts val="0"/>
               </a:spcAft>
             </a:pPr>
             <a:r>
-              <a:rPr sz="1050" b="0" i="0">
-                <a:solidFill>
-                  <a:srgbClr val="181D2B"/>
-                </a:solidFill>
-                <a:latin typeface="Helvetica Neue"/>
-              </a:rPr>
-              <a:t>Rapide — sinon on arrête</a:t>
+              <a:rPr sz="1500" b="0" i="0">
+                <a:solidFill>
+                  <a:srgbClr val="E7ECF5"/>
+                </a:solidFill>
+                <a:latin typeface="Menlo"/>
+              </a:rPr>
+              <a:t>void deuxEvenementsQuiSeTouchentNeSontPasEnConflit() {</a:t>
             </a:r>
           </a:p>
           <a:p>
             <a:pPr algn="l">
               <a:lnSpc>
-                <a:spcPct val="120000"/>
+                <a:spcPct val="125000"/>
               </a:lnSpc>
               <a:spcAft>
                 <a:spcPts val="0"/>
               </a:spcAft>
             </a:pPr>
             <a:r>
-              <a:rPr sz="1050" b="0" i="0">
-                <a:solidFill>
-                  <a:srgbClr val="181D2B"/>
-                </a:solidFill>
-                <a:latin typeface="Helvetica Neue"/>
-              </a:rPr>
-              <a:t>de les lancer.</a:t>
-            </a:r>
-          </a:p>
-        </p:txBody>
-      </p:sp>
-      <p:sp>
-        <p:nvSpPr>
-          <p:cNvPr id="11" name="Rounded Rectangle 10"/>
-          <p:cNvSpPr/>
-          <p:nvPr/>
-        </p:nvSpPr>
-        <p:spPr>
-          <a:xfrm>
-            <a:off x="3044952" y="2596896"/>
-            <a:ext cx="1938528" cy="2514600"/>
-          </a:xfrm>
-          <a:prstGeom prst="roundRect">
-            <a:avLst/>
-          </a:prstGeom>
-          <a:solidFill>
-            <a:srgbClr val="E7DCC1"/>
-          </a:solidFill>
-          <a:ln>
-            <a:noFill/>
-          </a:ln>
-          <a:effectLst/>
-        </p:spPr>
-        <p:style>
-          <a:lnRef idx="1">
-            <a:schemeClr val="accent1"/>
-          </a:lnRef>
-          <a:fillRef idx="3">
-            <a:schemeClr val="accent1"/>
-          </a:fillRef>
-          <a:effectRef idx="2">
-            <a:schemeClr val="accent1"/>
-          </a:effectRef>
-          <a:fontRef idx="minor">
-            <a:schemeClr val="lt1"/>
-          </a:fontRef>
-        </p:style>
-        <p:txBody>
-          <a:bodyPr rtlCol="0" anchor="ctr"/>
-          <a:lstStyle/>
-          <a:p>
-            <a:pPr algn="ctr"/>
-            <a:endParaRPr/>
-          </a:p>
-        </p:txBody>
-      </p:sp>
-      <p:sp>
-        <p:nvSpPr>
-          <p:cNvPr id="12" name="Rounded Rectangle 11"/>
-          <p:cNvSpPr/>
-          <p:nvPr/>
-        </p:nvSpPr>
-        <p:spPr>
-          <a:xfrm>
-            <a:off x="2962656" y="2514600"/>
-            <a:ext cx="1938528" cy="2514600"/>
-          </a:xfrm>
-          <a:prstGeom prst="roundRect">
-            <a:avLst/>
-          </a:prstGeom>
-          <a:solidFill>
-            <a:srgbClr val="F1E9D5"/>
-          </a:solidFill>
-          <a:ln>
-            <a:noFill/>
-          </a:ln>
-          <a:effectLst/>
-        </p:spPr>
-        <p:style>
-          <a:lnRef idx="1">
-            <a:schemeClr val="accent1"/>
-          </a:lnRef>
-          <a:fillRef idx="3">
-            <a:schemeClr val="accent1"/>
-          </a:fillRef>
-          <a:effectRef idx="2">
-            <a:schemeClr val="accent1"/>
-          </a:effectRef>
-          <a:fontRef idx="minor">
-            <a:schemeClr val="lt1"/>
-          </a:fontRef>
-        </p:style>
-        <p:txBody>
-          <a:bodyPr rtlCol="0" anchor="ctr"/>
-          <a:lstStyle/>
-          <a:p>
-            <a:pPr algn="ctr"/>
-            <a:endParaRPr/>
-          </a:p>
-        </p:txBody>
-      </p:sp>
-      <p:sp>
-        <p:nvSpPr>
-          <p:cNvPr id="13" name="Rectangle 12"/>
-          <p:cNvSpPr/>
-          <p:nvPr/>
-        </p:nvSpPr>
-        <p:spPr>
-          <a:xfrm>
-            <a:off x="2962656" y="2514600"/>
-            <a:ext cx="1938528" cy="82296"/>
-          </a:xfrm>
-          <a:prstGeom prst="rect">
-            <a:avLst/>
-          </a:prstGeom>
-          <a:solidFill>
-            <a:srgbClr val="2EB0A0"/>
-          </a:solidFill>
-          <a:ln>
-            <a:noFill/>
-          </a:ln>
-          <a:effectLst/>
-        </p:spPr>
-        <p:style>
-          <a:lnRef idx="1">
-            <a:schemeClr val="accent1"/>
-          </a:lnRef>
-          <a:fillRef idx="3">
-            <a:schemeClr val="accent1"/>
-          </a:fillRef>
-          <a:effectRef idx="2">
-            <a:schemeClr val="accent1"/>
-          </a:effectRef>
-          <a:fontRef idx="minor">
-            <a:schemeClr val="lt1"/>
-          </a:fontRef>
-        </p:style>
-        <p:txBody>
-          <a:bodyPr rtlCol="0" anchor="ctr"/>
-          <a:lstStyle/>
-          <a:p>
-            <a:pPr algn="ctr"/>
-            <a:endParaRPr/>
-          </a:p>
-        </p:txBody>
-      </p:sp>
-      <p:sp>
-        <p:nvSpPr>
-          <p:cNvPr id="14" name="TextBox 13"/>
-          <p:cNvSpPr txBox="1"/>
-          <p:nvPr/>
-        </p:nvSpPr>
-        <p:spPr>
-          <a:xfrm>
-            <a:off x="3127248" y="2715768"/>
-            <a:ext cx="1609344" cy="548640"/>
-          </a:xfrm>
-          <a:prstGeom prst="rect">
-            <a:avLst/>
-          </a:prstGeom>
-          <a:noFill/>
-        </p:spPr>
-        <p:txBody>
-          <a:bodyPr wrap="square" lIns="0" tIns="0" rIns="0" bIns="0" anchor="t">
-            <a:spAutoFit/>
-          </a:bodyPr>
-          <a:lstStyle/>
+              <a:rPr sz="1500" b="0" i="0">
+                <a:solidFill>
+                  <a:srgbClr val="E7ECF5"/>
+                </a:solidFill>
+                <a:latin typeface="Menlo"/>
+              </a:rPr>
+              <a:t>    Event a = eventAt("a", 9, 10);</a:t>
+            </a:r>
+          </a:p>
           <a:p>
             <a:pPr algn="l">
               <a:lnSpc>
-                <a:spcPct val="100000"/>
+                <a:spcPct val="125000"/>
               </a:lnSpc>
               <a:spcAft>
                 <a:spcPts val="0"/>
               </a:spcAft>
             </a:pPr>
             <a:r>
-              <a:rPr sz="3400" b="1" i="0">
-                <a:solidFill>
-                  <a:srgbClr val="1B6E62"/>
-                </a:solidFill>
-                <a:latin typeface="Helvetica Neue"/>
-              </a:rPr>
-              <a:t>I</a:t>
-            </a:r>
-          </a:p>
-        </p:txBody>
-      </p:sp>
-      <p:sp>
-        <p:nvSpPr>
-          <p:cNvPr id="15" name="TextBox 14"/>
-          <p:cNvSpPr txBox="1"/>
-          <p:nvPr/>
-        </p:nvSpPr>
-        <p:spPr>
-          <a:xfrm>
-            <a:off x="3127248" y="3383280"/>
-            <a:ext cx="1609344" cy="502920"/>
-          </a:xfrm>
-          <a:prstGeom prst="rect">
-            <a:avLst/>
-          </a:prstGeom>
-          <a:noFill/>
-        </p:spPr>
-        <p:txBody>
-          <a:bodyPr wrap="square" lIns="0" tIns="0" rIns="0" bIns="0" anchor="t">
-            <a:spAutoFit/>
-          </a:bodyPr>
-          <a:lstStyle/>
+              <a:rPr sz="1500" b="0" i="0">
+                <a:solidFill>
+                  <a:srgbClr val="E7ECF5"/>
+                </a:solidFill>
+                <a:latin typeface="Menlo"/>
+              </a:rPr>
+              <a:t>    Event b = eventAt("b", 10, 11);</a:t>
+            </a:r>
+          </a:p>
           <a:p>
             <a:pPr algn="l">
               <a:lnSpc>
-                <a:spcPct val="100000"/>
+                <a:spcPct val="125000"/>
               </a:lnSpc>
               <a:spcAft>
                 <a:spcPts val="0"/>
               </a:spcAft>
             </a:pPr>
-            <a:r>
-              <a:rPr sz="1350" b="1" i="0">
-                <a:solidFill>
-                  <a:srgbClr val="181D2B"/>
-                </a:solidFill>
-                <a:latin typeface="Helvetica Neue"/>
-              </a:rPr>
-              <a:t>Isolated</a:t>
-            </a:r>
-          </a:p>
-        </p:txBody>
-      </p:sp>
-      <p:sp>
-        <p:nvSpPr>
-          <p:cNvPr id="16" name="TextBox 15"/>
-          <p:cNvSpPr txBox="1"/>
-          <p:nvPr/>
-        </p:nvSpPr>
-        <p:spPr>
-          <a:xfrm>
-            <a:off x="3127248" y="3886200"/>
-            <a:ext cx="1609344" cy="1005840"/>
-          </a:xfrm>
-          <a:prstGeom prst="rect">
-            <a:avLst/>
-          </a:prstGeom>
-          <a:noFill/>
-        </p:spPr>
-        <p:txBody>
-          <a:bodyPr wrap="square" lIns="0" tIns="0" rIns="0" bIns="0" anchor="t">
-            <a:spAutoFit/>
-          </a:bodyPr>
-          <a:lstStyle/>
+            <a:endParaRPr sz="1500" b="0" i="0">
+              <a:solidFill>
+                <a:srgbClr val="E7ECF5"/>
+              </a:solidFill>
+              <a:latin typeface="Menlo"/>
+            </a:endParaRPr>
+          </a:p>
           <a:p>
             <a:pPr algn="l">
               <a:lnSpc>
-                <a:spcPct val="120000"/>
+                <a:spcPct val="125000"/>
               </a:lnSpc>
               <a:spcAft>
                 <a:spcPts val="0"/>
               </a:spcAft>
             </a:pPr>
             <a:r>
-              <a:rPr sz="1050" b="0" i="0">
-                <a:solidFill>
-                  <a:srgbClr val="181D2B"/>
-                </a:solidFill>
-                <a:latin typeface="Helvetica Neue"/>
-              </a:rPr>
-              <a:t>Indépendant de tout autre</a:t>
+              <a:rPr sz="1500" b="0" i="0">
+                <a:solidFill>
+                  <a:srgbClr val="E7ECF5"/>
+                </a:solidFill>
+                <a:latin typeface="Menlo"/>
+              </a:rPr>
+              <a:t>    assertFalse(detector.isConflicting(a, b));</a:t>
             </a:r>
           </a:p>
           <a:p>
             <a:pPr algn="l">
               <a:lnSpc>
-                <a:spcPct val="120000"/>
+                <a:spcPct val="125000"/>
               </a:lnSpc>
               <a:spcAft>
                 <a:spcPts val="0"/>
               </a:spcAft>
             </a:pPr>
             <a:r>
-              <a:rPr sz="1050" b="0" i="0">
-                <a:solidFill>
-                  <a:srgbClr val="181D2B"/>
-                </a:solidFill>
-                <a:latin typeface="Helvetica Neue"/>
-              </a:rPr>
-              <a:t>test, de tout ordre.</a:t>
-            </a:r>
-          </a:p>
-        </p:txBody>
-      </p:sp>
-      <p:sp>
-        <p:nvSpPr>
-          <p:cNvPr id="17" name="Rounded Rectangle 16"/>
-          <p:cNvSpPr/>
-          <p:nvPr/>
-        </p:nvSpPr>
-        <p:spPr>
-          <a:xfrm>
-            <a:off x="5184648" y="2596896"/>
-            <a:ext cx="1938528" cy="2514600"/>
-          </a:xfrm>
-          <a:prstGeom prst="roundRect">
-            <a:avLst/>
-          </a:prstGeom>
-          <a:solidFill>
-            <a:srgbClr val="E7DCC1"/>
-          </a:solidFill>
-          <a:ln>
-            <a:noFill/>
-          </a:ln>
-          <a:effectLst/>
-        </p:spPr>
-        <p:style>
-          <a:lnRef idx="1">
-            <a:schemeClr val="accent1"/>
-          </a:lnRef>
-          <a:fillRef idx="3">
-            <a:schemeClr val="accent1"/>
-          </a:fillRef>
-          <a:effectRef idx="2">
-            <a:schemeClr val="accent1"/>
-          </a:effectRef>
-          <a:fontRef idx="minor">
-            <a:schemeClr val="lt1"/>
-          </a:fontRef>
-        </p:style>
-        <p:txBody>
-          <a:bodyPr rtlCol="0" anchor="ctr"/>
-          <a:lstStyle/>
-          <a:p>
-            <a:pPr algn="ctr"/>
-            <a:endParaRPr/>
-          </a:p>
-        </p:txBody>
-      </p:sp>
-      <p:sp>
-        <p:nvSpPr>
-          <p:cNvPr id="18" name="Rounded Rectangle 17"/>
-          <p:cNvSpPr/>
-          <p:nvPr/>
-        </p:nvSpPr>
-        <p:spPr>
-          <a:xfrm>
-            <a:off x="5102352" y="2514600"/>
-            <a:ext cx="1938528" cy="2514600"/>
-          </a:xfrm>
-          <a:prstGeom prst="roundRect">
-            <a:avLst/>
-          </a:prstGeom>
-          <a:solidFill>
-            <a:srgbClr val="F1E9D5"/>
-          </a:solidFill>
-          <a:ln>
-            <a:noFill/>
-          </a:ln>
-          <a:effectLst/>
-        </p:spPr>
-        <p:style>
-          <a:lnRef idx="1">
-            <a:schemeClr val="accent1"/>
-          </a:lnRef>
-          <a:fillRef idx="3">
-            <a:schemeClr val="accent1"/>
-          </a:fillRef>
-          <a:effectRef idx="2">
-            <a:schemeClr val="accent1"/>
-          </a:effectRef>
-          <a:fontRef idx="minor">
-            <a:schemeClr val="lt1"/>
-          </a:fontRef>
-        </p:style>
-        <p:txBody>
-          <a:bodyPr rtlCol="0" anchor="ctr"/>
-          <a:lstStyle/>
-          <a:p>
-            <a:pPr algn="ctr"/>
-            <a:endParaRPr/>
-          </a:p>
-        </p:txBody>
-      </p:sp>
-      <p:sp>
-        <p:nvSpPr>
-          <p:cNvPr id="19" name="Rectangle 18"/>
-          <p:cNvSpPr/>
-          <p:nvPr/>
-        </p:nvSpPr>
-        <p:spPr>
-          <a:xfrm>
-            <a:off x="5102352" y="2514600"/>
-            <a:ext cx="1938528" cy="82296"/>
-          </a:xfrm>
-          <a:prstGeom prst="rect">
-            <a:avLst/>
-          </a:prstGeom>
-          <a:solidFill>
-            <a:srgbClr val="9CC24C"/>
-          </a:solidFill>
-          <a:ln>
-            <a:noFill/>
-          </a:ln>
-          <a:effectLst/>
-        </p:spPr>
-        <p:style>
-          <a:lnRef idx="1">
-            <a:schemeClr val="accent1"/>
-          </a:lnRef>
-          <a:fillRef idx="3">
-            <a:schemeClr val="accent1"/>
-          </a:fillRef>
-          <a:effectRef idx="2">
-            <a:schemeClr val="accent1"/>
-          </a:effectRef>
-          <a:fontRef idx="minor">
-            <a:schemeClr val="lt1"/>
-          </a:fontRef>
-        </p:style>
-        <p:txBody>
-          <a:bodyPr rtlCol="0" anchor="ctr"/>
-          <a:lstStyle/>
-          <a:p>
-            <a:pPr algn="ctr"/>
-            <a:endParaRPr/>
-          </a:p>
-        </p:txBody>
-      </p:sp>
-      <p:sp>
-        <p:nvSpPr>
-          <p:cNvPr id="20" name="TextBox 19"/>
+              <a:rPr sz="1500" b="0" i="0">
+                <a:solidFill>
+                  <a:srgbClr val="E7ECF5"/>
+                </a:solidFill>
+                <a:latin typeface="Menlo"/>
+              </a:rPr>
+              <a:t>}</a:t>
+            </a:r>
+          </a:p>
+        </p:txBody>
+      </p:sp>
+      <p:sp>
+        <p:nvSpPr>
+          <p:cNvPr id="10" name="TextBox 9"/>
           <p:cNvSpPr txBox="1"/>
           <p:nvPr/>
         </p:nvSpPr>
         <p:spPr>
           <a:xfrm>
-            <a:off x="5266944" y="2715768"/>
-            <a:ext cx="1609344" cy="548640"/>
+            <a:off x="822960" y="5029200"/>
+            <a:ext cx="9875520" cy="1097280"/>
           </a:xfrm>
           <a:prstGeom prst="rect">
             <a:avLst/>
@@ -5798,834 +5415,65 @@
           <a:p>
             <a:pPr algn="l">
               <a:lnSpc>
-                <a:spcPct val="100000"/>
+                <a:spcPct val="125000"/>
               </a:lnSpc>
               <a:spcAft>
                 <a:spcPts val="0"/>
               </a:spcAft>
             </a:pPr>
             <a:r>
-              <a:rPr sz="3400" b="1" i="0">
-                <a:solidFill>
-                  <a:srgbClr val="546E22"/>
-                </a:solidFill>
-                <a:latin typeface="Helvetica Neue"/>
-              </a:rPr>
-              <a:t>R</a:t>
-            </a:r>
-          </a:p>
-        </p:txBody>
-      </p:sp>
-      <p:sp>
-        <p:nvSpPr>
-          <p:cNvPr id="21" name="TextBox 20"/>
-          <p:cNvSpPr txBox="1"/>
-          <p:nvPr/>
-        </p:nvSpPr>
-        <p:spPr>
-          <a:xfrm>
-            <a:off x="5266944" y="3383280"/>
-            <a:ext cx="1609344" cy="502920"/>
-          </a:xfrm>
-          <a:prstGeom prst="rect">
-            <a:avLst/>
-          </a:prstGeom>
-          <a:noFill/>
-        </p:spPr>
-        <p:txBody>
-          <a:bodyPr wrap="square" lIns="0" tIns="0" rIns="0" bIns="0" anchor="t">
-            <a:spAutoFit/>
-          </a:bodyPr>
-          <a:lstStyle/>
+              <a:rPr sz="1350" b="0" i="0">
+                <a:solidFill>
+                  <a:srgbClr val="181D2B"/>
+                </a:solidFill>
+                <a:latin typeface="Helvetica Neue"/>
+              </a:rPr>
+              <a:t>ConflictDetectorTest : 4 tests, 4 cas limites — chevauchement, contact exact,</a:t>
+            </a:r>
+          </a:p>
           <a:p>
             <a:pPr algn="l">
               <a:lnSpc>
-                <a:spcPct val="100000"/>
+                <a:spcPct val="125000"/>
               </a:lnSpc>
               <a:spcAft>
                 <a:spcPts val="0"/>
               </a:spcAft>
             </a:pPr>
             <a:r>
-              <a:rPr sz="1350" b="1" i="0">
+              <a:rPr sz="1350" b="0" i="0">
                 <a:solidFill>
                   <a:srgbClr val="181D2B"/>
                 </a:solidFill>
                 <a:latin typeface="Helvetica Neue"/>
               </a:rPr>
-              <a:t>Repeatable</a:t>
-            </a:r>
-          </a:p>
-        </p:txBody>
-      </p:sp>
-      <p:sp>
-        <p:nvSpPr>
-          <p:cNvPr id="22" name="TextBox 21"/>
-          <p:cNvSpPr txBox="1"/>
-          <p:nvPr/>
-        </p:nvSpPr>
-        <p:spPr>
-          <a:xfrm>
-            <a:off x="5266944" y="3886200"/>
-            <a:ext cx="1609344" cy="1005840"/>
-          </a:xfrm>
-          <a:prstGeom prst="rect">
-            <a:avLst/>
-          </a:prstGeom>
-          <a:noFill/>
-        </p:spPr>
-        <p:txBody>
-          <a:bodyPr wrap="square" lIns="0" tIns="0" rIns="0" bIns="0" anchor="t">
-            <a:spAutoFit/>
-          </a:bodyPr>
-          <a:lstStyle/>
+              <a:t>séparation nette, et réflexivité (oui, on vérifie qu'un événement n'est pas en</a:t>
+            </a:r>
+          </a:p>
           <a:p>
             <a:pPr algn="l">
               <a:lnSpc>
-                <a:spcPct val="120000"/>
+                <a:spcPct val="125000"/>
               </a:lnSpc>
               <a:spcAft>
                 <a:spcPts val="0"/>
               </a:spcAft>
             </a:pPr>
             <a:r>
-              <a:rPr sz="1050" b="0" i="0">
+              <a:rPr sz="1350" b="0" i="0">
                 <a:solidFill>
                   <a:srgbClr val="181D2B"/>
                 </a:solidFill>
                 <a:latin typeface="Helvetica Neue"/>
               </a:rPr>
-              <a:t>Même résultat : votre machine,</a:t>
-            </a:r>
-          </a:p>
-          <a:p>
-            <a:pPr algn="l">
-              <a:lnSpc>
-                <a:spcPct val="120000"/>
-              </a:lnSpc>
-              <a:spcAft>
-                <a:spcPts val="0"/>
-              </a:spcAft>
-            </a:pPr>
-            <a:r>
-              <a:rPr sz="1050" b="0" i="0">
-                <a:solidFill>
-                  <a:srgbClr val="181D2B"/>
-                </a:solidFill>
-                <a:latin typeface="Helvetica Neue"/>
-              </a:rPr>
-              <a:t>la CI, 3h du matin.</a:t>
-            </a:r>
-          </a:p>
-        </p:txBody>
-      </p:sp>
-      <p:sp>
-        <p:nvSpPr>
-          <p:cNvPr id="23" name="Rounded Rectangle 22"/>
-          <p:cNvSpPr/>
-          <p:nvPr/>
-        </p:nvSpPr>
-        <p:spPr>
-          <a:xfrm>
-            <a:off x="7324344" y="2596896"/>
-            <a:ext cx="1938528" cy="2514600"/>
-          </a:xfrm>
-          <a:prstGeom prst="roundRect">
-            <a:avLst/>
-          </a:prstGeom>
-          <a:solidFill>
-            <a:srgbClr val="E7DCC1"/>
-          </a:solidFill>
-          <a:ln>
-            <a:noFill/>
-          </a:ln>
-          <a:effectLst/>
-        </p:spPr>
-        <p:style>
-          <a:lnRef idx="1">
-            <a:schemeClr val="accent1"/>
-          </a:lnRef>
-          <a:fillRef idx="3">
-            <a:schemeClr val="accent1"/>
-          </a:fillRef>
-          <a:effectRef idx="2">
-            <a:schemeClr val="accent1"/>
-          </a:effectRef>
-          <a:fontRef idx="minor">
-            <a:schemeClr val="lt1"/>
-          </a:fontRef>
-        </p:style>
-        <p:txBody>
-          <a:bodyPr rtlCol="0" anchor="ctr"/>
-          <a:lstStyle/>
-          <a:p>
-            <a:pPr algn="ctr"/>
-            <a:endParaRPr/>
-          </a:p>
-        </p:txBody>
-      </p:sp>
-      <p:sp>
-        <p:nvSpPr>
-          <p:cNvPr id="24" name="Rounded Rectangle 23"/>
-          <p:cNvSpPr/>
-          <p:nvPr/>
-        </p:nvSpPr>
-        <p:spPr>
-          <a:xfrm>
-            <a:off x="7242048" y="2514600"/>
-            <a:ext cx="1938528" cy="2514600"/>
-          </a:xfrm>
-          <a:prstGeom prst="roundRect">
-            <a:avLst/>
-          </a:prstGeom>
-          <a:solidFill>
-            <a:srgbClr val="F1E9D5"/>
-          </a:solidFill>
-          <a:ln>
-            <a:noFill/>
-          </a:ln>
-          <a:effectLst/>
-        </p:spPr>
-        <p:style>
-          <a:lnRef idx="1">
-            <a:schemeClr val="accent1"/>
-          </a:lnRef>
-          <a:fillRef idx="3">
-            <a:schemeClr val="accent1"/>
-          </a:fillRef>
-          <a:effectRef idx="2">
-            <a:schemeClr val="accent1"/>
-          </a:effectRef>
-          <a:fontRef idx="minor">
-            <a:schemeClr val="lt1"/>
-          </a:fontRef>
-        </p:style>
-        <p:txBody>
-          <a:bodyPr rtlCol="0" anchor="ctr"/>
-          <a:lstStyle/>
-          <a:p>
-            <a:pPr algn="ctr"/>
-            <a:endParaRPr/>
-          </a:p>
-        </p:txBody>
-      </p:sp>
-      <p:sp>
-        <p:nvSpPr>
-          <p:cNvPr id="25" name="Rectangle 24"/>
-          <p:cNvSpPr/>
-          <p:nvPr/>
-        </p:nvSpPr>
-        <p:spPr>
-          <a:xfrm>
-            <a:off x="7242048" y="2514600"/>
-            <a:ext cx="1938528" cy="82296"/>
-          </a:xfrm>
-          <a:prstGeom prst="rect">
-            <a:avLst/>
-          </a:prstGeom>
-          <a:solidFill>
-            <a:srgbClr val="F05A46"/>
-          </a:solidFill>
-          <a:ln>
-            <a:noFill/>
-          </a:ln>
-          <a:effectLst/>
-        </p:spPr>
-        <p:style>
-          <a:lnRef idx="1">
-            <a:schemeClr val="accent1"/>
-          </a:lnRef>
-          <a:fillRef idx="3">
-            <a:schemeClr val="accent1"/>
-          </a:fillRef>
-          <a:effectRef idx="2">
-            <a:schemeClr val="accent1"/>
-          </a:effectRef>
-          <a:fontRef idx="minor">
-            <a:schemeClr val="lt1"/>
-          </a:fontRef>
-        </p:style>
-        <p:txBody>
-          <a:bodyPr rtlCol="0" anchor="ctr"/>
-          <a:lstStyle/>
-          <a:p>
-            <a:pPr algn="ctr"/>
-            <a:endParaRPr/>
-          </a:p>
-        </p:txBody>
-      </p:sp>
-      <p:sp>
-        <p:nvSpPr>
-          <p:cNvPr id="26" name="TextBox 25"/>
-          <p:cNvSpPr txBox="1"/>
-          <p:nvPr/>
-        </p:nvSpPr>
-        <p:spPr>
-          <a:xfrm>
-            <a:off x="7406640" y="2715768"/>
-            <a:ext cx="1609344" cy="548640"/>
-          </a:xfrm>
-          <a:prstGeom prst="rect">
-            <a:avLst/>
-          </a:prstGeom>
-          <a:noFill/>
-        </p:spPr>
-        <p:txBody>
-          <a:bodyPr wrap="square" lIns="0" tIns="0" rIns="0" bIns="0" anchor="t">
-            <a:spAutoFit/>
-          </a:bodyPr>
-          <a:lstStyle/>
-          <a:p>
-            <a:pPr algn="l">
-              <a:lnSpc>
-                <a:spcPct val="100000"/>
-              </a:lnSpc>
-              <a:spcAft>
-                <a:spcPts val="0"/>
-              </a:spcAft>
-            </a:pPr>
-            <a:r>
-              <a:rPr sz="3400" b="1" i="0">
-                <a:solidFill>
-                  <a:srgbClr val="A83322"/>
-                </a:solidFill>
-                <a:latin typeface="Helvetica Neue"/>
-              </a:rPr>
-              <a:t>S</a:t>
-            </a:r>
-          </a:p>
-        </p:txBody>
-      </p:sp>
-      <p:sp>
-        <p:nvSpPr>
-          <p:cNvPr id="27" name="TextBox 26"/>
-          <p:cNvSpPr txBox="1"/>
-          <p:nvPr/>
-        </p:nvSpPr>
-        <p:spPr>
-          <a:xfrm>
-            <a:off x="7406640" y="3383280"/>
-            <a:ext cx="1609344" cy="502920"/>
-          </a:xfrm>
-          <a:prstGeom prst="rect">
-            <a:avLst/>
-          </a:prstGeom>
-          <a:noFill/>
-        </p:spPr>
-        <p:txBody>
-          <a:bodyPr wrap="square" lIns="0" tIns="0" rIns="0" bIns="0" anchor="t">
-            <a:spAutoFit/>
-          </a:bodyPr>
-          <a:lstStyle/>
-          <a:p>
-            <a:pPr algn="l">
-              <a:lnSpc>
-                <a:spcPct val="100000"/>
-              </a:lnSpc>
-              <a:spcAft>
-                <a:spcPts val="0"/>
-              </a:spcAft>
-            </a:pPr>
-            <a:r>
-              <a:rPr sz="1350" b="1" i="0">
-                <a:solidFill>
-                  <a:srgbClr val="181D2B"/>
-                </a:solidFill>
-                <a:latin typeface="Helvetica Neue"/>
-              </a:rPr>
-              <a:t>Self-Validating</a:t>
-            </a:r>
-          </a:p>
-        </p:txBody>
-      </p:sp>
-      <p:sp>
-        <p:nvSpPr>
-          <p:cNvPr id="28" name="TextBox 27"/>
-          <p:cNvSpPr txBox="1"/>
-          <p:nvPr/>
-        </p:nvSpPr>
-        <p:spPr>
-          <a:xfrm>
-            <a:off x="7406640" y="3886200"/>
-            <a:ext cx="1609344" cy="1005840"/>
-          </a:xfrm>
-          <a:prstGeom prst="rect">
-            <a:avLst/>
-          </a:prstGeom>
-          <a:noFill/>
-        </p:spPr>
-        <p:txBody>
-          <a:bodyPr wrap="square" lIns="0" tIns="0" rIns="0" bIns="0" anchor="t">
-            <a:spAutoFit/>
-          </a:bodyPr>
-          <a:lstStyle/>
-          <a:p>
-            <a:pPr algn="l">
-              <a:lnSpc>
-                <a:spcPct val="120000"/>
-              </a:lnSpc>
-              <a:spcAft>
-                <a:spcPts val="0"/>
-              </a:spcAft>
-            </a:pPr>
-            <a:r>
-              <a:rPr sz="1050" b="0" i="0">
-                <a:solidFill>
-                  <a:srgbClr val="181D2B"/>
-                </a:solidFill>
-                <a:latin typeface="Helvetica Neue"/>
-              </a:rPr>
-              <a:t>Il dit lui-même s'il passe.</a:t>
-            </a:r>
-          </a:p>
-          <a:p>
-            <a:pPr algn="l">
-              <a:lnSpc>
-                <a:spcPct val="120000"/>
-              </a:lnSpc>
-              <a:spcAft>
-                <a:spcPts val="0"/>
-              </a:spcAft>
-            </a:pPr>
-            <a:r>
-              <a:rPr sz="1050" b="0" i="0">
-                <a:solidFill>
-                  <a:srgbClr val="181D2B"/>
-                </a:solidFill>
-                <a:latin typeface="Helvetica Neue"/>
-              </a:rPr>
-              <a:t>Pas de log à relire.</a:t>
-            </a:r>
-          </a:p>
-        </p:txBody>
-      </p:sp>
-      <p:sp>
-        <p:nvSpPr>
-          <p:cNvPr id="29" name="Rounded Rectangle 28"/>
-          <p:cNvSpPr/>
-          <p:nvPr/>
-        </p:nvSpPr>
-        <p:spPr>
-          <a:xfrm>
-            <a:off x="9464040" y="2596896"/>
-            <a:ext cx="1938528" cy="2514600"/>
-          </a:xfrm>
-          <a:prstGeom prst="roundRect">
-            <a:avLst/>
-          </a:prstGeom>
-          <a:solidFill>
-            <a:srgbClr val="E7DCC1"/>
-          </a:solidFill>
-          <a:ln>
-            <a:noFill/>
-          </a:ln>
-          <a:effectLst/>
-        </p:spPr>
-        <p:style>
-          <a:lnRef idx="1">
-            <a:schemeClr val="accent1"/>
-          </a:lnRef>
-          <a:fillRef idx="3">
-            <a:schemeClr val="accent1"/>
-          </a:fillRef>
-          <a:effectRef idx="2">
-            <a:schemeClr val="accent1"/>
-          </a:effectRef>
-          <a:fontRef idx="minor">
-            <a:schemeClr val="lt1"/>
-          </a:fontRef>
-        </p:style>
-        <p:txBody>
-          <a:bodyPr rtlCol="0" anchor="ctr"/>
-          <a:lstStyle/>
-          <a:p>
-            <a:pPr algn="ctr"/>
-            <a:endParaRPr/>
-          </a:p>
-        </p:txBody>
-      </p:sp>
-      <p:sp>
-        <p:nvSpPr>
-          <p:cNvPr id="30" name="Rounded Rectangle 29"/>
-          <p:cNvSpPr/>
-          <p:nvPr/>
-        </p:nvSpPr>
-        <p:spPr>
-          <a:xfrm>
-            <a:off x="9381744" y="2514600"/>
-            <a:ext cx="1938528" cy="2514600"/>
-          </a:xfrm>
-          <a:prstGeom prst="roundRect">
-            <a:avLst/>
-          </a:prstGeom>
-          <a:solidFill>
-            <a:srgbClr val="F1E9D5"/>
-          </a:solidFill>
-          <a:ln>
-            <a:noFill/>
-          </a:ln>
-          <a:effectLst/>
-        </p:spPr>
-        <p:style>
-          <a:lnRef idx="1">
-            <a:schemeClr val="accent1"/>
-          </a:lnRef>
-          <a:fillRef idx="3">
-            <a:schemeClr val="accent1"/>
-          </a:fillRef>
-          <a:effectRef idx="2">
-            <a:schemeClr val="accent1"/>
-          </a:effectRef>
-          <a:fontRef idx="minor">
-            <a:schemeClr val="lt1"/>
-          </a:fontRef>
-        </p:style>
-        <p:txBody>
-          <a:bodyPr rtlCol="0" anchor="ctr"/>
-          <a:lstStyle/>
-          <a:p>
-            <a:pPr algn="ctr"/>
-            <a:endParaRPr/>
-          </a:p>
-        </p:txBody>
-      </p:sp>
-      <p:sp>
-        <p:nvSpPr>
-          <p:cNvPr id="31" name="Rectangle 30"/>
-          <p:cNvSpPr/>
-          <p:nvPr/>
-        </p:nvSpPr>
-        <p:spPr>
-          <a:xfrm>
-            <a:off x="9381744" y="2514600"/>
-            <a:ext cx="1938528" cy="82296"/>
-          </a:xfrm>
-          <a:prstGeom prst="rect">
-            <a:avLst/>
-          </a:prstGeom>
-          <a:solidFill>
-            <a:srgbClr val="3E6BE0"/>
-          </a:solidFill>
-          <a:ln>
-            <a:noFill/>
-          </a:ln>
-          <a:effectLst/>
-        </p:spPr>
-        <p:style>
-          <a:lnRef idx="1">
-            <a:schemeClr val="accent1"/>
-          </a:lnRef>
-          <a:fillRef idx="3">
-            <a:schemeClr val="accent1"/>
-          </a:fillRef>
-          <a:effectRef idx="2">
-            <a:schemeClr val="accent1"/>
-          </a:effectRef>
-          <a:fontRef idx="minor">
-            <a:schemeClr val="lt1"/>
-          </a:fontRef>
-        </p:style>
-        <p:txBody>
-          <a:bodyPr rtlCol="0" anchor="ctr"/>
-          <a:lstStyle/>
-          <a:p>
-            <a:pPr algn="ctr"/>
-            <a:endParaRPr/>
-          </a:p>
-        </p:txBody>
-      </p:sp>
-      <p:sp>
-        <p:nvSpPr>
-          <p:cNvPr id="32" name="TextBox 31"/>
-          <p:cNvSpPr txBox="1"/>
-          <p:nvPr/>
-        </p:nvSpPr>
-        <p:spPr>
-          <a:xfrm>
-            <a:off x="9546336" y="2715768"/>
-            <a:ext cx="1609344" cy="548640"/>
-          </a:xfrm>
-          <a:prstGeom prst="rect">
-            <a:avLst/>
-          </a:prstGeom>
-          <a:noFill/>
-        </p:spPr>
-        <p:txBody>
-          <a:bodyPr wrap="square" lIns="0" tIns="0" rIns="0" bIns="0" anchor="t">
-            <a:spAutoFit/>
-          </a:bodyPr>
-          <a:lstStyle/>
-          <a:p>
-            <a:pPr algn="l">
-              <a:lnSpc>
-                <a:spcPct val="100000"/>
-              </a:lnSpc>
-              <a:spcAft>
-                <a:spcPts val="0"/>
-              </a:spcAft>
-            </a:pPr>
-            <a:r>
-              <a:rPr sz="3400" b="1" i="0">
-                <a:solidFill>
-                  <a:srgbClr val="22409C"/>
-                </a:solidFill>
-                <a:latin typeface="Helvetica Neue"/>
-              </a:rPr>
-              <a:t>T</a:t>
-            </a:r>
-          </a:p>
-        </p:txBody>
-      </p:sp>
-      <p:sp>
-        <p:nvSpPr>
-          <p:cNvPr id="33" name="TextBox 32"/>
-          <p:cNvSpPr txBox="1"/>
-          <p:nvPr/>
-        </p:nvSpPr>
-        <p:spPr>
-          <a:xfrm>
-            <a:off x="9546336" y="3383280"/>
-            <a:ext cx="1609344" cy="502920"/>
-          </a:xfrm>
-          <a:prstGeom prst="rect">
-            <a:avLst/>
-          </a:prstGeom>
-          <a:noFill/>
-        </p:spPr>
-        <p:txBody>
-          <a:bodyPr wrap="square" lIns="0" tIns="0" rIns="0" bIns="0" anchor="t">
-            <a:spAutoFit/>
-          </a:bodyPr>
-          <a:lstStyle/>
-          <a:p>
-            <a:pPr algn="l">
-              <a:lnSpc>
-                <a:spcPct val="100000"/>
-              </a:lnSpc>
-              <a:spcAft>
-                <a:spcPts val="0"/>
-              </a:spcAft>
-            </a:pPr>
-            <a:r>
-              <a:rPr sz="1350" b="1" i="0">
-                <a:solidFill>
-                  <a:srgbClr val="181D2B"/>
-                </a:solidFill>
-                <a:latin typeface="Helvetica Neue"/>
-              </a:rPr>
-              <a:t>Timely</a:t>
-            </a:r>
-          </a:p>
-        </p:txBody>
-      </p:sp>
-      <p:sp>
-        <p:nvSpPr>
-          <p:cNvPr id="34" name="TextBox 33"/>
-          <p:cNvSpPr txBox="1"/>
-          <p:nvPr/>
-        </p:nvSpPr>
-        <p:spPr>
-          <a:xfrm>
-            <a:off x="9546336" y="3886200"/>
-            <a:ext cx="1609344" cy="1005840"/>
-          </a:xfrm>
-          <a:prstGeom prst="rect">
-            <a:avLst/>
-          </a:prstGeom>
-          <a:noFill/>
-        </p:spPr>
-        <p:txBody>
-          <a:bodyPr wrap="square" lIns="0" tIns="0" rIns="0" bIns="0" anchor="t">
-            <a:spAutoFit/>
-          </a:bodyPr>
-          <a:lstStyle/>
-          <a:p>
-            <a:pPr algn="l">
-              <a:lnSpc>
-                <a:spcPct val="120000"/>
-              </a:lnSpc>
-              <a:spcAft>
-                <a:spcPts val="0"/>
-              </a:spcAft>
-            </a:pPr>
-            <a:r>
-              <a:rPr sz="1050" b="0" i="0">
-                <a:solidFill>
-                  <a:srgbClr val="181D2B"/>
-                </a:solidFill>
-                <a:latin typeface="Helvetica Neue"/>
-              </a:rPr>
-              <a:t>Écrit avec le code — pas trois</a:t>
-            </a:r>
-          </a:p>
-          <a:p>
-            <a:pPr algn="l">
-              <a:lnSpc>
-                <a:spcPct val="120000"/>
-              </a:lnSpc>
-              <a:spcAft>
-                <a:spcPts val="0"/>
-              </a:spcAft>
-            </a:pPr>
-            <a:r>
-              <a:rPr sz="1050" b="0" i="0">
-                <a:solidFill>
-                  <a:srgbClr val="181D2B"/>
-                </a:solidFill>
-                <a:latin typeface="Helvetica Neue"/>
-              </a:rPr>
-              <a:t>sprints après (jamais).</a:t>
-            </a:r>
-          </a:p>
-        </p:txBody>
-      </p:sp>
-      <p:sp>
-        <p:nvSpPr>
-          <p:cNvPr id="35" name="Rounded Rectangle 34"/>
-          <p:cNvSpPr/>
-          <p:nvPr/>
-        </p:nvSpPr>
-        <p:spPr>
-          <a:xfrm>
-            <a:off x="822960" y="5349240"/>
-            <a:ext cx="10515600" cy="777240"/>
-          </a:xfrm>
-          <a:prstGeom prst="roundRect">
-            <a:avLst/>
-          </a:prstGeom>
-          <a:solidFill>
-            <a:srgbClr val="FFD23F"/>
-          </a:solidFill>
-          <a:ln>
-            <a:noFill/>
-          </a:ln>
-          <a:effectLst/>
-        </p:spPr>
-        <p:style>
-          <a:lnRef idx="1">
-            <a:schemeClr val="accent1"/>
-          </a:lnRef>
-          <a:fillRef idx="3">
-            <a:schemeClr val="accent1"/>
-          </a:fillRef>
-          <a:effectRef idx="2">
-            <a:schemeClr val="accent1"/>
-          </a:effectRef>
-          <a:fontRef idx="minor">
-            <a:schemeClr val="lt1"/>
-          </a:fontRef>
-        </p:style>
-        <p:txBody>
-          <a:bodyPr wrap="square" lIns="256032" tIns="128016" rIns="256032" bIns="128016" rtlCol="0" anchor="ctr"/>
-          <a:lstStyle/>
-          <a:p>
-            <a:pPr algn="ctr">
-              <a:lnSpc>
-                <a:spcPct val="115000"/>
-              </a:lnSpc>
-            </a:pPr>
-            <a:r>
-              <a:rPr sz="1300" b="1" i="0">
-                <a:solidFill>
-                  <a:srgbClr val="0C111F"/>
-                </a:solidFill>
-                <a:latin typeface="Helvetica Neue"/>
-              </a:rPr>
-              <a:t>SOLID vous dit comment ranger le code pour qu'il reste maintenable. FIRST vous dit comment ranger les tests pour qu'on continue à leur faire confiance.</a:t>
-            </a:r>
-          </a:p>
-        </p:txBody>
-      </p:sp>
-      <p:sp>
-        <p:nvSpPr>
-          <p:cNvPr id="36" name="Isosceles Triangle 35"/>
-          <p:cNvSpPr/>
-          <p:nvPr/>
-        </p:nvSpPr>
-        <p:spPr>
-          <a:xfrm>
-            <a:off x="1143000" y="5111496"/>
-            <a:ext cx="256032" cy="256032"/>
-          </a:xfrm>
-          <a:prstGeom prst="triangle">
-            <a:avLst/>
-          </a:prstGeom>
-          <a:solidFill>
-            <a:srgbClr val="FFD23F"/>
-          </a:solidFill>
-          <a:ln>
-            <a:noFill/>
-          </a:ln>
-          <a:effectLst/>
-        </p:spPr>
-        <p:style>
-          <a:lnRef idx="1">
-            <a:schemeClr val="accent1"/>
-          </a:lnRef>
-          <a:fillRef idx="3">
-            <a:schemeClr val="accent1"/>
-          </a:fillRef>
-          <a:effectRef idx="2">
-            <a:schemeClr val="accent1"/>
-          </a:effectRef>
-          <a:fontRef idx="minor">
-            <a:schemeClr val="lt1"/>
-          </a:fontRef>
-        </p:style>
-        <p:txBody>
-          <a:bodyPr rtlCol="0" anchor="ctr"/>
-          <a:lstStyle/>
-          <a:p>
-            <a:pPr algn="ctr"/>
-            <a:endParaRPr/>
-          </a:p>
-        </p:txBody>
-      </p:sp>
-      <p:sp>
-        <p:nvSpPr>
-          <p:cNvPr id="37" name="TextBox 36"/>
-          <p:cNvSpPr txBox="1"/>
-          <p:nvPr/>
-        </p:nvSpPr>
-        <p:spPr>
-          <a:xfrm>
-            <a:off x="822960" y="6263640"/>
-            <a:ext cx="10515600" cy="320040"/>
-          </a:xfrm>
-          <a:prstGeom prst="rect">
-            <a:avLst/>
-          </a:prstGeom>
-          <a:noFill/>
-        </p:spPr>
-        <p:txBody>
-          <a:bodyPr wrap="square" lIns="0" tIns="0" rIns="0" bIns="0" anchor="t">
-            <a:spAutoFit/>
-          </a:bodyPr>
-          <a:lstStyle/>
-          <a:p>
-            <a:pPr algn="l">
-              <a:lnSpc>
-                <a:spcPct val="100000"/>
-              </a:lnSpc>
-              <a:spcAft>
-                <a:spcPts val="0"/>
-              </a:spcAft>
-            </a:pPr>
-            <a:r>
-              <a:rPr sz="1000" b="0" i="1">
-                <a:solidFill>
-                  <a:srgbClr val="5C6272"/>
-                </a:solidFill>
-                <a:latin typeface="Helvetica Neue"/>
-              </a:rPr>
-              <a:t>Pour mémoire : SOLID = Single responsibility · Open/closed · Liskov substitution · Interface segregation · Dependency inversion.</a:t>
-            </a:r>
-          </a:p>
-        </p:txBody>
-      </p:sp>
-      <p:sp>
-        <p:nvSpPr>
-          <p:cNvPr id="38" name="Rounded Rectangle 37"/>
+              <a:t>conflit avec lui-même — sinon, c'est un problème existentiel, pas un bug).</a:t>
+            </a:r>
+          </a:p>
+        </p:txBody>
+      </p:sp>
+      <p:sp>
+        <p:nvSpPr>
+          <p:cNvPr id="11" name="Rounded Rectangle 10"/>
           <p:cNvSpPr/>
           <p:nvPr/>
         </p:nvSpPr>
@@ -6671,14 +5519,14 @@
                 </a:solidFill>
                 <a:latin typeface="Helvetica Neue"/>
               </a:rPr>
-              <a:t>10/29</a:t>
-            </a:r>
-          </a:p>
-        </p:txBody>
-      </p:sp>
-      <p:sp>
-        <p:nvSpPr>
-          <p:cNvPr id="39" name="TextBox 38"/>
+              <a:t>09/29</a:t>
+            </a:r>
+          </a:p>
+        </p:txBody>
+      </p:sp>
+      <p:sp>
+        <p:nvSpPr>
+          <p:cNvPr id="12" name="TextBox 11"/>
           <p:cNvSpPr txBox="1"/>
           <p:nvPr/>
         </p:nvSpPr>
@@ -7952,8 +6800,8 @@
         </p:nvSpPr>
         <p:spPr>
           <a:xfrm>
-            <a:off x="822960" y="1965960"/>
-            <a:ext cx="10515600" cy="3108960"/>
+            <a:off x="599937" y="2133226"/>
+            <a:ext cx="11091672" cy="2115385"/>
           </a:xfrm>
           <a:prstGeom prst="roundRect">
             <a:avLst/>
@@ -7997,7 +6845,7 @@
         </p:nvSpPr>
         <p:spPr>
           <a:xfrm>
-            <a:off x="1024128" y="2093976"/>
+            <a:off x="801105" y="2261241"/>
             <a:ext cx="109728" cy="109728"/>
           </a:xfrm>
           <a:prstGeom prst="ellipse">
@@ -8042,7 +6890,7 @@
         </p:nvSpPr>
         <p:spPr>
           <a:xfrm>
-            <a:off x="1243584" y="2093976"/>
+            <a:off x="1020561" y="2261241"/>
             <a:ext cx="109728" cy="109728"/>
           </a:xfrm>
           <a:prstGeom prst="ellipse">
@@ -8087,7 +6935,7 @@
         </p:nvSpPr>
         <p:spPr>
           <a:xfrm>
-            <a:off x="1463040" y="2093976"/>
+            <a:off x="1240017" y="2261241"/>
             <a:ext cx="109728" cy="109728"/>
           </a:xfrm>
           <a:prstGeom prst="ellipse">
@@ -8132,8 +6980,8 @@
         </p:nvSpPr>
         <p:spPr>
           <a:xfrm>
-            <a:off x="1143000" y="2441448"/>
-            <a:ext cx="9875520" cy="2560320"/>
+            <a:off x="919976" y="2608713"/>
+            <a:ext cx="10532327" cy="1322798"/>
           </a:xfrm>
           <a:prstGeom prst="rect">
             <a:avLst/>
@@ -8155,14 +7003,119 @@
               </a:spcAft>
             </a:pPr>
             <a:r>
-              <a:rPr sz="1400" b="0" i="0">
+              <a:rPr sz="1400" b="0" i="0" dirty="0" err="1">
                 <a:solidFill>
                   <a:srgbClr val="E7ECF5"/>
                 </a:solidFill>
                 <a:latin typeface="Menlo"/>
               </a:rPr>
-              <a:t>Scénario: Refus d'un événement qui chevauche un</a:t>
-            </a:r>
+              <a:t>Scénario</a:t>
+            </a:r>
+            <a:r>
+              <a:rPr sz="1400" b="0" i="0" dirty="0">
+                <a:solidFill>
+                  <a:srgbClr val="E7ECF5"/>
+                </a:solidFill>
+                <a:latin typeface="Menlo"/>
+              </a:rPr>
+              <a:t>: </a:t>
+            </a:r>
+            <a:r>
+              <a:rPr sz="1400" b="0" i="0" dirty="0" err="1">
+                <a:solidFill>
+                  <a:srgbClr val="E7ECF5"/>
+                </a:solidFill>
+                <a:latin typeface="Menlo"/>
+              </a:rPr>
+              <a:t>Refus</a:t>
+            </a:r>
+            <a:r>
+              <a:rPr sz="1400" b="0" i="0" dirty="0">
+                <a:solidFill>
+                  <a:srgbClr val="E7ECF5"/>
+                </a:solidFill>
+                <a:latin typeface="Menlo"/>
+              </a:rPr>
+              <a:t> d'un </a:t>
+            </a:r>
+            <a:r>
+              <a:rPr sz="1400" b="0" i="0" dirty="0" err="1">
+                <a:solidFill>
+                  <a:srgbClr val="E7ECF5"/>
+                </a:solidFill>
+                <a:latin typeface="Menlo"/>
+              </a:rPr>
+              <a:t>événement</a:t>
+            </a:r>
+            <a:r>
+              <a:rPr sz="1400" b="0" i="0" dirty="0">
+                <a:solidFill>
+                  <a:srgbClr val="E7ECF5"/>
+                </a:solidFill>
+                <a:latin typeface="Menlo"/>
+              </a:rPr>
+              <a:t> qui </a:t>
+            </a:r>
+            <a:r>
+              <a:rPr sz="1400" b="0" i="0" dirty="0" err="1">
+                <a:solidFill>
+                  <a:srgbClr val="E7ECF5"/>
+                </a:solidFill>
+                <a:latin typeface="Menlo"/>
+              </a:rPr>
+              <a:t>chevauche</a:t>
+            </a:r>
+            <a:r>
+              <a:rPr sz="1400" b="0" i="0" dirty="0">
+                <a:solidFill>
+                  <a:srgbClr val="E7ECF5"/>
+                </a:solidFill>
+                <a:latin typeface="Menlo"/>
+              </a:rPr>
+              <a:t> un</a:t>
+            </a:r>
+            <a:r>
+              <a:rPr lang="fr-FR" sz="1400" b="0" i="0" dirty="0">
+                <a:solidFill>
+                  <a:srgbClr val="E7ECF5"/>
+                </a:solidFill>
+                <a:latin typeface="Menlo"/>
+              </a:rPr>
+              <a:t> </a:t>
+            </a:r>
+            <a:r>
+              <a:rPr sz="1400" b="0" i="0" dirty="0" err="1">
+                <a:solidFill>
+                  <a:srgbClr val="E7ECF5"/>
+                </a:solidFill>
+                <a:latin typeface="Menlo"/>
+              </a:rPr>
+              <a:t>événement</a:t>
+            </a:r>
+            <a:r>
+              <a:rPr sz="1400" b="0" i="0" dirty="0">
+                <a:solidFill>
+                  <a:srgbClr val="E7ECF5"/>
+                </a:solidFill>
+                <a:latin typeface="Menlo"/>
+              </a:rPr>
+              <a:t> </a:t>
+            </a:r>
+            <a:r>
+              <a:rPr sz="1400" b="0" i="0" dirty="0" err="1">
+                <a:solidFill>
+                  <a:srgbClr val="E7ECF5"/>
+                </a:solidFill>
+                <a:latin typeface="Menlo"/>
+              </a:rPr>
+              <a:t>existant</a:t>
+            </a:r>
+            <a:endParaRPr lang="fr-FR" sz="1400" b="0" i="0" dirty="0">
+              <a:solidFill>
+                <a:srgbClr val="E7ECF5"/>
+              </a:solidFill>
+              <a:latin typeface="Menlo"/>
+            </a:endParaRPr>
           </a:p>
           <a:p>
             <a:pPr algn="l">
@@ -8173,15 +7126,12 @@
                 <a:spcPts val="0"/>
               </a:spcAft>
             </a:pPr>
-            <a:r>
-              <a:rPr sz="1400" b="0" i="0">
-                <a:solidFill>
-                  <a:srgbClr val="E7ECF5"/>
-                </a:solidFill>
-                <a:latin typeface="Menlo"/>
-              </a:rPr>
-              <a:t>          événement existant</a:t>
-            </a:r>
+            <a:endParaRPr lang="fr-FR" sz="1400" b="0" i="0" dirty="0">
+              <a:solidFill>
+                <a:srgbClr val="E7ECF5"/>
+              </a:solidFill>
+              <a:latin typeface="Menlo"/>
+            </a:endParaRPr>
           </a:p>
           <a:p>
             <a:pPr algn="l">
@@ -8192,12 +7142,141 @@
                 <a:spcPts val="0"/>
               </a:spcAft>
             </a:pPr>
-            <a:endParaRPr sz="1400" b="0" i="0">
-              <a:solidFill>
-                <a:srgbClr val="E7ECF5"/>
-              </a:solidFill>
-              <a:latin typeface="Menlo"/>
-            </a:endParaRPr>
+            <a:r>
+              <a:rPr sz="1400" b="0" i="0" dirty="0">
+                <a:solidFill>
+                  <a:srgbClr val="E7ECF5"/>
+                </a:solidFill>
+                <a:latin typeface="Menlo"/>
+              </a:rPr>
+              <a:t>  </a:t>
+            </a:r>
+            <a:r>
+              <a:rPr sz="1400" b="0" i="0" dirty="0" err="1">
+                <a:solidFill>
+                  <a:srgbClr val="E7ECF5"/>
+                </a:solidFill>
+                <a:latin typeface="Menlo"/>
+              </a:rPr>
+              <a:t>Étant</a:t>
+            </a:r>
+            <a:r>
+              <a:rPr sz="1400" b="0" i="0" dirty="0">
+                <a:solidFill>
+                  <a:srgbClr val="E7ECF5"/>
+                </a:solidFill>
+                <a:latin typeface="Menlo"/>
+              </a:rPr>
+              <a:t> </a:t>
+            </a:r>
+            <a:r>
+              <a:rPr sz="1400" b="0" i="0" dirty="0" err="1">
+                <a:solidFill>
+                  <a:srgbClr val="E7ECF5"/>
+                </a:solidFill>
+                <a:latin typeface="Menlo"/>
+              </a:rPr>
+              <a:t>donné</a:t>
+            </a:r>
+            <a:r>
+              <a:rPr sz="1400" b="0" i="0" dirty="0">
+                <a:solidFill>
+                  <a:srgbClr val="E7ECF5"/>
+                </a:solidFill>
+                <a:latin typeface="Menlo"/>
+              </a:rPr>
+              <a:t> </a:t>
+            </a:r>
+            <a:r>
+              <a:rPr sz="1400" b="0" i="0" dirty="0" err="1">
+                <a:solidFill>
+                  <a:srgbClr val="E7ECF5"/>
+                </a:solidFill>
+                <a:latin typeface="Menlo"/>
+              </a:rPr>
+              <a:t>que</a:t>
+            </a:r>
+            <a:r>
+              <a:rPr sz="1400" b="0" i="0" dirty="0">
+                <a:solidFill>
+                  <a:srgbClr val="E7ECF5"/>
+                </a:solidFill>
+                <a:latin typeface="Menlo"/>
+              </a:rPr>
+              <a:t> </a:t>
+            </a:r>
+            <a:r>
+              <a:rPr sz="1400" b="0" i="0" dirty="0" err="1">
+                <a:solidFill>
+                  <a:srgbClr val="E7ECF5"/>
+                </a:solidFill>
+                <a:latin typeface="Menlo"/>
+              </a:rPr>
+              <a:t>j'ai</a:t>
+            </a:r>
+            <a:r>
+              <a:rPr sz="1400" b="0" i="0" dirty="0">
+                <a:solidFill>
+                  <a:srgbClr val="E7ECF5"/>
+                </a:solidFill>
+                <a:latin typeface="Menlo"/>
+              </a:rPr>
+              <a:t> déjà </a:t>
+            </a:r>
+            <a:r>
+              <a:rPr sz="1400" b="0" i="0" dirty="0" err="1">
+                <a:solidFill>
+                  <a:srgbClr val="E7ECF5"/>
+                </a:solidFill>
+                <a:latin typeface="Menlo"/>
+              </a:rPr>
+              <a:t>l'événement</a:t>
+            </a:r>
+            <a:r>
+              <a:rPr sz="1400" b="0" i="0" dirty="0">
+                <a:solidFill>
+                  <a:srgbClr val="E7ECF5"/>
+                </a:solidFill>
+                <a:latin typeface="Menlo"/>
+              </a:rPr>
+              <a:t> "</a:t>
+            </a:r>
+            <a:r>
+              <a:rPr sz="1400" b="0" i="0" dirty="0" err="1">
+                <a:solidFill>
+                  <a:srgbClr val="E7ECF5"/>
+                </a:solidFill>
+                <a:latin typeface="Menlo"/>
+              </a:rPr>
+              <a:t>Comité</a:t>
+            </a:r>
+            <a:r>
+              <a:rPr sz="1400" b="0" i="0" dirty="0">
+                <a:solidFill>
+                  <a:srgbClr val="E7ECF5"/>
+                </a:solidFill>
+                <a:latin typeface="Menlo"/>
+              </a:rPr>
+              <a:t> </a:t>
+            </a:r>
+            <a:r>
+              <a:rPr sz="1400" b="0" i="0" dirty="0" err="1">
+                <a:solidFill>
+                  <a:srgbClr val="E7ECF5"/>
+                </a:solidFill>
+                <a:latin typeface="Menlo"/>
+              </a:rPr>
+              <a:t>depilotage</a:t>
+            </a:r>
+            <a:r>
+              <a:rPr sz="1400" b="0" i="0" dirty="0">
+                <a:solidFill>
+                  <a:srgbClr val="E7ECF5"/>
+                </a:solidFill>
+                <a:latin typeface="Menlo"/>
+              </a:rPr>
+              <a:t>" de "14:00" à "15:00" le "2026-09-15"</a:t>
+            </a:r>
           </a:p>
           <a:p>
             <a:pPr algn="l">
@@ -8209,13 +7288,67 @@
               </a:spcAft>
             </a:pPr>
             <a:r>
-              <a:rPr sz="1400" b="0" i="0">
+              <a:rPr sz="1400" b="0" i="0" dirty="0">
                 <a:solidFill>
                   <a:srgbClr val="E7ECF5"/>
                 </a:solidFill>
                 <a:latin typeface="Menlo"/>
               </a:rPr>
-              <a:t>  Étant donné que j'ai déjà l'événement "Comité de</a:t>
+              <a:t>  Quand je </a:t>
+            </a:r>
+            <a:r>
+              <a:rPr sz="1400" b="0" i="0" dirty="0" err="1">
+                <a:solidFill>
+                  <a:srgbClr val="E7ECF5"/>
+                </a:solidFill>
+                <a:latin typeface="Menlo"/>
+              </a:rPr>
+              <a:t>crée</a:t>
+            </a:r>
+            <a:r>
+              <a:rPr sz="1400" b="0" i="0" dirty="0">
+                <a:solidFill>
+                  <a:srgbClr val="E7ECF5"/>
+                </a:solidFill>
+                <a:latin typeface="Menlo"/>
+              </a:rPr>
+              <a:t> </a:t>
+            </a:r>
+            <a:r>
+              <a:rPr sz="1400" b="0" i="0" dirty="0" err="1">
+                <a:solidFill>
+                  <a:srgbClr val="E7ECF5"/>
+                </a:solidFill>
+                <a:latin typeface="Menlo"/>
+              </a:rPr>
+              <a:t>l'événement</a:t>
+            </a:r>
+            <a:r>
+              <a:rPr sz="1400" b="0" i="0" dirty="0">
+                <a:solidFill>
+                  <a:srgbClr val="E7ECF5"/>
+                </a:solidFill>
+                <a:latin typeface="Menlo"/>
+              </a:rPr>
+              <a:t> "Revue de code" de</a:t>
+            </a:r>
+            <a:r>
+              <a:rPr lang="fr-FR" sz="1400" b="0" i="0" dirty="0">
+                <a:solidFill>
+                  <a:srgbClr val="E7ECF5"/>
+                </a:solidFill>
+                <a:latin typeface="Menlo"/>
+              </a:rPr>
+              <a:t> </a:t>
+            </a:r>
+            <a:r>
+              <a:rPr sz="1400" b="0" i="0" dirty="0">
+                <a:solidFill>
+                  <a:srgbClr val="E7ECF5"/>
+                </a:solidFill>
+                <a:latin typeface="Menlo"/>
+              </a:rPr>
+              <a:t>"14:30" à "15:30" le "2026-09-15"</a:t>
             </a:r>
           </a:p>
           <a:p>
@@ -8228,15 +7361,116 @@
               </a:spcAft>
             </a:pPr>
             <a:r>
-              <a:rPr sz="1400" b="0" i="0">
+              <a:rPr sz="1400" b="0" i="0" dirty="0">
                 <a:solidFill>
                   <a:srgbClr val="E7ECF5"/>
                 </a:solidFill>
                 <a:latin typeface="Menlo"/>
               </a:rPr>
-              <a:t>  pilotage" de "14:00" à "15:00" le "2026-09-15"</a:t>
-            </a:r>
-          </a:p>
+              <a:t>  Alors la </a:t>
+            </a:r>
+            <a:r>
+              <a:rPr sz="1400" b="0" i="0" dirty="0" err="1">
+                <a:solidFill>
+                  <a:srgbClr val="E7ECF5"/>
+                </a:solidFill>
+                <a:latin typeface="Menlo"/>
+              </a:rPr>
+              <a:t>création</a:t>
+            </a:r>
+            <a:r>
+              <a:rPr sz="1400" b="0" i="0" dirty="0">
+                <a:solidFill>
+                  <a:srgbClr val="E7ECF5"/>
+                </a:solidFill>
+                <a:latin typeface="Menlo"/>
+              </a:rPr>
+              <a:t> est </a:t>
+            </a:r>
+            <a:r>
+              <a:rPr sz="1400" b="0" i="0" dirty="0" err="1">
+                <a:solidFill>
+                  <a:srgbClr val="E7ECF5"/>
+                </a:solidFill>
+                <a:latin typeface="Menlo"/>
+              </a:rPr>
+              <a:t>refusée</a:t>
+            </a:r>
+            <a:r>
+              <a:rPr sz="1400" b="0" i="0" dirty="0">
+                <a:solidFill>
+                  <a:srgbClr val="E7ECF5"/>
+                </a:solidFill>
+                <a:latin typeface="Menlo"/>
+              </a:rPr>
+              <a:t> pour cause de</a:t>
+            </a:r>
+            <a:r>
+              <a:rPr lang="fr-FR" sz="1400" b="0" i="0" dirty="0">
+                <a:solidFill>
+                  <a:srgbClr val="E7ECF5"/>
+                </a:solidFill>
+                <a:latin typeface="Menlo"/>
+              </a:rPr>
+              <a:t> </a:t>
+            </a:r>
+            <a:r>
+              <a:rPr sz="1400" b="0" i="0" dirty="0" err="1">
+                <a:solidFill>
+                  <a:srgbClr val="E7ECF5"/>
+                </a:solidFill>
+                <a:latin typeface="Menlo"/>
+              </a:rPr>
+              <a:t>conflit</a:t>
+            </a:r>
+            <a:r>
+              <a:rPr sz="1400" b="0" i="0" dirty="0">
+                <a:solidFill>
+                  <a:srgbClr val="E7ECF5"/>
+                </a:solidFill>
+                <a:latin typeface="Menlo"/>
+              </a:rPr>
+              <a:t> </a:t>
+            </a:r>
+            <a:r>
+              <a:rPr sz="1400" b="0" i="0" dirty="0" err="1">
+                <a:solidFill>
+                  <a:srgbClr val="E7ECF5"/>
+                </a:solidFill>
+                <a:latin typeface="Menlo"/>
+              </a:rPr>
+              <a:t>d'horaire</a:t>
+            </a:r>
+            <a:endParaRPr sz="1400" b="0" i="0" dirty="0">
+              <a:solidFill>
+                <a:srgbClr val="E7ECF5"/>
+              </a:solidFill>
+              <a:latin typeface="Menlo"/>
+            </a:endParaRPr>
+          </a:p>
+        </p:txBody>
+      </p:sp>
+      <p:sp>
+        <p:nvSpPr>
+          <p:cNvPr id="10" name="TextBox 9"/>
+          <p:cNvSpPr txBox="1"/>
+          <p:nvPr/>
+        </p:nvSpPr>
+        <p:spPr>
+          <a:xfrm>
+            <a:off x="822960" y="4846321"/>
+            <a:ext cx="9875520" cy="779957"/>
+          </a:xfrm>
+          <a:prstGeom prst="rect">
+            <a:avLst/>
+          </a:prstGeom>
+          <a:noFill/>
+        </p:spPr>
+        <p:txBody>
+          <a:bodyPr wrap="square" lIns="0" tIns="0" rIns="0" bIns="0" anchor="t">
+            <a:spAutoFit/>
+          </a:bodyPr>
+          <a:lstStyle/>
           <a:p>
             <a:pPr algn="l">
               <a:lnSpc>
@@ -8247,14 +7481,191 @@
               </a:spcAft>
             </a:pPr>
             <a:r>
-              <a:rPr sz="1400" b="0" i="0">
-                <a:solidFill>
-                  <a:srgbClr val="E7ECF5"/>
-                </a:solidFill>
-                <a:latin typeface="Menlo"/>
-              </a:rPr>
-              <a:t>  Quand je crée l'événement "Revue de code" de</a:t>
-            </a:r>
+              <a:rPr sz="1400" b="0" i="0" dirty="0">
+                <a:solidFill>
+                  <a:srgbClr val="181D2B"/>
+                </a:solidFill>
+                <a:latin typeface="Helvetica Neue"/>
+              </a:rPr>
+              <a:t>Vous </a:t>
+            </a:r>
+            <a:r>
+              <a:rPr sz="1400" b="0" i="0" dirty="0" err="1">
+                <a:solidFill>
+                  <a:srgbClr val="181D2B"/>
+                </a:solidFill>
+                <a:latin typeface="Helvetica Neue"/>
+              </a:rPr>
+              <a:t>remarquerez</a:t>
+            </a:r>
+            <a:r>
+              <a:rPr sz="1400" b="0" i="0" dirty="0">
+                <a:solidFill>
+                  <a:srgbClr val="181D2B"/>
+                </a:solidFill>
+                <a:latin typeface="Helvetica Neue"/>
+              </a:rPr>
+              <a:t> </a:t>
+            </a:r>
+            <a:r>
+              <a:rPr sz="1400" b="0" i="0" dirty="0" err="1">
+                <a:solidFill>
+                  <a:srgbClr val="181D2B"/>
+                </a:solidFill>
+                <a:latin typeface="Helvetica Neue"/>
+              </a:rPr>
+              <a:t>que</a:t>
+            </a:r>
+            <a:r>
+              <a:rPr sz="1400" b="0" i="0" dirty="0">
+                <a:solidFill>
+                  <a:srgbClr val="181D2B"/>
+                </a:solidFill>
+                <a:latin typeface="Helvetica Neue"/>
+              </a:rPr>
+              <a:t> </a:t>
+            </a:r>
+            <a:r>
+              <a:rPr sz="1400" b="0" i="0" dirty="0" err="1">
+                <a:solidFill>
+                  <a:srgbClr val="181D2B"/>
+                </a:solidFill>
+                <a:latin typeface="Helvetica Neue"/>
+              </a:rPr>
+              <a:t>même</a:t>
+            </a:r>
+            <a:r>
+              <a:rPr sz="1400" b="0" i="0" dirty="0">
+                <a:solidFill>
+                  <a:srgbClr val="181D2B"/>
+                </a:solidFill>
+                <a:latin typeface="Helvetica Neue"/>
+              </a:rPr>
+              <a:t> le </a:t>
+            </a:r>
+            <a:r>
+              <a:rPr sz="1400" b="0" i="0" dirty="0" err="1">
+                <a:solidFill>
+                  <a:srgbClr val="181D2B"/>
+                </a:solidFill>
+                <a:latin typeface="Helvetica Neue"/>
+              </a:rPr>
+              <a:t>scénario</a:t>
+            </a:r>
+            <a:r>
+              <a:rPr sz="1400" b="0" i="0" dirty="0">
+                <a:solidFill>
+                  <a:srgbClr val="181D2B"/>
+                </a:solidFill>
+                <a:latin typeface="Helvetica Neue"/>
+              </a:rPr>
+              <a:t> de test </a:t>
+            </a:r>
+            <a:r>
+              <a:rPr sz="1400" b="0" i="0" dirty="0" err="1">
+                <a:solidFill>
+                  <a:srgbClr val="181D2B"/>
+                </a:solidFill>
+                <a:latin typeface="Helvetica Neue"/>
+              </a:rPr>
+              <a:t>sait</a:t>
+            </a:r>
+            <a:r>
+              <a:rPr sz="1400" b="0" i="0" dirty="0">
+                <a:solidFill>
+                  <a:srgbClr val="181D2B"/>
+                </a:solidFill>
+                <a:latin typeface="Helvetica Neue"/>
+              </a:rPr>
+              <a:t> </a:t>
+            </a:r>
+            <a:r>
+              <a:rPr sz="1400" b="0" i="0" dirty="0" err="1">
+                <a:solidFill>
+                  <a:srgbClr val="181D2B"/>
+                </a:solidFill>
+                <a:latin typeface="Helvetica Neue"/>
+              </a:rPr>
+              <a:t>qu'un</a:t>
+            </a:r>
+            <a:r>
+              <a:rPr sz="1400" b="0" i="0" dirty="0">
+                <a:solidFill>
+                  <a:srgbClr val="181D2B"/>
+                </a:solidFill>
+                <a:latin typeface="Helvetica Neue"/>
+              </a:rPr>
+              <a:t> </a:t>
+            </a:r>
+            <a:r>
+              <a:rPr sz="1400" b="0" i="0" dirty="0" err="1">
+                <a:solidFill>
+                  <a:srgbClr val="181D2B"/>
+                </a:solidFill>
+                <a:latin typeface="Helvetica Neue"/>
+              </a:rPr>
+              <a:t>comité</a:t>
+            </a:r>
+            <a:r>
+              <a:rPr sz="1400" b="0" i="0" dirty="0">
+                <a:solidFill>
+                  <a:srgbClr val="181D2B"/>
+                </a:solidFill>
+                <a:latin typeface="Helvetica Neue"/>
+              </a:rPr>
+              <a:t> de pilotage</a:t>
+            </a:r>
+            <a:r>
+              <a:rPr lang="fr-FR" sz="1400" b="0" i="0" dirty="0">
+                <a:solidFill>
+                  <a:srgbClr val="181D2B"/>
+                </a:solidFill>
+                <a:latin typeface="Helvetica Neue"/>
+              </a:rPr>
+              <a:t> </a:t>
+            </a:r>
+            <a:r>
+              <a:rPr sz="1400" b="0" i="0" dirty="0" err="1">
+                <a:solidFill>
+                  <a:srgbClr val="181D2B"/>
+                </a:solidFill>
+                <a:latin typeface="Helvetica Neue"/>
+              </a:rPr>
+              <a:t>prend</a:t>
+            </a:r>
+            <a:r>
+              <a:rPr sz="1400" b="0" i="0" dirty="0">
+                <a:solidFill>
+                  <a:srgbClr val="181D2B"/>
+                </a:solidFill>
+                <a:latin typeface="Helvetica Neue"/>
+              </a:rPr>
+              <a:t> toute la place dans </a:t>
+            </a:r>
+            <a:r>
+              <a:rPr sz="1400" b="0" i="0" dirty="0" err="1">
+                <a:solidFill>
+                  <a:srgbClr val="181D2B"/>
+                </a:solidFill>
+                <a:latin typeface="Helvetica Neue"/>
+              </a:rPr>
+              <a:t>l'agenda</a:t>
+            </a:r>
+            <a:r>
+              <a:rPr sz="1400" b="0" i="0" dirty="0">
+                <a:solidFill>
+                  <a:srgbClr val="181D2B"/>
+                </a:solidFill>
+                <a:latin typeface="Helvetica Neue"/>
+              </a:rPr>
+              <a:t>.</a:t>
+            </a:r>
+            <a:endParaRPr lang="fr-FR" sz="1400" b="0" i="0" dirty="0">
+              <a:solidFill>
+                <a:srgbClr val="181D2B"/>
+              </a:solidFill>
+              <a:latin typeface="Helvetica Neue"/>
+            </a:endParaRPr>
           </a:p>
           <a:p>
             <a:pPr algn="l">
@@ -8265,15 +7676,12 @@
                 <a:spcPts val="0"/>
               </a:spcAft>
             </a:pPr>
-            <a:r>
-              <a:rPr sz="1400" b="0" i="0">
-                <a:solidFill>
-                  <a:srgbClr val="E7ECF5"/>
-                </a:solidFill>
-                <a:latin typeface="Menlo"/>
-              </a:rPr>
-              <a:t>  "14:30" à "15:30" le "2026-09-15"</a:t>
-            </a:r>
+            <a:endParaRPr lang="fr-FR" sz="1400" dirty="0">
+              <a:solidFill>
+                <a:srgbClr val="181D2B"/>
+              </a:solidFill>
+              <a:latin typeface="Helvetica Neue"/>
+            </a:endParaRPr>
           </a:p>
           <a:p>
             <a:pPr algn="l">
@@ -8285,93 +7693,58 @@
               </a:spcAft>
             </a:pPr>
             <a:r>
-              <a:rPr sz="1400" b="0" i="0">
-                <a:solidFill>
-                  <a:srgbClr val="E7ECF5"/>
-                </a:solidFill>
-                <a:latin typeface="Menlo"/>
-              </a:rPr>
-              <a:t>  Alors la création est refusée pour cause de</a:t>
-            </a:r>
-          </a:p>
-          <a:p>
-            <a:pPr algn="l">
-              <a:lnSpc>
-                <a:spcPct val="125000"/>
-              </a:lnSpc>
-              <a:spcAft>
-                <a:spcPts val="0"/>
-              </a:spcAft>
-            </a:pPr>
-            <a:r>
-              <a:rPr sz="1400" b="0" i="0">
-                <a:solidFill>
-                  <a:srgbClr val="E7ECF5"/>
-                </a:solidFill>
-                <a:latin typeface="Menlo"/>
-              </a:rPr>
-              <a:t>  conflit d'horaire</a:t>
-            </a:r>
-          </a:p>
-        </p:txBody>
-      </p:sp>
-      <p:sp>
-        <p:nvSpPr>
-          <p:cNvPr id="10" name="TextBox 9"/>
-          <p:cNvSpPr txBox="1"/>
-          <p:nvPr/>
-        </p:nvSpPr>
-        <p:spPr>
-          <a:xfrm>
-            <a:off x="822960" y="5303520"/>
-            <a:ext cx="9875520" cy="777240"/>
-          </a:xfrm>
-          <a:prstGeom prst="rect">
-            <a:avLst/>
-          </a:prstGeom>
-          <a:noFill/>
-        </p:spPr>
-        <p:txBody>
-          <a:bodyPr wrap="square" lIns="0" tIns="0" rIns="0" bIns="0" anchor="t">
-            <a:spAutoFit/>
-          </a:bodyPr>
-          <a:lstStyle/>
-          <a:p>
-            <a:pPr algn="l">
-              <a:lnSpc>
-                <a:spcPct val="125000"/>
-              </a:lnSpc>
-              <a:spcAft>
-                <a:spcPts val="0"/>
-              </a:spcAft>
-            </a:pPr>
-            <a:r>
-              <a:rPr sz="1400" b="0" i="0">
+              <a:rPr sz="1400" b="0" i="0" dirty="0" err="1">
                 <a:solidFill>
                   <a:srgbClr val="181D2B"/>
                 </a:solidFill>
                 <a:latin typeface="Helvetica Neue"/>
               </a:rPr>
-              <a:t>Vous remarquerez que même le scénario de test sait qu'un comité de pilotage</a:t>
-            </a:r>
-          </a:p>
-          <a:p>
-            <a:pPr algn="l">
-              <a:lnSpc>
-                <a:spcPct val="125000"/>
-              </a:lnSpc>
-              <a:spcAft>
-                <a:spcPts val="0"/>
-              </a:spcAft>
-            </a:pPr>
-            <a:r>
-              <a:rPr sz="1400" b="0" i="0">
+              <a:t>Ça</a:t>
+            </a:r>
+            <a:r>
+              <a:rPr sz="1400" b="0" i="0" dirty="0">
                 <a:solidFill>
                   <a:srgbClr val="181D2B"/>
                 </a:solidFill>
                 <a:latin typeface="Helvetica Neue"/>
               </a:rPr>
-              <a:t>prend toute la place dans l'agenda. Ça, c'est du réalisme métier.</a:t>
+              <a:t>, </a:t>
+            </a:r>
+            <a:r>
+              <a:rPr sz="1400" b="0" i="0" dirty="0" err="1">
+                <a:solidFill>
+                  <a:srgbClr val="181D2B"/>
+                </a:solidFill>
+                <a:latin typeface="Helvetica Neue"/>
+              </a:rPr>
+              <a:t>c'est</a:t>
+            </a:r>
+            <a:r>
+              <a:rPr sz="1400" b="0" i="0" dirty="0">
+                <a:solidFill>
+                  <a:srgbClr val="181D2B"/>
+                </a:solidFill>
+                <a:latin typeface="Helvetica Neue"/>
+              </a:rPr>
+              <a:t> du </a:t>
+            </a:r>
+            <a:r>
+              <a:rPr sz="1400" b="0" i="0" dirty="0" err="1">
+                <a:solidFill>
+                  <a:srgbClr val="181D2B"/>
+                </a:solidFill>
+                <a:latin typeface="Helvetica Neue"/>
+              </a:rPr>
+              <a:t>réalisme</a:t>
+            </a:r>
+            <a:r>
+              <a:rPr sz="1400" b="0" i="0" dirty="0">
+                <a:solidFill>
+                  <a:srgbClr val="181D2B"/>
+                </a:solidFill>
+                <a:latin typeface="Helvetica Neue"/>
+              </a:rPr>
+              <a:t> métier.</a:t>
             </a:r>
           </a:p>
         </p:txBody>
@@ -9339,14 +8712,14 @@
       </p:sp>
       <p:sp>
         <p:nvSpPr>
-          <p:cNvPr id="21" name="Oval 20"/>
-          <p:cNvSpPr/>
-          <p:nvPr/>
-        </p:nvSpPr>
-        <p:spPr>
-          <a:xfrm>
-            <a:off x="5472684" y="1815084"/>
-            <a:ext cx="868680" cy="868680"/>
+          <p:cNvPr id="22" name="Oval 21"/>
+          <p:cNvSpPr/>
+          <p:nvPr/>
+        </p:nvSpPr>
+        <p:spPr>
+          <a:xfrm rot="21120000">
+            <a:off x="5252870" y="1762162"/>
+            <a:ext cx="1068669" cy="1037731"/>
           </a:xfrm>
           <a:prstGeom prst="ellipse">
             <a:avLst/>
@@ -9374,57 +8747,12 @@
           </a:fontRef>
         </p:style>
         <p:txBody>
-          <a:bodyPr rtlCol="0" anchor="ctr"/>
-          <a:lstStyle/>
-          <a:p>
-            <a:pPr algn="ctr"/>
-            <a:endParaRPr/>
-          </a:p>
-        </p:txBody>
-      </p:sp>
-      <p:sp>
-        <p:nvSpPr>
-          <p:cNvPr id="22" name="Oval 21"/>
-          <p:cNvSpPr/>
-          <p:nvPr/>
-        </p:nvSpPr>
-        <p:spPr>
-          <a:xfrm rot="21120000">
-            <a:off x="5417820" y="1760220"/>
-            <a:ext cx="868680" cy="868680"/>
-          </a:xfrm>
-          <a:prstGeom prst="ellipse">
-            <a:avLst/>
-          </a:prstGeom>
-          <a:solidFill>
-            <a:srgbClr val="0C111F"/>
-          </a:solidFill>
-          <a:ln>
-            <a:noFill/>
-          </a:ln>
-          <a:effectLst/>
-        </p:spPr>
-        <p:style>
-          <a:lnRef idx="1">
-            <a:schemeClr val="accent1"/>
-          </a:lnRef>
-          <a:fillRef idx="3">
-            <a:schemeClr val="accent1"/>
-          </a:fillRef>
-          <a:effectRef idx="2">
-            <a:schemeClr val="accent1"/>
-          </a:effectRef>
-          <a:fontRef idx="minor">
-            <a:schemeClr val="lt1"/>
-          </a:fontRef>
-        </p:style>
-        <p:txBody>
           <a:bodyPr wrap="square" lIns="54864" rIns="54864" rtlCol="0" anchor="ctr"/>
           <a:lstStyle/>
           <a:p>
             <a:pPr algn="ctr"/>
             <a:r>
-              <a:rPr sz="1100" b="1">
+              <a:rPr sz="1100" b="1" dirty="0">
                 <a:solidFill>
                   <a:srgbClr val="FFD23F"/>
                 </a:solidFill>
@@ -12411,16 +11739,16 @@
                 </a:solidFill>
                 <a:latin typeface="Helvetica Neue"/>
               </a:rPr>
-              <a:t> maquette </a:t>
-            </a:r>
-            <a:r>
-              <a:rPr lang="fr-FR" sz="2600" b="1" dirty="0" err="1">
+              <a:t> maquette</a:t>
+            </a:r>
+            <a:r>
+              <a:rPr lang="fr-FR" sz="2600" b="1" i="0" dirty="0">
                 <a:solidFill>
                   <a:srgbClr val="181D2B"/>
                 </a:solidFill>
                 <a:latin typeface="Helvetica Neue"/>
               </a:rPr>
-              <a:t>Canva</a:t>
+              <a:t>..</a:t>
             </a:r>
             <a:r>
               <a:rPr sz="2600" b="1" i="0" dirty="0">
@@ -13730,7 +13058,7 @@
         </p:nvSpPr>
         <p:spPr>
           <a:xfrm>
-            <a:off x="822960" y="1527273"/>
+            <a:off x="822960" y="1627632"/>
             <a:ext cx="10058400" cy="365760"/>
           </a:xfrm>
           <a:prstGeom prst="rect">
@@ -13772,7 +13100,7 @@
         </p:nvSpPr>
         <p:spPr>
           <a:xfrm>
-            <a:off x="822960" y="1911321"/>
+            <a:off x="822960" y="2011680"/>
             <a:ext cx="2465222" cy="310896"/>
           </a:xfrm>
           <a:prstGeom prst="roundRect">
@@ -13825,7 +13153,7 @@
         </p:nvSpPr>
         <p:spPr>
           <a:xfrm>
-            <a:off x="2697480" y="1911321"/>
+            <a:off x="2697480" y="2011680"/>
             <a:ext cx="3279952" cy="310896"/>
           </a:xfrm>
           <a:prstGeom prst="roundRect">
@@ -13878,7 +13206,7 @@
         </p:nvSpPr>
         <p:spPr>
           <a:xfrm>
-            <a:off x="822960" y="2432529"/>
+            <a:off x="822960" y="2532888"/>
             <a:ext cx="2423160" cy="365760"/>
           </a:xfrm>
           <a:prstGeom prst="rect">
@@ -13920,7 +13248,7 @@
         </p:nvSpPr>
         <p:spPr>
           <a:xfrm>
-            <a:off x="3383280" y="2350233"/>
+            <a:off x="3383280" y="2450592"/>
             <a:ext cx="7315200" cy="173736"/>
           </a:xfrm>
           <a:prstGeom prst="roundRect">
@@ -13965,7 +13293,7 @@
         </p:nvSpPr>
         <p:spPr>
           <a:xfrm>
-            <a:off x="3383280" y="2350233"/>
+            <a:off x="3383280" y="2450592"/>
             <a:ext cx="219456" cy="173736"/>
           </a:xfrm>
           <a:prstGeom prst="roundRect">
@@ -14010,7 +13338,7 @@
         </p:nvSpPr>
         <p:spPr>
           <a:xfrm>
-            <a:off x="10789920" y="2331945"/>
+            <a:off x="10789920" y="2432304"/>
             <a:ext cx="640080" cy="274320"/>
           </a:xfrm>
           <a:prstGeom prst="rect">
@@ -14052,7 +13380,7 @@
         </p:nvSpPr>
         <p:spPr>
           <a:xfrm>
-            <a:off x="3383280" y="2565117"/>
+            <a:off x="3383280" y="2665476"/>
             <a:ext cx="7315200" cy="173736"/>
           </a:xfrm>
           <a:prstGeom prst="roundRect">
@@ -14097,7 +13425,7 @@
         </p:nvSpPr>
         <p:spPr>
           <a:xfrm>
-            <a:off x="3383280" y="2565117"/>
+            <a:off x="3383280" y="2665476"/>
             <a:ext cx="4242816" cy="173736"/>
           </a:xfrm>
           <a:prstGeom prst="roundRect">
@@ -14142,7 +13470,7 @@
         </p:nvSpPr>
         <p:spPr>
           <a:xfrm>
-            <a:off x="10789920" y="2546829"/>
+            <a:off x="10789920" y="2647188"/>
             <a:ext cx="640080" cy="274320"/>
           </a:xfrm>
           <a:prstGeom prst="rect">
@@ -14184,7 +13512,7 @@
         </p:nvSpPr>
         <p:spPr>
           <a:xfrm>
-            <a:off x="822960" y="2962881"/>
+            <a:off x="822960" y="3063240"/>
             <a:ext cx="2423160" cy="365760"/>
           </a:xfrm>
           <a:prstGeom prst="rect">
@@ -14226,7 +13554,7 @@
         </p:nvSpPr>
         <p:spPr>
           <a:xfrm>
-            <a:off x="3383280" y="2880585"/>
+            <a:off x="3383280" y="2980944"/>
             <a:ext cx="7315200" cy="173736"/>
           </a:xfrm>
           <a:prstGeom prst="roundRect">
@@ -14271,7 +13599,7 @@
         </p:nvSpPr>
         <p:spPr>
           <a:xfrm>
-            <a:off x="3383280" y="2880585"/>
+            <a:off x="3383280" y="2980944"/>
             <a:ext cx="219456" cy="173736"/>
           </a:xfrm>
           <a:prstGeom prst="roundRect">
@@ -14316,7 +13644,7 @@
         </p:nvSpPr>
         <p:spPr>
           <a:xfrm>
-            <a:off x="10789920" y="2862297"/>
+            <a:off x="10789920" y="2962656"/>
             <a:ext cx="640080" cy="274320"/>
           </a:xfrm>
           <a:prstGeom prst="rect">
@@ -14358,7 +13686,7 @@
         </p:nvSpPr>
         <p:spPr>
           <a:xfrm>
-            <a:off x="3383280" y="3095469"/>
+            <a:off x="3383280" y="3195828"/>
             <a:ext cx="7315200" cy="173736"/>
           </a:xfrm>
           <a:prstGeom prst="roundRect">
@@ -14403,7 +13731,7 @@
         </p:nvSpPr>
         <p:spPr>
           <a:xfrm>
-            <a:off x="3383280" y="3095469"/>
+            <a:off x="3383280" y="3195828"/>
             <a:ext cx="6803136" cy="173736"/>
           </a:xfrm>
           <a:prstGeom prst="roundRect">
@@ -14448,7 +13776,7 @@
         </p:nvSpPr>
         <p:spPr>
           <a:xfrm>
-            <a:off x="10789920" y="3077181"/>
+            <a:off x="10789920" y="3177540"/>
             <a:ext cx="640080" cy="274320"/>
           </a:xfrm>
           <a:prstGeom prst="rect">
@@ -14490,7 +13818,7 @@
         </p:nvSpPr>
         <p:spPr>
           <a:xfrm>
-            <a:off x="822960" y="3493233"/>
+            <a:off x="822960" y="3593592"/>
             <a:ext cx="2423160" cy="365760"/>
           </a:xfrm>
           <a:prstGeom prst="rect">
@@ -14532,7 +13860,7 @@
         </p:nvSpPr>
         <p:spPr>
           <a:xfrm>
-            <a:off x="3383280" y="3410937"/>
+            <a:off x="3383280" y="3511296"/>
             <a:ext cx="7315200" cy="173736"/>
           </a:xfrm>
           <a:prstGeom prst="roundRect">
@@ -14577,7 +13905,7 @@
         </p:nvSpPr>
         <p:spPr>
           <a:xfrm>
-            <a:off x="3383280" y="3410937"/>
+            <a:off x="3383280" y="3511296"/>
             <a:ext cx="5705856" cy="173736"/>
           </a:xfrm>
           <a:prstGeom prst="roundRect">
@@ -14622,7 +13950,7 @@
         </p:nvSpPr>
         <p:spPr>
           <a:xfrm>
-            <a:off x="10789920" y="3392649"/>
+            <a:off x="10789920" y="3493008"/>
             <a:ext cx="640080" cy="274320"/>
           </a:xfrm>
           <a:prstGeom prst="rect">
@@ -14664,7 +13992,7 @@
         </p:nvSpPr>
         <p:spPr>
           <a:xfrm>
-            <a:off x="3383280" y="3625821"/>
+            <a:off x="3383280" y="3726180"/>
             <a:ext cx="7315200" cy="173736"/>
           </a:xfrm>
           <a:prstGeom prst="roundRect">
@@ -14709,7 +14037,7 @@
         </p:nvSpPr>
         <p:spPr>
           <a:xfrm>
-            <a:off x="3383280" y="3625821"/>
+            <a:off x="3383280" y="3726180"/>
             <a:ext cx="292608" cy="173736"/>
           </a:xfrm>
           <a:prstGeom prst="roundRect">
@@ -14754,7 +14082,7 @@
         </p:nvSpPr>
         <p:spPr>
           <a:xfrm>
-            <a:off x="10789920" y="3607533"/>
+            <a:off x="10789920" y="3707892"/>
             <a:ext cx="640080" cy="274320"/>
           </a:xfrm>
           <a:prstGeom prst="rect">
@@ -14796,7 +14124,7 @@
         </p:nvSpPr>
         <p:spPr>
           <a:xfrm>
-            <a:off x="822960" y="4023585"/>
+            <a:off x="822960" y="4123944"/>
             <a:ext cx="2423160" cy="365760"/>
           </a:xfrm>
           <a:prstGeom prst="rect">
@@ -14838,7 +14166,7 @@
         </p:nvSpPr>
         <p:spPr>
           <a:xfrm>
-            <a:off x="3383280" y="3941289"/>
+            <a:off x="3383280" y="4041648"/>
             <a:ext cx="7315200" cy="173736"/>
           </a:xfrm>
           <a:prstGeom prst="roundRect">
@@ -14883,7 +14211,7 @@
         </p:nvSpPr>
         <p:spPr>
           <a:xfrm>
-            <a:off x="3383280" y="3941289"/>
+            <a:off x="3383280" y="4041648"/>
             <a:ext cx="7315200" cy="173736"/>
           </a:xfrm>
           <a:prstGeom prst="roundRect">
@@ -14928,7 +14256,7 @@
         </p:nvSpPr>
         <p:spPr>
           <a:xfrm>
-            <a:off x="10789920" y="3923001"/>
+            <a:off x="10789920" y="4023360"/>
             <a:ext cx="640080" cy="274320"/>
           </a:xfrm>
           <a:prstGeom prst="rect">
@@ -14970,7 +14298,7 @@
         </p:nvSpPr>
         <p:spPr>
           <a:xfrm>
-            <a:off x="3383280" y="4156173"/>
+            <a:off x="3383280" y="4256532"/>
             <a:ext cx="7315200" cy="173736"/>
           </a:xfrm>
           <a:prstGeom prst="roundRect">
@@ -15015,7 +14343,7 @@
         </p:nvSpPr>
         <p:spPr>
           <a:xfrm>
-            <a:off x="3383280" y="4156173"/>
+            <a:off x="3383280" y="4256532"/>
             <a:ext cx="5486400" cy="173736"/>
           </a:xfrm>
           <a:prstGeom prst="roundRect">
@@ -15060,7 +14388,7 @@
         </p:nvSpPr>
         <p:spPr>
           <a:xfrm>
-            <a:off x="10789920" y="4137885"/>
+            <a:off x="10789920" y="4238244"/>
             <a:ext cx="640080" cy="274320"/>
           </a:xfrm>
           <a:prstGeom prst="rect">
@@ -15102,7 +14430,7 @@
         </p:nvSpPr>
         <p:spPr>
           <a:xfrm>
-            <a:off x="822960" y="4553937"/>
+            <a:off x="822960" y="4654296"/>
             <a:ext cx="2423160" cy="365760"/>
           </a:xfrm>
           <a:prstGeom prst="rect">
@@ -15144,7 +14472,7 @@
         </p:nvSpPr>
         <p:spPr>
           <a:xfrm>
-            <a:off x="3383280" y="4471641"/>
+            <a:off x="3383280" y="4572000"/>
             <a:ext cx="7315200" cy="173736"/>
           </a:xfrm>
           <a:prstGeom prst="roundRect">
@@ -15189,7 +14517,7 @@
         </p:nvSpPr>
         <p:spPr>
           <a:xfrm>
-            <a:off x="3383280" y="4471641"/>
+            <a:off x="3383280" y="4572000"/>
             <a:ext cx="6437376" cy="173736"/>
           </a:xfrm>
           <a:prstGeom prst="roundRect">
@@ -15234,7 +14562,7 @@
         </p:nvSpPr>
         <p:spPr>
           <a:xfrm>
-            <a:off x="10789920" y="4453353"/>
+            <a:off x="10789920" y="4553712"/>
             <a:ext cx="640080" cy="274320"/>
           </a:xfrm>
           <a:prstGeom prst="rect">
@@ -15276,7 +14604,7 @@
         </p:nvSpPr>
         <p:spPr>
           <a:xfrm>
-            <a:off x="3383280" y="4686525"/>
+            <a:off x="3383280" y="4786884"/>
             <a:ext cx="7315200" cy="173736"/>
           </a:xfrm>
           <a:prstGeom prst="roundRect">
@@ -15321,7 +14649,7 @@
         </p:nvSpPr>
         <p:spPr>
           <a:xfrm>
-            <a:off x="3383280" y="4686525"/>
+            <a:off x="3383280" y="4786884"/>
             <a:ext cx="6437376" cy="173736"/>
           </a:xfrm>
           <a:prstGeom prst="roundRect">
@@ -15366,7 +14694,7 @@
         </p:nvSpPr>
         <p:spPr>
           <a:xfrm>
-            <a:off x="10789920" y="4668237"/>
+            <a:off x="10789920" y="4768596"/>
             <a:ext cx="640080" cy="274320"/>
           </a:xfrm>
           <a:prstGeom prst="rect">
@@ -15408,7 +14736,7 @@
         </p:nvSpPr>
         <p:spPr>
           <a:xfrm>
-            <a:off x="822960" y="5084289"/>
+            <a:off x="822960" y="5184648"/>
             <a:ext cx="2423160" cy="365760"/>
           </a:xfrm>
           <a:prstGeom prst="rect">
@@ -15450,7 +14778,7 @@
         </p:nvSpPr>
         <p:spPr>
           <a:xfrm>
-            <a:off x="3383280" y="5001993"/>
+            <a:off x="3383280" y="5102352"/>
             <a:ext cx="7315200" cy="173736"/>
           </a:xfrm>
           <a:prstGeom prst="roundRect">
@@ -15495,7 +14823,7 @@
         </p:nvSpPr>
         <p:spPr>
           <a:xfrm>
-            <a:off x="3383280" y="5001993"/>
+            <a:off x="3383280" y="5102352"/>
             <a:ext cx="219456" cy="173736"/>
           </a:xfrm>
           <a:prstGeom prst="roundRect">
@@ -15540,7 +14868,7 @@
         </p:nvSpPr>
         <p:spPr>
           <a:xfrm>
-            <a:off x="10789920" y="4983705"/>
+            <a:off x="10789920" y="5084064"/>
             <a:ext cx="640080" cy="274320"/>
           </a:xfrm>
           <a:prstGeom prst="rect">
@@ -15582,7 +14910,7 @@
         </p:nvSpPr>
         <p:spPr>
           <a:xfrm>
-            <a:off x="3383280" y="5216877"/>
+            <a:off x="3383280" y="5317236"/>
             <a:ext cx="7315200" cy="173736"/>
           </a:xfrm>
           <a:prstGeom prst="roundRect">
@@ -15627,7 +14955,7 @@
         </p:nvSpPr>
         <p:spPr>
           <a:xfrm>
-            <a:off x="3383280" y="5216877"/>
+            <a:off x="3383280" y="5317236"/>
             <a:ext cx="219456" cy="173736"/>
           </a:xfrm>
           <a:prstGeom prst="roundRect">
@@ -15672,7 +15000,7 @@
         </p:nvSpPr>
         <p:spPr>
           <a:xfrm>
-            <a:off x="10789920" y="5198589"/>
+            <a:off x="10789920" y="5298948"/>
             <a:ext cx="640080" cy="274320"/>
           </a:xfrm>
           <a:prstGeom prst="rect">
@@ -15714,8 +15042,8 @@
         </p:nvSpPr>
         <p:spPr>
           <a:xfrm>
-            <a:off x="822960" y="5500899"/>
-            <a:ext cx="10058400" cy="176972"/>
+            <a:off x="822960" y="5623560"/>
+            <a:ext cx="10058400" cy="292608"/>
           </a:xfrm>
           <a:prstGeom prst="rect">
             <a:avLst/>
@@ -15737,130 +15065,13 @@
               </a:spcAft>
             </a:pPr>
             <a:r>
-              <a:rPr sz="1150" b="0" i="1" dirty="0">
+              <a:rPr sz="1150" b="0" i="1">
                 <a:solidFill>
                   <a:srgbClr val="5C6272"/>
                 </a:solidFill>
                 <a:latin typeface="Helvetica Neue"/>
               </a:rPr>
-              <a:t>JUnit </a:t>
-            </a:r>
-            <a:r>
-              <a:rPr sz="1150" b="0" i="1" dirty="0" err="1">
-                <a:solidFill>
-                  <a:srgbClr val="5C6272"/>
-                </a:solidFill>
-                <a:latin typeface="Helvetica Neue"/>
-              </a:rPr>
-              <a:t>couvre</a:t>
-            </a:r>
-            <a:r>
-              <a:rPr sz="1150" b="0" i="1" dirty="0">
-                <a:solidFill>
-                  <a:srgbClr val="5C6272"/>
-                </a:solidFill>
-                <a:latin typeface="Helvetica Neue"/>
-              </a:rPr>
-              <a:t> la </a:t>
-            </a:r>
-            <a:r>
-              <a:rPr sz="1150" b="0" i="1" dirty="0" err="1">
-                <a:solidFill>
-                  <a:srgbClr val="5C6272"/>
-                </a:solidFill>
-                <a:latin typeface="Helvetica Neue"/>
-              </a:rPr>
-              <a:t>logique</a:t>
-            </a:r>
-            <a:r>
-              <a:rPr sz="1150" b="0" i="1" dirty="0">
-                <a:solidFill>
-                  <a:srgbClr val="5C6272"/>
-                </a:solidFill>
-                <a:latin typeface="Helvetica Neue"/>
-              </a:rPr>
-              <a:t> métier ; Cucumber </a:t>
-            </a:r>
-            <a:r>
-              <a:rPr sz="1150" b="0" i="1" dirty="0" err="1">
-                <a:solidFill>
-                  <a:srgbClr val="5C6272"/>
-                </a:solidFill>
-                <a:latin typeface="Helvetica Neue"/>
-              </a:rPr>
-              <a:t>couvre</a:t>
-            </a:r>
-            <a:r>
-              <a:rPr sz="1150" b="0" i="1" dirty="0">
-                <a:solidFill>
-                  <a:srgbClr val="5C6272"/>
-                </a:solidFill>
-                <a:latin typeface="Helvetica Neue"/>
-              </a:rPr>
-              <a:t> la couche REST — pr</a:t>
-            </a:r>
-            <a:r>
-              <a:rPr lang="fr-FR" sz="1150" b="0" i="1" dirty="0" err="1">
-                <a:solidFill>
-                  <a:srgbClr val="5C6272"/>
-                </a:solidFill>
-                <a:latin typeface="Helvetica Neue"/>
-              </a:rPr>
-              <a:t>é</a:t>
-            </a:r>
-            <a:r>
-              <a:rPr sz="1150" b="0" i="1" dirty="0" err="1">
-                <a:solidFill>
-                  <a:srgbClr val="5C6272"/>
-                </a:solidFill>
-                <a:latin typeface="Helvetica Neue"/>
-              </a:rPr>
-              <a:t>sque</a:t>
-            </a:r>
-            <a:r>
-              <a:rPr sz="1150" b="0" i="1" dirty="0">
-                <a:solidFill>
-                  <a:srgbClr val="5C6272"/>
-                </a:solidFill>
-                <a:latin typeface="Helvetica Neue"/>
-              </a:rPr>
-              <a:t> </a:t>
-            </a:r>
-            <a:r>
-              <a:rPr sz="1150" b="0" i="1" dirty="0" err="1">
-                <a:solidFill>
-                  <a:srgbClr val="5C6272"/>
-                </a:solidFill>
-                <a:latin typeface="Helvetica Neue"/>
-              </a:rPr>
-              <a:t>aucun</a:t>
-            </a:r>
-            <a:r>
-              <a:rPr sz="1150" b="0" i="1" dirty="0">
-                <a:solidFill>
-                  <a:srgbClr val="5C6272"/>
-                </a:solidFill>
-                <a:latin typeface="Helvetica Neue"/>
-              </a:rPr>
-              <a:t> </a:t>
-            </a:r>
-            <a:r>
-              <a:rPr sz="1150" b="0" i="1" dirty="0" err="1">
-                <a:solidFill>
-                  <a:srgbClr val="5C6272"/>
-                </a:solidFill>
-                <a:latin typeface="Helvetica Neue"/>
-              </a:rPr>
-              <a:t>recouvrement</a:t>
-            </a:r>
-            <a:r>
-              <a:rPr sz="1150" b="0" i="1" dirty="0">
-                <a:solidFill>
-                  <a:srgbClr val="5C6272"/>
-                </a:solidFill>
-                <a:latin typeface="Helvetica Neue"/>
-              </a:rPr>
-              <a:t>.</a:t>
+              <a:t>JUnit couvre la logique métier ; Cucumber couvre la couche REST — presque aucun recouvrement.</a:t>
             </a:r>
           </a:p>
         </p:txBody>
@@ -15873,7 +15084,7 @@
         </p:nvSpPr>
         <p:spPr>
           <a:xfrm>
-            <a:off x="867561" y="5832090"/>
+            <a:off x="822960" y="5943600"/>
             <a:ext cx="10424160" cy="548640"/>
           </a:xfrm>
           <a:prstGeom prst="roundRect">
@@ -15911,85 +15122,13 @@
               </a:lnSpc>
             </a:pPr>
             <a:r>
-              <a:rPr sz="1200" b="1" i="0" dirty="0">
+              <a:rPr sz="1200" b="1" i="0">
                 <a:solidFill>
                   <a:srgbClr val="0C111F"/>
                 </a:solidFill>
                 <a:latin typeface="Helvetica Neue"/>
               </a:rPr>
-              <a:t>Mention </a:t>
-            </a:r>
-            <a:r>
-              <a:rPr sz="1200" b="1" i="0" dirty="0" err="1">
-                <a:solidFill>
-                  <a:srgbClr val="0C111F"/>
-                </a:solidFill>
-                <a:latin typeface="Helvetica Neue"/>
-              </a:rPr>
-              <a:t>spéciale</a:t>
-            </a:r>
-            <a:r>
-              <a:rPr sz="1200" b="1" i="0" dirty="0">
-                <a:solidFill>
-                  <a:srgbClr val="0C111F"/>
-                </a:solidFill>
-                <a:latin typeface="Helvetica Neue"/>
-              </a:rPr>
-              <a:t> à </a:t>
-            </a:r>
-            <a:r>
-              <a:rPr sz="1200" b="1" i="0" dirty="0" err="1">
-                <a:solidFill>
-                  <a:srgbClr val="0C111F"/>
-                </a:solidFill>
-                <a:latin typeface="Helvetica Neue"/>
-              </a:rPr>
-              <a:t>RecurrenceRequest</a:t>
-            </a:r>
-            <a:r>
-              <a:rPr sz="1200" b="1" i="0" dirty="0">
-                <a:solidFill>
-                  <a:srgbClr val="0C111F"/>
-                </a:solidFill>
-                <a:latin typeface="Helvetica Neue"/>
-              </a:rPr>
-              <a:t> : 0 % </a:t>
-            </a:r>
-            <a:r>
-              <a:rPr sz="1200" b="1" i="0" dirty="0" err="1">
-                <a:solidFill>
-                  <a:srgbClr val="0C111F"/>
-                </a:solidFill>
-                <a:latin typeface="Helvetica Neue"/>
-              </a:rPr>
-              <a:t>partout</a:t>
-            </a:r>
-            <a:r>
-              <a:rPr sz="1200" b="1" i="0" dirty="0">
-                <a:solidFill>
-                  <a:srgbClr val="0C111F"/>
-                </a:solidFill>
-                <a:latin typeface="Helvetica Neue"/>
-              </a:rPr>
-              <a:t>. Personne </a:t>
-            </a:r>
-            <a:r>
-              <a:rPr sz="1200" b="1" i="0" dirty="0" err="1">
-                <a:solidFill>
-                  <a:srgbClr val="0C111F"/>
-                </a:solidFill>
-                <a:latin typeface="Helvetica Neue"/>
-              </a:rPr>
-              <a:t>n'y</a:t>
-            </a:r>
-            <a:r>
-              <a:rPr sz="1200" b="1" i="0" dirty="0">
-                <a:solidFill>
-                  <a:srgbClr val="0C111F"/>
-                </a:solidFill>
-                <a:latin typeface="Helvetica Neue"/>
-              </a:rPr>
-              <a:t> a jamais touché. Personne.</a:t>
+              <a:t>Mention spéciale à RecurrenceRequest : 0 % partout. Personne n'y a jamais touché. Personne.</a:t>
             </a:r>
           </a:p>
         </p:txBody>
@@ -16002,8 +15141,8 @@
         </p:nvSpPr>
         <p:spPr>
           <a:xfrm>
-            <a:off x="1187601" y="5673406"/>
-            <a:ext cx="182880" cy="176972"/>
+            <a:off x="1143000" y="5705856"/>
+            <a:ext cx="256032" cy="256032"/>
           </a:xfrm>
           <a:prstGeom prst="triangle">
             <a:avLst/>
@@ -18486,8 +17625,23 @@
                 </a:solidFill>
                 <a:latin typeface="Helvetica Neue"/>
               </a:rPr>
-              <a:t>BONUS</a:t>
-            </a:r>
+              <a:t>BONUS </a:t>
+            </a:r>
+            <a:r>
+              <a:rPr lang="fr-FR" sz="1150" b="1" dirty="0">
+                <a:solidFill>
+                  <a:srgbClr val="0C111F"/>
+                </a:solidFill>
+                <a:latin typeface="Helvetica Neue"/>
+              </a:rPr>
+              <a:t>SONAR</a:t>
+            </a:r>
+            <a:endParaRPr sz="1150" b="1" dirty="0">
+              <a:solidFill>
+                <a:srgbClr val="0C111F"/>
+              </a:solidFill>
+              <a:latin typeface="Helvetica Neue"/>
+            </a:endParaRPr>
           </a:p>
         </p:txBody>
       </p:sp>
@@ -22122,7 +21276,7 @@
         <p:spPr>
           <a:xfrm>
             <a:off x="1691640" y="4123944"/>
-            <a:ext cx="9601200" cy="223138"/>
+            <a:ext cx="9601200" cy="365760"/>
           </a:xfrm>
           <a:prstGeom prst="rect">
             <a:avLst/>
@@ -22144,31 +21298,13 @@
               </a:spcAft>
             </a:pPr>
             <a:r>
-              <a:rPr sz="1450" b="1" i="0" dirty="0">
+              <a:rPr sz="1450" b="1" i="0">
                 <a:solidFill>
                   <a:srgbClr val="181D2B"/>
                 </a:solidFill>
                 <a:latin typeface="Helvetica Neue"/>
               </a:rPr>
-              <a:t>« </a:t>
-            </a:r>
-            <a:r>
-              <a:rPr lang="fr-FR" sz="1450" b="1" i="0" dirty="0">
-                <a:solidFill>
-                  <a:srgbClr val="181D2B"/>
-                </a:solidFill>
-                <a:latin typeface="Helvetica Neue"/>
-              </a:rPr>
-              <a:t>C’est bon les tests passent toujours</a:t>
-            </a:r>
-            <a:r>
-              <a:rPr sz="1450" b="1" i="0" dirty="0">
-                <a:solidFill>
-                  <a:srgbClr val="181D2B"/>
-                </a:solidFill>
-                <a:latin typeface="Helvetica Neue"/>
-              </a:rPr>
-              <a:t> »</a:t>
+              <a:t>« Le stagiaire a dit que ça passait. »</a:t>
             </a:r>
           </a:p>
         </p:txBody>
@@ -26215,8 +25351,8 @@
         </p:nvSpPr>
         <p:spPr>
           <a:xfrm>
-            <a:off x="9052560" y="1965960"/>
-            <a:ext cx="1920240" cy="320040"/>
+            <a:off x="8641080" y="1965960"/>
+            <a:ext cx="3200400" cy="320040"/>
           </a:xfrm>
           <a:prstGeom prst="rect">
             <a:avLst/>
@@ -26257,8 +25393,8 @@
         </p:nvSpPr>
         <p:spPr>
           <a:xfrm>
-            <a:off x="8796528" y="2258568"/>
-            <a:ext cx="2432304" cy="2432304"/>
+            <a:off x="8641080" y="2258568"/>
+            <a:ext cx="1472184" cy="1472184"/>
           </a:xfrm>
           <a:prstGeom prst="rect">
             <a:avLst/>
@@ -26310,14 +25446,167 @@
         </p:blipFill>
         <p:spPr>
           <a:xfrm>
-            <a:off x="8869680" y="2331720"/>
-            <a:ext cx="2286000" cy="2286000"/>
+            <a:off x="8714232" y="2331720"/>
+            <a:ext cx="1325880" cy="1325880"/>
           </a:xfrm>
           <a:prstGeom prst="rect">
             <a:avLst/>
           </a:prstGeom>
         </p:spPr>
       </p:pic>
+      <p:sp>
+        <p:nvSpPr>
+          <p:cNvPr id="28" name="Rectangle 27"/>
+          <p:cNvSpPr/>
+          <p:nvPr/>
+        </p:nvSpPr>
+        <p:spPr>
+          <a:xfrm>
+            <a:off x="10369296" y="2258568"/>
+            <a:ext cx="1472184" cy="1472184"/>
+          </a:xfrm>
+          <a:prstGeom prst="rect">
+            <a:avLst/>
+          </a:prstGeom>
+          <a:solidFill>
+            <a:srgbClr val="FBF6EA"/>
+          </a:solidFill>
+          <a:ln>
+            <a:noFill/>
+          </a:ln>
+          <a:effectLst/>
+        </p:spPr>
+        <p:style>
+          <a:lnRef idx="1">
+            <a:schemeClr val="accent1"/>
+          </a:lnRef>
+          <a:fillRef idx="3">
+            <a:schemeClr val="accent1"/>
+          </a:fillRef>
+          <a:effectRef idx="2">
+            <a:schemeClr val="accent1"/>
+          </a:effectRef>
+          <a:fontRef idx="minor">
+            <a:schemeClr val="lt1"/>
+          </a:fontRef>
+        </p:style>
+        <p:txBody>
+          <a:bodyPr rtlCol="0" anchor="ctr"/>
+          <a:lstStyle/>
+          <a:p>
+            <a:pPr algn="ctr"/>
+            <a:endParaRPr/>
+          </a:p>
+        </p:txBody>
+      </p:sp>
+      <p:pic>
+        <p:nvPicPr>
+          <p:cNvPr id="29" name="Picture 28" descr="qr-linkedin.png"/>
+          <p:cNvPicPr>
+            <a:picLocks noChangeAspect="1"/>
+          </p:cNvPicPr>
+          <p:nvPr/>
+        </p:nvPicPr>
+        <p:blipFill>
+          <a:blip r:embed="rId3"/>
+          <a:stretch>
+            <a:fillRect/>
+          </a:stretch>
+        </p:blipFill>
+        <p:spPr>
+          <a:xfrm>
+            <a:off x="10442448" y="2331720"/>
+            <a:ext cx="1325880" cy="1325880"/>
+          </a:xfrm>
+          <a:prstGeom prst="rect">
+            <a:avLst/>
+          </a:prstGeom>
+        </p:spPr>
+      </p:pic>
+      <p:sp>
+        <p:nvSpPr>
+          <p:cNvPr id="30" name="TextBox 29"/>
+          <p:cNvSpPr txBox="1"/>
+          <p:nvPr/>
+        </p:nvSpPr>
+        <p:spPr>
+          <a:xfrm>
+            <a:off x="8641080" y="3840480"/>
+            <a:ext cx="1472184" cy="274320"/>
+          </a:xfrm>
+          <a:prstGeom prst="rect">
+            <a:avLst/>
+          </a:prstGeom>
+          <a:noFill/>
+        </p:spPr>
+        <p:txBody>
+          <a:bodyPr wrap="square" lIns="0" tIns="0" rIns="0" bIns="0" anchor="t">
+            <a:spAutoFit/>
+          </a:bodyPr>
+          <a:lstStyle/>
+          <a:p>
+            <a:pPr algn="ctr">
+              <a:lnSpc>
+                <a:spcPct val="100000"/>
+              </a:lnSpc>
+              <a:spcAft>
+                <a:spcPts val="0"/>
+              </a:spcAft>
+            </a:pPr>
+            <a:r>
+              <a:rPr sz="1050" b="0" i="0">
+                <a:solidFill>
+                  <a:srgbClr val="9AA1B5"/>
+                </a:solidFill>
+                <a:latin typeface="Helvetica Neue"/>
+              </a:rPr>
+              <a:t>GitHub</a:t>
+            </a:r>
+          </a:p>
+        </p:txBody>
+      </p:sp>
+      <p:sp>
+        <p:nvSpPr>
+          <p:cNvPr id="31" name="TextBox 30"/>
+          <p:cNvSpPr txBox="1"/>
+          <p:nvPr/>
+        </p:nvSpPr>
+        <p:spPr>
+          <a:xfrm>
+            <a:off x="10369296" y="3840480"/>
+            <a:ext cx="1472184" cy="274320"/>
+          </a:xfrm>
+          <a:prstGeom prst="rect">
+            <a:avLst/>
+          </a:prstGeom>
+          <a:noFill/>
+        </p:spPr>
+        <p:txBody>
+          <a:bodyPr wrap="square" lIns="0" tIns="0" rIns="0" bIns="0" anchor="t">
+            <a:spAutoFit/>
+          </a:bodyPr>
+          <a:lstStyle/>
+          <a:p>
+            <a:pPr algn="ctr">
+              <a:lnSpc>
+                <a:spcPct val="100000"/>
+              </a:lnSpc>
+              <a:spcAft>
+                <a:spcPts val="0"/>
+              </a:spcAft>
+            </a:pPr>
+            <a:r>
+              <a:rPr sz="1050" b="0" i="0">
+                <a:solidFill>
+                  <a:srgbClr val="9AA1B5"/>
+                </a:solidFill>
+                <a:latin typeface="Helvetica Neue"/>
+              </a:rPr>
+              <a:t>LinkedIn</a:t>
+            </a:r>
+          </a:p>
+        </p:txBody>
+      </p:sp>
     </p:spTree>
   </p:cSld>
   <p:clrMapOvr>
@@ -27722,7 +27011,7 @@
         <p:spPr>
           <a:xfrm>
             <a:off x="1600200" y="3438144"/>
-            <a:ext cx="6949440" cy="238527"/>
+            <a:ext cx="6949440" cy="365760"/>
           </a:xfrm>
           <a:prstGeom prst="rect">
             <a:avLst/>
@@ -27744,38 +27033,14 @@
               </a:spcAft>
             </a:pPr>
             <a:r>
-              <a:rPr sz="1550" b="1" i="0" dirty="0" err="1">
+              <a:rPr sz="1550" b="1" i="0">
                 <a:solidFill>
                   <a:srgbClr val="181D2B"/>
                 </a:solidFill>
                 <a:latin typeface="Helvetica Neue"/>
               </a:rPr>
-              <a:t>Démo</a:t>
-            </a:r>
-            <a:r>
-              <a:rPr sz="1550" b="1" i="0" dirty="0">
-                <a:solidFill>
-                  <a:srgbClr val="181D2B"/>
-                </a:solidFill>
-                <a:latin typeface="Helvetica Neue"/>
-              </a:rPr>
-              <a:t> : le pro</a:t>
-            </a:r>
-            <a:r>
-              <a:rPr lang="fr-FR" sz="1550" b="1" dirty="0">
-                <a:solidFill>
-                  <a:srgbClr val="181D2B"/>
-                </a:solidFill>
-                <a:latin typeface="Helvetica Neue"/>
-              </a:rPr>
-              <a:t>jet</a:t>
-            </a:r>
-            <a:endParaRPr sz="1550" b="1" i="0" dirty="0">
-              <a:solidFill>
-                <a:srgbClr val="181D2B"/>
-              </a:solidFill>
-              <a:latin typeface="Helvetica Neue"/>
-            </a:endParaRPr>
+              <a:t>Démo : le projet</a:t>
+            </a:r>
           </a:p>
         </p:txBody>
       </p:sp>
@@ -28143,6 +27408,14 @@
           </a:bodyPr>
           <a:lstStyle/>
           <a:p>
+            <a:pPr algn="l">
+              <a:lnSpc>
+                <a:spcPct val="100000"/>
+              </a:lnSpc>
+              <a:spcAft>
+                <a:spcPts val="0"/>
+              </a:spcAft>
+            </a:pPr>
             <a:r>
               <a:rPr sz="1100" b="0" i="0" dirty="0">
                 <a:solidFill>
@@ -29695,7 +28968,7 @@
         </p:nvSpPr>
         <p:spPr>
           <a:xfrm>
-            <a:off x="6281928" y="1755203"/>
+            <a:off x="905256" y="2048256"/>
             <a:ext cx="5102352" cy="2084831"/>
           </a:xfrm>
           <a:prstGeom prst="roundRect">
@@ -29740,7 +29013,7 @@
         </p:nvSpPr>
         <p:spPr>
           <a:xfrm>
-            <a:off x="6199632" y="1672907"/>
+            <a:off x="822960" y="1965960"/>
             <a:ext cx="5102352" cy="2084831"/>
           </a:xfrm>
           <a:prstGeom prst="roundRect">
@@ -29785,7 +29058,7 @@
         </p:nvSpPr>
         <p:spPr>
           <a:xfrm>
-            <a:off x="6199632" y="1672907"/>
+            <a:off x="822960" y="1965960"/>
             <a:ext cx="91440" cy="2084831"/>
           </a:xfrm>
           <a:prstGeom prst="rect">
@@ -29830,7 +29103,7 @@
         </p:nvSpPr>
         <p:spPr>
           <a:xfrm>
-            <a:off x="6492240" y="1855787"/>
+            <a:off x="1115568" y="2148840"/>
             <a:ext cx="1415948" cy="310896"/>
           </a:xfrm>
           <a:prstGeom prst="roundRect">
@@ -29883,7 +29156,7 @@
         </p:nvSpPr>
         <p:spPr>
           <a:xfrm>
-            <a:off x="6519672" y="2422715"/>
+            <a:off x="1143000" y="2715768"/>
             <a:ext cx="4507992" cy="1234440"/>
           </a:xfrm>
           <a:prstGeom prst="rect">
@@ -29944,7 +29217,7 @@
         </p:nvSpPr>
         <p:spPr>
           <a:xfrm>
-            <a:off x="868680" y="4116366"/>
+            <a:off x="6281928" y="2048256"/>
             <a:ext cx="5102352" cy="2084831"/>
           </a:xfrm>
           <a:prstGeom prst="roundRect">
@@ -29989,7 +29262,7 @@
         </p:nvSpPr>
         <p:spPr>
           <a:xfrm>
-            <a:off x="786384" y="4050349"/>
+            <a:off x="6199632" y="1965960"/>
             <a:ext cx="5102352" cy="2084831"/>
           </a:xfrm>
           <a:prstGeom prst="roundRect">
@@ -30034,7 +29307,7 @@
         </p:nvSpPr>
         <p:spPr>
           <a:xfrm>
-            <a:off x="786384" y="4050349"/>
+            <a:off x="6199632" y="1965960"/>
             <a:ext cx="91440" cy="2084831"/>
           </a:xfrm>
           <a:prstGeom prst="rect">
@@ -30079,7 +29352,7 @@
         </p:nvSpPr>
         <p:spPr>
           <a:xfrm>
-            <a:off x="1078992" y="4233229"/>
+            <a:off x="6492240" y="2148840"/>
             <a:ext cx="1576425" cy="310896"/>
           </a:xfrm>
           <a:prstGeom prst="roundRect">
@@ -30132,7 +29405,7 @@
         </p:nvSpPr>
         <p:spPr>
           <a:xfrm>
-            <a:off x="1106424" y="4800157"/>
+            <a:off x="6519672" y="2715768"/>
             <a:ext cx="4507992" cy="1234440"/>
           </a:xfrm>
           <a:prstGeom prst="rect">
@@ -30193,7 +29466,7 @@
         </p:nvSpPr>
         <p:spPr>
           <a:xfrm>
-            <a:off x="868680" y="1736244"/>
+            <a:off x="905256" y="4352543"/>
             <a:ext cx="5102352" cy="2084831"/>
           </a:xfrm>
           <a:prstGeom prst="roundRect">
@@ -30238,7 +29511,7 @@
         </p:nvSpPr>
         <p:spPr>
           <a:xfrm>
-            <a:off x="786384" y="1653948"/>
+            <a:off x="822960" y="4270247"/>
             <a:ext cx="5102352" cy="2084831"/>
           </a:xfrm>
           <a:prstGeom prst="roundRect">
@@ -30283,7 +29556,7 @@
         </p:nvSpPr>
         <p:spPr>
           <a:xfrm>
-            <a:off x="786384" y="1653948"/>
+            <a:off x="822960" y="4270247"/>
             <a:ext cx="91440" cy="2084831"/>
           </a:xfrm>
           <a:prstGeom prst="rect">
@@ -30328,7 +29601,7 @@
         </p:nvSpPr>
         <p:spPr>
           <a:xfrm>
-            <a:off x="1078992" y="1836828"/>
+            <a:off x="1115568" y="4453127"/>
             <a:ext cx="1415948" cy="310896"/>
           </a:xfrm>
           <a:prstGeom prst="roundRect">
@@ -30381,7 +29654,7 @@
         </p:nvSpPr>
         <p:spPr>
           <a:xfrm>
-            <a:off x="1106424" y="2403756"/>
+            <a:off x="1143000" y="5020055"/>
             <a:ext cx="4507992" cy="1234440"/>
           </a:xfrm>
           <a:prstGeom prst="rect">
@@ -30442,7 +29715,7 @@
         </p:nvSpPr>
         <p:spPr>
           <a:xfrm>
-            <a:off x="6281928" y="4096066"/>
+            <a:off x="6281928" y="4352543"/>
             <a:ext cx="5102352" cy="2084831"/>
           </a:xfrm>
           <a:prstGeom prst="roundRect">
@@ -30487,7 +29760,7 @@
         </p:nvSpPr>
         <p:spPr>
           <a:xfrm>
-            <a:off x="6199632" y="4013770"/>
+            <a:off x="6199632" y="4270247"/>
             <a:ext cx="5102352" cy="2084831"/>
           </a:xfrm>
           <a:prstGeom prst="roundRect">
@@ -30532,7 +29805,7 @@
         </p:nvSpPr>
         <p:spPr>
           <a:xfrm>
-            <a:off x="6199632" y="4013770"/>
+            <a:off x="6199632" y="4270247"/>
             <a:ext cx="91440" cy="2084831"/>
           </a:xfrm>
           <a:prstGeom prst="rect">
@@ -30577,7 +29850,7 @@
         </p:nvSpPr>
         <p:spPr>
           <a:xfrm>
-            <a:off x="6492240" y="4196650"/>
+            <a:off x="6492240" y="4453127"/>
             <a:ext cx="1255471" cy="310896"/>
           </a:xfrm>
           <a:prstGeom prst="roundRect">
@@ -30630,7 +29903,7 @@
         </p:nvSpPr>
         <p:spPr>
           <a:xfrm>
-            <a:off x="6519672" y="4763578"/>
+            <a:off x="6519672" y="5020055"/>
             <a:ext cx="4507992" cy="1234440"/>
           </a:xfrm>
           <a:prstGeom prst="rect">
@@ -32701,7 +31974,7 @@
                 </a:solidFill>
                 <a:latin typeface="Helvetica Neue"/>
               </a:rPr>
-              <a:t>ZOOM — JUNIT</a:t>
+              <a:t>BONUS THÉORIE (VITE FAIT)</a:t>
             </a:r>
           </a:p>
         </p:txBody>
@@ -32714,8 +31987,200 @@
         </p:nvSpPr>
         <p:spPr>
           <a:xfrm>
-            <a:off x="822960" y="1051560"/>
-            <a:ext cx="10058400" cy="1005840"/>
+            <a:off x="822960" y="1024128"/>
+            <a:ext cx="10515600" cy="1188720"/>
+          </a:xfrm>
+          <a:prstGeom prst="rect">
+            <a:avLst/>
+          </a:prstGeom>
+          <a:noFill/>
+        </p:spPr>
+        <p:txBody>
+          <a:bodyPr wrap="square" lIns="0" tIns="0" rIns="0" bIns="0" anchor="t">
+            <a:spAutoFit/>
+          </a:bodyPr>
+          <a:lstStyle/>
+          <a:p>
+            <a:pPr algn="l">
+              <a:lnSpc>
+                <a:spcPct val="110000"/>
+              </a:lnSpc>
+            </a:pPr>
+            <a:r>
+              <a:rPr sz="2600" b="1">
+                <a:solidFill>
+                  <a:srgbClr val="181D2B"/>
+                </a:solidFill>
+                <a:latin typeface="Helvetica Neue"/>
+              </a:rPr>
+              <a:t>SOLID est au clean code ce que </a:t>
+            </a:r>
+            <a:r>
+              <a:rPr sz="2600" b="1">
+                <a:solidFill>
+                  <a:srgbClr val="F0A72E"/>
+                </a:solidFill>
+                <a:latin typeface="Helvetica Neue"/>
+              </a:rPr>
+              <a:t>FIRST</a:t>
+            </a:r>
+            <a:r>
+              <a:rPr sz="2600" b="1">
+                <a:solidFill>
+                  <a:srgbClr val="181D2B"/>
+                </a:solidFill>
+                <a:latin typeface="Helvetica Neue"/>
+              </a:rPr>
+              <a:t> est au test unitaire.</a:t>
+            </a:r>
+          </a:p>
+        </p:txBody>
+      </p:sp>
+      <p:sp>
+        <p:nvSpPr>
+          <p:cNvPr id="5" name="Rounded Rectangle 4"/>
+          <p:cNvSpPr/>
+          <p:nvPr/>
+        </p:nvSpPr>
+        <p:spPr>
+          <a:xfrm>
+            <a:off x="905256" y="2596896"/>
+            <a:ext cx="1938528" cy="2514600"/>
+          </a:xfrm>
+          <a:prstGeom prst="roundRect">
+            <a:avLst/>
+          </a:prstGeom>
+          <a:solidFill>
+            <a:srgbClr val="E7DCC1"/>
+          </a:solidFill>
+          <a:ln>
+            <a:noFill/>
+          </a:ln>
+          <a:effectLst/>
+        </p:spPr>
+        <p:style>
+          <a:lnRef idx="1">
+            <a:schemeClr val="accent1"/>
+          </a:lnRef>
+          <a:fillRef idx="3">
+            <a:schemeClr val="accent1"/>
+          </a:fillRef>
+          <a:effectRef idx="2">
+            <a:schemeClr val="accent1"/>
+          </a:effectRef>
+          <a:fontRef idx="minor">
+            <a:schemeClr val="lt1"/>
+          </a:fontRef>
+        </p:style>
+        <p:txBody>
+          <a:bodyPr rtlCol="0" anchor="ctr"/>
+          <a:lstStyle/>
+          <a:p>
+            <a:pPr algn="ctr"/>
+            <a:endParaRPr/>
+          </a:p>
+        </p:txBody>
+      </p:sp>
+      <p:sp>
+        <p:nvSpPr>
+          <p:cNvPr id="6" name="Rounded Rectangle 5"/>
+          <p:cNvSpPr/>
+          <p:nvPr/>
+        </p:nvSpPr>
+        <p:spPr>
+          <a:xfrm>
+            <a:off x="822960" y="2514600"/>
+            <a:ext cx="1938528" cy="2514600"/>
+          </a:xfrm>
+          <a:prstGeom prst="roundRect">
+            <a:avLst/>
+          </a:prstGeom>
+          <a:solidFill>
+            <a:srgbClr val="F1E9D5"/>
+          </a:solidFill>
+          <a:ln>
+            <a:noFill/>
+          </a:ln>
+          <a:effectLst/>
+        </p:spPr>
+        <p:style>
+          <a:lnRef idx="1">
+            <a:schemeClr val="accent1"/>
+          </a:lnRef>
+          <a:fillRef idx="3">
+            <a:schemeClr val="accent1"/>
+          </a:fillRef>
+          <a:effectRef idx="2">
+            <a:schemeClr val="accent1"/>
+          </a:effectRef>
+          <a:fontRef idx="minor">
+            <a:schemeClr val="lt1"/>
+          </a:fontRef>
+        </p:style>
+        <p:txBody>
+          <a:bodyPr rtlCol="0" anchor="ctr"/>
+          <a:lstStyle/>
+          <a:p>
+            <a:pPr algn="ctr"/>
+            <a:endParaRPr/>
+          </a:p>
+        </p:txBody>
+      </p:sp>
+      <p:sp>
+        <p:nvSpPr>
+          <p:cNvPr id="7" name="Rectangle 6"/>
+          <p:cNvSpPr/>
+          <p:nvPr/>
+        </p:nvSpPr>
+        <p:spPr>
+          <a:xfrm>
+            <a:off x="822960" y="2514600"/>
+            <a:ext cx="1938528" cy="82296"/>
+          </a:xfrm>
+          <a:prstGeom prst="rect">
+            <a:avLst/>
+          </a:prstGeom>
+          <a:solidFill>
+            <a:srgbClr val="F0A72E"/>
+          </a:solidFill>
+          <a:ln>
+            <a:noFill/>
+          </a:ln>
+          <a:effectLst/>
+        </p:spPr>
+        <p:style>
+          <a:lnRef idx="1">
+            <a:schemeClr val="accent1"/>
+          </a:lnRef>
+          <a:fillRef idx="3">
+            <a:schemeClr val="accent1"/>
+          </a:fillRef>
+          <a:effectRef idx="2">
+            <a:schemeClr val="accent1"/>
+          </a:effectRef>
+          <a:fontRef idx="minor">
+            <a:schemeClr val="lt1"/>
+          </a:fontRef>
+        </p:style>
+        <p:txBody>
+          <a:bodyPr rtlCol="0" anchor="ctr"/>
+          <a:lstStyle/>
+          <a:p>
+            <a:pPr algn="ctr"/>
+            <a:endParaRPr/>
+          </a:p>
+        </p:txBody>
+      </p:sp>
+      <p:sp>
+        <p:nvSpPr>
+          <p:cNvPr id="8" name="TextBox 7"/>
+          <p:cNvSpPr txBox="1"/>
+          <p:nvPr/>
+        </p:nvSpPr>
+        <p:spPr>
+          <a:xfrm>
+            <a:off x="987552" y="2715768"/>
+            <a:ext cx="1609344" cy="548640"/>
           </a:xfrm>
           <a:prstGeom prst="rect">
             <a:avLst/>
@@ -32737,210 +32202,14 @@
               </a:spcAft>
             </a:pPr>
             <a:r>
-              <a:rPr sz="3200" b="1" i="0">
-                <a:solidFill>
-                  <a:srgbClr val="181D2B"/>
-                </a:solidFill>
-                <a:latin typeface="Helvetica Neue"/>
-              </a:rPr>
-              <a:t>Le microscope</a:t>
-            </a:r>
-          </a:p>
-        </p:txBody>
-      </p:sp>
-      <p:sp>
-        <p:nvSpPr>
-          <p:cNvPr id="5" name="TextBox 4"/>
-          <p:cNvSpPr txBox="1"/>
-          <p:nvPr/>
-        </p:nvSpPr>
-        <p:spPr>
-          <a:xfrm>
-            <a:off x="822960" y="1874519"/>
-            <a:ext cx="9966960" cy="822960"/>
-          </a:xfrm>
-          <a:prstGeom prst="rect">
-            <a:avLst/>
-          </a:prstGeom>
-          <a:noFill/>
-        </p:spPr>
-        <p:txBody>
-          <a:bodyPr wrap="square" lIns="0" tIns="0" rIns="0" bIns="0" anchor="t">
-            <a:spAutoFit/>
-          </a:bodyPr>
-          <a:lstStyle/>
-          <a:p>
-            <a:pPr algn="l">
-              <a:lnSpc>
-                <a:spcPct val="130000"/>
-              </a:lnSpc>
-              <a:spcAft>
-                <a:spcPts val="0"/>
-              </a:spcAft>
-            </a:pPr>
-            <a:r>
-              <a:rPr sz="1500" b="0" i="0">
-                <a:solidFill>
-                  <a:srgbClr val="181D2B"/>
-                </a:solidFill>
-                <a:latin typeface="Helvetica Neue"/>
-              </a:rPr>
-              <a:t>JUnit teste une unité de code isolée — une méthode, une classe — sans lancer</a:t>
-            </a:r>
-          </a:p>
-          <a:p>
-            <a:pPr algn="l">
-              <a:lnSpc>
-                <a:spcPct val="130000"/>
-              </a:lnSpc>
-              <a:spcAft>
-                <a:spcPts val="0"/>
-              </a:spcAft>
-            </a:pPr>
-            <a:r>
-              <a:rPr sz="1500" b="0" i="0">
-                <a:solidFill>
-                  <a:srgbClr val="181D2B"/>
-                </a:solidFill>
-                <a:latin typeface="Helvetica Neue"/>
-              </a:rPr>
-              <a:t>toute l'application. C'est rapide, précis, et ça ne pardonne rien.</a:t>
-            </a:r>
-          </a:p>
-        </p:txBody>
-      </p:sp>
-      <p:sp>
-        <p:nvSpPr>
-          <p:cNvPr id="6" name="Rounded Rectangle 5"/>
-          <p:cNvSpPr/>
-          <p:nvPr/>
-        </p:nvSpPr>
-        <p:spPr>
-          <a:xfrm>
-            <a:off x="905256" y="3145536"/>
-            <a:ext cx="3273552" cy="1417320"/>
-          </a:xfrm>
-          <a:prstGeom prst="roundRect">
-            <a:avLst/>
-          </a:prstGeom>
-          <a:solidFill>
-            <a:srgbClr val="E7DCC1"/>
-          </a:solidFill>
-          <a:ln>
-            <a:noFill/>
-          </a:ln>
-          <a:effectLst/>
-        </p:spPr>
-        <p:style>
-          <a:lnRef idx="1">
-            <a:schemeClr val="accent1"/>
-          </a:lnRef>
-          <a:fillRef idx="3">
-            <a:schemeClr val="accent1"/>
-          </a:fillRef>
-          <a:effectRef idx="2">
-            <a:schemeClr val="accent1"/>
-          </a:effectRef>
-          <a:fontRef idx="minor">
-            <a:schemeClr val="lt1"/>
-          </a:fontRef>
-        </p:style>
-        <p:txBody>
-          <a:bodyPr rtlCol="0" anchor="ctr"/>
-          <a:lstStyle/>
-          <a:p>
-            <a:pPr algn="ctr"/>
-            <a:endParaRPr/>
-          </a:p>
-        </p:txBody>
-      </p:sp>
-      <p:sp>
-        <p:nvSpPr>
-          <p:cNvPr id="7" name="Rounded Rectangle 6"/>
-          <p:cNvSpPr/>
-          <p:nvPr/>
-        </p:nvSpPr>
-        <p:spPr>
-          <a:xfrm>
-            <a:off x="822960" y="3063240"/>
-            <a:ext cx="3273552" cy="1417320"/>
-          </a:xfrm>
-          <a:prstGeom prst="roundRect">
-            <a:avLst/>
-          </a:prstGeom>
-          <a:solidFill>
-            <a:srgbClr val="F1E9D5"/>
-          </a:solidFill>
-          <a:ln>
-            <a:noFill/>
-          </a:ln>
-          <a:effectLst/>
-        </p:spPr>
-        <p:style>
-          <a:lnRef idx="1">
-            <a:schemeClr val="accent1"/>
-          </a:lnRef>
-          <a:fillRef idx="3">
-            <a:schemeClr val="accent1"/>
-          </a:fillRef>
-          <a:effectRef idx="2">
-            <a:schemeClr val="accent1"/>
-          </a:effectRef>
-          <a:fontRef idx="minor">
-            <a:schemeClr val="lt1"/>
-          </a:fontRef>
-        </p:style>
-        <p:txBody>
-          <a:bodyPr rtlCol="0" anchor="ctr"/>
-          <a:lstStyle/>
-          <a:p>
-            <a:pPr algn="ctr"/>
-            <a:endParaRPr/>
-          </a:p>
-        </p:txBody>
-      </p:sp>
-      <p:sp>
-        <p:nvSpPr>
-          <p:cNvPr id="8" name="Rectangle 7"/>
-          <p:cNvSpPr/>
-          <p:nvPr/>
-        </p:nvSpPr>
-        <p:spPr>
-          <a:xfrm>
-            <a:off x="822960" y="3063240"/>
-            <a:ext cx="73152" cy="1417320"/>
-          </a:xfrm>
-          <a:prstGeom prst="rect">
-            <a:avLst/>
-          </a:prstGeom>
-          <a:solidFill>
-            <a:srgbClr val="2EB0A0"/>
-          </a:solidFill>
-          <a:ln>
-            <a:noFill/>
-          </a:ln>
-          <a:effectLst/>
-        </p:spPr>
-        <p:style>
-          <a:lnRef idx="1">
-            <a:schemeClr val="accent1"/>
-          </a:lnRef>
-          <a:fillRef idx="3">
-            <a:schemeClr val="accent1"/>
-          </a:fillRef>
-          <a:effectRef idx="2">
-            <a:schemeClr val="accent1"/>
-          </a:effectRef>
-          <a:fontRef idx="minor">
-            <a:schemeClr val="lt1"/>
-          </a:fontRef>
-        </p:style>
-        <p:txBody>
-          <a:bodyPr rtlCol="0" anchor="ctr"/>
-          <a:lstStyle/>
-          <a:p>
-            <a:pPr algn="ctr"/>
-            <a:endParaRPr/>
+              <a:rPr sz="3400" b="1" i="0">
+                <a:solidFill>
+                  <a:srgbClr val="8A5A10"/>
+                </a:solidFill>
+                <a:latin typeface="Helvetica Neue"/>
+              </a:rPr>
+              <a:t>F</a:t>
+            </a:r>
           </a:p>
         </p:txBody>
       </p:sp>
@@ -32952,8 +32221,8 @@
         </p:nvSpPr>
         <p:spPr>
           <a:xfrm>
-            <a:off x="1097280" y="3273552"/>
-            <a:ext cx="2816352" cy="365760"/>
+            <a:off x="987552" y="3383280"/>
+            <a:ext cx="1609344" cy="502920"/>
           </a:xfrm>
           <a:prstGeom prst="rect">
             <a:avLst/>
@@ -32975,13 +32244,13 @@
               </a:spcAft>
             </a:pPr>
             <a:r>
-              <a:rPr sz="1600" b="1" i="0">
+              <a:rPr sz="1350" b="1" i="0">
                 <a:solidFill>
                   <a:srgbClr val="181D2B"/>
                 </a:solidFill>
                 <a:latin typeface="Helvetica Neue"/>
               </a:rPr>
-              <a:t>Rapide</a:t>
+              <a:t>Fast</a:t>
             </a:r>
           </a:p>
         </p:txBody>
@@ -32994,8 +32263,8 @@
         </p:nvSpPr>
         <p:spPr>
           <a:xfrm>
-            <a:off x="1097280" y="3639312"/>
-            <a:ext cx="2816352" cy="777240"/>
+            <a:off x="987552" y="3886200"/>
+            <a:ext cx="1609344" cy="1005840"/>
           </a:xfrm>
           <a:prstGeom prst="rect">
             <a:avLst/>
@@ -33010,20 +32279,39 @@
           <a:p>
             <a:pPr algn="l">
               <a:lnSpc>
-                <a:spcPct val="115000"/>
+                <a:spcPct val="120000"/>
               </a:lnSpc>
               <a:spcAft>
                 <a:spcPts val="0"/>
               </a:spcAft>
             </a:pPr>
             <a:r>
-              <a:rPr sz="1200" b="0" i="0">
+              <a:rPr sz="1050" b="0" i="0">
                 <a:solidFill>
                   <a:srgbClr val="181D2B"/>
                 </a:solidFill>
                 <a:latin typeface="Helvetica Neue"/>
               </a:rPr>
-              <a:t>Des milliers de tests en quelques secondes. Votre café, lui, met plus longtemps.</a:t>
+              <a:t>Rapide — sinon on arrête</a:t>
+            </a:r>
+          </a:p>
+          <a:p>
+            <a:pPr algn="l">
+              <a:lnSpc>
+                <a:spcPct val="120000"/>
+              </a:lnSpc>
+              <a:spcAft>
+                <a:spcPts val="0"/>
+              </a:spcAft>
+            </a:pPr>
+            <a:r>
+              <a:rPr sz="1050" b="0" i="0">
+                <a:solidFill>
+                  <a:srgbClr val="181D2B"/>
+                </a:solidFill>
+                <a:latin typeface="Helvetica Neue"/>
+              </a:rPr>
+              <a:t>de les lancer.</a:t>
             </a:r>
           </a:p>
         </p:txBody>
@@ -33036,8 +32324,8 @@
         </p:nvSpPr>
         <p:spPr>
           <a:xfrm>
-            <a:off x="4434840" y="3145536"/>
-            <a:ext cx="3273552" cy="1417320"/>
+            <a:off x="3044952" y="2596896"/>
+            <a:ext cx="1938528" cy="2514600"/>
           </a:xfrm>
           <a:prstGeom prst="roundRect">
             <a:avLst/>
@@ -33081,8 +32369,8 @@
         </p:nvSpPr>
         <p:spPr>
           <a:xfrm>
-            <a:off x="4352544" y="3063240"/>
-            <a:ext cx="3273552" cy="1417320"/>
+            <a:off x="2962656" y="2514600"/>
+            <a:ext cx="1938528" cy="2514600"/>
           </a:xfrm>
           <a:prstGeom prst="roundRect">
             <a:avLst/>
@@ -33126,14 +32414,14 @@
         </p:nvSpPr>
         <p:spPr>
           <a:xfrm>
-            <a:off x="4352544" y="3063240"/>
-            <a:ext cx="73152" cy="1417320"/>
+            <a:off x="2962656" y="2514600"/>
+            <a:ext cx="1938528" cy="82296"/>
           </a:xfrm>
           <a:prstGeom prst="rect">
             <a:avLst/>
           </a:prstGeom>
           <a:solidFill>
-            <a:srgbClr val="F0A72E"/>
+            <a:srgbClr val="2EB0A0"/>
           </a:solidFill>
           <a:ln>
             <a:noFill/>
@@ -33171,8 +32459,8 @@
         </p:nvSpPr>
         <p:spPr>
           <a:xfrm>
-            <a:off x="4626864" y="3273552"/>
-            <a:ext cx="2816352" cy="365760"/>
+            <a:off x="3127248" y="2715768"/>
+            <a:ext cx="1609344" cy="548640"/>
           </a:xfrm>
           <a:prstGeom prst="rect">
             <a:avLst/>
@@ -33194,13 +32482,13 @@
               </a:spcAft>
             </a:pPr>
             <a:r>
-              <a:rPr sz="1600" b="1" i="0">
-                <a:solidFill>
-                  <a:srgbClr val="181D2B"/>
-                </a:solidFill>
-                <a:latin typeface="Helvetica Neue"/>
-              </a:rPr>
-              <a:t>Isolé</a:t>
+              <a:rPr sz="3400" b="1" i="0">
+                <a:solidFill>
+                  <a:srgbClr val="1B6E62"/>
+                </a:solidFill>
+                <a:latin typeface="Helvetica Neue"/>
+              </a:rPr>
+              <a:t>I</a:t>
             </a:r>
           </a:p>
         </p:txBody>
@@ -33213,185 +32501,8 @@
         </p:nvSpPr>
         <p:spPr>
           <a:xfrm>
-            <a:off x="4626864" y="3639312"/>
-            <a:ext cx="2816352" cy="777240"/>
-          </a:xfrm>
-          <a:prstGeom prst="rect">
-            <a:avLst/>
-          </a:prstGeom>
-          <a:noFill/>
-        </p:spPr>
-        <p:txBody>
-          <a:bodyPr wrap="square" lIns="0" tIns="0" rIns="0" bIns="0" anchor="t">
-            <a:spAutoFit/>
-          </a:bodyPr>
-          <a:lstStyle/>
-          <a:p>
-            <a:pPr algn="l">
-              <a:lnSpc>
-                <a:spcPct val="115000"/>
-              </a:lnSpc>
-              <a:spcAft>
-                <a:spcPts val="0"/>
-              </a:spcAft>
-            </a:pPr>
-            <a:r>
-              <a:rPr sz="1200" b="0" i="0">
-                <a:solidFill>
-                  <a:srgbClr val="181D2B"/>
-                </a:solidFill>
-                <a:latin typeface="Helvetica Neue"/>
-              </a:rPr>
-              <a:t>Pas de serveur, pas de réseau, pas de surprise. Le rêve, quoi.</a:t>
-            </a:r>
-          </a:p>
-        </p:txBody>
-      </p:sp>
-      <p:sp>
-        <p:nvSpPr>
-          <p:cNvPr id="16" name="Rounded Rectangle 15"/>
-          <p:cNvSpPr/>
-          <p:nvPr/>
-        </p:nvSpPr>
-        <p:spPr>
-          <a:xfrm>
-            <a:off x="7964424" y="3145536"/>
-            <a:ext cx="3273552" cy="1417320"/>
-          </a:xfrm>
-          <a:prstGeom prst="roundRect">
-            <a:avLst/>
-          </a:prstGeom>
-          <a:solidFill>
-            <a:srgbClr val="E7DCC1"/>
-          </a:solidFill>
-          <a:ln>
-            <a:noFill/>
-          </a:ln>
-          <a:effectLst/>
-        </p:spPr>
-        <p:style>
-          <a:lnRef idx="1">
-            <a:schemeClr val="accent1"/>
-          </a:lnRef>
-          <a:fillRef idx="3">
-            <a:schemeClr val="accent1"/>
-          </a:fillRef>
-          <a:effectRef idx="2">
-            <a:schemeClr val="accent1"/>
-          </a:effectRef>
-          <a:fontRef idx="minor">
-            <a:schemeClr val="lt1"/>
-          </a:fontRef>
-        </p:style>
-        <p:txBody>
-          <a:bodyPr rtlCol="0" anchor="ctr"/>
-          <a:lstStyle/>
-          <a:p>
-            <a:pPr algn="ctr"/>
-            <a:endParaRPr/>
-          </a:p>
-        </p:txBody>
-      </p:sp>
-      <p:sp>
-        <p:nvSpPr>
-          <p:cNvPr id="17" name="Rounded Rectangle 16"/>
-          <p:cNvSpPr/>
-          <p:nvPr/>
-        </p:nvSpPr>
-        <p:spPr>
-          <a:xfrm>
-            <a:off x="7882128" y="3063240"/>
-            <a:ext cx="3273552" cy="1417320"/>
-          </a:xfrm>
-          <a:prstGeom prst="roundRect">
-            <a:avLst/>
-          </a:prstGeom>
-          <a:solidFill>
-            <a:srgbClr val="F1E9D5"/>
-          </a:solidFill>
-          <a:ln>
-            <a:noFill/>
-          </a:ln>
-          <a:effectLst/>
-        </p:spPr>
-        <p:style>
-          <a:lnRef idx="1">
-            <a:schemeClr val="accent1"/>
-          </a:lnRef>
-          <a:fillRef idx="3">
-            <a:schemeClr val="accent1"/>
-          </a:fillRef>
-          <a:effectRef idx="2">
-            <a:schemeClr val="accent1"/>
-          </a:effectRef>
-          <a:fontRef idx="minor">
-            <a:schemeClr val="lt1"/>
-          </a:fontRef>
-        </p:style>
-        <p:txBody>
-          <a:bodyPr rtlCol="0" anchor="ctr"/>
-          <a:lstStyle/>
-          <a:p>
-            <a:pPr algn="ctr"/>
-            <a:endParaRPr/>
-          </a:p>
-        </p:txBody>
-      </p:sp>
-      <p:sp>
-        <p:nvSpPr>
-          <p:cNvPr id="18" name="Rectangle 17"/>
-          <p:cNvSpPr/>
-          <p:nvPr/>
-        </p:nvSpPr>
-        <p:spPr>
-          <a:xfrm>
-            <a:off x="7882128" y="3063240"/>
-            <a:ext cx="73152" cy="1417320"/>
-          </a:xfrm>
-          <a:prstGeom prst="rect">
-            <a:avLst/>
-          </a:prstGeom>
-          <a:solidFill>
-            <a:srgbClr val="F05A46"/>
-          </a:solidFill>
-          <a:ln>
-            <a:noFill/>
-          </a:ln>
-          <a:effectLst/>
-        </p:spPr>
-        <p:style>
-          <a:lnRef idx="1">
-            <a:schemeClr val="accent1"/>
-          </a:lnRef>
-          <a:fillRef idx="3">
-            <a:schemeClr val="accent1"/>
-          </a:fillRef>
-          <a:effectRef idx="2">
-            <a:schemeClr val="accent1"/>
-          </a:effectRef>
-          <a:fontRef idx="minor">
-            <a:schemeClr val="lt1"/>
-          </a:fontRef>
-        </p:style>
-        <p:txBody>
-          <a:bodyPr rtlCol="0" anchor="ctr"/>
-          <a:lstStyle/>
-          <a:p>
-            <a:pPr algn="ctr"/>
-            <a:endParaRPr/>
-          </a:p>
-        </p:txBody>
-      </p:sp>
-      <p:sp>
-        <p:nvSpPr>
-          <p:cNvPr id="19" name="TextBox 18"/>
-          <p:cNvSpPr txBox="1"/>
-          <p:nvPr/>
-        </p:nvSpPr>
-        <p:spPr>
-          <a:xfrm>
-            <a:off x="8156448" y="3273552"/>
-            <a:ext cx="2816352" cy="365760"/>
+            <a:off x="3127248" y="3383280"/>
+            <a:ext cx="1609344" cy="502920"/>
           </a:xfrm>
           <a:prstGeom prst="rect">
             <a:avLst/>
@@ -33413,27 +32524,27 @@
               </a:spcAft>
             </a:pPr>
             <a:r>
-              <a:rPr sz="1600" b="1" i="0">
+              <a:rPr sz="1350" b="1" i="0">
                 <a:solidFill>
                   <a:srgbClr val="181D2B"/>
                 </a:solidFill>
                 <a:latin typeface="Helvetica Neue"/>
               </a:rPr>
-              <a:t>Technique</a:t>
-            </a:r>
-          </a:p>
-        </p:txBody>
-      </p:sp>
-      <p:sp>
-        <p:nvSpPr>
-          <p:cNvPr id="20" name="TextBox 19"/>
+              <a:t>Isolated</a:t>
+            </a:r>
+          </a:p>
+        </p:txBody>
+      </p:sp>
+      <p:sp>
+        <p:nvSpPr>
+          <p:cNvPr id="16" name="TextBox 15"/>
           <p:cNvSpPr txBox="1"/>
           <p:nvPr/>
         </p:nvSpPr>
         <p:spPr>
           <a:xfrm>
-            <a:off x="8156448" y="3639312"/>
-            <a:ext cx="2816352" cy="777240"/>
+            <a:off x="3127248" y="3886200"/>
+            <a:ext cx="1609344" cy="1005840"/>
           </a:xfrm>
           <a:prstGeom prst="rect">
             <a:avLst/>
@@ -33448,229 +32559,1030 @@
           <a:p>
             <a:pPr algn="l">
               <a:lnSpc>
-                <a:spcPct val="115000"/>
+                <a:spcPct val="120000"/>
               </a:lnSpc>
               <a:spcAft>
                 <a:spcPts val="0"/>
               </a:spcAft>
             </a:pPr>
             <a:r>
-              <a:rPr sz="1200" b="0" i="0">
+              <a:rPr sz="1050" b="0" i="0">
                 <a:solidFill>
                   <a:srgbClr val="181D2B"/>
                 </a:solidFill>
                 <a:latin typeface="Helvetica Neue"/>
               </a:rPr>
-              <a:t>Pensé par et pour les développeurs. Personne d'autre ne relira jamais un assertEquals.</a:t>
-            </a:r>
-          </a:p>
-        </p:txBody>
-      </p:sp>
-      <p:sp>
-        <p:nvSpPr>
-          <p:cNvPr id="21" name="TextBox 20"/>
-          <p:cNvSpPr txBox="1"/>
-          <p:nvPr/>
-        </p:nvSpPr>
-        <p:spPr>
-          <a:xfrm>
-            <a:off x="822960" y="5074920"/>
-            <a:ext cx="9966960" cy="822960"/>
-          </a:xfrm>
-          <a:prstGeom prst="rect">
-            <a:avLst/>
-          </a:prstGeom>
-          <a:noFill/>
-        </p:spPr>
-        <p:txBody>
-          <a:bodyPr wrap="square" lIns="0" tIns="0" rIns="0" bIns="0" anchor="t">
-            <a:spAutoFit/>
-          </a:bodyPr>
-          <a:lstStyle/>
+              <a:t>Indépendant de tout autre</a:t>
+            </a:r>
+          </a:p>
           <a:p>
             <a:pPr algn="l">
               <a:lnSpc>
-                <a:spcPct val="125000"/>
+                <a:spcPct val="120000"/>
               </a:lnSpc>
               <a:spcAft>
                 <a:spcPts val="0"/>
               </a:spcAft>
             </a:pPr>
             <a:r>
-              <a:rPr sz="1400" b="0" i="1" dirty="0">
+              <a:rPr sz="1050" b="0" i="0">
                 <a:solidFill>
                   <a:srgbClr val="181D2B"/>
                 </a:solidFill>
                 <a:latin typeface="Helvetica Neue"/>
               </a:rPr>
-              <a:t>Dans </a:t>
-            </a:r>
-            <a:r>
-              <a:rPr sz="1400" b="0" i="1" dirty="0" err="1">
-                <a:solidFill>
-                  <a:srgbClr val="181D2B"/>
-                </a:solidFill>
-                <a:latin typeface="Helvetica Neue"/>
-              </a:rPr>
-              <a:t>notre</a:t>
-            </a:r>
-            <a:r>
-              <a:rPr sz="1400" b="0" i="1" dirty="0">
-                <a:solidFill>
-                  <a:srgbClr val="181D2B"/>
-                </a:solidFill>
-                <a:latin typeface="Helvetica Neue"/>
-              </a:rPr>
-              <a:t> agenda </a:t>
-            </a:r>
-            <a:r>
-              <a:rPr sz="1400" b="0" i="1" dirty="0" err="1">
-                <a:solidFill>
-                  <a:srgbClr val="181D2B"/>
-                </a:solidFill>
-                <a:latin typeface="Helvetica Neue"/>
-              </a:rPr>
-              <a:t>malin</a:t>
-            </a:r>
-            <a:r>
-              <a:rPr sz="1400" b="0" i="1" dirty="0">
-                <a:solidFill>
-                  <a:srgbClr val="181D2B"/>
-                </a:solidFill>
-                <a:latin typeface="Helvetica Neue"/>
-              </a:rPr>
-              <a:t> : </a:t>
-            </a:r>
-            <a:r>
-              <a:rPr sz="1400" b="0" i="1" dirty="0" err="1">
-                <a:solidFill>
-                  <a:srgbClr val="181D2B"/>
-                </a:solidFill>
-                <a:latin typeface="Helvetica Neue"/>
-              </a:rPr>
-              <a:t>ConflictDetector</a:t>
-            </a:r>
-            <a:r>
-              <a:rPr sz="1400" b="0" i="1" dirty="0">
-                <a:solidFill>
-                  <a:srgbClr val="181D2B"/>
-                </a:solidFill>
-                <a:latin typeface="Helvetica Neue"/>
-              </a:rPr>
-              <a:t>, </a:t>
-            </a:r>
-            <a:r>
-              <a:rPr sz="1400" b="0" i="1" dirty="0" err="1">
-                <a:solidFill>
-                  <a:srgbClr val="181D2B"/>
-                </a:solidFill>
-                <a:latin typeface="Helvetica Neue"/>
-              </a:rPr>
-              <a:t>RecurrenceService</a:t>
-            </a:r>
-            <a:r>
-              <a:rPr sz="1400" b="0" i="1" dirty="0">
-                <a:solidFill>
-                  <a:srgbClr val="181D2B"/>
-                </a:solidFill>
-                <a:latin typeface="Helvetica Neue"/>
-              </a:rPr>
-              <a:t> — de la </a:t>
-            </a:r>
-            <a:r>
-              <a:rPr sz="1400" b="0" i="1" dirty="0" err="1">
-                <a:solidFill>
-                  <a:srgbClr val="181D2B"/>
-                </a:solidFill>
-                <a:latin typeface="Helvetica Neue"/>
-              </a:rPr>
-              <a:t>logique</a:t>
-            </a:r>
-            <a:endParaRPr sz="1400" b="0" i="1" dirty="0">
-              <a:solidFill>
-                <a:srgbClr val="181D2B"/>
-              </a:solidFill>
-              <a:latin typeface="Helvetica Neue"/>
-            </a:endParaRPr>
-          </a:p>
+              <a:t>test, de tout ordre.</a:t>
+            </a:r>
+          </a:p>
+        </p:txBody>
+      </p:sp>
+      <p:sp>
+        <p:nvSpPr>
+          <p:cNvPr id="17" name="Rounded Rectangle 16"/>
+          <p:cNvSpPr/>
+          <p:nvPr/>
+        </p:nvSpPr>
+        <p:spPr>
+          <a:xfrm>
+            <a:off x="5184648" y="2596896"/>
+            <a:ext cx="1938528" cy="2514600"/>
+          </a:xfrm>
+          <a:prstGeom prst="roundRect">
+            <a:avLst/>
+          </a:prstGeom>
+          <a:solidFill>
+            <a:srgbClr val="E7DCC1"/>
+          </a:solidFill>
+          <a:ln>
+            <a:noFill/>
+          </a:ln>
+          <a:effectLst/>
+        </p:spPr>
+        <p:style>
+          <a:lnRef idx="1">
+            <a:schemeClr val="accent1"/>
+          </a:lnRef>
+          <a:fillRef idx="3">
+            <a:schemeClr val="accent1"/>
+          </a:fillRef>
+          <a:effectRef idx="2">
+            <a:schemeClr val="accent1"/>
+          </a:effectRef>
+          <a:fontRef idx="minor">
+            <a:schemeClr val="lt1"/>
+          </a:fontRef>
+        </p:style>
+        <p:txBody>
+          <a:bodyPr rtlCol="0" anchor="ctr"/>
+          <a:lstStyle/>
+          <a:p>
+            <a:pPr algn="ctr"/>
+            <a:endParaRPr/>
+          </a:p>
+        </p:txBody>
+      </p:sp>
+      <p:sp>
+        <p:nvSpPr>
+          <p:cNvPr id="18" name="Rounded Rectangle 17"/>
+          <p:cNvSpPr/>
+          <p:nvPr/>
+        </p:nvSpPr>
+        <p:spPr>
+          <a:xfrm>
+            <a:off x="5102352" y="2514600"/>
+            <a:ext cx="1938528" cy="2514600"/>
+          </a:xfrm>
+          <a:prstGeom prst="roundRect">
+            <a:avLst/>
+          </a:prstGeom>
+          <a:solidFill>
+            <a:srgbClr val="F1E9D5"/>
+          </a:solidFill>
+          <a:ln>
+            <a:noFill/>
+          </a:ln>
+          <a:effectLst/>
+        </p:spPr>
+        <p:style>
+          <a:lnRef idx="1">
+            <a:schemeClr val="accent1"/>
+          </a:lnRef>
+          <a:fillRef idx="3">
+            <a:schemeClr val="accent1"/>
+          </a:fillRef>
+          <a:effectRef idx="2">
+            <a:schemeClr val="accent1"/>
+          </a:effectRef>
+          <a:fontRef idx="minor">
+            <a:schemeClr val="lt1"/>
+          </a:fontRef>
+        </p:style>
+        <p:txBody>
+          <a:bodyPr rtlCol="0" anchor="ctr"/>
+          <a:lstStyle/>
+          <a:p>
+            <a:pPr algn="ctr"/>
+            <a:endParaRPr/>
+          </a:p>
+        </p:txBody>
+      </p:sp>
+      <p:sp>
+        <p:nvSpPr>
+          <p:cNvPr id="19" name="Rectangle 18"/>
+          <p:cNvSpPr/>
+          <p:nvPr/>
+        </p:nvSpPr>
+        <p:spPr>
+          <a:xfrm>
+            <a:off x="5102352" y="2514600"/>
+            <a:ext cx="1938528" cy="82296"/>
+          </a:xfrm>
+          <a:prstGeom prst="rect">
+            <a:avLst/>
+          </a:prstGeom>
+          <a:solidFill>
+            <a:srgbClr val="9CC24C"/>
+          </a:solidFill>
+          <a:ln>
+            <a:noFill/>
+          </a:ln>
+          <a:effectLst/>
+        </p:spPr>
+        <p:style>
+          <a:lnRef idx="1">
+            <a:schemeClr val="accent1"/>
+          </a:lnRef>
+          <a:fillRef idx="3">
+            <a:schemeClr val="accent1"/>
+          </a:fillRef>
+          <a:effectRef idx="2">
+            <a:schemeClr val="accent1"/>
+          </a:effectRef>
+          <a:fontRef idx="minor">
+            <a:schemeClr val="lt1"/>
+          </a:fontRef>
+        </p:style>
+        <p:txBody>
+          <a:bodyPr rtlCol="0" anchor="ctr"/>
+          <a:lstStyle/>
+          <a:p>
+            <a:pPr algn="ctr"/>
+            <a:endParaRPr/>
+          </a:p>
+        </p:txBody>
+      </p:sp>
+      <p:sp>
+        <p:nvSpPr>
+          <p:cNvPr id="20" name="TextBox 19"/>
+          <p:cNvSpPr txBox="1"/>
+          <p:nvPr/>
+        </p:nvSpPr>
+        <p:spPr>
+          <a:xfrm>
+            <a:off x="5266944" y="2715768"/>
+            <a:ext cx="1609344" cy="548640"/>
+          </a:xfrm>
+          <a:prstGeom prst="rect">
+            <a:avLst/>
+          </a:prstGeom>
+          <a:noFill/>
+        </p:spPr>
+        <p:txBody>
+          <a:bodyPr wrap="square" lIns="0" tIns="0" rIns="0" bIns="0" anchor="t">
+            <a:spAutoFit/>
+          </a:bodyPr>
+          <a:lstStyle/>
           <a:p>
             <a:pPr algn="l">
               <a:lnSpc>
-                <a:spcPct val="125000"/>
+                <a:spcPct val="100000"/>
               </a:lnSpc>
               <a:spcAft>
                 <a:spcPts val="0"/>
               </a:spcAft>
             </a:pPr>
             <a:r>
-              <a:rPr sz="1400" b="0" i="1" dirty="0">
+              <a:rPr sz="3400" b="1" i="0">
+                <a:solidFill>
+                  <a:srgbClr val="546E22"/>
+                </a:solidFill>
+                <a:latin typeface="Helvetica Neue"/>
+              </a:rPr>
+              <a:t>R</a:t>
+            </a:r>
+          </a:p>
+        </p:txBody>
+      </p:sp>
+      <p:sp>
+        <p:nvSpPr>
+          <p:cNvPr id="21" name="TextBox 20"/>
+          <p:cNvSpPr txBox="1"/>
+          <p:nvPr/>
+        </p:nvSpPr>
+        <p:spPr>
+          <a:xfrm>
+            <a:off x="5266944" y="3383280"/>
+            <a:ext cx="1609344" cy="502920"/>
+          </a:xfrm>
+          <a:prstGeom prst="rect">
+            <a:avLst/>
+          </a:prstGeom>
+          <a:noFill/>
+        </p:spPr>
+        <p:txBody>
+          <a:bodyPr wrap="square" lIns="0" tIns="0" rIns="0" bIns="0" anchor="t">
+            <a:spAutoFit/>
+          </a:bodyPr>
+          <a:lstStyle/>
+          <a:p>
+            <a:pPr algn="l">
+              <a:lnSpc>
+                <a:spcPct val="100000"/>
+              </a:lnSpc>
+              <a:spcAft>
+                <a:spcPts val="0"/>
+              </a:spcAft>
+            </a:pPr>
+            <a:r>
+              <a:rPr sz="1350" b="1" i="0">
                 <a:solidFill>
                   <a:srgbClr val="181D2B"/>
                 </a:solidFill>
                 <a:latin typeface="Helvetica Neue"/>
               </a:rPr>
-              <a:t>pure, </a:t>
-            </a:r>
-            <a:r>
-              <a:rPr sz="1400" b="0" i="1" dirty="0" err="1">
+              <a:t>Repeatable</a:t>
+            </a:r>
+          </a:p>
+        </p:txBody>
+      </p:sp>
+      <p:sp>
+        <p:nvSpPr>
+          <p:cNvPr id="22" name="TextBox 21"/>
+          <p:cNvSpPr txBox="1"/>
+          <p:nvPr/>
+        </p:nvSpPr>
+        <p:spPr>
+          <a:xfrm>
+            <a:off x="5266944" y="3886200"/>
+            <a:ext cx="1609344" cy="1005840"/>
+          </a:xfrm>
+          <a:prstGeom prst="rect">
+            <a:avLst/>
+          </a:prstGeom>
+          <a:noFill/>
+        </p:spPr>
+        <p:txBody>
+          <a:bodyPr wrap="square" lIns="0" tIns="0" rIns="0" bIns="0" anchor="t">
+            <a:spAutoFit/>
+          </a:bodyPr>
+          <a:lstStyle/>
+          <a:p>
+            <a:pPr algn="l">
+              <a:lnSpc>
+                <a:spcPct val="120000"/>
+              </a:lnSpc>
+              <a:spcAft>
+                <a:spcPts val="0"/>
+              </a:spcAft>
+            </a:pPr>
+            <a:r>
+              <a:rPr sz="1050" b="0" i="0">
                 <a:solidFill>
                   <a:srgbClr val="181D2B"/>
                 </a:solidFill>
                 <a:latin typeface="Helvetica Neue"/>
               </a:rPr>
-              <a:t>testée</a:t>
-            </a:r>
-            <a:r>
-              <a:rPr sz="1400" b="0" i="1" dirty="0">
+              <a:t>Même résultat : votre machine,</a:t>
+            </a:r>
+          </a:p>
+          <a:p>
+            <a:pPr algn="l">
+              <a:lnSpc>
+                <a:spcPct val="120000"/>
+              </a:lnSpc>
+              <a:spcAft>
+                <a:spcPts val="0"/>
+              </a:spcAft>
+            </a:pPr>
+            <a:r>
+              <a:rPr sz="1050" b="0" i="0">
                 <a:solidFill>
                   <a:srgbClr val="181D2B"/>
                 </a:solidFill>
                 <a:latin typeface="Helvetica Neue"/>
               </a:rPr>
-              <a:t> sans jamais </a:t>
-            </a:r>
-            <a:r>
-              <a:rPr sz="1400" b="0" i="1" dirty="0" err="1">
+              <a:t>la CI, 3h du matin.</a:t>
+            </a:r>
+          </a:p>
+        </p:txBody>
+      </p:sp>
+      <p:sp>
+        <p:nvSpPr>
+          <p:cNvPr id="23" name="Rounded Rectangle 22"/>
+          <p:cNvSpPr/>
+          <p:nvPr/>
+        </p:nvSpPr>
+        <p:spPr>
+          <a:xfrm>
+            <a:off x="7324344" y="2596896"/>
+            <a:ext cx="1938528" cy="2514600"/>
+          </a:xfrm>
+          <a:prstGeom prst="roundRect">
+            <a:avLst/>
+          </a:prstGeom>
+          <a:solidFill>
+            <a:srgbClr val="E7DCC1"/>
+          </a:solidFill>
+          <a:ln>
+            <a:noFill/>
+          </a:ln>
+          <a:effectLst/>
+        </p:spPr>
+        <p:style>
+          <a:lnRef idx="1">
+            <a:schemeClr val="accent1"/>
+          </a:lnRef>
+          <a:fillRef idx="3">
+            <a:schemeClr val="accent1"/>
+          </a:fillRef>
+          <a:effectRef idx="2">
+            <a:schemeClr val="accent1"/>
+          </a:effectRef>
+          <a:fontRef idx="minor">
+            <a:schemeClr val="lt1"/>
+          </a:fontRef>
+        </p:style>
+        <p:txBody>
+          <a:bodyPr rtlCol="0" anchor="ctr"/>
+          <a:lstStyle/>
+          <a:p>
+            <a:pPr algn="ctr"/>
+            <a:endParaRPr/>
+          </a:p>
+        </p:txBody>
+      </p:sp>
+      <p:sp>
+        <p:nvSpPr>
+          <p:cNvPr id="24" name="Rounded Rectangle 23"/>
+          <p:cNvSpPr/>
+          <p:nvPr/>
+        </p:nvSpPr>
+        <p:spPr>
+          <a:xfrm>
+            <a:off x="7242048" y="2514600"/>
+            <a:ext cx="1938528" cy="2514600"/>
+          </a:xfrm>
+          <a:prstGeom prst="roundRect">
+            <a:avLst/>
+          </a:prstGeom>
+          <a:solidFill>
+            <a:srgbClr val="F1E9D5"/>
+          </a:solidFill>
+          <a:ln>
+            <a:noFill/>
+          </a:ln>
+          <a:effectLst/>
+        </p:spPr>
+        <p:style>
+          <a:lnRef idx="1">
+            <a:schemeClr val="accent1"/>
+          </a:lnRef>
+          <a:fillRef idx="3">
+            <a:schemeClr val="accent1"/>
+          </a:fillRef>
+          <a:effectRef idx="2">
+            <a:schemeClr val="accent1"/>
+          </a:effectRef>
+          <a:fontRef idx="minor">
+            <a:schemeClr val="lt1"/>
+          </a:fontRef>
+        </p:style>
+        <p:txBody>
+          <a:bodyPr rtlCol="0" anchor="ctr"/>
+          <a:lstStyle/>
+          <a:p>
+            <a:pPr algn="ctr"/>
+            <a:endParaRPr/>
+          </a:p>
+        </p:txBody>
+      </p:sp>
+      <p:sp>
+        <p:nvSpPr>
+          <p:cNvPr id="25" name="Rectangle 24"/>
+          <p:cNvSpPr/>
+          <p:nvPr/>
+        </p:nvSpPr>
+        <p:spPr>
+          <a:xfrm>
+            <a:off x="7242048" y="2514600"/>
+            <a:ext cx="1938528" cy="82296"/>
+          </a:xfrm>
+          <a:prstGeom prst="rect">
+            <a:avLst/>
+          </a:prstGeom>
+          <a:solidFill>
+            <a:srgbClr val="F05A46"/>
+          </a:solidFill>
+          <a:ln>
+            <a:noFill/>
+          </a:ln>
+          <a:effectLst/>
+        </p:spPr>
+        <p:style>
+          <a:lnRef idx="1">
+            <a:schemeClr val="accent1"/>
+          </a:lnRef>
+          <a:fillRef idx="3">
+            <a:schemeClr val="accent1"/>
+          </a:fillRef>
+          <a:effectRef idx="2">
+            <a:schemeClr val="accent1"/>
+          </a:effectRef>
+          <a:fontRef idx="minor">
+            <a:schemeClr val="lt1"/>
+          </a:fontRef>
+        </p:style>
+        <p:txBody>
+          <a:bodyPr rtlCol="0" anchor="ctr"/>
+          <a:lstStyle/>
+          <a:p>
+            <a:pPr algn="ctr"/>
+            <a:endParaRPr/>
+          </a:p>
+        </p:txBody>
+      </p:sp>
+      <p:sp>
+        <p:nvSpPr>
+          <p:cNvPr id="26" name="TextBox 25"/>
+          <p:cNvSpPr txBox="1"/>
+          <p:nvPr/>
+        </p:nvSpPr>
+        <p:spPr>
+          <a:xfrm>
+            <a:off x="7406640" y="2715768"/>
+            <a:ext cx="1609344" cy="548640"/>
+          </a:xfrm>
+          <a:prstGeom prst="rect">
+            <a:avLst/>
+          </a:prstGeom>
+          <a:noFill/>
+        </p:spPr>
+        <p:txBody>
+          <a:bodyPr wrap="square" lIns="0" tIns="0" rIns="0" bIns="0" anchor="t">
+            <a:spAutoFit/>
+          </a:bodyPr>
+          <a:lstStyle/>
+          <a:p>
+            <a:pPr algn="l">
+              <a:lnSpc>
+                <a:spcPct val="100000"/>
+              </a:lnSpc>
+              <a:spcAft>
+                <a:spcPts val="0"/>
+              </a:spcAft>
+            </a:pPr>
+            <a:r>
+              <a:rPr sz="3400" b="1" i="0">
+                <a:solidFill>
+                  <a:srgbClr val="A83322"/>
+                </a:solidFill>
+                <a:latin typeface="Helvetica Neue"/>
+              </a:rPr>
+              <a:t>S</a:t>
+            </a:r>
+          </a:p>
+        </p:txBody>
+      </p:sp>
+      <p:sp>
+        <p:nvSpPr>
+          <p:cNvPr id="27" name="TextBox 26"/>
+          <p:cNvSpPr txBox="1"/>
+          <p:nvPr/>
+        </p:nvSpPr>
+        <p:spPr>
+          <a:xfrm>
+            <a:off x="7406640" y="3383280"/>
+            <a:ext cx="1609344" cy="502920"/>
+          </a:xfrm>
+          <a:prstGeom prst="rect">
+            <a:avLst/>
+          </a:prstGeom>
+          <a:noFill/>
+        </p:spPr>
+        <p:txBody>
+          <a:bodyPr wrap="square" lIns="0" tIns="0" rIns="0" bIns="0" anchor="t">
+            <a:spAutoFit/>
+          </a:bodyPr>
+          <a:lstStyle/>
+          <a:p>
+            <a:pPr algn="l">
+              <a:lnSpc>
+                <a:spcPct val="100000"/>
+              </a:lnSpc>
+              <a:spcAft>
+                <a:spcPts val="0"/>
+              </a:spcAft>
+            </a:pPr>
+            <a:r>
+              <a:rPr sz="1350" b="1" i="0">
                 <a:solidFill>
                   <a:srgbClr val="181D2B"/>
                 </a:solidFill>
                 <a:latin typeface="Helvetica Neue"/>
               </a:rPr>
-              <a:t>démarrer</a:t>
-            </a:r>
-            <a:r>
-              <a:rPr sz="1400" b="0" i="1" dirty="0">
+              <a:t>Self-Validating</a:t>
+            </a:r>
+          </a:p>
+        </p:txBody>
+      </p:sp>
+      <p:sp>
+        <p:nvSpPr>
+          <p:cNvPr id="28" name="TextBox 27"/>
+          <p:cNvSpPr txBox="1"/>
+          <p:nvPr/>
+        </p:nvSpPr>
+        <p:spPr>
+          <a:xfrm>
+            <a:off x="7406640" y="3886200"/>
+            <a:ext cx="1609344" cy="1005840"/>
+          </a:xfrm>
+          <a:prstGeom prst="rect">
+            <a:avLst/>
+          </a:prstGeom>
+          <a:noFill/>
+        </p:spPr>
+        <p:txBody>
+          <a:bodyPr wrap="square" lIns="0" tIns="0" rIns="0" bIns="0" anchor="t">
+            <a:spAutoFit/>
+          </a:bodyPr>
+          <a:lstStyle/>
+          <a:p>
+            <a:pPr algn="l">
+              <a:lnSpc>
+                <a:spcPct val="120000"/>
+              </a:lnSpc>
+              <a:spcAft>
+                <a:spcPts val="0"/>
+              </a:spcAft>
+            </a:pPr>
+            <a:r>
+              <a:rPr sz="1050" b="0" i="0">
                 <a:solidFill>
                   <a:srgbClr val="181D2B"/>
                 </a:solidFill>
                 <a:latin typeface="Helvetica Neue"/>
               </a:rPr>
-              <a:t> </a:t>
-            </a:r>
-            <a:r>
-              <a:rPr sz="1400" b="0" i="1" dirty="0" err="1">
+              <a:t>Il dit lui-même s'il passe.</a:t>
+            </a:r>
+          </a:p>
+          <a:p>
+            <a:pPr algn="l">
+              <a:lnSpc>
+                <a:spcPct val="120000"/>
+              </a:lnSpc>
+              <a:spcAft>
+                <a:spcPts val="0"/>
+              </a:spcAft>
+            </a:pPr>
+            <a:r>
+              <a:rPr sz="1050" b="0" i="0">
                 <a:solidFill>
                   <a:srgbClr val="181D2B"/>
                 </a:solidFill>
                 <a:latin typeface="Helvetica Neue"/>
               </a:rPr>
-              <a:t>Quarkus</a:t>
-            </a:r>
-            <a:r>
-              <a:rPr sz="1400" b="0" i="1" dirty="0">
+              <a:t>Pas de log à relire.</a:t>
+            </a:r>
+          </a:p>
+        </p:txBody>
+      </p:sp>
+      <p:sp>
+        <p:nvSpPr>
+          <p:cNvPr id="29" name="Rounded Rectangle 28"/>
+          <p:cNvSpPr/>
+          <p:nvPr/>
+        </p:nvSpPr>
+        <p:spPr>
+          <a:xfrm>
+            <a:off x="9464040" y="2596896"/>
+            <a:ext cx="1938528" cy="2514600"/>
+          </a:xfrm>
+          <a:prstGeom prst="roundRect">
+            <a:avLst/>
+          </a:prstGeom>
+          <a:solidFill>
+            <a:srgbClr val="E7DCC1"/>
+          </a:solidFill>
+          <a:ln>
+            <a:noFill/>
+          </a:ln>
+          <a:effectLst/>
+        </p:spPr>
+        <p:style>
+          <a:lnRef idx="1">
+            <a:schemeClr val="accent1"/>
+          </a:lnRef>
+          <a:fillRef idx="3">
+            <a:schemeClr val="accent1"/>
+          </a:fillRef>
+          <a:effectRef idx="2">
+            <a:schemeClr val="accent1"/>
+          </a:effectRef>
+          <a:fontRef idx="minor">
+            <a:schemeClr val="lt1"/>
+          </a:fontRef>
+        </p:style>
+        <p:txBody>
+          <a:bodyPr rtlCol="0" anchor="ctr"/>
+          <a:lstStyle/>
+          <a:p>
+            <a:pPr algn="ctr"/>
+            <a:endParaRPr/>
+          </a:p>
+        </p:txBody>
+      </p:sp>
+      <p:sp>
+        <p:nvSpPr>
+          <p:cNvPr id="30" name="Rounded Rectangle 29"/>
+          <p:cNvSpPr/>
+          <p:nvPr/>
+        </p:nvSpPr>
+        <p:spPr>
+          <a:xfrm>
+            <a:off x="9381744" y="2514600"/>
+            <a:ext cx="1938528" cy="2514600"/>
+          </a:xfrm>
+          <a:prstGeom prst="roundRect">
+            <a:avLst/>
+          </a:prstGeom>
+          <a:solidFill>
+            <a:srgbClr val="F1E9D5"/>
+          </a:solidFill>
+          <a:ln>
+            <a:noFill/>
+          </a:ln>
+          <a:effectLst/>
+        </p:spPr>
+        <p:style>
+          <a:lnRef idx="1">
+            <a:schemeClr val="accent1"/>
+          </a:lnRef>
+          <a:fillRef idx="3">
+            <a:schemeClr val="accent1"/>
+          </a:fillRef>
+          <a:effectRef idx="2">
+            <a:schemeClr val="accent1"/>
+          </a:effectRef>
+          <a:fontRef idx="minor">
+            <a:schemeClr val="lt1"/>
+          </a:fontRef>
+        </p:style>
+        <p:txBody>
+          <a:bodyPr rtlCol="0" anchor="ctr"/>
+          <a:lstStyle/>
+          <a:p>
+            <a:pPr algn="ctr"/>
+            <a:endParaRPr/>
+          </a:p>
+        </p:txBody>
+      </p:sp>
+      <p:sp>
+        <p:nvSpPr>
+          <p:cNvPr id="31" name="Rectangle 30"/>
+          <p:cNvSpPr/>
+          <p:nvPr/>
+        </p:nvSpPr>
+        <p:spPr>
+          <a:xfrm>
+            <a:off x="9381744" y="2514600"/>
+            <a:ext cx="1938528" cy="82296"/>
+          </a:xfrm>
+          <a:prstGeom prst="rect">
+            <a:avLst/>
+          </a:prstGeom>
+          <a:solidFill>
+            <a:srgbClr val="3E6BE0"/>
+          </a:solidFill>
+          <a:ln>
+            <a:noFill/>
+          </a:ln>
+          <a:effectLst/>
+        </p:spPr>
+        <p:style>
+          <a:lnRef idx="1">
+            <a:schemeClr val="accent1"/>
+          </a:lnRef>
+          <a:fillRef idx="3">
+            <a:schemeClr val="accent1"/>
+          </a:fillRef>
+          <a:effectRef idx="2">
+            <a:schemeClr val="accent1"/>
+          </a:effectRef>
+          <a:fontRef idx="minor">
+            <a:schemeClr val="lt1"/>
+          </a:fontRef>
+        </p:style>
+        <p:txBody>
+          <a:bodyPr rtlCol="0" anchor="ctr"/>
+          <a:lstStyle/>
+          <a:p>
+            <a:pPr algn="ctr"/>
+            <a:endParaRPr/>
+          </a:p>
+        </p:txBody>
+      </p:sp>
+      <p:sp>
+        <p:nvSpPr>
+          <p:cNvPr id="32" name="TextBox 31"/>
+          <p:cNvSpPr txBox="1"/>
+          <p:nvPr/>
+        </p:nvSpPr>
+        <p:spPr>
+          <a:xfrm>
+            <a:off x="9546336" y="2715768"/>
+            <a:ext cx="1609344" cy="548640"/>
+          </a:xfrm>
+          <a:prstGeom prst="rect">
+            <a:avLst/>
+          </a:prstGeom>
+          <a:noFill/>
+        </p:spPr>
+        <p:txBody>
+          <a:bodyPr wrap="square" lIns="0" tIns="0" rIns="0" bIns="0" anchor="t">
+            <a:spAutoFit/>
+          </a:bodyPr>
+          <a:lstStyle/>
+          <a:p>
+            <a:pPr algn="l">
+              <a:lnSpc>
+                <a:spcPct val="100000"/>
+              </a:lnSpc>
+              <a:spcAft>
+                <a:spcPts val="0"/>
+              </a:spcAft>
+            </a:pPr>
+            <a:r>
+              <a:rPr sz="3400" b="1" i="0">
+                <a:solidFill>
+                  <a:srgbClr val="22409C"/>
+                </a:solidFill>
+                <a:latin typeface="Helvetica Neue"/>
+              </a:rPr>
+              <a:t>T</a:t>
+            </a:r>
+          </a:p>
+        </p:txBody>
+      </p:sp>
+      <p:sp>
+        <p:nvSpPr>
+          <p:cNvPr id="33" name="TextBox 32"/>
+          <p:cNvSpPr txBox="1"/>
+          <p:nvPr/>
+        </p:nvSpPr>
+        <p:spPr>
+          <a:xfrm>
+            <a:off x="9546336" y="3383280"/>
+            <a:ext cx="1609344" cy="502920"/>
+          </a:xfrm>
+          <a:prstGeom prst="rect">
+            <a:avLst/>
+          </a:prstGeom>
+          <a:noFill/>
+        </p:spPr>
+        <p:txBody>
+          <a:bodyPr wrap="square" lIns="0" tIns="0" rIns="0" bIns="0" anchor="t">
+            <a:spAutoFit/>
+          </a:bodyPr>
+          <a:lstStyle/>
+          <a:p>
+            <a:pPr algn="l">
+              <a:lnSpc>
+                <a:spcPct val="100000"/>
+              </a:lnSpc>
+              <a:spcAft>
+                <a:spcPts val="0"/>
+              </a:spcAft>
+            </a:pPr>
+            <a:r>
+              <a:rPr sz="1350" b="1" i="0">
                 <a:solidFill>
                   <a:srgbClr val="181D2B"/>
                 </a:solidFill>
                 <a:latin typeface="Helvetica Neue"/>
               </a:rPr>
-              <a:t>.</a:t>
-            </a:r>
-          </a:p>
-        </p:txBody>
-      </p:sp>
-      <p:sp>
-        <p:nvSpPr>
-          <p:cNvPr id="22" name="Rounded Rectangle 21"/>
+              <a:t>Timely</a:t>
+            </a:r>
+          </a:p>
+        </p:txBody>
+      </p:sp>
+      <p:sp>
+        <p:nvSpPr>
+          <p:cNvPr id="34" name="TextBox 33"/>
+          <p:cNvSpPr txBox="1"/>
+          <p:nvPr/>
+        </p:nvSpPr>
+        <p:spPr>
+          <a:xfrm>
+            <a:off x="9546336" y="3886200"/>
+            <a:ext cx="1609344" cy="1005840"/>
+          </a:xfrm>
+          <a:prstGeom prst="rect">
+            <a:avLst/>
+          </a:prstGeom>
+          <a:noFill/>
+        </p:spPr>
+        <p:txBody>
+          <a:bodyPr wrap="square" lIns="0" tIns="0" rIns="0" bIns="0" anchor="t">
+            <a:spAutoFit/>
+          </a:bodyPr>
+          <a:lstStyle/>
+          <a:p>
+            <a:pPr algn="l">
+              <a:lnSpc>
+                <a:spcPct val="120000"/>
+              </a:lnSpc>
+              <a:spcAft>
+                <a:spcPts val="0"/>
+              </a:spcAft>
+            </a:pPr>
+            <a:r>
+              <a:rPr sz="1050" b="0" i="0">
+                <a:solidFill>
+                  <a:srgbClr val="181D2B"/>
+                </a:solidFill>
+                <a:latin typeface="Helvetica Neue"/>
+              </a:rPr>
+              <a:t>Écrit avec le code — pas trois</a:t>
+            </a:r>
+          </a:p>
+          <a:p>
+            <a:pPr algn="l">
+              <a:lnSpc>
+                <a:spcPct val="120000"/>
+              </a:lnSpc>
+              <a:spcAft>
+                <a:spcPts val="0"/>
+              </a:spcAft>
+            </a:pPr>
+            <a:r>
+              <a:rPr sz="1050" b="0" i="0">
+                <a:solidFill>
+                  <a:srgbClr val="181D2B"/>
+                </a:solidFill>
+                <a:latin typeface="Helvetica Neue"/>
+              </a:rPr>
+              <a:t>sprints après (jamais).</a:t>
+            </a:r>
+          </a:p>
+        </p:txBody>
+      </p:sp>
+      <p:sp>
+        <p:nvSpPr>
+          <p:cNvPr id="35" name="Rounded Rectangle 34"/>
+          <p:cNvSpPr/>
+          <p:nvPr/>
+        </p:nvSpPr>
+        <p:spPr>
+          <a:xfrm>
+            <a:off x="822960" y="5349240"/>
+            <a:ext cx="10515600" cy="777240"/>
+          </a:xfrm>
+          <a:prstGeom prst="roundRect">
+            <a:avLst/>
+          </a:prstGeom>
+          <a:solidFill>
+            <a:srgbClr val="FFD23F"/>
+          </a:solidFill>
+          <a:ln>
+            <a:noFill/>
+          </a:ln>
+          <a:effectLst/>
+        </p:spPr>
+        <p:style>
+          <a:lnRef idx="1">
+            <a:schemeClr val="accent1"/>
+          </a:lnRef>
+          <a:fillRef idx="3">
+            <a:schemeClr val="accent1"/>
+          </a:fillRef>
+          <a:effectRef idx="2">
+            <a:schemeClr val="accent1"/>
+          </a:effectRef>
+          <a:fontRef idx="minor">
+            <a:schemeClr val="lt1"/>
+          </a:fontRef>
+        </p:style>
+        <p:txBody>
+          <a:bodyPr wrap="square" lIns="256032" tIns="128016" rIns="256032" bIns="128016" rtlCol="0" anchor="ctr"/>
+          <a:lstStyle/>
+          <a:p>
+            <a:pPr algn="ctr">
+              <a:lnSpc>
+                <a:spcPct val="115000"/>
+              </a:lnSpc>
+            </a:pPr>
+            <a:r>
+              <a:rPr sz="1300" b="1" i="0">
+                <a:solidFill>
+                  <a:srgbClr val="0C111F"/>
+                </a:solidFill>
+                <a:latin typeface="Helvetica Neue"/>
+              </a:rPr>
+              <a:t>SOLID vous dit comment ranger le code pour qu'il reste maintenable. FIRST vous dit comment ranger les tests pour qu'on continue à leur faire confiance.</a:t>
+            </a:r>
+          </a:p>
+        </p:txBody>
+      </p:sp>
+      <p:sp>
+        <p:nvSpPr>
+          <p:cNvPr id="36" name="Isosceles Triangle 35"/>
+          <p:cNvSpPr/>
+          <p:nvPr/>
+        </p:nvSpPr>
+        <p:spPr>
+          <a:xfrm>
+            <a:off x="1143000" y="5111496"/>
+            <a:ext cx="256032" cy="256032"/>
+          </a:xfrm>
+          <a:prstGeom prst="triangle">
+            <a:avLst/>
+          </a:prstGeom>
+          <a:solidFill>
+            <a:srgbClr val="FFD23F"/>
+          </a:solidFill>
+          <a:ln>
+            <a:noFill/>
+          </a:ln>
+          <a:effectLst/>
+        </p:spPr>
+        <p:style>
+          <a:lnRef idx="1">
+            <a:schemeClr val="accent1"/>
+          </a:lnRef>
+          <a:fillRef idx="3">
+            <a:schemeClr val="accent1"/>
+          </a:fillRef>
+          <a:effectRef idx="2">
+            <a:schemeClr val="accent1"/>
+          </a:effectRef>
+          <a:fontRef idx="minor">
+            <a:schemeClr val="lt1"/>
+          </a:fontRef>
+        </p:style>
+        <p:txBody>
+          <a:bodyPr rtlCol="0" anchor="ctr"/>
+          <a:lstStyle/>
+          <a:p>
+            <a:pPr algn="ctr"/>
+            <a:endParaRPr/>
+          </a:p>
+        </p:txBody>
+      </p:sp>
+      <p:sp>
+        <p:nvSpPr>
+          <p:cNvPr id="37" name="TextBox 36"/>
+          <p:cNvSpPr txBox="1"/>
+          <p:nvPr/>
+        </p:nvSpPr>
+        <p:spPr>
+          <a:xfrm>
+            <a:off x="822960" y="6263640"/>
+            <a:ext cx="10515600" cy="320040"/>
+          </a:xfrm>
+          <a:prstGeom prst="rect">
+            <a:avLst/>
+          </a:prstGeom>
+          <a:noFill/>
+        </p:spPr>
+        <p:txBody>
+          <a:bodyPr wrap="square" lIns="0" tIns="0" rIns="0" bIns="0" anchor="t">
+            <a:spAutoFit/>
+          </a:bodyPr>
+          <a:lstStyle/>
+          <a:p>
+            <a:pPr algn="l">
+              <a:lnSpc>
+                <a:spcPct val="100000"/>
+              </a:lnSpc>
+              <a:spcAft>
+                <a:spcPts val="0"/>
+              </a:spcAft>
+            </a:pPr>
+            <a:r>
+              <a:rPr sz="1000" b="0" i="1">
+                <a:solidFill>
+                  <a:srgbClr val="5C6272"/>
+                </a:solidFill>
+                <a:latin typeface="Helvetica Neue"/>
+              </a:rPr>
+              <a:t>Pour mémoire : SOLID = Single responsibility · Open/closed · Liskov substitution · Interface segregation · Dependency inversion.</a:t>
+            </a:r>
+          </a:p>
+        </p:txBody>
+      </p:sp>
+      <p:sp>
+        <p:nvSpPr>
+          <p:cNvPr id="38" name="Rounded Rectangle 37"/>
           <p:cNvSpPr/>
           <p:nvPr/>
         </p:nvSpPr>
@@ -33716,14 +33628,14 @@
                 </a:solidFill>
                 <a:latin typeface="Helvetica Neue"/>
               </a:rPr>
-              <a:t>08/29</a:t>
-            </a:r>
-          </a:p>
-        </p:txBody>
-      </p:sp>
-      <p:sp>
-        <p:nvSpPr>
-          <p:cNvPr id="23" name="TextBox 22"/>
+              <a:t>10/29</a:t>
+            </a:r>
+          </a:p>
+        </p:txBody>
+      </p:sp>
+      <p:sp>
+        <p:nvSpPr>
+          <p:cNvPr id="39" name="TextBox 38"/>
           <p:cNvSpPr txBox="1"/>
           <p:nvPr/>
         </p:nvSpPr>
@@ -33892,7 +33804,7 @@
                 </a:solidFill>
                 <a:latin typeface="Helvetica Neue"/>
               </a:rPr>
-              <a:t>JUNIT — EN ACTION</a:t>
+              <a:t>ZOOM — JUNIT</a:t>
             </a:r>
           </a:p>
         </p:txBody>
@@ -33906,7 +33818,7 @@
         <p:spPr>
           <a:xfrm>
             <a:off x="822960" y="1051560"/>
-            <a:ext cx="10058400" cy="822960"/>
+            <a:ext cx="10058400" cy="1005840"/>
           </a:xfrm>
           <a:prstGeom prst="rect">
             <a:avLst/>
@@ -33928,33 +33840,94 @@
               </a:spcAft>
             </a:pPr>
             <a:r>
-              <a:rPr sz="3000" b="1" i="0">
+              <a:rPr sz="3200" b="1" i="0">
                 <a:solidFill>
                   <a:srgbClr val="181D2B"/>
                 </a:solidFill>
                 <a:latin typeface="Helvetica Neue"/>
               </a:rPr>
-              <a:t>Viser juste, vite</a:t>
-            </a:r>
-          </a:p>
-        </p:txBody>
-      </p:sp>
-      <p:sp>
-        <p:nvSpPr>
-          <p:cNvPr id="5" name="Rounded Rectangle 4"/>
-          <p:cNvSpPr/>
-          <p:nvPr/>
-        </p:nvSpPr>
-        <p:spPr>
-          <a:xfrm>
-            <a:off x="822960" y="1965960"/>
-            <a:ext cx="10515600" cy="2743200"/>
+              <a:t>Le microscope</a:t>
+            </a:r>
+          </a:p>
+        </p:txBody>
+      </p:sp>
+      <p:sp>
+        <p:nvSpPr>
+          <p:cNvPr id="5" name="TextBox 4"/>
+          <p:cNvSpPr txBox="1"/>
+          <p:nvPr/>
+        </p:nvSpPr>
+        <p:spPr>
+          <a:xfrm>
+            <a:off x="822960" y="1874519"/>
+            <a:ext cx="9966960" cy="822960"/>
+          </a:xfrm>
+          <a:prstGeom prst="rect">
+            <a:avLst/>
+          </a:prstGeom>
+          <a:noFill/>
+        </p:spPr>
+        <p:txBody>
+          <a:bodyPr wrap="square" lIns="0" tIns="0" rIns="0" bIns="0" anchor="t">
+            <a:spAutoFit/>
+          </a:bodyPr>
+          <a:lstStyle/>
+          <a:p>
+            <a:pPr algn="l">
+              <a:lnSpc>
+                <a:spcPct val="130000"/>
+              </a:lnSpc>
+              <a:spcAft>
+                <a:spcPts val="0"/>
+              </a:spcAft>
+            </a:pPr>
+            <a:r>
+              <a:rPr sz="1500" b="0" i="0">
+                <a:solidFill>
+                  <a:srgbClr val="181D2B"/>
+                </a:solidFill>
+                <a:latin typeface="Helvetica Neue"/>
+              </a:rPr>
+              <a:t>JUnit teste une unité de code isolée — une méthode, une classe — sans lancer</a:t>
+            </a:r>
+          </a:p>
+          <a:p>
+            <a:pPr algn="l">
+              <a:lnSpc>
+                <a:spcPct val="130000"/>
+              </a:lnSpc>
+              <a:spcAft>
+                <a:spcPts val="0"/>
+              </a:spcAft>
+            </a:pPr>
+            <a:r>
+              <a:rPr sz="1500" b="0" i="0">
+                <a:solidFill>
+                  <a:srgbClr val="181D2B"/>
+                </a:solidFill>
+                <a:latin typeface="Helvetica Neue"/>
+              </a:rPr>
+              <a:t>toute l'application. C'est rapide, précis, et ça ne pardonne rien.</a:t>
+            </a:r>
+          </a:p>
+        </p:txBody>
+      </p:sp>
+      <p:sp>
+        <p:nvSpPr>
+          <p:cNvPr id="6" name="Rounded Rectangle 5"/>
+          <p:cNvSpPr/>
+          <p:nvPr/>
+        </p:nvSpPr>
+        <p:spPr>
+          <a:xfrm>
+            <a:off x="905256" y="3145536"/>
+            <a:ext cx="3273552" cy="1417320"/>
           </a:xfrm>
           <a:prstGeom prst="roundRect">
             <a:avLst/>
           </a:prstGeom>
           <a:solidFill>
-            <a:srgbClr val="0C111F"/>
+            <a:srgbClr val="E7DCC1"/>
           </a:solidFill>
           <a:ln>
             <a:noFill/>
@@ -33986,20 +33959,20 @@
       </p:sp>
       <p:sp>
         <p:nvSpPr>
-          <p:cNvPr id="6" name="Oval 5"/>
-          <p:cNvSpPr/>
-          <p:nvPr/>
-        </p:nvSpPr>
-        <p:spPr>
-          <a:xfrm>
-            <a:off x="1024128" y="2093976"/>
-            <a:ext cx="109728" cy="109728"/>
-          </a:xfrm>
-          <a:prstGeom prst="ellipse">
-            <a:avLst/>
-          </a:prstGeom>
-          <a:solidFill>
-            <a:srgbClr val="F05A46"/>
+          <p:cNvPr id="7" name="Rounded Rectangle 6"/>
+          <p:cNvSpPr/>
+          <p:nvPr/>
+        </p:nvSpPr>
+        <p:spPr>
+          <a:xfrm>
+            <a:off x="822960" y="3063240"/>
+            <a:ext cx="3273552" cy="1417320"/>
+          </a:xfrm>
+          <a:prstGeom prst="roundRect">
+            <a:avLst/>
+          </a:prstGeom>
+          <a:solidFill>
+            <a:srgbClr val="F1E9D5"/>
           </a:solidFill>
           <a:ln>
             <a:noFill/>
@@ -34031,65 +34004,20 @@
       </p:sp>
       <p:sp>
         <p:nvSpPr>
-          <p:cNvPr id="7" name="Oval 6"/>
-          <p:cNvSpPr/>
-          <p:nvPr/>
-        </p:nvSpPr>
-        <p:spPr>
-          <a:xfrm>
-            <a:off x="1243584" y="2093976"/>
-            <a:ext cx="109728" cy="109728"/>
-          </a:xfrm>
-          <a:prstGeom prst="ellipse">
-            <a:avLst/>
-          </a:prstGeom>
-          <a:solidFill>
-            <a:srgbClr val="F0A72E"/>
-          </a:solidFill>
-          <a:ln>
-            <a:noFill/>
-          </a:ln>
-          <a:effectLst/>
-        </p:spPr>
-        <p:style>
-          <a:lnRef idx="1">
-            <a:schemeClr val="accent1"/>
-          </a:lnRef>
-          <a:fillRef idx="3">
-            <a:schemeClr val="accent1"/>
-          </a:fillRef>
-          <a:effectRef idx="2">
-            <a:schemeClr val="accent1"/>
-          </a:effectRef>
-          <a:fontRef idx="minor">
-            <a:schemeClr val="lt1"/>
-          </a:fontRef>
-        </p:style>
-        <p:txBody>
-          <a:bodyPr rtlCol="0" anchor="ctr"/>
-          <a:lstStyle/>
-          <a:p>
-            <a:pPr algn="ctr"/>
-            <a:endParaRPr/>
-          </a:p>
-        </p:txBody>
-      </p:sp>
-      <p:sp>
-        <p:nvSpPr>
-          <p:cNvPr id="8" name="Oval 7"/>
-          <p:cNvSpPr/>
-          <p:nvPr/>
-        </p:nvSpPr>
-        <p:spPr>
-          <a:xfrm>
-            <a:off x="1463040" y="2093976"/>
-            <a:ext cx="109728" cy="109728"/>
-          </a:xfrm>
-          <a:prstGeom prst="ellipse">
-            <a:avLst/>
-          </a:prstGeom>
-          <a:solidFill>
-            <a:srgbClr val="5BC26B"/>
+          <p:cNvPr id="8" name="Rectangle 7"/>
+          <p:cNvSpPr/>
+          <p:nvPr/>
+        </p:nvSpPr>
+        <p:spPr>
+          <a:xfrm>
+            <a:off x="822960" y="3063240"/>
+            <a:ext cx="73152" cy="1417320"/>
+          </a:xfrm>
+          <a:prstGeom prst="rect">
+            <a:avLst/>
+          </a:prstGeom>
+          <a:solidFill>
+            <a:srgbClr val="2EB0A0"/>
           </a:solidFill>
           <a:ln>
             <a:noFill/>
@@ -34127,8 +34055,530 @@
         </p:nvSpPr>
         <p:spPr>
           <a:xfrm>
-            <a:off x="1143000" y="2441448"/>
-            <a:ext cx="9875520" cy="2194560"/>
+            <a:off x="1097280" y="3273552"/>
+            <a:ext cx="2816352" cy="365760"/>
+          </a:xfrm>
+          <a:prstGeom prst="rect">
+            <a:avLst/>
+          </a:prstGeom>
+          <a:noFill/>
+        </p:spPr>
+        <p:txBody>
+          <a:bodyPr wrap="square" lIns="0" tIns="0" rIns="0" bIns="0" anchor="t">
+            <a:spAutoFit/>
+          </a:bodyPr>
+          <a:lstStyle/>
+          <a:p>
+            <a:pPr algn="l">
+              <a:lnSpc>
+                <a:spcPct val="100000"/>
+              </a:lnSpc>
+              <a:spcAft>
+                <a:spcPts val="0"/>
+              </a:spcAft>
+            </a:pPr>
+            <a:r>
+              <a:rPr sz="1600" b="1" i="0">
+                <a:solidFill>
+                  <a:srgbClr val="181D2B"/>
+                </a:solidFill>
+                <a:latin typeface="Helvetica Neue"/>
+              </a:rPr>
+              <a:t>Rapide</a:t>
+            </a:r>
+          </a:p>
+        </p:txBody>
+      </p:sp>
+      <p:sp>
+        <p:nvSpPr>
+          <p:cNvPr id="10" name="TextBox 9"/>
+          <p:cNvSpPr txBox="1"/>
+          <p:nvPr/>
+        </p:nvSpPr>
+        <p:spPr>
+          <a:xfrm>
+            <a:off x="1097280" y="3639312"/>
+            <a:ext cx="2816352" cy="777240"/>
+          </a:xfrm>
+          <a:prstGeom prst="rect">
+            <a:avLst/>
+          </a:prstGeom>
+          <a:noFill/>
+        </p:spPr>
+        <p:txBody>
+          <a:bodyPr wrap="square" lIns="0" tIns="0" rIns="0" bIns="0" anchor="t">
+            <a:spAutoFit/>
+          </a:bodyPr>
+          <a:lstStyle/>
+          <a:p>
+            <a:pPr algn="l">
+              <a:lnSpc>
+                <a:spcPct val="115000"/>
+              </a:lnSpc>
+              <a:spcAft>
+                <a:spcPts val="0"/>
+              </a:spcAft>
+            </a:pPr>
+            <a:r>
+              <a:rPr sz="1200" b="0" i="0">
+                <a:solidFill>
+                  <a:srgbClr val="181D2B"/>
+                </a:solidFill>
+                <a:latin typeface="Helvetica Neue"/>
+              </a:rPr>
+              <a:t>Des milliers de tests en quelques secondes. Votre café, lui, met plus longtemps.</a:t>
+            </a:r>
+          </a:p>
+        </p:txBody>
+      </p:sp>
+      <p:sp>
+        <p:nvSpPr>
+          <p:cNvPr id="11" name="Rounded Rectangle 10"/>
+          <p:cNvSpPr/>
+          <p:nvPr/>
+        </p:nvSpPr>
+        <p:spPr>
+          <a:xfrm>
+            <a:off x="4434840" y="3145536"/>
+            <a:ext cx="3273552" cy="1417320"/>
+          </a:xfrm>
+          <a:prstGeom prst="roundRect">
+            <a:avLst/>
+          </a:prstGeom>
+          <a:solidFill>
+            <a:srgbClr val="E7DCC1"/>
+          </a:solidFill>
+          <a:ln>
+            <a:noFill/>
+          </a:ln>
+          <a:effectLst/>
+        </p:spPr>
+        <p:style>
+          <a:lnRef idx="1">
+            <a:schemeClr val="accent1"/>
+          </a:lnRef>
+          <a:fillRef idx="3">
+            <a:schemeClr val="accent1"/>
+          </a:fillRef>
+          <a:effectRef idx="2">
+            <a:schemeClr val="accent1"/>
+          </a:effectRef>
+          <a:fontRef idx="minor">
+            <a:schemeClr val="lt1"/>
+          </a:fontRef>
+        </p:style>
+        <p:txBody>
+          <a:bodyPr rtlCol="0" anchor="ctr"/>
+          <a:lstStyle/>
+          <a:p>
+            <a:pPr algn="ctr"/>
+            <a:endParaRPr/>
+          </a:p>
+        </p:txBody>
+      </p:sp>
+      <p:sp>
+        <p:nvSpPr>
+          <p:cNvPr id="12" name="Rounded Rectangle 11"/>
+          <p:cNvSpPr/>
+          <p:nvPr/>
+        </p:nvSpPr>
+        <p:spPr>
+          <a:xfrm>
+            <a:off x="4352544" y="3063240"/>
+            <a:ext cx="3273552" cy="1417320"/>
+          </a:xfrm>
+          <a:prstGeom prst="roundRect">
+            <a:avLst/>
+          </a:prstGeom>
+          <a:solidFill>
+            <a:srgbClr val="F1E9D5"/>
+          </a:solidFill>
+          <a:ln>
+            <a:noFill/>
+          </a:ln>
+          <a:effectLst/>
+        </p:spPr>
+        <p:style>
+          <a:lnRef idx="1">
+            <a:schemeClr val="accent1"/>
+          </a:lnRef>
+          <a:fillRef idx="3">
+            <a:schemeClr val="accent1"/>
+          </a:fillRef>
+          <a:effectRef idx="2">
+            <a:schemeClr val="accent1"/>
+          </a:effectRef>
+          <a:fontRef idx="minor">
+            <a:schemeClr val="lt1"/>
+          </a:fontRef>
+        </p:style>
+        <p:txBody>
+          <a:bodyPr rtlCol="0" anchor="ctr"/>
+          <a:lstStyle/>
+          <a:p>
+            <a:pPr algn="ctr"/>
+            <a:endParaRPr/>
+          </a:p>
+        </p:txBody>
+      </p:sp>
+      <p:sp>
+        <p:nvSpPr>
+          <p:cNvPr id="13" name="Rectangle 12"/>
+          <p:cNvSpPr/>
+          <p:nvPr/>
+        </p:nvSpPr>
+        <p:spPr>
+          <a:xfrm>
+            <a:off x="4352544" y="3063240"/>
+            <a:ext cx="73152" cy="1417320"/>
+          </a:xfrm>
+          <a:prstGeom prst="rect">
+            <a:avLst/>
+          </a:prstGeom>
+          <a:solidFill>
+            <a:srgbClr val="F0A72E"/>
+          </a:solidFill>
+          <a:ln>
+            <a:noFill/>
+          </a:ln>
+          <a:effectLst/>
+        </p:spPr>
+        <p:style>
+          <a:lnRef idx="1">
+            <a:schemeClr val="accent1"/>
+          </a:lnRef>
+          <a:fillRef idx="3">
+            <a:schemeClr val="accent1"/>
+          </a:fillRef>
+          <a:effectRef idx="2">
+            <a:schemeClr val="accent1"/>
+          </a:effectRef>
+          <a:fontRef idx="minor">
+            <a:schemeClr val="lt1"/>
+          </a:fontRef>
+        </p:style>
+        <p:txBody>
+          <a:bodyPr rtlCol="0" anchor="ctr"/>
+          <a:lstStyle/>
+          <a:p>
+            <a:pPr algn="ctr"/>
+            <a:endParaRPr/>
+          </a:p>
+        </p:txBody>
+      </p:sp>
+      <p:sp>
+        <p:nvSpPr>
+          <p:cNvPr id="14" name="TextBox 13"/>
+          <p:cNvSpPr txBox="1"/>
+          <p:nvPr/>
+        </p:nvSpPr>
+        <p:spPr>
+          <a:xfrm>
+            <a:off x="4626864" y="3273552"/>
+            <a:ext cx="2816352" cy="365760"/>
+          </a:xfrm>
+          <a:prstGeom prst="rect">
+            <a:avLst/>
+          </a:prstGeom>
+          <a:noFill/>
+        </p:spPr>
+        <p:txBody>
+          <a:bodyPr wrap="square" lIns="0" tIns="0" rIns="0" bIns="0" anchor="t">
+            <a:spAutoFit/>
+          </a:bodyPr>
+          <a:lstStyle/>
+          <a:p>
+            <a:pPr algn="l">
+              <a:lnSpc>
+                <a:spcPct val="100000"/>
+              </a:lnSpc>
+              <a:spcAft>
+                <a:spcPts val="0"/>
+              </a:spcAft>
+            </a:pPr>
+            <a:r>
+              <a:rPr sz="1600" b="1" i="0">
+                <a:solidFill>
+                  <a:srgbClr val="181D2B"/>
+                </a:solidFill>
+                <a:latin typeface="Helvetica Neue"/>
+              </a:rPr>
+              <a:t>Isolé</a:t>
+            </a:r>
+          </a:p>
+        </p:txBody>
+      </p:sp>
+      <p:sp>
+        <p:nvSpPr>
+          <p:cNvPr id="15" name="TextBox 14"/>
+          <p:cNvSpPr txBox="1"/>
+          <p:nvPr/>
+        </p:nvSpPr>
+        <p:spPr>
+          <a:xfrm>
+            <a:off x="4626864" y="3639312"/>
+            <a:ext cx="2816352" cy="777240"/>
+          </a:xfrm>
+          <a:prstGeom prst="rect">
+            <a:avLst/>
+          </a:prstGeom>
+          <a:noFill/>
+        </p:spPr>
+        <p:txBody>
+          <a:bodyPr wrap="square" lIns="0" tIns="0" rIns="0" bIns="0" anchor="t">
+            <a:spAutoFit/>
+          </a:bodyPr>
+          <a:lstStyle/>
+          <a:p>
+            <a:pPr algn="l">
+              <a:lnSpc>
+                <a:spcPct val="115000"/>
+              </a:lnSpc>
+              <a:spcAft>
+                <a:spcPts val="0"/>
+              </a:spcAft>
+            </a:pPr>
+            <a:r>
+              <a:rPr sz="1200" b="0" i="0">
+                <a:solidFill>
+                  <a:srgbClr val="181D2B"/>
+                </a:solidFill>
+                <a:latin typeface="Helvetica Neue"/>
+              </a:rPr>
+              <a:t>Pas de serveur, pas de réseau, pas de surprise. Le rêve, quoi.</a:t>
+            </a:r>
+          </a:p>
+        </p:txBody>
+      </p:sp>
+      <p:sp>
+        <p:nvSpPr>
+          <p:cNvPr id="16" name="Rounded Rectangle 15"/>
+          <p:cNvSpPr/>
+          <p:nvPr/>
+        </p:nvSpPr>
+        <p:spPr>
+          <a:xfrm>
+            <a:off x="7964424" y="3145536"/>
+            <a:ext cx="3273552" cy="1417320"/>
+          </a:xfrm>
+          <a:prstGeom prst="roundRect">
+            <a:avLst/>
+          </a:prstGeom>
+          <a:solidFill>
+            <a:srgbClr val="E7DCC1"/>
+          </a:solidFill>
+          <a:ln>
+            <a:noFill/>
+          </a:ln>
+          <a:effectLst/>
+        </p:spPr>
+        <p:style>
+          <a:lnRef idx="1">
+            <a:schemeClr val="accent1"/>
+          </a:lnRef>
+          <a:fillRef idx="3">
+            <a:schemeClr val="accent1"/>
+          </a:fillRef>
+          <a:effectRef idx="2">
+            <a:schemeClr val="accent1"/>
+          </a:effectRef>
+          <a:fontRef idx="minor">
+            <a:schemeClr val="lt1"/>
+          </a:fontRef>
+        </p:style>
+        <p:txBody>
+          <a:bodyPr rtlCol="0" anchor="ctr"/>
+          <a:lstStyle/>
+          <a:p>
+            <a:pPr algn="ctr"/>
+            <a:endParaRPr/>
+          </a:p>
+        </p:txBody>
+      </p:sp>
+      <p:sp>
+        <p:nvSpPr>
+          <p:cNvPr id="17" name="Rounded Rectangle 16"/>
+          <p:cNvSpPr/>
+          <p:nvPr/>
+        </p:nvSpPr>
+        <p:spPr>
+          <a:xfrm>
+            <a:off x="7882128" y="3063240"/>
+            <a:ext cx="3273552" cy="1417320"/>
+          </a:xfrm>
+          <a:prstGeom prst="roundRect">
+            <a:avLst/>
+          </a:prstGeom>
+          <a:solidFill>
+            <a:srgbClr val="F1E9D5"/>
+          </a:solidFill>
+          <a:ln>
+            <a:noFill/>
+          </a:ln>
+          <a:effectLst/>
+        </p:spPr>
+        <p:style>
+          <a:lnRef idx="1">
+            <a:schemeClr val="accent1"/>
+          </a:lnRef>
+          <a:fillRef idx="3">
+            <a:schemeClr val="accent1"/>
+          </a:fillRef>
+          <a:effectRef idx="2">
+            <a:schemeClr val="accent1"/>
+          </a:effectRef>
+          <a:fontRef idx="minor">
+            <a:schemeClr val="lt1"/>
+          </a:fontRef>
+        </p:style>
+        <p:txBody>
+          <a:bodyPr rtlCol="0" anchor="ctr"/>
+          <a:lstStyle/>
+          <a:p>
+            <a:pPr algn="ctr"/>
+            <a:endParaRPr/>
+          </a:p>
+        </p:txBody>
+      </p:sp>
+      <p:sp>
+        <p:nvSpPr>
+          <p:cNvPr id="18" name="Rectangle 17"/>
+          <p:cNvSpPr/>
+          <p:nvPr/>
+        </p:nvSpPr>
+        <p:spPr>
+          <a:xfrm>
+            <a:off x="7882128" y="3063240"/>
+            <a:ext cx="73152" cy="1417320"/>
+          </a:xfrm>
+          <a:prstGeom prst="rect">
+            <a:avLst/>
+          </a:prstGeom>
+          <a:solidFill>
+            <a:srgbClr val="F05A46"/>
+          </a:solidFill>
+          <a:ln>
+            <a:noFill/>
+          </a:ln>
+          <a:effectLst/>
+        </p:spPr>
+        <p:style>
+          <a:lnRef idx="1">
+            <a:schemeClr val="accent1"/>
+          </a:lnRef>
+          <a:fillRef idx="3">
+            <a:schemeClr val="accent1"/>
+          </a:fillRef>
+          <a:effectRef idx="2">
+            <a:schemeClr val="accent1"/>
+          </a:effectRef>
+          <a:fontRef idx="minor">
+            <a:schemeClr val="lt1"/>
+          </a:fontRef>
+        </p:style>
+        <p:txBody>
+          <a:bodyPr rtlCol="0" anchor="ctr"/>
+          <a:lstStyle/>
+          <a:p>
+            <a:pPr algn="ctr"/>
+            <a:endParaRPr/>
+          </a:p>
+        </p:txBody>
+      </p:sp>
+      <p:sp>
+        <p:nvSpPr>
+          <p:cNvPr id="19" name="TextBox 18"/>
+          <p:cNvSpPr txBox="1"/>
+          <p:nvPr/>
+        </p:nvSpPr>
+        <p:spPr>
+          <a:xfrm>
+            <a:off x="8156448" y="3273552"/>
+            <a:ext cx="2816352" cy="365760"/>
+          </a:xfrm>
+          <a:prstGeom prst="rect">
+            <a:avLst/>
+          </a:prstGeom>
+          <a:noFill/>
+        </p:spPr>
+        <p:txBody>
+          <a:bodyPr wrap="square" lIns="0" tIns="0" rIns="0" bIns="0" anchor="t">
+            <a:spAutoFit/>
+          </a:bodyPr>
+          <a:lstStyle/>
+          <a:p>
+            <a:pPr algn="l">
+              <a:lnSpc>
+                <a:spcPct val="100000"/>
+              </a:lnSpc>
+              <a:spcAft>
+                <a:spcPts val="0"/>
+              </a:spcAft>
+            </a:pPr>
+            <a:r>
+              <a:rPr sz="1600" b="1" i="0">
+                <a:solidFill>
+                  <a:srgbClr val="181D2B"/>
+                </a:solidFill>
+                <a:latin typeface="Helvetica Neue"/>
+              </a:rPr>
+              <a:t>Technique</a:t>
+            </a:r>
+          </a:p>
+        </p:txBody>
+      </p:sp>
+      <p:sp>
+        <p:nvSpPr>
+          <p:cNvPr id="20" name="TextBox 19"/>
+          <p:cNvSpPr txBox="1"/>
+          <p:nvPr/>
+        </p:nvSpPr>
+        <p:spPr>
+          <a:xfrm>
+            <a:off x="8156448" y="3639312"/>
+            <a:ext cx="2816352" cy="777240"/>
+          </a:xfrm>
+          <a:prstGeom prst="rect">
+            <a:avLst/>
+          </a:prstGeom>
+          <a:noFill/>
+        </p:spPr>
+        <p:txBody>
+          <a:bodyPr wrap="square" lIns="0" tIns="0" rIns="0" bIns="0" anchor="t">
+            <a:spAutoFit/>
+          </a:bodyPr>
+          <a:lstStyle/>
+          <a:p>
+            <a:pPr algn="l">
+              <a:lnSpc>
+                <a:spcPct val="115000"/>
+              </a:lnSpc>
+              <a:spcAft>
+                <a:spcPts val="0"/>
+              </a:spcAft>
+            </a:pPr>
+            <a:r>
+              <a:rPr sz="1200" b="0" i="0">
+                <a:solidFill>
+                  <a:srgbClr val="181D2B"/>
+                </a:solidFill>
+                <a:latin typeface="Helvetica Neue"/>
+              </a:rPr>
+              <a:t>Pensé par et pour les développeurs. Personne d'autre ne relira jamais un assertEquals.</a:t>
+            </a:r>
+          </a:p>
+        </p:txBody>
+      </p:sp>
+      <p:sp>
+        <p:nvSpPr>
+          <p:cNvPr id="21" name="TextBox 20"/>
+          <p:cNvSpPr txBox="1"/>
+          <p:nvPr/>
+        </p:nvSpPr>
+        <p:spPr>
+          <a:xfrm>
+            <a:off x="822960" y="5074920"/>
+            <a:ext cx="9966960" cy="822960"/>
           </a:xfrm>
           <a:prstGeom prst="rect">
             <a:avLst/>
@@ -34150,13 +34600,13 @@
               </a:spcAft>
             </a:pPr>
             <a:r>
-              <a:rPr sz="1500" b="0" i="0">
-                <a:solidFill>
-                  <a:srgbClr val="E7ECF5"/>
-                </a:solidFill>
-                <a:latin typeface="Menlo"/>
-              </a:rPr>
-              <a:t>@Test</a:t>
+              <a:rPr sz="1400" b="0" i="1">
+                <a:solidFill>
+                  <a:srgbClr val="181D2B"/>
+                </a:solidFill>
+                <a:latin typeface="Helvetica Neue"/>
+              </a:rPr>
+              <a:t>Dans notre agenda malin : ConflictDetector, RecurrenceService — de la logique</a:t>
             </a:r>
           </a:p>
           <a:p>
@@ -34169,192 +34619,20 @@
               </a:spcAft>
             </a:pPr>
             <a:r>
-              <a:rPr sz="1500" b="0" i="0">
-                <a:solidFill>
-                  <a:srgbClr val="E7ECF5"/>
-                </a:solidFill>
-                <a:latin typeface="Menlo"/>
-              </a:rPr>
-              <a:t>void deuxEvenementsQuiSeTouchentNeSontPasEnConflit() {</a:t>
-            </a:r>
-          </a:p>
-          <a:p>
-            <a:pPr algn="l">
-              <a:lnSpc>
-                <a:spcPct val="125000"/>
-              </a:lnSpc>
-              <a:spcAft>
-                <a:spcPts val="0"/>
-              </a:spcAft>
-            </a:pPr>
-            <a:r>
-              <a:rPr sz="1500" b="0" i="0">
-                <a:solidFill>
-                  <a:srgbClr val="E7ECF5"/>
-                </a:solidFill>
-                <a:latin typeface="Menlo"/>
-              </a:rPr>
-              <a:t>    Event a = eventAt("a", 9, 10);</a:t>
-            </a:r>
-          </a:p>
-          <a:p>
-            <a:pPr algn="l">
-              <a:lnSpc>
-                <a:spcPct val="125000"/>
-              </a:lnSpc>
-              <a:spcAft>
-                <a:spcPts val="0"/>
-              </a:spcAft>
-            </a:pPr>
-            <a:r>
-              <a:rPr sz="1500" b="0" i="0">
-                <a:solidFill>
-                  <a:srgbClr val="E7ECF5"/>
-                </a:solidFill>
-                <a:latin typeface="Menlo"/>
-              </a:rPr>
-              <a:t>    Event b = eventAt("b", 10, 11);</a:t>
-            </a:r>
-          </a:p>
-          <a:p>
-            <a:pPr algn="l">
-              <a:lnSpc>
-                <a:spcPct val="125000"/>
-              </a:lnSpc>
-              <a:spcAft>
-                <a:spcPts val="0"/>
-              </a:spcAft>
-            </a:pPr>
-            <a:endParaRPr sz="1500" b="0" i="0">
-              <a:solidFill>
-                <a:srgbClr val="E7ECF5"/>
-              </a:solidFill>
-              <a:latin typeface="Menlo"/>
-            </a:endParaRPr>
-          </a:p>
-          <a:p>
-            <a:pPr algn="l">
-              <a:lnSpc>
-                <a:spcPct val="125000"/>
-              </a:lnSpc>
-              <a:spcAft>
-                <a:spcPts val="0"/>
-              </a:spcAft>
-            </a:pPr>
-            <a:r>
-              <a:rPr sz="1500" b="0" i="0">
-                <a:solidFill>
-                  <a:srgbClr val="E7ECF5"/>
-                </a:solidFill>
-                <a:latin typeface="Menlo"/>
-              </a:rPr>
-              <a:t>    assertFalse(detector.isConflicting(a, b));</a:t>
-            </a:r>
-          </a:p>
-          <a:p>
-            <a:pPr algn="l">
-              <a:lnSpc>
-                <a:spcPct val="125000"/>
-              </a:lnSpc>
-              <a:spcAft>
-                <a:spcPts val="0"/>
-              </a:spcAft>
-            </a:pPr>
-            <a:r>
-              <a:rPr sz="1500" b="0" i="0">
-                <a:solidFill>
-                  <a:srgbClr val="E7ECF5"/>
-                </a:solidFill>
-                <a:latin typeface="Menlo"/>
-              </a:rPr>
-              <a:t>}</a:t>
-            </a:r>
-          </a:p>
-        </p:txBody>
-      </p:sp>
-      <p:sp>
-        <p:nvSpPr>
-          <p:cNvPr id="10" name="TextBox 9"/>
-          <p:cNvSpPr txBox="1"/>
-          <p:nvPr/>
-        </p:nvSpPr>
-        <p:spPr>
-          <a:xfrm>
-            <a:off x="822960" y="5029200"/>
-            <a:ext cx="9875520" cy="1097280"/>
-          </a:xfrm>
-          <a:prstGeom prst="rect">
-            <a:avLst/>
-          </a:prstGeom>
-          <a:noFill/>
-        </p:spPr>
-        <p:txBody>
-          <a:bodyPr wrap="square" lIns="0" tIns="0" rIns="0" bIns="0" anchor="t">
-            <a:spAutoFit/>
-          </a:bodyPr>
-          <a:lstStyle/>
-          <a:p>
-            <a:pPr algn="l">
-              <a:lnSpc>
-                <a:spcPct val="125000"/>
-              </a:lnSpc>
-              <a:spcAft>
-                <a:spcPts val="0"/>
-              </a:spcAft>
-            </a:pPr>
-            <a:r>
-              <a:rPr sz="1350" b="0" i="0">
+              <a:rPr sz="1400" b="0" i="1">
                 <a:solidFill>
                   <a:srgbClr val="181D2B"/>
                 </a:solidFill>
                 <a:latin typeface="Helvetica Neue"/>
               </a:rPr>
-              <a:t>ConflictDetectorTest : 4 tests, 4 cas limites — chevauchement, contact exact,</a:t>
-            </a:r>
-          </a:p>
-          <a:p>
-            <a:pPr algn="l">
-              <a:lnSpc>
-                <a:spcPct val="125000"/>
-              </a:lnSpc>
-              <a:spcAft>
-                <a:spcPts val="0"/>
-              </a:spcAft>
-            </a:pPr>
-            <a:r>
-              <a:rPr sz="1350" b="0" i="0">
-                <a:solidFill>
-                  <a:srgbClr val="181D2B"/>
-                </a:solidFill>
-                <a:latin typeface="Helvetica Neue"/>
-              </a:rPr>
-              <a:t>séparation nette, et réflexivité (oui, on vérifie qu'un événement n'est pas en</a:t>
-            </a:r>
-          </a:p>
-          <a:p>
-            <a:pPr algn="l">
-              <a:lnSpc>
-                <a:spcPct val="125000"/>
-              </a:lnSpc>
-              <a:spcAft>
-                <a:spcPts val="0"/>
-              </a:spcAft>
-            </a:pPr>
-            <a:r>
-              <a:rPr sz="1350" b="0" i="0">
-                <a:solidFill>
-                  <a:srgbClr val="181D2B"/>
-                </a:solidFill>
-                <a:latin typeface="Helvetica Neue"/>
-              </a:rPr>
-              <a:t>conflit avec lui-même — sinon, c'est un problème existentiel, pas un bug).</a:t>
-            </a:r>
-          </a:p>
-        </p:txBody>
-      </p:sp>
-      <p:sp>
-        <p:nvSpPr>
-          <p:cNvPr id="11" name="Rounded Rectangle 10"/>
+              <a:t>pure, testée sans jamais démarrer Quarkus.</a:t>
+            </a:r>
+          </a:p>
+        </p:txBody>
+      </p:sp>
+      <p:sp>
+        <p:nvSpPr>
+          <p:cNvPr id="22" name="Rounded Rectangle 21"/>
           <p:cNvSpPr/>
           <p:nvPr/>
         </p:nvSpPr>
@@ -34400,14 +34678,14 @@
                 </a:solidFill>
                 <a:latin typeface="Helvetica Neue"/>
               </a:rPr>
-              <a:t>09/29</a:t>
-            </a:r>
-          </a:p>
-        </p:txBody>
-      </p:sp>
-      <p:sp>
-        <p:nvSpPr>
-          <p:cNvPr id="12" name="TextBox 11"/>
+              <a:t>08/29</a:t>
+            </a:r>
+          </a:p>
+        </p:txBody>
+      </p:sp>
+      <p:sp>
+        <p:nvSpPr>
+          <p:cNvPr id="23" name="TextBox 22"/>
           <p:cNvSpPr txBox="1"/>
           <p:nvPr/>
         </p:nvSpPr>

--- a/presentation/couverture-code-conference-dynamite.pptx
+++ b/presentation/couverture-code-conference-dynamite.pptx
@@ -330,7 +330,7 @@
           <a:p>
             <a:fld id="{5BCAD085-E8A6-8845-BD4E-CB4CCA059FC4}" type="datetimeFigureOut">
               <a:rPr lang="en-US" smtClean="0"/>
-              <a:t>10/8/26</a:t>
+              <a:t>10/11/26</a:t>
             </a:fld>
             <a:endParaRPr lang="en-US"/>
           </a:p>
@@ -498,7 +498,7 @@
           <a:p>
             <a:fld id="{5BCAD085-E8A6-8845-BD4E-CB4CCA059FC4}" type="datetimeFigureOut">
               <a:rPr lang="en-US" smtClean="0"/>
-              <a:t>10/8/26</a:t>
+              <a:t>10/11/26</a:t>
             </a:fld>
             <a:endParaRPr lang="en-US"/>
           </a:p>
@@ -676,7 +676,7 @@
           <a:p>
             <a:fld id="{5BCAD085-E8A6-8845-BD4E-CB4CCA059FC4}" type="datetimeFigureOut">
               <a:rPr lang="en-US" smtClean="0"/>
-              <a:t>10/8/26</a:t>
+              <a:t>10/11/26</a:t>
             </a:fld>
             <a:endParaRPr lang="en-US"/>
           </a:p>
@@ -844,7 +844,7 @@
           <a:p>
             <a:fld id="{5BCAD085-E8A6-8845-BD4E-CB4CCA059FC4}" type="datetimeFigureOut">
               <a:rPr lang="en-US" smtClean="0"/>
-              <a:t>10/8/26</a:t>
+              <a:t>10/11/26</a:t>
             </a:fld>
             <a:endParaRPr lang="en-US"/>
           </a:p>
@@ -1089,7 +1089,7 @@
           <a:p>
             <a:fld id="{5BCAD085-E8A6-8845-BD4E-CB4CCA059FC4}" type="datetimeFigureOut">
               <a:rPr lang="en-US" smtClean="0"/>
-              <a:t>10/8/26</a:t>
+              <a:t>10/11/26</a:t>
             </a:fld>
             <a:endParaRPr lang="en-US"/>
           </a:p>
@@ -1374,7 +1374,7 @@
           <a:p>
             <a:fld id="{5BCAD085-E8A6-8845-BD4E-CB4CCA059FC4}" type="datetimeFigureOut">
               <a:rPr lang="en-US" smtClean="0"/>
-              <a:t>10/8/26</a:t>
+              <a:t>10/11/26</a:t>
             </a:fld>
             <a:endParaRPr lang="en-US"/>
           </a:p>
@@ -1793,7 +1793,7 @@
           <a:p>
             <a:fld id="{5BCAD085-E8A6-8845-BD4E-CB4CCA059FC4}" type="datetimeFigureOut">
               <a:rPr lang="en-US" smtClean="0"/>
-              <a:t>10/8/26</a:t>
+              <a:t>10/11/26</a:t>
             </a:fld>
             <a:endParaRPr lang="en-US"/>
           </a:p>
@@ -1910,7 +1910,7 @@
           <a:p>
             <a:fld id="{5BCAD085-E8A6-8845-BD4E-CB4CCA059FC4}" type="datetimeFigureOut">
               <a:rPr lang="en-US" smtClean="0"/>
-              <a:t>10/8/26</a:t>
+              <a:t>10/11/26</a:t>
             </a:fld>
             <a:endParaRPr lang="en-US"/>
           </a:p>
@@ -2005,7 +2005,7 @@
           <a:p>
             <a:fld id="{5BCAD085-E8A6-8845-BD4E-CB4CCA059FC4}" type="datetimeFigureOut">
               <a:rPr lang="en-US" smtClean="0"/>
-              <a:t>10/8/26</a:t>
+              <a:t>10/11/26</a:t>
             </a:fld>
             <a:endParaRPr lang="en-US"/>
           </a:p>
@@ -2280,7 +2280,7 @@
           <a:p>
             <a:fld id="{5BCAD085-E8A6-8845-BD4E-CB4CCA059FC4}" type="datetimeFigureOut">
               <a:rPr lang="en-US" smtClean="0"/>
-              <a:t>10/8/26</a:t>
+              <a:t>10/11/26</a:t>
             </a:fld>
             <a:endParaRPr lang="en-US"/>
           </a:p>
@@ -2532,7 +2532,7 @@
           <a:p>
             <a:fld id="{5BCAD085-E8A6-8845-BD4E-CB4CCA059FC4}" type="datetimeFigureOut">
               <a:rPr lang="en-US" smtClean="0"/>
-              <a:t>10/8/26</a:t>
+              <a:t>10/11/26</a:t>
             </a:fld>
             <a:endParaRPr lang="en-US"/>
           </a:p>
@@ -2743,7 +2743,7 @@
           <a:p>
             <a:fld id="{5BCAD085-E8A6-8845-BD4E-CB4CCA059FC4}" type="datetimeFigureOut">
               <a:rPr lang="en-US" smtClean="0"/>
-              <a:t>10/8/26</a:t>
+              <a:t>10/11/26</a:t>
             </a:fld>
             <a:endParaRPr lang="en-US"/>
           </a:p>
@@ -4617,7 +4617,7 @@
         <p:spPr>
           <a:xfrm>
             <a:off x="1097280" y="2148840"/>
-            <a:ext cx="9601200" cy="1737360"/>
+            <a:ext cx="9601200" cy="1429559"/>
           </a:xfrm>
           <a:prstGeom prst="rect">
             <a:avLst/>
@@ -4636,7 +4636,7 @@
               </a:lnSpc>
             </a:pPr>
             <a:r>
-              <a:rPr sz="4600" b="1">
+              <a:rPr sz="4600" b="1" dirty="0">
                 <a:solidFill>
                   <a:srgbClr val="F3EEE0"/>
                 </a:solidFill>
@@ -4646,14 +4646,20 @@
 </a:t>
             </a:r>
             <a:r>
-              <a:rPr sz="4600" b="1">
+              <a:rPr lang="fr-FR" sz="4600" b="1" dirty="0">
                 <a:solidFill>
                   <a:srgbClr val="FFD23F"/>
                 </a:solidFill>
                 <a:latin typeface="Helvetica Neue"/>
               </a:rPr>
-              <a:t>sans blabla</a:t>
-            </a:r>
+              <a:t>n’est jamais à 100%</a:t>
+            </a:r>
+            <a:endParaRPr sz="4600" b="1" dirty="0">
+              <a:solidFill>
+                <a:srgbClr val="FFD23F"/>
+              </a:solidFill>
+              <a:latin typeface="Helvetica Neue"/>
+            </a:endParaRPr>
           </a:p>
         </p:txBody>
       </p:sp>
@@ -33818,7 +33824,7 @@
         <p:spPr>
           <a:xfrm>
             <a:off x="822960" y="1051560"/>
-            <a:ext cx="10058400" cy="1005840"/>
+            <a:ext cx="10058400" cy="492443"/>
           </a:xfrm>
           <a:prstGeom prst="rect">
             <a:avLst/>
@@ -33840,14 +33846,29 @@
               </a:spcAft>
             </a:pPr>
             <a:r>
-              <a:rPr sz="3200" b="1" i="0">
+              <a:rPr sz="3200" b="1" i="0" dirty="0">
                 <a:solidFill>
                   <a:srgbClr val="181D2B"/>
                 </a:solidFill>
                 <a:latin typeface="Helvetica Neue"/>
               </a:rPr>
-              <a:t>Le microscope</a:t>
-            </a:r>
+              <a:t>Le </a:t>
+            </a:r>
+            <a:r>
+              <a:rPr lang="fr-FR" sz="3200" b="1" i="0" dirty="0">
+                <a:solidFill>
+                  <a:srgbClr val="181D2B"/>
+                </a:solidFill>
+                <a:latin typeface="Helvetica Neue"/>
+              </a:rPr>
+              <a:t>zoom</a:t>
+            </a:r>
+            <a:endParaRPr sz="3200" b="1" i="0" dirty="0">
+              <a:solidFill>
+                <a:srgbClr val="181D2B"/>
+              </a:solidFill>
+              <a:latin typeface="Helvetica Neue"/>
+            </a:endParaRPr>
           </a:p>
         </p:txBody>
       </p:sp>

--- a/presentation/couverture-code-conference-dynamite.pptx
+++ b/presentation/couverture-code-conference-dynamite.pptx
@@ -30,10 +30,9 @@
     <p:sldId id="278" r:id="rId24"/>
     <p:sldId id="279" r:id="rId25"/>
     <p:sldId id="280" r:id="rId26"/>
-    <p:sldId id="281" r:id="rId27"/>
-    <p:sldId id="282" r:id="rId28"/>
-    <p:sldId id="283" r:id="rId29"/>
-    <p:sldId id="284" r:id="rId30"/>
+    <p:sldId id="282" r:id="rId27"/>
+    <p:sldId id="283" r:id="rId28"/>
+    <p:sldId id="284" r:id="rId29"/>
   </p:sldIdLst>
   <p:sldSz cx="12192000" cy="6858000"/>
   <p:notesSz cx="6858000" cy="9144000"/>
@@ -330,7 +329,7 @@
           <a:p>
             <a:fld id="{5BCAD085-E8A6-8845-BD4E-CB4CCA059FC4}" type="datetimeFigureOut">
               <a:rPr lang="en-US" smtClean="0"/>
-              <a:t>10/11/26</a:t>
+              <a:t>10/12/26</a:t>
             </a:fld>
             <a:endParaRPr lang="en-US"/>
           </a:p>
@@ -498,7 +497,7 @@
           <a:p>
             <a:fld id="{5BCAD085-E8A6-8845-BD4E-CB4CCA059FC4}" type="datetimeFigureOut">
               <a:rPr lang="en-US" smtClean="0"/>
-              <a:t>10/11/26</a:t>
+              <a:t>10/12/26</a:t>
             </a:fld>
             <a:endParaRPr lang="en-US"/>
           </a:p>
@@ -676,7 +675,7 @@
           <a:p>
             <a:fld id="{5BCAD085-E8A6-8845-BD4E-CB4CCA059FC4}" type="datetimeFigureOut">
               <a:rPr lang="en-US" smtClean="0"/>
-              <a:t>10/11/26</a:t>
+              <a:t>10/12/26</a:t>
             </a:fld>
             <a:endParaRPr lang="en-US"/>
           </a:p>
@@ -844,7 +843,7 @@
           <a:p>
             <a:fld id="{5BCAD085-E8A6-8845-BD4E-CB4CCA059FC4}" type="datetimeFigureOut">
               <a:rPr lang="en-US" smtClean="0"/>
-              <a:t>10/11/26</a:t>
+              <a:t>10/12/26</a:t>
             </a:fld>
             <a:endParaRPr lang="en-US"/>
           </a:p>
@@ -1089,7 +1088,7 @@
           <a:p>
             <a:fld id="{5BCAD085-E8A6-8845-BD4E-CB4CCA059FC4}" type="datetimeFigureOut">
               <a:rPr lang="en-US" smtClean="0"/>
-              <a:t>10/11/26</a:t>
+              <a:t>10/12/26</a:t>
             </a:fld>
             <a:endParaRPr lang="en-US"/>
           </a:p>
@@ -1374,7 +1373,7 @@
           <a:p>
             <a:fld id="{5BCAD085-E8A6-8845-BD4E-CB4CCA059FC4}" type="datetimeFigureOut">
               <a:rPr lang="en-US" smtClean="0"/>
-              <a:t>10/11/26</a:t>
+              <a:t>10/12/26</a:t>
             </a:fld>
             <a:endParaRPr lang="en-US"/>
           </a:p>
@@ -1793,7 +1792,7 @@
           <a:p>
             <a:fld id="{5BCAD085-E8A6-8845-BD4E-CB4CCA059FC4}" type="datetimeFigureOut">
               <a:rPr lang="en-US" smtClean="0"/>
-              <a:t>10/11/26</a:t>
+              <a:t>10/12/26</a:t>
             </a:fld>
             <a:endParaRPr lang="en-US"/>
           </a:p>
@@ -1910,7 +1909,7 @@
           <a:p>
             <a:fld id="{5BCAD085-E8A6-8845-BD4E-CB4CCA059FC4}" type="datetimeFigureOut">
               <a:rPr lang="en-US" smtClean="0"/>
-              <a:t>10/11/26</a:t>
+              <a:t>10/12/26</a:t>
             </a:fld>
             <a:endParaRPr lang="en-US"/>
           </a:p>
@@ -2005,7 +2004,7 @@
           <a:p>
             <a:fld id="{5BCAD085-E8A6-8845-BD4E-CB4CCA059FC4}" type="datetimeFigureOut">
               <a:rPr lang="en-US" smtClean="0"/>
-              <a:t>10/11/26</a:t>
+              <a:t>10/12/26</a:t>
             </a:fld>
             <a:endParaRPr lang="en-US"/>
           </a:p>
@@ -2280,7 +2279,7 @@
           <a:p>
             <a:fld id="{5BCAD085-E8A6-8845-BD4E-CB4CCA059FC4}" type="datetimeFigureOut">
               <a:rPr lang="en-US" smtClean="0"/>
-              <a:t>10/11/26</a:t>
+              <a:t>10/12/26</a:t>
             </a:fld>
             <a:endParaRPr lang="en-US"/>
           </a:p>
@@ -2532,7 +2531,7 @@
           <a:p>
             <a:fld id="{5BCAD085-E8A6-8845-BD4E-CB4CCA059FC4}" type="datetimeFigureOut">
               <a:rPr lang="en-US" smtClean="0"/>
-              <a:t>10/11/26</a:t>
+              <a:t>10/12/26</a:t>
             </a:fld>
             <a:endParaRPr lang="en-US"/>
           </a:p>
@@ -2743,7 +2742,7 @@
           <a:p>
             <a:fld id="{5BCAD085-E8A6-8845-BD4E-CB4CCA059FC4}" type="datetimeFigureOut">
               <a:rPr lang="en-US" smtClean="0"/>
-              <a:t>10/11/26</a:t>
+              <a:t>10/12/26</a:t>
             </a:fld>
             <a:endParaRPr lang="en-US"/>
           </a:p>
@@ -10486,14 +10485,47 @@
               </a:lnSpc>
             </a:pPr>
             <a:r>
-              <a:rPr sz="1350" b="1" i="1">
+              <a:rPr sz="1350" b="1" i="1" dirty="0">
                 <a:solidFill>
                   <a:srgbClr val="0C111F"/>
                 </a:solidFill>
                 <a:latin typeface="Helvetica Neue"/>
               </a:rPr>
-              <a:t>on arrête PowerPoint. direction le terminal, pour de vrai — fermez Slack pendant qu'on y est</a:t>
-            </a:r>
+              <a:t>on </a:t>
+            </a:r>
+            <a:r>
+              <a:rPr sz="1350" b="1" i="1" dirty="0" err="1">
+                <a:solidFill>
+                  <a:srgbClr val="0C111F"/>
+                </a:solidFill>
+                <a:latin typeface="Helvetica Neue"/>
+              </a:rPr>
+              <a:t>arrête</a:t>
+            </a:r>
+            <a:r>
+              <a:rPr sz="1350" b="1" i="1" dirty="0">
+                <a:solidFill>
+                  <a:srgbClr val="0C111F"/>
+                </a:solidFill>
+                <a:latin typeface="Helvetica Neue"/>
+              </a:rPr>
+              <a:t> PowerPoint. direction le terminal, pour de </a:t>
+            </a:r>
+            <a:r>
+              <a:rPr sz="1350" b="1" i="1" dirty="0" err="1">
+                <a:solidFill>
+                  <a:srgbClr val="0C111F"/>
+                </a:solidFill>
+                <a:latin typeface="Helvetica Neue"/>
+              </a:rPr>
+              <a:t>vrai</a:t>
+            </a:r>
+            <a:endParaRPr sz="1350" b="1" i="1" dirty="0">
+              <a:solidFill>
+                <a:srgbClr val="0C111F"/>
+              </a:solidFill>
+              <a:latin typeface="Helvetica Neue"/>
+            </a:endParaRPr>
           </a:p>
         </p:txBody>
       </p:sp>
@@ -21282,7 +21314,7 @@
         <p:spPr>
           <a:xfrm>
             <a:off x="1691640" y="4123944"/>
-            <a:ext cx="9601200" cy="365760"/>
+            <a:ext cx="9601200" cy="223138"/>
           </a:xfrm>
           <a:prstGeom prst="rect">
             <a:avLst/>
@@ -21304,13 +21336,103 @@
               </a:spcAft>
             </a:pPr>
             <a:r>
-              <a:rPr sz="1450" b="1" i="0">
+              <a:rPr sz="1450" b="1" i="0" dirty="0">
                 <a:solidFill>
                   <a:srgbClr val="181D2B"/>
                 </a:solidFill>
                 <a:latin typeface="Helvetica Neue"/>
               </a:rPr>
-              <a:t>« Le stagiaire a dit que ça passait. »</a:t>
+              <a:t>« </a:t>
+            </a:r>
+            <a:r>
+              <a:rPr lang="fr-FR" sz="1450" b="1" i="0" dirty="0">
+                <a:solidFill>
+                  <a:srgbClr val="181D2B"/>
+                </a:solidFill>
+                <a:latin typeface="Helvetica Neue"/>
+              </a:rPr>
+              <a:t>François</a:t>
+            </a:r>
+            <a:r>
+              <a:rPr sz="1450" b="1" i="0" dirty="0">
+                <a:solidFill>
+                  <a:srgbClr val="181D2B"/>
+                </a:solidFill>
+                <a:latin typeface="Helvetica Neue"/>
+              </a:rPr>
+              <a:t> a </a:t>
+            </a:r>
+            <a:r>
+              <a:rPr sz="1450" b="1" i="0" dirty="0" err="1">
+                <a:solidFill>
+                  <a:srgbClr val="181D2B"/>
+                </a:solidFill>
+                <a:latin typeface="Helvetica Neue"/>
+              </a:rPr>
+              <a:t>dit</a:t>
+            </a:r>
+            <a:r>
+              <a:rPr sz="1450" b="1" i="0" dirty="0">
+                <a:solidFill>
+                  <a:srgbClr val="181D2B"/>
+                </a:solidFill>
+                <a:latin typeface="Helvetica Neue"/>
+              </a:rPr>
+              <a:t> </a:t>
+            </a:r>
+            <a:r>
+              <a:rPr sz="1450" b="1" i="0" dirty="0" err="1">
+                <a:solidFill>
+                  <a:srgbClr val="181D2B"/>
+                </a:solidFill>
+                <a:latin typeface="Helvetica Neue"/>
+              </a:rPr>
+              <a:t>que</a:t>
+            </a:r>
+            <a:r>
+              <a:rPr sz="1450" b="1" i="0" dirty="0">
+                <a:solidFill>
+                  <a:srgbClr val="181D2B"/>
+                </a:solidFill>
+                <a:latin typeface="Helvetica Neue"/>
+              </a:rPr>
+              <a:t> </a:t>
+            </a:r>
+            <a:r>
+              <a:rPr sz="1450" b="1" i="0" dirty="0" err="1">
+                <a:solidFill>
+                  <a:srgbClr val="181D2B"/>
+                </a:solidFill>
+                <a:latin typeface="Helvetica Neue"/>
+              </a:rPr>
+              <a:t>ça</a:t>
+            </a:r>
+            <a:r>
+              <a:rPr sz="1450" b="1" i="0" dirty="0">
+                <a:solidFill>
+                  <a:srgbClr val="181D2B"/>
+                </a:solidFill>
+                <a:latin typeface="Helvetica Neue"/>
+              </a:rPr>
+              <a:t> </a:t>
+            </a:r>
+            <a:r>
+              <a:rPr sz="1450" b="1" i="0" dirty="0" err="1">
+                <a:solidFill>
+                  <a:srgbClr val="181D2B"/>
+                </a:solidFill>
+                <a:latin typeface="Helvetica Neue"/>
+              </a:rPr>
+              <a:t>passait</a:t>
+            </a:r>
+            <a:r>
+              <a:rPr sz="1450" b="1" i="0" dirty="0">
+                <a:solidFill>
+                  <a:srgbClr val="181D2B"/>
+                </a:solidFill>
+                <a:latin typeface="Helvetica Neue"/>
+              </a:rPr>
+              <a:t>. »</a:t>
             </a:r>
           </a:p>
         </p:txBody>
@@ -21775,7 +21897,7 @@
                 </a:solidFill>
                 <a:latin typeface="Helvetica Neue"/>
               </a:rPr>
-              <a:t>RETOUR D'EXPÉRIENCE</a:t>
+              <a:t>À RETENIR</a:t>
             </a:r>
           </a:p>
         </p:txBody>
@@ -21811,33 +21933,33 @@
               </a:spcAft>
             </a:pPr>
             <a:r>
-              <a:rPr sz="2200" b="1" i="0">
+              <a:rPr sz="3000" b="1" i="0">
                 <a:solidFill>
                   <a:srgbClr val="F3EEE0"/>
                 </a:solidFill>
                 <a:latin typeface="Helvetica Neue"/>
               </a:rPr>
-              <a:t>Deux pièges qu'on a vraiment eus en préparant cette conf</a:t>
-            </a:r>
-          </a:p>
-        </p:txBody>
-      </p:sp>
-      <p:sp>
-        <p:nvSpPr>
-          <p:cNvPr id="4" name="Rounded Rectangle 3"/>
-          <p:cNvSpPr/>
-          <p:nvPr/>
-        </p:nvSpPr>
-        <p:spPr>
-          <a:xfrm>
-            <a:off x="905256" y="2185416"/>
-            <a:ext cx="10515600" cy="1737360"/>
-          </a:xfrm>
-          <a:prstGeom prst="roundRect">
-            <a:avLst/>
-          </a:prstGeom>
-          <a:solidFill>
-            <a:srgbClr val="202A44"/>
+              <a:t>Ce qu'il faut retenir</a:t>
+            </a:r>
+          </a:p>
+        </p:txBody>
+      </p:sp>
+      <p:sp>
+        <p:nvSpPr>
+          <p:cNvPr id="4" name="Oval 3"/>
+          <p:cNvSpPr/>
+          <p:nvPr/>
+        </p:nvSpPr>
+        <p:spPr>
+          <a:xfrm>
+            <a:off x="10273284" y="443484"/>
+            <a:ext cx="1051560" cy="1051560"/>
+          </a:xfrm>
+          <a:prstGeom prst="ellipse">
+            <a:avLst/>
+          </a:prstGeom>
+          <a:solidFill>
+            <a:srgbClr val="0C111F"/>
           </a:solidFill>
           <a:ln>
             <a:noFill/>
@@ -21869,20 +21991,73 @@
       </p:sp>
       <p:sp>
         <p:nvSpPr>
-          <p:cNvPr id="5" name="Rounded Rectangle 4"/>
-          <p:cNvSpPr/>
-          <p:nvPr/>
-        </p:nvSpPr>
-        <p:spPr>
-          <a:xfrm>
-            <a:off x="822960" y="2103120"/>
-            <a:ext cx="10515600" cy="1737360"/>
-          </a:xfrm>
-          <a:prstGeom prst="roundRect">
-            <a:avLst/>
-          </a:prstGeom>
-          <a:solidFill>
-            <a:srgbClr val="171F33"/>
+          <p:cNvPr id="5" name="Oval 4"/>
+          <p:cNvSpPr/>
+          <p:nvPr/>
+        </p:nvSpPr>
+        <p:spPr>
+          <a:xfrm rot="360000">
+            <a:off x="10218420" y="388620"/>
+            <a:ext cx="1051560" cy="1051560"/>
+          </a:xfrm>
+          <a:prstGeom prst="ellipse">
+            <a:avLst/>
+          </a:prstGeom>
+          <a:solidFill>
+            <a:srgbClr val="FFD23F"/>
+          </a:solidFill>
+          <a:ln>
+            <a:noFill/>
+          </a:ln>
+          <a:effectLst/>
+        </p:spPr>
+        <p:style>
+          <a:lnRef idx="1">
+            <a:schemeClr val="accent1"/>
+          </a:lnRef>
+          <a:fillRef idx="3">
+            <a:schemeClr val="accent1"/>
+          </a:fillRef>
+          <a:effectRef idx="2">
+            <a:schemeClr val="accent1"/>
+          </a:effectRef>
+          <a:fontRef idx="minor">
+            <a:schemeClr val="lt1"/>
+          </a:fontRef>
+        </p:style>
+        <p:txBody>
+          <a:bodyPr wrap="square" lIns="54864" rIns="54864" rtlCol="0" anchor="ctr"/>
+          <a:lstStyle/>
+          <a:p>
+            <a:pPr algn="ctr"/>
+            <a:r>
+              <a:rPr sz="1300" b="1">
+                <a:solidFill>
+                  <a:srgbClr val="0C111F"/>
+                </a:solidFill>
+                <a:latin typeface="Helvetica Neue"/>
+              </a:rPr>
+              <a:t>tl;dr</a:t>
+            </a:r>
+          </a:p>
+        </p:txBody>
+      </p:sp>
+      <p:sp>
+        <p:nvSpPr>
+          <p:cNvPr id="6" name="Oval 5"/>
+          <p:cNvSpPr/>
+          <p:nvPr/>
+        </p:nvSpPr>
+        <p:spPr>
+          <a:xfrm>
+            <a:off x="946404" y="2153412"/>
+            <a:ext cx="685800" cy="685800"/>
+          </a:xfrm>
+          <a:prstGeom prst="ellipse">
+            <a:avLst/>
+          </a:prstGeom>
+          <a:solidFill>
+            <a:srgbClr val="0C111F"/>
           </a:solidFill>
           <a:ln>
             <a:noFill/>
@@ -21914,59 +22089,67 @@
       </p:sp>
       <p:sp>
         <p:nvSpPr>
-          <p:cNvPr id="6" name="Rectangle 5"/>
-          <p:cNvSpPr/>
-          <p:nvPr/>
-        </p:nvSpPr>
-        <p:spPr>
-          <a:xfrm>
-            <a:off x="822960" y="2103120"/>
-            <a:ext cx="91440" cy="1737360"/>
-          </a:xfrm>
-          <a:prstGeom prst="rect">
-            <a:avLst/>
-          </a:prstGeom>
-          <a:solidFill>
-            <a:srgbClr val="F0A72E"/>
-          </a:solidFill>
-          <a:ln>
-            <a:noFill/>
-          </a:ln>
-          <a:effectLst/>
-        </p:spPr>
-        <p:style>
-          <a:lnRef idx="1">
-            <a:schemeClr val="accent1"/>
-          </a:lnRef>
-          <a:fillRef idx="3">
-            <a:schemeClr val="accent1"/>
-          </a:fillRef>
-          <a:effectRef idx="2">
-            <a:schemeClr val="accent1"/>
-          </a:effectRef>
-          <a:fontRef idx="minor">
-            <a:schemeClr val="lt1"/>
-          </a:fontRef>
-        </p:style>
-        <p:txBody>
-          <a:bodyPr rtlCol="0" anchor="ctr"/>
-          <a:lstStyle/>
-          <a:p>
-            <a:pPr algn="ctr"/>
-            <a:endParaRPr/>
-          </a:p>
-        </p:txBody>
-      </p:sp>
-      <p:sp>
-        <p:nvSpPr>
-          <p:cNvPr id="7" name="TextBox 6"/>
+          <p:cNvPr id="7" name="Oval 6"/>
+          <p:cNvSpPr/>
+          <p:nvPr/>
+        </p:nvSpPr>
+        <p:spPr>
+          <a:xfrm rot="21240000">
+            <a:off x="891540" y="2098548"/>
+            <a:ext cx="685800" cy="685800"/>
+          </a:xfrm>
+          <a:prstGeom prst="ellipse">
+            <a:avLst/>
+          </a:prstGeom>
+          <a:solidFill>
+            <a:srgbClr val="FFD23F"/>
+          </a:solidFill>
+          <a:ln>
+            <a:noFill/>
+          </a:ln>
+          <a:effectLst/>
+        </p:spPr>
+        <p:style>
+          <a:lnRef idx="1">
+            <a:schemeClr val="accent1"/>
+          </a:lnRef>
+          <a:fillRef idx="3">
+            <a:schemeClr val="accent1"/>
+          </a:fillRef>
+          <a:effectRef idx="2">
+            <a:schemeClr val="accent1"/>
+          </a:effectRef>
+          <a:fontRef idx="minor">
+            <a:schemeClr val="lt1"/>
+          </a:fontRef>
+        </p:style>
+        <p:txBody>
+          <a:bodyPr wrap="square" lIns="54864" rIns="54864" rtlCol="0" anchor="ctr"/>
+          <a:lstStyle/>
+          <a:p>
+            <a:pPr algn="ctr"/>
+            <a:r>
+              <a:rPr sz="2200" b="1">
+                <a:solidFill>
+                  <a:srgbClr val="0C111F"/>
+                </a:solidFill>
+                <a:latin typeface="Helvetica Neue"/>
+              </a:rPr>
+              <a:t>1</a:t>
+            </a:r>
+          </a:p>
+        </p:txBody>
+      </p:sp>
+      <p:sp>
+        <p:nvSpPr>
+          <p:cNvPr id="8" name="TextBox 7"/>
           <p:cNvSpPr txBox="1"/>
           <p:nvPr/>
         </p:nvSpPr>
         <p:spPr>
           <a:xfrm>
-            <a:off x="1188720" y="2286000"/>
-            <a:ext cx="9966960" cy="411480"/>
+            <a:off x="2011680" y="2167128"/>
+            <a:ext cx="8961120" cy="502920"/>
           </a:xfrm>
           <a:prstGeom prst="rect">
             <a:avLst/>
@@ -21988,204 +22171,27 @@
               </a:spcAft>
             </a:pPr>
             <a:r>
-              <a:rPr sz="1700" b="1" i="0">
+              <a:rPr sz="1650" b="1" i="0">
                 <a:solidFill>
                   <a:srgbClr val="F3EEE0"/>
                 </a:solidFill>
                 <a:latin typeface="Helvetica Neue"/>
               </a:rPr>
-              <a:t>Le QuarkusClassLoader fantôme</a:t>
-            </a:r>
-          </a:p>
-        </p:txBody>
-      </p:sp>
-      <p:sp>
-        <p:nvSpPr>
-          <p:cNvPr id="8" name="TextBox 7"/>
+              <a:t>Un test vert ne dit pas ce qu'il a vérifié.</a:t>
+            </a:r>
+          </a:p>
+        </p:txBody>
+      </p:sp>
+      <p:sp>
+        <p:nvSpPr>
+          <p:cNvPr id="9" name="TextBox 8"/>
           <p:cNvSpPr txBox="1"/>
           <p:nvPr/>
         </p:nvSpPr>
         <p:spPr>
           <a:xfrm>
-            <a:off x="1188720" y="2724912"/>
-            <a:ext cx="9966960" cy="1005840"/>
-          </a:xfrm>
-          <a:prstGeom prst="rect">
-            <a:avLst/>
-          </a:prstGeom>
-          <a:noFill/>
-        </p:spPr>
-        <p:txBody>
-          <a:bodyPr wrap="square" lIns="0" tIns="0" rIns="0" bIns="0" anchor="t">
-            <a:spAutoFit/>
-          </a:bodyPr>
-          <a:lstStyle/>
-          <a:p>
-            <a:pPr algn="l">
-              <a:lnSpc>
-                <a:spcPct val="130000"/>
-              </a:lnSpc>
-              <a:spcAft>
-                <a:spcPts val="0"/>
-              </a:spcAft>
-            </a:pPr>
-            <a:r>
-              <a:rPr sz="1250" b="0" i="0">
-                <a:solidFill>
-                  <a:srgbClr val="B0B7C8"/>
-                </a:solidFill>
-                <a:latin typeface="Helvetica Neue"/>
-              </a:rPr>
-              <a:t>Deux exécutions Surefire, deux agents Jacoco... et pourtant tout à 0 %. Coupable : l'extension quarkus-jacoco mesure le code CDI toute seule, dans son coin, sans prévenir personne.</a:t>
-            </a:r>
-          </a:p>
-        </p:txBody>
-      </p:sp>
-      <p:sp>
-        <p:nvSpPr>
-          <p:cNvPr id="9" name="Rounded Rectangle 8"/>
-          <p:cNvSpPr/>
-          <p:nvPr/>
-        </p:nvSpPr>
-        <p:spPr>
-          <a:xfrm>
-            <a:off x="905256" y="4242816"/>
-            <a:ext cx="10515600" cy="1737360"/>
-          </a:xfrm>
-          <a:prstGeom prst="roundRect">
-            <a:avLst/>
-          </a:prstGeom>
-          <a:solidFill>
-            <a:srgbClr val="202A44"/>
-          </a:solidFill>
-          <a:ln>
-            <a:noFill/>
-          </a:ln>
-          <a:effectLst/>
-        </p:spPr>
-        <p:style>
-          <a:lnRef idx="1">
-            <a:schemeClr val="accent1"/>
-          </a:lnRef>
-          <a:fillRef idx="3">
-            <a:schemeClr val="accent1"/>
-          </a:fillRef>
-          <a:effectRef idx="2">
-            <a:schemeClr val="accent1"/>
-          </a:effectRef>
-          <a:fontRef idx="minor">
-            <a:schemeClr val="lt1"/>
-          </a:fontRef>
-        </p:style>
-        <p:txBody>
-          <a:bodyPr rtlCol="0" anchor="ctr"/>
-          <a:lstStyle/>
-          <a:p>
-            <a:pPr algn="ctr"/>
-            <a:endParaRPr/>
-          </a:p>
-        </p:txBody>
-      </p:sp>
-      <p:sp>
-        <p:nvSpPr>
-          <p:cNvPr id="10" name="Rounded Rectangle 9"/>
-          <p:cNvSpPr/>
-          <p:nvPr/>
-        </p:nvSpPr>
-        <p:spPr>
-          <a:xfrm>
-            <a:off x="822960" y="4160520"/>
-            <a:ext cx="10515600" cy="1737360"/>
-          </a:xfrm>
-          <a:prstGeom prst="roundRect">
-            <a:avLst/>
-          </a:prstGeom>
-          <a:solidFill>
-            <a:srgbClr val="171F33"/>
-          </a:solidFill>
-          <a:ln>
-            <a:noFill/>
-          </a:ln>
-          <a:effectLst/>
-        </p:spPr>
-        <p:style>
-          <a:lnRef idx="1">
-            <a:schemeClr val="accent1"/>
-          </a:lnRef>
-          <a:fillRef idx="3">
-            <a:schemeClr val="accent1"/>
-          </a:fillRef>
-          <a:effectRef idx="2">
-            <a:schemeClr val="accent1"/>
-          </a:effectRef>
-          <a:fontRef idx="minor">
-            <a:schemeClr val="lt1"/>
-          </a:fontRef>
-        </p:style>
-        <p:txBody>
-          <a:bodyPr rtlCol="0" anchor="ctr"/>
-          <a:lstStyle/>
-          <a:p>
-            <a:pPr algn="ctr"/>
-            <a:endParaRPr/>
-          </a:p>
-        </p:txBody>
-      </p:sp>
-      <p:sp>
-        <p:nvSpPr>
-          <p:cNvPr id="11" name="Rectangle 10"/>
-          <p:cNvSpPr/>
-          <p:nvPr/>
-        </p:nvSpPr>
-        <p:spPr>
-          <a:xfrm>
-            <a:off x="822960" y="4160520"/>
-            <a:ext cx="91440" cy="1737360"/>
-          </a:xfrm>
-          <a:prstGeom prst="rect">
-            <a:avLst/>
-          </a:prstGeom>
-          <a:solidFill>
-            <a:srgbClr val="2EB0A0"/>
-          </a:solidFill>
-          <a:ln>
-            <a:noFill/>
-          </a:ln>
-          <a:effectLst/>
-        </p:spPr>
-        <p:style>
-          <a:lnRef idx="1">
-            <a:schemeClr val="accent1"/>
-          </a:lnRef>
-          <a:fillRef idx="3">
-            <a:schemeClr val="accent1"/>
-          </a:fillRef>
-          <a:effectRef idx="2">
-            <a:schemeClr val="accent1"/>
-          </a:effectRef>
-          <a:fontRef idx="minor">
-            <a:schemeClr val="lt1"/>
-          </a:fontRef>
-        </p:style>
-        <p:txBody>
-          <a:bodyPr rtlCol="0" anchor="ctr"/>
-          <a:lstStyle/>
-          <a:p>
-            <a:pPr algn="ctr"/>
-            <a:endParaRPr/>
-          </a:p>
-        </p:txBody>
-      </p:sp>
-      <p:sp>
-        <p:nvSpPr>
-          <p:cNvPr id="12" name="TextBox 11"/>
-          <p:cNvSpPr txBox="1"/>
-          <p:nvPr/>
-        </p:nvSpPr>
-        <p:spPr>
-          <a:xfrm>
-            <a:off x="1188720" y="4343400"/>
-            <a:ext cx="9966960" cy="411480"/>
+            <a:off x="2011680" y="2633472"/>
+            <a:ext cx="8961120" cy="457200"/>
           </a:xfrm>
           <a:prstGeom prst="rect">
             <a:avLst/>
@@ -22207,69 +22213,125 @@
               </a:spcAft>
             </a:pPr>
             <a:r>
-              <a:rPr sz="1700" b="1" i="0">
-                <a:solidFill>
-                  <a:srgbClr val="F3EEE0"/>
-                </a:solidFill>
-                <a:latin typeface="Helvetica Neue"/>
-              </a:rPr>
-              <a:t>L'accent qui a cassé Gherkin</a:t>
-            </a:r>
-          </a:p>
-        </p:txBody>
-      </p:sp>
-      <p:sp>
-        <p:nvSpPr>
-          <p:cNvPr id="13" name="TextBox 12"/>
+              <a:rPr sz="1250" b="0" i="0">
+                <a:solidFill>
+                  <a:srgbClr val="9AA1B5"/>
+                </a:solidFill>
+                <a:latin typeface="Helvetica Neue"/>
+              </a:rPr>
+              <a:t>La couverture, si.</a:t>
+            </a:r>
+          </a:p>
+        </p:txBody>
+      </p:sp>
+      <p:sp>
+        <p:nvSpPr>
+          <p:cNvPr id="10" name="Oval 9"/>
+          <p:cNvSpPr/>
+          <p:nvPr/>
+        </p:nvSpPr>
+        <p:spPr>
+          <a:xfrm>
+            <a:off x="946404" y="3250692"/>
+            <a:ext cx="685800" cy="685800"/>
+          </a:xfrm>
+          <a:prstGeom prst="ellipse">
+            <a:avLst/>
+          </a:prstGeom>
+          <a:solidFill>
+            <a:srgbClr val="0C111F"/>
+          </a:solidFill>
+          <a:ln>
+            <a:noFill/>
+          </a:ln>
+          <a:effectLst/>
+        </p:spPr>
+        <p:style>
+          <a:lnRef idx="1">
+            <a:schemeClr val="accent1"/>
+          </a:lnRef>
+          <a:fillRef idx="3">
+            <a:schemeClr val="accent1"/>
+          </a:fillRef>
+          <a:effectRef idx="2">
+            <a:schemeClr val="accent1"/>
+          </a:effectRef>
+          <a:fontRef idx="minor">
+            <a:schemeClr val="lt1"/>
+          </a:fontRef>
+        </p:style>
+        <p:txBody>
+          <a:bodyPr rtlCol="0" anchor="ctr"/>
+          <a:lstStyle/>
+          <a:p>
+            <a:pPr algn="ctr"/>
+            <a:endParaRPr/>
+          </a:p>
+        </p:txBody>
+      </p:sp>
+      <p:sp>
+        <p:nvSpPr>
+          <p:cNvPr id="11" name="Oval 10"/>
+          <p:cNvSpPr/>
+          <p:nvPr/>
+        </p:nvSpPr>
+        <p:spPr>
+          <a:xfrm rot="21240000">
+            <a:off x="891540" y="3195828"/>
+            <a:ext cx="685800" cy="685800"/>
+          </a:xfrm>
+          <a:prstGeom prst="ellipse">
+            <a:avLst/>
+          </a:prstGeom>
+          <a:solidFill>
+            <a:srgbClr val="FFD23F"/>
+          </a:solidFill>
+          <a:ln>
+            <a:noFill/>
+          </a:ln>
+          <a:effectLst/>
+        </p:spPr>
+        <p:style>
+          <a:lnRef idx="1">
+            <a:schemeClr val="accent1"/>
+          </a:lnRef>
+          <a:fillRef idx="3">
+            <a:schemeClr val="accent1"/>
+          </a:fillRef>
+          <a:effectRef idx="2">
+            <a:schemeClr val="accent1"/>
+          </a:effectRef>
+          <a:fontRef idx="minor">
+            <a:schemeClr val="lt1"/>
+          </a:fontRef>
+        </p:style>
+        <p:txBody>
+          <a:bodyPr wrap="square" lIns="54864" rIns="54864" rtlCol="0" anchor="ctr"/>
+          <a:lstStyle/>
+          <a:p>
+            <a:pPr algn="ctr"/>
+            <a:r>
+              <a:rPr sz="2200" b="1">
+                <a:solidFill>
+                  <a:srgbClr val="0C111F"/>
+                </a:solidFill>
+                <a:latin typeface="Helvetica Neue"/>
+              </a:rPr>
+              <a:t>2</a:t>
+            </a:r>
+          </a:p>
+        </p:txBody>
+      </p:sp>
+      <p:sp>
+        <p:nvSpPr>
+          <p:cNvPr id="12" name="TextBox 11"/>
           <p:cNvSpPr txBox="1"/>
           <p:nvPr/>
         </p:nvSpPr>
         <p:spPr>
           <a:xfrm>
-            <a:off x="1188720" y="4782312"/>
-            <a:ext cx="9966960" cy="1005840"/>
-          </a:xfrm>
-          <a:prstGeom prst="rect">
-            <a:avLst/>
-          </a:prstGeom>
-          <a:noFill/>
-        </p:spPr>
-        <p:txBody>
-          <a:bodyPr wrap="square" lIns="0" tIns="0" rIns="0" bIns="0" anchor="t">
-            <a:spAutoFit/>
-          </a:bodyPr>
-          <a:lstStyle/>
-          <a:p>
-            <a:pPr algn="l">
-              <a:lnSpc>
-                <a:spcPct val="130000"/>
-              </a:lnSpc>
-              <a:spcAft>
-                <a:spcPts val="0"/>
-              </a:spcAft>
-            </a:pPr>
-            <a:r>
-              <a:rPr sz="1250" b="0" i="0">
-                <a:solidFill>
-                  <a:srgbClr val="B0B7C8"/>
-                </a:solidFill>
-                <a:latin typeface="Helvetica Neue"/>
-              </a:rPr>
-              <a:t>« Fonctionnalite » sans accent ne veut RIEN dire pour un parseur Gherkin en français. Un é manquant, et Cucumber devient aussi utile qu'un GPS sans signal.</a:t>
-            </a:r>
-          </a:p>
-        </p:txBody>
-      </p:sp>
-      <p:sp>
-        <p:nvSpPr>
-          <p:cNvPr id="14" name="TextBox 13"/>
-          <p:cNvSpPr txBox="1"/>
-          <p:nvPr/>
-        </p:nvSpPr>
-        <p:spPr>
-          <a:xfrm>
-            <a:off x="822960" y="6199632"/>
-            <a:ext cx="10058400" cy="365760"/>
+            <a:off x="2011680" y="3264408"/>
+            <a:ext cx="8961120" cy="502920"/>
           </a:xfrm>
           <a:prstGeom prst="rect">
             <a:avLst/>
@@ -22291,20 +22353,244 @@
               </a:spcAft>
             </a:pPr>
             <a:r>
-              <a:rPr sz="1250" b="0" i="1">
-                <a:solidFill>
-                  <a:srgbClr val="FFD23F"/>
-                </a:solidFill>
-                <a:latin typeface="Helvetica Neue"/>
-              </a:rPr>
-              <a:t>Le seul avantage qu'on a eu sur vous : un rapport de couverture pour le prouver noir sur blanc.</a:t>
-            </a:r>
-          </a:p>
-        </p:txBody>
-      </p:sp>
-      <p:sp>
-        <p:nvSpPr>
-          <p:cNvPr id="15" name="Rounded Rectangle 14"/>
+              <a:rPr sz="1650" b="1" i="0">
+                <a:solidFill>
+                  <a:srgbClr val="F3EEE0"/>
+                </a:solidFill>
+                <a:latin typeface="Helvetica Neue"/>
+              </a:rPr>
+              <a:t>JUnit et Cucumber répondent à deux questions différentes.</a:t>
+            </a:r>
+          </a:p>
+        </p:txBody>
+      </p:sp>
+      <p:sp>
+        <p:nvSpPr>
+          <p:cNvPr id="13" name="TextBox 12"/>
+          <p:cNvSpPr txBox="1"/>
+          <p:nvPr/>
+        </p:nvSpPr>
+        <p:spPr>
+          <a:xfrm>
+            <a:off x="2011680" y="3730752"/>
+            <a:ext cx="8961120" cy="457200"/>
+          </a:xfrm>
+          <a:prstGeom prst="rect">
+            <a:avLst/>
+          </a:prstGeom>
+          <a:noFill/>
+        </p:spPr>
+        <p:txBody>
+          <a:bodyPr wrap="square" lIns="0" tIns="0" rIns="0" bIns="0" anchor="t">
+            <a:spAutoFit/>
+          </a:bodyPr>
+          <a:lstStyle/>
+          <a:p>
+            <a:pPr algn="l">
+              <a:lnSpc>
+                <a:spcPct val="100000"/>
+              </a:lnSpc>
+              <a:spcAft>
+                <a:spcPts val="0"/>
+              </a:spcAft>
+            </a:pPr>
+            <a:r>
+              <a:rPr sz="1250" b="0" i="0">
+                <a:solidFill>
+                  <a:srgbClr val="9AA1B5"/>
+                </a:solidFill>
+                <a:latin typeface="Helvetica Neue"/>
+              </a:rPr>
+              <a:t>« Ça marche ? » contre « c'est le bon comportement ? »</a:t>
+            </a:r>
+          </a:p>
+        </p:txBody>
+      </p:sp>
+      <p:sp>
+        <p:nvSpPr>
+          <p:cNvPr id="14" name="Oval 13"/>
+          <p:cNvSpPr/>
+          <p:nvPr/>
+        </p:nvSpPr>
+        <p:spPr>
+          <a:xfrm>
+            <a:off x="946404" y="4347972"/>
+            <a:ext cx="685800" cy="685800"/>
+          </a:xfrm>
+          <a:prstGeom prst="ellipse">
+            <a:avLst/>
+          </a:prstGeom>
+          <a:solidFill>
+            <a:srgbClr val="0C111F"/>
+          </a:solidFill>
+          <a:ln>
+            <a:noFill/>
+          </a:ln>
+          <a:effectLst/>
+        </p:spPr>
+        <p:style>
+          <a:lnRef idx="1">
+            <a:schemeClr val="accent1"/>
+          </a:lnRef>
+          <a:fillRef idx="3">
+            <a:schemeClr val="accent1"/>
+          </a:fillRef>
+          <a:effectRef idx="2">
+            <a:schemeClr val="accent1"/>
+          </a:effectRef>
+          <a:fontRef idx="minor">
+            <a:schemeClr val="lt1"/>
+          </a:fontRef>
+        </p:style>
+        <p:txBody>
+          <a:bodyPr rtlCol="0" anchor="ctr"/>
+          <a:lstStyle/>
+          <a:p>
+            <a:pPr algn="ctr"/>
+            <a:endParaRPr/>
+          </a:p>
+        </p:txBody>
+      </p:sp>
+      <p:sp>
+        <p:nvSpPr>
+          <p:cNvPr id="15" name="Oval 14"/>
+          <p:cNvSpPr/>
+          <p:nvPr/>
+        </p:nvSpPr>
+        <p:spPr>
+          <a:xfrm rot="21240000">
+            <a:off x="891540" y="4293108"/>
+            <a:ext cx="685800" cy="685800"/>
+          </a:xfrm>
+          <a:prstGeom prst="ellipse">
+            <a:avLst/>
+          </a:prstGeom>
+          <a:solidFill>
+            <a:srgbClr val="FFD23F"/>
+          </a:solidFill>
+          <a:ln>
+            <a:noFill/>
+          </a:ln>
+          <a:effectLst/>
+        </p:spPr>
+        <p:style>
+          <a:lnRef idx="1">
+            <a:schemeClr val="accent1"/>
+          </a:lnRef>
+          <a:fillRef idx="3">
+            <a:schemeClr val="accent1"/>
+          </a:fillRef>
+          <a:effectRef idx="2">
+            <a:schemeClr val="accent1"/>
+          </a:effectRef>
+          <a:fontRef idx="minor">
+            <a:schemeClr val="lt1"/>
+          </a:fontRef>
+        </p:style>
+        <p:txBody>
+          <a:bodyPr wrap="square" lIns="54864" rIns="54864" rtlCol="0" anchor="ctr"/>
+          <a:lstStyle/>
+          <a:p>
+            <a:pPr algn="ctr"/>
+            <a:r>
+              <a:rPr sz="2200" b="1">
+                <a:solidFill>
+                  <a:srgbClr val="0C111F"/>
+                </a:solidFill>
+                <a:latin typeface="Helvetica Neue"/>
+              </a:rPr>
+              <a:t>3</a:t>
+            </a:r>
+          </a:p>
+        </p:txBody>
+      </p:sp>
+      <p:sp>
+        <p:nvSpPr>
+          <p:cNvPr id="16" name="TextBox 15"/>
+          <p:cNvSpPr txBox="1"/>
+          <p:nvPr/>
+        </p:nvSpPr>
+        <p:spPr>
+          <a:xfrm>
+            <a:off x="2011680" y="4361688"/>
+            <a:ext cx="8961120" cy="502920"/>
+          </a:xfrm>
+          <a:prstGeom prst="rect">
+            <a:avLst/>
+          </a:prstGeom>
+          <a:noFill/>
+        </p:spPr>
+        <p:txBody>
+          <a:bodyPr wrap="square" lIns="0" tIns="0" rIns="0" bIns="0" anchor="t">
+            <a:spAutoFit/>
+          </a:bodyPr>
+          <a:lstStyle/>
+          <a:p>
+            <a:pPr algn="l">
+              <a:lnSpc>
+                <a:spcPct val="100000"/>
+              </a:lnSpc>
+              <a:spcAft>
+                <a:spcPts val="0"/>
+              </a:spcAft>
+            </a:pPr>
+            <a:r>
+              <a:rPr sz="1650" b="1" i="0">
+                <a:solidFill>
+                  <a:srgbClr val="F3EEE0"/>
+                </a:solidFill>
+                <a:latin typeface="Helvetica Neue"/>
+              </a:rPr>
+              <a:t>Le rapport de couverture n'est pas un objectif.</a:t>
+            </a:r>
+          </a:p>
+        </p:txBody>
+      </p:sp>
+      <p:sp>
+        <p:nvSpPr>
+          <p:cNvPr id="17" name="TextBox 16"/>
+          <p:cNvSpPr txBox="1"/>
+          <p:nvPr/>
+        </p:nvSpPr>
+        <p:spPr>
+          <a:xfrm>
+            <a:off x="2011680" y="4828032"/>
+            <a:ext cx="8961120" cy="457200"/>
+          </a:xfrm>
+          <a:prstGeom prst="rect">
+            <a:avLst/>
+          </a:prstGeom>
+          <a:noFill/>
+        </p:spPr>
+        <p:txBody>
+          <a:bodyPr wrap="square" lIns="0" tIns="0" rIns="0" bIns="0" anchor="t">
+            <a:spAutoFit/>
+          </a:bodyPr>
+          <a:lstStyle/>
+          <a:p>
+            <a:pPr algn="l">
+              <a:lnSpc>
+                <a:spcPct val="100000"/>
+              </a:lnSpc>
+              <a:spcAft>
+                <a:spcPts val="0"/>
+              </a:spcAft>
+            </a:pPr>
+            <a:r>
+              <a:rPr sz="1250" b="0" i="0">
+                <a:solidFill>
+                  <a:srgbClr val="9AA1B5"/>
+                </a:solidFill>
+                <a:latin typeface="Helvetica Neue"/>
+              </a:rPr>
+              <a:t>C'est un radar : il montre où regarder en premier.</a:t>
+            </a:r>
+          </a:p>
+        </p:txBody>
+      </p:sp>
+      <p:sp>
+        <p:nvSpPr>
+          <p:cNvPr id="22" name="Rounded Rectangle 21"/>
           <p:cNvSpPr/>
           <p:nvPr/>
         </p:nvSpPr>
@@ -22350,14 +22636,14 @@
                 </a:solidFill>
                 <a:latin typeface="Helvetica Neue"/>
               </a:rPr>
-              <a:t>26/29</a:t>
-            </a:r>
-          </a:p>
-        </p:txBody>
-      </p:sp>
-      <p:sp>
-        <p:nvSpPr>
-          <p:cNvPr id="16" name="TextBox 15"/>
+              <a:t>27/29</a:t>
+            </a:r>
+          </a:p>
+        </p:txBody>
+      </p:sp>
+      <p:sp>
+        <p:nvSpPr>
+          <p:cNvPr id="23" name="TextBox 22"/>
           <p:cNvSpPr txBox="1"/>
           <p:nvPr/>
         </p:nvSpPr>
@@ -22409,1058 +22695,6 @@
 </file>
 
 <file path=ppt/slides/slide27.xml><?xml version="1.0" encoding="utf-8"?>
-<p:sld xmlns:a="http://schemas.openxmlformats.org/drawingml/2006/main" xmlns:r="http://schemas.openxmlformats.org/officeDocument/2006/relationships" xmlns:p="http://schemas.openxmlformats.org/presentationml/2006/main">
-  <p:cSld>
-    <p:bg>
-      <p:bgPr>
-        <a:solidFill>
-          <a:srgbClr val="0C111F"/>
-        </a:solidFill>
-        <a:effectLst/>
-      </p:bgPr>
-    </p:bg>
-    <p:spTree>
-      <p:nvGrpSpPr>
-        <p:cNvPr id="1" name=""/>
-        <p:cNvGrpSpPr/>
-        <p:nvPr/>
-      </p:nvGrpSpPr>
-      <p:grpSpPr>
-        <a:xfrm>
-          <a:off x="0" y="0"/>
-          <a:ext cx="0" cy="0"/>
-          <a:chOff x="0" y="0"/>
-          <a:chExt cx="0" cy="0"/>
-        </a:xfrm>
-      </p:grpSpPr>
-      <p:sp>
-        <p:nvSpPr>
-          <p:cNvPr id="2" name="Parallelogram 1"/>
-          <p:cNvSpPr/>
-          <p:nvPr/>
-        </p:nvSpPr>
-        <p:spPr>
-          <a:xfrm>
-            <a:off x="-164592" y="384048"/>
-            <a:ext cx="2148840" cy="420624"/>
-          </a:xfrm>
-          <a:prstGeom prst="parallelogram">
-            <a:avLst/>
-          </a:prstGeom>
-          <a:solidFill>
-            <a:srgbClr val="FFD23F"/>
-          </a:solidFill>
-          <a:ln>
-            <a:noFill/>
-          </a:ln>
-          <a:effectLst/>
-        </p:spPr>
-        <p:style>
-          <a:lnRef idx="1">
-            <a:schemeClr val="accent1"/>
-          </a:lnRef>
-          <a:fillRef idx="3">
-            <a:schemeClr val="accent1"/>
-          </a:fillRef>
-          <a:effectRef idx="2">
-            <a:schemeClr val="accent1"/>
-          </a:effectRef>
-          <a:fontRef idx="minor">
-            <a:schemeClr val="lt1"/>
-          </a:fontRef>
-        </p:style>
-        <p:txBody>
-          <a:bodyPr lIns="256032" tIns="18288" rIns="45720" bIns="18288" rtlCol="0" anchor="ctr"/>
-          <a:lstStyle/>
-          <a:p>
-            <a:pPr algn="l"/>
-            <a:r>
-              <a:rPr sz="1150" b="1">
-                <a:solidFill>
-                  <a:srgbClr val="0C111F"/>
-                </a:solidFill>
-                <a:latin typeface="Helvetica Neue"/>
-              </a:rPr>
-              <a:t>À RETENIR</a:t>
-            </a:r>
-          </a:p>
-        </p:txBody>
-      </p:sp>
-      <p:sp>
-        <p:nvSpPr>
-          <p:cNvPr id="3" name="TextBox 2"/>
-          <p:cNvSpPr txBox="1"/>
-          <p:nvPr/>
-        </p:nvSpPr>
-        <p:spPr>
-          <a:xfrm>
-            <a:off x="822960" y="1051560"/>
-            <a:ext cx="10058400" cy="822960"/>
-          </a:xfrm>
-          <a:prstGeom prst="rect">
-            <a:avLst/>
-          </a:prstGeom>
-          <a:noFill/>
-        </p:spPr>
-        <p:txBody>
-          <a:bodyPr wrap="square" lIns="0" tIns="0" rIns="0" bIns="0" anchor="t">
-            <a:spAutoFit/>
-          </a:bodyPr>
-          <a:lstStyle/>
-          <a:p>
-            <a:pPr algn="l">
-              <a:lnSpc>
-                <a:spcPct val="100000"/>
-              </a:lnSpc>
-              <a:spcAft>
-                <a:spcPts val="0"/>
-              </a:spcAft>
-            </a:pPr>
-            <a:r>
-              <a:rPr sz="3000" b="1" i="0">
-                <a:solidFill>
-                  <a:srgbClr val="F3EEE0"/>
-                </a:solidFill>
-                <a:latin typeface="Helvetica Neue"/>
-              </a:rPr>
-              <a:t>Ce qu'il faut retenir</a:t>
-            </a:r>
-          </a:p>
-        </p:txBody>
-      </p:sp>
-      <p:sp>
-        <p:nvSpPr>
-          <p:cNvPr id="4" name="Oval 3"/>
-          <p:cNvSpPr/>
-          <p:nvPr/>
-        </p:nvSpPr>
-        <p:spPr>
-          <a:xfrm>
-            <a:off x="10273284" y="443484"/>
-            <a:ext cx="1051560" cy="1051560"/>
-          </a:xfrm>
-          <a:prstGeom prst="ellipse">
-            <a:avLst/>
-          </a:prstGeom>
-          <a:solidFill>
-            <a:srgbClr val="0C111F"/>
-          </a:solidFill>
-          <a:ln>
-            <a:noFill/>
-          </a:ln>
-          <a:effectLst/>
-        </p:spPr>
-        <p:style>
-          <a:lnRef idx="1">
-            <a:schemeClr val="accent1"/>
-          </a:lnRef>
-          <a:fillRef idx="3">
-            <a:schemeClr val="accent1"/>
-          </a:fillRef>
-          <a:effectRef idx="2">
-            <a:schemeClr val="accent1"/>
-          </a:effectRef>
-          <a:fontRef idx="minor">
-            <a:schemeClr val="lt1"/>
-          </a:fontRef>
-        </p:style>
-        <p:txBody>
-          <a:bodyPr rtlCol="0" anchor="ctr"/>
-          <a:lstStyle/>
-          <a:p>
-            <a:pPr algn="ctr"/>
-            <a:endParaRPr/>
-          </a:p>
-        </p:txBody>
-      </p:sp>
-      <p:sp>
-        <p:nvSpPr>
-          <p:cNvPr id="5" name="Oval 4"/>
-          <p:cNvSpPr/>
-          <p:nvPr/>
-        </p:nvSpPr>
-        <p:spPr>
-          <a:xfrm rot="360000">
-            <a:off x="10218420" y="388620"/>
-            <a:ext cx="1051560" cy="1051560"/>
-          </a:xfrm>
-          <a:prstGeom prst="ellipse">
-            <a:avLst/>
-          </a:prstGeom>
-          <a:solidFill>
-            <a:srgbClr val="FFD23F"/>
-          </a:solidFill>
-          <a:ln>
-            <a:noFill/>
-          </a:ln>
-          <a:effectLst/>
-        </p:spPr>
-        <p:style>
-          <a:lnRef idx="1">
-            <a:schemeClr val="accent1"/>
-          </a:lnRef>
-          <a:fillRef idx="3">
-            <a:schemeClr val="accent1"/>
-          </a:fillRef>
-          <a:effectRef idx="2">
-            <a:schemeClr val="accent1"/>
-          </a:effectRef>
-          <a:fontRef idx="minor">
-            <a:schemeClr val="lt1"/>
-          </a:fontRef>
-        </p:style>
-        <p:txBody>
-          <a:bodyPr wrap="square" lIns="54864" rIns="54864" rtlCol="0" anchor="ctr"/>
-          <a:lstStyle/>
-          <a:p>
-            <a:pPr algn="ctr"/>
-            <a:r>
-              <a:rPr sz="1300" b="1">
-                <a:solidFill>
-                  <a:srgbClr val="0C111F"/>
-                </a:solidFill>
-                <a:latin typeface="Helvetica Neue"/>
-              </a:rPr>
-              <a:t>tl;dr</a:t>
-            </a:r>
-          </a:p>
-        </p:txBody>
-      </p:sp>
-      <p:sp>
-        <p:nvSpPr>
-          <p:cNvPr id="6" name="Oval 5"/>
-          <p:cNvSpPr/>
-          <p:nvPr/>
-        </p:nvSpPr>
-        <p:spPr>
-          <a:xfrm>
-            <a:off x="946404" y="2153412"/>
-            <a:ext cx="685800" cy="685800"/>
-          </a:xfrm>
-          <a:prstGeom prst="ellipse">
-            <a:avLst/>
-          </a:prstGeom>
-          <a:solidFill>
-            <a:srgbClr val="0C111F"/>
-          </a:solidFill>
-          <a:ln>
-            <a:noFill/>
-          </a:ln>
-          <a:effectLst/>
-        </p:spPr>
-        <p:style>
-          <a:lnRef idx="1">
-            <a:schemeClr val="accent1"/>
-          </a:lnRef>
-          <a:fillRef idx="3">
-            <a:schemeClr val="accent1"/>
-          </a:fillRef>
-          <a:effectRef idx="2">
-            <a:schemeClr val="accent1"/>
-          </a:effectRef>
-          <a:fontRef idx="minor">
-            <a:schemeClr val="lt1"/>
-          </a:fontRef>
-        </p:style>
-        <p:txBody>
-          <a:bodyPr rtlCol="0" anchor="ctr"/>
-          <a:lstStyle/>
-          <a:p>
-            <a:pPr algn="ctr"/>
-            <a:endParaRPr/>
-          </a:p>
-        </p:txBody>
-      </p:sp>
-      <p:sp>
-        <p:nvSpPr>
-          <p:cNvPr id="7" name="Oval 6"/>
-          <p:cNvSpPr/>
-          <p:nvPr/>
-        </p:nvSpPr>
-        <p:spPr>
-          <a:xfrm rot="21240000">
-            <a:off x="891540" y="2098548"/>
-            <a:ext cx="685800" cy="685800"/>
-          </a:xfrm>
-          <a:prstGeom prst="ellipse">
-            <a:avLst/>
-          </a:prstGeom>
-          <a:solidFill>
-            <a:srgbClr val="FFD23F"/>
-          </a:solidFill>
-          <a:ln>
-            <a:noFill/>
-          </a:ln>
-          <a:effectLst/>
-        </p:spPr>
-        <p:style>
-          <a:lnRef idx="1">
-            <a:schemeClr val="accent1"/>
-          </a:lnRef>
-          <a:fillRef idx="3">
-            <a:schemeClr val="accent1"/>
-          </a:fillRef>
-          <a:effectRef idx="2">
-            <a:schemeClr val="accent1"/>
-          </a:effectRef>
-          <a:fontRef idx="minor">
-            <a:schemeClr val="lt1"/>
-          </a:fontRef>
-        </p:style>
-        <p:txBody>
-          <a:bodyPr wrap="square" lIns="54864" rIns="54864" rtlCol="0" anchor="ctr"/>
-          <a:lstStyle/>
-          <a:p>
-            <a:pPr algn="ctr"/>
-            <a:r>
-              <a:rPr sz="2200" b="1">
-                <a:solidFill>
-                  <a:srgbClr val="0C111F"/>
-                </a:solidFill>
-                <a:latin typeface="Helvetica Neue"/>
-              </a:rPr>
-              <a:t>1</a:t>
-            </a:r>
-          </a:p>
-        </p:txBody>
-      </p:sp>
-      <p:sp>
-        <p:nvSpPr>
-          <p:cNvPr id="8" name="TextBox 7"/>
-          <p:cNvSpPr txBox="1"/>
-          <p:nvPr/>
-        </p:nvSpPr>
-        <p:spPr>
-          <a:xfrm>
-            <a:off x="2011680" y="2167128"/>
-            <a:ext cx="8961120" cy="502920"/>
-          </a:xfrm>
-          <a:prstGeom prst="rect">
-            <a:avLst/>
-          </a:prstGeom>
-          <a:noFill/>
-        </p:spPr>
-        <p:txBody>
-          <a:bodyPr wrap="square" lIns="0" tIns="0" rIns="0" bIns="0" anchor="t">
-            <a:spAutoFit/>
-          </a:bodyPr>
-          <a:lstStyle/>
-          <a:p>
-            <a:pPr algn="l">
-              <a:lnSpc>
-                <a:spcPct val="100000"/>
-              </a:lnSpc>
-              <a:spcAft>
-                <a:spcPts val="0"/>
-              </a:spcAft>
-            </a:pPr>
-            <a:r>
-              <a:rPr sz="1650" b="1" i="0">
-                <a:solidFill>
-                  <a:srgbClr val="F3EEE0"/>
-                </a:solidFill>
-                <a:latin typeface="Helvetica Neue"/>
-              </a:rPr>
-              <a:t>Un test vert ne dit pas ce qu'il a vérifié.</a:t>
-            </a:r>
-          </a:p>
-        </p:txBody>
-      </p:sp>
-      <p:sp>
-        <p:nvSpPr>
-          <p:cNvPr id="9" name="TextBox 8"/>
-          <p:cNvSpPr txBox="1"/>
-          <p:nvPr/>
-        </p:nvSpPr>
-        <p:spPr>
-          <a:xfrm>
-            <a:off x="2011680" y="2633472"/>
-            <a:ext cx="8961120" cy="457200"/>
-          </a:xfrm>
-          <a:prstGeom prst="rect">
-            <a:avLst/>
-          </a:prstGeom>
-          <a:noFill/>
-        </p:spPr>
-        <p:txBody>
-          <a:bodyPr wrap="square" lIns="0" tIns="0" rIns="0" bIns="0" anchor="t">
-            <a:spAutoFit/>
-          </a:bodyPr>
-          <a:lstStyle/>
-          <a:p>
-            <a:pPr algn="l">
-              <a:lnSpc>
-                <a:spcPct val="100000"/>
-              </a:lnSpc>
-              <a:spcAft>
-                <a:spcPts val="0"/>
-              </a:spcAft>
-            </a:pPr>
-            <a:r>
-              <a:rPr sz="1250" b="0" i="0">
-                <a:solidFill>
-                  <a:srgbClr val="9AA1B5"/>
-                </a:solidFill>
-                <a:latin typeface="Helvetica Neue"/>
-              </a:rPr>
-              <a:t>La couverture, si.</a:t>
-            </a:r>
-          </a:p>
-        </p:txBody>
-      </p:sp>
-      <p:sp>
-        <p:nvSpPr>
-          <p:cNvPr id="10" name="Oval 9"/>
-          <p:cNvSpPr/>
-          <p:nvPr/>
-        </p:nvSpPr>
-        <p:spPr>
-          <a:xfrm>
-            <a:off x="946404" y="3250692"/>
-            <a:ext cx="685800" cy="685800"/>
-          </a:xfrm>
-          <a:prstGeom prst="ellipse">
-            <a:avLst/>
-          </a:prstGeom>
-          <a:solidFill>
-            <a:srgbClr val="0C111F"/>
-          </a:solidFill>
-          <a:ln>
-            <a:noFill/>
-          </a:ln>
-          <a:effectLst/>
-        </p:spPr>
-        <p:style>
-          <a:lnRef idx="1">
-            <a:schemeClr val="accent1"/>
-          </a:lnRef>
-          <a:fillRef idx="3">
-            <a:schemeClr val="accent1"/>
-          </a:fillRef>
-          <a:effectRef idx="2">
-            <a:schemeClr val="accent1"/>
-          </a:effectRef>
-          <a:fontRef idx="minor">
-            <a:schemeClr val="lt1"/>
-          </a:fontRef>
-        </p:style>
-        <p:txBody>
-          <a:bodyPr rtlCol="0" anchor="ctr"/>
-          <a:lstStyle/>
-          <a:p>
-            <a:pPr algn="ctr"/>
-            <a:endParaRPr/>
-          </a:p>
-        </p:txBody>
-      </p:sp>
-      <p:sp>
-        <p:nvSpPr>
-          <p:cNvPr id="11" name="Oval 10"/>
-          <p:cNvSpPr/>
-          <p:nvPr/>
-        </p:nvSpPr>
-        <p:spPr>
-          <a:xfrm rot="21240000">
-            <a:off x="891540" y="3195828"/>
-            <a:ext cx="685800" cy="685800"/>
-          </a:xfrm>
-          <a:prstGeom prst="ellipse">
-            <a:avLst/>
-          </a:prstGeom>
-          <a:solidFill>
-            <a:srgbClr val="FFD23F"/>
-          </a:solidFill>
-          <a:ln>
-            <a:noFill/>
-          </a:ln>
-          <a:effectLst/>
-        </p:spPr>
-        <p:style>
-          <a:lnRef idx="1">
-            <a:schemeClr val="accent1"/>
-          </a:lnRef>
-          <a:fillRef idx="3">
-            <a:schemeClr val="accent1"/>
-          </a:fillRef>
-          <a:effectRef idx="2">
-            <a:schemeClr val="accent1"/>
-          </a:effectRef>
-          <a:fontRef idx="minor">
-            <a:schemeClr val="lt1"/>
-          </a:fontRef>
-        </p:style>
-        <p:txBody>
-          <a:bodyPr wrap="square" lIns="54864" rIns="54864" rtlCol="0" anchor="ctr"/>
-          <a:lstStyle/>
-          <a:p>
-            <a:pPr algn="ctr"/>
-            <a:r>
-              <a:rPr sz="2200" b="1">
-                <a:solidFill>
-                  <a:srgbClr val="0C111F"/>
-                </a:solidFill>
-                <a:latin typeface="Helvetica Neue"/>
-              </a:rPr>
-              <a:t>2</a:t>
-            </a:r>
-          </a:p>
-        </p:txBody>
-      </p:sp>
-      <p:sp>
-        <p:nvSpPr>
-          <p:cNvPr id="12" name="TextBox 11"/>
-          <p:cNvSpPr txBox="1"/>
-          <p:nvPr/>
-        </p:nvSpPr>
-        <p:spPr>
-          <a:xfrm>
-            <a:off x="2011680" y="3264408"/>
-            <a:ext cx="8961120" cy="502920"/>
-          </a:xfrm>
-          <a:prstGeom prst="rect">
-            <a:avLst/>
-          </a:prstGeom>
-          <a:noFill/>
-        </p:spPr>
-        <p:txBody>
-          <a:bodyPr wrap="square" lIns="0" tIns="0" rIns="0" bIns="0" anchor="t">
-            <a:spAutoFit/>
-          </a:bodyPr>
-          <a:lstStyle/>
-          <a:p>
-            <a:pPr algn="l">
-              <a:lnSpc>
-                <a:spcPct val="100000"/>
-              </a:lnSpc>
-              <a:spcAft>
-                <a:spcPts val="0"/>
-              </a:spcAft>
-            </a:pPr>
-            <a:r>
-              <a:rPr sz="1650" b="1" i="0">
-                <a:solidFill>
-                  <a:srgbClr val="F3EEE0"/>
-                </a:solidFill>
-                <a:latin typeface="Helvetica Neue"/>
-              </a:rPr>
-              <a:t>JUnit et Cucumber répondent à deux questions différentes.</a:t>
-            </a:r>
-          </a:p>
-        </p:txBody>
-      </p:sp>
-      <p:sp>
-        <p:nvSpPr>
-          <p:cNvPr id="13" name="TextBox 12"/>
-          <p:cNvSpPr txBox="1"/>
-          <p:nvPr/>
-        </p:nvSpPr>
-        <p:spPr>
-          <a:xfrm>
-            <a:off x="2011680" y="3730752"/>
-            <a:ext cx="8961120" cy="457200"/>
-          </a:xfrm>
-          <a:prstGeom prst="rect">
-            <a:avLst/>
-          </a:prstGeom>
-          <a:noFill/>
-        </p:spPr>
-        <p:txBody>
-          <a:bodyPr wrap="square" lIns="0" tIns="0" rIns="0" bIns="0" anchor="t">
-            <a:spAutoFit/>
-          </a:bodyPr>
-          <a:lstStyle/>
-          <a:p>
-            <a:pPr algn="l">
-              <a:lnSpc>
-                <a:spcPct val="100000"/>
-              </a:lnSpc>
-              <a:spcAft>
-                <a:spcPts val="0"/>
-              </a:spcAft>
-            </a:pPr>
-            <a:r>
-              <a:rPr sz="1250" b="0" i="0">
-                <a:solidFill>
-                  <a:srgbClr val="9AA1B5"/>
-                </a:solidFill>
-                <a:latin typeface="Helvetica Neue"/>
-              </a:rPr>
-              <a:t>« Ça marche ? » contre « c'est le bon comportement ? »</a:t>
-            </a:r>
-          </a:p>
-        </p:txBody>
-      </p:sp>
-      <p:sp>
-        <p:nvSpPr>
-          <p:cNvPr id="14" name="Oval 13"/>
-          <p:cNvSpPr/>
-          <p:nvPr/>
-        </p:nvSpPr>
-        <p:spPr>
-          <a:xfrm>
-            <a:off x="946404" y="4347972"/>
-            <a:ext cx="685800" cy="685800"/>
-          </a:xfrm>
-          <a:prstGeom prst="ellipse">
-            <a:avLst/>
-          </a:prstGeom>
-          <a:solidFill>
-            <a:srgbClr val="0C111F"/>
-          </a:solidFill>
-          <a:ln>
-            <a:noFill/>
-          </a:ln>
-          <a:effectLst/>
-        </p:spPr>
-        <p:style>
-          <a:lnRef idx="1">
-            <a:schemeClr val="accent1"/>
-          </a:lnRef>
-          <a:fillRef idx="3">
-            <a:schemeClr val="accent1"/>
-          </a:fillRef>
-          <a:effectRef idx="2">
-            <a:schemeClr val="accent1"/>
-          </a:effectRef>
-          <a:fontRef idx="minor">
-            <a:schemeClr val="lt1"/>
-          </a:fontRef>
-        </p:style>
-        <p:txBody>
-          <a:bodyPr rtlCol="0" anchor="ctr"/>
-          <a:lstStyle/>
-          <a:p>
-            <a:pPr algn="ctr"/>
-            <a:endParaRPr/>
-          </a:p>
-        </p:txBody>
-      </p:sp>
-      <p:sp>
-        <p:nvSpPr>
-          <p:cNvPr id="15" name="Oval 14"/>
-          <p:cNvSpPr/>
-          <p:nvPr/>
-        </p:nvSpPr>
-        <p:spPr>
-          <a:xfrm rot="21240000">
-            <a:off x="891540" y="4293108"/>
-            <a:ext cx="685800" cy="685800"/>
-          </a:xfrm>
-          <a:prstGeom prst="ellipse">
-            <a:avLst/>
-          </a:prstGeom>
-          <a:solidFill>
-            <a:srgbClr val="FFD23F"/>
-          </a:solidFill>
-          <a:ln>
-            <a:noFill/>
-          </a:ln>
-          <a:effectLst/>
-        </p:spPr>
-        <p:style>
-          <a:lnRef idx="1">
-            <a:schemeClr val="accent1"/>
-          </a:lnRef>
-          <a:fillRef idx="3">
-            <a:schemeClr val="accent1"/>
-          </a:fillRef>
-          <a:effectRef idx="2">
-            <a:schemeClr val="accent1"/>
-          </a:effectRef>
-          <a:fontRef idx="minor">
-            <a:schemeClr val="lt1"/>
-          </a:fontRef>
-        </p:style>
-        <p:txBody>
-          <a:bodyPr wrap="square" lIns="54864" rIns="54864" rtlCol="0" anchor="ctr"/>
-          <a:lstStyle/>
-          <a:p>
-            <a:pPr algn="ctr"/>
-            <a:r>
-              <a:rPr sz="2200" b="1">
-                <a:solidFill>
-                  <a:srgbClr val="0C111F"/>
-                </a:solidFill>
-                <a:latin typeface="Helvetica Neue"/>
-              </a:rPr>
-              <a:t>3</a:t>
-            </a:r>
-          </a:p>
-        </p:txBody>
-      </p:sp>
-      <p:sp>
-        <p:nvSpPr>
-          <p:cNvPr id="16" name="TextBox 15"/>
-          <p:cNvSpPr txBox="1"/>
-          <p:nvPr/>
-        </p:nvSpPr>
-        <p:spPr>
-          <a:xfrm>
-            <a:off x="2011680" y="4361688"/>
-            <a:ext cx="8961120" cy="502920"/>
-          </a:xfrm>
-          <a:prstGeom prst="rect">
-            <a:avLst/>
-          </a:prstGeom>
-          <a:noFill/>
-        </p:spPr>
-        <p:txBody>
-          <a:bodyPr wrap="square" lIns="0" tIns="0" rIns="0" bIns="0" anchor="t">
-            <a:spAutoFit/>
-          </a:bodyPr>
-          <a:lstStyle/>
-          <a:p>
-            <a:pPr algn="l">
-              <a:lnSpc>
-                <a:spcPct val="100000"/>
-              </a:lnSpc>
-              <a:spcAft>
-                <a:spcPts val="0"/>
-              </a:spcAft>
-            </a:pPr>
-            <a:r>
-              <a:rPr sz="1650" b="1" i="0">
-                <a:solidFill>
-                  <a:srgbClr val="F3EEE0"/>
-                </a:solidFill>
-                <a:latin typeface="Helvetica Neue"/>
-              </a:rPr>
-              <a:t>Le rapport de couverture n'est pas un objectif.</a:t>
-            </a:r>
-          </a:p>
-        </p:txBody>
-      </p:sp>
-      <p:sp>
-        <p:nvSpPr>
-          <p:cNvPr id="17" name="TextBox 16"/>
-          <p:cNvSpPr txBox="1"/>
-          <p:nvPr/>
-        </p:nvSpPr>
-        <p:spPr>
-          <a:xfrm>
-            <a:off x="2011680" y="4828032"/>
-            <a:ext cx="8961120" cy="457200"/>
-          </a:xfrm>
-          <a:prstGeom prst="rect">
-            <a:avLst/>
-          </a:prstGeom>
-          <a:noFill/>
-        </p:spPr>
-        <p:txBody>
-          <a:bodyPr wrap="square" lIns="0" tIns="0" rIns="0" bIns="0" anchor="t">
-            <a:spAutoFit/>
-          </a:bodyPr>
-          <a:lstStyle/>
-          <a:p>
-            <a:pPr algn="l">
-              <a:lnSpc>
-                <a:spcPct val="100000"/>
-              </a:lnSpc>
-              <a:spcAft>
-                <a:spcPts val="0"/>
-              </a:spcAft>
-            </a:pPr>
-            <a:r>
-              <a:rPr sz="1250" b="0" i="0">
-                <a:solidFill>
-                  <a:srgbClr val="9AA1B5"/>
-                </a:solidFill>
-                <a:latin typeface="Helvetica Neue"/>
-              </a:rPr>
-              <a:t>C'est un radar : il montre où regarder en premier.</a:t>
-            </a:r>
-          </a:p>
-        </p:txBody>
-      </p:sp>
-      <p:sp>
-        <p:nvSpPr>
-          <p:cNvPr id="18" name="Oval 17"/>
-          <p:cNvSpPr/>
-          <p:nvPr/>
-        </p:nvSpPr>
-        <p:spPr>
-          <a:xfrm>
-            <a:off x="946404" y="5445252"/>
-            <a:ext cx="685800" cy="685800"/>
-          </a:xfrm>
-          <a:prstGeom prst="ellipse">
-            <a:avLst/>
-          </a:prstGeom>
-          <a:solidFill>
-            <a:srgbClr val="0C111F"/>
-          </a:solidFill>
-          <a:ln>
-            <a:noFill/>
-          </a:ln>
-          <a:effectLst/>
-        </p:spPr>
-        <p:style>
-          <a:lnRef idx="1">
-            <a:schemeClr val="accent1"/>
-          </a:lnRef>
-          <a:fillRef idx="3">
-            <a:schemeClr val="accent1"/>
-          </a:fillRef>
-          <a:effectRef idx="2">
-            <a:schemeClr val="accent1"/>
-          </a:effectRef>
-          <a:fontRef idx="minor">
-            <a:schemeClr val="lt1"/>
-          </a:fontRef>
-        </p:style>
-        <p:txBody>
-          <a:bodyPr rtlCol="0" anchor="ctr"/>
-          <a:lstStyle/>
-          <a:p>
-            <a:pPr algn="ctr"/>
-            <a:endParaRPr/>
-          </a:p>
-        </p:txBody>
-      </p:sp>
-      <p:sp>
-        <p:nvSpPr>
-          <p:cNvPr id="19" name="Oval 18"/>
-          <p:cNvSpPr/>
-          <p:nvPr/>
-        </p:nvSpPr>
-        <p:spPr>
-          <a:xfrm rot="21240000">
-            <a:off x="891540" y="5390388"/>
-            <a:ext cx="685800" cy="685800"/>
-          </a:xfrm>
-          <a:prstGeom prst="ellipse">
-            <a:avLst/>
-          </a:prstGeom>
-          <a:solidFill>
-            <a:srgbClr val="FFD23F"/>
-          </a:solidFill>
-          <a:ln>
-            <a:noFill/>
-          </a:ln>
-          <a:effectLst/>
-        </p:spPr>
-        <p:style>
-          <a:lnRef idx="1">
-            <a:schemeClr val="accent1"/>
-          </a:lnRef>
-          <a:fillRef idx="3">
-            <a:schemeClr val="accent1"/>
-          </a:fillRef>
-          <a:effectRef idx="2">
-            <a:schemeClr val="accent1"/>
-          </a:effectRef>
-          <a:fontRef idx="minor">
-            <a:schemeClr val="lt1"/>
-          </a:fontRef>
-        </p:style>
-        <p:txBody>
-          <a:bodyPr wrap="square" lIns="54864" rIns="54864" rtlCol="0" anchor="ctr"/>
-          <a:lstStyle/>
-          <a:p>
-            <a:pPr algn="ctr"/>
-            <a:r>
-              <a:rPr sz="2200" b="1">
-                <a:solidFill>
-                  <a:srgbClr val="0C111F"/>
-                </a:solidFill>
-                <a:latin typeface="Helvetica Neue"/>
-              </a:rPr>
-              <a:t>4</a:t>
-            </a:r>
-          </a:p>
-        </p:txBody>
-      </p:sp>
-      <p:sp>
-        <p:nvSpPr>
-          <p:cNvPr id="20" name="TextBox 19"/>
-          <p:cNvSpPr txBox="1"/>
-          <p:nvPr/>
-        </p:nvSpPr>
-        <p:spPr>
-          <a:xfrm>
-            <a:off x="2011680" y="5458968"/>
-            <a:ext cx="8961120" cy="502920"/>
-          </a:xfrm>
-          <a:prstGeom prst="rect">
-            <a:avLst/>
-          </a:prstGeom>
-          <a:noFill/>
-        </p:spPr>
-        <p:txBody>
-          <a:bodyPr wrap="square" lIns="0" tIns="0" rIns="0" bIns="0" anchor="t">
-            <a:spAutoFit/>
-          </a:bodyPr>
-          <a:lstStyle/>
-          <a:p>
-            <a:pPr algn="l">
-              <a:lnSpc>
-                <a:spcPct val="100000"/>
-              </a:lnSpc>
-              <a:spcAft>
-                <a:spcPts val="0"/>
-              </a:spcAft>
-            </a:pPr>
-            <a:r>
-              <a:rPr sz="1650" b="1" i="0">
-                <a:solidFill>
-                  <a:srgbClr val="F3EEE0"/>
-                </a:solidFill>
-                <a:latin typeface="Helvetica Neue"/>
-              </a:rPr>
-              <a:t>Un outil ne remplace pas la question qu'on ne s'est pas posée.</a:t>
-            </a:r>
-          </a:p>
-        </p:txBody>
-      </p:sp>
-      <p:sp>
-        <p:nvSpPr>
-          <p:cNvPr id="21" name="TextBox 20"/>
-          <p:cNvSpPr txBox="1"/>
-          <p:nvPr/>
-        </p:nvSpPr>
-        <p:spPr>
-          <a:xfrm>
-            <a:off x="2011680" y="5925312"/>
-            <a:ext cx="8961120" cy="457200"/>
-          </a:xfrm>
-          <a:prstGeom prst="rect">
-            <a:avLst/>
-          </a:prstGeom>
-          <a:noFill/>
-        </p:spPr>
-        <p:txBody>
-          <a:bodyPr wrap="square" lIns="0" tIns="0" rIns="0" bIns="0" anchor="t">
-            <a:spAutoFit/>
-          </a:bodyPr>
-          <a:lstStyle/>
-          <a:p>
-            <a:pPr algn="l">
-              <a:lnSpc>
-                <a:spcPct val="100000"/>
-              </a:lnSpc>
-              <a:spcAft>
-                <a:spcPts val="0"/>
-              </a:spcAft>
-            </a:pPr>
-            <a:r>
-              <a:rPr sz="1250" b="0" i="0">
-                <a:solidFill>
-                  <a:srgbClr val="9AA1B5"/>
-                </a:solidFill>
-                <a:latin typeface="Helvetica Neue"/>
-              </a:rPr>
-              <a:t>Ni Jacoco, ni Sonar, ni celui d'après.</a:t>
-            </a:r>
-          </a:p>
-        </p:txBody>
-      </p:sp>
-      <p:sp>
-        <p:nvSpPr>
-          <p:cNvPr id="22" name="Rounded Rectangle 21"/>
-          <p:cNvSpPr/>
-          <p:nvPr/>
-        </p:nvSpPr>
-        <p:spPr>
-          <a:xfrm>
-            <a:off x="11201400" y="6419088"/>
-            <a:ext cx="713232" cy="329184"/>
-          </a:xfrm>
-          <a:prstGeom prst="roundRect">
-            <a:avLst/>
-          </a:prstGeom>
-          <a:solidFill>
-            <a:srgbClr val="171F33"/>
-          </a:solidFill>
-          <a:ln>
-            <a:noFill/>
-          </a:ln>
-          <a:effectLst/>
-        </p:spPr>
-        <p:style>
-          <a:lnRef idx="1">
-            <a:schemeClr val="accent1"/>
-          </a:lnRef>
-          <a:fillRef idx="3">
-            <a:schemeClr val="accent1"/>
-          </a:fillRef>
-          <a:effectRef idx="2">
-            <a:schemeClr val="accent1"/>
-          </a:effectRef>
-          <a:fontRef idx="minor">
-            <a:schemeClr val="lt1"/>
-          </a:fontRef>
-        </p:style>
-        <p:txBody>
-          <a:bodyPr rtlCol="0" anchor="ctr"/>
-          <a:lstStyle/>
-          <a:p>
-            <a:pPr algn="ctr"/>
-            <a:r>
-              <a:rPr sz="1000" b="1">
-                <a:solidFill>
-                  <a:srgbClr val="9AA1B5"/>
-                </a:solidFill>
-                <a:latin typeface="Helvetica Neue"/>
-              </a:rPr>
-              <a:t>27/29</a:t>
-            </a:r>
-          </a:p>
-        </p:txBody>
-      </p:sp>
-      <p:sp>
-        <p:nvSpPr>
-          <p:cNvPr id="23" name="TextBox 22"/>
-          <p:cNvSpPr txBox="1"/>
-          <p:nvPr/>
-        </p:nvSpPr>
-        <p:spPr>
-          <a:xfrm>
-            <a:off x="502920" y="6492240"/>
-            <a:ext cx="5943600" cy="274320"/>
-          </a:xfrm>
-          <a:prstGeom prst="rect">
-            <a:avLst/>
-          </a:prstGeom>
-          <a:noFill/>
-        </p:spPr>
-        <p:txBody>
-          <a:bodyPr wrap="square" lIns="0" tIns="0" rIns="0" bIns="0" anchor="t">
-            <a:spAutoFit/>
-          </a:bodyPr>
-          <a:lstStyle/>
-          <a:p>
-            <a:pPr algn="l">
-              <a:lnSpc>
-                <a:spcPct val="100000"/>
-              </a:lnSpc>
-              <a:spcAft>
-                <a:spcPts val="0"/>
-              </a:spcAft>
-            </a:pPr>
-            <a:r>
-              <a:rPr sz="800" b="0" i="0">
-                <a:solidFill>
-                  <a:srgbClr val="9AA1B5"/>
-                </a:solidFill>
-                <a:latin typeface="Helvetica Neue"/>
-              </a:rPr>
-              <a:t>COUVERTURE DYNAMITE — QUARKUS · JUNIT · CUCUMBER · JACOCO</a:t>
-            </a:r>
-          </a:p>
-        </p:txBody>
-      </p:sp>
-    </p:spTree>
-  </p:cSld>
-  <p:clrMapOvr>
-    <a:masterClrMapping/>
-  </p:clrMapOvr>
-  <p:transition>
-    <p:fade/>
-  </p:transition>
-</p:sld>
-</file>
-
-<file path=ppt/slides/slide28.xml><?xml version="1.0" encoding="utf-8"?>
 <p:sld xmlns:a="http://schemas.openxmlformats.org/drawingml/2006/main" xmlns:r="http://schemas.openxmlformats.org/officeDocument/2006/relationships" xmlns:p="http://schemas.openxmlformats.org/presentationml/2006/main">
   <p:cSld>
     <p:bg>
@@ -24289,7 +23523,7 @@
 </p:sld>
 </file>
 
-<file path=ppt/slides/slide29.xml><?xml version="1.0" encoding="utf-8"?>
+<file path=ppt/slides/slide28.xml><?xml version="1.0" encoding="utf-8"?>
 <p:sld xmlns:a="http://schemas.openxmlformats.org/drawingml/2006/main" xmlns:r="http://schemas.openxmlformats.org/officeDocument/2006/relationships" xmlns:p="http://schemas.openxmlformats.org/presentationml/2006/main">
   <p:cSld>
     <p:bg>

--- a/presentation/couverture-code-conference-dynamite.pptx
+++ b/presentation/couverture-code-conference-dynamite.pptx
@@ -329,7 +329,7 @@
           <a:p>
             <a:fld id="{5BCAD085-E8A6-8845-BD4E-CB4CCA059FC4}" type="datetimeFigureOut">
               <a:rPr lang="en-US" smtClean="0"/>
-              <a:t>10/12/26</a:t>
+              <a:t>10/13/26</a:t>
             </a:fld>
             <a:endParaRPr lang="en-US"/>
           </a:p>
@@ -497,7 +497,7 @@
           <a:p>
             <a:fld id="{5BCAD085-E8A6-8845-BD4E-CB4CCA059FC4}" type="datetimeFigureOut">
               <a:rPr lang="en-US" smtClean="0"/>
-              <a:t>10/12/26</a:t>
+              <a:t>10/13/26</a:t>
             </a:fld>
             <a:endParaRPr lang="en-US"/>
           </a:p>
@@ -675,7 +675,7 @@
           <a:p>
             <a:fld id="{5BCAD085-E8A6-8845-BD4E-CB4CCA059FC4}" type="datetimeFigureOut">
               <a:rPr lang="en-US" smtClean="0"/>
-              <a:t>10/12/26</a:t>
+              <a:t>10/13/26</a:t>
             </a:fld>
             <a:endParaRPr lang="en-US"/>
           </a:p>
@@ -843,7 +843,7 @@
           <a:p>
             <a:fld id="{5BCAD085-E8A6-8845-BD4E-CB4CCA059FC4}" type="datetimeFigureOut">
               <a:rPr lang="en-US" smtClean="0"/>
-              <a:t>10/12/26</a:t>
+              <a:t>10/13/26</a:t>
             </a:fld>
             <a:endParaRPr lang="en-US"/>
           </a:p>
@@ -1088,7 +1088,7 @@
           <a:p>
             <a:fld id="{5BCAD085-E8A6-8845-BD4E-CB4CCA059FC4}" type="datetimeFigureOut">
               <a:rPr lang="en-US" smtClean="0"/>
-              <a:t>10/12/26</a:t>
+              <a:t>10/13/26</a:t>
             </a:fld>
             <a:endParaRPr lang="en-US"/>
           </a:p>
@@ -1373,7 +1373,7 @@
           <a:p>
             <a:fld id="{5BCAD085-E8A6-8845-BD4E-CB4CCA059FC4}" type="datetimeFigureOut">
               <a:rPr lang="en-US" smtClean="0"/>
-              <a:t>10/12/26</a:t>
+              <a:t>10/13/26</a:t>
             </a:fld>
             <a:endParaRPr lang="en-US"/>
           </a:p>
@@ -1792,7 +1792,7 @@
           <a:p>
             <a:fld id="{5BCAD085-E8A6-8845-BD4E-CB4CCA059FC4}" type="datetimeFigureOut">
               <a:rPr lang="en-US" smtClean="0"/>
-              <a:t>10/12/26</a:t>
+              <a:t>10/13/26</a:t>
             </a:fld>
             <a:endParaRPr lang="en-US"/>
           </a:p>
@@ -1909,7 +1909,7 @@
           <a:p>
             <a:fld id="{5BCAD085-E8A6-8845-BD4E-CB4CCA059FC4}" type="datetimeFigureOut">
               <a:rPr lang="en-US" smtClean="0"/>
-              <a:t>10/12/26</a:t>
+              <a:t>10/13/26</a:t>
             </a:fld>
             <a:endParaRPr lang="en-US"/>
           </a:p>
@@ -2004,7 +2004,7 @@
           <a:p>
             <a:fld id="{5BCAD085-E8A6-8845-BD4E-CB4CCA059FC4}" type="datetimeFigureOut">
               <a:rPr lang="en-US" smtClean="0"/>
-              <a:t>10/12/26</a:t>
+              <a:t>10/13/26</a:t>
             </a:fld>
             <a:endParaRPr lang="en-US"/>
           </a:p>
@@ -2279,7 +2279,7 @@
           <a:p>
             <a:fld id="{5BCAD085-E8A6-8845-BD4E-CB4CCA059FC4}" type="datetimeFigureOut">
               <a:rPr lang="en-US" smtClean="0"/>
-              <a:t>10/12/26</a:t>
+              <a:t>10/13/26</a:t>
             </a:fld>
             <a:endParaRPr lang="en-US"/>
           </a:p>
@@ -2531,7 +2531,7 @@
           <a:p>
             <a:fld id="{5BCAD085-E8A6-8845-BD4E-CB4CCA059FC4}" type="datetimeFigureOut">
               <a:rPr lang="en-US" smtClean="0"/>
-              <a:t>10/12/26</a:t>
+              <a:t>10/13/26</a:t>
             </a:fld>
             <a:endParaRPr lang="en-US"/>
           </a:p>
@@ -2742,7 +2742,7 @@
           <a:p>
             <a:fld id="{5BCAD085-E8A6-8845-BD4E-CB4CCA059FC4}" type="datetimeFigureOut">
               <a:rPr lang="en-US" smtClean="0"/>
-              <a:t>10/12/26</a:t>
+              <a:t>10/13/26</a:t>
             </a:fld>
             <a:endParaRPr lang="en-US"/>
           </a:p>
@@ -24585,58 +24585,61 @@
       </p:sp>
       <p:sp>
         <p:nvSpPr>
-          <p:cNvPr id="25" name="TextBox 24"/>
-          <p:cNvSpPr txBox="1"/>
-          <p:nvPr/>
-        </p:nvSpPr>
-        <p:spPr>
-          <a:xfrm>
-            <a:off x="8641080" y="1965960"/>
-            <a:ext cx="3200400" cy="320040"/>
-          </a:xfrm>
-          <a:prstGeom prst="rect">
-            <a:avLst/>
-          </a:prstGeom>
-          <a:noFill/>
-        </p:spPr>
-        <p:txBody>
-          <a:bodyPr wrap="square" lIns="0" tIns="0" rIns="0" bIns="0" anchor="t">
-            <a:spAutoFit/>
-          </a:bodyPr>
-          <a:lstStyle/>
-          <a:p>
-            <a:pPr algn="ctr">
-              <a:lnSpc>
-                <a:spcPct val="100000"/>
-              </a:lnSpc>
-              <a:spcAft>
-                <a:spcPts val="0"/>
-              </a:spcAft>
-            </a:pPr>
-            <a:r>
-              <a:rPr sz="1300" b="1" i="0">
-                <a:solidFill>
-                  <a:srgbClr val="FFD23F"/>
-                </a:solidFill>
-                <a:latin typeface="Helvetica Neue"/>
-              </a:rPr>
-              <a:t>Scanne-moi</a:t>
-            </a:r>
-          </a:p>
-        </p:txBody>
-      </p:sp>
-      <p:sp>
-        <p:nvSpPr>
-          <p:cNvPr id="26" name="Rectangle 25"/>
-          <p:cNvSpPr/>
-          <p:nvPr/>
-        </p:nvSpPr>
-        <p:spPr>
-          <a:xfrm>
-            <a:off x="8641080" y="2258568"/>
-            <a:ext cx="1472184" cy="1472184"/>
-          </a:xfrm>
-          <a:prstGeom prst="rect">
+          <p:cNvPr id="25" name="Rounded Rectangle 24"/>
+          <p:cNvSpPr/>
+          <p:nvPr/>
+        </p:nvSpPr>
+        <p:spPr>
+          <a:xfrm rot="21240000">
+            <a:off x="3782276" y="955438"/>
+            <a:ext cx="2011680" cy="2423160"/>
+          </a:xfrm>
+          <a:prstGeom prst="roundRect">
+            <a:avLst/>
+          </a:prstGeom>
+          <a:solidFill>
+            <a:srgbClr val="E7DCC1"/>
+          </a:solidFill>
+          <a:ln>
+            <a:noFill/>
+          </a:ln>
+          <a:effectLst/>
+        </p:spPr>
+        <p:style>
+          <a:lnRef idx="1">
+            <a:schemeClr val="accent1"/>
+          </a:lnRef>
+          <a:fillRef idx="3">
+            <a:schemeClr val="accent1"/>
+          </a:fillRef>
+          <a:effectRef idx="2">
+            <a:schemeClr val="accent1"/>
+          </a:effectRef>
+          <a:fontRef idx="minor">
+            <a:schemeClr val="lt1"/>
+          </a:fontRef>
+        </p:style>
+        <p:txBody>
+          <a:bodyPr rtlCol="0" anchor="ctr"/>
+          <a:lstStyle/>
+          <a:p>
+            <a:pPr algn="ctr"/>
+            <a:endParaRPr/>
+          </a:p>
+        </p:txBody>
+      </p:sp>
+      <p:sp>
+        <p:nvSpPr>
+          <p:cNvPr id="26" name="Rounded Rectangle 25"/>
+          <p:cNvSpPr/>
+          <p:nvPr/>
+        </p:nvSpPr>
+        <p:spPr>
+          <a:xfrm rot="21240000">
+            <a:off x="3699980" y="873142"/>
+            <a:ext cx="2011680" cy="2423160"/>
+          </a:xfrm>
+          <a:prstGeom prst="roundRect">
             <a:avLst/>
           </a:prstGeom>
           <a:solidFill>
@@ -24672,7 +24675,7 @@
       </p:sp>
       <p:pic>
         <p:nvPicPr>
-          <p:cNvPr id="27" name="Picture 26" descr="qr-github.png"/>
+          <p:cNvPr id="27" name="Picture 26" descr="image.png"/>
           <p:cNvPicPr>
             <a:picLocks noChangeAspect="1"/>
           </p:cNvPicPr>
@@ -24685,9 +24688,9 @@
           </a:stretch>
         </p:blipFill>
         <p:spPr>
-          <a:xfrm>
-            <a:off x="8714232" y="2331720"/>
-            <a:ext cx="1325880" cy="1325880"/>
+          <a:xfrm rot="21240000">
+            <a:off x="3837140" y="1010302"/>
+            <a:ext cx="1737360" cy="1737360"/>
           </a:xfrm>
           <a:prstGeom prst="rect">
             <a:avLst/>
@@ -24696,16 +24699,141 @@
       </p:pic>
       <p:sp>
         <p:nvSpPr>
-          <p:cNvPr id="28" name="Rectangle 27"/>
-          <p:cNvSpPr/>
-          <p:nvPr/>
-        </p:nvSpPr>
-        <p:spPr>
-          <a:xfrm>
-            <a:off x="10369296" y="2258568"/>
-            <a:ext cx="1472184" cy="1472184"/>
+          <p:cNvPr id="28" name="TextBox 27"/>
+          <p:cNvSpPr txBox="1"/>
+          <p:nvPr/>
+        </p:nvSpPr>
+        <p:spPr>
+          <a:xfrm rot="21240000">
+            <a:off x="3699980" y="2820814"/>
+            <a:ext cx="2011680" cy="274320"/>
           </a:xfrm>
           <a:prstGeom prst="rect">
+            <a:avLst/>
+          </a:prstGeom>
+          <a:noFill/>
+        </p:spPr>
+        <p:txBody>
+          <a:bodyPr wrap="square" lIns="0" tIns="0" rIns="0" bIns="0" anchor="t">
+            <a:spAutoFit/>
+          </a:bodyPr>
+          <a:lstStyle/>
+          <a:p>
+            <a:pPr algn="ctr"/>
+            <a:r>
+              <a:rPr sz="1400" b="1">
+                <a:solidFill>
+                  <a:srgbClr val="181D2B"/>
+                </a:solidFill>
+                <a:latin typeface="Helvetica Neue"/>
+              </a:rPr>
+              <a:t>GitHub</a:t>
+            </a:r>
+          </a:p>
+        </p:txBody>
+      </p:sp>
+      <p:sp>
+        <p:nvSpPr>
+          <p:cNvPr id="29" name="Rectangle 28"/>
+          <p:cNvSpPr/>
+          <p:nvPr/>
+        </p:nvSpPr>
+        <p:spPr>
+          <a:xfrm rot="21240000">
+            <a:off x="4477220" y="3140854"/>
+            <a:ext cx="457200" cy="45720"/>
+          </a:xfrm>
+          <a:prstGeom prst="rect">
+            <a:avLst/>
+          </a:prstGeom>
+          <a:solidFill>
+            <a:srgbClr val="F0A72E"/>
+          </a:solidFill>
+          <a:ln>
+            <a:noFill/>
+          </a:ln>
+          <a:effectLst/>
+        </p:spPr>
+        <p:style>
+          <a:lnRef idx="1">
+            <a:schemeClr val="accent1"/>
+          </a:lnRef>
+          <a:fillRef idx="3">
+            <a:schemeClr val="accent1"/>
+          </a:fillRef>
+          <a:effectRef idx="2">
+            <a:schemeClr val="accent1"/>
+          </a:effectRef>
+          <a:fontRef idx="minor">
+            <a:schemeClr val="lt1"/>
+          </a:fontRef>
+        </p:style>
+        <p:txBody>
+          <a:bodyPr rtlCol="0" anchor="ctr"/>
+          <a:lstStyle/>
+          <a:p>
+            <a:pPr algn="ctr"/>
+            <a:endParaRPr/>
+          </a:p>
+        </p:txBody>
+      </p:sp>
+      <p:sp>
+        <p:nvSpPr>
+          <p:cNvPr id="30" name="Rounded Rectangle 29"/>
+          <p:cNvSpPr/>
+          <p:nvPr/>
+        </p:nvSpPr>
+        <p:spPr>
+          <a:xfrm rot="360000">
+            <a:off x="8887303" y="1636777"/>
+            <a:ext cx="2011680" cy="2423160"/>
+          </a:xfrm>
+          <a:prstGeom prst="roundRect">
+            <a:avLst/>
+          </a:prstGeom>
+          <a:solidFill>
+            <a:srgbClr val="E7DCC1"/>
+          </a:solidFill>
+          <a:ln>
+            <a:noFill/>
+          </a:ln>
+          <a:effectLst/>
+        </p:spPr>
+        <p:style>
+          <a:lnRef idx="1">
+            <a:schemeClr val="accent1"/>
+          </a:lnRef>
+          <a:fillRef idx="3">
+            <a:schemeClr val="accent1"/>
+          </a:fillRef>
+          <a:effectRef idx="2">
+            <a:schemeClr val="accent1"/>
+          </a:effectRef>
+          <a:fontRef idx="minor">
+            <a:schemeClr val="lt1"/>
+          </a:fontRef>
+        </p:style>
+        <p:txBody>
+          <a:bodyPr rtlCol="0" anchor="ctr"/>
+          <a:lstStyle/>
+          <a:p>
+            <a:pPr algn="ctr"/>
+            <a:endParaRPr/>
+          </a:p>
+        </p:txBody>
+      </p:sp>
+      <p:sp>
+        <p:nvSpPr>
+          <p:cNvPr id="31" name="Rounded Rectangle 30"/>
+          <p:cNvSpPr/>
+          <p:nvPr/>
+        </p:nvSpPr>
+        <p:spPr>
+          <a:xfrm rot="360000">
+            <a:off x="8805007" y="1554481"/>
+            <a:ext cx="2011680" cy="2423160"/>
+          </a:xfrm>
+          <a:prstGeom prst="roundRect">
             <a:avLst/>
           </a:prstGeom>
           <a:solidFill>
@@ -24741,7 +24869,7 @@
       </p:sp>
       <p:pic>
         <p:nvPicPr>
-          <p:cNvPr id="29" name="Picture 28" descr="qr-linkedin.png"/>
+          <p:cNvPr id="32" name="Picture 31" descr="image.png"/>
           <p:cNvPicPr>
             <a:picLocks noChangeAspect="1"/>
           </p:cNvPicPr>
@@ -24754,9 +24882,9 @@
           </a:stretch>
         </p:blipFill>
         <p:spPr>
-          <a:xfrm>
-            <a:off x="10442448" y="2331720"/>
-            <a:ext cx="1325880" cy="1325880"/>
+          <a:xfrm rot="360000">
+            <a:off x="8942167" y="1691641"/>
+            <a:ext cx="1737360" cy="1737360"/>
           </a:xfrm>
           <a:prstGeom prst="rect">
             <a:avLst/>
@@ -24765,14 +24893,14 @@
       </p:pic>
       <p:sp>
         <p:nvSpPr>
-          <p:cNvPr id="30" name="TextBox 29"/>
+          <p:cNvPr id="33" name="TextBox 32"/>
           <p:cNvSpPr txBox="1"/>
           <p:nvPr/>
         </p:nvSpPr>
         <p:spPr>
-          <a:xfrm>
-            <a:off x="8641080" y="3840480"/>
-            <a:ext cx="1472184" cy="274320"/>
+          <a:xfrm rot="360000">
+            <a:off x="8805007" y="3502153"/>
+            <a:ext cx="2011680" cy="274320"/>
           </a:xfrm>
           <a:prstGeom prst="rect">
             <a:avLst/>
@@ -24785,64 +24913,172 @@
           </a:bodyPr>
           <a:lstStyle/>
           <a:p>
-            <a:pPr algn="ctr">
-              <a:lnSpc>
-                <a:spcPct val="100000"/>
-              </a:lnSpc>
-              <a:spcAft>
-                <a:spcPts val="0"/>
-              </a:spcAft>
-            </a:pPr>
-            <a:r>
-              <a:rPr sz="1050" b="0" i="0">
-                <a:solidFill>
-                  <a:srgbClr val="9AA1B5"/>
-                </a:solidFill>
-                <a:latin typeface="Helvetica Neue"/>
-              </a:rPr>
-              <a:t>GitHub</a:t>
-            </a:r>
-          </a:p>
-        </p:txBody>
-      </p:sp>
-      <p:sp>
-        <p:nvSpPr>
-          <p:cNvPr id="31" name="TextBox 30"/>
-          <p:cNvSpPr txBox="1"/>
-          <p:nvPr/>
-        </p:nvSpPr>
-        <p:spPr>
-          <a:xfrm>
-            <a:off x="10369296" y="3840480"/>
-            <a:ext cx="1472184" cy="274320"/>
+            <a:pPr algn="ctr"/>
+            <a:r>
+              <a:rPr sz="1400" b="1">
+                <a:solidFill>
+                  <a:srgbClr val="181D2B"/>
+                </a:solidFill>
+                <a:latin typeface="Helvetica Neue"/>
+              </a:rPr>
+              <a:t>LinkedIn</a:t>
+            </a:r>
+          </a:p>
+        </p:txBody>
+      </p:sp>
+      <p:sp>
+        <p:nvSpPr>
+          <p:cNvPr id="34" name="Rectangle 33"/>
+          <p:cNvSpPr/>
+          <p:nvPr/>
+        </p:nvSpPr>
+        <p:spPr>
+          <a:xfrm rot="360000">
+            <a:off x="9582247" y="3822193"/>
+            <a:ext cx="457200" cy="45720"/>
           </a:xfrm>
           <a:prstGeom prst="rect">
             <a:avLst/>
           </a:prstGeom>
-          <a:noFill/>
-        </p:spPr>
-        <p:txBody>
-          <a:bodyPr wrap="square" lIns="0" tIns="0" rIns="0" bIns="0" anchor="t">
-            <a:spAutoFit/>
-          </a:bodyPr>
-          <a:lstStyle/>
-          <a:p>
-            <a:pPr algn="ctr">
-              <a:lnSpc>
-                <a:spcPct val="100000"/>
-              </a:lnSpc>
-              <a:spcAft>
-                <a:spcPts val="0"/>
-              </a:spcAft>
-            </a:pPr>
-            <a:r>
-              <a:rPr sz="1050" b="0" i="0">
-                <a:solidFill>
-                  <a:srgbClr val="9AA1B5"/>
-                </a:solidFill>
-                <a:latin typeface="Helvetica Neue"/>
-              </a:rPr>
-              <a:t>LinkedIn</a:t>
+          <a:solidFill>
+            <a:srgbClr val="3E6BE0"/>
+          </a:solidFill>
+          <a:ln>
+            <a:noFill/>
+          </a:ln>
+          <a:effectLst/>
+        </p:spPr>
+        <p:style>
+          <a:lnRef idx="1">
+            <a:schemeClr val="accent1"/>
+          </a:lnRef>
+          <a:fillRef idx="3">
+            <a:schemeClr val="accent1"/>
+          </a:fillRef>
+          <a:effectRef idx="2">
+            <a:schemeClr val="accent1"/>
+          </a:effectRef>
+          <a:fontRef idx="minor">
+            <a:schemeClr val="lt1"/>
+          </a:fontRef>
+        </p:style>
+        <p:txBody>
+          <a:bodyPr rtlCol="0" anchor="ctr"/>
+          <a:lstStyle/>
+          <a:p>
+            <a:pPr algn="ctr"/>
+            <a:endParaRPr/>
+          </a:p>
+        </p:txBody>
+      </p:sp>
+      <p:sp>
+        <p:nvSpPr>
+          <p:cNvPr id="35" name="Parallelogram 34"/>
+          <p:cNvSpPr/>
+          <p:nvPr/>
+        </p:nvSpPr>
+        <p:spPr>
+          <a:xfrm rot="21120000">
+            <a:off x="3742352" y="557116"/>
+            <a:ext cx="1417320" cy="365760"/>
+          </a:xfrm>
+          <a:prstGeom prst="parallelogram">
+            <a:avLst/>
+          </a:prstGeom>
+          <a:solidFill>
+            <a:srgbClr val="FFD23F"/>
+          </a:solidFill>
+          <a:ln>
+            <a:noFill/>
+          </a:ln>
+          <a:effectLst/>
+        </p:spPr>
+        <p:style>
+          <a:lnRef idx="1">
+            <a:schemeClr val="accent1"/>
+          </a:lnRef>
+          <a:fillRef idx="3">
+            <a:schemeClr val="accent1"/>
+          </a:fillRef>
+          <a:effectRef idx="2">
+            <a:schemeClr val="accent1"/>
+          </a:effectRef>
+          <a:fontRef idx="minor">
+            <a:schemeClr val="lt1"/>
+          </a:fontRef>
+        </p:style>
+        <p:txBody>
+          <a:bodyPr tIns="18288" rIns="45720" bIns="18288" rtlCol="0" anchor="ctr"/>
+          <a:lstStyle/>
+          <a:p>
+            <a:pPr algn="ctr"/>
+            <a:r>
+              <a:rPr sz="1100" b="1" dirty="0">
+                <a:solidFill>
+                  <a:srgbClr val="0C111F"/>
+                </a:solidFill>
+                <a:latin typeface="Helvetica Neue"/>
+              </a:rPr>
+              <a:t>SCANNE-MOI</a:t>
+            </a:r>
+          </a:p>
+        </p:txBody>
+      </p:sp>
+      <p:sp>
+        <p:nvSpPr>
+          <p:cNvPr id="36" name="Parallelogram 34">
+            <a:extLst>
+              <a:ext uri="{FF2B5EF4-FFF2-40B4-BE49-F238E27FC236}">
+                <a16:creationId xmlns:a16="http://schemas.microsoft.com/office/drawing/2014/main" id="{E910F05D-95E6-DE6C-81E7-A4EEA0EA2189}"/>
+              </a:ext>
+            </a:extLst>
+          </p:cNvPr>
+          <p:cNvSpPr/>
+          <p:nvPr/>
+        </p:nvSpPr>
+        <p:spPr>
+          <a:xfrm rot="334049">
+            <a:off x="9314242" y="1177865"/>
+            <a:ext cx="1417320" cy="365760"/>
+          </a:xfrm>
+          <a:prstGeom prst="parallelogram">
+            <a:avLst/>
+          </a:prstGeom>
+          <a:solidFill>
+            <a:srgbClr val="FFD23F"/>
+          </a:solidFill>
+          <a:ln>
+            <a:noFill/>
+          </a:ln>
+          <a:effectLst/>
+        </p:spPr>
+        <p:style>
+          <a:lnRef idx="1">
+            <a:schemeClr val="accent1"/>
+          </a:lnRef>
+          <a:fillRef idx="3">
+            <a:schemeClr val="accent1"/>
+          </a:fillRef>
+          <a:effectRef idx="2">
+            <a:schemeClr val="accent1"/>
+          </a:effectRef>
+          <a:fontRef idx="minor">
+            <a:schemeClr val="lt1"/>
+          </a:fontRef>
+        </p:style>
+        <p:txBody>
+          <a:bodyPr tIns="18288" rIns="45720" bIns="18288" rtlCol="0" anchor="ctr"/>
+          <a:lstStyle/>
+          <a:p>
+            <a:pPr algn="ctr"/>
+            <a:r>
+              <a:rPr sz="1100" b="1">
+                <a:solidFill>
+                  <a:srgbClr val="0C111F"/>
+                </a:solidFill>
+                <a:latin typeface="Helvetica Neue"/>
+              </a:rPr>
+              <a:t>SCANNE-MOI</a:t>
             </a:r>
           </a:p>
         </p:txBody>

--- a/presentation/couverture-code-conference-dynamite.pptx
+++ b/presentation/couverture-code-conference-dynamite.pptx
@@ -17,23 +17,23 @@
     <p:sldId id="264" r:id="rId11"/>
     <p:sldId id="266" r:id="rId12"/>
     <p:sldId id="267" r:id="rId13"/>
-    <p:sldId id="285" r:id="rId34"/>
-    <p:sldId id="268" r:id="rId14"/>
-    <p:sldId id="269" r:id="rId15"/>
-    <p:sldId id="270" r:id="rId16"/>
-    <p:sldId id="271" r:id="rId17"/>
-    <p:sldId id="272" r:id="rId18"/>
-    <p:sldId id="273" r:id="rId19"/>
-    <p:sldId id="274" r:id="rId20"/>
-    <p:sldId id="275" r:id="rId21"/>
-    <p:sldId id="276" r:id="rId22"/>
-    <p:sldId id="277" r:id="rId23"/>
-    <p:sldId id="278" r:id="rId24"/>
-    <p:sldId id="279" r:id="rId25"/>
-    <p:sldId id="280" r:id="rId26"/>
-    <p:sldId id="282" r:id="rId27"/>
-    <p:sldId id="283" r:id="rId28"/>
-    <p:sldId id="284" r:id="rId29"/>
+    <p:sldId id="285" r:id="rId14"/>
+    <p:sldId id="268" r:id="rId15"/>
+    <p:sldId id="269" r:id="rId16"/>
+    <p:sldId id="270" r:id="rId17"/>
+    <p:sldId id="271" r:id="rId18"/>
+    <p:sldId id="272" r:id="rId19"/>
+    <p:sldId id="273" r:id="rId20"/>
+    <p:sldId id="274" r:id="rId21"/>
+    <p:sldId id="275" r:id="rId22"/>
+    <p:sldId id="276" r:id="rId23"/>
+    <p:sldId id="277" r:id="rId24"/>
+    <p:sldId id="278" r:id="rId25"/>
+    <p:sldId id="279" r:id="rId26"/>
+    <p:sldId id="280" r:id="rId27"/>
+    <p:sldId id="282" r:id="rId28"/>
+    <p:sldId id="283" r:id="rId29"/>
+    <p:sldId id="284" r:id="rId30"/>
   </p:sldIdLst>
   <p:sldSz cx="12192000" cy="6858000"/>
   <p:notesSz cx="6858000" cy="9144000"/>
@@ -7862,7 +7862,7 @@
 </file>
 
 <file path=ppt/slides/slide13.xml><?xml version="1.0" encoding="utf-8"?>
-<p:sld xmlns:a="http://schemas.openxmlformats.org/drawingml/2006/main" xmlns:p="http://schemas.openxmlformats.org/presentationml/2006/main" xmlns:r="http://schemas.openxmlformats.org/officeDocument/2006/relationships">
+<p:sld xmlns:a="http://schemas.openxmlformats.org/drawingml/2006/main" xmlns:r="http://schemas.openxmlformats.org/officeDocument/2006/relationships" xmlns:p="http://schemas.openxmlformats.org/presentationml/2006/main">
   <p:cSld>
     <p:bg>
       <p:bgPr>
@@ -7878,7 +7878,14 @@
         <p:cNvGrpSpPr/>
         <p:nvPr/>
       </p:nvGrpSpPr>
-      <p:grpSpPr/>
+      <p:grpSpPr>
+        <a:xfrm>
+          <a:off x="0" y="0"/>
+          <a:ext cx="0" cy="0"/>
+          <a:chOff x="0" y="0"/>
+          <a:chExt cx="0" cy="0"/>
+        </a:xfrm>
+      </p:grpSpPr>
       <p:sp>
         <p:nvSpPr>
           <p:cNvPr id="2" name="Rectangle 1"/>
@@ -7920,6 +7927,7 @@
           <a:lstStyle/>
           <a:p>
             <a:pPr algn="ctr"/>
+            <a:endParaRPr/>
           </a:p>
         </p:txBody>
       </p:sp>
@@ -7960,7 +7968,7 @@
           </a:fontRef>
         </p:style>
         <p:txBody>
-          <a:bodyPr rtlCol="0" anchor="ctr" lIns="256032" rIns="45720" tIns="18288" bIns="18288"/>
+          <a:bodyPr lIns="256032" tIns="18288" rIns="45720" bIns="18288" rtlCol="0" anchor="ctr"/>
           <a:lstStyle/>
           <a:p>
             <a:pPr algn="l"/>
@@ -7993,7 +8001,7 @@
           <a:noFill/>
         </p:spPr>
         <p:txBody>
-          <a:bodyPr wrap="square" lIns="0" rIns="0" tIns="0" bIns="0">
+          <a:bodyPr wrap="square" lIns="0" tIns="0" rIns="0" bIns="0">
             <a:spAutoFit/>
           </a:bodyPr>
           <a:lstStyle/>
@@ -8023,8 +8031,8 @@
         </p:nvSpPr>
         <p:spPr>
           <a:xfrm>
-            <a:off x="822960" y="1965960"/>
-            <a:ext cx="10515600" cy="3840480"/>
+            <a:off x="655695" y="1638116"/>
+            <a:ext cx="10195560" cy="4206240"/>
           </a:xfrm>
           <a:prstGeom prst="roundRect">
             <a:avLst/>
@@ -8056,6 +8064,7 @@
           <a:lstStyle/>
           <a:p>
             <a:pPr algn="ctr"/>
+            <a:endParaRPr/>
           </a:p>
         </p:txBody>
       </p:sp>
@@ -8067,7 +8076,7 @@
         </p:nvSpPr>
         <p:spPr>
           <a:xfrm>
-            <a:off x="1024128" y="2093976"/>
+            <a:off x="1280605" y="1766132"/>
             <a:ext cx="109728" cy="109728"/>
           </a:xfrm>
           <a:prstGeom prst="ellipse">
@@ -8100,6 +8109,7 @@
           <a:lstStyle/>
           <a:p>
             <a:pPr algn="ctr"/>
+            <a:endParaRPr/>
           </a:p>
         </p:txBody>
       </p:sp>
@@ -8111,7 +8121,7 @@
         </p:nvSpPr>
         <p:spPr>
           <a:xfrm>
-            <a:off x="1243584" y="2093976"/>
+            <a:off x="1500061" y="1766132"/>
             <a:ext cx="109728" cy="109728"/>
           </a:xfrm>
           <a:prstGeom prst="ellipse">
@@ -8144,6 +8154,7 @@
           <a:lstStyle/>
           <a:p>
             <a:pPr algn="ctr"/>
+            <a:endParaRPr/>
           </a:p>
         </p:txBody>
       </p:sp>
@@ -8155,7 +8166,7 @@
         </p:nvSpPr>
         <p:spPr>
           <a:xfrm>
-            <a:off x="1463040" y="2093976"/>
+            <a:off x="1719517" y="1766132"/>
             <a:ext cx="109728" cy="109728"/>
           </a:xfrm>
           <a:prstGeom prst="ellipse">
@@ -8188,6 +8199,7 @@
           <a:lstStyle/>
           <a:p>
             <a:pPr algn="ctr"/>
+            <a:endParaRPr/>
           </a:p>
         </p:txBody>
       </p:sp>
@@ -8199,8 +8211,8 @@
         </p:nvSpPr>
         <p:spPr>
           <a:xfrm>
-            <a:off x="1143000" y="2441448"/>
-            <a:ext cx="9875520" cy="3291840"/>
+            <a:off x="1343720" y="2358928"/>
+            <a:ext cx="8647771" cy="2907206"/>
           </a:xfrm>
           <a:prstGeom prst="rect">
             <a:avLst/>
@@ -8208,82 +8220,208 @@
           <a:noFill/>
         </p:spPr>
         <p:txBody>
-          <a:bodyPr wrap="square" lIns="0" rIns="0" tIns="0" bIns="0">
+          <a:bodyPr wrap="square" lIns="0" tIns="0" rIns="0" bIns="0">
             <a:spAutoFit/>
           </a:bodyPr>
           <a:lstStyle/>
           <a:p>
             <a:pPr algn="l">
               <a:lnSpc>
-                <a:spcPct val="120000"/>
+                <a:spcPct val="110000"/>
               </a:lnSpc>
             </a:pPr>
             <a:r>
-              <a:rPr sz="1350" b="0" i="0">
+              <a:rPr sz="1150" b="0" i="0" dirty="0">
                 <a:solidFill>
                   <a:srgbClr val="E7ECF5"/>
                 </a:solidFill>
                 <a:latin typeface="Menlo"/>
               </a:rPr>
-              <a:t>public class EventStepDefinitions {</a:t>
+              <a:t>public class </a:t>
+            </a:r>
+            <a:r>
+              <a:rPr sz="1150" b="0" i="0" dirty="0" err="1">
+                <a:solidFill>
+                  <a:srgbClr val="E7ECF5"/>
+                </a:solidFill>
+                <a:latin typeface="Menlo"/>
+              </a:rPr>
+              <a:t>EventStepDefinitions</a:t>
+            </a:r>
+            <a:r>
+              <a:rPr sz="1150" b="0" i="0" dirty="0">
+                <a:solidFill>
+                  <a:srgbClr val="E7ECF5"/>
+                </a:solidFill>
+                <a:latin typeface="Menlo"/>
+              </a:rPr>
+              <a:t> {</a:t>
             </a:r>
           </a:p>
           <a:p>
             <a:pPr algn="l">
               <a:lnSpc>
-                <a:spcPct val="120000"/>
+                <a:spcPct val="110000"/>
               </a:lnSpc>
             </a:pPr>
             <a:r>
-              <a:rPr sz="1350" b="0" i="0">
+              <a:rPr sz="1150" b="0" i="0" dirty="0">
                 <a:solidFill>
                   <a:srgbClr val="E7ECF5"/>
                 </a:solidFill>
                 <a:latin typeface="Menlo"/>
               </a:rPr>
-              <a:t>    @Given("j'ai déjà l'événement {string} de {string} à {string} le {string}")</a:t>
+              <a:t>    @Given("</a:t>
+            </a:r>
+            <a:r>
+              <a:rPr sz="1150" b="0" i="0" dirty="0" err="1">
+                <a:solidFill>
+                  <a:srgbClr val="E7ECF5"/>
+                </a:solidFill>
+                <a:latin typeface="Menlo"/>
+              </a:rPr>
+              <a:t>j'ai</a:t>
+            </a:r>
+            <a:r>
+              <a:rPr sz="1150" b="0" i="0" dirty="0">
+                <a:solidFill>
+                  <a:srgbClr val="E7ECF5"/>
+                </a:solidFill>
+                <a:latin typeface="Menlo"/>
+              </a:rPr>
+              <a:t> déjà </a:t>
+            </a:r>
+            <a:r>
+              <a:rPr sz="1150" b="0" i="0" dirty="0" err="1">
+                <a:solidFill>
+                  <a:srgbClr val="E7ECF5"/>
+                </a:solidFill>
+                <a:latin typeface="Menlo"/>
+              </a:rPr>
+              <a:t>l'événement</a:t>
+            </a:r>
+            <a:r>
+              <a:rPr sz="1150" b="0" i="0" dirty="0">
+                <a:solidFill>
+                  <a:srgbClr val="E7ECF5"/>
+                </a:solidFill>
+                <a:latin typeface="Menlo"/>
+              </a:rPr>
+              <a:t> {string} de {string} à {string} le {string}")</a:t>
             </a:r>
           </a:p>
           <a:p>
             <a:pPr algn="l">
               <a:lnSpc>
-                <a:spcPct val="120000"/>
+                <a:spcPct val="110000"/>
               </a:lnSpc>
             </a:pPr>
             <a:r>
-              <a:rPr sz="1350" b="0" i="0">
+              <a:rPr sz="1150" b="0" i="0" dirty="0">
                 <a:solidFill>
                   <a:srgbClr val="E7ECF5"/>
                 </a:solidFill>
                 <a:latin typeface="Menlo"/>
               </a:rPr>
-              <a:t>    public void jai_deja_levenement(String titre, String debut, String fin, String date) {</a:t>
+              <a:t>    public void </a:t>
+            </a:r>
+            <a:r>
+              <a:rPr sz="1150" b="0" i="0" dirty="0" err="1">
+                <a:solidFill>
+                  <a:srgbClr val="E7ECF5"/>
+                </a:solidFill>
+                <a:latin typeface="Menlo"/>
+              </a:rPr>
+              <a:t>jai_deja_levenement</a:t>
+            </a:r>
+            <a:r>
+              <a:rPr sz="1150" b="0" i="0" dirty="0">
+                <a:solidFill>
+                  <a:srgbClr val="E7ECF5"/>
+                </a:solidFill>
+                <a:latin typeface="Menlo"/>
+              </a:rPr>
+              <a:t>(String </a:t>
+            </a:r>
+            <a:r>
+              <a:rPr sz="1150" b="0" i="0" dirty="0" err="1">
+                <a:solidFill>
+                  <a:srgbClr val="E7ECF5"/>
+                </a:solidFill>
+                <a:latin typeface="Menlo"/>
+              </a:rPr>
+              <a:t>titre</a:t>
+            </a:r>
+            <a:r>
+              <a:rPr sz="1150" b="0" i="0" dirty="0">
+                <a:solidFill>
+                  <a:srgbClr val="E7ECF5"/>
+                </a:solidFill>
+                <a:latin typeface="Menlo"/>
+              </a:rPr>
+              <a:t>, String debut, String fin, String date) {</a:t>
             </a:r>
           </a:p>
           <a:p>
             <a:pPr algn="l">
               <a:lnSpc>
-                <a:spcPct val="120000"/>
+                <a:spcPct val="110000"/>
               </a:lnSpc>
             </a:pPr>
             <a:r>
-              <a:rPr sz="1350" b="0" i="0">
+              <a:rPr sz="1150" b="0" i="0" dirty="0">
                 <a:solidFill>
                   <a:srgbClr val="E7ECF5"/>
                 </a:solidFill>
                 <a:latin typeface="Menlo"/>
               </a:rPr>
-              <a:t>        creerEvenement(titre, debut, fin, date);</a:t>
+              <a:t>        </a:t>
+            </a:r>
+            <a:r>
+              <a:rPr sz="1150" b="0" i="0" dirty="0" err="1">
+                <a:solidFill>
+                  <a:srgbClr val="E7ECF5"/>
+                </a:solidFill>
+                <a:latin typeface="Menlo"/>
+              </a:rPr>
+              <a:t>creerEvenement</a:t>
+            </a:r>
+            <a:r>
+              <a:rPr sz="1150" b="0" i="0" dirty="0">
+                <a:solidFill>
+                  <a:srgbClr val="E7ECF5"/>
+                </a:solidFill>
+                <a:latin typeface="Menlo"/>
+              </a:rPr>
+              <a:t>(</a:t>
+            </a:r>
+            <a:r>
+              <a:rPr sz="1150" b="0" i="0" dirty="0" err="1">
+                <a:solidFill>
+                  <a:srgbClr val="E7ECF5"/>
+                </a:solidFill>
+                <a:latin typeface="Menlo"/>
+              </a:rPr>
+              <a:t>titre</a:t>
+            </a:r>
+            <a:r>
+              <a:rPr sz="1150" b="0" i="0" dirty="0">
+                <a:solidFill>
+                  <a:srgbClr val="E7ECF5"/>
+                </a:solidFill>
+                <a:latin typeface="Menlo"/>
+              </a:rPr>
+              <a:t>, debut, fin, date);</a:t>
             </a:r>
           </a:p>
           <a:p>
             <a:pPr algn="l">
               <a:lnSpc>
-                <a:spcPct val="120000"/>
+                <a:spcPct val="110000"/>
               </a:lnSpc>
             </a:pPr>
             <a:r>
-              <a:rPr sz="1350" b="0" i="0">
+              <a:rPr sz="1150" b="0" i="0" dirty="0">
                 <a:solidFill>
                   <a:srgbClr val="E7ECF5"/>
                 </a:solidFill>
@@ -8295,59 +8433,167 @@
           <a:p>
             <a:pPr algn="l">
               <a:lnSpc>
-                <a:spcPct val="120000"/>
+                <a:spcPct val="110000"/>
               </a:lnSpc>
             </a:pPr>
             <a:r>
-              <a:rPr sz="1350" b="0" i="0">
+              <a:rPr sz="1150" b="0" i="0" dirty="0">
                 <a:solidFill>
                   <a:srgbClr val="E7ECF5"/>
                 </a:solidFill>
                 <a:latin typeface="Menlo"/>
               </a:rPr>
-              <a:t>    @When("je crée l'événement {string} de {string} à {string} le {string}")</a:t>
+              <a:t>    @When("je </a:t>
+            </a:r>
+            <a:r>
+              <a:rPr sz="1150" b="0" i="0" dirty="0" err="1">
+                <a:solidFill>
+                  <a:srgbClr val="E7ECF5"/>
+                </a:solidFill>
+                <a:latin typeface="Menlo"/>
+              </a:rPr>
+              <a:t>crée</a:t>
+            </a:r>
+            <a:r>
+              <a:rPr sz="1150" b="0" i="0" dirty="0">
+                <a:solidFill>
+                  <a:srgbClr val="E7ECF5"/>
+                </a:solidFill>
+                <a:latin typeface="Menlo"/>
+              </a:rPr>
+              <a:t> </a:t>
+            </a:r>
+            <a:r>
+              <a:rPr sz="1150" b="0" i="0" dirty="0" err="1">
+                <a:solidFill>
+                  <a:srgbClr val="E7ECF5"/>
+                </a:solidFill>
+                <a:latin typeface="Menlo"/>
+              </a:rPr>
+              <a:t>l'événement</a:t>
+            </a:r>
+            <a:r>
+              <a:rPr sz="1150" b="0" i="0" dirty="0">
+                <a:solidFill>
+                  <a:srgbClr val="E7ECF5"/>
+                </a:solidFill>
+                <a:latin typeface="Menlo"/>
+              </a:rPr>
+              <a:t> {string} de {string} à {string} le {string}")</a:t>
             </a:r>
           </a:p>
           <a:p>
             <a:pPr algn="l">
               <a:lnSpc>
-                <a:spcPct val="120000"/>
+                <a:spcPct val="110000"/>
               </a:lnSpc>
             </a:pPr>
             <a:r>
-              <a:rPr sz="1350" b="0" i="0">
+              <a:rPr sz="1150" b="0" i="0" dirty="0">
                 <a:solidFill>
                   <a:srgbClr val="E7ECF5"/>
                 </a:solidFill>
                 <a:latin typeface="Menlo"/>
               </a:rPr>
-              <a:t>    public void je_cree_levenement(String titre, String debut, String fin, String date) {</a:t>
+              <a:t>    public void </a:t>
+            </a:r>
+            <a:r>
+              <a:rPr sz="1150" b="0" i="0" dirty="0" err="1">
+                <a:solidFill>
+                  <a:srgbClr val="E7ECF5"/>
+                </a:solidFill>
+                <a:latin typeface="Menlo"/>
+              </a:rPr>
+              <a:t>je_cree_levenement</a:t>
+            </a:r>
+            <a:r>
+              <a:rPr sz="1150" b="0" i="0" dirty="0">
+                <a:solidFill>
+                  <a:srgbClr val="E7ECF5"/>
+                </a:solidFill>
+                <a:latin typeface="Menlo"/>
+              </a:rPr>
+              <a:t>(String </a:t>
+            </a:r>
+            <a:r>
+              <a:rPr sz="1150" b="0" i="0" dirty="0" err="1">
+                <a:solidFill>
+                  <a:srgbClr val="E7ECF5"/>
+                </a:solidFill>
+                <a:latin typeface="Menlo"/>
+              </a:rPr>
+              <a:t>titre</a:t>
+            </a:r>
+            <a:r>
+              <a:rPr sz="1150" b="0" i="0" dirty="0">
+                <a:solidFill>
+                  <a:srgbClr val="E7ECF5"/>
+                </a:solidFill>
+                <a:latin typeface="Menlo"/>
+              </a:rPr>
+              <a:t>, String debut, String fin, String date) {</a:t>
             </a:r>
           </a:p>
           <a:p>
             <a:pPr algn="l">
               <a:lnSpc>
-                <a:spcPct val="120000"/>
+                <a:spcPct val="110000"/>
               </a:lnSpc>
             </a:pPr>
             <a:r>
-              <a:rPr sz="1350" b="0" i="0">
+              <a:rPr sz="1150" b="0" i="0" dirty="0">
                 <a:solidFill>
                   <a:srgbClr val="E7ECF5"/>
                 </a:solidFill>
                 <a:latin typeface="Menlo"/>
               </a:rPr>
-              <a:t>        creerEvenement(titre, debut, fin, date);</a:t>
+              <a:t>        </a:t>
+            </a:r>
+            <a:r>
+              <a:rPr sz="1150" b="0" i="0" dirty="0" err="1">
+                <a:solidFill>
+                  <a:srgbClr val="E7ECF5"/>
+                </a:solidFill>
+                <a:latin typeface="Menlo"/>
+              </a:rPr>
+              <a:t>creerEvenement</a:t>
+            </a:r>
+            <a:r>
+              <a:rPr sz="1150" b="0" i="0" dirty="0">
+                <a:solidFill>
+                  <a:srgbClr val="E7ECF5"/>
+                </a:solidFill>
+                <a:latin typeface="Menlo"/>
+              </a:rPr>
+              <a:t>(</a:t>
+            </a:r>
+            <a:r>
+              <a:rPr sz="1150" b="0" i="0" dirty="0" err="1">
+                <a:solidFill>
+                  <a:srgbClr val="E7ECF5"/>
+                </a:solidFill>
+                <a:latin typeface="Menlo"/>
+              </a:rPr>
+              <a:t>titre</a:t>
+            </a:r>
+            <a:r>
+              <a:rPr sz="1150" b="0" i="0" dirty="0">
+                <a:solidFill>
+                  <a:srgbClr val="E7ECF5"/>
+                </a:solidFill>
+                <a:latin typeface="Menlo"/>
+              </a:rPr>
+              <a:t>, debut, fin, date);</a:t>
             </a:r>
           </a:p>
           <a:p>
             <a:pPr algn="l">
               <a:lnSpc>
-                <a:spcPct val="120000"/>
+                <a:spcPct val="110000"/>
               </a:lnSpc>
             </a:pPr>
             <a:r>
-              <a:rPr sz="1350" b="0" i="0">
+              <a:rPr sz="1150" b="0" i="0" dirty="0">
                 <a:solidFill>
                   <a:srgbClr val="E7ECF5"/>
                 </a:solidFill>
@@ -8359,59 +8605,203 @@
           <a:p>
             <a:pPr algn="l">
               <a:lnSpc>
-                <a:spcPct val="120000"/>
+                <a:spcPct val="110000"/>
               </a:lnSpc>
             </a:pPr>
             <a:r>
-              <a:rPr sz="1350" b="0" i="0">
+              <a:rPr sz="1150" b="0" i="0" dirty="0">
                 <a:solidFill>
                   <a:srgbClr val="E7ECF5"/>
                 </a:solidFill>
                 <a:latin typeface="Menlo"/>
               </a:rPr>
-              <a:t>    @Then("la création est refusée pour cause de conflit d'horaire")</a:t>
+              <a:t>    @Then("la </a:t>
+            </a:r>
+            <a:r>
+              <a:rPr sz="1150" b="0" i="0" dirty="0" err="1">
+                <a:solidFill>
+                  <a:srgbClr val="E7ECF5"/>
+                </a:solidFill>
+                <a:latin typeface="Menlo"/>
+              </a:rPr>
+              <a:t>création</a:t>
+            </a:r>
+            <a:r>
+              <a:rPr sz="1150" b="0" i="0" dirty="0">
+                <a:solidFill>
+                  <a:srgbClr val="E7ECF5"/>
+                </a:solidFill>
+                <a:latin typeface="Menlo"/>
+              </a:rPr>
+              <a:t> est </a:t>
+            </a:r>
+            <a:r>
+              <a:rPr sz="1150" b="0" i="0" dirty="0" err="1">
+                <a:solidFill>
+                  <a:srgbClr val="E7ECF5"/>
+                </a:solidFill>
+                <a:latin typeface="Menlo"/>
+              </a:rPr>
+              <a:t>refusée</a:t>
+            </a:r>
+            <a:r>
+              <a:rPr sz="1150" b="0" i="0" dirty="0">
+                <a:solidFill>
+                  <a:srgbClr val="E7ECF5"/>
+                </a:solidFill>
+                <a:latin typeface="Menlo"/>
+              </a:rPr>
+              <a:t> pour cause de </a:t>
+            </a:r>
+            <a:r>
+              <a:rPr sz="1150" b="0" i="0" dirty="0" err="1">
+                <a:solidFill>
+                  <a:srgbClr val="E7ECF5"/>
+                </a:solidFill>
+                <a:latin typeface="Menlo"/>
+              </a:rPr>
+              <a:t>conflit</a:t>
+            </a:r>
+            <a:r>
+              <a:rPr sz="1150" b="0" i="0" dirty="0">
+                <a:solidFill>
+                  <a:srgbClr val="E7ECF5"/>
+                </a:solidFill>
+                <a:latin typeface="Menlo"/>
+              </a:rPr>
+              <a:t> </a:t>
+            </a:r>
+            <a:r>
+              <a:rPr sz="1150" b="0" i="0" dirty="0" err="1">
+                <a:solidFill>
+                  <a:srgbClr val="E7ECF5"/>
+                </a:solidFill>
+                <a:latin typeface="Menlo"/>
+              </a:rPr>
+              <a:t>d'horaire</a:t>
+            </a:r>
+            <a:r>
+              <a:rPr sz="1150" b="0" i="0" dirty="0">
+                <a:solidFill>
+                  <a:srgbClr val="E7ECF5"/>
+                </a:solidFill>
+                <a:latin typeface="Menlo"/>
+              </a:rPr>
+              <a:t>")</a:t>
             </a:r>
           </a:p>
           <a:p>
             <a:pPr algn="l">
               <a:lnSpc>
-                <a:spcPct val="120000"/>
+                <a:spcPct val="110000"/>
               </a:lnSpc>
             </a:pPr>
             <a:r>
-              <a:rPr sz="1350" b="0" i="0">
+              <a:rPr sz="1150" b="0" i="0" dirty="0">
                 <a:solidFill>
                   <a:srgbClr val="E7ECF5"/>
                 </a:solidFill>
                 <a:latin typeface="Menlo"/>
               </a:rPr>
-              <a:t>    public void la_creation_est_refusee_pour_conflit() {</a:t>
+              <a:t>    public void </a:t>
+            </a:r>
+            <a:r>
+              <a:rPr sz="1150" b="0" i="0" dirty="0" err="1">
+                <a:solidFill>
+                  <a:srgbClr val="E7ECF5"/>
+                </a:solidFill>
+                <a:latin typeface="Menlo"/>
+              </a:rPr>
+              <a:t>la_creation_est_refusee_pour_conflit</a:t>
+            </a:r>
+            <a:r>
+              <a:rPr sz="1150" b="0" i="0" dirty="0">
+                <a:solidFill>
+                  <a:srgbClr val="E7ECF5"/>
+                </a:solidFill>
+                <a:latin typeface="Menlo"/>
+              </a:rPr>
+              <a:t>() {</a:t>
             </a:r>
           </a:p>
           <a:p>
             <a:pPr algn="l">
               <a:lnSpc>
-                <a:spcPct val="120000"/>
+                <a:spcPct val="110000"/>
               </a:lnSpc>
             </a:pPr>
             <a:r>
-              <a:rPr sz="1350" b="0" i="0">
+              <a:rPr sz="1150" b="0" i="0" dirty="0">
                 <a:solidFill>
                   <a:srgbClr val="E7ECF5"/>
                 </a:solidFill>
                 <a:latin typeface="Menlo"/>
               </a:rPr>
-              <a:t>        assertThat(lastResponse.statusCode(), equalTo(409));</a:t>
+              <a:t>        </a:t>
+            </a:r>
+            <a:r>
+              <a:rPr sz="1150" b="0" i="0" dirty="0" err="1">
+                <a:solidFill>
+                  <a:srgbClr val="E7ECF5"/>
+                </a:solidFill>
+                <a:latin typeface="Menlo"/>
+              </a:rPr>
+              <a:t>assertThat</a:t>
+            </a:r>
+            <a:r>
+              <a:rPr sz="1150" b="0" i="0" dirty="0">
+                <a:solidFill>
+                  <a:srgbClr val="E7ECF5"/>
+                </a:solidFill>
+                <a:latin typeface="Menlo"/>
+              </a:rPr>
+              <a:t>(</a:t>
+            </a:r>
+            <a:r>
+              <a:rPr sz="1150" b="0" i="0" dirty="0" err="1">
+                <a:solidFill>
+                  <a:srgbClr val="E7ECF5"/>
+                </a:solidFill>
+                <a:latin typeface="Menlo"/>
+              </a:rPr>
+              <a:t>lastResponse.statusCode</a:t>
+            </a:r>
+            <a:r>
+              <a:rPr sz="1150" b="0" i="0" dirty="0">
+                <a:solidFill>
+                  <a:srgbClr val="E7ECF5"/>
+                </a:solidFill>
+                <a:latin typeface="Menlo"/>
+              </a:rPr>
+              <a:t>(), </a:t>
+            </a:r>
+            <a:r>
+              <a:rPr sz="1150" b="0" i="0" dirty="0" err="1">
+                <a:solidFill>
+                  <a:srgbClr val="E7ECF5"/>
+                </a:solidFill>
+                <a:latin typeface="Menlo"/>
+              </a:rPr>
+              <a:t>equalTo</a:t>
+            </a:r>
+            <a:r>
+              <a:rPr sz="1150" b="0" i="0" dirty="0">
+                <a:solidFill>
+                  <a:srgbClr val="E7ECF5"/>
+                </a:solidFill>
+                <a:latin typeface="Menlo"/>
+              </a:rPr>
+              <a:t>(409));</a:t>
             </a:r>
           </a:p>
           <a:p>
             <a:pPr algn="l">
               <a:lnSpc>
-                <a:spcPct val="120000"/>
+                <a:spcPct val="110000"/>
               </a:lnSpc>
             </a:pPr>
             <a:r>
-              <a:rPr sz="1350" b="0" i="0">
+              <a:rPr sz="1150" b="0" i="0" dirty="0">
                 <a:solidFill>
                   <a:srgbClr val="E7ECF5"/>
                 </a:solidFill>
@@ -8423,27 +8813,114 @@
           <a:p>
             <a:pPr algn="l">
               <a:lnSpc>
-                <a:spcPct val="120000"/>
+                <a:spcPct val="110000"/>
               </a:lnSpc>
             </a:pPr>
             <a:r>
-              <a:rPr sz="1350" b="0" i="0">
+              <a:rPr sz="1150" b="0" i="0" dirty="0">
                 <a:solidFill>
                   <a:srgbClr val="E7ECF5"/>
                 </a:solidFill>
                 <a:latin typeface="Menlo"/>
               </a:rPr>
-              <a:t>    // creerEvenement() construit le JSON et POST /api/calendrier/evenements</a:t>
-            </a:r>
+              <a:t>    // </a:t>
+            </a:r>
+            <a:r>
+              <a:rPr sz="1150" b="0" i="0" dirty="0" err="1">
+                <a:solidFill>
+                  <a:srgbClr val="E7ECF5"/>
+                </a:solidFill>
+                <a:latin typeface="Menlo"/>
+              </a:rPr>
+              <a:t>creerEvenement</a:t>
+            </a:r>
+            <a:r>
+              <a:rPr sz="1150" b="0" i="0" dirty="0">
+                <a:solidFill>
+                  <a:srgbClr val="E7ECF5"/>
+                </a:solidFill>
+                <a:latin typeface="Menlo"/>
+              </a:rPr>
+              <a:t>() </a:t>
+            </a:r>
+            <a:r>
+              <a:rPr sz="1150" b="0" i="0" dirty="0" err="1">
+                <a:solidFill>
+                  <a:srgbClr val="E7ECF5"/>
+                </a:solidFill>
+                <a:latin typeface="Menlo"/>
+              </a:rPr>
+              <a:t>construit</a:t>
+            </a:r>
+            <a:r>
+              <a:rPr sz="1150" b="0" i="0" dirty="0">
+                <a:solidFill>
+                  <a:srgbClr val="E7ECF5"/>
+                </a:solidFill>
+                <a:latin typeface="Menlo"/>
+              </a:rPr>
+              <a:t> le JSON et POST /</a:t>
+            </a:r>
+            <a:r>
+              <a:rPr sz="1150" b="0" i="0" dirty="0" err="1">
+                <a:solidFill>
+                  <a:srgbClr val="E7ECF5"/>
+                </a:solidFill>
+                <a:latin typeface="Menlo"/>
+              </a:rPr>
+              <a:t>api</a:t>
+            </a:r>
+            <a:r>
+              <a:rPr sz="1150" b="0" i="0" dirty="0">
+                <a:solidFill>
+                  <a:srgbClr val="E7ECF5"/>
+                </a:solidFill>
+                <a:latin typeface="Menlo"/>
+              </a:rPr>
+              <a:t>/</a:t>
+            </a:r>
+            <a:r>
+              <a:rPr sz="1150" b="0" i="0" dirty="0" err="1">
+                <a:solidFill>
+                  <a:srgbClr val="E7ECF5"/>
+                </a:solidFill>
+                <a:latin typeface="Menlo"/>
+              </a:rPr>
+              <a:t>calendrier</a:t>
+            </a:r>
+            <a:r>
+              <a:rPr sz="1150" b="0" i="0" dirty="0">
+                <a:solidFill>
+                  <a:srgbClr val="E7ECF5"/>
+                </a:solidFill>
+                <a:latin typeface="Menlo"/>
+              </a:rPr>
+              <a:t>/</a:t>
+            </a:r>
+            <a:r>
+              <a:rPr sz="1150" b="0" i="0" dirty="0" err="1">
+                <a:solidFill>
+                  <a:srgbClr val="E7ECF5"/>
+                </a:solidFill>
+                <a:latin typeface="Menlo"/>
+              </a:rPr>
+              <a:t>evenements</a:t>
+            </a:r>
+            <a:endParaRPr sz="1150" b="0" i="0" dirty="0">
+              <a:solidFill>
+                <a:srgbClr val="E7ECF5"/>
+              </a:solidFill>
+              <a:latin typeface="Menlo"/>
+            </a:endParaRPr>
           </a:p>
           <a:p>
             <a:pPr algn="l">
               <a:lnSpc>
-                <a:spcPct val="120000"/>
+                <a:spcPct val="110000"/>
               </a:lnSpc>
             </a:pPr>
             <a:r>
-              <a:rPr sz="1350" b="0" i="0">
+              <a:rPr sz="1150" b="0" i="0" dirty="0">
                 <a:solidFill>
                   <a:srgbClr val="E7ECF5"/>
                 </a:solidFill>
@@ -8462,8 +8939,8 @@
         </p:nvSpPr>
         <p:spPr>
           <a:xfrm>
-            <a:off x="822960" y="5989320"/>
-            <a:ext cx="9875520" cy="457200"/>
+            <a:off x="822960" y="5863760"/>
+            <a:ext cx="9759547" cy="474232"/>
           </a:xfrm>
           <a:prstGeom prst="rect">
             <a:avLst/>
@@ -8471,7 +8948,7 @@
           <a:noFill/>
         </p:spPr>
         <p:txBody>
-          <a:bodyPr wrap="square" lIns="0" rIns="0" tIns="0" bIns="0">
+          <a:bodyPr wrap="square" lIns="0" tIns="0" rIns="0" bIns="0">
             <a:spAutoFit/>
           </a:bodyPr>
           <a:lstStyle/>
@@ -8482,13 +8959,121 @@
               </a:lnSpc>
             </a:pPr>
             <a:r>
-              <a:rPr sz="1300" b="0" i="0">
+              <a:rPr sz="1300" b="0" i="0" dirty="0">
                 <a:solidFill>
                   <a:srgbClr val="181D2B"/>
                 </a:solidFill>
                 <a:latin typeface="Helvetica Neue"/>
               </a:rPr>
-              <a:t>@Given / @When / @Then : une expression régulière relie chaque phrase à sa méthode.</a:t>
+              <a:t>@Given / @When / @Then : </a:t>
+            </a:r>
+            <a:r>
+              <a:rPr sz="1300" b="0" i="0" dirty="0" err="1">
+                <a:solidFill>
+                  <a:srgbClr val="181D2B"/>
+                </a:solidFill>
+                <a:latin typeface="Helvetica Neue"/>
+              </a:rPr>
+              <a:t>une</a:t>
+            </a:r>
+            <a:r>
+              <a:rPr sz="1300" b="0" i="0" dirty="0">
+                <a:solidFill>
+                  <a:srgbClr val="181D2B"/>
+                </a:solidFill>
+                <a:latin typeface="Helvetica Neue"/>
+              </a:rPr>
+              <a:t> expression </a:t>
+            </a:r>
+            <a:r>
+              <a:rPr sz="1300" b="0" i="0" dirty="0" err="1">
+                <a:solidFill>
+                  <a:srgbClr val="181D2B"/>
+                </a:solidFill>
+                <a:latin typeface="Helvetica Neue"/>
+              </a:rPr>
+              <a:t>régulière</a:t>
+            </a:r>
+            <a:r>
+              <a:rPr sz="1300" b="0" i="0" dirty="0">
+                <a:solidFill>
+                  <a:srgbClr val="181D2B"/>
+                </a:solidFill>
+                <a:latin typeface="Helvetica Neue"/>
+              </a:rPr>
+              <a:t> </a:t>
+            </a:r>
+            <a:r>
+              <a:rPr sz="1300" b="0" i="0" dirty="0" err="1">
+                <a:solidFill>
+                  <a:srgbClr val="181D2B"/>
+                </a:solidFill>
+                <a:latin typeface="Helvetica Neue"/>
+              </a:rPr>
+              <a:t>relie</a:t>
+            </a:r>
+            <a:r>
+              <a:rPr sz="1300" b="0" i="0" dirty="0">
+                <a:solidFill>
+                  <a:srgbClr val="181D2B"/>
+                </a:solidFill>
+                <a:latin typeface="Helvetica Neue"/>
+              </a:rPr>
+              <a:t> </a:t>
+            </a:r>
+            <a:r>
+              <a:rPr sz="1300" b="0" i="0" dirty="0" err="1">
+                <a:solidFill>
+                  <a:srgbClr val="181D2B"/>
+                </a:solidFill>
+                <a:latin typeface="Helvetica Neue"/>
+              </a:rPr>
+              <a:t>chaque</a:t>
+            </a:r>
+            <a:r>
+              <a:rPr sz="1300" b="0" i="0" dirty="0">
+                <a:solidFill>
+                  <a:srgbClr val="181D2B"/>
+                </a:solidFill>
+                <a:latin typeface="Helvetica Neue"/>
+              </a:rPr>
+              <a:t> phrase à </a:t>
+            </a:r>
+            <a:r>
+              <a:rPr sz="1300" b="0" i="0" dirty="0" err="1">
+                <a:solidFill>
+                  <a:srgbClr val="181D2B"/>
+                </a:solidFill>
+                <a:latin typeface="Helvetica Neue"/>
+              </a:rPr>
+              <a:t>sa</a:t>
+            </a:r>
+            <a:r>
+              <a:rPr sz="1300" b="0" i="0" dirty="0">
+                <a:solidFill>
+                  <a:srgbClr val="181D2B"/>
+                </a:solidFill>
+                <a:latin typeface="Helvetica Neue"/>
+              </a:rPr>
+              <a:t> </a:t>
+            </a:r>
+            <a:r>
+              <a:rPr sz="1300" b="0" i="0" dirty="0" err="1">
+                <a:solidFill>
+                  <a:srgbClr val="181D2B"/>
+                </a:solidFill>
+                <a:latin typeface="Helvetica Neue"/>
+              </a:rPr>
+              <a:t>méthode</a:t>
+            </a:r>
+            <a:r>
+              <a:rPr sz="1300" b="0" i="0" dirty="0">
+                <a:solidFill>
+                  <a:srgbClr val="181D2B"/>
+                </a:solidFill>
+                <a:latin typeface="Helvetica Neue"/>
+              </a:rPr>
+              <a:t>.</a:t>
             </a:r>
           </a:p>
           <a:p>
@@ -8498,13 +9083,58 @@
               </a:lnSpc>
             </a:pPr>
             <a:r>
-              <a:rPr sz="1300" b="0" i="0">
+              <a:rPr sz="1300" b="0" i="0" dirty="0" err="1">
                 <a:solidFill>
                   <a:srgbClr val="181D2B"/>
                 </a:solidFill>
                 <a:latin typeface="Helvetica Neue"/>
               </a:rPr>
-              <a:t>Même fichier pour les trois : EventStepDefinitions.java.</a:t>
+              <a:t>Même</a:t>
+            </a:r>
+            <a:r>
+              <a:rPr sz="1300" b="0" i="0" dirty="0">
+                <a:solidFill>
+                  <a:srgbClr val="181D2B"/>
+                </a:solidFill>
+                <a:latin typeface="Helvetica Neue"/>
+              </a:rPr>
+              <a:t> </a:t>
+            </a:r>
+            <a:r>
+              <a:rPr sz="1300" b="0" i="0" dirty="0" err="1">
+                <a:solidFill>
+                  <a:srgbClr val="181D2B"/>
+                </a:solidFill>
+                <a:latin typeface="Helvetica Neue"/>
+              </a:rPr>
+              <a:t>fichier</a:t>
+            </a:r>
+            <a:r>
+              <a:rPr sz="1300" b="0" i="0" dirty="0">
+                <a:solidFill>
+                  <a:srgbClr val="181D2B"/>
+                </a:solidFill>
+                <a:latin typeface="Helvetica Neue"/>
+              </a:rPr>
+              <a:t> pour les trois : </a:t>
+            </a:r>
+            <a:r>
+              <a:rPr sz="1300" b="0" i="0" dirty="0" err="1">
+                <a:solidFill>
+                  <a:srgbClr val="181D2B"/>
+                </a:solidFill>
+                <a:latin typeface="Helvetica Neue"/>
+              </a:rPr>
+              <a:t>EventStepDefinitions.java</a:t>
+            </a:r>
+            <a:r>
+              <a:rPr sz="1300" b="0" i="0" dirty="0">
+                <a:solidFill>
+                  <a:srgbClr val="181D2B"/>
+                </a:solidFill>
+                <a:latin typeface="Helvetica Neue"/>
+              </a:rPr>
+              <a:t>.</a:t>
             </a:r>
           </a:p>
         </p:txBody>
@@ -8579,7 +9209,7 @@
           <a:noFill/>
         </p:spPr>
         <p:txBody>
-          <a:bodyPr wrap="square" lIns="0" rIns="0" tIns="0" bIns="0">
+          <a:bodyPr wrap="square" lIns="0" tIns="0" rIns="0" bIns="0">
             <a:spAutoFit/>
           </a:bodyPr>
           <a:lstStyle/>
@@ -8603,12 +9233,12 @@
       </p:sp>
     </p:spTree>
   </p:cSld>
-  <p:transition spd="fast">
-    <p:fade/>
-  </p:transition>
   <p:clrMapOvr>
     <a:masterClrMapping/>
   </p:clrMapOvr>
+  <p:transition>
+    <p:fade/>
+  </p:transition>
 </p:sld>
 </file>
 

--- a/presentation/couverture-code-conference-dynamite.pptx
+++ b/presentation/couverture-code-conference-dynamite.pptx
@@ -28,12 +28,11 @@
     <p:sldId id="275" r:id="rId22"/>
     <p:sldId id="276" r:id="rId23"/>
     <p:sldId id="277" r:id="rId24"/>
-    <p:sldId id="278" r:id="rId25"/>
-    <p:sldId id="279" r:id="rId26"/>
-    <p:sldId id="280" r:id="rId27"/>
-    <p:sldId id="282" r:id="rId28"/>
-    <p:sldId id="283" r:id="rId29"/>
-    <p:sldId id="284" r:id="rId30"/>
+    <p:sldId id="279" r:id="rId25"/>
+    <p:sldId id="280" r:id="rId26"/>
+    <p:sldId id="282" r:id="rId27"/>
+    <p:sldId id="283" r:id="rId28"/>
+    <p:sldId id="284" r:id="rId29"/>
   </p:sldIdLst>
   <p:sldSz cx="12192000" cy="6858000"/>
   <p:notesSz cx="6858000" cy="9144000"/>
@@ -18385,7 +18384,7 @@
         <p:spPr>
           <a:xfrm>
             <a:off x="1783080" y="2112264"/>
-            <a:ext cx="9326880" cy="457200"/>
+            <a:ext cx="9326880" cy="261610"/>
           </a:xfrm>
           <a:prstGeom prst="rect">
             <a:avLst/>
@@ -18407,13 +18406,22 @@
               </a:spcAft>
             </a:pPr>
             <a:r>
-              <a:rPr sz="1700" b="1" i="0">
+              <a:rPr sz="1700" b="1" i="0" dirty="0" err="1">
                 <a:solidFill>
                   <a:srgbClr val="181D2B"/>
                 </a:solidFill>
                 <a:latin typeface="Menlo"/>
               </a:rPr>
-              <a:t>./mvnw test</a:t>
+              <a:t>mvn</a:t>
+            </a:r>
+            <a:r>
+              <a:rPr sz="1700" b="1" i="0" dirty="0">
+                <a:solidFill>
+                  <a:srgbClr val="181D2B"/>
+                </a:solidFill>
+                <a:latin typeface="Menlo"/>
+              </a:rPr>
+              <a:t> test</a:t>
             </a:r>
           </a:p>
         </p:txBody>
@@ -20962,7 +20970,7 @@
                 </a:solidFill>
                 <a:latin typeface="Helvetica Neue"/>
               </a:rPr>
-              <a:t>SONARQUBE — MESURES</a:t>
+              <a:t>SONARQUBE — LA PREUVE, ENCORE</a:t>
             </a:r>
           </a:p>
         </p:txBody>
@@ -20976,7 +20984,7 @@
         <p:spPr>
           <a:xfrm>
             <a:off x="822960" y="1051560"/>
-            <a:ext cx="10058400" cy="640080"/>
+            <a:ext cx="10789920" cy="502920"/>
           </a:xfrm>
           <a:prstGeom prst="rect">
             <a:avLst/>
@@ -20998,13 +21006,13 @@
               </a:spcAft>
             </a:pPr>
             <a:r>
-              <a:rPr sz="2400" b="1" i="0">
+              <a:rPr sz="2200" b="1" i="0">
                 <a:solidFill>
                   <a:srgbClr val="181D2B"/>
                 </a:solidFill>
                 <a:latin typeface="Helvetica Neue"/>
               </a:rPr>
-              <a:t>Le détail, fichier par fichier</a:t>
+              <a:t>Même branche rouge, autre outil</a:t>
             </a:r>
           </a:p>
         </p:txBody>
@@ -21017,7 +21025,7 @@
         </p:nvSpPr>
         <p:spPr>
           <a:xfrm>
-            <a:off x="3081528" y="1783080"/>
+            <a:off x="3081528" y="1737360"/>
             <a:ext cx="6035040" cy="310896"/>
           </a:xfrm>
           <a:prstGeom prst="roundRect">
@@ -21062,7 +21070,7 @@
         </p:nvSpPr>
         <p:spPr>
           <a:xfrm>
-            <a:off x="3081528" y="1938528"/>
+            <a:off x="3081528" y="1892808"/>
             <a:ext cx="6035040" cy="155448"/>
           </a:xfrm>
           <a:prstGeom prst="rect">
@@ -21107,7 +21115,7 @@
         </p:nvSpPr>
         <p:spPr>
           <a:xfrm>
-            <a:off x="3246120" y="1888236"/>
+            <a:off x="3246120" y="1842516"/>
             <a:ext cx="100584" cy="100584"/>
           </a:xfrm>
           <a:prstGeom prst="ellipse">
@@ -21152,7 +21160,7 @@
         </p:nvSpPr>
         <p:spPr>
           <a:xfrm>
-            <a:off x="3447288" y="1888236"/>
+            <a:off x="3447288" y="1842516"/>
             <a:ext cx="100584" cy="100584"/>
           </a:xfrm>
           <a:prstGeom prst="ellipse">
@@ -21197,7 +21205,7 @@
         </p:nvSpPr>
         <p:spPr>
           <a:xfrm>
-            <a:off x="3648456" y="1888236"/>
+            <a:off x="3648456" y="1842516"/>
             <a:ext cx="100584" cy="100584"/>
           </a:xfrm>
           <a:prstGeom prst="ellipse">
@@ -21236,7 +21244,7 @@
       </p:sp>
       <p:pic>
         <p:nvPicPr>
-          <p:cNvPr id="10" name="Picture 9" descr="sonar-coverage-list.png"/>
+          <p:cNvPr id="10" name="Picture 9" descr="sonar-code-drilldown.png"/>
           <p:cNvPicPr>
             <a:picLocks noChangeAspect="1"/>
           </p:cNvPicPr>
@@ -21250,7 +21258,7 @@
         </p:blipFill>
         <p:spPr>
           <a:xfrm>
-            <a:off x="3081528" y="2093976"/>
+            <a:off x="3081528" y="2048256"/>
             <a:ext cx="6035040" cy="3771900"/>
           </a:xfrm>
           <a:prstGeom prst="rect">
@@ -21266,7 +21274,7 @@
         </p:nvSpPr>
         <p:spPr>
           <a:xfrm>
-            <a:off x="3081528" y="2093976"/>
+            <a:off x="3081528" y="2048256"/>
             <a:ext cx="6035040" cy="3771900"/>
           </a:xfrm>
           <a:prstGeom prst="rect">
@@ -21340,7 +21348,7 @@
                 </a:solidFill>
                 <a:latin typeface="Helvetica Neue"/>
               </a:rPr>
-              <a:t>Mêmes pourcentages que dans notre terminal. Même vérité, vitrine plus chère.</a:t>
+              <a:t>Pas un artefact d'un outil bizarre : un fait sur votre code, confirmé deux fois de suite.</a:t>
             </a:r>
           </a:p>
         </p:txBody>
@@ -21393,7 +21401,7 @@
                 </a:solidFill>
                 <a:latin typeface="Helvetica Neue"/>
               </a:rPr>
-              <a:t>24/29</a:t>
+              <a:t>25/29</a:t>
             </a:r>
           </a:p>
         </p:txBody>
@@ -21491,7 +21499,7 @@
             <a:avLst/>
           </a:prstGeom>
           <a:solidFill>
-            <a:srgbClr val="3E6BE0"/>
+            <a:srgbClr val="F05A46"/>
           </a:solidFill>
           <a:ln>
             <a:noFill/>
@@ -21536,7 +21544,7 @@
             <a:avLst/>
           </a:prstGeom>
           <a:solidFill>
-            <a:srgbClr val="3E6BE0"/>
+            <a:srgbClr val="F05A46"/>
           </a:solidFill>
           <a:ln>
             <a:noFill/>
@@ -21569,7 +21577,7 @@
                 </a:solidFill>
                 <a:latin typeface="Helvetica Neue"/>
               </a:rPr>
-              <a:t>SONARQUBE — LA PREUVE, ENCORE</a:t>
+              <a:t>CONFESSIONS COLLECTIVES</a:t>
             </a:r>
           </a:p>
         </p:txBody>
@@ -21583,7 +21591,7 @@
         <p:spPr>
           <a:xfrm>
             <a:off x="822960" y="1051560"/>
-            <a:ext cx="10789920" cy="502920"/>
+            <a:ext cx="10058400" cy="1005840"/>
           </a:xfrm>
           <a:prstGeom prst="rect">
             <a:avLst/>
@@ -21605,13 +21613,13 @@
               </a:spcAft>
             </a:pPr>
             <a:r>
-              <a:rPr sz="2200" b="1" i="0">
+              <a:rPr sz="2600" b="1" i="0">
                 <a:solidFill>
                   <a:srgbClr val="181D2B"/>
                 </a:solidFill>
                 <a:latin typeface="Helvetica Neue"/>
               </a:rPr>
-              <a:t>Même branche rouge, autre outil</a:t>
+              <a:t>Le best-of des excuses pour ne pas tester</a:t>
             </a:r>
           </a:p>
         </p:txBody>
@@ -21624,103 +21632,13 @@
         </p:nvSpPr>
         <p:spPr>
           <a:xfrm>
-            <a:off x="3081528" y="1737360"/>
-            <a:ext cx="6035040" cy="310896"/>
+            <a:off x="822960" y="2167128"/>
+            <a:ext cx="564184" cy="310896"/>
           </a:xfrm>
           <a:prstGeom prst="roundRect">
             <a:avLst/>
           </a:prstGeom>
           <a:solidFill>
-            <a:srgbClr val="0C111F"/>
-          </a:solidFill>
-          <a:ln>
-            <a:noFill/>
-          </a:ln>
-          <a:effectLst/>
-        </p:spPr>
-        <p:style>
-          <a:lnRef idx="1">
-            <a:schemeClr val="accent1"/>
-          </a:lnRef>
-          <a:fillRef idx="3">
-            <a:schemeClr val="accent1"/>
-          </a:fillRef>
-          <a:effectRef idx="2">
-            <a:schemeClr val="accent1"/>
-          </a:effectRef>
-          <a:fontRef idx="minor">
-            <a:schemeClr val="lt1"/>
-          </a:fontRef>
-        </p:style>
-        <p:txBody>
-          <a:bodyPr rtlCol="0" anchor="ctr"/>
-          <a:lstStyle/>
-          <a:p>
-            <a:pPr algn="ctr"/>
-            <a:endParaRPr/>
-          </a:p>
-        </p:txBody>
-      </p:sp>
-      <p:sp>
-        <p:nvSpPr>
-          <p:cNvPr id="6" name="Rectangle 5"/>
-          <p:cNvSpPr/>
-          <p:nvPr/>
-        </p:nvSpPr>
-        <p:spPr>
-          <a:xfrm>
-            <a:off x="3081528" y="1892808"/>
-            <a:ext cx="6035040" cy="155448"/>
-          </a:xfrm>
-          <a:prstGeom prst="rect">
-            <a:avLst/>
-          </a:prstGeom>
-          <a:solidFill>
-            <a:srgbClr val="0C111F"/>
-          </a:solidFill>
-          <a:ln>
-            <a:noFill/>
-          </a:ln>
-          <a:effectLst/>
-        </p:spPr>
-        <p:style>
-          <a:lnRef idx="1">
-            <a:schemeClr val="accent1"/>
-          </a:lnRef>
-          <a:fillRef idx="3">
-            <a:schemeClr val="accent1"/>
-          </a:fillRef>
-          <a:effectRef idx="2">
-            <a:schemeClr val="accent1"/>
-          </a:effectRef>
-          <a:fontRef idx="minor">
-            <a:schemeClr val="lt1"/>
-          </a:fontRef>
-        </p:style>
-        <p:txBody>
-          <a:bodyPr rtlCol="0" anchor="ctr"/>
-          <a:lstStyle/>
-          <a:p>
-            <a:pPr algn="ctr"/>
-            <a:endParaRPr/>
-          </a:p>
-        </p:txBody>
-      </p:sp>
-      <p:sp>
-        <p:nvSpPr>
-          <p:cNvPr id="7" name="Oval 6"/>
-          <p:cNvSpPr/>
-          <p:nvPr/>
-        </p:nvSpPr>
-        <p:spPr>
-          <a:xfrm>
-            <a:off x="3246120" y="1842516"/>
-            <a:ext cx="100584" cy="100584"/>
-          </a:xfrm>
-          <a:prstGeom prst="ellipse">
-            <a:avLst/>
-          </a:prstGeom>
-          <a:solidFill>
             <a:srgbClr val="F05A46"/>
           </a:solidFill>
           <a:ln>
@@ -21743,183 +21661,32 @@
           </a:fontRef>
         </p:style>
         <p:txBody>
-          <a:bodyPr rtlCol="0" anchor="ctr"/>
-          <a:lstStyle/>
-          <a:p>
-            <a:pPr algn="ctr"/>
-            <a:endParaRPr/>
-          </a:p>
-        </p:txBody>
-      </p:sp>
-      <p:sp>
-        <p:nvSpPr>
-          <p:cNvPr id="8" name="Oval 7"/>
-          <p:cNvSpPr/>
-          <p:nvPr/>
-        </p:nvSpPr>
-        <p:spPr>
-          <a:xfrm>
-            <a:off x="3447288" y="1842516"/>
-            <a:ext cx="100584" cy="100584"/>
-          </a:xfrm>
-          <a:prstGeom prst="ellipse">
-            <a:avLst/>
-          </a:prstGeom>
-          <a:solidFill>
-            <a:srgbClr val="F0A72E"/>
-          </a:solidFill>
-          <a:ln>
-            <a:noFill/>
-          </a:ln>
-          <a:effectLst/>
-        </p:spPr>
-        <p:style>
-          <a:lnRef idx="1">
-            <a:schemeClr val="accent1"/>
-          </a:lnRef>
-          <a:fillRef idx="3">
-            <a:schemeClr val="accent1"/>
-          </a:fillRef>
-          <a:effectRef idx="2">
-            <a:schemeClr val="accent1"/>
-          </a:effectRef>
-          <a:fontRef idx="minor">
-            <a:schemeClr val="lt1"/>
-          </a:fontRef>
-        </p:style>
-        <p:txBody>
-          <a:bodyPr rtlCol="0" anchor="ctr"/>
-          <a:lstStyle/>
-          <a:p>
-            <a:pPr algn="ctr"/>
-            <a:endParaRPr/>
-          </a:p>
-        </p:txBody>
-      </p:sp>
-      <p:sp>
-        <p:nvSpPr>
-          <p:cNvPr id="9" name="Oval 8"/>
-          <p:cNvSpPr/>
-          <p:nvPr/>
-        </p:nvSpPr>
-        <p:spPr>
-          <a:xfrm>
-            <a:off x="3648456" y="1842516"/>
-            <a:ext cx="100584" cy="100584"/>
-          </a:xfrm>
-          <a:prstGeom prst="ellipse">
-            <a:avLst/>
-          </a:prstGeom>
-          <a:solidFill>
-            <a:srgbClr val="5BC26B"/>
-          </a:solidFill>
-          <a:ln>
-            <a:noFill/>
-          </a:ln>
-          <a:effectLst/>
-        </p:spPr>
-        <p:style>
-          <a:lnRef idx="1">
-            <a:schemeClr val="accent1"/>
-          </a:lnRef>
-          <a:fillRef idx="3">
-            <a:schemeClr val="accent1"/>
-          </a:fillRef>
-          <a:effectRef idx="2">
-            <a:schemeClr val="accent1"/>
-          </a:effectRef>
-          <a:fontRef idx="minor">
-            <a:schemeClr val="lt1"/>
-          </a:fontRef>
-        </p:style>
-        <p:txBody>
-          <a:bodyPr rtlCol="0" anchor="ctr"/>
-          <a:lstStyle/>
-          <a:p>
-            <a:pPr algn="ctr"/>
-            <a:endParaRPr/>
-          </a:p>
-        </p:txBody>
-      </p:sp>
-      <p:pic>
-        <p:nvPicPr>
-          <p:cNvPr id="10" name="Picture 9" descr="sonar-code-drilldown.png"/>
-          <p:cNvPicPr>
-            <a:picLocks noChangeAspect="1"/>
-          </p:cNvPicPr>
-          <p:nvPr/>
-        </p:nvPicPr>
-        <p:blipFill>
-          <a:blip r:embed="rId2"/>
-          <a:stretch>
-            <a:fillRect/>
-          </a:stretch>
-        </p:blipFill>
-        <p:spPr>
-          <a:xfrm>
-            <a:off x="3081528" y="2048256"/>
-            <a:ext cx="6035040" cy="3771900"/>
-          </a:xfrm>
-          <a:prstGeom prst="rect">
-            <a:avLst/>
-          </a:prstGeom>
-        </p:spPr>
-      </p:pic>
-      <p:sp>
-        <p:nvSpPr>
-          <p:cNvPr id="11" name="Rectangle 10"/>
-          <p:cNvSpPr/>
-          <p:nvPr/>
-        </p:nvSpPr>
-        <p:spPr>
-          <a:xfrm>
-            <a:off x="3081528" y="2048256"/>
-            <a:ext cx="6035040" cy="3771900"/>
-          </a:xfrm>
-          <a:prstGeom prst="rect">
-            <a:avLst/>
-          </a:prstGeom>
-          <a:noFill/>
-          <a:ln w="19050">
-            <a:solidFill>
-              <a:srgbClr val="0C111F"/>
-            </a:solidFill>
-          </a:ln>
-          <a:effectLst/>
-        </p:spPr>
-        <p:style>
-          <a:lnRef idx="1">
-            <a:schemeClr val="accent1"/>
-          </a:lnRef>
-          <a:fillRef idx="3">
-            <a:schemeClr val="accent1"/>
-          </a:fillRef>
-          <a:effectRef idx="2">
-            <a:schemeClr val="accent1"/>
-          </a:effectRef>
-          <a:fontRef idx="minor">
-            <a:schemeClr val="lt1"/>
-          </a:fontRef>
-        </p:style>
-        <p:txBody>
-          <a:bodyPr rtlCol="0" anchor="ctr"/>
-          <a:lstStyle/>
-          <a:p>
-            <a:pPr algn="ctr"/>
-            <a:endParaRPr/>
-          </a:p>
-        </p:txBody>
-      </p:sp>
-      <p:sp>
-        <p:nvSpPr>
-          <p:cNvPr id="12" name="TextBox 11"/>
+          <a:bodyPr wrap="none" lIns="45720" rIns="45720" rtlCol="0" anchor="ctr"/>
+          <a:lstStyle/>
+          <a:p>
+            <a:pPr algn="ctr"/>
+            <a:r>
+              <a:rPr sz="1100" b="1">
+                <a:solidFill>
+                  <a:srgbClr val="0C111F"/>
+                </a:solidFill>
+                <a:latin typeface="Helvetica Neue"/>
+              </a:rPr>
+              <a:t>01</a:t>
+            </a:r>
+          </a:p>
+        </p:txBody>
+      </p:sp>
+      <p:sp>
+        <p:nvSpPr>
+          <p:cNvPr id="6" name="TextBox 5"/>
           <p:cNvSpPr txBox="1"/>
           <p:nvPr/>
         </p:nvSpPr>
         <p:spPr>
           <a:xfrm>
-            <a:off x="822960" y="5989320"/>
-            <a:ext cx="10515600" cy="365760"/>
+            <a:off x="1691640" y="2148840"/>
+            <a:ext cx="9601200" cy="365760"/>
           </a:xfrm>
           <a:prstGeom prst="rect">
             <a:avLst/>
@@ -21932,7 +21699,7 @@
           </a:bodyPr>
           <a:lstStyle/>
           <a:p>
-            <a:pPr algn="ctr">
+            <a:pPr algn="l">
               <a:lnSpc>
                 <a:spcPct val="100000"/>
               </a:lnSpc>
@@ -21941,20 +21708,802 @@
               </a:spcAft>
             </a:pPr>
             <a:r>
-              <a:rPr sz="1200" b="0" i="1">
+              <a:rPr sz="1450" b="1" i="0">
+                <a:solidFill>
+                  <a:srgbClr val="181D2B"/>
+                </a:solidFill>
+                <a:latin typeface="Helvetica Neue"/>
+              </a:rPr>
+              <a:t>« Ça marche sur ma machine. »</a:t>
+            </a:r>
+          </a:p>
+        </p:txBody>
+      </p:sp>
+      <p:sp>
+        <p:nvSpPr>
+          <p:cNvPr id="7" name="TextBox 6"/>
+          <p:cNvSpPr txBox="1"/>
+          <p:nvPr/>
+        </p:nvSpPr>
+        <p:spPr>
+          <a:xfrm>
+            <a:off x="1691640" y="2468880"/>
+            <a:ext cx="9601200" cy="365760"/>
+          </a:xfrm>
+          <a:prstGeom prst="rect">
+            <a:avLst/>
+          </a:prstGeom>
+          <a:noFill/>
+        </p:spPr>
+        <p:txBody>
+          <a:bodyPr wrap="square" lIns="0" tIns="0" rIns="0" bIns="0" anchor="t">
+            <a:spAutoFit/>
+          </a:bodyPr>
+          <a:lstStyle/>
+          <a:p>
+            <a:pPr algn="l">
+              <a:lnSpc>
+                <a:spcPct val="100000"/>
+              </a:lnSpc>
+              <a:spcAft>
+                <a:spcPts val="0"/>
+              </a:spcAft>
+            </a:pPr>
+            <a:r>
+              <a:rPr sz="1100" b="0" i="1">
                 <a:solidFill>
                   <a:srgbClr val="5C6272"/>
                 </a:solidFill>
                 <a:latin typeface="Helvetica Neue"/>
               </a:rPr>
-              <a:t>Pas un artefact d'un outil bizarre : un fait sur votre code, confirmé deux fois de suite.</a:t>
-            </a:r>
-          </a:p>
-        </p:txBody>
-      </p:sp>
-      <p:sp>
-        <p:nvSpPr>
-          <p:cNvPr id="13" name="Rounded Rectangle 12"/>
+              <a:t>Votre machine n'ira pas en prod avec vous. Elle ne peut pas témoigner.</a:t>
+            </a:r>
+          </a:p>
+        </p:txBody>
+      </p:sp>
+      <p:sp>
+        <p:nvSpPr>
+          <p:cNvPr id="8" name="Rounded Rectangle 7"/>
+          <p:cNvSpPr/>
+          <p:nvPr/>
+        </p:nvSpPr>
+        <p:spPr>
+          <a:xfrm>
+            <a:off x="822960" y="2825496"/>
+            <a:ext cx="564184" cy="310896"/>
+          </a:xfrm>
+          <a:prstGeom prst="roundRect">
+            <a:avLst/>
+          </a:prstGeom>
+          <a:solidFill>
+            <a:srgbClr val="F05A46"/>
+          </a:solidFill>
+          <a:ln>
+            <a:noFill/>
+          </a:ln>
+          <a:effectLst/>
+        </p:spPr>
+        <p:style>
+          <a:lnRef idx="1">
+            <a:schemeClr val="accent1"/>
+          </a:lnRef>
+          <a:fillRef idx="3">
+            <a:schemeClr val="accent1"/>
+          </a:fillRef>
+          <a:effectRef idx="2">
+            <a:schemeClr val="accent1"/>
+          </a:effectRef>
+          <a:fontRef idx="minor">
+            <a:schemeClr val="lt1"/>
+          </a:fontRef>
+        </p:style>
+        <p:txBody>
+          <a:bodyPr wrap="none" lIns="45720" rIns="45720" rtlCol="0" anchor="ctr"/>
+          <a:lstStyle/>
+          <a:p>
+            <a:pPr algn="ctr"/>
+            <a:r>
+              <a:rPr sz="1100" b="1">
+                <a:solidFill>
+                  <a:srgbClr val="0C111F"/>
+                </a:solidFill>
+                <a:latin typeface="Helvetica Neue"/>
+              </a:rPr>
+              <a:t>02</a:t>
+            </a:r>
+          </a:p>
+        </p:txBody>
+      </p:sp>
+      <p:sp>
+        <p:nvSpPr>
+          <p:cNvPr id="9" name="TextBox 8"/>
+          <p:cNvSpPr txBox="1"/>
+          <p:nvPr/>
+        </p:nvSpPr>
+        <p:spPr>
+          <a:xfrm>
+            <a:off x="1691640" y="2807208"/>
+            <a:ext cx="9601200" cy="365760"/>
+          </a:xfrm>
+          <a:prstGeom prst="rect">
+            <a:avLst/>
+          </a:prstGeom>
+          <a:noFill/>
+        </p:spPr>
+        <p:txBody>
+          <a:bodyPr wrap="square" lIns="0" tIns="0" rIns="0" bIns="0" anchor="t">
+            <a:spAutoFit/>
+          </a:bodyPr>
+          <a:lstStyle/>
+          <a:p>
+            <a:pPr algn="l">
+              <a:lnSpc>
+                <a:spcPct val="100000"/>
+              </a:lnSpc>
+              <a:spcAft>
+                <a:spcPts val="0"/>
+              </a:spcAft>
+            </a:pPr>
+            <a:r>
+              <a:rPr sz="1450" b="1" i="0">
+                <a:solidFill>
+                  <a:srgbClr val="181D2B"/>
+                </a:solidFill>
+                <a:latin typeface="Helvetica Neue"/>
+              </a:rPr>
+              <a:t>« On testera après le sprint. »</a:t>
+            </a:r>
+          </a:p>
+        </p:txBody>
+      </p:sp>
+      <p:sp>
+        <p:nvSpPr>
+          <p:cNvPr id="10" name="TextBox 9"/>
+          <p:cNvSpPr txBox="1"/>
+          <p:nvPr/>
+        </p:nvSpPr>
+        <p:spPr>
+          <a:xfrm>
+            <a:off x="1691640" y="3127248"/>
+            <a:ext cx="9601200" cy="365760"/>
+          </a:xfrm>
+          <a:prstGeom prst="rect">
+            <a:avLst/>
+          </a:prstGeom>
+          <a:noFill/>
+        </p:spPr>
+        <p:txBody>
+          <a:bodyPr wrap="square" lIns="0" tIns="0" rIns="0" bIns="0" anchor="t">
+            <a:spAutoFit/>
+          </a:bodyPr>
+          <a:lstStyle/>
+          <a:p>
+            <a:pPr algn="l">
+              <a:lnSpc>
+                <a:spcPct val="100000"/>
+              </a:lnSpc>
+              <a:spcAft>
+                <a:spcPts val="0"/>
+              </a:spcAft>
+            </a:pPr>
+            <a:r>
+              <a:rPr sz="1100" b="0" i="1">
+                <a:solidFill>
+                  <a:srgbClr val="5C6272"/>
+                </a:solidFill>
+                <a:latin typeface="Helvetica Neue"/>
+              </a:rPr>
+              <a:t>Le sprint suivant aussi. Et celui d'après. À ce rythme, on teste au démantèlement.</a:t>
+            </a:r>
+          </a:p>
+        </p:txBody>
+      </p:sp>
+      <p:sp>
+        <p:nvSpPr>
+          <p:cNvPr id="11" name="Rounded Rectangle 10"/>
+          <p:cNvSpPr/>
+          <p:nvPr/>
+        </p:nvSpPr>
+        <p:spPr>
+          <a:xfrm>
+            <a:off x="822960" y="3483864"/>
+            <a:ext cx="564184" cy="310896"/>
+          </a:xfrm>
+          <a:prstGeom prst="roundRect">
+            <a:avLst/>
+          </a:prstGeom>
+          <a:solidFill>
+            <a:srgbClr val="F05A46"/>
+          </a:solidFill>
+          <a:ln>
+            <a:noFill/>
+          </a:ln>
+          <a:effectLst/>
+        </p:spPr>
+        <p:style>
+          <a:lnRef idx="1">
+            <a:schemeClr val="accent1"/>
+          </a:lnRef>
+          <a:fillRef idx="3">
+            <a:schemeClr val="accent1"/>
+          </a:fillRef>
+          <a:effectRef idx="2">
+            <a:schemeClr val="accent1"/>
+          </a:effectRef>
+          <a:fontRef idx="minor">
+            <a:schemeClr val="lt1"/>
+          </a:fontRef>
+        </p:style>
+        <p:txBody>
+          <a:bodyPr wrap="none" lIns="45720" rIns="45720" rtlCol="0" anchor="ctr"/>
+          <a:lstStyle/>
+          <a:p>
+            <a:pPr algn="ctr"/>
+            <a:r>
+              <a:rPr sz="1100" b="1">
+                <a:solidFill>
+                  <a:srgbClr val="0C111F"/>
+                </a:solidFill>
+                <a:latin typeface="Helvetica Neue"/>
+              </a:rPr>
+              <a:t>03</a:t>
+            </a:r>
+          </a:p>
+        </p:txBody>
+      </p:sp>
+      <p:sp>
+        <p:nvSpPr>
+          <p:cNvPr id="12" name="TextBox 11"/>
+          <p:cNvSpPr txBox="1"/>
+          <p:nvPr/>
+        </p:nvSpPr>
+        <p:spPr>
+          <a:xfrm>
+            <a:off x="1691640" y="3465576"/>
+            <a:ext cx="9601200" cy="365760"/>
+          </a:xfrm>
+          <a:prstGeom prst="rect">
+            <a:avLst/>
+          </a:prstGeom>
+          <a:noFill/>
+        </p:spPr>
+        <p:txBody>
+          <a:bodyPr wrap="square" lIns="0" tIns="0" rIns="0" bIns="0" anchor="t">
+            <a:spAutoFit/>
+          </a:bodyPr>
+          <a:lstStyle/>
+          <a:p>
+            <a:pPr algn="l">
+              <a:lnSpc>
+                <a:spcPct val="100000"/>
+              </a:lnSpc>
+              <a:spcAft>
+                <a:spcPts val="0"/>
+              </a:spcAft>
+            </a:pPr>
+            <a:r>
+              <a:rPr sz="1450" b="1" i="0">
+                <a:solidFill>
+                  <a:srgbClr val="181D2B"/>
+                </a:solidFill>
+                <a:latin typeface="Helvetica Neue"/>
+              </a:rPr>
+              <a:t>« C'est trop simple pour bugger. »</a:t>
+            </a:r>
+          </a:p>
+        </p:txBody>
+      </p:sp>
+      <p:sp>
+        <p:nvSpPr>
+          <p:cNvPr id="13" name="TextBox 12"/>
+          <p:cNvSpPr txBox="1"/>
+          <p:nvPr/>
+        </p:nvSpPr>
+        <p:spPr>
+          <a:xfrm>
+            <a:off x="1691640" y="3785616"/>
+            <a:ext cx="9601200" cy="365760"/>
+          </a:xfrm>
+          <a:prstGeom prst="rect">
+            <a:avLst/>
+          </a:prstGeom>
+          <a:noFill/>
+        </p:spPr>
+        <p:txBody>
+          <a:bodyPr wrap="square" lIns="0" tIns="0" rIns="0" bIns="0" anchor="t">
+            <a:spAutoFit/>
+          </a:bodyPr>
+          <a:lstStyle/>
+          <a:p>
+            <a:pPr algn="l">
+              <a:lnSpc>
+                <a:spcPct val="100000"/>
+              </a:lnSpc>
+              <a:spcAft>
+                <a:spcPts val="0"/>
+              </a:spcAft>
+            </a:pPr>
+            <a:r>
+              <a:rPr sz="1100" b="0" i="1">
+                <a:solidFill>
+                  <a:srgbClr val="5C6272"/>
+                </a:solidFill>
+                <a:latin typeface="Helvetica Neue"/>
+              </a:rPr>
+              <a:t>Neuf incidents de prod sur dix commencent exactement comme ça.</a:t>
+            </a:r>
+          </a:p>
+        </p:txBody>
+      </p:sp>
+      <p:sp>
+        <p:nvSpPr>
+          <p:cNvPr id="14" name="Rounded Rectangle 13"/>
+          <p:cNvSpPr/>
+          <p:nvPr/>
+        </p:nvSpPr>
+        <p:spPr>
+          <a:xfrm>
+            <a:off x="822960" y="4142232"/>
+            <a:ext cx="564184" cy="310896"/>
+          </a:xfrm>
+          <a:prstGeom prst="roundRect">
+            <a:avLst/>
+          </a:prstGeom>
+          <a:solidFill>
+            <a:srgbClr val="F05A46"/>
+          </a:solidFill>
+          <a:ln>
+            <a:noFill/>
+          </a:ln>
+          <a:effectLst/>
+        </p:spPr>
+        <p:style>
+          <a:lnRef idx="1">
+            <a:schemeClr val="accent1"/>
+          </a:lnRef>
+          <a:fillRef idx="3">
+            <a:schemeClr val="accent1"/>
+          </a:fillRef>
+          <a:effectRef idx="2">
+            <a:schemeClr val="accent1"/>
+          </a:effectRef>
+          <a:fontRef idx="minor">
+            <a:schemeClr val="lt1"/>
+          </a:fontRef>
+        </p:style>
+        <p:txBody>
+          <a:bodyPr wrap="none" lIns="45720" rIns="45720" rtlCol="0" anchor="ctr"/>
+          <a:lstStyle/>
+          <a:p>
+            <a:pPr algn="ctr"/>
+            <a:r>
+              <a:rPr sz="1100" b="1">
+                <a:solidFill>
+                  <a:srgbClr val="0C111F"/>
+                </a:solidFill>
+                <a:latin typeface="Helvetica Neue"/>
+              </a:rPr>
+              <a:t>04</a:t>
+            </a:r>
+          </a:p>
+        </p:txBody>
+      </p:sp>
+      <p:sp>
+        <p:nvSpPr>
+          <p:cNvPr id="15" name="TextBox 14"/>
+          <p:cNvSpPr txBox="1"/>
+          <p:nvPr/>
+        </p:nvSpPr>
+        <p:spPr>
+          <a:xfrm>
+            <a:off x="1691640" y="4123944"/>
+            <a:ext cx="9601200" cy="223138"/>
+          </a:xfrm>
+          <a:prstGeom prst="rect">
+            <a:avLst/>
+          </a:prstGeom>
+          <a:noFill/>
+        </p:spPr>
+        <p:txBody>
+          <a:bodyPr wrap="square" lIns="0" tIns="0" rIns="0" bIns="0" anchor="t">
+            <a:spAutoFit/>
+          </a:bodyPr>
+          <a:lstStyle/>
+          <a:p>
+            <a:pPr algn="l">
+              <a:lnSpc>
+                <a:spcPct val="100000"/>
+              </a:lnSpc>
+              <a:spcAft>
+                <a:spcPts val="0"/>
+              </a:spcAft>
+            </a:pPr>
+            <a:r>
+              <a:rPr sz="1450" b="1" i="0" dirty="0">
+                <a:solidFill>
+                  <a:srgbClr val="181D2B"/>
+                </a:solidFill>
+                <a:latin typeface="Helvetica Neue"/>
+              </a:rPr>
+              <a:t>« </a:t>
+            </a:r>
+            <a:r>
+              <a:rPr lang="fr-FR" sz="1450" b="1" i="0" dirty="0">
+                <a:solidFill>
+                  <a:srgbClr val="181D2B"/>
+                </a:solidFill>
+                <a:latin typeface="Helvetica Neue"/>
+              </a:rPr>
+              <a:t>François</a:t>
+            </a:r>
+            <a:r>
+              <a:rPr sz="1450" b="1" i="0" dirty="0">
+                <a:solidFill>
+                  <a:srgbClr val="181D2B"/>
+                </a:solidFill>
+                <a:latin typeface="Helvetica Neue"/>
+              </a:rPr>
+              <a:t> a </a:t>
+            </a:r>
+            <a:r>
+              <a:rPr sz="1450" b="1" i="0" dirty="0" err="1">
+                <a:solidFill>
+                  <a:srgbClr val="181D2B"/>
+                </a:solidFill>
+                <a:latin typeface="Helvetica Neue"/>
+              </a:rPr>
+              <a:t>dit</a:t>
+            </a:r>
+            <a:r>
+              <a:rPr sz="1450" b="1" i="0" dirty="0">
+                <a:solidFill>
+                  <a:srgbClr val="181D2B"/>
+                </a:solidFill>
+                <a:latin typeface="Helvetica Neue"/>
+              </a:rPr>
+              <a:t> </a:t>
+            </a:r>
+            <a:r>
+              <a:rPr sz="1450" b="1" i="0" dirty="0" err="1">
+                <a:solidFill>
+                  <a:srgbClr val="181D2B"/>
+                </a:solidFill>
+                <a:latin typeface="Helvetica Neue"/>
+              </a:rPr>
+              <a:t>que</a:t>
+            </a:r>
+            <a:r>
+              <a:rPr sz="1450" b="1" i="0" dirty="0">
+                <a:solidFill>
+                  <a:srgbClr val="181D2B"/>
+                </a:solidFill>
+                <a:latin typeface="Helvetica Neue"/>
+              </a:rPr>
+              <a:t> </a:t>
+            </a:r>
+            <a:r>
+              <a:rPr sz="1450" b="1" i="0" dirty="0" err="1">
+                <a:solidFill>
+                  <a:srgbClr val="181D2B"/>
+                </a:solidFill>
+                <a:latin typeface="Helvetica Neue"/>
+              </a:rPr>
+              <a:t>ça</a:t>
+            </a:r>
+            <a:r>
+              <a:rPr sz="1450" b="1" i="0" dirty="0">
+                <a:solidFill>
+                  <a:srgbClr val="181D2B"/>
+                </a:solidFill>
+                <a:latin typeface="Helvetica Neue"/>
+              </a:rPr>
+              <a:t> </a:t>
+            </a:r>
+            <a:r>
+              <a:rPr sz="1450" b="1" i="0" dirty="0" err="1">
+                <a:solidFill>
+                  <a:srgbClr val="181D2B"/>
+                </a:solidFill>
+                <a:latin typeface="Helvetica Neue"/>
+              </a:rPr>
+              <a:t>passait</a:t>
+            </a:r>
+            <a:r>
+              <a:rPr sz="1450" b="1" i="0" dirty="0">
+                <a:solidFill>
+                  <a:srgbClr val="181D2B"/>
+                </a:solidFill>
+                <a:latin typeface="Helvetica Neue"/>
+              </a:rPr>
+              <a:t>. »</a:t>
+            </a:r>
+          </a:p>
+        </p:txBody>
+      </p:sp>
+      <p:sp>
+        <p:nvSpPr>
+          <p:cNvPr id="16" name="TextBox 15"/>
+          <p:cNvSpPr txBox="1"/>
+          <p:nvPr/>
+        </p:nvSpPr>
+        <p:spPr>
+          <a:xfrm>
+            <a:off x="1691640" y="4443984"/>
+            <a:ext cx="9601200" cy="365760"/>
+          </a:xfrm>
+          <a:prstGeom prst="rect">
+            <a:avLst/>
+          </a:prstGeom>
+          <a:noFill/>
+        </p:spPr>
+        <p:txBody>
+          <a:bodyPr wrap="square" lIns="0" tIns="0" rIns="0" bIns="0" anchor="t">
+            <a:spAutoFit/>
+          </a:bodyPr>
+          <a:lstStyle/>
+          <a:p>
+            <a:pPr algn="l">
+              <a:lnSpc>
+                <a:spcPct val="100000"/>
+              </a:lnSpc>
+              <a:spcAft>
+                <a:spcPts val="0"/>
+              </a:spcAft>
+            </a:pPr>
+            <a:r>
+              <a:rPr sz="1100" b="0" i="1">
+                <a:solidFill>
+                  <a:srgbClr val="5C6272"/>
+                </a:solidFill>
+                <a:latin typeface="Helvetica Neue"/>
+              </a:rPr>
+              <a:t>Un mardi après-midi ensoleillé, à la main, une seule fois.</a:t>
+            </a:r>
+          </a:p>
+        </p:txBody>
+      </p:sp>
+      <p:sp>
+        <p:nvSpPr>
+          <p:cNvPr id="17" name="Rounded Rectangle 16"/>
+          <p:cNvSpPr/>
+          <p:nvPr/>
+        </p:nvSpPr>
+        <p:spPr>
+          <a:xfrm>
+            <a:off x="822960" y="4800600"/>
+            <a:ext cx="564184" cy="310896"/>
+          </a:xfrm>
+          <a:prstGeom prst="roundRect">
+            <a:avLst/>
+          </a:prstGeom>
+          <a:solidFill>
+            <a:srgbClr val="F05A46"/>
+          </a:solidFill>
+          <a:ln>
+            <a:noFill/>
+          </a:ln>
+          <a:effectLst/>
+        </p:spPr>
+        <p:style>
+          <a:lnRef idx="1">
+            <a:schemeClr val="accent1"/>
+          </a:lnRef>
+          <a:fillRef idx="3">
+            <a:schemeClr val="accent1"/>
+          </a:fillRef>
+          <a:effectRef idx="2">
+            <a:schemeClr val="accent1"/>
+          </a:effectRef>
+          <a:fontRef idx="minor">
+            <a:schemeClr val="lt1"/>
+          </a:fontRef>
+        </p:style>
+        <p:txBody>
+          <a:bodyPr wrap="none" lIns="45720" rIns="45720" rtlCol="0" anchor="ctr"/>
+          <a:lstStyle/>
+          <a:p>
+            <a:pPr algn="ctr"/>
+            <a:r>
+              <a:rPr sz="1100" b="1">
+                <a:solidFill>
+                  <a:srgbClr val="0C111F"/>
+                </a:solidFill>
+                <a:latin typeface="Helvetica Neue"/>
+              </a:rPr>
+              <a:t>05</a:t>
+            </a:r>
+          </a:p>
+        </p:txBody>
+      </p:sp>
+      <p:sp>
+        <p:nvSpPr>
+          <p:cNvPr id="18" name="TextBox 17"/>
+          <p:cNvSpPr txBox="1"/>
+          <p:nvPr/>
+        </p:nvSpPr>
+        <p:spPr>
+          <a:xfrm>
+            <a:off x="1691640" y="4782312"/>
+            <a:ext cx="9601200" cy="365760"/>
+          </a:xfrm>
+          <a:prstGeom prst="rect">
+            <a:avLst/>
+          </a:prstGeom>
+          <a:noFill/>
+        </p:spPr>
+        <p:txBody>
+          <a:bodyPr wrap="square" lIns="0" tIns="0" rIns="0" bIns="0" anchor="t">
+            <a:spAutoFit/>
+          </a:bodyPr>
+          <a:lstStyle/>
+          <a:p>
+            <a:pPr algn="l">
+              <a:lnSpc>
+                <a:spcPct val="100000"/>
+              </a:lnSpc>
+              <a:spcAft>
+                <a:spcPts val="0"/>
+              </a:spcAft>
+            </a:pPr>
+            <a:r>
+              <a:rPr sz="1450" b="1" i="0">
+                <a:solidFill>
+                  <a:srgbClr val="181D2B"/>
+                </a:solidFill>
+                <a:latin typeface="Helvetica Neue"/>
+              </a:rPr>
+              <a:t>« 100 % de couverture, on n'a plus besoin de relire. »</a:t>
+            </a:r>
+          </a:p>
+        </p:txBody>
+      </p:sp>
+      <p:sp>
+        <p:nvSpPr>
+          <p:cNvPr id="19" name="TextBox 18"/>
+          <p:cNvSpPr txBox="1"/>
+          <p:nvPr/>
+        </p:nvSpPr>
+        <p:spPr>
+          <a:xfrm>
+            <a:off x="1691640" y="5102352"/>
+            <a:ext cx="9601200" cy="365760"/>
+          </a:xfrm>
+          <a:prstGeom prst="rect">
+            <a:avLst/>
+          </a:prstGeom>
+          <a:noFill/>
+        </p:spPr>
+        <p:txBody>
+          <a:bodyPr wrap="square" lIns="0" tIns="0" rIns="0" bIns="0" anchor="t">
+            <a:spAutoFit/>
+          </a:bodyPr>
+          <a:lstStyle/>
+          <a:p>
+            <a:pPr algn="l">
+              <a:lnSpc>
+                <a:spcPct val="100000"/>
+              </a:lnSpc>
+              <a:spcAft>
+                <a:spcPts val="0"/>
+              </a:spcAft>
+            </a:pPr>
+            <a:r>
+              <a:rPr sz="1100" b="0" i="1">
+                <a:solidFill>
+                  <a:srgbClr val="5C6272"/>
+                </a:solidFill>
+                <a:latin typeface="Helvetica Neue"/>
+              </a:rPr>
+              <a:t>La couverture mesure ce qui a été EXÉCUTÉ. Pas ce qui a été VÉRIFIÉ.</a:t>
+            </a:r>
+          </a:p>
+        </p:txBody>
+      </p:sp>
+      <p:sp>
+        <p:nvSpPr>
+          <p:cNvPr id="20" name="Rounded Rectangle 19"/>
+          <p:cNvSpPr/>
+          <p:nvPr/>
+        </p:nvSpPr>
+        <p:spPr>
+          <a:xfrm>
+            <a:off x="822960" y="5806440"/>
+            <a:ext cx="10515600" cy="640080"/>
+          </a:xfrm>
+          <a:prstGeom prst="roundRect">
+            <a:avLst/>
+          </a:prstGeom>
+          <a:solidFill>
+            <a:srgbClr val="FFD23F"/>
+          </a:solidFill>
+          <a:ln>
+            <a:noFill/>
+          </a:ln>
+          <a:effectLst/>
+        </p:spPr>
+        <p:style>
+          <a:lnRef idx="1">
+            <a:schemeClr val="accent1"/>
+          </a:lnRef>
+          <a:fillRef idx="3">
+            <a:schemeClr val="accent1"/>
+          </a:fillRef>
+          <a:effectRef idx="2">
+            <a:schemeClr val="accent1"/>
+          </a:effectRef>
+          <a:fontRef idx="minor">
+            <a:schemeClr val="lt1"/>
+          </a:fontRef>
+        </p:style>
+        <p:txBody>
+          <a:bodyPr wrap="square" lIns="256032" tIns="128016" rIns="256032" bIns="128016" rtlCol="0" anchor="ctr"/>
+          <a:lstStyle/>
+          <a:p>
+            <a:pPr algn="ctr">
+              <a:lnSpc>
+                <a:spcPct val="115000"/>
+              </a:lnSpc>
+            </a:pPr>
+            <a:r>
+              <a:rPr sz="1250" b="1" i="0">
+                <a:solidFill>
+                  <a:srgbClr val="0C111F"/>
+                </a:solidFill>
+                <a:latin typeface="Helvetica Neue"/>
+              </a:rPr>
+              <a:t>Spoiler : aucune de ces cinq phrases n'a jamais empêché un incendie en prod. Pas une seule. J'ai vérifié. Enfin... je crois.</a:t>
+            </a:r>
+          </a:p>
+        </p:txBody>
+      </p:sp>
+      <p:sp>
+        <p:nvSpPr>
+          <p:cNvPr id="21" name="Isosceles Triangle 20"/>
+          <p:cNvSpPr/>
+          <p:nvPr/>
+        </p:nvSpPr>
+        <p:spPr>
+          <a:xfrm>
+            <a:off x="1143000" y="5568696"/>
+            <a:ext cx="256032" cy="256032"/>
+          </a:xfrm>
+          <a:prstGeom prst="triangle">
+            <a:avLst/>
+          </a:prstGeom>
+          <a:solidFill>
+            <a:srgbClr val="FFD23F"/>
+          </a:solidFill>
+          <a:ln>
+            <a:noFill/>
+          </a:ln>
+          <a:effectLst/>
+        </p:spPr>
+        <p:style>
+          <a:lnRef idx="1">
+            <a:schemeClr val="accent1"/>
+          </a:lnRef>
+          <a:fillRef idx="3">
+            <a:schemeClr val="accent1"/>
+          </a:fillRef>
+          <a:effectRef idx="2">
+            <a:schemeClr val="accent1"/>
+          </a:effectRef>
+          <a:fontRef idx="minor">
+            <a:schemeClr val="lt1"/>
+          </a:fontRef>
+        </p:style>
+        <p:txBody>
+          <a:bodyPr rtlCol="0" anchor="ctr"/>
+          <a:lstStyle/>
+          <a:p>
+            <a:pPr algn="ctr"/>
+            <a:endParaRPr/>
+          </a:p>
+        </p:txBody>
+      </p:sp>
+      <p:sp>
+        <p:nvSpPr>
+          <p:cNvPr id="22" name="Rounded Rectangle 21"/>
           <p:cNvSpPr/>
           <p:nvPr/>
         </p:nvSpPr>
@@ -22000,14 +22549,14 @@
                 </a:solidFill>
                 <a:latin typeface="Helvetica Neue"/>
               </a:rPr>
-              <a:t>25/29</a:t>
-            </a:r>
-          </a:p>
-        </p:txBody>
-      </p:sp>
-      <p:sp>
-        <p:nvSpPr>
-          <p:cNvPr id="14" name="TextBox 13"/>
+              <a:t>26/29</a:t>
+            </a:r>
+          </a:p>
+        </p:txBody>
+      </p:sp>
+      <p:sp>
+        <p:nvSpPr>
+          <p:cNvPr id="23" name="TextBox 22"/>
           <p:cNvSpPr txBox="1"/>
           <p:nvPr/>
         </p:nvSpPr>
@@ -22059,6 +22608,876 @@
 </file>
 
 <file path=ppt/slides/slide26.xml><?xml version="1.0" encoding="utf-8"?>
+<p:sld xmlns:a="http://schemas.openxmlformats.org/drawingml/2006/main" xmlns:r="http://schemas.openxmlformats.org/officeDocument/2006/relationships" xmlns:p="http://schemas.openxmlformats.org/presentationml/2006/main">
+  <p:cSld>
+    <p:bg>
+      <p:bgPr>
+        <a:solidFill>
+          <a:srgbClr val="0C111F"/>
+        </a:solidFill>
+        <a:effectLst/>
+      </p:bgPr>
+    </p:bg>
+    <p:spTree>
+      <p:nvGrpSpPr>
+        <p:cNvPr id="1" name=""/>
+        <p:cNvGrpSpPr/>
+        <p:nvPr/>
+      </p:nvGrpSpPr>
+      <p:grpSpPr>
+        <a:xfrm>
+          <a:off x="0" y="0"/>
+          <a:ext cx="0" cy="0"/>
+          <a:chOff x="0" y="0"/>
+          <a:chExt cx="0" cy="0"/>
+        </a:xfrm>
+      </p:grpSpPr>
+      <p:sp>
+        <p:nvSpPr>
+          <p:cNvPr id="2" name="Parallelogram 1"/>
+          <p:cNvSpPr/>
+          <p:nvPr/>
+        </p:nvSpPr>
+        <p:spPr>
+          <a:xfrm>
+            <a:off x="-164592" y="384048"/>
+            <a:ext cx="2148840" cy="420624"/>
+          </a:xfrm>
+          <a:prstGeom prst="parallelogram">
+            <a:avLst/>
+          </a:prstGeom>
+          <a:solidFill>
+            <a:srgbClr val="FFD23F"/>
+          </a:solidFill>
+          <a:ln>
+            <a:noFill/>
+          </a:ln>
+          <a:effectLst/>
+        </p:spPr>
+        <p:style>
+          <a:lnRef idx="1">
+            <a:schemeClr val="accent1"/>
+          </a:lnRef>
+          <a:fillRef idx="3">
+            <a:schemeClr val="accent1"/>
+          </a:fillRef>
+          <a:effectRef idx="2">
+            <a:schemeClr val="accent1"/>
+          </a:effectRef>
+          <a:fontRef idx="minor">
+            <a:schemeClr val="lt1"/>
+          </a:fontRef>
+        </p:style>
+        <p:txBody>
+          <a:bodyPr lIns="256032" tIns="18288" rIns="45720" bIns="18288" rtlCol="0" anchor="ctr"/>
+          <a:lstStyle/>
+          <a:p>
+            <a:pPr algn="l"/>
+            <a:r>
+              <a:rPr sz="1150" b="1">
+                <a:solidFill>
+                  <a:srgbClr val="0C111F"/>
+                </a:solidFill>
+                <a:latin typeface="Helvetica Neue"/>
+              </a:rPr>
+              <a:t>À RETENIR</a:t>
+            </a:r>
+          </a:p>
+        </p:txBody>
+      </p:sp>
+      <p:sp>
+        <p:nvSpPr>
+          <p:cNvPr id="3" name="TextBox 2"/>
+          <p:cNvSpPr txBox="1"/>
+          <p:nvPr/>
+        </p:nvSpPr>
+        <p:spPr>
+          <a:xfrm>
+            <a:off x="822960" y="1051560"/>
+            <a:ext cx="10058400" cy="822960"/>
+          </a:xfrm>
+          <a:prstGeom prst="rect">
+            <a:avLst/>
+          </a:prstGeom>
+          <a:noFill/>
+        </p:spPr>
+        <p:txBody>
+          <a:bodyPr wrap="square" lIns="0" tIns="0" rIns="0" bIns="0" anchor="t">
+            <a:spAutoFit/>
+          </a:bodyPr>
+          <a:lstStyle/>
+          <a:p>
+            <a:pPr algn="l">
+              <a:lnSpc>
+                <a:spcPct val="100000"/>
+              </a:lnSpc>
+              <a:spcAft>
+                <a:spcPts val="0"/>
+              </a:spcAft>
+            </a:pPr>
+            <a:r>
+              <a:rPr sz="3000" b="1" i="0">
+                <a:solidFill>
+                  <a:srgbClr val="F3EEE0"/>
+                </a:solidFill>
+                <a:latin typeface="Helvetica Neue"/>
+              </a:rPr>
+              <a:t>Ce qu'il faut retenir</a:t>
+            </a:r>
+          </a:p>
+        </p:txBody>
+      </p:sp>
+      <p:sp>
+        <p:nvSpPr>
+          <p:cNvPr id="4" name="Oval 3"/>
+          <p:cNvSpPr/>
+          <p:nvPr/>
+        </p:nvSpPr>
+        <p:spPr>
+          <a:xfrm>
+            <a:off x="10273284" y="443484"/>
+            <a:ext cx="1051560" cy="1051560"/>
+          </a:xfrm>
+          <a:prstGeom prst="ellipse">
+            <a:avLst/>
+          </a:prstGeom>
+          <a:solidFill>
+            <a:srgbClr val="0C111F"/>
+          </a:solidFill>
+          <a:ln>
+            <a:noFill/>
+          </a:ln>
+          <a:effectLst/>
+        </p:spPr>
+        <p:style>
+          <a:lnRef idx="1">
+            <a:schemeClr val="accent1"/>
+          </a:lnRef>
+          <a:fillRef idx="3">
+            <a:schemeClr val="accent1"/>
+          </a:fillRef>
+          <a:effectRef idx="2">
+            <a:schemeClr val="accent1"/>
+          </a:effectRef>
+          <a:fontRef idx="minor">
+            <a:schemeClr val="lt1"/>
+          </a:fontRef>
+        </p:style>
+        <p:txBody>
+          <a:bodyPr rtlCol="0" anchor="ctr"/>
+          <a:lstStyle/>
+          <a:p>
+            <a:pPr algn="ctr"/>
+            <a:endParaRPr/>
+          </a:p>
+        </p:txBody>
+      </p:sp>
+      <p:sp>
+        <p:nvSpPr>
+          <p:cNvPr id="5" name="Oval 4"/>
+          <p:cNvSpPr/>
+          <p:nvPr/>
+        </p:nvSpPr>
+        <p:spPr>
+          <a:xfrm rot="360000">
+            <a:off x="10218420" y="388620"/>
+            <a:ext cx="1051560" cy="1051560"/>
+          </a:xfrm>
+          <a:prstGeom prst="ellipse">
+            <a:avLst/>
+          </a:prstGeom>
+          <a:solidFill>
+            <a:srgbClr val="FFD23F"/>
+          </a:solidFill>
+          <a:ln>
+            <a:noFill/>
+          </a:ln>
+          <a:effectLst/>
+        </p:spPr>
+        <p:style>
+          <a:lnRef idx="1">
+            <a:schemeClr val="accent1"/>
+          </a:lnRef>
+          <a:fillRef idx="3">
+            <a:schemeClr val="accent1"/>
+          </a:fillRef>
+          <a:effectRef idx="2">
+            <a:schemeClr val="accent1"/>
+          </a:effectRef>
+          <a:fontRef idx="minor">
+            <a:schemeClr val="lt1"/>
+          </a:fontRef>
+        </p:style>
+        <p:txBody>
+          <a:bodyPr wrap="square" lIns="54864" rIns="54864" rtlCol="0" anchor="ctr"/>
+          <a:lstStyle/>
+          <a:p>
+            <a:pPr algn="ctr"/>
+            <a:r>
+              <a:rPr sz="1300" b="1">
+                <a:solidFill>
+                  <a:srgbClr val="0C111F"/>
+                </a:solidFill>
+                <a:latin typeface="Helvetica Neue"/>
+              </a:rPr>
+              <a:t>tl;dr</a:t>
+            </a:r>
+          </a:p>
+        </p:txBody>
+      </p:sp>
+      <p:sp>
+        <p:nvSpPr>
+          <p:cNvPr id="6" name="Oval 5"/>
+          <p:cNvSpPr/>
+          <p:nvPr/>
+        </p:nvSpPr>
+        <p:spPr>
+          <a:xfrm>
+            <a:off x="946404" y="2153412"/>
+            <a:ext cx="685800" cy="685800"/>
+          </a:xfrm>
+          <a:prstGeom prst="ellipse">
+            <a:avLst/>
+          </a:prstGeom>
+          <a:solidFill>
+            <a:srgbClr val="0C111F"/>
+          </a:solidFill>
+          <a:ln>
+            <a:noFill/>
+          </a:ln>
+          <a:effectLst/>
+        </p:spPr>
+        <p:style>
+          <a:lnRef idx="1">
+            <a:schemeClr val="accent1"/>
+          </a:lnRef>
+          <a:fillRef idx="3">
+            <a:schemeClr val="accent1"/>
+          </a:fillRef>
+          <a:effectRef idx="2">
+            <a:schemeClr val="accent1"/>
+          </a:effectRef>
+          <a:fontRef idx="minor">
+            <a:schemeClr val="lt1"/>
+          </a:fontRef>
+        </p:style>
+        <p:txBody>
+          <a:bodyPr rtlCol="0" anchor="ctr"/>
+          <a:lstStyle/>
+          <a:p>
+            <a:pPr algn="ctr"/>
+            <a:endParaRPr/>
+          </a:p>
+        </p:txBody>
+      </p:sp>
+      <p:sp>
+        <p:nvSpPr>
+          <p:cNvPr id="7" name="Oval 6"/>
+          <p:cNvSpPr/>
+          <p:nvPr/>
+        </p:nvSpPr>
+        <p:spPr>
+          <a:xfrm rot="21240000">
+            <a:off x="891540" y="2098548"/>
+            <a:ext cx="685800" cy="685800"/>
+          </a:xfrm>
+          <a:prstGeom prst="ellipse">
+            <a:avLst/>
+          </a:prstGeom>
+          <a:solidFill>
+            <a:srgbClr val="FFD23F"/>
+          </a:solidFill>
+          <a:ln>
+            <a:noFill/>
+          </a:ln>
+          <a:effectLst/>
+        </p:spPr>
+        <p:style>
+          <a:lnRef idx="1">
+            <a:schemeClr val="accent1"/>
+          </a:lnRef>
+          <a:fillRef idx="3">
+            <a:schemeClr val="accent1"/>
+          </a:fillRef>
+          <a:effectRef idx="2">
+            <a:schemeClr val="accent1"/>
+          </a:effectRef>
+          <a:fontRef idx="minor">
+            <a:schemeClr val="lt1"/>
+          </a:fontRef>
+        </p:style>
+        <p:txBody>
+          <a:bodyPr wrap="square" lIns="54864" rIns="54864" rtlCol="0" anchor="ctr"/>
+          <a:lstStyle/>
+          <a:p>
+            <a:pPr algn="ctr"/>
+            <a:r>
+              <a:rPr sz="2200" b="1">
+                <a:solidFill>
+                  <a:srgbClr val="0C111F"/>
+                </a:solidFill>
+                <a:latin typeface="Helvetica Neue"/>
+              </a:rPr>
+              <a:t>1</a:t>
+            </a:r>
+          </a:p>
+        </p:txBody>
+      </p:sp>
+      <p:sp>
+        <p:nvSpPr>
+          <p:cNvPr id="8" name="TextBox 7"/>
+          <p:cNvSpPr txBox="1"/>
+          <p:nvPr/>
+        </p:nvSpPr>
+        <p:spPr>
+          <a:xfrm>
+            <a:off x="2011680" y="2167128"/>
+            <a:ext cx="8961120" cy="502920"/>
+          </a:xfrm>
+          <a:prstGeom prst="rect">
+            <a:avLst/>
+          </a:prstGeom>
+          <a:noFill/>
+        </p:spPr>
+        <p:txBody>
+          <a:bodyPr wrap="square" lIns="0" tIns="0" rIns="0" bIns="0" anchor="t">
+            <a:spAutoFit/>
+          </a:bodyPr>
+          <a:lstStyle/>
+          <a:p>
+            <a:pPr algn="l">
+              <a:lnSpc>
+                <a:spcPct val="100000"/>
+              </a:lnSpc>
+              <a:spcAft>
+                <a:spcPts val="0"/>
+              </a:spcAft>
+            </a:pPr>
+            <a:r>
+              <a:rPr sz="1650" b="1" i="0">
+                <a:solidFill>
+                  <a:srgbClr val="F3EEE0"/>
+                </a:solidFill>
+                <a:latin typeface="Helvetica Neue"/>
+              </a:rPr>
+              <a:t>Un test vert ne dit pas ce qu'il a vérifié.</a:t>
+            </a:r>
+          </a:p>
+        </p:txBody>
+      </p:sp>
+      <p:sp>
+        <p:nvSpPr>
+          <p:cNvPr id="9" name="TextBox 8"/>
+          <p:cNvSpPr txBox="1"/>
+          <p:nvPr/>
+        </p:nvSpPr>
+        <p:spPr>
+          <a:xfrm>
+            <a:off x="2011680" y="2633472"/>
+            <a:ext cx="8961120" cy="457200"/>
+          </a:xfrm>
+          <a:prstGeom prst="rect">
+            <a:avLst/>
+          </a:prstGeom>
+          <a:noFill/>
+        </p:spPr>
+        <p:txBody>
+          <a:bodyPr wrap="square" lIns="0" tIns="0" rIns="0" bIns="0" anchor="t">
+            <a:spAutoFit/>
+          </a:bodyPr>
+          <a:lstStyle/>
+          <a:p>
+            <a:pPr algn="l">
+              <a:lnSpc>
+                <a:spcPct val="100000"/>
+              </a:lnSpc>
+              <a:spcAft>
+                <a:spcPts val="0"/>
+              </a:spcAft>
+            </a:pPr>
+            <a:r>
+              <a:rPr sz="1250" b="0" i="0">
+                <a:solidFill>
+                  <a:srgbClr val="9AA1B5"/>
+                </a:solidFill>
+                <a:latin typeface="Helvetica Neue"/>
+              </a:rPr>
+              <a:t>La couverture, si.</a:t>
+            </a:r>
+          </a:p>
+        </p:txBody>
+      </p:sp>
+      <p:sp>
+        <p:nvSpPr>
+          <p:cNvPr id="10" name="Oval 9"/>
+          <p:cNvSpPr/>
+          <p:nvPr/>
+        </p:nvSpPr>
+        <p:spPr>
+          <a:xfrm>
+            <a:off x="946404" y="3250692"/>
+            <a:ext cx="685800" cy="685800"/>
+          </a:xfrm>
+          <a:prstGeom prst="ellipse">
+            <a:avLst/>
+          </a:prstGeom>
+          <a:solidFill>
+            <a:srgbClr val="0C111F"/>
+          </a:solidFill>
+          <a:ln>
+            <a:noFill/>
+          </a:ln>
+          <a:effectLst/>
+        </p:spPr>
+        <p:style>
+          <a:lnRef idx="1">
+            <a:schemeClr val="accent1"/>
+          </a:lnRef>
+          <a:fillRef idx="3">
+            <a:schemeClr val="accent1"/>
+          </a:fillRef>
+          <a:effectRef idx="2">
+            <a:schemeClr val="accent1"/>
+          </a:effectRef>
+          <a:fontRef idx="minor">
+            <a:schemeClr val="lt1"/>
+          </a:fontRef>
+        </p:style>
+        <p:txBody>
+          <a:bodyPr rtlCol="0" anchor="ctr"/>
+          <a:lstStyle/>
+          <a:p>
+            <a:pPr algn="ctr"/>
+            <a:endParaRPr/>
+          </a:p>
+        </p:txBody>
+      </p:sp>
+      <p:sp>
+        <p:nvSpPr>
+          <p:cNvPr id="11" name="Oval 10"/>
+          <p:cNvSpPr/>
+          <p:nvPr/>
+        </p:nvSpPr>
+        <p:spPr>
+          <a:xfrm rot="21240000">
+            <a:off x="891540" y="3195828"/>
+            <a:ext cx="685800" cy="685800"/>
+          </a:xfrm>
+          <a:prstGeom prst="ellipse">
+            <a:avLst/>
+          </a:prstGeom>
+          <a:solidFill>
+            <a:srgbClr val="FFD23F"/>
+          </a:solidFill>
+          <a:ln>
+            <a:noFill/>
+          </a:ln>
+          <a:effectLst/>
+        </p:spPr>
+        <p:style>
+          <a:lnRef idx="1">
+            <a:schemeClr val="accent1"/>
+          </a:lnRef>
+          <a:fillRef idx="3">
+            <a:schemeClr val="accent1"/>
+          </a:fillRef>
+          <a:effectRef idx="2">
+            <a:schemeClr val="accent1"/>
+          </a:effectRef>
+          <a:fontRef idx="minor">
+            <a:schemeClr val="lt1"/>
+          </a:fontRef>
+        </p:style>
+        <p:txBody>
+          <a:bodyPr wrap="square" lIns="54864" rIns="54864" rtlCol="0" anchor="ctr"/>
+          <a:lstStyle/>
+          <a:p>
+            <a:pPr algn="ctr"/>
+            <a:r>
+              <a:rPr sz="2200" b="1">
+                <a:solidFill>
+                  <a:srgbClr val="0C111F"/>
+                </a:solidFill>
+                <a:latin typeface="Helvetica Neue"/>
+              </a:rPr>
+              <a:t>2</a:t>
+            </a:r>
+          </a:p>
+        </p:txBody>
+      </p:sp>
+      <p:sp>
+        <p:nvSpPr>
+          <p:cNvPr id="12" name="TextBox 11"/>
+          <p:cNvSpPr txBox="1"/>
+          <p:nvPr/>
+        </p:nvSpPr>
+        <p:spPr>
+          <a:xfrm>
+            <a:off x="2011680" y="3264408"/>
+            <a:ext cx="8961120" cy="502920"/>
+          </a:xfrm>
+          <a:prstGeom prst="rect">
+            <a:avLst/>
+          </a:prstGeom>
+          <a:noFill/>
+        </p:spPr>
+        <p:txBody>
+          <a:bodyPr wrap="square" lIns="0" tIns="0" rIns="0" bIns="0" anchor="t">
+            <a:spAutoFit/>
+          </a:bodyPr>
+          <a:lstStyle/>
+          <a:p>
+            <a:pPr algn="l">
+              <a:lnSpc>
+                <a:spcPct val="100000"/>
+              </a:lnSpc>
+              <a:spcAft>
+                <a:spcPts val="0"/>
+              </a:spcAft>
+            </a:pPr>
+            <a:r>
+              <a:rPr sz="1650" b="1" i="0">
+                <a:solidFill>
+                  <a:srgbClr val="F3EEE0"/>
+                </a:solidFill>
+                <a:latin typeface="Helvetica Neue"/>
+              </a:rPr>
+              <a:t>JUnit et Cucumber répondent à deux questions différentes.</a:t>
+            </a:r>
+          </a:p>
+        </p:txBody>
+      </p:sp>
+      <p:sp>
+        <p:nvSpPr>
+          <p:cNvPr id="13" name="TextBox 12"/>
+          <p:cNvSpPr txBox="1"/>
+          <p:nvPr/>
+        </p:nvSpPr>
+        <p:spPr>
+          <a:xfrm>
+            <a:off x="2011680" y="3730752"/>
+            <a:ext cx="8961120" cy="457200"/>
+          </a:xfrm>
+          <a:prstGeom prst="rect">
+            <a:avLst/>
+          </a:prstGeom>
+          <a:noFill/>
+        </p:spPr>
+        <p:txBody>
+          <a:bodyPr wrap="square" lIns="0" tIns="0" rIns="0" bIns="0" anchor="t">
+            <a:spAutoFit/>
+          </a:bodyPr>
+          <a:lstStyle/>
+          <a:p>
+            <a:pPr algn="l">
+              <a:lnSpc>
+                <a:spcPct val="100000"/>
+              </a:lnSpc>
+              <a:spcAft>
+                <a:spcPts val="0"/>
+              </a:spcAft>
+            </a:pPr>
+            <a:r>
+              <a:rPr sz="1250" b="0" i="0">
+                <a:solidFill>
+                  <a:srgbClr val="9AA1B5"/>
+                </a:solidFill>
+                <a:latin typeface="Helvetica Neue"/>
+              </a:rPr>
+              <a:t>« Ça marche ? » contre « c'est le bon comportement ? »</a:t>
+            </a:r>
+          </a:p>
+        </p:txBody>
+      </p:sp>
+      <p:sp>
+        <p:nvSpPr>
+          <p:cNvPr id="14" name="Oval 13"/>
+          <p:cNvSpPr/>
+          <p:nvPr/>
+        </p:nvSpPr>
+        <p:spPr>
+          <a:xfrm>
+            <a:off x="946404" y="4347972"/>
+            <a:ext cx="685800" cy="685800"/>
+          </a:xfrm>
+          <a:prstGeom prst="ellipse">
+            <a:avLst/>
+          </a:prstGeom>
+          <a:solidFill>
+            <a:srgbClr val="0C111F"/>
+          </a:solidFill>
+          <a:ln>
+            <a:noFill/>
+          </a:ln>
+          <a:effectLst/>
+        </p:spPr>
+        <p:style>
+          <a:lnRef idx="1">
+            <a:schemeClr val="accent1"/>
+          </a:lnRef>
+          <a:fillRef idx="3">
+            <a:schemeClr val="accent1"/>
+          </a:fillRef>
+          <a:effectRef idx="2">
+            <a:schemeClr val="accent1"/>
+          </a:effectRef>
+          <a:fontRef idx="minor">
+            <a:schemeClr val="lt1"/>
+          </a:fontRef>
+        </p:style>
+        <p:txBody>
+          <a:bodyPr rtlCol="0" anchor="ctr"/>
+          <a:lstStyle/>
+          <a:p>
+            <a:pPr algn="ctr"/>
+            <a:endParaRPr/>
+          </a:p>
+        </p:txBody>
+      </p:sp>
+      <p:sp>
+        <p:nvSpPr>
+          <p:cNvPr id="15" name="Oval 14"/>
+          <p:cNvSpPr/>
+          <p:nvPr/>
+        </p:nvSpPr>
+        <p:spPr>
+          <a:xfrm rot="21240000">
+            <a:off x="891540" y="4293108"/>
+            <a:ext cx="685800" cy="685800"/>
+          </a:xfrm>
+          <a:prstGeom prst="ellipse">
+            <a:avLst/>
+          </a:prstGeom>
+          <a:solidFill>
+            <a:srgbClr val="FFD23F"/>
+          </a:solidFill>
+          <a:ln>
+            <a:noFill/>
+          </a:ln>
+          <a:effectLst/>
+        </p:spPr>
+        <p:style>
+          <a:lnRef idx="1">
+            <a:schemeClr val="accent1"/>
+          </a:lnRef>
+          <a:fillRef idx="3">
+            <a:schemeClr val="accent1"/>
+          </a:fillRef>
+          <a:effectRef idx="2">
+            <a:schemeClr val="accent1"/>
+          </a:effectRef>
+          <a:fontRef idx="minor">
+            <a:schemeClr val="lt1"/>
+          </a:fontRef>
+        </p:style>
+        <p:txBody>
+          <a:bodyPr wrap="square" lIns="54864" rIns="54864" rtlCol="0" anchor="ctr"/>
+          <a:lstStyle/>
+          <a:p>
+            <a:pPr algn="ctr"/>
+            <a:r>
+              <a:rPr sz="2200" b="1">
+                <a:solidFill>
+                  <a:srgbClr val="0C111F"/>
+                </a:solidFill>
+                <a:latin typeface="Helvetica Neue"/>
+              </a:rPr>
+              <a:t>3</a:t>
+            </a:r>
+          </a:p>
+        </p:txBody>
+      </p:sp>
+      <p:sp>
+        <p:nvSpPr>
+          <p:cNvPr id="16" name="TextBox 15"/>
+          <p:cNvSpPr txBox="1"/>
+          <p:nvPr/>
+        </p:nvSpPr>
+        <p:spPr>
+          <a:xfrm>
+            <a:off x="2011680" y="4361688"/>
+            <a:ext cx="8961120" cy="502920"/>
+          </a:xfrm>
+          <a:prstGeom prst="rect">
+            <a:avLst/>
+          </a:prstGeom>
+          <a:noFill/>
+        </p:spPr>
+        <p:txBody>
+          <a:bodyPr wrap="square" lIns="0" tIns="0" rIns="0" bIns="0" anchor="t">
+            <a:spAutoFit/>
+          </a:bodyPr>
+          <a:lstStyle/>
+          <a:p>
+            <a:pPr algn="l">
+              <a:lnSpc>
+                <a:spcPct val="100000"/>
+              </a:lnSpc>
+              <a:spcAft>
+                <a:spcPts val="0"/>
+              </a:spcAft>
+            </a:pPr>
+            <a:r>
+              <a:rPr sz="1650" b="1" i="0">
+                <a:solidFill>
+                  <a:srgbClr val="F3EEE0"/>
+                </a:solidFill>
+                <a:latin typeface="Helvetica Neue"/>
+              </a:rPr>
+              <a:t>Le rapport de couverture n'est pas un objectif.</a:t>
+            </a:r>
+          </a:p>
+        </p:txBody>
+      </p:sp>
+      <p:sp>
+        <p:nvSpPr>
+          <p:cNvPr id="17" name="TextBox 16"/>
+          <p:cNvSpPr txBox="1"/>
+          <p:nvPr/>
+        </p:nvSpPr>
+        <p:spPr>
+          <a:xfrm>
+            <a:off x="2011680" y="4828032"/>
+            <a:ext cx="8961120" cy="457200"/>
+          </a:xfrm>
+          <a:prstGeom prst="rect">
+            <a:avLst/>
+          </a:prstGeom>
+          <a:noFill/>
+        </p:spPr>
+        <p:txBody>
+          <a:bodyPr wrap="square" lIns="0" tIns="0" rIns="0" bIns="0" anchor="t">
+            <a:spAutoFit/>
+          </a:bodyPr>
+          <a:lstStyle/>
+          <a:p>
+            <a:pPr algn="l">
+              <a:lnSpc>
+                <a:spcPct val="100000"/>
+              </a:lnSpc>
+              <a:spcAft>
+                <a:spcPts val="0"/>
+              </a:spcAft>
+            </a:pPr>
+            <a:r>
+              <a:rPr sz="1250" b="0" i="0">
+                <a:solidFill>
+                  <a:srgbClr val="9AA1B5"/>
+                </a:solidFill>
+                <a:latin typeface="Helvetica Neue"/>
+              </a:rPr>
+              <a:t>C'est un radar : il montre où regarder en premier.</a:t>
+            </a:r>
+          </a:p>
+        </p:txBody>
+      </p:sp>
+      <p:sp>
+        <p:nvSpPr>
+          <p:cNvPr id="22" name="Rounded Rectangle 21"/>
+          <p:cNvSpPr/>
+          <p:nvPr/>
+        </p:nvSpPr>
+        <p:spPr>
+          <a:xfrm>
+            <a:off x="11201400" y="6419088"/>
+            <a:ext cx="713232" cy="329184"/>
+          </a:xfrm>
+          <a:prstGeom prst="roundRect">
+            <a:avLst/>
+          </a:prstGeom>
+          <a:solidFill>
+            <a:srgbClr val="171F33"/>
+          </a:solidFill>
+          <a:ln>
+            <a:noFill/>
+          </a:ln>
+          <a:effectLst/>
+        </p:spPr>
+        <p:style>
+          <a:lnRef idx="1">
+            <a:schemeClr val="accent1"/>
+          </a:lnRef>
+          <a:fillRef idx="3">
+            <a:schemeClr val="accent1"/>
+          </a:fillRef>
+          <a:effectRef idx="2">
+            <a:schemeClr val="accent1"/>
+          </a:effectRef>
+          <a:fontRef idx="minor">
+            <a:schemeClr val="lt1"/>
+          </a:fontRef>
+        </p:style>
+        <p:txBody>
+          <a:bodyPr rtlCol="0" anchor="ctr"/>
+          <a:lstStyle/>
+          <a:p>
+            <a:pPr algn="ctr"/>
+            <a:r>
+              <a:rPr sz="1000" b="1">
+                <a:solidFill>
+                  <a:srgbClr val="9AA1B5"/>
+                </a:solidFill>
+                <a:latin typeface="Helvetica Neue"/>
+              </a:rPr>
+              <a:t>27/29</a:t>
+            </a:r>
+          </a:p>
+        </p:txBody>
+      </p:sp>
+      <p:sp>
+        <p:nvSpPr>
+          <p:cNvPr id="23" name="TextBox 22"/>
+          <p:cNvSpPr txBox="1"/>
+          <p:nvPr/>
+        </p:nvSpPr>
+        <p:spPr>
+          <a:xfrm>
+            <a:off x="502920" y="6492240"/>
+            <a:ext cx="5943600" cy="274320"/>
+          </a:xfrm>
+          <a:prstGeom prst="rect">
+            <a:avLst/>
+          </a:prstGeom>
+          <a:noFill/>
+        </p:spPr>
+        <p:txBody>
+          <a:bodyPr wrap="square" lIns="0" tIns="0" rIns="0" bIns="0" anchor="t">
+            <a:spAutoFit/>
+          </a:bodyPr>
+          <a:lstStyle/>
+          <a:p>
+            <a:pPr algn="l">
+              <a:lnSpc>
+                <a:spcPct val="100000"/>
+              </a:lnSpc>
+              <a:spcAft>
+                <a:spcPts val="0"/>
+              </a:spcAft>
+            </a:pPr>
+            <a:r>
+              <a:rPr sz="800" b="0" i="0">
+                <a:solidFill>
+                  <a:srgbClr val="9AA1B5"/>
+                </a:solidFill>
+                <a:latin typeface="Helvetica Neue"/>
+              </a:rPr>
+              <a:t>COUVERTURE DYNAMITE — QUARKUS · JUNIT · CUCUMBER · JACOCO</a:t>
+            </a:r>
+          </a:p>
+        </p:txBody>
+      </p:sp>
+    </p:spTree>
+  </p:cSld>
+  <p:clrMapOvr>
+    <a:masterClrMapping/>
+  </p:clrMapOvr>
+  <p:transition>
+    <p:fade/>
+  </p:transition>
+</p:sld>
+</file>
+
+<file path=ppt/slides/slide27.xml><?xml version="1.0" encoding="utf-8"?>
 <p:sld xmlns:a="http://schemas.openxmlformats.org/drawingml/2006/main" xmlns:r="http://schemas.openxmlformats.org/officeDocument/2006/relationships" xmlns:p="http://schemas.openxmlformats.org/presentationml/2006/main">
   <p:cSld>
     <p:bg>
@@ -22098,7 +23517,7 @@
             <a:avLst/>
           </a:prstGeom>
           <a:solidFill>
-            <a:srgbClr val="F05A46"/>
+            <a:srgbClr val="9CC24C"/>
           </a:solidFill>
           <a:ln>
             <a:noFill/>
@@ -22143,7 +23562,7 @@
             <a:avLst/>
           </a:prstGeom>
           <a:solidFill>
-            <a:srgbClr val="F05A46"/>
+            <a:srgbClr val="9CC24C"/>
           </a:solidFill>
           <a:ln>
             <a:noFill/>
@@ -22176,7 +23595,7 @@
                 </a:solidFill>
                 <a:latin typeface="Helvetica Neue"/>
               </a:rPr>
-              <a:t>CONFESSIONS COLLECTIVES</a:t>
+              <a:t>POUR LA SUITE</a:t>
             </a:r>
           </a:p>
         </p:txBody>
@@ -22190,7 +23609,7 @@
         <p:spPr>
           <a:xfrm>
             <a:off x="822960" y="1051560"/>
-            <a:ext cx="10058400" cy="1005840"/>
+            <a:ext cx="10058400" cy="594360"/>
           </a:xfrm>
           <a:prstGeom prst="rect">
             <a:avLst/>
@@ -22212,80 +23631,27 @@
               </a:spcAft>
             </a:pPr>
             <a:r>
-              <a:rPr sz="2600" b="1" i="0">
+              <a:rPr sz="2800" b="1" i="0">
                 <a:solidFill>
                   <a:srgbClr val="181D2B"/>
                 </a:solidFill>
                 <a:latin typeface="Helvetica Neue"/>
               </a:rPr>
-              <a:t>Le best-of des excuses pour ne pas tester</a:t>
-            </a:r>
-          </a:p>
-        </p:txBody>
-      </p:sp>
-      <p:sp>
-        <p:nvSpPr>
-          <p:cNvPr id="5" name="Rounded Rectangle 4"/>
-          <p:cNvSpPr/>
-          <p:nvPr/>
-        </p:nvSpPr>
-        <p:spPr>
-          <a:xfrm>
-            <a:off x="822960" y="2167128"/>
-            <a:ext cx="564184" cy="310896"/>
-          </a:xfrm>
-          <a:prstGeom prst="roundRect">
-            <a:avLst/>
-          </a:prstGeom>
-          <a:solidFill>
-            <a:srgbClr val="F05A46"/>
-          </a:solidFill>
-          <a:ln>
-            <a:noFill/>
-          </a:ln>
-          <a:effectLst/>
-        </p:spPr>
-        <p:style>
-          <a:lnRef idx="1">
-            <a:schemeClr val="accent1"/>
-          </a:lnRef>
-          <a:fillRef idx="3">
-            <a:schemeClr val="accent1"/>
-          </a:fillRef>
-          <a:effectRef idx="2">
-            <a:schemeClr val="accent1"/>
-          </a:effectRef>
-          <a:fontRef idx="minor">
-            <a:schemeClr val="lt1"/>
-          </a:fontRef>
-        </p:style>
-        <p:txBody>
-          <a:bodyPr wrap="none" lIns="45720" rIns="45720" rtlCol="0" anchor="ctr"/>
-          <a:lstStyle/>
-          <a:p>
-            <a:pPr algn="ctr"/>
-            <a:r>
-              <a:rPr sz="1100" b="1">
-                <a:solidFill>
-                  <a:srgbClr val="0C111F"/>
-                </a:solidFill>
-                <a:latin typeface="Helvetica Neue"/>
-              </a:rPr>
-              <a:t>01</a:t>
-            </a:r>
-          </a:p>
-        </p:txBody>
-      </p:sp>
-      <p:sp>
-        <p:nvSpPr>
-          <p:cNvPr id="6" name="TextBox 5"/>
+              <a:t>Si vous voulez creuser</a:t>
+            </a:r>
+          </a:p>
+        </p:txBody>
+      </p:sp>
+      <p:sp>
+        <p:nvSpPr>
+          <p:cNvPr id="5" name="TextBox 4"/>
           <p:cNvSpPr txBox="1"/>
           <p:nvPr/>
         </p:nvSpPr>
         <p:spPr>
           <a:xfrm>
-            <a:off x="1691640" y="2148840"/>
-            <a:ext cx="9601200" cy="365760"/>
+            <a:off x="822960" y="1664208"/>
+            <a:ext cx="10058400" cy="365760"/>
           </a:xfrm>
           <a:prstGeom prst="rect">
             <a:avLst/>
@@ -22307,14 +23673,59 @@
               </a:spcAft>
             </a:pPr>
             <a:r>
-              <a:rPr sz="1450" b="1" i="0">
-                <a:solidFill>
-                  <a:srgbClr val="181D2B"/>
-                </a:solidFill>
-                <a:latin typeface="Helvetica Neue"/>
-              </a:rPr>
-              <a:t>« Ça marche sur ma machine. »</a:t>
-            </a:r>
+              <a:rPr sz="1200" b="0" i="1">
+                <a:solidFill>
+                  <a:srgbClr val="5C6272"/>
+                </a:solidFill>
+                <a:latin typeface="Helvetica Neue"/>
+              </a:rPr>
+              <a:t>Code et scripts, en clair. Le reste (mes doutes existentiels sur plusMonths()) reste entre moi et mon terminal.</a:t>
+            </a:r>
+          </a:p>
+        </p:txBody>
+      </p:sp>
+      <p:sp>
+        <p:nvSpPr>
+          <p:cNvPr id="6" name="Oval 5"/>
+          <p:cNvSpPr/>
+          <p:nvPr/>
+        </p:nvSpPr>
+        <p:spPr>
+          <a:xfrm>
+            <a:off x="822960" y="2432304"/>
+            <a:ext cx="146304" cy="146304"/>
+          </a:xfrm>
+          <a:prstGeom prst="ellipse">
+            <a:avLst/>
+          </a:prstGeom>
+          <a:solidFill>
+            <a:srgbClr val="F0A72E"/>
+          </a:solidFill>
+          <a:ln>
+            <a:noFill/>
+          </a:ln>
+          <a:effectLst/>
+        </p:spPr>
+        <p:style>
+          <a:lnRef idx="1">
+            <a:schemeClr val="accent1"/>
+          </a:lnRef>
+          <a:fillRef idx="3">
+            <a:schemeClr val="accent1"/>
+          </a:fillRef>
+          <a:effectRef idx="2">
+            <a:schemeClr val="accent1"/>
+          </a:effectRef>
+          <a:fontRef idx="minor">
+            <a:schemeClr val="lt1"/>
+          </a:fontRef>
+        </p:style>
+        <p:txBody>
+          <a:bodyPr rtlCol="0" anchor="ctr"/>
+          <a:lstStyle/>
+          <a:p>
+            <a:pPr algn="ctr"/>
+            <a:endParaRPr/>
           </a:p>
         </p:txBody>
       </p:sp>
@@ -22326,8 +23737,8 @@
         </p:nvSpPr>
         <p:spPr>
           <a:xfrm>
-            <a:off x="1691640" y="2468880"/>
-            <a:ext cx="9601200" cy="365760"/>
+            <a:off x="1188720" y="2377440"/>
+            <a:ext cx="9692640" cy="365760"/>
           </a:xfrm>
           <a:prstGeom prst="rect">
             <a:avLst/>
@@ -22349,80 +23760,27 @@
               </a:spcAft>
             </a:pPr>
             <a:r>
-              <a:rPr sz="1100" b="0" i="1">
-                <a:solidFill>
-                  <a:srgbClr val="5C6272"/>
-                </a:solidFill>
-                <a:latin typeface="Helvetica Neue"/>
-              </a:rPr>
-              <a:t>Votre machine n'ira pas en prod avec vous. Elle ne peut pas témoigner.</a:t>
-            </a:r>
-          </a:p>
-        </p:txBody>
-      </p:sp>
-      <p:sp>
-        <p:nvSpPr>
-          <p:cNvPr id="8" name="Rounded Rectangle 7"/>
-          <p:cNvSpPr/>
-          <p:nvPr/>
-        </p:nvSpPr>
-        <p:spPr>
-          <a:xfrm>
-            <a:off x="822960" y="2825496"/>
-            <a:ext cx="564184" cy="310896"/>
-          </a:xfrm>
-          <a:prstGeom prst="roundRect">
-            <a:avLst/>
-          </a:prstGeom>
-          <a:solidFill>
-            <a:srgbClr val="F05A46"/>
-          </a:solidFill>
-          <a:ln>
-            <a:noFill/>
-          </a:ln>
-          <a:effectLst/>
-        </p:spPr>
-        <p:style>
-          <a:lnRef idx="1">
-            <a:schemeClr val="accent1"/>
-          </a:lnRef>
-          <a:fillRef idx="3">
-            <a:schemeClr val="accent1"/>
-          </a:fillRef>
-          <a:effectRef idx="2">
-            <a:schemeClr val="accent1"/>
-          </a:effectRef>
-          <a:fontRef idx="minor">
-            <a:schemeClr val="lt1"/>
-          </a:fontRef>
-        </p:style>
-        <p:txBody>
-          <a:bodyPr wrap="none" lIns="45720" rIns="45720" rtlCol="0" anchor="ctr"/>
-          <a:lstStyle/>
-          <a:p>
-            <a:pPr algn="ctr"/>
-            <a:r>
-              <a:rPr sz="1100" b="1">
-                <a:solidFill>
-                  <a:srgbClr val="0C111F"/>
-                </a:solidFill>
-                <a:latin typeface="Helvetica Neue"/>
-              </a:rPr>
-              <a:t>02</a:t>
-            </a:r>
-          </a:p>
-        </p:txBody>
-      </p:sp>
-      <p:sp>
-        <p:nvSpPr>
-          <p:cNvPr id="9" name="TextBox 8"/>
+              <a:rPr sz="1600" b="1" i="0">
+                <a:solidFill>
+                  <a:srgbClr val="181D2B"/>
+                </a:solidFill>
+                <a:latin typeface="Helvetica Neue"/>
+              </a:rPr>
+              <a:t>Le dépôt de ce projet</a:t>
+            </a:r>
+          </a:p>
+        </p:txBody>
+      </p:sp>
+      <p:sp>
+        <p:nvSpPr>
+          <p:cNvPr id="8" name="TextBox 7"/>
           <p:cNvSpPr txBox="1"/>
           <p:nvPr/>
         </p:nvSpPr>
         <p:spPr>
           <a:xfrm>
-            <a:off x="1691640" y="2807208"/>
-            <a:ext cx="9601200" cy="365760"/>
+            <a:off x="1188720" y="2724912"/>
+            <a:ext cx="9692640" cy="365760"/>
           </a:xfrm>
           <a:prstGeom prst="rect">
             <a:avLst/>
@@ -22444,14 +23802,59 @@
               </a:spcAft>
             </a:pPr>
             <a:r>
-              <a:rPr sz="1450" b="1" i="0">
+              <a:rPr sz="1250" b="0" i="0">
                 <a:solidFill>
                   <a:srgbClr val="181D2B"/>
                 </a:solidFill>
-                <a:latin typeface="Helvetica Neue"/>
-              </a:rPr>
-              <a:t>« On testera après le sprint. »</a:t>
-            </a:r>
+                <a:latin typeface="Menlo"/>
+              </a:rPr>
+              <a:t>github.com/sidevconcept/couverture-junit-cucumber-jacoco</a:t>
+            </a:r>
+          </a:p>
+        </p:txBody>
+      </p:sp>
+      <p:sp>
+        <p:nvSpPr>
+          <p:cNvPr id="9" name="Oval 8"/>
+          <p:cNvSpPr/>
+          <p:nvPr/>
+        </p:nvSpPr>
+        <p:spPr>
+          <a:xfrm>
+            <a:off x="822960" y="3328416"/>
+            <a:ext cx="146304" cy="146304"/>
+          </a:xfrm>
+          <a:prstGeom prst="ellipse">
+            <a:avLst/>
+          </a:prstGeom>
+          <a:solidFill>
+            <a:srgbClr val="2EB0A0"/>
+          </a:solidFill>
+          <a:ln>
+            <a:noFill/>
+          </a:ln>
+          <a:effectLst/>
+        </p:spPr>
+        <p:style>
+          <a:lnRef idx="1">
+            <a:schemeClr val="accent1"/>
+          </a:lnRef>
+          <a:fillRef idx="3">
+            <a:schemeClr val="accent1"/>
+          </a:fillRef>
+          <a:effectRef idx="2">
+            <a:schemeClr val="accent1"/>
+          </a:effectRef>
+          <a:fontRef idx="minor">
+            <a:schemeClr val="lt1"/>
+          </a:fontRef>
+        </p:style>
+        <p:txBody>
+          <a:bodyPr rtlCol="0" anchor="ctr"/>
+          <a:lstStyle/>
+          <a:p>
+            <a:pPr algn="ctr"/>
+            <a:endParaRPr/>
           </a:p>
         </p:txBody>
       </p:sp>
@@ -22463,8 +23866,8 @@
         </p:nvSpPr>
         <p:spPr>
           <a:xfrm>
-            <a:off x="1691640" y="3127248"/>
-            <a:ext cx="9601200" cy="365760"/>
+            <a:off x="1188720" y="3273552"/>
+            <a:ext cx="9692640" cy="365760"/>
           </a:xfrm>
           <a:prstGeom prst="rect">
             <a:avLst/>
@@ -22486,80 +23889,27 @@
               </a:spcAft>
             </a:pPr>
             <a:r>
-              <a:rPr sz="1100" b="0" i="1">
-                <a:solidFill>
-                  <a:srgbClr val="5C6272"/>
-                </a:solidFill>
-                <a:latin typeface="Helvetica Neue"/>
-              </a:rPr>
-              <a:t>Le sprint suivant aussi. Et celui d'après. À ce rythme, on teste au démantèlement.</a:t>
-            </a:r>
-          </a:p>
-        </p:txBody>
-      </p:sp>
-      <p:sp>
-        <p:nvSpPr>
-          <p:cNvPr id="11" name="Rounded Rectangle 10"/>
-          <p:cNvSpPr/>
-          <p:nvPr/>
-        </p:nvSpPr>
-        <p:spPr>
-          <a:xfrm>
-            <a:off x="822960" y="3483864"/>
-            <a:ext cx="564184" cy="310896"/>
-          </a:xfrm>
-          <a:prstGeom prst="roundRect">
-            <a:avLst/>
-          </a:prstGeom>
-          <a:solidFill>
-            <a:srgbClr val="F05A46"/>
-          </a:solidFill>
-          <a:ln>
-            <a:noFill/>
-          </a:ln>
-          <a:effectLst/>
-        </p:spPr>
-        <p:style>
-          <a:lnRef idx="1">
-            <a:schemeClr val="accent1"/>
-          </a:lnRef>
-          <a:fillRef idx="3">
-            <a:schemeClr val="accent1"/>
-          </a:fillRef>
-          <a:effectRef idx="2">
-            <a:schemeClr val="accent1"/>
-          </a:effectRef>
-          <a:fontRef idx="minor">
-            <a:schemeClr val="lt1"/>
-          </a:fontRef>
-        </p:style>
-        <p:txBody>
-          <a:bodyPr wrap="none" lIns="45720" rIns="45720" rtlCol="0" anchor="ctr"/>
-          <a:lstStyle/>
-          <a:p>
-            <a:pPr algn="ctr"/>
-            <a:r>
-              <a:rPr sz="1100" b="1">
-                <a:solidFill>
-                  <a:srgbClr val="0C111F"/>
-                </a:solidFill>
-                <a:latin typeface="Helvetica Neue"/>
-              </a:rPr>
-              <a:t>03</a:t>
-            </a:r>
-          </a:p>
-        </p:txBody>
-      </p:sp>
-      <p:sp>
-        <p:nvSpPr>
-          <p:cNvPr id="12" name="TextBox 11"/>
+              <a:rPr sz="1600" b="1" i="0">
+                <a:solidFill>
+                  <a:srgbClr val="181D2B"/>
+                </a:solidFill>
+                <a:latin typeface="Helvetica Neue"/>
+              </a:rPr>
+              <a:t>Guide Quarkus + Jacoco</a:t>
+            </a:r>
+          </a:p>
+        </p:txBody>
+      </p:sp>
+      <p:sp>
+        <p:nvSpPr>
+          <p:cNvPr id="11" name="TextBox 10"/>
           <p:cNvSpPr txBox="1"/>
           <p:nvPr/>
         </p:nvSpPr>
         <p:spPr>
           <a:xfrm>
-            <a:off x="1691640" y="3465576"/>
-            <a:ext cx="9601200" cy="365760"/>
+            <a:off x="1188720" y="3621024"/>
+            <a:ext cx="9692640" cy="365760"/>
           </a:xfrm>
           <a:prstGeom prst="rect">
             <a:avLst/>
@@ -22581,14 +23931,59 @@
               </a:spcAft>
             </a:pPr>
             <a:r>
-              <a:rPr sz="1450" b="1" i="0">
+              <a:rPr sz="1250" b="0" i="0">
                 <a:solidFill>
                   <a:srgbClr val="181D2B"/>
                 </a:solidFill>
-                <a:latin typeface="Helvetica Neue"/>
-              </a:rPr>
-              <a:t>« C'est trop simple pour bugger. »</a:t>
-            </a:r>
+                <a:latin typeface="Menlo"/>
+              </a:rPr>
+              <a:t>quarkus.io/guides/tests-with-coverage</a:t>
+            </a:r>
+          </a:p>
+        </p:txBody>
+      </p:sp>
+      <p:sp>
+        <p:nvSpPr>
+          <p:cNvPr id="12" name="Oval 11"/>
+          <p:cNvSpPr/>
+          <p:nvPr/>
+        </p:nvSpPr>
+        <p:spPr>
+          <a:xfrm>
+            <a:off x="822960" y="4224528"/>
+            <a:ext cx="146304" cy="146304"/>
+          </a:xfrm>
+          <a:prstGeom prst="ellipse">
+            <a:avLst/>
+          </a:prstGeom>
+          <a:solidFill>
+            <a:srgbClr val="9CC24C"/>
+          </a:solidFill>
+          <a:ln>
+            <a:noFill/>
+          </a:ln>
+          <a:effectLst/>
+        </p:spPr>
+        <p:style>
+          <a:lnRef idx="1">
+            <a:schemeClr val="accent1"/>
+          </a:lnRef>
+          <a:fillRef idx="3">
+            <a:schemeClr val="accent1"/>
+          </a:fillRef>
+          <a:effectRef idx="2">
+            <a:schemeClr val="accent1"/>
+          </a:effectRef>
+          <a:fontRef idx="minor">
+            <a:schemeClr val="lt1"/>
+          </a:fontRef>
+        </p:style>
+        <p:txBody>
+          <a:bodyPr rtlCol="0" anchor="ctr"/>
+          <a:lstStyle/>
+          <a:p>
+            <a:pPr algn="ctr"/>
+            <a:endParaRPr/>
           </a:p>
         </p:txBody>
       </p:sp>
@@ -22600,8 +23995,8 @@
         </p:nvSpPr>
         <p:spPr>
           <a:xfrm>
-            <a:off x="1691640" y="3785616"/>
-            <a:ext cx="9601200" cy="365760"/>
+            <a:off x="1188720" y="4169664"/>
+            <a:ext cx="9692640" cy="365760"/>
           </a:xfrm>
           <a:prstGeom prst="rect">
             <a:avLst/>
@@ -22623,80 +24018,27 @@
               </a:spcAft>
             </a:pPr>
             <a:r>
-              <a:rPr sz="1100" b="0" i="1">
-                <a:solidFill>
-                  <a:srgbClr val="5C6272"/>
-                </a:solidFill>
-                <a:latin typeface="Helvetica Neue"/>
-              </a:rPr>
-              <a:t>Neuf incidents de prod sur dix commencent exactement comme ça.</a:t>
-            </a:r>
-          </a:p>
-        </p:txBody>
-      </p:sp>
-      <p:sp>
-        <p:nvSpPr>
-          <p:cNvPr id="14" name="Rounded Rectangle 13"/>
-          <p:cNvSpPr/>
-          <p:nvPr/>
-        </p:nvSpPr>
-        <p:spPr>
-          <a:xfrm>
-            <a:off x="822960" y="4142232"/>
-            <a:ext cx="564184" cy="310896"/>
-          </a:xfrm>
-          <a:prstGeom prst="roundRect">
-            <a:avLst/>
-          </a:prstGeom>
-          <a:solidFill>
-            <a:srgbClr val="F05A46"/>
-          </a:solidFill>
-          <a:ln>
-            <a:noFill/>
-          </a:ln>
-          <a:effectLst/>
-        </p:spPr>
-        <p:style>
-          <a:lnRef idx="1">
-            <a:schemeClr val="accent1"/>
-          </a:lnRef>
-          <a:fillRef idx="3">
-            <a:schemeClr val="accent1"/>
-          </a:fillRef>
-          <a:effectRef idx="2">
-            <a:schemeClr val="accent1"/>
-          </a:effectRef>
-          <a:fontRef idx="minor">
-            <a:schemeClr val="lt1"/>
-          </a:fontRef>
-        </p:style>
-        <p:txBody>
-          <a:bodyPr wrap="none" lIns="45720" rIns="45720" rtlCol="0" anchor="ctr"/>
-          <a:lstStyle/>
-          <a:p>
-            <a:pPr algn="ctr"/>
-            <a:r>
-              <a:rPr sz="1100" b="1">
-                <a:solidFill>
-                  <a:srgbClr val="0C111F"/>
-                </a:solidFill>
-                <a:latin typeface="Helvetica Neue"/>
-              </a:rPr>
-              <a:t>04</a:t>
-            </a:r>
-          </a:p>
-        </p:txBody>
-      </p:sp>
-      <p:sp>
-        <p:nvSpPr>
-          <p:cNvPr id="15" name="TextBox 14"/>
+              <a:rPr sz="1600" b="1" i="0">
+                <a:solidFill>
+                  <a:srgbClr val="181D2B"/>
+                </a:solidFill>
+                <a:latin typeface="Helvetica Neue"/>
+              </a:rPr>
+              <a:t>Extension Cucumber pour Quarkus</a:t>
+            </a:r>
+          </a:p>
+        </p:txBody>
+      </p:sp>
+      <p:sp>
+        <p:nvSpPr>
+          <p:cNvPr id="14" name="TextBox 13"/>
           <p:cNvSpPr txBox="1"/>
           <p:nvPr/>
         </p:nvSpPr>
         <p:spPr>
           <a:xfrm>
-            <a:off x="1691640" y="4123944"/>
-            <a:ext cx="9601200" cy="223138"/>
+            <a:off x="1188720" y="4517136"/>
+            <a:ext cx="9692640" cy="365760"/>
           </a:xfrm>
           <a:prstGeom prst="rect">
             <a:avLst/>
@@ -22718,104 +24060,59 @@
               </a:spcAft>
             </a:pPr>
             <a:r>
-              <a:rPr sz="1450" b="1" i="0" dirty="0">
+              <a:rPr sz="1250" b="0" i="0">
                 <a:solidFill>
                   <a:srgbClr val="181D2B"/>
                 </a:solidFill>
-                <a:latin typeface="Helvetica Neue"/>
-              </a:rPr>
-              <a:t>« </a:t>
-            </a:r>
-            <a:r>
-              <a:rPr lang="fr-FR" sz="1450" b="1" i="0" dirty="0">
-                <a:solidFill>
-                  <a:srgbClr val="181D2B"/>
-                </a:solidFill>
-                <a:latin typeface="Helvetica Neue"/>
-              </a:rPr>
-              <a:t>François</a:t>
-            </a:r>
-            <a:r>
-              <a:rPr sz="1450" b="1" i="0" dirty="0">
-                <a:solidFill>
-                  <a:srgbClr val="181D2B"/>
-                </a:solidFill>
-                <a:latin typeface="Helvetica Neue"/>
-              </a:rPr>
-              <a:t> a </a:t>
-            </a:r>
-            <a:r>
-              <a:rPr sz="1450" b="1" i="0" dirty="0" err="1">
-                <a:solidFill>
-                  <a:srgbClr val="181D2B"/>
-                </a:solidFill>
-                <a:latin typeface="Helvetica Neue"/>
-              </a:rPr>
-              <a:t>dit</a:t>
-            </a:r>
-            <a:r>
-              <a:rPr sz="1450" b="1" i="0" dirty="0">
-                <a:solidFill>
-                  <a:srgbClr val="181D2B"/>
-                </a:solidFill>
-                <a:latin typeface="Helvetica Neue"/>
-              </a:rPr>
-              <a:t> </a:t>
-            </a:r>
-            <a:r>
-              <a:rPr sz="1450" b="1" i="0" dirty="0" err="1">
-                <a:solidFill>
-                  <a:srgbClr val="181D2B"/>
-                </a:solidFill>
-                <a:latin typeface="Helvetica Neue"/>
-              </a:rPr>
-              <a:t>que</a:t>
-            </a:r>
-            <a:r>
-              <a:rPr sz="1450" b="1" i="0" dirty="0">
-                <a:solidFill>
-                  <a:srgbClr val="181D2B"/>
-                </a:solidFill>
-                <a:latin typeface="Helvetica Neue"/>
-              </a:rPr>
-              <a:t> </a:t>
-            </a:r>
-            <a:r>
-              <a:rPr sz="1450" b="1" i="0" dirty="0" err="1">
-                <a:solidFill>
-                  <a:srgbClr val="181D2B"/>
-                </a:solidFill>
-                <a:latin typeface="Helvetica Neue"/>
-              </a:rPr>
-              <a:t>ça</a:t>
-            </a:r>
-            <a:r>
-              <a:rPr sz="1450" b="1" i="0" dirty="0">
-                <a:solidFill>
-                  <a:srgbClr val="181D2B"/>
-                </a:solidFill>
-                <a:latin typeface="Helvetica Neue"/>
-              </a:rPr>
-              <a:t> </a:t>
-            </a:r>
-            <a:r>
-              <a:rPr sz="1450" b="1" i="0" dirty="0" err="1">
-                <a:solidFill>
-                  <a:srgbClr val="181D2B"/>
-                </a:solidFill>
-                <a:latin typeface="Helvetica Neue"/>
-              </a:rPr>
-              <a:t>passait</a:t>
-            </a:r>
-            <a:r>
-              <a:rPr sz="1450" b="1" i="0" dirty="0">
-                <a:solidFill>
-                  <a:srgbClr val="181D2B"/>
-                </a:solidFill>
-                <a:latin typeface="Helvetica Neue"/>
-              </a:rPr>
-              <a:t>. »</a:t>
-            </a:r>
+                <a:latin typeface="Menlo"/>
+              </a:rPr>
+              <a:t>docs.quarkiverse.io/quarkus-cucumber</a:t>
+            </a:r>
+          </a:p>
+        </p:txBody>
+      </p:sp>
+      <p:sp>
+        <p:nvSpPr>
+          <p:cNvPr id="15" name="Oval 14"/>
+          <p:cNvSpPr/>
+          <p:nvPr/>
+        </p:nvSpPr>
+        <p:spPr>
+          <a:xfrm>
+            <a:off x="822960" y="5120640"/>
+            <a:ext cx="146304" cy="146304"/>
+          </a:xfrm>
+          <a:prstGeom prst="ellipse">
+            <a:avLst/>
+          </a:prstGeom>
+          <a:solidFill>
+            <a:srgbClr val="F05A46"/>
+          </a:solidFill>
+          <a:ln>
+            <a:noFill/>
+          </a:ln>
+          <a:effectLst/>
+        </p:spPr>
+        <p:style>
+          <a:lnRef idx="1">
+            <a:schemeClr val="accent1"/>
+          </a:lnRef>
+          <a:fillRef idx="3">
+            <a:schemeClr val="accent1"/>
+          </a:fillRef>
+          <a:effectRef idx="2">
+            <a:schemeClr val="accent1"/>
+          </a:effectRef>
+          <a:fontRef idx="minor">
+            <a:schemeClr val="lt1"/>
+          </a:fontRef>
+        </p:style>
+        <p:txBody>
+          <a:bodyPr rtlCol="0" anchor="ctr"/>
+          <a:lstStyle/>
+          <a:p>
+            <a:pPr algn="ctr"/>
+            <a:endParaRPr/>
           </a:p>
         </p:txBody>
       </p:sp>
@@ -22827,8 +24124,8 @@
         </p:nvSpPr>
         <p:spPr>
           <a:xfrm>
-            <a:off x="1691640" y="4443984"/>
-            <a:ext cx="9601200" cy="365760"/>
+            <a:off x="1188720" y="5065776"/>
+            <a:ext cx="9692640" cy="365760"/>
           </a:xfrm>
           <a:prstGeom prst="rect">
             <a:avLst/>
@@ -22850,80 +24147,27 @@
               </a:spcAft>
             </a:pPr>
             <a:r>
-              <a:rPr sz="1100" b="0" i="1">
-                <a:solidFill>
-                  <a:srgbClr val="5C6272"/>
-                </a:solidFill>
-                <a:latin typeface="Helvetica Neue"/>
-              </a:rPr>
-              <a:t>Un mardi après-midi ensoleillé, à la main, une seule fois.</a:t>
-            </a:r>
-          </a:p>
-        </p:txBody>
-      </p:sp>
-      <p:sp>
-        <p:nvSpPr>
-          <p:cNvPr id="17" name="Rounded Rectangle 16"/>
-          <p:cNvSpPr/>
-          <p:nvPr/>
-        </p:nvSpPr>
-        <p:spPr>
-          <a:xfrm>
-            <a:off x="822960" y="4800600"/>
-            <a:ext cx="564184" cy="310896"/>
-          </a:xfrm>
-          <a:prstGeom prst="roundRect">
-            <a:avLst/>
-          </a:prstGeom>
-          <a:solidFill>
-            <a:srgbClr val="F05A46"/>
-          </a:solidFill>
-          <a:ln>
-            <a:noFill/>
-          </a:ln>
-          <a:effectLst/>
-        </p:spPr>
-        <p:style>
-          <a:lnRef idx="1">
-            <a:schemeClr val="accent1"/>
-          </a:lnRef>
-          <a:fillRef idx="3">
-            <a:schemeClr val="accent1"/>
-          </a:fillRef>
-          <a:effectRef idx="2">
-            <a:schemeClr val="accent1"/>
-          </a:effectRef>
-          <a:fontRef idx="minor">
-            <a:schemeClr val="lt1"/>
-          </a:fontRef>
-        </p:style>
-        <p:txBody>
-          <a:bodyPr wrap="none" lIns="45720" rIns="45720" rtlCol="0" anchor="ctr"/>
-          <a:lstStyle/>
-          <a:p>
-            <a:pPr algn="ctr"/>
-            <a:r>
-              <a:rPr sz="1100" b="1">
-                <a:solidFill>
-                  <a:srgbClr val="0C111F"/>
-                </a:solidFill>
-                <a:latin typeface="Helvetica Neue"/>
-              </a:rPr>
-              <a:t>05</a:t>
-            </a:r>
-          </a:p>
-        </p:txBody>
-      </p:sp>
-      <p:sp>
-        <p:nvSpPr>
-          <p:cNvPr id="18" name="TextBox 17"/>
+              <a:rPr sz="1600" b="1" i="0">
+                <a:solidFill>
+                  <a:srgbClr val="181D2B"/>
+                </a:solidFill>
+                <a:latin typeface="Helvetica Neue"/>
+              </a:rPr>
+              <a:t>SonarQube Community</a:t>
+            </a:r>
+          </a:p>
+        </p:txBody>
+      </p:sp>
+      <p:sp>
+        <p:nvSpPr>
+          <p:cNvPr id="17" name="TextBox 16"/>
           <p:cNvSpPr txBox="1"/>
           <p:nvPr/>
         </p:nvSpPr>
         <p:spPr>
           <a:xfrm>
-            <a:off x="1691640" y="4782312"/>
-            <a:ext cx="9601200" cy="365760"/>
+            <a:off x="1188720" y="5413248"/>
+            <a:ext cx="9692640" cy="365760"/>
           </a:xfrm>
           <a:prstGeom prst="rect">
             <a:avLst/>
@@ -22945,13 +24189,66 @@
               </a:spcAft>
             </a:pPr>
             <a:r>
-              <a:rPr sz="1450" b="1" i="0">
+              <a:rPr sz="1250" b="0" i="0">
                 <a:solidFill>
                   <a:srgbClr val="181D2B"/>
                 </a:solidFill>
-                <a:latin typeface="Helvetica Neue"/>
-              </a:rPr>
-              <a:t>« 100 % de couverture, on n'a plus besoin de relire. »</a:t>
+                <a:latin typeface="Menlo"/>
+              </a:rPr>
+              <a:t>docs.sonarsource.com</a:t>
+            </a:r>
+          </a:p>
+        </p:txBody>
+      </p:sp>
+      <p:sp>
+        <p:nvSpPr>
+          <p:cNvPr id="18" name="Rounded Rectangle 17"/>
+          <p:cNvSpPr/>
+          <p:nvPr/>
+        </p:nvSpPr>
+        <p:spPr>
+          <a:xfrm>
+            <a:off x="11201400" y="6419088"/>
+            <a:ext cx="713232" cy="329184"/>
+          </a:xfrm>
+          <a:prstGeom prst="roundRect">
+            <a:avLst/>
+          </a:prstGeom>
+          <a:solidFill>
+            <a:srgbClr val="F1E9D5"/>
+          </a:solidFill>
+          <a:ln>
+            <a:noFill/>
+          </a:ln>
+          <a:effectLst/>
+        </p:spPr>
+        <p:style>
+          <a:lnRef idx="1">
+            <a:schemeClr val="accent1"/>
+          </a:lnRef>
+          <a:fillRef idx="3">
+            <a:schemeClr val="accent1"/>
+          </a:fillRef>
+          <a:effectRef idx="2">
+            <a:schemeClr val="accent1"/>
+          </a:effectRef>
+          <a:fontRef idx="minor">
+            <a:schemeClr val="lt1"/>
+          </a:fontRef>
+        </p:style>
+        <p:txBody>
+          <a:bodyPr rtlCol="0" anchor="ctr"/>
+          <a:lstStyle/>
+          <a:p>
+            <a:pPr algn="ctr"/>
+            <a:r>
+              <a:rPr sz="1000" b="1">
+                <a:solidFill>
+                  <a:srgbClr val="5C6272"/>
+                </a:solidFill>
+                <a:latin typeface="Helvetica Neue"/>
+              </a:rPr>
+              <a:t>28/29</a:t>
             </a:r>
           </a:p>
         </p:txBody>
@@ -22964,8 +24261,8 @@
         </p:nvSpPr>
         <p:spPr>
           <a:xfrm>
-            <a:off x="1691640" y="5102352"/>
-            <a:ext cx="9601200" cy="365760"/>
+            <a:off x="502920" y="6492240"/>
+            <a:ext cx="5943600" cy="274320"/>
           </a:xfrm>
           <a:prstGeom prst="rect">
             <a:avLst/>
@@ -22987,1076 +24284,9 @@
               </a:spcAft>
             </a:pPr>
             <a:r>
-              <a:rPr sz="1100" b="0" i="1">
+              <a:rPr sz="800" b="0" i="0">
                 <a:solidFill>
                   <a:srgbClr val="5C6272"/>
-                </a:solidFill>
-                <a:latin typeface="Helvetica Neue"/>
-              </a:rPr>
-              <a:t>La couverture mesure ce qui a été EXÉCUTÉ. Pas ce qui a été VÉRIFIÉ.</a:t>
-            </a:r>
-          </a:p>
-        </p:txBody>
-      </p:sp>
-      <p:sp>
-        <p:nvSpPr>
-          <p:cNvPr id="20" name="Rounded Rectangle 19"/>
-          <p:cNvSpPr/>
-          <p:nvPr/>
-        </p:nvSpPr>
-        <p:spPr>
-          <a:xfrm>
-            <a:off x="822960" y="5806440"/>
-            <a:ext cx="10515600" cy="640080"/>
-          </a:xfrm>
-          <a:prstGeom prst="roundRect">
-            <a:avLst/>
-          </a:prstGeom>
-          <a:solidFill>
-            <a:srgbClr val="FFD23F"/>
-          </a:solidFill>
-          <a:ln>
-            <a:noFill/>
-          </a:ln>
-          <a:effectLst/>
-        </p:spPr>
-        <p:style>
-          <a:lnRef idx="1">
-            <a:schemeClr val="accent1"/>
-          </a:lnRef>
-          <a:fillRef idx="3">
-            <a:schemeClr val="accent1"/>
-          </a:fillRef>
-          <a:effectRef idx="2">
-            <a:schemeClr val="accent1"/>
-          </a:effectRef>
-          <a:fontRef idx="minor">
-            <a:schemeClr val="lt1"/>
-          </a:fontRef>
-        </p:style>
-        <p:txBody>
-          <a:bodyPr wrap="square" lIns="256032" tIns="128016" rIns="256032" bIns="128016" rtlCol="0" anchor="ctr"/>
-          <a:lstStyle/>
-          <a:p>
-            <a:pPr algn="ctr">
-              <a:lnSpc>
-                <a:spcPct val="115000"/>
-              </a:lnSpc>
-            </a:pPr>
-            <a:r>
-              <a:rPr sz="1250" b="1" i="0">
-                <a:solidFill>
-                  <a:srgbClr val="0C111F"/>
-                </a:solidFill>
-                <a:latin typeface="Helvetica Neue"/>
-              </a:rPr>
-              <a:t>Spoiler : aucune de ces cinq phrases n'a jamais empêché un incendie en prod. Pas une seule. J'ai vérifié. Enfin... je crois.</a:t>
-            </a:r>
-          </a:p>
-        </p:txBody>
-      </p:sp>
-      <p:sp>
-        <p:nvSpPr>
-          <p:cNvPr id="21" name="Isosceles Triangle 20"/>
-          <p:cNvSpPr/>
-          <p:nvPr/>
-        </p:nvSpPr>
-        <p:spPr>
-          <a:xfrm>
-            <a:off x="1143000" y="5568696"/>
-            <a:ext cx="256032" cy="256032"/>
-          </a:xfrm>
-          <a:prstGeom prst="triangle">
-            <a:avLst/>
-          </a:prstGeom>
-          <a:solidFill>
-            <a:srgbClr val="FFD23F"/>
-          </a:solidFill>
-          <a:ln>
-            <a:noFill/>
-          </a:ln>
-          <a:effectLst/>
-        </p:spPr>
-        <p:style>
-          <a:lnRef idx="1">
-            <a:schemeClr val="accent1"/>
-          </a:lnRef>
-          <a:fillRef idx="3">
-            <a:schemeClr val="accent1"/>
-          </a:fillRef>
-          <a:effectRef idx="2">
-            <a:schemeClr val="accent1"/>
-          </a:effectRef>
-          <a:fontRef idx="minor">
-            <a:schemeClr val="lt1"/>
-          </a:fontRef>
-        </p:style>
-        <p:txBody>
-          <a:bodyPr rtlCol="0" anchor="ctr"/>
-          <a:lstStyle/>
-          <a:p>
-            <a:pPr algn="ctr"/>
-            <a:endParaRPr/>
-          </a:p>
-        </p:txBody>
-      </p:sp>
-      <p:sp>
-        <p:nvSpPr>
-          <p:cNvPr id="22" name="Rounded Rectangle 21"/>
-          <p:cNvSpPr/>
-          <p:nvPr/>
-        </p:nvSpPr>
-        <p:spPr>
-          <a:xfrm>
-            <a:off x="11201400" y="6419088"/>
-            <a:ext cx="713232" cy="329184"/>
-          </a:xfrm>
-          <a:prstGeom prst="roundRect">
-            <a:avLst/>
-          </a:prstGeom>
-          <a:solidFill>
-            <a:srgbClr val="F1E9D5"/>
-          </a:solidFill>
-          <a:ln>
-            <a:noFill/>
-          </a:ln>
-          <a:effectLst/>
-        </p:spPr>
-        <p:style>
-          <a:lnRef idx="1">
-            <a:schemeClr val="accent1"/>
-          </a:lnRef>
-          <a:fillRef idx="3">
-            <a:schemeClr val="accent1"/>
-          </a:fillRef>
-          <a:effectRef idx="2">
-            <a:schemeClr val="accent1"/>
-          </a:effectRef>
-          <a:fontRef idx="minor">
-            <a:schemeClr val="lt1"/>
-          </a:fontRef>
-        </p:style>
-        <p:txBody>
-          <a:bodyPr rtlCol="0" anchor="ctr"/>
-          <a:lstStyle/>
-          <a:p>
-            <a:pPr algn="ctr"/>
-            <a:r>
-              <a:rPr sz="1000" b="1">
-                <a:solidFill>
-                  <a:srgbClr val="5C6272"/>
-                </a:solidFill>
-                <a:latin typeface="Helvetica Neue"/>
-              </a:rPr>
-              <a:t>26/29</a:t>
-            </a:r>
-          </a:p>
-        </p:txBody>
-      </p:sp>
-      <p:sp>
-        <p:nvSpPr>
-          <p:cNvPr id="23" name="TextBox 22"/>
-          <p:cNvSpPr txBox="1"/>
-          <p:nvPr/>
-        </p:nvSpPr>
-        <p:spPr>
-          <a:xfrm>
-            <a:off x="502920" y="6492240"/>
-            <a:ext cx="5943600" cy="274320"/>
-          </a:xfrm>
-          <a:prstGeom prst="rect">
-            <a:avLst/>
-          </a:prstGeom>
-          <a:noFill/>
-        </p:spPr>
-        <p:txBody>
-          <a:bodyPr wrap="square" lIns="0" tIns="0" rIns="0" bIns="0" anchor="t">
-            <a:spAutoFit/>
-          </a:bodyPr>
-          <a:lstStyle/>
-          <a:p>
-            <a:pPr algn="l">
-              <a:lnSpc>
-                <a:spcPct val="100000"/>
-              </a:lnSpc>
-              <a:spcAft>
-                <a:spcPts val="0"/>
-              </a:spcAft>
-            </a:pPr>
-            <a:r>
-              <a:rPr sz="800" b="0" i="0">
-                <a:solidFill>
-                  <a:srgbClr val="5C6272"/>
-                </a:solidFill>
-                <a:latin typeface="Helvetica Neue"/>
-              </a:rPr>
-              <a:t>COUVERTURE DYNAMITE — QUARKUS · JUNIT · CUCUMBER · JACOCO</a:t>
-            </a:r>
-          </a:p>
-        </p:txBody>
-      </p:sp>
-    </p:spTree>
-  </p:cSld>
-  <p:clrMapOvr>
-    <a:masterClrMapping/>
-  </p:clrMapOvr>
-  <p:transition>
-    <p:fade/>
-  </p:transition>
-</p:sld>
-</file>
-
-<file path=ppt/slides/slide27.xml><?xml version="1.0" encoding="utf-8"?>
-<p:sld xmlns:a="http://schemas.openxmlformats.org/drawingml/2006/main" xmlns:r="http://schemas.openxmlformats.org/officeDocument/2006/relationships" xmlns:p="http://schemas.openxmlformats.org/presentationml/2006/main">
-  <p:cSld>
-    <p:bg>
-      <p:bgPr>
-        <a:solidFill>
-          <a:srgbClr val="0C111F"/>
-        </a:solidFill>
-        <a:effectLst/>
-      </p:bgPr>
-    </p:bg>
-    <p:spTree>
-      <p:nvGrpSpPr>
-        <p:cNvPr id="1" name=""/>
-        <p:cNvGrpSpPr/>
-        <p:nvPr/>
-      </p:nvGrpSpPr>
-      <p:grpSpPr>
-        <a:xfrm>
-          <a:off x="0" y="0"/>
-          <a:ext cx="0" cy="0"/>
-          <a:chOff x="0" y="0"/>
-          <a:chExt cx="0" cy="0"/>
-        </a:xfrm>
-      </p:grpSpPr>
-      <p:sp>
-        <p:nvSpPr>
-          <p:cNvPr id="2" name="Parallelogram 1"/>
-          <p:cNvSpPr/>
-          <p:nvPr/>
-        </p:nvSpPr>
-        <p:spPr>
-          <a:xfrm>
-            <a:off x="-164592" y="384048"/>
-            <a:ext cx="2148840" cy="420624"/>
-          </a:xfrm>
-          <a:prstGeom prst="parallelogram">
-            <a:avLst/>
-          </a:prstGeom>
-          <a:solidFill>
-            <a:srgbClr val="FFD23F"/>
-          </a:solidFill>
-          <a:ln>
-            <a:noFill/>
-          </a:ln>
-          <a:effectLst/>
-        </p:spPr>
-        <p:style>
-          <a:lnRef idx="1">
-            <a:schemeClr val="accent1"/>
-          </a:lnRef>
-          <a:fillRef idx="3">
-            <a:schemeClr val="accent1"/>
-          </a:fillRef>
-          <a:effectRef idx="2">
-            <a:schemeClr val="accent1"/>
-          </a:effectRef>
-          <a:fontRef idx="minor">
-            <a:schemeClr val="lt1"/>
-          </a:fontRef>
-        </p:style>
-        <p:txBody>
-          <a:bodyPr lIns="256032" tIns="18288" rIns="45720" bIns="18288" rtlCol="0" anchor="ctr"/>
-          <a:lstStyle/>
-          <a:p>
-            <a:pPr algn="l"/>
-            <a:r>
-              <a:rPr sz="1150" b="1">
-                <a:solidFill>
-                  <a:srgbClr val="0C111F"/>
-                </a:solidFill>
-                <a:latin typeface="Helvetica Neue"/>
-              </a:rPr>
-              <a:t>À RETENIR</a:t>
-            </a:r>
-          </a:p>
-        </p:txBody>
-      </p:sp>
-      <p:sp>
-        <p:nvSpPr>
-          <p:cNvPr id="3" name="TextBox 2"/>
-          <p:cNvSpPr txBox="1"/>
-          <p:nvPr/>
-        </p:nvSpPr>
-        <p:spPr>
-          <a:xfrm>
-            <a:off x="822960" y="1051560"/>
-            <a:ext cx="10058400" cy="822960"/>
-          </a:xfrm>
-          <a:prstGeom prst="rect">
-            <a:avLst/>
-          </a:prstGeom>
-          <a:noFill/>
-        </p:spPr>
-        <p:txBody>
-          <a:bodyPr wrap="square" lIns="0" tIns="0" rIns="0" bIns="0" anchor="t">
-            <a:spAutoFit/>
-          </a:bodyPr>
-          <a:lstStyle/>
-          <a:p>
-            <a:pPr algn="l">
-              <a:lnSpc>
-                <a:spcPct val="100000"/>
-              </a:lnSpc>
-              <a:spcAft>
-                <a:spcPts val="0"/>
-              </a:spcAft>
-            </a:pPr>
-            <a:r>
-              <a:rPr sz="3000" b="1" i="0">
-                <a:solidFill>
-                  <a:srgbClr val="F3EEE0"/>
-                </a:solidFill>
-                <a:latin typeface="Helvetica Neue"/>
-              </a:rPr>
-              <a:t>Ce qu'il faut retenir</a:t>
-            </a:r>
-          </a:p>
-        </p:txBody>
-      </p:sp>
-      <p:sp>
-        <p:nvSpPr>
-          <p:cNvPr id="4" name="Oval 3"/>
-          <p:cNvSpPr/>
-          <p:nvPr/>
-        </p:nvSpPr>
-        <p:spPr>
-          <a:xfrm>
-            <a:off x="10273284" y="443484"/>
-            <a:ext cx="1051560" cy="1051560"/>
-          </a:xfrm>
-          <a:prstGeom prst="ellipse">
-            <a:avLst/>
-          </a:prstGeom>
-          <a:solidFill>
-            <a:srgbClr val="0C111F"/>
-          </a:solidFill>
-          <a:ln>
-            <a:noFill/>
-          </a:ln>
-          <a:effectLst/>
-        </p:spPr>
-        <p:style>
-          <a:lnRef idx="1">
-            <a:schemeClr val="accent1"/>
-          </a:lnRef>
-          <a:fillRef idx="3">
-            <a:schemeClr val="accent1"/>
-          </a:fillRef>
-          <a:effectRef idx="2">
-            <a:schemeClr val="accent1"/>
-          </a:effectRef>
-          <a:fontRef idx="minor">
-            <a:schemeClr val="lt1"/>
-          </a:fontRef>
-        </p:style>
-        <p:txBody>
-          <a:bodyPr rtlCol="0" anchor="ctr"/>
-          <a:lstStyle/>
-          <a:p>
-            <a:pPr algn="ctr"/>
-            <a:endParaRPr/>
-          </a:p>
-        </p:txBody>
-      </p:sp>
-      <p:sp>
-        <p:nvSpPr>
-          <p:cNvPr id="5" name="Oval 4"/>
-          <p:cNvSpPr/>
-          <p:nvPr/>
-        </p:nvSpPr>
-        <p:spPr>
-          <a:xfrm rot="360000">
-            <a:off x="10218420" y="388620"/>
-            <a:ext cx="1051560" cy="1051560"/>
-          </a:xfrm>
-          <a:prstGeom prst="ellipse">
-            <a:avLst/>
-          </a:prstGeom>
-          <a:solidFill>
-            <a:srgbClr val="FFD23F"/>
-          </a:solidFill>
-          <a:ln>
-            <a:noFill/>
-          </a:ln>
-          <a:effectLst/>
-        </p:spPr>
-        <p:style>
-          <a:lnRef idx="1">
-            <a:schemeClr val="accent1"/>
-          </a:lnRef>
-          <a:fillRef idx="3">
-            <a:schemeClr val="accent1"/>
-          </a:fillRef>
-          <a:effectRef idx="2">
-            <a:schemeClr val="accent1"/>
-          </a:effectRef>
-          <a:fontRef idx="minor">
-            <a:schemeClr val="lt1"/>
-          </a:fontRef>
-        </p:style>
-        <p:txBody>
-          <a:bodyPr wrap="square" lIns="54864" rIns="54864" rtlCol="0" anchor="ctr"/>
-          <a:lstStyle/>
-          <a:p>
-            <a:pPr algn="ctr"/>
-            <a:r>
-              <a:rPr sz="1300" b="1">
-                <a:solidFill>
-                  <a:srgbClr val="0C111F"/>
-                </a:solidFill>
-                <a:latin typeface="Helvetica Neue"/>
-              </a:rPr>
-              <a:t>tl;dr</a:t>
-            </a:r>
-          </a:p>
-        </p:txBody>
-      </p:sp>
-      <p:sp>
-        <p:nvSpPr>
-          <p:cNvPr id="6" name="Oval 5"/>
-          <p:cNvSpPr/>
-          <p:nvPr/>
-        </p:nvSpPr>
-        <p:spPr>
-          <a:xfrm>
-            <a:off x="946404" y="2153412"/>
-            <a:ext cx="685800" cy="685800"/>
-          </a:xfrm>
-          <a:prstGeom prst="ellipse">
-            <a:avLst/>
-          </a:prstGeom>
-          <a:solidFill>
-            <a:srgbClr val="0C111F"/>
-          </a:solidFill>
-          <a:ln>
-            <a:noFill/>
-          </a:ln>
-          <a:effectLst/>
-        </p:spPr>
-        <p:style>
-          <a:lnRef idx="1">
-            <a:schemeClr val="accent1"/>
-          </a:lnRef>
-          <a:fillRef idx="3">
-            <a:schemeClr val="accent1"/>
-          </a:fillRef>
-          <a:effectRef idx="2">
-            <a:schemeClr val="accent1"/>
-          </a:effectRef>
-          <a:fontRef idx="minor">
-            <a:schemeClr val="lt1"/>
-          </a:fontRef>
-        </p:style>
-        <p:txBody>
-          <a:bodyPr rtlCol="0" anchor="ctr"/>
-          <a:lstStyle/>
-          <a:p>
-            <a:pPr algn="ctr"/>
-            <a:endParaRPr/>
-          </a:p>
-        </p:txBody>
-      </p:sp>
-      <p:sp>
-        <p:nvSpPr>
-          <p:cNvPr id="7" name="Oval 6"/>
-          <p:cNvSpPr/>
-          <p:nvPr/>
-        </p:nvSpPr>
-        <p:spPr>
-          <a:xfrm rot="21240000">
-            <a:off x="891540" y="2098548"/>
-            <a:ext cx="685800" cy="685800"/>
-          </a:xfrm>
-          <a:prstGeom prst="ellipse">
-            <a:avLst/>
-          </a:prstGeom>
-          <a:solidFill>
-            <a:srgbClr val="FFD23F"/>
-          </a:solidFill>
-          <a:ln>
-            <a:noFill/>
-          </a:ln>
-          <a:effectLst/>
-        </p:spPr>
-        <p:style>
-          <a:lnRef idx="1">
-            <a:schemeClr val="accent1"/>
-          </a:lnRef>
-          <a:fillRef idx="3">
-            <a:schemeClr val="accent1"/>
-          </a:fillRef>
-          <a:effectRef idx="2">
-            <a:schemeClr val="accent1"/>
-          </a:effectRef>
-          <a:fontRef idx="minor">
-            <a:schemeClr val="lt1"/>
-          </a:fontRef>
-        </p:style>
-        <p:txBody>
-          <a:bodyPr wrap="square" lIns="54864" rIns="54864" rtlCol="0" anchor="ctr"/>
-          <a:lstStyle/>
-          <a:p>
-            <a:pPr algn="ctr"/>
-            <a:r>
-              <a:rPr sz="2200" b="1">
-                <a:solidFill>
-                  <a:srgbClr val="0C111F"/>
-                </a:solidFill>
-                <a:latin typeface="Helvetica Neue"/>
-              </a:rPr>
-              <a:t>1</a:t>
-            </a:r>
-          </a:p>
-        </p:txBody>
-      </p:sp>
-      <p:sp>
-        <p:nvSpPr>
-          <p:cNvPr id="8" name="TextBox 7"/>
-          <p:cNvSpPr txBox="1"/>
-          <p:nvPr/>
-        </p:nvSpPr>
-        <p:spPr>
-          <a:xfrm>
-            <a:off x="2011680" y="2167128"/>
-            <a:ext cx="8961120" cy="502920"/>
-          </a:xfrm>
-          <a:prstGeom prst="rect">
-            <a:avLst/>
-          </a:prstGeom>
-          <a:noFill/>
-        </p:spPr>
-        <p:txBody>
-          <a:bodyPr wrap="square" lIns="0" tIns="0" rIns="0" bIns="0" anchor="t">
-            <a:spAutoFit/>
-          </a:bodyPr>
-          <a:lstStyle/>
-          <a:p>
-            <a:pPr algn="l">
-              <a:lnSpc>
-                <a:spcPct val="100000"/>
-              </a:lnSpc>
-              <a:spcAft>
-                <a:spcPts val="0"/>
-              </a:spcAft>
-            </a:pPr>
-            <a:r>
-              <a:rPr sz="1650" b="1" i="0">
-                <a:solidFill>
-                  <a:srgbClr val="F3EEE0"/>
-                </a:solidFill>
-                <a:latin typeface="Helvetica Neue"/>
-              </a:rPr>
-              <a:t>Un test vert ne dit pas ce qu'il a vérifié.</a:t>
-            </a:r>
-          </a:p>
-        </p:txBody>
-      </p:sp>
-      <p:sp>
-        <p:nvSpPr>
-          <p:cNvPr id="9" name="TextBox 8"/>
-          <p:cNvSpPr txBox="1"/>
-          <p:nvPr/>
-        </p:nvSpPr>
-        <p:spPr>
-          <a:xfrm>
-            <a:off x="2011680" y="2633472"/>
-            <a:ext cx="8961120" cy="457200"/>
-          </a:xfrm>
-          <a:prstGeom prst="rect">
-            <a:avLst/>
-          </a:prstGeom>
-          <a:noFill/>
-        </p:spPr>
-        <p:txBody>
-          <a:bodyPr wrap="square" lIns="0" tIns="0" rIns="0" bIns="0" anchor="t">
-            <a:spAutoFit/>
-          </a:bodyPr>
-          <a:lstStyle/>
-          <a:p>
-            <a:pPr algn="l">
-              <a:lnSpc>
-                <a:spcPct val="100000"/>
-              </a:lnSpc>
-              <a:spcAft>
-                <a:spcPts val="0"/>
-              </a:spcAft>
-            </a:pPr>
-            <a:r>
-              <a:rPr sz="1250" b="0" i="0">
-                <a:solidFill>
-                  <a:srgbClr val="9AA1B5"/>
-                </a:solidFill>
-                <a:latin typeface="Helvetica Neue"/>
-              </a:rPr>
-              <a:t>La couverture, si.</a:t>
-            </a:r>
-          </a:p>
-        </p:txBody>
-      </p:sp>
-      <p:sp>
-        <p:nvSpPr>
-          <p:cNvPr id="10" name="Oval 9"/>
-          <p:cNvSpPr/>
-          <p:nvPr/>
-        </p:nvSpPr>
-        <p:spPr>
-          <a:xfrm>
-            <a:off x="946404" y="3250692"/>
-            <a:ext cx="685800" cy="685800"/>
-          </a:xfrm>
-          <a:prstGeom prst="ellipse">
-            <a:avLst/>
-          </a:prstGeom>
-          <a:solidFill>
-            <a:srgbClr val="0C111F"/>
-          </a:solidFill>
-          <a:ln>
-            <a:noFill/>
-          </a:ln>
-          <a:effectLst/>
-        </p:spPr>
-        <p:style>
-          <a:lnRef idx="1">
-            <a:schemeClr val="accent1"/>
-          </a:lnRef>
-          <a:fillRef idx="3">
-            <a:schemeClr val="accent1"/>
-          </a:fillRef>
-          <a:effectRef idx="2">
-            <a:schemeClr val="accent1"/>
-          </a:effectRef>
-          <a:fontRef idx="minor">
-            <a:schemeClr val="lt1"/>
-          </a:fontRef>
-        </p:style>
-        <p:txBody>
-          <a:bodyPr rtlCol="0" anchor="ctr"/>
-          <a:lstStyle/>
-          <a:p>
-            <a:pPr algn="ctr"/>
-            <a:endParaRPr/>
-          </a:p>
-        </p:txBody>
-      </p:sp>
-      <p:sp>
-        <p:nvSpPr>
-          <p:cNvPr id="11" name="Oval 10"/>
-          <p:cNvSpPr/>
-          <p:nvPr/>
-        </p:nvSpPr>
-        <p:spPr>
-          <a:xfrm rot="21240000">
-            <a:off x="891540" y="3195828"/>
-            <a:ext cx="685800" cy="685800"/>
-          </a:xfrm>
-          <a:prstGeom prst="ellipse">
-            <a:avLst/>
-          </a:prstGeom>
-          <a:solidFill>
-            <a:srgbClr val="FFD23F"/>
-          </a:solidFill>
-          <a:ln>
-            <a:noFill/>
-          </a:ln>
-          <a:effectLst/>
-        </p:spPr>
-        <p:style>
-          <a:lnRef idx="1">
-            <a:schemeClr val="accent1"/>
-          </a:lnRef>
-          <a:fillRef idx="3">
-            <a:schemeClr val="accent1"/>
-          </a:fillRef>
-          <a:effectRef idx="2">
-            <a:schemeClr val="accent1"/>
-          </a:effectRef>
-          <a:fontRef idx="minor">
-            <a:schemeClr val="lt1"/>
-          </a:fontRef>
-        </p:style>
-        <p:txBody>
-          <a:bodyPr wrap="square" lIns="54864" rIns="54864" rtlCol="0" anchor="ctr"/>
-          <a:lstStyle/>
-          <a:p>
-            <a:pPr algn="ctr"/>
-            <a:r>
-              <a:rPr sz="2200" b="1">
-                <a:solidFill>
-                  <a:srgbClr val="0C111F"/>
-                </a:solidFill>
-                <a:latin typeface="Helvetica Neue"/>
-              </a:rPr>
-              <a:t>2</a:t>
-            </a:r>
-          </a:p>
-        </p:txBody>
-      </p:sp>
-      <p:sp>
-        <p:nvSpPr>
-          <p:cNvPr id="12" name="TextBox 11"/>
-          <p:cNvSpPr txBox="1"/>
-          <p:nvPr/>
-        </p:nvSpPr>
-        <p:spPr>
-          <a:xfrm>
-            <a:off x="2011680" y="3264408"/>
-            <a:ext cx="8961120" cy="502920"/>
-          </a:xfrm>
-          <a:prstGeom prst="rect">
-            <a:avLst/>
-          </a:prstGeom>
-          <a:noFill/>
-        </p:spPr>
-        <p:txBody>
-          <a:bodyPr wrap="square" lIns="0" tIns="0" rIns="0" bIns="0" anchor="t">
-            <a:spAutoFit/>
-          </a:bodyPr>
-          <a:lstStyle/>
-          <a:p>
-            <a:pPr algn="l">
-              <a:lnSpc>
-                <a:spcPct val="100000"/>
-              </a:lnSpc>
-              <a:spcAft>
-                <a:spcPts val="0"/>
-              </a:spcAft>
-            </a:pPr>
-            <a:r>
-              <a:rPr sz="1650" b="1" i="0">
-                <a:solidFill>
-                  <a:srgbClr val="F3EEE0"/>
-                </a:solidFill>
-                <a:latin typeface="Helvetica Neue"/>
-              </a:rPr>
-              <a:t>JUnit et Cucumber répondent à deux questions différentes.</a:t>
-            </a:r>
-          </a:p>
-        </p:txBody>
-      </p:sp>
-      <p:sp>
-        <p:nvSpPr>
-          <p:cNvPr id="13" name="TextBox 12"/>
-          <p:cNvSpPr txBox="1"/>
-          <p:nvPr/>
-        </p:nvSpPr>
-        <p:spPr>
-          <a:xfrm>
-            <a:off x="2011680" y="3730752"/>
-            <a:ext cx="8961120" cy="457200"/>
-          </a:xfrm>
-          <a:prstGeom prst="rect">
-            <a:avLst/>
-          </a:prstGeom>
-          <a:noFill/>
-        </p:spPr>
-        <p:txBody>
-          <a:bodyPr wrap="square" lIns="0" tIns="0" rIns="0" bIns="0" anchor="t">
-            <a:spAutoFit/>
-          </a:bodyPr>
-          <a:lstStyle/>
-          <a:p>
-            <a:pPr algn="l">
-              <a:lnSpc>
-                <a:spcPct val="100000"/>
-              </a:lnSpc>
-              <a:spcAft>
-                <a:spcPts val="0"/>
-              </a:spcAft>
-            </a:pPr>
-            <a:r>
-              <a:rPr sz="1250" b="0" i="0">
-                <a:solidFill>
-                  <a:srgbClr val="9AA1B5"/>
-                </a:solidFill>
-                <a:latin typeface="Helvetica Neue"/>
-              </a:rPr>
-              <a:t>« Ça marche ? » contre « c'est le bon comportement ? »</a:t>
-            </a:r>
-          </a:p>
-        </p:txBody>
-      </p:sp>
-      <p:sp>
-        <p:nvSpPr>
-          <p:cNvPr id="14" name="Oval 13"/>
-          <p:cNvSpPr/>
-          <p:nvPr/>
-        </p:nvSpPr>
-        <p:spPr>
-          <a:xfrm>
-            <a:off x="946404" y="4347972"/>
-            <a:ext cx="685800" cy="685800"/>
-          </a:xfrm>
-          <a:prstGeom prst="ellipse">
-            <a:avLst/>
-          </a:prstGeom>
-          <a:solidFill>
-            <a:srgbClr val="0C111F"/>
-          </a:solidFill>
-          <a:ln>
-            <a:noFill/>
-          </a:ln>
-          <a:effectLst/>
-        </p:spPr>
-        <p:style>
-          <a:lnRef idx="1">
-            <a:schemeClr val="accent1"/>
-          </a:lnRef>
-          <a:fillRef idx="3">
-            <a:schemeClr val="accent1"/>
-          </a:fillRef>
-          <a:effectRef idx="2">
-            <a:schemeClr val="accent1"/>
-          </a:effectRef>
-          <a:fontRef idx="minor">
-            <a:schemeClr val="lt1"/>
-          </a:fontRef>
-        </p:style>
-        <p:txBody>
-          <a:bodyPr rtlCol="0" anchor="ctr"/>
-          <a:lstStyle/>
-          <a:p>
-            <a:pPr algn="ctr"/>
-            <a:endParaRPr/>
-          </a:p>
-        </p:txBody>
-      </p:sp>
-      <p:sp>
-        <p:nvSpPr>
-          <p:cNvPr id="15" name="Oval 14"/>
-          <p:cNvSpPr/>
-          <p:nvPr/>
-        </p:nvSpPr>
-        <p:spPr>
-          <a:xfrm rot="21240000">
-            <a:off x="891540" y="4293108"/>
-            <a:ext cx="685800" cy="685800"/>
-          </a:xfrm>
-          <a:prstGeom prst="ellipse">
-            <a:avLst/>
-          </a:prstGeom>
-          <a:solidFill>
-            <a:srgbClr val="FFD23F"/>
-          </a:solidFill>
-          <a:ln>
-            <a:noFill/>
-          </a:ln>
-          <a:effectLst/>
-        </p:spPr>
-        <p:style>
-          <a:lnRef idx="1">
-            <a:schemeClr val="accent1"/>
-          </a:lnRef>
-          <a:fillRef idx="3">
-            <a:schemeClr val="accent1"/>
-          </a:fillRef>
-          <a:effectRef idx="2">
-            <a:schemeClr val="accent1"/>
-          </a:effectRef>
-          <a:fontRef idx="minor">
-            <a:schemeClr val="lt1"/>
-          </a:fontRef>
-        </p:style>
-        <p:txBody>
-          <a:bodyPr wrap="square" lIns="54864" rIns="54864" rtlCol="0" anchor="ctr"/>
-          <a:lstStyle/>
-          <a:p>
-            <a:pPr algn="ctr"/>
-            <a:r>
-              <a:rPr sz="2200" b="1">
-                <a:solidFill>
-                  <a:srgbClr val="0C111F"/>
-                </a:solidFill>
-                <a:latin typeface="Helvetica Neue"/>
-              </a:rPr>
-              <a:t>3</a:t>
-            </a:r>
-          </a:p>
-        </p:txBody>
-      </p:sp>
-      <p:sp>
-        <p:nvSpPr>
-          <p:cNvPr id="16" name="TextBox 15"/>
-          <p:cNvSpPr txBox="1"/>
-          <p:nvPr/>
-        </p:nvSpPr>
-        <p:spPr>
-          <a:xfrm>
-            <a:off x="2011680" y="4361688"/>
-            <a:ext cx="8961120" cy="502920"/>
-          </a:xfrm>
-          <a:prstGeom prst="rect">
-            <a:avLst/>
-          </a:prstGeom>
-          <a:noFill/>
-        </p:spPr>
-        <p:txBody>
-          <a:bodyPr wrap="square" lIns="0" tIns="0" rIns="0" bIns="0" anchor="t">
-            <a:spAutoFit/>
-          </a:bodyPr>
-          <a:lstStyle/>
-          <a:p>
-            <a:pPr algn="l">
-              <a:lnSpc>
-                <a:spcPct val="100000"/>
-              </a:lnSpc>
-              <a:spcAft>
-                <a:spcPts val="0"/>
-              </a:spcAft>
-            </a:pPr>
-            <a:r>
-              <a:rPr sz="1650" b="1" i="0">
-                <a:solidFill>
-                  <a:srgbClr val="F3EEE0"/>
-                </a:solidFill>
-                <a:latin typeface="Helvetica Neue"/>
-              </a:rPr>
-              <a:t>Le rapport de couverture n'est pas un objectif.</a:t>
-            </a:r>
-          </a:p>
-        </p:txBody>
-      </p:sp>
-      <p:sp>
-        <p:nvSpPr>
-          <p:cNvPr id="17" name="TextBox 16"/>
-          <p:cNvSpPr txBox="1"/>
-          <p:nvPr/>
-        </p:nvSpPr>
-        <p:spPr>
-          <a:xfrm>
-            <a:off x="2011680" y="4828032"/>
-            <a:ext cx="8961120" cy="457200"/>
-          </a:xfrm>
-          <a:prstGeom prst="rect">
-            <a:avLst/>
-          </a:prstGeom>
-          <a:noFill/>
-        </p:spPr>
-        <p:txBody>
-          <a:bodyPr wrap="square" lIns="0" tIns="0" rIns="0" bIns="0" anchor="t">
-            <a:spAutoFit/>
-          </a:bodyPr>
-          <a:lstStyle/>
-          <a:p>
-            <a:pPr algn="l">
-              <a:lnSpc>
-                <a:spcPct val="100000"/>
-              </a:lnSpc>
-              <a:spcAft>
-                <a:spcPts val="0"/>
-              </a:spcAft>
-            </a:pPr>
-            <a:r>
-              <a:rPr sz="1250" b="0" i="0">
-                <a:solidFill>
-                  <a:srgbClr val="9AA1B5"/>
-                </a:solidFill>
-                <a:latin typeface="Helvetica Neue"/>
-              </a:rPr>
-              <a:t>C'est un radar : il montre où regarder en premier.</a:t>
-            </a:r>
-          </a:p>
-        </p:txBody>
-      </p:sp>
-      <p:sp>
-        <p:nvSpPr>
-          <p:cNvPr id="22" name="Rounded Rectangle 21"/>
-          <p:cNvSpPr/>
-          <p:nvPr/>
-        </p:nvSpPr>
-        <p:spPr>
-          <a:xfrm>
-            <a:off x="11201400" y="6419088"/>
-            <a:ext cx="713232" cy="329184"/>
-          </a:xfrm>
-          <a:prstGeom prst="roundRect">
-            <a:avLst/>
-          </a:prstGeom>
-          <a:solidFill>
-            <a:srgbClr val="171F33"/>
-          </a:solidFill>
-          <a:ln>
-            <a:noFill/>
-          </a:ln>
-          <a:effectLst/>
-        </p:spPr>
-        <p:style>
-          <a:lnRef idx="1">
-            <a:schemeClr val="accent1"/>
-          </a:lnRef>
-          <a:fillRef idx="3">
-            <a:schemeClr val="accent1"/>
-          </a:fillRef>
-          <a:effectRef idx="2">
-            <a:schemeClr val="accent1"/>
-          </a:effectRef>
-          <a:fontRef idx="minor">
-            <a:schemeClr val="lt1"/>
-          </a:fontRef>
-        </p:style>
-        <p:txBody>
-          <a:bodyPr rtlCol="0" anchor="ctr"/>
-          <a:lstStyle/>
-          <a:p>
-            <a:pPr algn="ctr"/>
-            <a:r>
-              <a:rPr sz="1000" b="1">
-                <a:solidFill>
-                  <a:srgbClr val="9AA1B5"/>
-                </a:solidFill>
-                <a:latin typeface="Helvetica Neue"/>
-              </a:rPr>
-              <a:t>27/29</a:t>
-            </a:r>
-          </a:p>
-        </p:txBody>
-      </p:sp>
-      <p:sp>
-        <p:nvSpPr>
-          <p:cNvPr id="23" name="TextBox 22"/>
-          <p:cNvSpPr txBox="1"/>
-          <p:nvPr/>
-        </p:nvSpPr>
-        <p:spPr>
-          <a:xfrm>
-            <a:off x="502920" y="6492240"/>
-            <a:ext cx="5943600" cy="274320"/>
-          </a:xfrm>
-          <a:prstGeom prst="rect">
-            <a:avLst/>
-          </a:prstGeom>
-          <a:noFill/>
-        </p:spPr>
-        <p:txBody>
-          <a:bodyPr wrap="square" lIns="0" tIns="0" rIns="0" bIns="0" anchor="t">
-            <a:spAutoFit/>
-          </a:bodyPr>
-          <a:lstStyle/>
-          <a:p>
-            <a:pPr algn="l">
-              <a:lnSpc>
-                <a:spcPct val="100000"/>
-              </a:lnSpc>
-              <a:spcAft>
-                <a:spcPts val="0"/>
-              </a:spcAft>
-            </a:pPr>
-            <a:r>
-              <a:rPr sz="800" b="0" i="0">
-                <a:solidFill>
-                  <a:srgbClr val="9AA1B5"/>
                 </a:solidFill>
                 <a:latin typeface="Helvetica Neue"/>
               </a:rPr>
@@ -24077,835 +24307,6 @@
 </file>
 
 <file path=ppt/slides/slide28.xml><?xml version="1.0" encoding="utf-8"?>
-<p:sld xmlns:a="http://schemas.openxmlformats.org/drawingml/2006/main" xmlns:r="http://schemas.openxmlformats.org/officeDocument/2006/relationships" xmlns:p="http://schemas.openxmlformats.org/presentationml/2006/main">
-  <p:cSld>
-    <p:bg>
-      <p:bgPr>
-        <a:solidFill>
-          <a:srgbClr val="FBF6EA"/>
-        </a:solidFill>
-        <a:effectLst/>
-      </p:bgPr>
-    </p:bg>
-    <p:spTree>
-      <p:nvGrpSpPr>
-        <p:cNvPr id="1" name=""/>
-        <p:cNvGrpSpPr/>
-        <p:nvPr/>
-      </p:nvGrpSpPr>
-      <p:grpSpPr>
-        <a:xfrm>
-          <a:off x="0" y="0"/>
-          <a:ext cx="0" cy="0"/>
-          <a:chOff x="0" y="0"/>
-          <a:chExt cx="0" cy="0"/>
-        </a:xfrm>
-      </p:grpSpPr>
-      <p:sp>
-        <p:nvSpPr>
-          <p:cNvPr id="2" name="Rectangle 1"/>
-          <p:cNvSpPr/>
-          <p:nvPr/>
-        </p:nvSpPr>
-        <p:spPr>
-          <a:xfrm>
-            <a:off x="0" y="0"/>
-            <a:ext cx="182880" cy="6858000"/>
-          </a:xfrm>
-          <a:prstGeom prst="rect">
-            <a:avLst/>
-          </a:prstGeom>
-          <a:solidFill>
-            <a:srgbClr val="9CC24C"/>
-          </a:solidFill>
-          <a:ln>
-            <a:noFill/>
-          </a:ln>
-          <a:effectLst/>
-        </p:spPr>
-        <p:style>
-          <a:lnRef idx="1">
-            <a:schemeClr val="accent1"/>
-          </a:lnRef>
-          <a:fillRef idx="3">
-            <a:schemeClr val="accent1"/>
-          </a:fillRef>
-          <a:effectRef idx="2">
-            <a:schemeClr val="accent1"/>
-          </a:effectRef>
-          <a:fontRef idx="minor">
-            <a:schemeClr val="lt1"/>
-          </a:fontRef>
-        </p:style>
-        <p:txBody>
-          <a:bodyPr rtlCol="0" anchor="ctr"/>
-          <a:lstStyle/>
-          <a:p>
-            <a:pPr algn="ctr"/>
-            <a:endParaRPr/>
-          </a:p>
-        </p:txBody>
-      </p:sp>
-      <p:sp>
-        <p:nvSpPr>
-          <p:cNvPr id="3" name="Parallelogram 2"/>
-          <p:cNvSpPr/>
-          <p:nvPr/>
-        </p:nvSpPr>
-        <p:spPr>
-          <a:xfrm>
-            <a:off x="-164592" y="384048"/>
-            <a:ext cx="2148840" cy="420624"/>
-          </a:xfrm>
-          <a:prstGeom prst="parallelogram">
-            <a:avLst/>
-          </a:prstGeom>
-          <a:solidFill>
-            <a:srgbClr val="9CC24C"/>
-          </a:solidFill>
-          <a:ln>
-            <a:noFill/>
-          </a:ln>
-          <a:effectLst/>
-        </p:spPr>
-        <p:style>
-          <a:lnRef idx="1">
-            <a:schemeClr val="accent1"/>
-          </a:lnRef>
-          <a:fillRef idx="3">
-            <a:schemeClr val="accent1"/>
-          </a:fillRef>
-          <a:effectRef idx="2">
-            <a:schemeClr val="accent1"/>
-          </a:effectRef>
-          <a:fontRef idx="minor">
-            <a:schemeClr val="lt1"/>
-          </a:fontRef>
-        </p:style>
-        <p:txBody>
-          <a:bodyPr lIns="256032" tIns="18288" rIns="45720" bIns="18288" rtlCol="0" anchor="ctr"/>
-          <a:lstStyle/>
-          <a:p>
-            <a:pPr algn="l"/>
-            <a:r>
-              <a:rPr sz="1150" b="1">
-                <a:solidFill>
-                  <a:srgbClr val="0C111F"/>
-                </a:solidFill>
-                <a:latin typeface="Helvetica Neue"/>
-              </a:rPr>
-              <a:t>POUR LA SUITE</a:t>
-            </a:r>
-          </a:p>
-        </p:txBody>
-      </p:sp>
-      <p:sp>
-        <p:nvSpPr>
-          <p:cNvPr id="4" name="TextBox 3"/>
-          <p:cNvSpPr txBox="1"/>
-          <p:nvPr/>
-        </p:nvSpPr>
-        <p:spPr>
-          <a:xfrm>
-            <a:off x="822960" y="1051560"/>
-            <a:ext cx="10058400" cy="594360"/>
-          </a:xfrm>
-          <a:prstGeom prst="rect">
-            <a:avLst/>
-          </a:prstGeom>
-          <a:noFill/>
-        </p:spPr>
-        <p:txBody>
-          <a:bodyPr wrap="square" lIns="0" tIns="0" rIns="0" bIns="0" anchor="t">
-            <a:spAutoFit/>
-          </a:bodyPr>
-          <a:lstStyle/>
-          <a:p>
-            <a:pPr algn="l">
-              <a:lnSpc>
-                <a:spcPct val="100000"/>
-              </a:lnSpc>
-              <a:spcAft>
-                <a:spcPts val="0"/>
-              </a:spcAft>
-            </a:pPr>
-            <a:r>
-              <a:rPr sz="2800" b="1" i="0">
-                <a:solidFill>
-                  <a:srgbClr val="181D2B"/>
-                </a:solidFill>
-                <a:latin typeface="Helvetica Neue"/>
-              </a:rPr>
-              <a:t>Si vous voulez creuser</a:t>
-            </a:r>
-          </a:p>
-        </p:txBody>
-      </p:sp>
-      <p:sp>
-        <p:nvSpPr>
-          <p:cNvPr id="5" name="TextBox 4"/>
-          <p:cNvSpPr txBox="1"/>
-          <p:nvPr/>
-        </p:nvSpPr>
-        <p:spPr>
-          <a:xfrm>
-            <a:off x="822960" y="1664208"/>
-            <a:ext cx="10058400" cy="365760"/>
-          </a:xfrm>
-          <a:prstGeom prst="rect">
-            <a:avLst/>
-          </a:prstGeom>
-          <a:noFill/>
-        </p:spPr>
-        <p:txBody>
-          <a:bodyPr wrap="square" lIns="0" tIns="0" rIns="0" bIns="0" anchor="t">
-            <a:spAutoFit/>
-          </a:bodyPr>
-          <a:lstStyle/>
-          <a:p>
-            <a:pPr algn="l">
-              <a:lnSpc>
-                <a:spcPct val="100000"/>
-              </a:lnSpc>
-              <a:spcAft>
-                <a:spcPts val="0"/>
-              </a:spcAft>
-            </a:pPr>
-            <a:r>
-              <a:rPr sz="1200" b="0" i="1">
-                <a:solidFill>
-                  <a:srgbClr val="5C6272"/>
-                </a:solidFill>
-                <a:latin typeface="Helvetica Neue"/>
-              </a:rPr>
-              <a:t>Code et scripts, en clair. Le reste (mes doutes existentiels sur plusMonths()) reste entre moi et mon terminal.</a:t>
-            </a:r>
-          </a:p>
-        </p:txBody>
-      </p:sp>
-      <p:sp>
-        <p:nvSpPr>
-          <p:cNvPr id="6" name="Oval 5"/>
-          <p:cNvSpPr/>
-          <p:nvPr/>
-        </p:nvSpPr>
-        <p:spPr>
-          <a:xfrm>
-            <a:off x="822960" y="2432304"/>
-            <a:ext cx="146304" cy="146304"/>
-          </a:xfrm>
-          <a:prstGeom prst="ellipse">
-            <a:avLst/>
-          </a:prstGeom>
-          <a:solidFill>
-            <a:srgbClr val="F0A72E"/>
-          </a:solidFill>
-          <a:ln>
-            <a:noFill/>
-          </a:ln>
-          <a:effectLst/>
-        </p:spPr>
-        <p:style>
-          <a:lnRef idx="1">
-            <a:schemeClr val="accent1"/>
-          </a:lnRef>
-          <a:fillRef idx="3">
-            <a:schemeClr val="accent1"/>
-          </a:fillRef>
-          <a:effectRef idx="2">
-            <a:schemeClr val="accent1"/>
-          </a:effectRef>
-          <a:fontRef idx="minor">
-            <a:schemeClr val="lt1"/>
-          </a:fontRef>
-        </p:style>
-        <p:txBody>
-          <a:bodyPr rtlCol="0" anchor="ctr"/>
-          <a:lstStyle/>
-          <a:p>
-            <a:pPr algn="ctr"/>
-            <a:endParaRPr/>
-          </a:p>
-        </p:txBody>
-      </p:sp>
-      <p:sp>
-        <p:nvSpPr>
-          <p:cNvPr id="7" name="TextBox 6"/>
-          <p:cNvSpPr txBox="1"/>
-          <p:nvPr/>
-        </p:nvSpPr>
-        <p:spPr>
-          <a:xfrm>
-            <a:off x="1188720" y="2377440"/>
-            <a:ext cx="9692640" cy="365760"/>
-          </a:xfrm>
-          <a:prstGeom prst="rect">
-            <a:avLst/>
-          </a:prstGeom>
-          <a:noFill/>
-        </p:spPr>
-        <p:txBody>
-          <a:bodyPr wrap="square" lIns="0" tIns="0" rIns="0" bIns="0" anchor="t">
-            <a:spAutoFit/>
-          </a:bodyPr>
-          <a:lstStyle/>
-          <a:p>
-            <a:pPr algn="l">
-              <a:lnSpc>
-                <a:spcPct val="100000"/>
-              </a:lnSpc>
-              <a:spcAft>
-                <a:spcPts val="0"/>
-              </a:spcAft>
-            </a:pPr>
-            <a:r>
-              <a:rPr sz="1600" b="1" i="0">
-                <a:solidFill>
-                  <a:srgbClr val="181D2B"/>
-                </a:solidFill>
-                <a:latin typeface="Helvetica Neue"/>
-              </a:rPr>
-              <a:t>Le dépôt de ce projet</a:t>
-            </a:r>
-          </a:p>
-        </p:txBody>
-      </p:sp>
-      <p:sp>
-        <p:nvSpPr>
-          <p:cNvPr id="8" name="TextBox 7"/>
-          <p:cNvSpPr txBox="1"/>
-          <p:nvPr/>
-        </p:nvSpPr>
-        <p:spPr>
-          <a:xfrm>
-            <a:off x="1188720" y="2724912"/>
-            <a:ext cx="9692640" cy="365760"/>
-          </a:xfrm>
-          <a:prstGeom prst="rect">
-            <a:avLst/>
-          </a:prstGeom>
-          <a:noFill/>
-        </p:spPr>
-        <p:txBody>
-          <a:bodyPr wrap="square" lIns="0" tIns="0" rIns="0" bIns="0" anchor="t">
-            <a:spAutoFit/>
-          </a:bodyPr>
-          <a:lstStyle/>
-          <a:p>
-            <a:pPr algn="l">
-              <a:lnSpc>
-                <a:spcPct val="100000"/>
-              </a:lnSpc>
-              <a:spcAft>
-                <a:spcPts val="0"/>
-              </a:spcAft>
-            </a:pPr>
-            <a:r>
-              <a:rPr sz="1250" b="0" i="0">
-                <a:solidFill>
-                  <a:srgbClr val="181D2B"/>
-                </a:solidFill>
-                <a:latin typeface="Menlo"/>
-              </a:rPr>
-              <a:t>github.com/sidevconcept/couverture-junit-cucumber-jacoco</a:t>
-            </a:r>
-          </a:p>
-        </p:txBody>
-      </p:sp>
-      <p:sp>
-        <p:nvSpPr>
-          <p:cNvPr id="9" name="Oval 8"/>
-          <p:cNvSpPr/>
-          <p:nvPr/>
-        </p:nvSpPr>
-        <p:spPr>
-          <a:xfrm>
-            <a:off x="822960" y="3328416"/>
-            <a:ext cx="146304" cy="146304"/>
-          </a:xfrm>
-          <a:prstGeom prst="ellipse">
-            <a:avLst/>
-          </a:prstGeom>
-          <a:solidFill>
-            <a:srgbClr val="2EB0A0"/>
-          </a:solidFill>
-          <a:ln>
-            <a:noFill/>
-          </a:ln>
-          <a:effectLst/>
-        </p:spPr>
-        <p:style>
-          <a:lnRef idx="1">
-            <a:schemeClr val="accent1"/>
-          </a:lnRef>
-          <a:fillRef idx="3">
-            <a:schemeClr val="accent1"/>
-          </a:fillRef>
-          <a:effectRef idx="2">
-            <a:schemeClr val="accent1"/>
-          </a:effectRef>
-          <a:fontRef idx="minor">
-            <a:schemeClr val="lt1"/>
-          </a:fontRef>
-        </p:style>
-        <p:txBody>
-          <a:bodyPr rtlCol="0" anchor="ctr"/>
-          <a:lstStyle/>
-          <a:p>
-            <a:pPr algn="ctr"/>
-            <a:endParaRPr/>
-          </a:p>
-        </p:txBody>
-      </p:sp>
-      <p:sp>
-        <p:nvSpPr>
-          <p:cNvPr id="10" name="TextBox 9"/>
-          <p:cNvSpPr txBox="1"/>
-          <p:nvPr/>
-        </p:nvSpPr>
-        <p:spPr>
-          <a:xfrm>
-            <a:off x="1188720" y="3273552"/>
-            <a:ext cx="9692640" cy="365760"/>
-          </a:xfrm>
-          <a:prstGeom prst="rect">
-            <a:avLst/>
-          </a:prstGeom>
-          <a:noFill/>
-        </p:spPr>
-        <p:txBody>
-          <a:bodyPr wrap="square" lIns="0" tIns="0" rIns="0" bIns="0" anchor="t">
-            <a:spAutoFit/>
-          </a:bodyPr>
-          <a:lstStyle/>
-          <a:p>
-            <a:pPr algn="l">
-              <a:lnSpc>
-                <a:spcPct val="100000"/>
-              </a:lnSpc>
-              <a:spcAft>
-                <a:spcPts val="0"/>
-              </a:spcAft>
-            </a:pPr>
-            <a:r>
-              <a:rPr sz="1600" b="1" i="0">
-                <a:solidFill>
-                  <a:srgbClr val="181D2B"/>
-                </a:solidFill>
-                <a:latin typeface="Helvetica Neue"/>
-              </a:rPr>
-              <a:t>Guide Quarkus + Jacoco</a:t>
-            </a:r>
-          </a:p>
-        </p:txBody>
-      </p:sp>
-      <p:sp>
-        <p:nvSpPr>
-          <p:cNvPr id="11" name="TextBox 10"/>
-          <p:cNvSpPr txBox="1"/>
-          <p:nvPr/>
-        </p:nvSpPr>
-        <p:spPr>
-          <a:xfrm>
-            <a:off x="1188720" y="3621024"/>
-            <a:ext cx="9692640" cy="365760"/>
-          </a:xfrm>
-          <a:prstGeom prst="rect">
-            <a:avLst/>
-          </a:prstGeom>
-          <a:noFill/>
-        </p:spPr>
-        <p:txBody>
-          <a:bodyPr wrap="square" lIns="0" tIns="0" rIns="0" bIns="0" anchor="t">
-            <a:spAutoFit/>
-          </a:bodyPr>
-          <a:lstStyle/>
-          <a:p>
-            <a:pPr algn="l">
-              <a:lnSpc>
-                <a:spcPct val="100000"/>
-              </a:lnSpc>
-              <a:spcAft>
-                <a:spcPts val="0"/>
-              </a:spcAft>
-            </a:pPr>
-            <a:r>
-              <a:rPr sz="1250" b="0" i="0">
-                <a:solidFill>
-                  <a:srgbClr val="181D2B"/>
-                </a:solidFill>
-                <a:latin typeface="Menlo"/>
-              </a:rPr>
-              <a:t>quarkus.io/guides/tests-with-coverage</a:t>
-            </a:r>
-          </a:p>
-        </p:txBody>
-      </p:sp>
-      <p:sp>
-        <p:nvSpPr>
-          <p:cNvPr id="12" name="Oval 11"/>
-          <p:cNvSpPr/>
-          <p:nvPr/>
-        </p:nvSpPr>
-        <p:spPr>
-          <a:xfrm>
-            <a:off x="822960" y="4224528"/>
-            <a:ext cx="146304" cy="146304"/>
-          </a:xfrm>
-          <a:prstGeom prst="ellipse">
-            <a:avLst/>
-          </a:prstGeom>
-          <a:solidFill>
-            <a:srgbClr val="9CC24C"/>
-          </a:solidFill>
-          <a:ln>
-            <a:noFill/>
-          </a:ln>
-          <a:effectLst/>
-        </p:spPr>
-        <p:style>
-          <a:lnRef idx="1">
-            <a:schemeClr val="accent1"/>
-          </a:lnRef>
-          <a:fillRef idx="3">
-            <a:schemeClr val="accent1"/>
-          </a:fillRef>
-          <a:effectRef idx="2">
-            <a:schemeClr val="accent1"/>
-          </a:effectRef>
-          <a:fontRef idx="minor">
-            <a:schemeClr val="lt1"/>
-          </a:fontRef>
-        </p:style>
-        <p:txBody>
-          <a:bodyPr rtlCol="0" anchor="ctr"/>
-          <a:lstStyle/>
-          <a:p>
-            <a:pPr algn="ctr"/>
-            <a:endParaRPr/>
-          </a:p>
-        </p:txBody>
-      </p:sp>
-      <p:sp>
-        <p:nvSpPr>
-          <p:cNvPr id="13" name="TextBox 12"/>
-          <p:cNvSpPr txBox="1"/>
-          <p:nvPr/>
-        </p:nvSpPr>
-        <p:spPr>
-          <a:xfrm>
-            <a:off x="1188720" y="4169664"/>
-            <a:ext cx="9692640" cy="365760"/>
-          </a:xfrm>
-          <a:prstGeom prst="rect">
-            <a:avLst/>
-          </a:prstGeom>
-          <a:noFill/>
-        </p:spPr>
-        <p:txBody>
-          <a:bodyPr wrap="square" lIns="0" tIns="0" rIns="0" bIns="0" anchor="t">
-            <a:spAutoFit/>
-          </a:bodyPr>
-          <a:lstStyle/>
-          <a:p>
-            <a:pPr algn="l">
-              <a:lnSpc>
-                <a:spcPct val="100000"/>
-              </a:lnSpc>
-              <a:spcAft>
-                <a:spcPts val="0"/>
-              </a:spcAft>
-            </a:pPr>
-            <a:r>
-              <a:rPr sz="1600" b="1" i="0">
-                <a:solidFill>
-                  <a:srgbClr val="181D2B"/>
-                </a:solidFill>
-                <a:latin typeface="Helvetica Neue"/>
-              </a:rPr>
-              <a:t>Extension Cucumber pour Quarkus</a:t>
-            </a:r>
-          </a:p>
-        </p:txBody>
-      </p:sp>
-      <p:sp>
-        <p:nvSpPr>
-          <p:cNvPr id="14" name="TextBox 13"/>
-          <p:cNvSpPr txBox="1"/>
-          <p:nvPr/>
-        </p:nvSpPr>
-        <p:spPr>
-          <a:xfrm>
-            <a:off x="1188720" y="4517136"/>
-            <a:ext cx="9692640" cy="365760"/>
-          </a:xfrm>
-          <a:prstGeom prst="rect">
-            <a:avLst/>
-          </a:prstGeom>
-          <a:noFill/>
-        </p:spPr>
-        <p:txBody>
-          <a:bodyPr wrap="square" lIns="0" tIns="0" rIns="0" bIns="0" anchor="t">
-            <a:spAutoFit/>
-          </a:bodyPr>
-          <a:lstStyle/>
-          <a:p>
-            <a:pPr algn="l">
-              <a:lnSpc>
-                <a:spcPct val="100000"/>
-              </a:lnSpc>
-              <a:spcAft>
-                <a:spcPts val="0"/>
-              </a:spcAft>
-            </a:pPr>
-            <a:r>
-              <a:rPr sz="1250" b="0" i="0">
-                <a:solidFill>
-                  <a:srgbClr val="181D2B"/>
-                </a:solidFill>
-                <a:latin typeface="Menlo"/>
-              </a:rPr>
-              <a:t>docs.quarkiverse.io/quarkus-cucumber</a:t>
-            </a:r>
-          </a:p>
-        </p:txBody>
-      </p:sp>
-      <p:sp>
-        <p:nvSpPr>
-          <p:cNvPr id="15" name="Oval 14"/>
-          <p:cNvSpPr/>
-          <p:nvPr/>
-        </p:nvSpPr>
-        <p:spPr>
-          <a:xfrm>
-            <a:off x="822960" y="5120640"/>
-            <a:ext cx="146304" cy="146304"/>
-          </a:xfrm>
-          <a:prstGeom prst="ellipse">
-            <a:avLst/>
-          </a:prstGeom>
-          <a:solidFill>
-            <a:srgbClr val="F05A46"/>
-          </a:solidFill>
-          <a:ln>
-            <a:noFill/>
-          </a:ln>
-          <a:effectLst/>
-        </p:spPr>
-        <p:style>
-          <a:lnRef idx="1">
-            <a:schemeClr val="accent1"/>
-          </a:lnRef>
-          <a:fillRef idx="3">
-            <a:schemeClr val="accent1"/>
-          </a:fillRef>
-          <a:effectRef idx="2">
-            <a:schemeClr val="accent1"/>
-          </a:effectRef>
-          <a:fontRef idx="minor">
-            <a:schemeClr val="lt1"/>
-          </a:fontRef>
-        </p:style>
-        <p:txBody>
-          <a:bodyPr rtlCol="0" anchor="ctr"/>
-          <a:lstStyle/>
-          <a:p>
-            <a:pPr algn="ctr"/>
-            <a:endParaRPr/>
-          </a:p>
-        </p:txBody>
-      </p:sp>
-      <p:sp>
-        <p:nvSpPr>
-          <p:cNvPr id="16" name="TextBox 15"/>
-          <p:cNvSpPr txBox="1"/>
-          <p:nvPr/>
-        </p:nvSpPr>
-        <p:spPr>
-          <a:xfrm>
-            <a:off x="1188720" y="5065776"/>
-            <a:ext cx="9692640" cy="365760"/>
-          </a:xfrm>
-          <a:prstGeom prst="rect">
-            <a:avLst/>
-          </a:prstGeom>
-          <a:noFill/>
-        </p:spPr>
-        <p:txBody>
-          <a:bodyPr wrap="square" lIns="0" tIns="0" rIns="0" bIns="0" anchor="t">
-            <a:spAutoFit/>
-          </a:bodyPr>
-          <a:lstStyle/>
-          <a:p>
-            <a:pPr algn="l">
-              <a:lnSpc>
-                <a:spcPct val="100000"/>
-              </a:lnSpc>
-              <a:spcAft>
-                <a:spcPts val="0"/>
-              </a:spcAft>
-            </a:pPr>
-            <a:r>
-              <a:rPr sz="1600" b="1" i="0">
-                <a:solidFill>
-                  <a:srgbClr val="181D2B"/>
-                </a:solidFill>
-                <a:latin typeface="Helvetica Neue"/>
-              </a:rPr>
-              <a:t>SonarQube Community</a:t>
-            </a:r>
-          </a:p>
-        </p:txBody>
-      </p:sp>
-      <p:sp>
-        <p:nvSpPr>
-          <p:cNvPr id="17" name="TextBox 16"/>
-          <p:cNvSpPr txBox="1"/>
-          <p:nvPr/>
-        </p:nvSpPr>
-        <p:spPr>
-          <a:xfrm>
-            <a:off x="1188720" y="5413248"/>
-            <a:ext cx="9692640" cy="365760"/>
-          </a:xfrm>
-          <a:prstGeom prst="rect">
-            <a:avLst/>
-          </a:prstGeom>
-          <a:noFill/>
-        </p:spPr>
-        <p:txBody>
-          <a:bodyPr wrap="square" lIns="0" tIns="0" rIns="0" bIns="0" anchor="t">
-            <a:spAutoFit/>
-          </a:bodyPr>
-          <a:lstStyle/>
-          <a:p>
-            <a:pPr algn="l">
-              <a:lnSpc>
-                <a:spcPct val="100000"/>
-              </a:lnSpc>
-              <a:spcAft>
-                <a:spcPts val="0"/>
-              </a:spcAft>
-            </a:pPr>
-            <a:r>
-              <a:rPr sz="1250" b="0" i="0">
-                <a:solidFill>
-                  <a:srgbClr val="181D2B"/>
-                </a:solidFill>
-                <a:latin typeface="Menlo"/>
-              </a:rPr>
-              <a:t>docs.sonarsource.com</a:t>
-            </a:r>
-          </a:p>
-        </p:txBody>
-      </p:sp>
-      <p:sp>
-        <p:nvSpPr>
-          <p:cNvPr id="18" name="Rounded Rectangle 17"/>
-          <p:cNvSpPr/>
-          <p:nvPr/>
-        </p:nvSpPr>
-        <p:spPr>
-          <a:xfrm>
-            <a:off x="11201400" y="6419088"/>
-            <a:ext cx="713232" cy="329184"/>
-          </a:xfrm>
-          <a:prstGeom prst="roundRect">
-            <a:avLst/>
-          </a:prstGeom>
-          <a:solidFill>
-            <a:srgbClr val="F1E9D5"/>
-          </a:solidFill>
-          <a:ln>
-            <a:noFill/>
-          </a:ln>
-          <a:effectLst/>
-        </p:spPr>
-        <p:style>
-          <a:lnRef idx="1">
-            <a:schemeClr val="accent1"/>
-          </a:lnRef>
-          <a:fillRef idx="3">
-            <a:schemeClr val="accent1"/>
-          </a:fillRef>
-          <a:effectRef idx="2">
-            <a:schemeClr val="accent1"/>
-          </a:effectRef>
-          <a:fontRef idx="minor">
-            <a:schemeClr val="lt1"/>
-          </a:fontRef>
-        </p:style>
-        <p:txBody>
-          <a:bodyPr rtlCol="0" anchor="ctr"/>
-          <a:lstStyle/>
-          <a:p>
-            <a:pPr algn="ctr"/>
-            <a:r>
-              <a:rPr sz="1000" b="1">
-                <a:solidFill>
-                  <a:srgbClr val="5C6272"/>
-                </a:solidFill>
-                <a:latin typeface="Helvetica Neue"/>
-              </a:rPr>
-              <a:t>28/29</a:t>
-            </a:r>
-          </a:p>
-        </p:txBody>
-      </p:sp>
-      <p:sp>
-        <p:nvSpPr>
-          <p:cNvPr id="19" name="TextBox 18"/>
-          <p:cNvSpPr txBox="1"/>
-          <p:nvPr/>
-        </p:nvSpPr>
-        <p:spPr>
-          <a:xfrm>
-            <a:off x="502920" y="6492240"/>
-            <a:ext cx="5943600" cy="274320"/>
-          </a:xfrm>
-          <a:prstGeom prst="rect">
-            <a:avLst/>
-          </a:prstGeom>
-          <a:noFill/>
-        </p:spPr>
-        <p:txBody>
-          <a:bodyPr wrap="square" lIns="0" tIns="0" rIns="0" bIns="0" anchor="t">
-            <a:spAutoFit/>
-          </a:bodyPr>
-          <a:lstStyle/>
-          <a:p>
-            <a:pPr algn="l">
-              <a:lnSpc>
-                <a:spcPct val="100000"/>
-              </a:lnSpc>
-              <a:spcAft>
-                <a:spcPts val="0"/>
-              </a:spcAft>
-            </a:pPr>
-            <a:r>
-              <a:rPr sz="800" b="0" i="0">
-                <a:solidFill>
-                  <a:srgbClr val="5C6272"/>
-                </a:solidFill>
-                <a:latin typeface="Helvetica Neue"/>
-              </a:rPr>
-              <a:t>COUVERTURE DYNAMITE — QUARKUS · JUNIT · CUCUMBER · JACOCO</a:t>
-            </a:r>
-          </a:p>
-        </p:txBody>
-      </p:sp>
-    </p:spTree>
-  </p:cSld>
-  <p:clrMapOvr>
-    <a:masterClrMapping/>
-  </p:clrMapOvr>
-  <p:transition>
-    <p:fade/>
-  </p:transition>
-</p:sld>
-</file>
-
-<file path=ppt/slides/slide29.xml><?xml version="1.0" encoding="utf-8"?>
 <p:sld xmlns:a="http://schemas.openxmlformats.org/drawingml/2006/main" xmlns:r="http://schemas.openxmlformats.org/officeDocument/2006/relationships" xmlns:p="http://schemas.openxmlformats.org/presentationml/2006/main">
   <p:cSld>
     <p:bg>
